--- a/LabBook_10.pptx
+++ b/LabBook_10.pptx
@@ -5,20 +5,23 @@
     <p:sldMasterId id="2147483648" r:id="rId1"/>
   </p:sldMasterIdLst>
   <p:notesMasterIdLst>
-    <p:notesMasterId r:id="rId10"/>
+    <p:notesMasterId r:id="rId13"/>
   </p:notesMasterIdLst>
   <p:handoutMasterIdLst>
-    <p:handoutMasterId r:id="rId11"/>
+    <p:handoutMasterId r:id="rId14"/>
   </p:handoutMasterIdLst>
   <p:sldIdLst>
     <p:sldId id="256" r:id="rId2"/>
     <p:sldId id="295" r:id="rId3"/>
     <p:sldId id="290" r:id="rId4"/>
-    <p:sldId id="291" r:id="rId5"/>
-    <p:sldId id="292" r:id="rId6"/>
-    <p:sldId id="297" r:id="rId7"/>
-    <p:sldId id="293" r:id="rId8"/>
-    <p:sldId id="288" r:id="rId9"/>
+    <p:sldId id="298" r:id="rId5"/>
+    <p:sldId id="299" r:id="rId6"/>
+    <p:sldId id="300" r:id="rId7"/>
+    <p:sldId id="291" r:id="rId8"/>
+    <p:sldId id="292" r:id="rId9"/>
+    <p:sldId id="297" r:id="rId10"/>
+    <p:sldId id="293" r:id="rId11"/>
+    <p:sldId id="288" r:id="rId12"/>
   </p:sldIdLst>
   <p:sldSz cx="12192000" cy="6858000"/>
   <p:notesSz cx="12192000" cy="6858000"/>
@@ -139,6 +142,38 @@
 </p:presentation>
 </file>
 
+<file path=ppt/authors.xml><?xml version="1.0" encoding="utf-8"?>
+<p188:authorLst xmlns:a="http://schemas.openxmlformats.org/drawingml/2006/main" xmlns:r="http://schemas.openxmlformats.org/officeDocument/2006/relationships" xmlns:p188="http://schemas.microsoft.com/office/powerpoint/2018/8/main">
+  <p188:author id="{D74DEC91-EE70-822B-0F23-319E662BA817}" name="Javier Llacer Noha" initials="JL" userId="S::JLLANOH@upv.edu.es::201d6fc8-240d-41eb-b5e8-7df2b4e8cdc9" providerId="AD"/>
+</p188:authorLst>
+</file>
+
+<file path=ppt/comments/modernComment_123_DD460EA3.xml><?xml version="1.0" encoding="utf-8"?>
+<p188:cmLst xmlns:a="http://schemas.openxmlformats.org/drawingml/2006/main" xmlns:r="http://schemas.openxmlformats.org/officeDocument/2006/relationships" xmlns:p188="http://schemas.microsoft.com/office/powerpoint/2018/8/main">
+  <p188:cm id="{94852C2D-86BB-4E1D-A8D0-A0DBC429D069}" authorId="{D74DEC91-EE70-822B-0F23-319E662BA817}" created="2026-03-02T17:57:21.107">
+    <ac:txMkLst xmlns:ac="http://schemas.microsoft.com/office/drawing/2013/main/command">
+      <pc:docMk xmlns:pc="http://schemas.microsoft.com/office/powerpoint/2013/main/command"/>
+      <pc:sldMk xmlns:pc="http://schemas.microsoft.com/office/powerpoint/2013/main/command" cId="3712356003" sldId="291"/>
+      <ac:spMk id="2" creationId="{CA5F0FDF-2A95-453B-4ECA-AEB637FF2694}"/>
+      <ac:txMk cp="551" len="19">
+        <ac:context len="597" hash="3347251781"/>
+      </ac:txMk>
+    </ac:txMkLst>
+    <p188:pos x="1541092" y="1159933"/>
+    <p188:txBody>
+      <a:bodyPr/>
+      <a:lstStyle/>
+      <a:p>
+        <a:r>
+          <a:rPr lang="es-ES"/>
+          <a:t>Creemos que está bien pero no lo tenemos claro.</a:t>
+        </a:r>
+      </a:p>
+    </p188:txBody>
+  </p188:cm>
+</p188:cmLst>
+</file>
+
 <file path=ppt/handoutMasters/handoutMaster1.xml><?xml version="1.0" encoding="utf-8"?>
 <p:handoutMaster xmlns:a="http://schemas.openxmlformats.org/drawingml/2006/main" xmlns:r="http://schemas.openxmlformats.org/officeDocument/2006/relationships" xmlns:p="http://schemas.openxmlformats.org/presentationml/2006/main">
   <p:cSld>
@@ -233,7 +268,7 @@
           <a:p>
             <a:fld id="{8438F8DC-35B0-48E6-A86E-42F1F08DD00F}" type="datetimeFigureOut">
               <a:rPr lang="es-ES" smtClean="0"/>
-              <a:t>17/02/2026</a:t>
+              <a:t>02/03/2026</a:t>
             </a:fld>
             <a:endParaRPr lang="es-ES"/>
           </a:p>
@@ -410,7 +445,7 @@
           <a:p>
             <a:fld id="{FACBDC12-F39B-4B97-8F4D-6734F9D366FF}" type="datetimeFigureOut">
               <a:rPr lang="es-ES" smtClean="0"/>
-              <a:t>17/02/2026</a:t>
+              <a:t>02/03/2026</a:t>
             </a:fld>
             <a:endParaRPr lang="es-ES"/>
           </a:p>
@@ -769,6 +804,330 @@
         <p:cNvPr id="1" name="">
           <a:extLst>
             <a:ext uri="{FF2B5EF4-FFF2-40B4-BE49-F238E27FC236}">
+              <a16:creationId xmlns:a16="http://schemas.microsoft.com/office/drawing/2014/main" id="{D0A9C5B3-0915-7A78-7FAC-C15D96CE1654}"/>
+            </a:ext>
+          </a:extLst>
+        </p:cNvPr>
+        <p:cNvGrpSpPr/>
+        <p:nvPr/>
+      </p:nvGrpSpPr>
+      <p:grpSpPr>
+        <a:xfrm>
+          <a:off x="0" y="0"/>
+          <a:ext cx="0" cy="0"/>
+          <a:chOff x="0" y="0"/>
+          <a:chExt cx="0" cy="0"/>
+        </a:xfrm>
+      </p:grpSpPr>
+      <p:sp>
+        <p:nvSpPr>
+          <p:cNvPr id="2" name="Marcador de imagen de diapositiva 1">
+            <a:extLst>
+              <a:ext uri="{FF2B5EF4-FFF2-40B4-BE49-F238E27FC236}">
+                <a16:creationId xmlns:a16="http://schemas.microsoft.com/office/drawing/2014/main" id="{CCDAD810-8C16-5834-5A90-698B9E87F8E4}"/>
+              </a:ext>
+            </a:extLst>
+          </p:cNvPr>
+          <p:cNvSpPr>
+            <a:spLocks noGrp="1" noRot="1" noChangeAspect="1"/>
+          </p:cNvSpPr>
+          <p:nvPr>
+            <p:ph type="sldImg"/>
+          </p:nvPr>
+        </p:nvSpPr>
+        <p:spPr/>
+      </p:sp>
+      <p:sp>
+        <p:nvSpPr>
+          <p:cNvPr id="3" name="Marcador de notas 2">
+            <a:extLst>
+              <a:ext uri="{FF2B5EF4-FFF2-40B4-BE49-F238E27FC236}">
+                <a16:creationId xmlns:a16="http://schemas.microsoft.com/office/drawing/2014/main" id="{861CC14A-BDC0-B607-9DF0-6DD39DE6952F}"/>
+              </a:ext>
+            </a:extLst>
+          </p:cNvPr>
+          <p:cNvSpPr>
+            <a:spLocks noGrp="1"/>
+          </p:cNvSpPr>
+          <p:nvPr>
+            <p:ph type="body" idx="1"/>
+          </p:nvPr>
+        </p:nvSpPr>
+        <p:spPr/>
+        <p:txBody>
+          <a:bodyPr/>
+          <a:lstStyle/>
+          <a:p>
+            <a:endParaRPr lang="es-ES" dirty="0"/>
+          </a:p>
+        </p:txBody>
+      </p:sp>
+      <p:sp>
+        <p:nvSpPr>
+          <p:cNvPr id="4" name="Marcador de número de diapositiva 3">
+            <a:extLst>
+              <a:ext uri="{FF2B5EF4-FFF2-40B4-BE49-F238E27FC236}">
+                <a16:creationId xmlns:a16="http://schemas.microsoft.com/office/drawing/2014/main" id="{D972BBC2-8BCA-F6E7-CE66-D116438B1EFC}"/>
+              </a:ext>
+            </a:extLst>
+          </p:cNvPr>
+          <p:cNvSpPr>
+            <a:spLocks noGrp="1"/>
+          </p:cNvSpPr>
+          <p:nvPr>
+            <p:ph type="sldNum" sz="quarter" idx="5"/>
+          </p:nvPr>
+        </p:nvSpPr>
+        <p:spPr/>
+        <p:txBody>
+          <a:bodyPr/>
+          <a:lstStyle/>
+          <a:p>
+            <a:fld id="{676223B9-C868-4436-87D9-1A3152E1157A}" type="slidenum">
+              <a:rPr lang="es-ES" smtClean="0"/>
+              <a:t>4</a:t>
+            </a:fld>
+            <a:endParaRPr lang="es-ES"/>
+          </a:p>
+        </p:txBody>
+      </p:sp>
+    </p:spTree>
+    <p:extLst>
+      <p:ext uri="{BB962C8B-B14F-4D97-AF65-F5344CB8AC3E}">
+        <p14:creationId xmlns:p14="http://schemas.microsoft.com/office/powerpoint/2010/main" val="3614240832"/>
+      </p:ext>
+    </p:extLst>
+  </p:cSld>
+  <p:clrMapOvr>
+    <a:masterClrMapping/>
+  </p:clrMapOvr>
+</p:notes>
+</file>
+
+<file path=ppt/notesSlides/notesSlide3.xml><?xml version="1.0" encoding="utf-8"?>
+<p:notes xmlns:a="http://schemas.openxmlformats.org/drawingml/2006/main" xmlns:r="http://schemas.openxmlformats.org/officeDocument/2006/relationships" xmlns:p="http://schemas.openxmlformats.org/presentationml/2006/main">
+  <p:cSld>
+    <p:spTree>
+      <p:nvGrpSpPr>
+        <p:cNvPr id="1" name="">
+          <a:extLst>
+            <a:ext uri="{FF2B5EF4-FFF2-40B4-BE49-F238E27FC236}">
+              <a16:creationId xmlns:a16="http://schemas.microsoft.com/office/drawing/2014/main" id="{AD92D980-1208-E4A8-CCA6-A3A30DB95215}"/>
+            </a:ext>
+          </a:extLst>
+        </p:cNvPr>
+        <p:cNvGrpSpPr/>
+        <p:nvPr/>
+      </p:nvGrpSpPr>
+      <p:grpSpPr>
+        <a:xfrm>
+          <a:off x="0" y="0"/>
+          <a:ext cx="0" cy="0"/>
+          <a:chOff x="0" y="0"/>
+          <a:chExt cx="0" cy="0"/>
+        </a:xfrm>
+      </p:grpSpPr>
+      <p:sp>
+        <p:nvSpPr>
+          <p:cNvPr id="2" name="Marcador de imagen de diapositiva 1">
+            <a:extLst>
+              <a:ext uri="{FF2B5EF4-FFF2-40B4-BE49-F238E27FC236}">
+                <a16:creationId xmlns:a16="http://schemas.microsoft.com/office/drawing/2014/main" id="{99B70B63-DB26-3C65-D2DC-37832B149D5D}"/>
+              </a:ext>
+            </a:extLst>
+          </p:cNvPr>
+          <p:cNvSpPr>
+            <a:spLocks noGrp="1" noRot="1" noChangeAspect="1"/>
+          </p:cNvSpPr>
+          <p:nvPr>
+            <p:ph type="sldImg"/>
+          </p:nvPr>
+        </p:nvSpPr>
+        <p:spPr/>
+      </p:sp>
+      <p:sp>
+        <p:nvSpPr>
+          <p:cNvPr id="3" name="Marcador de notas 2">
+            <a:extLst>
+              <a:ext uri="{FF2B5EF4-FFF2-40B4-BE49-F238E27FC236}">
+                <a16:creationId xmlns:a16="http://schemas.microsoft.com/office/drawing/2014/main" id="{05344385-6CA9-AAE1-82C4-4CA008C44DAF}"/>
+              </a:ext>
+            </a:extLst>
+          </p:cNvPr>
+          <p:cNvSpPr>
+            <a:spLocks noGrp="1"/>
+          </p:cNvSpPr>
+          <p:nvPr>
+            <p:ph type="body" idx="1"/>
+          </p:nvPr>
+        </p:nvSpPr>
+        <p:spPr/>
+        <p:txBody>
+          <a:bodyPr/>
+          <a:lstStyle/>
+          <a:p>
+            <a:endParaRPr lang="es-ES" dirty="0"/>
+          </a:p>
+        </p:txBody>
+      </p:sp>
+      <p:sp>
+        <p:nvSpPr>
+          <p:cNvPr id="4" name="Marcador de número de diapositiva 3">
+            <a:extLst>
+              <a:ext uri="{FF2B5EF4-FFF2-40B4-BE49-F238E27FC236}">
+                <a16:creationId xmlns:a16="http://schemas.microsoft.com/office/drawing/2014/main" id="{BF4093E9-54CF-5F22-CAFB-3FA67D4846B4}"/>
+              </a:ext>
+            </a:extLst>
+          </p:cNvPr>
+          <p:cNvSpPr>
+            <a:spLocks noGrp="1"/>
+          </p:cNvSpPr>
+          <p:nvPr>
+            <p:ph type="sldNum" sz="quarter" idx="5"/>
+          </p:nvPr>
+        </p:nvSpPr>
+        <p:spPr/>
+        <p:txBody>
+          <a:bodyPr/>
+          <a:lstStyle/>
+          <a:p>
+            <a:fld id="{676223B9-C868-4436-87D9-1A3152E1157A}" type="slidenum">
+              <a:rPr lang="es-ES" smtClean="0"/>
+              <a:t>5</a:t>
+            </a:fld>
+            <a:endParaRPr lang="es-ES"/>
+          </a:p>
+        </p:txBody>
+      </p:sp>
+    </p:spTree>
+    <p:extLst>
+      <p:ext uri="{BB962C8B-B14F-4D97-AF65-F5344CB8AC3E}">
+        <p14:creationId xmlns:p14="http://schemas.microsoft.com/office/powerpoint/2010/main" val="2822486017"/>
+      </p:ext>
+    </p:extLst>
+  </p:cSld>
+  <p:clrMapOvr>
+    <a:masterClrMapping/>
+  </p:clrMapOvr>
+</p:notes>
+</file>
+
+<file path=ppt/notesSlides/notesSlide4.xml><?xml version="1.0" encoding="utf-8"?>
+<p:notes xmlns:a="http://schemas.openxmlformats.org/drawingml/2006/main" xmlns:r="http://schemas.openxmlformats.org/officeDocument/2006/relationships" xmlns:p="http://schemas.openxmlformats.org/presentationml/2006/main">
+  <p:cSld>
+    <p:spTree>
+      <p:nvGrpSpPr>
+        <p:cNvPr id="1" name="">
+          <a:extLst>
+            <a:ext uri="{FF2B5EF4-FFF2-40B4-BE49-F238E27FC236}">
+              <a16:creationId xmlns:a16="http://schemas.microsoft.com/office/drawing/2014/main" id="{5BF49BFC-AC4D-984C-19F8-635271A11CA6}"/>
+            </a:ext>
+          </a:extLst>
+        </p:cNvPr>
+        <p:cNvGrpSpPr/>
+        <p:nvPr/>
+      </p:nvGrpSpPr>
+      <p:grpSpPr>
+        <a:xfrm>
+          <a:off x="0" y="0"/>
+          <a:ext cx="0" cy="0"/>
+          <a:chOff x="0" y="0"/>
+          <a:chExt cx="0" cy="0"/>
+        </a:xfrm>
+      </p:grpSpPr>
+      <p:sp>
+        <p:nvSpPr>
+          <p:cNvPr id="2" name="Marcador de imagen de diapositiva 1">
+            <a:extLst>
+              <a:ext uri="{FF2B5EF4-FFF2-40B4-BE49-F238E27FC236}">
+                <a16:creationId xmlns:a16="http://schemas.microsoft.com/office/drawing/2014/main" id="{685DDD09-3D26-A60C-41C3-EEBC7F4CA846}"/>
+              </a:ext>
+            </a:extLst>
+          </p:cNvPr>
+          <p:cNvSpPr>
+            <a:spLocks noGrp="1" noRot="1" noChangeAspect="1"/>
+          </p:cNvSpPr>
+          <p:nvPr>
+            <p:ph type="sldImg"/>
+          </p:nvPr>
+        </p:nvSpPr>
+        <p:spPr/>
+      </p:sp>
+      <p:sp>
+        <p:nvSpPr>
+          <p:cNvPr id="3" name="Marcador de notas 2">
+            <a:extLst>
+              <a:ext uri="{FF2B5EF4-FFF2-40B4-BE49-F238E27FC236}">
+                <a16:creationId xmlns:a16="http://schemas.microsoft.com/office/drawing/2014/main" id="{1C956AC0-CE8C-CFA4-59D3-6C8108D90A3D}"/>
+              </a:ext>
+            </a:extLst>
+          </p:cNvPr>
+          <p:cNvSpPr>
+            <a:spLocks noGrp="1"/>
+          </p:cNvSpPr>
+          <p:nvPr>
+            <p:ph type="body" idx="1"/>
+          </p:nvPr>
+        </p:nvSpPr>
+        <p:spPr/>
+        <p:txBody>
+          <a:bodyPr/>
+          <a:lstStyle/>
+          <a:p>
+            <a:endParaRPr lang="es-ES" dirty="0"/>
+          </a:p>
+        </p:txBody>
+      </p:sp>
+      <p:sp>
+        <p:nvSpPr>
+          <p:cNvPr id="4" name="Marcador de número de diapositiva 3">
+            <a:extLst>
+              <a:ext uri="{FF2B5EF4-FFF2-40B4-BE49-F238E27FC236}">
+                <a16:creationId xmlns:a16="http://schemas.microsoft.com/office/drawing/2014/main" id="{F312FED4-2F26-2267-9C84-B1241D8F624F}"/>
+              </a:ext>
+            </a:extLst>
+          </p:cNvPr>
+          <p:cNvSpPr>
+            <a:spLocks noGrp="1"/>
+          </p:cNvSpPr>
+          <p:nvPr>
+            <p:ph type="sldNum" sz="quarter" idx="5"/>
+          </p:nvPr>
+        </p:nvSpPr>
+        <p:spPr/>
+        <p:txBody>
+          <a:bodyPr/>
+          <a:lstStyle/>
+          <a:p>
+            <a:fld id="{676223B9-C868-4436-87D9-1A3152E1157A}" type="slidenum">
+              <a:rPr lang="es-ES" smtClean="0"/>
+              <a:t>6</a:t>
+            </a:fld>
+            <a:endParaRPr lang="es-ES"/>
+          </a:p>
+        </p:txBody>
+      </p:sp>
+    </p:spTree>
+    <p:extLst>
+      <p:ext uri="{BB962C8B-B14F-4D97-AF65-F5344CB8AC3E}">
+        <p14:creationId xmlns:p14="http://schemas.microsoft.com/office/powerpoint/2010/main" val="2451377515"/>
+      </p:ext>
+    </p:extLst>
+  </p:cSld>
+  <p:clrMapOvr>
+    <a:masterClrMapping/>
+  </p:clrMapOvr>
+</p:notes>
+</file>
+
+<file path=ppt/notesSlides/notesSlide5.xml><?xml version="1.0" encoding="utf-8"?>
+<p:notes xmlns:a="http://schemas.openxmlformats.org/drawingml/2006/main" xmlns:r="http://schemas.openxmlformats.org/officeDocument/2006/relationships" xmlns:p="http://schemas.openxmlformats.org/presentationml/2006/main">
+  <p:cSld>
+    <p:spTree>
+      <p:nvGrpSpPr>
+        <p:cNvPr id="1" name="">
+          <a:extLst>
+            <a:ext uri="{FF2B5EF4-FFF2-40B4-BE49-F238E27FC236}">
               <a16:creationId xmlns:a16="http://schemas.microsoft.com/office/drawing/2014/main" id="{4E3C5711-C157-AA5E-1EA1-9F4C3F40B90E}"/>
             </a:ext>
           </a:extLst>
@@ -850,7 +1209,7 @@
           <a:p>
             <a:fld id="{676223B9-C868-4436-87D9-1A3152E1157A}" type="slidenum">
               <a:rPr lang="es-ES" smtClean="0"/>
-              <a:t>4</a:t>
+              <a:t>7</a:t>
             </a:fld>
             <a:endParaRPr lang="es-ES"/>
           </a:p>
@@ -869,7 +1228,7 @@
 </p:notes>
 </file>
 
-<file path=ppt/notesSlides/notesSlide3.xml><?xml version="1.0" encoding="utf-8"?>
+<file path=ppt/notesSlides/notesSlide6.xml><?xml version="1.0" encoding="utf-8"?>
 <p:notes xmlns:a="http://schemas.openxmlformats.org/drawingml/2006/main" xmlns:r="http://schemas.openxmlformats.org/officeDocument/2006/relationships" xmlns:p="http://schemas.openxmlformats.org/presentationml/2006/main">
   <p:cSld>
     <p:spTree>
@@ -958,7 +1317,7 @@
           <a:p>
             <a:fld id="{676223B9-C868-4436-87D9-1A3152E1157A}" type="slidenum">
               <a:rPr lang="es-ES" smtClean="0"/>
-              <a:t>5</a:t>
+              <a:t>8</a:t>
             </a:fld>
             <a:endParaRPr lang="es-ES"/>
           </a:p>
@@ -977,7 +1336,7 @@
 </p:notes>
 </file>
 
-<file path=ppt/notesSlides/notesSlide4.xml><?xml version="1.0" encoding="utf-8"?>
+<file path=ppt/notesSlides/notesSlide7.xml><?xml version="1.0" encoding="utf-8"?>
 <p:notes xmlns:a="http://schemas.openxmlformats.org/drawingml/2006/main" xmlns:r="http://schemas.openxmlformats.org/officeDocument/2006/relationships" xmlns:p="http://schemas.openxmlformats.org/presentationml/2006/main">
   <p:cSld>
     <p:spTree>
@@ -1066,7 +1425,7 @@
           <a:p>
             <a:fld id="{676223B9-C868-4436-87D9-1A3152E1157A}" type="slidenum">
               <a:rPr lang="es-ES" smtClean="0"/>
-              <a:t>6</a:t>
+              <a:t>9</a:t>
             </a:fld>
             <a:endParaRPr lang="es-ES"/>
           </a:p>
@@ -1085,7 +1444,7 @@
 </p:notes>
 </file>
 
-<file path=ppt/notesSlides/notesSlide5.xml><?xml version="1.0" encoding="utf-8"?>
+<file path=ppt/notesSlides/notesSlide8.xml><?xml version="1.0" encoding="utf-8"?>
 <p:notes xmlns:a="http://schemas.openxmlformats.org/drawingml/2006/main" xmlns:r="http://schemas.openxmlformats.org/officeDocument/2006/relationships" xmlns:p="http://schemas.openxmlformats.org/presentationml/2006/main">
   <p:cSld>
     <p:spTree>
@@ -1174,7 +1533,7 @@
           <a:p>
             <a:fld id="{676223B9-C868-4436-87D9-1A3152E1157A}" type="slidenum">
               <a:rPr lang="es-ES" smtClean="0"/>
-              <a:t>7</a:t>
+              <a:t>10</a:t>
             </a:fld>
             <a:endParaRPr lang="es-ES"/>
           </a:p>
@@ -2816,6 +3175,548 @@
 </p:sld>
 </file>
 
+<file path=ppt/slides/slide10.xml><?xml version="1.0" encoding="utf-8"?>
+<p:sld xmlns:a="http://schemas.openxmlformats.org/drawingml/2006/main" xmlns:r="http://schemas.openxmlformats.org/officeDocument/2006/relationships" xmlns:p="http://schemas.openxmlformats.org/presentationml/2006/main">
+  <p:cSld>
+    <p:spTree>
+      <p:nvGrpSpPr>
+        <p:cNvPr id="1" name="">
+          <a:extLst>
+            <a:ext uri="{FF2B5EF4-FFF2-40B4-BE49-F238E27FC236}">
+              <a16:creationId xmlns:a16="http://schemas.microsoft.com/office/drawing/2014/main" id="{25434E70-43B1-3881-1771-20FB4358471D}"/>
+            </a:ext>
+          </a:extLst>
+        </p:cNvPr>
+        <p:cNvGrpSpPr/>
+        <p:nvPr/>
+      </p:nvGrpSpPr>
+      <p:grpSpPr>
+        <a:xfrm>
+          <a:off x="0" y="0"/>
+          <a:ext cx="0" cy="0"/>
+          <a:chOff x="0" y="0"/>
+          <a:chExt cx="0" cy="0"/>
+        </a:xfrm>
+      </p:grpSpPr>
+      <p:sp>
+        <p:nvSpPr>
+          <p:cNvPr id="16" name="object 16">
+            <a:extLst>
+              <a:ext uri="{FF2B5EF4-FFF2-40B4-BE49-F238E27FC236}">
+                <a16:creationId xmlns:a16="http://schemas.microsoft.com/office/drawing/2014/main" id="{742C31CE-19F0-B995-0997-9A2D6A879BF7}"/>
+              </a:ext>
+            </a:extLst>
+          </p:cNvPr>
+          <p:cNvSpPr txBox="1">
+            <a:spLocks noGrp="1"/>
+          </p:cNvSpPr>
+          <p:nvPr>
+            <p:ph type="title"/>
+          </p:nvPr>
+        </p:nvSpPr>
+        <p:spPr>
+          <a:xfrm>
+            <a:off x="685800" y="408883"/>
+            <a:ext cx="10994410" cy="1090042"/>
+          </a:xfrm>
+          <a:prstGeom prst="rect">
+            <a:avLst/>
+          </a:prstGeom>
+        </p:spPr>
+        <p:txBody>
+          <a:bodyPr vert="horz" wrap="square" lIns="0" tIns="12700" rIns="0" bIns="0" rtlCol="0">
+            <a:spAutoFit/>
+          </a:bodyPr>
+          <a:lstStyle/>
+          <a:p>
+            <a:pPr marL="12700">
+              <a:lnSpc>
+                <a:spcPct val="100000"/>
+              </a:lnSpc>
+              <a:spcBef>
+                <a:spcPts val="100"/>
+              </a:spcBef>
+            </a:pPr>
+            <a:r>
+              <a:rPr lang="en-US" sz="2500" dirty="0"/>
+              <a:t>Learning outcome #5 – Bend waveguide radius vs. loss – deep</a:t>
+            </a:r>
+            <a:br>
+              <a:rPr lang="en-US" sz="2500" dirty="0"/>
+            </a:br>
+            <a:r>
+              <a:rPr lang="en-US" b="0" dirty="0"/>
+              <a:t>Find  neff_TE0 for </a:t>
+            </a:r>
+            <a:r>
+              <a:rPr lang="en-US" b="0" dirty="0" err="1"/>
+              <a:t>wvl</a:t>
+            </a:r>
+            <a:r>
+              <a:rPr lang="en-US" b="0" dirty="0"/>
+              <a:t> 1.55 µm, width 1.2 µm for R=25,50,75,100, 125,150 µm</a:t>
+            </a:r>
+            <a:br>
+              <a:rPr lang="en-US" sz="2500" dirty="0"/>
+            </a:br>
+            <a:endParaRPr lang="en-US" sz="2500" b="0" dirty="0">
+              <a:latin typeface="+mj-lt"/>
+              <a:cs typeface="Lucida Sans"/>
+            </a:endParaRPr>
+          </a:p>
+        </p:txBody>
+      </p:sp>
+      <p:pic>
+        <p:nvPicPr>
+          <p:cNvPr id="83" name="Gráfico 82">
+            <a:extLst>
+              <a:ext uri="{FF2B5EF4-FFF2-40B4-BE49-F238E27FC236}">
+                <a16:creationId xmlns:a16="http://schemas.microsoft.com/office/drawing/2014/main" id="{D688A609-F3DC-EE34-C536-683E70F32EAE}"/>
+              </a:ext>
+            </a:extLst>
+          </p:cNvPr>
+          <p:cNvPicPr>
+            <a:picLocks noChangeAspect="1"/>
+          </p:cNvPicPr>
+          <p:nvPr/>
+        </p:nvPicPr>
+        <p:blipFill>
+          <a:blip r:embed="rId3">
+            <a:extLst>
+              <a:ext uri="{96DAC541-7B7A-43D3-8B79-37D633B846F1}">
+                <asvg:svgBlip xmlns:asvg="http://schemas.microsoft.com/office/drawing/2016/SVG/main" r:embed="rId4"/>
+              </a:ext>
+            </a:extLst>
+          </a:blip>
+          <a:stretch>
+            <a:fillRect/>
+          </a:stretch>
+        </p:blipFill>
+        <p:spPr>
+          <a:xfrm>
+            <a:off x="5045006" y="6356057"/>
+            <a:ext cx="6409575" cy="363174"/>
+          </a:xfrm>
+          <a:prstGeom prst="rect">
+            <a:avLst/>
+          </a:prstGeom>
+        </p:spPr>
+      </p:pic>
+      <p:sp>
+        <p:nvSpPr>
+          <p:cNvPr id="84" name="Marcador de número de diapositiva 83">
+            <a:extLst>
+              <a:ext uri="{FF2B5EF4-FFF2-40B4-BE49-F238E27FC236}">
+                <a16:creationId xmlns:a16="http://schemas.microsoft.com/office/drawing/2014/main" id="{B6C672C6-89D4-7E67-2B94-811D081786A7}"/>
+              </a:ext>
+            </a:extLst>
+          </p:cNvPr>
+          <p:cNvSpPr>
+            <a:spLocks noGrp="1"/>
+          </p:cNvSpPr>
+          <p:nvPr>
+            <p:ph type="sldNum" sz="quarter" idx="7"/>
+          </p:nvPr>
+        </p:nvSpPr>
+        <p:spPr/>
+        <p:txBody>
+          <a:bodyPr/>
+          <a:lstStyle/>
+          <a:p>
+            <a:fld id="{B6F15528-21DE-4FAA-801E-634DDDAF4B2B}" type="slidenum">
+              <a:rPr lang="es-ES" smtClean="0"/>
+              <a:t>10</a:t>
+            </a:fld>
+            <a:endParaRPr lang="es-ES"/>
+          </a:p>
+        </p:txBody>
+      </p:sp>
+      <p:sp>
+        <p:nvSpPr>
+          <p:cNvPr id="3" name="Marcador de pie de página 2">
+            <a:extLst>
+              <a:ext uri="{FF2B5EF4-FFF2-40B4-BE49-F238E27FC236}">
+                <a16:creationId xmlns:a16="http://schemas.microsoft.com/office/drawing/2014/main" id="{AA1F4313-D710-7A3E-7A8F-EB77DEE3C1A7}"/>
+              </a:ext>
+            </a:extLst>
+          </p:cNvPr>
+          <p:cNvSpPr>
+            <a:spLocks noGrp="1"/>
+          </p:cNvSpPr>
+          <p:nvPr>
+            <p:ph type="ftr" sz="quarter" idx="5"/>
+          </p:nvPr>
+        </p:nvSpPr>
+        <p:spPr/>
+        <p:txBody>
+          <a:bodyPr/>
+          <a:lstStyle/>
+          <a:p>
+            <a:pPr marL="12700">
+              <a:spcBef>
+                <a:spcPts val="15"/>
+              </a:spcBef>
+            </a:pPr>
+            <a:r>
+              <a:rPr lang="es-ES" spc="-5"/>
+              <a:t>LAB 1.0 WAVEGUIDES</a:t>
+            </a:r>
+            <a:endParaRPr lang="es-ES" spc="-5" dirty="0"/>
+          </a:p>
+        </p:txBody>
+      </p:sp>
+      <p:sp>
+        <p:nvSpPr>
+          <p:cNvPr id="2" name="CuadroTexto 1">
+            <a:extLst>
+              <a:ext uri="{FF2B5EF4-FFF2-40B4-BE49-F238E27FC236}">
+                <a16:creationId xmlns:a16="http://schemas.microsoft.com/office/drawing/2014/main" id="{FDE3A197-9508-F9F1-1FEB-FF883D78C151}"/>
+              </a:ext>
+            </a:extLst>
+          </p:cNvPr>
+          <p:cNvSpPr txBox="1"/>
+          <p:nvPr/>
+        </p:nvSpPr>
+        <p:spPr>
+          <a:xfrm>
+            <a:off x="609441" y="4860334"/>
+            <a:ext cx="11199971" cy="1200329"/>
+          </a:xfrm>
+          <a:prstGeom prst="rect">
+            <a:avLst/>
+          </a:prstGeom>
+          <a:solidFill>
+            <a:schemeClr val="bg1">
+              <a:lumMod val="95000"/>
+            </a:schemeClr>
+          </a:solidFill>
+          <a:ln w="28575">
+            <a:solidFill>
+              <a:srgbClr val="E0700D"/>
+            </a:solidFill>
+          </a:ln>
+        </p:spPr>
+        <p:txBody>
+          <a:bodyPr wrap="square" rtlCol="0">
+            <a:spAutoFit/>
+          </a:bodyPr>
+          <a:lstStyle/>
+          <a:p>
+            <a:pPr algn="just"/>
+            <a:r>
+              <a:rPr lang="en-US" sz="1200" dirty="0">
+                <a:latin typeface="Arial" panose="020B0604020202020204" pitchFamily="34" charset="0"/>
+                <a:cs typeface="Arial" panose="020B0604020202020204" pitchFamily="34" charset="0"/>
+              </a:rPr>
+              <a:t>Comment results, which is the safe radius?, consider safe means less than 0.1 dB/90º.</a:t>
+            </a:r>
+          </a:p>
+          <a:p>
+            <a:pPr algn="just"/>
+            <a:endParaRPr lang="en-US" sz="1200" u="sng" dirty="0">
+              <a:latin typeface="Arial" panose="020B0604020202020204" pitchFamily="34" charset="0"/>
+              <a:cs typeface="Arial" panose="020B0604020202020204" pitchFamily="34" charset="0"/>
+            </a:endParaRPr>
+          </a:p>
+          <a:p>
+            <a:pPr algn="just"/>
+            <a:endParaRPr lang="en-US" sz="1200" dirty="0">
+              <a:latin typeface="Arial" panose="020B0604020202020204" pitchFamily="34" charset="0"/>
+              <a:cs typeface="Arial" panose="020B0604020202020204" pitchFamily="34" charset="0"/>
+            </a:endParaRPr>
+          </a:p>
+          <a:p>
+            <a:pPr algn="just"/>
+            <a:endParaRPr lang="en-US" sz="1200" dirty="0">
+              <a:latin typeface="Arial" panose="020B0604020202020204" pitchFamily="34" charset="0"/>
+              <a:cs typeface="Arial" panose="020B0604020202020204" pitchFamily="34" charset="0"/>
+            </a:endParaRPr>
+          </a:p>
+          <a:p>
+            <a:pPr algn="just"/>
+            <a:endParaRPr lang="en-US" sz="1200" dirty="0">
+              <a:latin typeface="Arial" panose="020B0604020202020204" pitchFamily="34" charset="0"/>
+              <a:cs typeface="Arial" panose="020B0604020202020204" pitchFamily="34" charset="0"/>
+            </a:endParaRPr>
+          </a:p>
+          <a:p>
+            <a:pPr algn="just"/>
+            <a:endParaRPr lang="en-US" sz="1200" dirty="0">
+              <a:latin typeface="Arial" panose="020B0604020202020204" pitchFamily="34" charset="0"/>
+              <a:cs typeface="Arial" panose="020B0604020202020204" pitchFamily="34" charset="0"/>
+            </a:endParaRPr>
+          </a:p>
+        </p:txBody>
+      </p:sp>
+      <p:sp>
+        <p:nvSpPr>
+          <p:cNvPr id="7" name="Rectángulo 6">
+            <a:extLst>
+              <a:ext uri="{FF2B5EF4-FFF2-40B4-BE49-F238E27FC236}">
+                <a16:creationId xmlns:a16="http://schemas.microsoft.com/office/drawing/2014/main" id="{B5FE8755-B0BF-14B7-64E6-4BBB2560B9A6}"/>
+              </a:ext>
+            </a:extLst>
+          </p:cNvPr>
+          <p:cNvSpPr/>
+          <p:nvPr/>
+        </p:nvSpPr>
+        <p:spPr>
+          <a:xfrm>
+            <a:off x="609441" y="1418373"/>
+            <a:ext cx="11199971" cy="3306028"/>
+          </a:xfrm>
+          <a:prstGeom prst="rect">
+            <a:avLst/>
+          </a:prstGeom>
+          <a:noFill/>
+          <a:ln w="28575">
+            <a:solidFill>
+              <a:srgbClr val="E0700D"/>
+            </a:solidFill>
+          </a:ln>
+        </p:spPr>
+        <p:style>
+          <a:lnRef idx="2">
+            <a:schemeClr val="accent1">
+              <a:shade val="15000"/>
+            </a:schemeClr>
+          </a:lnRef>
+          <a:fillRef idx="1">
+            <a:schemeClr val="accent1"/>
+          </a:fillRef>
+          <a:effectRef idx="0">
+            <a:schemeClr val="accent1"/>
+          </a:effectRef>
+          <a:fontRef idx="minor">
+            <a:schemeClr val="lt1"/>
+          </a:fontRef>
+        </p:style>
+        <p:txBody>
+          <a:bodyPr rtlCol="0" anchor="ctr"/>
+          <a:lstStyle/>
+          <a:p>
+            <a:pPr algn="ctr"/>
+            <a:endParaRPr lang="en-US"/>
+          </a:p>
+        </p:txBody>
+      </p:sp>
+      <p:sp>
+        <p:nvSpPr>
+          <p:cNvPr id="8" name="CuadroTexto 7">
+            <a:extLst>
+              <a:ext uri="{FF2B5EF4-FFF2-40B4-BE49-F238E27FC236}">
+                <a16:creationId xmlns:a16="http://schemas.microsoft.com/office/drawing/2014/main" id="{331EBD86-BA6C-68C9-2D38-FC8CFBA7ADC4}"/>
+              </a:ext>
+            </a:extLst>
+          </p:cNvPr>
+          <p:cNvSpPr txBox="1"/>
+          <p:nvPr/>
+        </p:nvSpPr>
+        <p:spPr>
+          <a:xfrm>
+            <a:off x="2978141" y="2784355"/>
+            <a:ext cx="6235717" cy="923330"/>
+          </a:xfrm>
+          <a:prstGeom prst="rect">
+            <a:avLst/>
+          </a:prstGeom>
+          <a:noFill/>
+        </p:spPr>
+        <p:txBody>
+          <a:bodyPr wrap="square" rtlCol="0">
+            <a:spAutoFit/>
+          </a:bodyPr>
+          <a:lstStyle/>
+          <a:p>
+            <a:pPr algn="ctr"/>
+            <a:r>
+              <a:rPr lang="en-US" b="1" dirty="0"/>
+              <a:t>deep</a:t>
+            </a:r>
+            <a:r>
+              <a:rPr lang="en-US" dirty="0"/>
+              <a:t> waveguide</a:t>
+            </a:r>
+          </a:p>
+          <a:p>
+            <a:pPr algn="ctr"/>
+            <a:endParaRPr lang="en-US" dirty="0"/>
+          </a:p>
+          <a:p>
+            <a:pPr algn="ctr"/>
+            <a:r>
+              <a:rPr lang="en-US" dirty="0"/>
+              <a:t>Paste Total Loss (dB/90º) vs R &amp; neff_TE0 vs R</a:t>
+            </a:r>
+          </a:p>
+        </p:txBody>
+      </p:sp>
+    </p:spTree>
+    <p:extLst>
+      <p:ext uri="{BB962C8B-B14F-4D97-AF65-F5344CB8AC3E}">
+        <p14:creationId xmlns:p14="http://schemas.microsoft.com/office/powerpoint/2010/main" val="3660438245"/>
+      </p:ext>
+    </p:extLst>
+  </p:cSld>
+  <p:clrMapOvr>
+    <a:masterClrMapping/>
+  </p:clrMapOvr>
+</p:sld>
+</file>
+
+<file path=ppt/slides/slide11.xml><?xml version="1.0" encoding="utf-8"?>
+<p:sld xmlns:a="http://schemas.openxmlformats.org/drawingml/2006/main" xmlns:r="http://schemas.openxmlformats.org/officeDocument/2006/relationships" xmlns:p="http://schemas.openxmlformats.org/presentationml/2006/main">
+  <p:cSld>
+    <p:spTree>
+      <p:nvGrpSpPr>
+        <p:cNvPr id="1" name=""/>
+        <p:cNvGrpSpPr/>
+        <p:nvPr/>
+      </p:nvGrpSpPr>
+      <p:grpSpPr>
+        <a:xfrm>
+          <a:off x="0" y="0"/>
+          <a:ext cx="0" cy="0"/>
+          <a:chOff x="0" y="0"/>
+          <a:chExt cx="0" cy="0"/>
+        </a:xfrm>
+      </p:grpSpPr>
+      <p:sp>
+        <p:nvSpPr>
+          <p:cNvPr id="3" name="object 3"/>
+          <p:cNvSpPr/>
+          <p:nvPr/>
+        </p:nvSpPr>
+        <p:spPr>
+          <a:xfrm>
+            <a:off x="3945635" y="2636520"/>
+            <a:ext cx="8246363" cy="1584959"/>
+          </a:xfrm>
+          <a:prstGeom prst="rect">
+            <a:avLst/>
+          </a:prstGeom>
+          <a:blipFill>
+            <a:blip r:embed="rId2" cstate="print"/>
+            <a:stretch>
+              <a:fillRect/>
+            </a:stretch>
+          </a:blipFill>
+        </p:spPr>
+        <p:txBody>
+          <a:bodyPr wrap="square" lIns="0" tIns="0" rIns="0" bIns="0" rtlCol="0"/>
+          <a:lstStyle/>
+          <a:p>
+            <a:endParaRPr/>
+          </a:p>
+        </p:txBody>
+      </p:sp>
+      <p:sp>
+        <p:nvSpPr>
+          <p:cNvPr id="4" name="object 4"/>
+          <p:cNvSpPr txBox="1">
+            <a:spLocks noGrp="1"/>
+          </p:cNvSpPr>
+          <p:nvPr>
+            <p:ph type="title"/>
+          </p:nvPr>
+        </p:nvSpPr>
+        <p:spPr>
+          <a:xfrm>
+            <a:off x="4513326" y="3165729"/>
+            <a:ext cx="2233295" cy="513715"/>
+          </a:xfrm>
+          <a:prstGeom prst="rect">
+            <a:avLst/>
+          </a:prstGeom>
+        </p:spPr>
+        <p:txBody>
+          <a:bodyPr vert="horz" wrap="square" lIns="0" tIns="13335" rIns="0" bIns="0" rtlCol="0">
+            <a:spAutoFit/>
+          </a:bodyPr>
+          <a:lstStyle/>
+          <a:p>
+            <a:pPr marL="12700">
+              <a:lnSpc>
+                <a:spcPct val="100000"/>
+              </a:lnSpc>
+              <a:spcBef>
+                <a:spcPts val="105"/>
+              </a:spcBef>
+            </a:pPr>
+            <a:r>
+              <a:rPr sz="3200" b="1" spc="-5" dirty="0">
+                <a:solidFill>
+                  <a:srgbClr val="FFFFFF"/>
+                </a:solidFill>
+                <a:latin typeface="Lucida Sans"/>
+                <a:cs typeface="Lucida Sans"/>
+              </a:rPr>
+              <a:t>Thank</a:t>
+            </a:r>
+            <a:r>
+              <a:rPr sz="3200" b="1" spc="-55" dirty="0">
+                <a:solidFill>
+                  <a:srgbClr val="FFFFFF"/>
+                </a:solidFill>
+                <a:latin typeface="Lucida Sans"/>
+                <a:cs typeface="Lucida Sans"/>
+              </a:rPr>
+              <a:t> </a:t>
+            </a:r>
+            <a:r>
+              <a:rPr sz="3200" b="1" dirty="0">
+                <a:solidFill>
+                  <a:srgbClr val="FFFFFF"/>
+                </a:solidFill>
+                <a:latin typeface="Lucida Sans"/>
+                <a:cs typeface="Lucida Sans"/>
+              </a:rPr>
+              <a:t>you</a:t>
+            </a:r>
+            <a:endParaRPr sz="3200">
+              <a:latin typeface="Lucida Sans"/>
+              <a:cs typeface="Lucida Sans"/>
+            </a:endParaRPr>
+          </a:p>
+        </p:txBody>
+      </p:sp>
+      <p:sp>
+        <p:nvSpPr>
+          <p:cNvPr id="5" name="Marcador de número de diapositiva 4">
+            <a:extLst>
+              <a:ext uri="{FF2B5EF4-FFF2-40B4-BE49-F238E27FC236}">
+                <a16:creationId xmlns:a16="http://schemas.microsoft.com/office/drawing/2014/main" id="{B052DA19-AD24-7D24-2AE9-51F8F5A7F5E0}"/>
+              </a:ext>
+            </a:extLst>
+          </p:cNvPr>
+          <p:cNvSpPr>
+            <a:spLocks noGrp="1"/>
+          </p:cNvSpPr>
+          <p:nvPr>
+            <p:ph type="sldNum" sz="quarter" idx="7"/>
+          </p:nvPr>
+        </p:nvSpPr>
+        <p:spPr/>
+        <p:txBody>
+          <a:bodyPr/>
+          <a:lstStyle/>
+          <a:p>
+            <a:fld id="{B6F15528-21DE-4FAA-801E-634DDDAF4B2B}" type="slidenum">
+              <a:rPr lang="es-ES" smtClean="0"/>
+              <a:t>11</a:t>
+            </a:fld>
+            <a:endParaRPr lang="es-ES"/>
+          </a:p>
+        </p:txBody>
+      </p:sp>
+    </p:spTree>
+  </p:cSld>
+  <p:clrMapOvr>
+    <a:masterClrMapping/>
+  </p:clrMapOvr>
+</p:sld>
+</file>
+
 <file path=ppt/slides/slide2.xml><?xml version="1.0" encoding="utf-8"?>
 <p:sld xmlns:a="http://schemas.openxmlformats.org/drawingml/2006/main" xmlns:r="http://schemas.openxmlformats.org/officeDocument/2006/relationships" xmlns:p="http://schemas.openxmlformats.org/presentationml/2006/main">
   <p:cSld>
@@ -5192,40 +6093,39 @@
                 <a:latin typeface="Arial" panose="020B0604020202020204" pitchFamily="34" charset="0"/>
                 <a:cs typeface="Arial" panose="020B0604020202020204" pitchFamily="34" charset="0"/>
               </a:rPr>
-              <a:t>Document all your results (neff, plot fields </a:t>
-            </a:r>
-            <a:r>
-              <a:rPr lang="en-US" sz="1200">
+              <a:t>Document all your results (neff, plot fields of different modes, comparison between different polarizations…)</a:t>
+            </a:r>
+          </a:p>
+          <a:p>
+            <a:pPr algn="just"/>
+            <a:r>
+              <a:rPr lang="en-US" sz="1200" dirty="0" err="1">
                 <a:latin typeface="Arial" panose="020B0604020202020204" pitchFamily="34" charset="0"/>
                 <a:cs typeface="Arial" panose="020B0604020202020204" pitchFamily="34" charset="0"/>
               </a:rPr>
-              <a:t>of different modes, </a:t>
+              <a:t>Páginas</a:t>
             </a:r>
             <a:r>
               <a:rPr lang="en-US" sz="1200" dirty="0">
                 <a:latin typeface="Arial" panose="020B0604020202020204" pitchFamily="34" charset="0"/>
                 <a:cs typeface="Arial" panose="020B0604020202020204" pitchFamily="34" charset="0"/>
               </a:rPr>
-              <a:t>comparison between </a:t>
-            </a:r>
-            <a:r>
-              <a:rPr lang="en-US" sz="1200">
+              <a:t> </a:t>
+            </a:r>
+            <a:r>
+              <a:rPr lang="en-US" sz="1200" dirty="0" err="1">
                 <a:latin typeface="Arial" panose="020B0604020202020204" pitchFamily="34" charset="0"/>
                 <a:cs typeface="Arial" panose="020B0604020202020204" pitchFamily="34" charset="0"/>
               </a:rPr>
-              <a:t>different polarizations…)</a:t>
-            </a:r>
-            <a:endParaRPr lang="en-US" sz="1200" dirty="0">
-              <a:latin typeface="Arial" panose="020B0604020202020204" pitchFamily="34" charset="0"/>
-              <a:cs typeface="Arial" panose="020B0604020202020204" pitchFamily="34" charset="0"/>
-            </a:endParaRPr>
-          </a:p>
-          <a:p>
-            <a:pPr algn="just"/>
-            <a:endParaRPr lang="en-US" sz="1200" dirty="0">
-              <a:latin typeface="Arial" panose="020B0604020202020204" pitchFamily="34" charset="0"/>
-              <a:cs typeface="Arial" panose="020B0604020202020204" pitchFamily="34" charset="0"/>
-            </a:endParaRPr>
+              <a:t>siguientes</a:t>
+            </a:r>
+            <a:r>
+              <a:rPr lang="en-US" sz="1200" dirty="0">
+                <a:latin typeface="Arial" panose="020B0604020202020204" pitchFamily="34" charset="0"/>
+                <a:cs typeface="Arial" panose="020B0604020202020204" pitchFamily="34" charset="0"/>
+              </a:rPr>
+              <a:t>*</a:t>
+            </a:r>
           </a:p>
           <a:p>
             <a:pPr algn="just"/>
@@ -5271,6 +6171,1267 @@
 </file>
 
 <file path=ppt/slides/slide4.xml><?xml version="1.0" encoding="utf-8"?>
+<p:sld xmlns:a="http://schemas.openxmlformats.org/drawingml/2006/main" xmlns:r="http://schemas.openxmlformats.org/officeDocument/2006/relationships" xmlns:p="http://schemas.openxmlformats.org/presentationml/2006/main">
+  <p:cSld>
+    <p:spTree>
+      <p:nvGrpSpPr>
+        <p:cNvPr id="1" name="">
+          <a:extLst>
+            <a:ext uri="{FF2B5EF4-FFF2-40B4-BE49-F238E27FC236}">
+              <a16:creationId xmlns:a16="http://schemas.microsoft.com/office/drawing/2014/main" id="{5995554B-67EA-B6F8-D48B-E89C530E7D1C}"/>
+            </a:ext>
+          </a:extLst>
+        </p:cNvPr>
+        <p:cNvGrpSpPr/>
+        <p:nvPr/>
+      </p:nvGrpSpPr>
+      <p:grpSpPr>
+        <a:xfrm>
+          <a:off x="0" y="0"/>
+          <a:ext cx="0" cy="0"/>
+          <a:chOff x="0" y="0"/>
+          <a:chExt cx="0" cy="0"/>
+        </a:xfrm>
+      </p:grpSpPr>
+      <p:sp>
+        <p:nvSpPr>
+          <p:cNvPr id="16" name="object 16">
+            <a:extLst>
+              <a:ext uri="{FF2B5EF4-FFF2-40B4-BE49-F238E27FC236}">
+                <a16:creationId xmlns:a16="http://schemas.microsoft.com/office/drawing/2014/main" id="{895021D6-1F41-2F3A-9513-979856223ED9}"/>
+              </a:ext>
+            </a:extLst>
+          </p:cNvPr>
+          <p:cNvSpPr txBox="1">
+            <a:spLocks noGrp="1"/>
+          </p:cNvSpPr>
+          <p:nvPr>
+            <p:ph type="title"/>
+          </p:nvPr>
+        </p:nvSpPr>
+        <p:spPr>
+          <a:xfrm>
+            <a:off x="685800" y="408883"/>
+            <a:ext cx="10994410" cy="782265"/>
+          </a:xfrm>
+          <a:prstGeom prst="rect">
+            <a:avLst/>
+          </a:prstGeom>
+        </p:spPr>
+        <p:txBody>
+          <a:bodyPr vert="horz" wrap="square" lIns="0" tIns="12700" rIns="0" bIns="0" rtlCol="0">
+            <a:spAutoFit/>
+          </a:bodyPr>
+          <a:lstStyle/>
+          <a:p>
+            <a:pPr marL="12700">
+              <a:lnSpc>
+                <a:spcPct val="100000"/>
+              </a:lnSpc>
+              <a:spcBef>
+                <a:spcPts val="100"/>
+              </a:spcBef>
+            </a:pPr>
+            <a:r>
+              <a:rPr lang="en-US" sz="2500" dirty="0"/>
+              <a:t>Learning outcome #1.1 – Materials</a:t>
+            </a:r>
+            <a:br>
+              <a:rPr lang="es-ES" sz="2500" spc="-5" dirty="0">
+                <a:latin typeface="+mj-lt"/>
+                <a:cs typeface="Lucida Sans"/>
+              </a:rPr>
+            </a:br>
+            <a:endParaRPr sz="2500" b="0" dirty="0">
+              <a:latin typeface="+mj-lt"/>
+              <a:cs typeface="Lucida Sans"/>
+            </a:endParaRPr>
+          </a:p>
+        </p:txBody>
+      </p:sp>
+      <p:pic>
+        <p:nvPicPr>
+          <p:cNvPr id="83" name="Gráfico 82">
+            <a:extLst>
+              <a:ext uri="{FF2B5EF4-FFF2-40B4-BE49-F238E27FC236}">
+                <a16:creationId xmlns:a16="http://schemas.microsoft.com/office/drawing/2014/main" id="{0689FD67-3625-76E0-B7F7-D6256B846938}"/>
+              </a:ext>
+            </a:extLst>
+          </p:cNvPr>
+          <p:cNvPicPr>
+            <a:picLocks noChangeAspect="1"/>
+          </p:cNvPicPr>
+          <p:nvPr/>
+        </p:nvPicPr>
+        <p:blipFill>
+          <a:blip r:embed="rId3">
+            <a:extLst>
+              <a:ext uri="{96DAC541-7B7A-43D3-8B79-37D633B846F1}">
+                <asvg:svgBlip xmlns:asvg="http://schemas.microsoft.com/office/drawing/2016/SVG/main" r:embed="rId4"/>
+              </a:ext>
+            </a:extLst>
+          </a:blip>
+          <a:stretch>
+            <a:fillRect/>
+          </a:stretch>
+        </p:blipFill>
+        <p:spPr>
+          <a:xfrm>
+            <a:off x="5045006" y="6356057"/>
+            <a:ext cx="6409575" cy="363174"/>
+          </a:xfrm>
+          <a:prstGeom prst="rect">
+            <a:avLst/>
+          </a:prstGeom>
+        </p:spPr>
+      </p:pic>
+      <p:sp>
+        <p:nvSpPr>
+          <p:cNvPr id="84" name="Marcador de número de diapositiva 83">
+            <a:extLst>
+              <a:ext uri="{FF2B5EF4-FFF2-40B4-BE49-F238E27FC236}">
+                <a16:creationId xmlns:a16="http://schemas.microsoft.com/office/drawing/2014/main" id="{DF85D4F2-EF90-6BC0-8E40-FBA6EE764B3B}"/>
+              </a:ext>
+            </a:extLst>
+          </p:cNvPr>
+          <p:cNvSpPr>
+            <a:spLocks noGrp="1"/>
+          </p:cNvSpPr>
+          <p:nvPr>
+            <p:ph type="sldNum" sz="quarter" idx="7"/>
+          </p:nvPr>
+        </p:nvSpPr>
+        <p:spPr/>
+        <p:txBody>
+          <a:bodyPr/>
+          <a:lstStyle/>
+          <a:p>
+            <a:fld id="{B6F15528-21DE-4FAA-801E-634DDDAF4B2B}" type="slidenum">
+              <a:rPr lang="es-ES" smtClean="0"/>
+              <a:t>4</a:t>
+            </a:fld>
+            <a:endParaRPr lang="es-ES"/>
+          </a:p>
+        </p:txBody>
+      </p:sp>
+      <p:sp>
+        <p:nvSpPr>
+          <p:cNvPr id="3" name="Marcador de pie de página 2">
+            <a:extLst>
+              <a:ext uri="{FF2B5EF4-FFF2-40B4-BE49-F238E27FC236}">
+                <a16:creationId xmlns:a16="http://schemas.microsoft.com/office/drawing/2014/main" id="{3C1B55A1-A9A5-C391-4071-7EA86EAF64C0}"/>
+              </a:ext>
+            </a:extLst>
+          </p:cNvPr>
+          <p:cNvSpPr>
+            <a:spLocks noGrp="1"/>
+          </p:cNvSpPr>
+          <p:nvPr>
+            <p:ph type="ftr" sz="quarter" idx="5"/>
+          </p:nvPr>
+        </p:nvSpPr>
+        <p:spPr/>
+        <p:txBody>
+          <a:bodyPr/>
+          <a:lstStyle/>
+          <a:p>
+            <a:pPr marL="12700">
+              <a:spcBef>
+                <a:spcPts val="15"/>
+              </a:spcBef>
+            </a:pPr>
+            <a:r>
+              <a:rPr lang="es-ES" spc="-5"/>
+              <a:t>LAB 1.0 WAVEGUIDES</a:t>
+            </a:r>
+            <a:endParaRPr lang="es-ES" spc="-5" dirty="0"/>
+          </a:p>
+        </p:txBody>
+      </p:sp>
+      <p:sp>
+        <p:nvSpPr>
+          <p:cNvPr id="5" name="CuadroTexto 4">
+            <a:extLst>
+              <a:ext uri="{FF2B5EF4-FFF2-40B4-BE49-F238E27FC236}">
+                <a16:creationId xmlns:a16="http://schemas.microsoft.com/office/drawing/2014/main" id="{9BEDD745-C961-8871-5B7A-53C72BAFDA1D}"/>
+              </a:ext>
+            </a:extLst>
+          </p:cNvPr>
+          <p:cNvSpPr txBox="1"/>
+          <p:nvPr/>
+        </p:nvSpPr>
+        <p:spPr>
+          <a:xfrm>
+            <a:off x="381000" y="3746858"/>
+            <a:ext cx="11199971" cy="1200329"/>
+          </a:xfrm>
+          <a:prstGeom prst="rect">
+            <a:avLst/>
+          </a:prstGeom>
+          <a:solidFill>
+            <a:schemeClr val="bg1">
+              <a:lumMod val="95000"/>
+            </a:schemeClr>
+          </a:solidFill>
+          <a:ln w="28575">
+            <a:solidFill>
+              <a:srgbClr val="E0700D"/>
+            </a:solidFill>
+          </a:ln>
+        </p:spPr>
+        <p:txBody>
+          <a:bodyPr wrap="square" rtlCol="0">
+            <a:spAutoFit/>
+          </a:bodyPr>
+          <a:lstStyle/>
+          <a:p>
+            <a:pPr algn="just"/>
+            <a:r>
+              <a:rPr lang="es-ES" sz="1200" dirty="0">
+                <a:latin typeface="Arial" panose="020B0604020202020204" pitchFamily="34" charset="0"/>
+                <a:cs typeface="Arial" panose="020B0604020202020204" pitchFamily="34" charset="0"/>
+              </a:rPr>
+              <a:t>Las gráficas muestran la variación del índice de refracción (n) en función de la longitud de onda para el silicio, el nitruro de silicio y el dióxido de silicio. En los tres materiales se observa una ligera disminución de n a medida que aumenta la longitud de onda que puede dar lugar a dispersión cromática. Asimismo, se aprecia que cada material presenta un valor de índice de refracción distinto, lo que influye en el confinamiento y la propagación en la guía.</a:t>
+            </a:r>
+          </a:p>
+          <a:p>
+            <a:pPr algn="just"/>
+            <a:endParaRPr lang="es-ES" sz="1200" dirty="0">
+              <a:latin typeface="Arial" panose="020B0604020202020204" pitchFamily="34" charset="0"/>
+              <a:cs typeface="Arial" panose="020B0604020202020204" pitchFamily="34" charset="0"/>
+            </a:endParaRPr>
+          </a:p>
+          <a:p>
+            <a:pPr algn="just"/>
+            <a:endParaRPr lang="es-ES" sz="1200" dirty="0">
+              <a:latin typeface="Arial" panose="020B0604020202020204" pitchFamily="34" charset="0"/>
+              <a:cs typeface="Arial" panose="020B0604020202020204" pitchFamily="34" charset="0"/>
+            </a:endParaRPr>
+          </a:p>
+          <a:p>
+            <a:pPr algn="just"/>
+            <a:endParaRPr lang="es-ES" sz="1200" dirty="0">
+              <a:latin typeface="Arial" panose="020B0604020202020204" pitchFamily="34" charset="0"/>
+              <a:cs typeface="Arial" panose="020B0604020202020204" pitchFamily="34" charset="0"/>
+            </a:endParaRPr>
+          </a:p>
+        </p:txBody>
+      </p:sp>
+      <p:pic>
+        <p:nvPicPr>
+          <p:cNvPr id="7" name="Imagen 6" descr="Gráfico, Gráfico de líneas&#10;&#10;El contenido generado por IA puede ser incorrecto.">
+            <a:extLst>
+              <a:ext uri="{FF2B5EF4-FFF2-40B4-BE49-F238E27FC236}">
+                <a16:creationId xmlns:a16="http://schemas.microsoft.com/office/drawing/2014/main" id="{59ADF897-2A4F-7AAC-55FA-E5B2C77E8011}"/>
+              </a:ext>
+            </a:extLst>
+          </p:cNvPr>
+          <p:cNvPicPr>
+            <a:picLocks noChangeAspect="1"/>
+          </p:cNvPicPr>
+          <p:nvPr/>
+        </p:nvPicPr>
+        <p:blipFill>
+          <a:blip r:embed="rId5"/>
+          <a:stretch>
+            <a:fillRect/>
+          </a:stretch>
+        </p:blipFill>
+        <p:spPr>
+          <a:xfrm>
+            <a:off x="685800" y="926026"/>
+            <a:ext cx="3460630" cy="2696210"/>
+          </a:xfrm>
+          <a:prstGeom prst="rect">
+            <a:avLst/>
+          </a:prstGeom>
+        </p:spPr>
+      </p:pic>
+      <p:pic>
+        <p:nvPicPr>
+          <p:cNvPr id="9" name="Imagen 8" descr="Gráfico, Gráfico de líneas&#10;&#10;El contenido generado por IA puede ser incorrecto.">
+            <a:extLst>
+              <a:ext uri="{FF2B5EF4-FFF2-40B4-BE49-F238E27FC236}">
+                <a16:creationId xmlns:a16="http://schemas.microsoft.com/office/drawing/2014/main" id="{6664E989-F90C-4CE4-7096-A630A903C6F0}"/>
+              </a:ext>
+            </a:extLst>
+          </p:cNvPr>
+          <p:cNvPicPr>
+            <a:picLocks noChangeAspect="1"/>
+          </p:cNvPicPr>
+          <p:nvPr/>
+        </p:nvPicPr>
+        <p:blipFill>
+          <a:blip r:embed="rId6"/>
+          <a:stretch>
+            <a:fillRect/>
+          </a:stretch>
+        </p:blipFill>
+        <p:spPr>
+          <a:xfrm>
+            <a:off x="4191000" y="926026"/>
+            <a:ext cx="3584566" cy="2745753"/>
+          </a:xfrm>
+          <a:prstGeom prst="rect">
+            <a:avLst/>
+          </a:prstGeom>
+        </p:spPr>
+      </p:pic>
+      <p:pic>
+        <p:nvPicPr>
+          <p:cNvPr id="11" name="Imagen 10" descr="Gráfico, Gráfico de líneas&#10;&#10;El contenido generado por IA puede ser incorrecto.">
+            <a:extLst>
+              <a:ext uri="{FF2B5EF4-FFF2-40B4-BE49-F238E27FC236}">
+                <a16:creationId xmlns:a16="http://schemas.microsoft.com/office/drawing/2014/main" id="{B1AA1D81-CF0C-4C1E-D83F-AA4C8C94DDB7}"/>
+              </a:ext>
+            </a:extLst>
+          </p:cNvPr>
+          <p:cNvPicPr>
+            <a:picLocks noChangeAspect="1"/>
+          </p:cNvPicPr>
+          <p:nvPr/>
+        </p:nvPicPr>
+        <p:blipFill>
+          <a:blip r:embed="rId7"/>
+          <a:stretch>
+            <a:fillRect/>
+          </a:stretch>
+        </p:blipFill>
+        <p:spPr>
+          <a:xfrm>
+            <a:off x="7816849" y="910632"/>
+            <a:ext cx="3689351" cy="2788464"/>
+          </a:xfrm>
+          <a:prstGeom prst="rect">
+            <a:avLst/>
+          </a:prstGeom>
+        </p:spPr>
+      </p:pic>
+    </p:spTree>
+    <p:extLst>
+      <p:ext uri="{BB962C8B-B14F-4D97-AF65-F5344CB8AC3E}">
+        <p14:creationId xmlns:p14="http://schemas.microsoft.com/office/powerpoint/2010/main" val="1116100377"/>
+      </p:ext>
+    </p:extLst>
+  </p:cSld>
+  <p:clrMapOvr>
+    <a:masterClrMapping/>
+  </p:clrMapOvr>
+</p:sld>
+</file>
+
+<file path=ppt/slides/slide5.xml><?xml version="1.0" encoding="utf-8"?>
+<p:sld xmlns:a="http://schemas.openxmlformats.org/drawingml/2006/main" xmlns:r="http://schemas.openxmlformats.org/officeDocument/2006/relationships" xmlns:p="http://schemas.openxmlformats.org/presentationml/2006/main">
+  <p:cSld>
+    <p:spTree>
+      <p:nvGrpSpPr>
+        <p:cNvPr id="1" name="">
+          <a:extLst>
+            <a:ext uri="{FF2B5EF4-FFF2-40B4-BE49-F238E27FC236}">
+              <a16:creationId xmlns:a16="http://schemas.microsoft.com/office/drawing/2014/main" id="{31DE8FC5-51A5-E519-FF3C-244192A6E3C7}"/>
+            </a:ext>
+          </a:extLst>
+        </p:cNvPr>
+        <p:cNvGrpSpPr/>
+        <p:nvPr/>
+      </p:nvGrpSpPr>
+      <p:grpSpPr>
+        <a:xfrm>
+          <a:off x="0" y="0"/>
+          <a:ext cx="0" cy="0"/>
+          <a:chOff x="0" y="0"/>
+          <a:chExt cx="0" cy="0"/>
+        </a:xfrm>
+      </p:grpSpPr>
+      <p:sp>
+        <p:nvSpPr>
+          <p:cNvPr id="16" name="object 16">
+            <a:extLst>
+              <a:ext uri="{FF2B5EF4-FFF2-40B4-BE49-F238E27FC236}">
+                <a16:creationId xmlns:a16="http://schemas.microsoft.com/office/drawing/2014/main" id="{A08153FC-6804-7F8E-265B-A5B63827D06D}"/>
+              </a:ext>
+            </a:extLst>
+          </p:cNvPr>
+          <p:cNvSpPr txBox="1">
+            <a:spLocks noGrp="1"/>
+          </p:cNvSpPr>
+          <p:nvPr>
+            <p:ph type="title"/>
+          </p:nvPr>
+        </p:nvSpPr>
+        <p:spPr>
+          <a:xfrm>
+            <a:off x="685800" y="408883"/>
+            <a:ext cx="10994410" cy="782265"/>
+          </a:xfrm>
+          <a:prstGeom prst="rect">
+            <a:avLst/>
+          </a:prstGeom>
+        </p:spPr>
+        <p:txBody>
+          <a:bodyPr vert="horz" wrap="square" lIns="0" tIns="12700" rIns="0" bIns="0" rtlCol="0">
+            <a:spAutoFit/>
+          </a:bodyPr>
+          <a:lstStyle/>
+          <a:p>
+            <a:pPr marL="12700">
+              <a:lnSpc>
+                <a:spcPct val="100000"/>
+              </a:lnSpc>
+              <a:spcBef>
+                <a:spcPts val="100"/>
+              </a:spcBef>
+            </a:pPr>
+            <a:r>
+              <a:rPr lang="en-US" sz="2500" dirty="0"/>
+              <a:t>Learning outcome #1.2 – Cross - Section</a:t>
+            </a:r>
+            <a:br>
+              <a:rPr lang="es-ES" sz="2500" spc="-5" dirty="0">
+                <a:latin typeface="+mj-lt"/>
+                <a:cs typeface="Lucida Sans"/>
+              </a:rPr>
+            </a:br>
+            <a:endParaRPr sz="2500" b="0" dirty="0">
+              <a:latin typeface="+mj-lt"/>
+              <a:cs typeface="Lucida Sans"/>
+            </a:endParaRPr>
+          </a:p>
+        </p:txBody>
+      </p:sp>
+      <p:pic>
+        <p:nvPicPr>
+          <p:cNvPr id="83" name="Gráfico 82">
+            <a:extLst>
+              <a:ext uri="{FF2B5EF4-FFF2-40B4-BE49-F238E27FC236}">
+                <a16:creationId xmlns:a16="http://schemas.microsoft.com/office/drawing/2014/main" id="{2BAB1CD2-5C6D-6871-F421-A2B3FCDCECEE}"/>
+              </a:ext>
+            </a:extLst>
+          </p:cNvPr>
+          <p:cNvPicPr>
+            <a:picLocks noChangeAspect="1"/>
+          </p:cNvPicPr>
+          <p:nvPr/>
+        </p:nvPicPr>
+        <p:blipFill>
+          <a:blip r:embed="rId3">
+            <a:extLst>
+              <a:ext uri="{96DAC541-7B7A-43D3-8B79-37D633B846F1}">
+                <asvg:svgBlip xmlns:asvg="http://schemas.microsoft.com/office/drawing/2016/SVG/main" r:embed="rId4"/>
+              </a:ext>
+            </a:extLst>
+          </a:blip>
+          <a:stretch>
+            <a:fillRect/>
+          </a:stretch>
+        </p:blipFill>
+        <p:spPr>
+          <a:xfrm>
+            <a:off x="5045006" y="6356057"/>
+            <a:ext cx="6409575" cy="363174"/>
+          </a:xfrm>
+          <a:prstGeom prst="rect">
+            <a:avLst/>
+          </a:prstGeom>
+        </p:spPr>
+      </p:pic>
+      <p:sp>
+        <p:nvSpPr>
+          <p:cNvPr id="84" name="Marcador de número de diapositiva 83">
+            <a:extLst>
+              <a:ext uri="{FF2B5EF4-FFF2-40B4-BE49-F238E27FC236}">
+                <a16:creationId xmlns:a16="http://schemas.microsoft.com/office/drawing/2014/main" id="{E9F8AA0F-C575-D859-F0AD-B35A5C1F720C}"/>
+              </a:ext>
+            </a:extLst>
+          </p:cNvPr>
+          <p:cNvSpPr>
+            <a:spLocks noGrp="1"/>
+          </p:cNvSpPr>
+          <p:nvPr>
+            <p:ph type="sldNum" sz="quarter" idx="7"/>
+          </p:nvPr>
+        </p:nvSpPr>
+        <p:spPr/>
+        <p:txBody>
+          <a:bodyPr/>
+          <a:lstStyle/>
+          <a:p>
+            <a:fld id="{B6F15528-21DE-4FAA-801E-634DDDAF4B2B}" type="slidenum">
+              <a:rPr lang="es-ES" smtClean="0"/>
+              <a:t>5</a:t>
+            </a:fld>
+            <a:endParaRPr lang="es-ES"/>
+          </a:p>
+        </p:txBody>
+      </p:sp>
+      <p:sp>
+        <p:nvSpPr>
+          <p:cNvPr id="3" name="Marcador de pie de página 2">
+            <a:extLst>
+              <a:ext uri="{FF2B5EF4-FFF2-40B4-BE49-F238E27FC236}">
+                <a16:creationId xmlns:a16="http://schemas.microsoft.com/office/drawing/2014/main" id="{3B57B873-899A-BCBB-27B7-94F0F8082354}"/>
+              </a:ext>
+            </a:extLst>
+          </p:cNvPr>
+          <p:cNvSpPr>
+            <a:spLocks noGrp="1"/>
+          </p:cNvSpPr>
+          <p:nvPr>
+            <p:ph type="ftr" sz="quarter" idx="5"/>
+          </p:nvPr>
+        </p:nvSpPr>
+        <p:spPr/>
+        <p:txBody>
+          <a:bodyPr/>
+          <a:lstStyle/>
+          <a:p>
+            <a:pPr marL="12700">
+              <a:spcBef>
+                <a:spcPts val="15"/>
+              </a:spcBef>
+            </a:pPr>
+            <a:r>
+              <a:rPr lang="es-ES" spc="-5"/>
+              <a:t>LAB 1.0 WAVEGUIDES</a:t>
+            </a:r>
+            <a:endParaRPr lang="es-ES" spc="-5" dirty="0"/>
+          </a:p>
+        </p:txBody>
+      </p:sp>
+      <p:sp>
+        <p:nvSpPr>
+          <p:cNvPr id="5" name="CuadroTexto 4">
+            <a:extLst>
+              <a:ext uri="{FF2B5EF4-FFF2-40B4-BE49-F238E27FC236}">
+                <a16:creationId xmlns:a16="http://schemas.microsoft.com/office/drawing/2014/main" id="{9358B08F-129E-A3BF-C711-7DFBD318626B}"/>
+              </a:ext>
+            </a:extLst>
+          </p:cNvPr>
+          <p:cNvSpPr txBox="1"/>
+          <p:nvPr/>
+        </p:nvSpPr>
+        <p:spPr>
+          <a:xfrm>
+            <a:off x="381000" y="3746858"/>
+            <a:ext cx="11199971" cy="1015663"/>
+          </a:xfrm>
+          <a:prstGeom prst="rect">
+            <a:avLst/>
+          </a:prstGeom>
+          <a:solidFill>
+            <a:schemeClr val="bg1">
+              <a:lumMod val="95000"/>
+            </a:schemeClr>
+          </a:solidFill>
+          <a:ln w="28575">
+            <a:solidFill>
+              <a:srgbClr val="E0700D"/>
+            </a:solidFill>
+          </a:ln>
+        </p:spPr>
+        <p:txBody>
+          <a:bodyPr wrap="square" rtlCol="0">
+            <a:spAutoFit/>
+          </a:bodyPr>
+          <a:lstStyle/>
+          <a:p>
+            <a:pPr algn="just"/>
+            <a:r>
+              <a:rPr lang="es-ES" sz="1200" dirty="0">
+                <a:latin typeface="Arial" panose="020B0604020202020204" pitchFamily="34" charset="0"/>
+                <a:cs typeface="Arial" panose="020B0604020202020204" pitchFamily="34" charset="0"/>
+              </a:rPr>
+              <a:t>En las imágenes se muestra la sección cruzada de las guías Deep y </a:t>
+            </a:r>
+            <a:r>
+              <a:rPr lang="es-ES" sz="1200" dirty="0" err="1">
+                <a:latin typeface="Arial" panose="020B0604020202020204" pitchFamily="34" charset="0"/>
+                <a:cs typeface="Arial" panose="020B0604020202020204" pitchFamily="34" charset="0"/>
+              </a:rPr>
+              <a:t>Shallow</a:t>
+            </a:r>
+            <a:r>
+              <a:rPr lang="es-ES" sz="1200" dirty="0">
+                <a:latin typeface="Arial" panose="020B0604020202020204" pitchFamily="34" charset="0"/>
+                <a:cs typeface="Arial" panose="020B0604020202020204" pitchFamily="34" charset="0"/>
+              </a:rPr>
+              <a:t>, respectivamente.</a:t>
+            </a:r>
+          </a:p>
+          <a:p>
+            <a:pPr algn="just"/>
+            <a:endParaRPr lang="es-ES" sz="1200" dirty="0">
+              <a:latin typeface="Arial" panose="020B0604020202020204" pitchFamily="34" charset="0"/>
+              <a:cs typeface="Arial" panose="020B0604020202020204" pitchFamily="34" charset="0"/>
+            </a:endParaRPr>
+          </a:p>
+          <a:p>
+            <a:pPr marL="171450" indent="-171450" algn="just">
+              <a:buFontTx/>
+              <a:buChar char="-"/>
+            </a:pPr>
+            <a:r>
+              <a:rPr lang="es-ES" sz="1200" dirty="0">
+                <a:latin typeface="Arial" panose="020B0604020202020204" pitchFamily="34" charset="0"/>
+                <a:cs typeface="Arial" panose="020B0604020202020204" pitchFamily="34" charset="0"/>
+              </a:rPr>
+              <a:t>Para la guía Deep las dimensiones son: </a:t>
+            </a:r>
+            <a:r>
+              <a:rPr lang="es-ES" sz="1200" dirty="0" err="1">
+                <a:latin typeface="Arial" panose="020B0604020202020204" pitchFamily="34" charset="0"/>
+                <a:cs typeface="Arial" panose="020B0604020202020204" pitchFamily="34" charset="0"/>
+              </a:rPr>
+              <a:t>width</a:t>
+            </a:r>
+            <a:r>
+              <a:rPr lang="es-ES" sz="1200" dirty="0">
+                <a:latin typeface="Arial" panose="020B0604020202020204" pitchFamily="34" charset="0"/>
+                <a:cs typeface="Arial" panose="020B0604020202020204" pitchFamily="34" charset="0"/>
+              </a:rPr>
+              <a:t> = 1.2 </a:t>
+            </a:r>
+            <a:r>
+              <a:rPr lang="es-ES" sz="1200" dirty="0" err="1">
+                <a:latin typeface="Arial" panose="020B0604020202020204" pitchFamily="34" charset="0"/>
+                <a:cs typeface="Arial" panose="020B0604020202020204" pitchFamily="34" charset="0"/>
+              </a:rPr>
+              <a:t>um</a:t>
+            </a:r>
+            <a:r>
+              <a:rPr lang="es-ES" sz="1200" dirty="0">
+                <a:latin typeface="Arial" panose="020B0604020202020204" pitchFamily="34" charset="0"/>
+                <a:cs typeface="Arial" panose="020B0604020202020204" pitchFamily="34" charset="0"/>
+              </a:rPr>
+              <a:t> y </a:t>
+            </a:r>
+            <a:r>
+              <a:rPr lang="es-ES" sz="1200" dirty="0" err="1">
+                <a:latin typeface="Arial" panose="020B0604020202020204" pitchFamily="34" charset="0"/>
+                <a:cs typeface="Arial" panose="020B0604020202020204" pitchFamily="34" charset="0"/>
+              </a:rPr>
+              <a:t>height</a:t>
+            </a:r>
+            <a:r>
+              <a:rPr lang="es-ES" sz="1200" dirty="0">
+                <a:latin typeface="Arial" panose="020B0604020202020204" pitchFamily="34" charset="0"/>
+                <a:cs typeface="Arial" panose="020B0604020202020204" pitchFamily="34" charset="0"/>
+              </a:rPr>
+              <a:t> = 0.3 </a:t>
+            </a:r>
+            <a:r>
+              <a:rPr lang="es-ES" sz="1200" dirty="0" err="1">
+                <a:latin typeface="Arial" panose="020B0604020202020204" pitchFamily="34" charset="0"/>
+                <a:cs typeface="Arial" panose="020B0604020202020204" pitchFamily="34" charset="0"/>
+              </a:rPr>
+              <a:t>um</a:t>
+            </a:r>
+            <a:r>
+              <a:rPr lang="es-ES" sz="1200" dirty="0">
+                <a:latin typeface="Arial" panose="020B0604020202020204" pitchFamily="34" charset="0"/>
+                <a:cs typeface="Arial" panose="020B0604020202020204" pitchFamily="34" charset="0"/>
+              </a:rPr>
+              <a:t>.</a:t>
+            </a:r>
+          </a:p>
+          <a:p>
+            <a:pPr marL="171450" indent="-171450" algn="just">
+              <a:buFontTx/>
+              <a:buChar char="-"/>
+            </a:pPr>
+            <a:r>
+              <a:rPr lang="es-ES" sz="1200" dirty="0">
+                <a:latin typeface="Arial" panose="020B0604020202020204" pitchFamily="34" charset="0"/>
+                <a:cs typeface="Arial" panose="020B0604020202020204" pitchFamily="34" charset="0"/>
+              </a:rPr>
+              <a:t>Para la guía </a:t>
+            </a:r>
+            <a:r>
+              <a:rPr lang="es-ES" sz="1200" dirty="0" err="1">
+                <a:latin typeface="Arial" panose="020B0604020202020204" pitchFamily="34" charset="0"/>
+                <a:cs typeface="Arial" panose="020B0604020202020204" pitchFamily="34" charset="0"/>
+              </a:rPr>
+              <a:t>Shallow</a:t>
+            </a:r>
+            <a:r>
+              <a:rPr lang="es-ES" sz="1200" dirty="0">
+                <a:latin typeface="Arial" panose="020B0604020202020204" pitchFamily="34" charset="0"/>
+                <a:cs typeface="Arial" panose="020B0604020202020204" pitchFamily="34" charset="0"/>
+              </a:rPr>
+              <a:t> las dimensiones son: </a:t>
+            </a:r>
+            <a:r>
+              <a:rPr lang="es-ES" sz="1200" dirty="0" err="1">
+                <a:latin typeface="Arial" panose="020B0604020202020204" pitchFamily="34" charset="0"/>
+                <a:cs typeface="Arial" panose="020B0604020202020204" pitchFamily="34" charset="0"/>
+              </a:rPr>
+              <a:t>width</a:t>
+            </a:r>
+            <a:r>
+              <a:rPr lang="es-ES" sz="1200" dirty="0">
+                <a:latin typeface="Arial" panose="020B0604020202020204" pitchFamily="34" charset="0"/>
+                <a:cs typeface="Arial" panose="020B0604020202020204" pitchFamily="34" charset="0"/>
+              </a:rPr>
+              <a:t> = 1.2 </a:t>
+            </a:r>
+            <a:r>
+              <a:rPr lang="es-ES" sz="1200" dirty="0" err="1">
+                <a:latin typeface="Arial" panose="020B0604020202020204" pitchFamily="34" charset="0"/>
+                <a:cs typeface="Arial" panose="020B0604020202020204" pitchFamily="34" charset="0"/>
+              </a:rPr>
+              <a:t>um</a:t>
+            </a:r>
+            <a:r>
+              <a:rPr lang="es-ES" sz="1200" dirty="0">
+                <a:latin typeface="Arial" panose="020B0604020202020204" pitchFamily="34" charset="0"/>
+                <a:cs typeface="Arial" panose="020B0604020202020204" pitchFamily="34" charset="0"/>
+              </a:rPr>
+              <a:t>, </a:t>
+            </a:r>
+            <a:r>
+              <a:rPr lang="es-ES" sz="1200" dirty="0" err="1">
+                <a:latin typeface="Arial" panose="020B0604020202020204" pitchFamily="34" charset="0"/>
+                <a:cs typeface="Arial" panose="020B0604020202020204" pitchFamily="34" charset="0"/>
+              </a:rPr>
+              <a:t>height</a:t>
+            </a:r>
+            <a:r>
+              <a:rPr lang="es-ES" sz="1200" dirty="0">
+                <a:latin typeface="Arial" panose="020B0604020202020204" pitchFamily="34" charset="0"/>
+                <a:cs typeface="Arial" panose="020B0604020202020204" pitchFamily="34" charset="0"/>
+              </a:rPr>
+              <a:t> = 0.3 </a:t>
+            </a:r>
+            <a:r>
+              <a:rPr lang="es-ES" sz="1200" dirty="0" err="1">
+                <a:latin typeface="Arial" panose="020B0604020202020204" pitchFamily="34" charset="0"/>
+                <a:cs typeface="Arial" panose="020B0604020202020204" pitchFamily="34" charset="0"/>
+              </a:rPr>
+              <a:t>um</a:t>
+            </a:r>
+            <a:r>
+              <a:rPr lang="es-ES" sz="1200" dirty="0">
+                <a:latin typeface="Arial" panose="020B0604020202020204" pitchFamily="34" charset="0"/>
+                <a:cs typeface="Arial" panose="020B0604020202020204" pitchFamily="34" charset="0"/>
+              </a:rPr>
+              <a:t> y </a:t>
+            </a:r>
+            <a:r>
+              <a:rPr lang="es-ES" sz="1200" dirty="0" err="1">
+                <a:latin typeface="Arial" panose="020B0604020202020204" pitchFamily="34" charset="0"/>
+                <a:cs typeface="Arial" panose="020B0604020202020204" pitchFamily="34" charset="0"/>
+              </a:rPr>
+              <a:t>slab_height</a:t>
+            </a:r>
+            <a:r>
+              <a:rPr lang="es-ES" sz="1200" dirty="0">
+                <a:latin typeface="Arial" panose="020B0604020202020204" pitchFamily="34" charset="0"/>
+                <a:cs typeface="Arial" panose="020B0604020202020204" pitchFamily="34" charset="0"/>
+              </a:rPr>
+              <a:t> = 0.15 </a:t>
+            </a:r>
+            <a:r>
+              <a:rPr lang="es-ES" sz="1200" dirty="0" err="1">
+                <a:latin typeface="Arial" panose="020B0604020202020204" pitchFamily="34" charset="0"/>
+                <a:cs typeface="Arial" panose="020B0604020202020204" pitchFamily="34" charset="0"/>
+              </a:rPr>
+              <a:t>um</a:t>
+            </a:r>
+            <a:r>
+              <a:rPr lang="es-ES" sz="1200" dirty="0">
+                <a:latin typeface="Arial" panose="020B0604020202020204" pitchFamily="34" charset="0"/>
+                <a:cs typeface="Arial" panose="020B0604020202020204" pitchFamily="34" charset="0"/>
+              </a:rPr>
+              <a:t>. </a:t>
+            </a:r>
+          </a:p>
+          <a:p>
+            <a:pPr algn="just"/>
+            <a:endParaRPr lang="es-ES" sz="1200" dirty="0">
+              <a:latin typeface="Arial" panose="020B0604020202020204" pitchFamily="34" charset="0"/>
+              <a:cs typeface="Arial" panose="020B0604020202020204" pitchFamily="34" charset="0"/>
+            </a:endParaRPr>
+          </a:p>
+        </p:txBody>
+      </p:sp>
+      <p:pic>
+        <p:nvPicPr>
+          <p:cNvPr id="4" name="Imagen 3" descr="Gráfico&#10;&#10;El contenido generado por IA puede ser incorrecto.">
+            <a:extLst>
+              <a:ext uri="{FF2B5EF4-FFF2-40B4-BE49-F238E27FC236}">
+                <a16:creationId xmlns:a16="http://schemas.microsoft.com/office/drawing/2014/main" id="{351B7EC1-D5A0-8397-E0E2-C0AC026453F8}"/>
+              </a:ext>
+            </a:extLst>
+          </p:cNvPr>
+          <p:cNvPicPr>
+            <a:picLocks noChangeAspect="1"/>
+          </p:cNvPicPr>
+          <p:nvPr/>
+        </p:nvPicPr>
+        <p:blipFill>
+          <a:blip r:embed="rId5"/>
+          <a:stretch>
+            <a:fillRect/>
+          </a:stretch>
+        </p:blipFill>
+        <p:spPr>
+          <a:xfrm>
+            <a:off x="1345288" y="765509"/>
+            <a:ext cx="4015023" cy="2935170"/>
+          </a:xfrm>
+          <a:prstGeom prst="rect">
+            <a:avLst/>
+          </a:prstGeom>
+        </p:spPr>
+      </p:pic>
+      <p:pic>
+        <p:nvPicPr>
+          <p:cNvPr id="8" name="Imagen 7" descr="Gráfico&#10;&#10;El contenido generado por IA puede ser incorrecto.">
+            <a:extLst>
+              <a:ext uri="{FF2B5EF4-FFF2-40B4-BE49-F238E27FC236}">
+                <a16:creationId xmlns:a16="http://schemas.microsoft.com/office/drawing/2014/main" id="{B69B693A-6AFD-210D-F467-AB7C00CE7CB9}"/>
+              </a:ext>
+            </a:extLst>
+          </p:cNvPr>
+          <p:cNvPicPr>
+            <a:picLocks noChangeAspect="1"/>
+          </p:cNvPicPr>
+          <p:nvPr/>
+        </p:nvPicPr>
+        <p:blipFill>
+          <a:blip r:embed="rId6"/>
+          <a:stretch>
+            <a:fillRect/>
+          </a:stretch>
+        </p:blipFill>
+        <p:spPr>
+          <a:xfrm>
+            <a:off x="6220648" y="726690"/>
+            <a:ext cx="4058289" cy="2966800"/>
+          </a:xfrm>
+          <a:prstGeom prst="rect">
+            <a:avLst/>
+          </a:prstGeom>
+        </p:spPr>
+      </p:pic>
+    </p:spTree>
+    <p:extLst>
+      <p:ext uri="{BB962C8B-B14F-4D97-AF65-F5344CB8AC3E}">
+        <p14:creationId xmlns:p14="http://schemas.microsoft.com/office/powerpoint/2010/main" val="632762511"/>
+      </p:ext>
+    </p:extLst>
+  </p:cSld>
+  <p:clrMapOvr>
+    <a:masterClrMapping/>
+  </p:clrMapOvr>
+</p:sld>
+</file>
+
+<file path=ppt/slides/slide6.xml><?xml version="1.0" encoding="utf-8"?>
+<p:sld xmlns:a="http://schemas.openxmlformats.org/drawingml/2006/main" xmlns:r="http://schemas.openxmlformats.org/officeDocument/2006/relationships" xmlns:p="http://schemas.openxmlformats.org/presentationml/2006/main">
+  <p:cSld>
+    <p:spTree>
+      <p:nvGrpSpPr>
+        <p:cNvPr id="1" name="">
+          <a:extLst>
+            <a:ext uri="{FF2B5EF4-FFF2-40B4-BE49-F238E27FC236}">
+              <a16:creationId xmlns:a16="http://schemas.microsoft.com/office/drawing/2014/main" id="{FA8CBC75-98C8-5092-E7A9-F3E53CF502A3}"/>
+            </a:ext>
+          </a:extLst>
+        </p:cNvPr>
+        <p:cNvGrpSpPr/>
+        <p:nvPr/>
+      </p:nvGrpSpPr>
+      <p:grpSpPr>
+        <a:xfrm>
+          <a:off x="0" y="0"/>
+          <a:ext cx="0" cy="0"/>
+          <a:chOff x="0" y="0"/>
+          <a:chExt cx="0" cy="0"/>
+        </a:xfrm>
+      </p:grpSpPr>
+      <p:sp>
+        <p:nvSpPr>
+          <p:cNvPr id="16" name="object 16">
+            <a:extLst>
+              <a:ext uri="{FF2B5EF4-FFF2-40B4-BE49-F238E27FC236}">
+                <a16:creationId xmlns:a16="http://schemas.microsoft.com/office/drawing/2014/main" id="{22CEE061-4B1B-A03F-2DAE-0F8E49FE715B}"/>
+              </a:ext>
+            </a:extLst>
+          </p:cNvPr>
+          <p:cNvSpPr txBox="1">
+            <a:spLocks noGrp="1"/>
+          </p:cNvSpPr>
+          <p:nvPr>
+            <p:ph type="title"/>
+          </p:nvPr>
+        </p:nvSpPr>
+        <p:spPr>
+          <a:xfrm>
+            <a:off x="685800" y="408883"/>
+            <a:ext cx="10994410" cy="397545"/>
+          </a:xfrm>
+          <a:prstGeom prst="rect">
+            <a:avLst/>
+          </a:prstGeom>
+        </p:spPr>
+        <p:txBody>
+          <a:bodyPr vert="horz" wrap="square" lIns="0" tIns="12700" rIns="0" bIns="0" rtlCol="0">
+            <a:spAutoFit/>
+          </a:bodyPr>
+          <a:lstStyle/>
+          <a:p>
+            <a:pPr marL="12700">
+              <a:lnSpc>
+                <a:spcPct val="100000"/>
+              </a:lnSpc>
+              <a:spcBef>
+                <a:spcPts val="100"/>
+              </a:spcBef>
+            </a:pPr>
+            <a:r>
+              <a:rPr lang="en-US" sz="2500" dirty="0"/>
+              <a:t>Learning outcome #1.3 – Simulations</a:t>
+            </a:r>
+            <a:endParaRPr sz="2500" b="0" dirty="0">
+              <a:latin typeface="+mj-lt"/>
+              <a:cs typeface="Lucida Sans"/>
+            </a:endParaRPr>
+          </a:p>
+        </p:txBody>
+      </p:sp>
+      <p:pic>
+        <p:nvPicPr>
+          <p:cNvPr id="83" name="Gráfico 82">
+            <a:extLst>
+              <a:ext uri="{FF2B5EF4-FFF2-40B4-BE49-F238E27FC236}">
+                <a16:creationId xmlns:a16="http://schemas.microsoft.com/office/drawing/2014/main" id="{F0E5E6A2-5834-3066-5ABD-53F9C3BACE50}"/>
+              </a:ext>
+            </a:extLst>
+          </p:cNvPr>
+          <p:cNvPicPr>
+            <a:picLocks noChangeAspect="1"/>
+          </p:cNvPicPr>
+          <p:nvPr/>
+        </p:nvPicPr>
+        <p:blipFill>
+          <a:blip r:embed="rId3">
+            <a:extLst>
+              <a:ext uri="{96DAC541-7B7A-43D3-8B79-37D633B846F1}">
+                <asvg:svgBlip xmlns:asvg="http://schemas.microsoft.com/office/drawing/2016/SVG/main" r:embed="rId4"/>
+              </a:ext>
+            </a:extLst>
+          </a:blip>
+          <a:stretch>
+            <a:fillRect/>
+          </a:stretch>
+        </p:blipFill>
+        <p:spPr>
+          <a:xfrm>
+            <a:off x="5045006" y="6356057"/>
+            <a:ext cx="6409575" cy="363174"/>
+          </a:xfrm>
+          <a:prstGeom prst="rect">
+            <a:avLst/>
+          </a:prstGeom>
+        </p:spPr>
+      </p:pic>
+      <p:sp>
+        <p:nvSpPr>
+          <p:cNvPr id="84" name="Marcador de número de diapositiva 83">
+            <a:extLst>
+              <a:ext uri="{FF2B5EF4-FFF2-40B4-BE49-F238E27FC236}">
+                <a16:creationId xmlns:a16="http://schemas.microsoft.com/office/drawing/2014/main" id="{F6E29818-720B-4F4D-6653-64C8B4F263DE}"/>
+              </a:ext>
+            </a:extLst>
+          </p:cNvPr>
+          <p:cNvSpPr>
+            <a:spLocks noGrp="1"/>
+          </p:cNvSpPr>
+          <p:nvPr>
+            <p:ph type="sldNum" sz="quarter" idx="7"/>
+          </p:nvPr>
+        </p:nvSpPr>
+        <p:spPr/>
+        <p:txBody>
+          <a:bodyPr/>
+          <a:lstStyle/>
+          <a:p>
+            <a:fld id="{B6F15528-21DE-4FAA-801E-634DDDAF4B2B}" type="slidenum">
+              <a:rPr lang="es-ES" smtClean="0"/>
+              <a:t>6</a:t>
+            </a:fld>
+            <a:endParaRPr lang="es-ES"/>
+          </a:p>
+        </p:txBody>
+      </p:sp>
+      <p:sp>
+        <p:nvSpPr>
+          <p:cNvPr id="3" name="Marcador de pie de página 2">
+            <a:extLst>
+              <a:ext uri="{FF2B5EF4-FFF2-40B4-BE49-F238E27FC236}">
+                <a16:creationId xmlns:a16="http://schemas.microsoft.com/office/drawing/2014/main" id="{D6B52AF5-5352-3814-820A-67C2CB07F122}"/>
+              </a:ext>
+            </a:extLst>
+          </p:cNvPr>
+          <p:cNvSpPr>
+            <a:spLocks noGrp="1"/>
+          </p:cNvSpPr>
+          <p:nvPr>
+            <p:ph type="ftr" sz="quarter" idx="5"/>
+          </p:nvPr>
+        </p:nvSpPr>
+        <p:spPr/>
+        <p:txBody>
+          <a:bodyPr/>
+          <a:lstStyle/>
+          <a:p>
+            <a:pPr marL="12700">
+              <a:spcBef>
+                <a:spcPts val="15"/>
+              </a:spcBef>
+            </a:pPr>
+            <a:r>
+              <a:rPr lang="es-ES" spc="-5"/>
+              <a:t>LAB 1.0 WAVEGUIDES</a:t>
+            </a:r>
+            <a:endParaRPr lang="es-ES" spc="-5" dirty="0"/>
+          </a:p>
+        </p:txBody>
+      </p:sp>
+      <p:sp>
+        <p:nvSpPr>
+          <p:cNvPr id="5" name="CuadroTexto 4">
+            <a:extLst>
+              <a:ext uri="{FF2B5EF4-FFF2-40B4-BE49-F238E27FC236}">
+                <a16:creationId xmlns:a16="http://schemas.microsoft.com/office/drawing/2014/main" id="{59FD84E3-2DC5-745A-C239-60F1257D78AC}"/>
+              </a:ext>
+            </a:extLst>
+          </p:cNvPr>
+          <p:cNvSpPr txBox="1"/>
+          <p:nvPr/>
+        </p:nvSpPr>
+        <p:spPr>
+          <a:xfrm>
+            <a:off x="583019" y="3256134"/>
+            <a:ext cx="11199971" cy="1384995"/>
+          </a:xfrm>
+          <a:prstGeom prst="rect">
+            <a:avLst/>
+          </a:prstGeom>
+          <a:solidFill>
+            <a:schemeClr val="bg1">
+              <a:lumMod val="95000"/>
+            </a:schemeClr>
+          </a:solidFill>
+          <a:ln w="28575">
+            <a:solidFill>
+              <a:srgbClr val="E0700D"/>
+            </a:solidFill>
+          </a:ln>
+        </p:spPr>
+        <p:txBody>
+          <a:bodyPr wrap="square" rtlCol="0">
+            <a:spAutoFit/>
+          </a:bodyPr>
+          <a:lstStyle/>
+          <a:p>
+            <a:pPr algn="just"/>
+            <a:r>
+              <a:rPr lang="es-ES" sz="1200" dirty="0">
+                <a:latin typeface="Arial" panose="020B0604020202020204" pitchFamily="34" charset="0"/>
+                <a:cs typeface="Arial" panose="020B0604020202020204" pitchFamily="34" charset="0"/>
+              </a:rPr>
+              <a:t>En las imágenes se muestra la distribución del campo eléctrico a lo largo de la sección cruzada de una guía Deep para una longitud de onda de 1550 nm para los distintos modos que se propagan TE0, TM0, TE1 y TM1, respectivamente.</a:t>
+            </a:r>
+          </a:p>
+          <a:p>
+            <a:pPr algn="just"/>
+            <a:endParaRPr lang="es-ES" sz="1200" dirty="0">
+              <a:latin typeface="Arial" panose="020B0604020202020204" pitchFamily="34" charset="0"/>
+              <a:cs typeface="Arial" panose="020B0604020202020204" pitchFamily="34" charset="0"/>
+            </a:endParaRPr>
+          </a:p>
+          <a:p>
+            <a:pPr algn="just"/>
+            <a:r>
+              <a:rPr lang="es-ES" sz="1200" dirty="0">
+                <a:latin typeface="Arial" panose="020B0604020202020204" pitchFamily="34" charset="0"/>
+                <a:cs typeface="Arial" panose="020B0604020202020204" pitchFamily="34" charset="0"/>
+              </a:rPr>
+              <a:t>Se observa como el modo TE0 está confinado mayoritariamente en el núcleo al igual que el modo TM0, aunque este está menos confinado. Además, los modos TE1 y TM1 apenas se propagan por el núcleo.</a:t>
+            </a:r>
+          </a:p>
+          <a:p>
+            <a:pPr algn="just"/>
+            <a:endParaRPr lang="es-ES" sz="1200" dirty="0">
+              <a:latin typeface="Arial" panose="020B0604020202020204" pitchFamily="34" charset="0"/>
+              <a:cs typeface="Arial" panose="020B0604020202020204" pitchFamily="34" charset="0"/>
+            </a:endParaRPr>
+          </a:p>
+          <a:p>
+            <a:pPr algn="just"/>
+            <a:endParaRPr lang="es-ES" sz="1200" dirty="0">
+              <a:latin typeface="Arial" panose="020B0604020202020204" pitchFamily="34" charset="0"/>
+              <a:cs typeface="Arial" panose="020B0604020202020204" pitchFamily="34" charset="0"/>
+            </a:endParaRPr>
+          </a:p>
+        </p:txBody>
+      </p:sp>
+      <p:pic>
+        <p:nvPicPr>
+          <p:cNvPr id="6" name="Imagen 5">
+            <a:extLst>
+              <a:ext uri="{FF2B5EF4-FFF2-40B4-BE49-F238E27FC236}">
+                <a16:creationId xmlns:a16="http://schemas.microsoft.com/office/drawing/2014/main" id="{E65A65A2-C103-8A2F-6C83-8FF92A86618C}"/>
+              </a:ext>
+            </a:extLst>
+          </p:cNvPr>
+          <p:cNvPicPr>
+            <a:picLocks noChangeAspect="1"/>
+          </p:cNvPicPr>
+          <p:nvPr/>
+        </p:nvPicPr>
+        <p:blipFill>
+          <a:blip r:embed="rId5">
+            <a:extLst>
+              <a:ext uri="{28A0092B-C50C-407E-A947-70E740481C1C}">
+                <a14:useLocalDpi xmlns:a14="http://schemas.microsoft.com/office/drawing/2010/main" val="0"/>
+              </a:ext>
+            </a:extLst>
+          </a:blip>
+          <a:srcRect/>
+          <a:stretch/>
+        </p:blipFill>
+        <p:spPr>
+          <a:xfrm>
+            <a:off x="573745" y="1052230"/>
+            <a:ext cx="2814909" cy="1894462"/>
+          </a:xfrm>
+          <a:prstGeom prst="rect">
+            <a:avLst/>
+          </a:prstGeom>
+        </p:spPr>
+      </p:pic>
+      <p:pic>
+        <p:nvPicPr>
+          <p:cNvPr id="9" name="Imagen 8">
+            <a:extLst>
+              <a:ext uri="{FF2B5EF4-FFF2-40B4-BE49-F238E27FC236}">
+                <a16:creationId xmlns:a16="http://schemas.microsoft.com/office/drawing/2014/main" id="{87646738-C4D6-330B-5385-717DD58775C4}"/>
+              </a:ext>
+            </a:extLst>
+          </p:cNvPr>
+          <p:cNvPicPr>
+            <a:picLocks noChangeAspect="1"/>
+          </p:cNvPicPr>
+          <p:nvPr/>
+        </p:nvPicPr>
+        <p:blipFill>
+          <a:blip r:embed="rId6">
+            <a:extLst>
+              <a:ext uri="{28A0092B-C50C-407E-A947-70E740481C1C}">
+                <a14:useLocalDpi xmlns:a14="http://schemas.microsoft.com/office/drawing/2010/main" val="0"/>
+              </a:ext>
+            </a:extLst>
+          </a:blip>
+          <a:srcRect/>
+          <a:stretch/>
+        </p:blipFill>
+        <p:spPr>
+          <a:xfrm>
+            <a:off x="3505200" y="1052230"/>
+            <a:ext cx="2814909" cy="1894462"/>
+          </a:xfrm>
+          <a:prstGeom prst="rect">
+            <a:avLst/>
+          </a:prstGeom>
+        </p:spPr>
+      </p:pic>
+      <p:pic>
+        <p:nvPicPr>
+          <p:cNvPr id="11" name="Imagen 10">
+            <a:extLst>
+              <a:ext uri="{FF2B5EF4-FFF2-40B4-BE49-F238E27FC236}">
+                <a16:creationId xmlns:a16="http://schemas.microsoft.com/office/drawing/2014/main" id="{62F9AE3D-8F9E-A4FB-5CE5-F94ADAFC2ED1}"/>
+              </a:ext>
+            </a:extLst>
+          </p:cNvPr>
+          <p:cNvPicPr>
+            <a:picLocks noChangeAspect="1"/>
+          </p:cNvPicPr>
+          <p:nvPr/>
+        </p:nvPicPr>
+        <p:blipFill>
+          <a:blip r:embed="rId7">
+            <a:extLst>
+              <a:ext uri="{28A0092B-C50C-407E-A947-70E740481C1C}">
+                <a14:useLocalDpi xmlns:a14="http://schemas.microsoft.com/office/drawing/2010/main" val="0"/>
+              </a:ext>
+            </a:extLst>
+          </a:blip>
+          <a:srcRect/>
+          <a:stretch/>
+        </p:blipFill>
+        <p:spPr>
+          <a:xfrm>
+            <a:off x="6194174" y="1018447"/>
+            <a:ext cx="2956476" cy="2004391"/>
+          </a:xfrm>
+          <a:prstGeom prst="rect">
+            <a:avLst/>
+          </a:prstGeom>
+        </p:spPr>
+      </p:pic>
+      <p:pic>
+        <p:nvPicPr>
+          <p:cNvPr id="13" name="Imagen 12">
+            <a:extLst>
+              <a:ext uri="{FF2B5EF4-FFF2-40B4-BE49-F238E27FC236}">
+                <a16:creationId xmlns:a16="http://schemas.microsoft.com/office/drawing/2014/main" id="{7FFEB3A3-2CC6-A22D-9EF4-9CA22486E404}"/>
+              </a:ext>
+            </a:extLst>
+          </p:cNvPr>
+          <p:cNvPicPr>
+            <a:picLocks noChangeAspect="1"/>
+          </p:cNvPicPr>
+          <p:nvPr/>
+        </p:nvPicPr>
+        <p:blipFill>
+          <a:blip r:embed="rId8">
+            <a:extLst>
+              <a:ext uri="{28A0092B-C50C-407E-A947-70E740481C1C}">
+                <a14:useLocalDpi xmlns:a14="http://schemas.microsoft.com/office/drawing/2010/main" val="0"/>
+              </a:ext>
+            </a:extLst>
+          </a:blip>
+          <a:srcRect/>
+          <a:stretch/>
+        </p:blipFill>
+        <p:spPr>
+          <a:xfrm>
+            <a:off x="8977354" y="1023402"/>
+            <a:ext cx="2978817" cy="1963999"/>
+          </a:xfrm>
+          <a:prstGeom prst="rect">
+            <a:avLst/>
+          </a:prstGeom>
+        </p:spPr>
+      </p:pic>
+    </p:spTree>
+    <p:extLst>
+      <p:ext uri="{BB962C8B-B14F-4D97-AF65-F5344CB8AC3E}">
+        <p14:creationId xmlns:p14="http://schemas.microsoft.com/office/powerpoint/2010/main" val="1701577488"/>
+      </p:ext>
+    </p:extLst>
+  </p:cSld>
+  <p:clrMapOvr>
+    <a:masterClrMapping/>
+  </p:clrMapOvr>
+</p:sld>
+</file>
+
+<file path=ppt/slides/slide7.xml><?xml version="1.0" encoding="utf-8"?>
 <p:sld xmlns:a="http://schemas.openxmlformats.org/drawingml/2006/main" xmlns:r="http://schemas.openxmlformats.org/officeDocument/2006/relationships" xmlns:p="http://schemas.openxmlformats.org/presentationml/2006/main">
   <p:cSld>
     <p:spTree>
@@ -5368,10 +7529,10 @@
           <p:nvPr/>
         </p:nvPicPr>
         <p:blipFill>
-          <a:blip r:embed="rId3">
+          <a:blip r:embed="rId4">
             <a:extLst>
               <a:ext uri="{96DAC541-7B7A-43D3-8B79-37D633B846F1}">
-                <asvg:svgBlip xmlns:asvg="http://schemas.microsoft.com/office/drawing/2016/SVG/main" r:embed="rId4"/>
+                <asvg:svgBlip xmlns:asvg="http://schemas.microsoft.com/office/drawing/2016/SVG/main" r:embed="rId5"/>
               </a:ext>
             </a:extLst>
           </a:blip>
@@ -5412,7 +7573,7 @@
           <a:p>
             <a:fld id="{B6F15528-21DE-4FAA-801E-634DDDAF4B2B}" type="slidenum">
               <a:rPr lang="es-ES" smtClean="0"/>
-              <a:t>4</a:t>
+              <a:t>7</a:t>
             </a:fld>
             <a:endParaRPr lang="es-ES"/>
           </a:p>
@@ -5466,8 +7627,8 @@
         </p:nvSpPr>
         <p:spPr>
           <a:xfrm>
-            <a:off x="609441" y="4860334"/>
-            <a:ext cx="11199971" cy="2123658"/>
+            <a:off x="609441" y="4800600"/>
+            <a:ext cx="11199971" cy="1200329"/>
           </a:xfrm>
           <a:prstGeom prst="rect">
             <a:avLst/>
@@ -5491,42 +7652,11 @@
           <a:p>
             <a:pPr algn="just"/>
             <a:r>
-              <a:rPr lang="en-US" sz="1200" dirty="0">
-                <a:latin typeface="Arial" panose="020B0604020202020204" pitchFamily="34" charset="0"/>
-                <a:cs typeface="Arial" panose="020B0604020202020204" pitchFamily="34" charset="0"/>
-              </a:rPr>
-              <a:t>Comment results (neff changes this way with wavelength, comparison between different waveguide cross-sections …</a:t>
-            </a:r>
-            <a:r>
-              <a:rPr lang="en-US" sz="1200" dirty="0" err="1">
-                <a:latin typeface="Arial" panose="020B0604020202020204" pitchFamily="34" charset="0"/>
-                <a:cs typeface="Arial" panose="020B0604020202020204" pitchFamily="34" charset="0"/>
-              </a:rPr>
-              <a:t>etc</a:t>
-            </a:r>
-            <a:r>
-              <a:rPr lang="en-US" sz="1200" dirty="0">
-                <a:latin typeface="Arial" panose="020B0604020202020204" pitchFamily="34" charset="0"/>
-                <a:cs typeface="Arial" panose="020B0604020202020204" pitchFamily="34" charset="0"/>
-              </a:rPr>
-              <a:t>)</a:t>
-            </a:r>
-          </a:p>
-          <a:p>
-            <a:pPr algn="just"/>
-            <a:endParaRPr lang="en-US" sz="1200" dirty="0">
-              <a:latin typeface="Arial" panose="020B0604020202020204" pitchFamily="34" charset="0"/>
-              <a:cs typeface="Arial" panose="020B0604020202020204" pitchFamily="34" charset="0"/>
-            </a:endParaRPr>
-          </a:p>
-          <a:p>
-            <a:pPr algn="just"/>
-            <a:r>
               <a:rPr lang="es-ES" sz="1200" dirty="0">
                 <a:latin typeface="Arial" panose="020B0604020202020204" pitchFamily="34" charset="0"/>
                 <a:cs typeface="Arial" panose="020B0604020202020204" pitchFamily="34" charset="0"/>
               </a:rPr>
-              <a:t>En ambas guías se observa que, a mayor frecuencia (es decir, a menor longitud de onda), el confinamiento de la energía en el núcleo es mayor, lo que se refleja en un incremento del índice efectivo. Por el contrario, al aumentar la longitud de onda, el índice efectivo disminuye. -&gt; relacionarlo con el índice efectivo del núcleo es mayor que el índice efectivo de la cubierta.</a:t>
+              <a:t>En ambas guías se observa que, a menor longitud de onda, mayor índice efectivo, por lo que el confinamiento de la energía en el núcleo es mayor. Por el contrario, a mayor longitud de onda, el índice efectivo disminuye, ya que el modo se extiende más hacia la cubierta y el índice efectivo se mantiene siempre entre ambos valores, siendo menor que el del núcleo y mayor que el de la cubierta. </a:t>
             </a:r>
           </a:p>
           <a:p>
@@ -5543,7 +7673,7 @@
                 <a:latin typeface="Arial" panose="020B0604020202020204" pitchFamily="34" charset="0"/>
                 <a:cs typeface="Arial" panose="020B0604020202020204" pitchFamily="34" charset="0"/>
               </a:rPr>
-              <a:t>En la guía </a:t>
+              <a:t>Además, la guía </a:t>
             </a:r>
             <a:r>
               <a:rPr lang="es-ES" sz="1200" dirty="0" err="1">
@@ -5557,27 +7687,13 @@
                 <a:latin typeface="Arial" panose="020B0604020202020204" pitchFamily="34" charset="0"/>
                 <a:cs typeface="Arial" panose="020B0604020202020204" pitchFamily="34" charset="0"/>
               </a:rPr>
-              <a:t> se observa la propagación de los modos 0, 1, 2 y 3 a través del núcleo, lo que indica un comportamiento multimodo. En cambio, en la guía Deep únicamente se propagan los modos 0 y 1, mostrando un menor número de modos soportados debido a su diferente sección transversal y mayor confinamiento.</a:t>
+              <a:t> presenta un comportamiento multimodo, ya que permite la propagación de los modos 0, 1, 2 y 3, mientras que la guía Deep, debido a su menor confinamiento, soporta los modos 0 y 1.</a:t>
             </a:r>
             <a:endParaRPr lang="en-US" sz="1200" dirty="0">
               <a:latin typeface="Arial" panose="020B0604020202020204" pitchFamily="34" charset="0"/>
               <a:cs typeface="Arial" panose="020B0604020202020204" pitchFamily="34" charset="0"/>
             </a:endParaRPr>
           </a:p>
-          <a:p>
-            <a:pPr algn="just"/>
-            <a:endParaRPr lang="en-US" sz="1200" dirty="0">
-              <a:latin typeface="Arial" panose="020B0604020202020204" pitchFamily="34" charset="0"/>
-              <a:cs typeface="Arial" panose="020B0604020202020204" pitchFamily="34" charset="0"/>
-            </a:endParaRPr>
-          </a:p>
-          <a:p>
-            <a:pPr algn="just"/>
-            <a:endParaRPr lang="en-US" sz="1200" dirty="0">
-              <a:latin typeface="Arial" panose="020B0604020202020204" pitchFamily="34" charset="0"/>
-              <a:cs typeface="Arial" panose="020B0604020202020204" pitchFamily="34" charset="0"/>
-            </a:endParaRPr>
-          </a:p>
         </p:txBody>
       </p:sp>
       <p:sp>
@@ -5595,7 +7711,7 @@
         <p:spPr>
           <a:xfrm>
             <a:off x="609441" y="1418373"/>
-            <a:ext cx="5332571" cy="3306028"/>
+            <a:ext cx="5332571" cy="3204427"/>
           </a:xfrm>
           <a:prstGeom prst="rect">
             <a:avLst/>
@@ -5647,7 +7763,7 @@
         <p:spPr>
           <a:xfrm>
             <a:off x="6476841" y="1418373"/>
-            <a:ext cx="5332571" cy="3306028"/>
+            <a:ext cx="5332571" cy="3204427"/>
           </a:xfrm>
           <a:prstGeom prst="rect">
             <a:avLst/>
@@ -5699,15 +7815,15 @@
           <p:nvPr/>
         </p:nvPicPr>
         <p:blipFill>
-          <a:blip r:embed="rId5"/>
+          <a:blip r:embed="rId6"/>
           <a:stretch>
             <a:fillRect/>
           </a:stretch>
         </p:blipFill>
         <p:spPr>
           <a:xfrm>
-            <a:off x="6622061" y="1600200"/>
-            <a:ext cx="5181600" cy="3022600"/>
+            <a:off x="6878364" y="1600200"/>
+            <a:ext cx="4801846" cy="2801077"/>
           </a:xfrm>
           <a:prstGeom prst="rect">
             <a:avLst/>
@@ -5729,7 +7845,7 @@
           <p:nvPr/>
         </p:nvPicPr>
         <p:blipFill>
-          <a:blip r:embed="rId6">
+          <a:blip r:embed="rId7">
             <a:extLst>
               <a:ext uri="{28A0092B-C50C-407E-A947-70E740481C1C}">
                 <a14:useLocalDpi xmlns:a14="http://schemas.microsoft.com/office/drawing/2010/main" val="0"/>
@@ -5741,8 +7857,8 @@
         </p:blipFill>
         <p:spPr>
           <a:xfrm>
-            <a:off x="685800" y="1600200"/>
-            <a:ext cx="5186993" cy="3025745"/>
+            <a:off x="685800" y="1600201"/>
+            <a:ext cx="5186993" cy="2801076"/>
           </a:xfrm>
           <a:prstGeom prst="rect">
             <a:avLst/>
@@ -5763,7 +7879,7 @@
         </p:nvSpPr>
         <p:spPr>
           <a:xfrm>
-            <a:off x="642989" y="4402885"/>
+            <a:off x="680049" y="4269479"/>
             <a:ext cx="2269787" cy="369332"/>
           </a:xfrm>
           <a:prstGeom prst="rect">
@@ -5795,10 +7911,15 @@
   <p:clrMapOvr>
     <a:masterClrMapping/>
   </p:clrMapOvr>
+  <p:extLst>
+    <p:ext uri="{6950BFC3-D8DA-4A85-94F7-54DA5524770B}">
+      <p188:commentRel xmlns:p188="http://schemas.microsoft.com/office/powerpoint/2018/8/main" r:id="rId3"/>
+    </p:ext>
+  </p:extLst>
 </p:sld>
 </file>
 
-<file path=ppt/slides/slide5.xml><?xml version="1.0" encoding="utf-8"?>
+<file path=ppt/slides/slide8.xml><?xml version="1.0" encoding="utf-8"?>
 <p:sld xmlns:a="http://schemas.openxmlformats.org/drawingml/2006/main" xmlns:r="http://schemas.openxmlformats.org/officeDocument/2006/relationships" xmlns:p="http://schemas.openxmlformats.org/presentationml/2006/main">
   <p:cSld>
     <p:spTree>
@@ -5940,7 +8061,7 @@
           <a:p>
             <a:fld id="{B6F15528-21DE-4FAA-801E-634DDDAF4B2B}" type="slidenum">
               <a:rPr lang="es-ES" smtClean="0"/>
-              <a:t>5</a:t>
+              <a:t>8</a:t>
             </a:fld>
             <a:endParaRPr lang="es-ES"/>
           </a:p>
@@ -5995,7 +8116,7 @@
         <p:spPr>
           <a:xfrm>
             <a:off x="609441" y="4860334"/>
-            <a:ext cx="11199971" cy="1200329"/>
+            <a:ext cx="11199971" cy="1015663"/>
           </a:xfrm>
           <a:prstGeom prst="rect">
             <a:avLst/>
@@ -6023,36 +8144,386 @@
                 <a:latin typeface="Arial" panose="020B0604020202020204" pitchFamily="34" charset="0"/>
                 <a:cs typeface="Arial" panose="020B0604020202020204" pitchFamily="34" charset="0"/>
               </a:rPr>
-              <a:t>Comment results (neff changes this way with width, polarization behavior, </a:t>
+              <a:t>Se </a:t>
             </a:r>
             <a:r>
               <a:rPr lang="en-US" sz="1200" dirty="0" err="1">
                 <a:latin typeface="Arial" panose="020B0604020202020204" pitchFamily="34" charset="0"/>
                 <a:cs typeface="Arial" panose="020B0604020202020204" pitchFamily="34" charset="0"/>
               </a:rPr>
-              <a:t>etc</a:t>
+              <a:t>observa</a:t>
             </a:r>
             <a:r>
               <a:rPr lang="en-US" sz="1200" dirty="0">
                 <a:latin typeface="Arial" panose="020B0604020202020204" pitchFamily="34" charset="0"/>
                 <a:cs typeface="Arial" panose="020B0604020202020204" pitchFamily="34" charset="0"/>
               </a:rPr>
-              <a:t>…)</a:t>
-            </a:r>
-          </a:p>
-          <a:p>
-            <a:pPr algn="just"/>
-            <a:endParaRPr lang="en-US" sz="1200" dirty="0">
-              <a:latin typeface="Arial" panose="020B0604020202020204" pitchFamily="34" charset="0"/>
-              <a:cs typeface="Arial" panose="020B0604020202020204" pitchFamily="34" charset="0"/>
-            </a:endParaRPr>
-          </a:p>
-          <a:p>
-            <a:pPr algn="just"/>
-            <a:endParaRPr lang="en-US" sz="1200" dirty="0">
-              <a:latin typeface="Arial" panose="020B0604020202020204" pitchFamily="34" charset="0"/>
-              <a:cs typeface="Arial" panose="020B0604020202020204" pitchFamily="34" charset="0"/>
-            </a:endParaRPr>
+              <a:t> </a:t>
+            </a:r>
+            <a:r>
+              <a:rPr lang="en-US" sz="1200" dirty="0" err="1">
+                <a:latin typeface="Arial" panose="020B0604020202020204" pitchFamily="34" charset="0"/>
+                <a:cs typeface="Arial" panose="020B0604020202020204" pitchFamily="34" charset="0"/>
+              </a:rPr>
+              <a:t>como</a:t>
+            </a:r>
+            <a:r>
+              <a:rPr lang="en-US" sz="1200" dirty="0">
+                <a:latin typeface="Arial" panose="020B0604020202020204" pitchFamily="34" charset="0"/>
+                <a:cs typeface="Arial" panose="020B0604020202020204" pitchFamily="34" charset="0"/>
+              </a:rPr>
+              <a:t> a mayor </a:t>
+            </a:r>
+            <a:r>
+              <a:rPr lang="en-US" sz="1200" dirty="0" err="1">
+                <a:latin typeface="Arial" panose="020B0604020202020204" pitchFamily="34" charset="0"/>
+                <a:cs typeface="Arial" panose="020B0604020202020204" pitchFamily="34" charset="0"/>
+              </a:rPr>
+              <a:t>anchura</a:t>
+            </a:r>
+            <a:r>
+              <a:rPr lang="en-US" sz="1200" dirty="0">
+                <a:latin typeface="Arial" panose="020B0604020202020204" pitchFamily="34" charset="0"/>
+                <a:cs typeface="Arial" panose="020B0604020202020204" pitchFamily="34" charset="0"/>
+              </a:rPr>
+              <a:t> de la </a:t>
+            </a:r>
+            <a:r>
+              <a:rPr lang="en-US" sz="1200" dirty="0" err="1">
+                <a:latin typeface="Arial" panose="020B0604020202020204" pitchFamily="34" charset="0"/>
+                <a:cs typeface="Arial" panose="020B0604020202020204" pitchFamily="34" charset="0"/>
+              </a:rPr>
+              <a:t>guía</a:t>
+            </a:r>
+            <a:r>
+              <a:rPr lang="en-US" sz="1200" dirty="0">
+                <a:latin typeface="Arial" panose="020B0604020202020204" pitchFamily="34" charset="0"/>
+                <a:cs typeface="Arial" panose="020B0604020202020204" pitchFamily="34" charset="0"/>
+              </a:rPr>
+              <a:t> </a:t>
+            </a:r>
+            <a:r>
+              <a:rPr lang="en-US" sz="1200" dirty="0" err="1">
+                <a:latin typeface="Arial" panose="020B0604020202020204" pitchFamily="34" charset="0"/>
+                <a:cs typeface="Arial" panose="020B0604020202020204" pitchFamily="34" charset="0"/>
+              </a:rPr>
+              <a:t>el</a:t>
+            </a:r>
+            <a:r>
+              <a:rPr lang="en-US" sz="1200" dirty="0">
+                <a:latin typeface="Arial" panose="020B0604020202020204" pitchFamily="34" charset="0"/>
+                <a:cs typeface="Arial" panose="020B0604020202020204" pitchFamily="34" charset="0"/>
+              </a:rPr>
+              <a:t> </a:t>
+            </a:r>
+            <a:r>
+              <a:rPr lang="en-US" sz="1200" dirty="0" err="1">
+                <a:latin typeface="Arial" panose="020B0604020202020204" pitchFamily="34" charset="0"/>
+                <a:cs typeface="Arial" panose="020B0604020202020204" pitchFamily="34" charset="0"/>
+              </a:rPr>
+              <a:t>indice</a:t>
+            </a:r>
+            <a:r>
+              <a:rPr lang="en-US" sz="1200" dirty="0">
+                <a:latin typeface="Arial" panose="020B0604020202020204" pitchFamily="34" charset="0"/>
+                <a:cs typeface="Arial" panose="020B0604020202020204" pitchFamily="34" charset="0"/>
+              </a:rPr>
+              <a:t> </a:t>
+            </a:r>
+            <a:r>
+              <a:rPr lang="en-US" sz="1200" dirty="0" err="1">
+                <a:latin typeface="Arial" panose="020B0604020202020204" pitchFamily="34" charset="0"/>
+                <a:cs typeface="Arial" panose="020B0604020202020204" pitchFamily="34" charset="0"/>
+              </a:rPr>
+              <a:t>efectivo</a:t>
+            </a:r>
+            <a:r>
+              <a:rPr lang="en-US" sz="1200" dirty="0">
+                <a:latin typeface="Arial" panose="020B0604020202020204" pitchFamily="34" charset="0"/>
+                <a:cs typeface="Arial" panose="020B0604020202020204" pitchFamily="34" charset="0"/>
+              </a:rPr>
+              <a:t> de </a:t>
+            </a:r>
+            <a:r>
+              <a:rPr lang="en-US" sz="1200" dirty="0" err="1">
+                <a:latin typeface="Arial" panose="020B0604020202020204" pitchFamily="34" charset="0"/>
+                <a:cs typeface="Arial" panose="020B0604020202020204" pitchFamily="34" charset="0"/>
+              </a:rPr>
+              <a:t>los</a:t>
+            </a:r>
+            <a:r>
+              <a:rPr lang="en-US" sz="1200" dirty="0">
+                <a:latin typeface="Arial" panose="020B0604020202020204" pitchFamily="34" charset="0"/>
+                <a:cs typeface="Arial" panose="020B0604020202020204" pitchFamily="34" charset="0"/>
+              </a:rPr>
+              <a:t> </a:t>
+            </a:r>
+            <a:r>
+              <a:rPr lang="en-US" sz="1200" dirty="0" err="1">
+                <a:latin typeface="Arial" panose="020B0604020202020204" pitchFamily="34" charset="0"/>
+                <a:cs typeface="Arial" panose="020B0604020202020204" pitchFamily="34" charset="0"/>
+              </a:rPr>
+              <a:t>distintos</a:t>
+            </a:r>
+            <a:r>
+              <a:rPr lang="en-US" sz="1200" dirty="0">
+                <a:latin typeface="Arial" panose="020B0604020202020204" pitchFamily="34" charset="0"/>
+                <a:cs typeface="Arial" panose="020B0604020202020204" pitchFamily="34" charset="0"/>
+              </a:rPr>
+              <a:t> </a:t>
+            </a:r>
+            <a:r>
+              <a:rPr lang="en-US" sz="1200" dirty="0" err="1">
+                <a:latin typeface="Arial" panose="020B0604020202020204" pitchFamily="34" charset="0"/>
+                <a:cs typeface="Arial" panose="020B0604020202020204" pitchFamily="34" charset="0"/>
+              </a:rPr>
+              <a:t>modos</a:t>
+            </a:r>
+            <a:r>
+              <a:rPr lang="en-US" sz="1200" dirty="0">
+                <a:latin typeface="Arial" panose="020B0604020202020204" pitchFamily="34" charset="0"/>
+                <a:cs typeface="Arial" panose="020B0604020202020204" pitchFamily="34" charset="0"/>
+              </a:rPr>
+              <a:t> </a:t>
+            </a:r>
+            <a:r>
+              <a:rPr lang="en-US" sz="1200" dirty="0" err="1">
+                <a:latin typeface="Arial" panose="020B0604020202020204" pitchFamily="34" charset="0"/>
+                <a:cs typeface="Arial" panose="020B0604020202020204" pitchFamily="34" charset="0"/>
+              </a:rPr>
+              <a:t>aumenta</a:t>
+            </a:r>
+            <a:r>
+              <a:rPr lang="en-US" sz="1200" dirty="0">
+                <a:latin typeface="Arial" panose="020B0604020202020204" pitchFamily="34" charset="0"/>
+                <a:cs typeface="Arial" panose="020B0604020202020204" pitchFamily="34" charset="0"/>
+              </a:rPr>
+              <a:t>. </a:t>
+            </a:r>
+            <a:r>
+              <a:rPr lang="en-US" sz="1200" dirty="0" err="1">
+                <a:latin typeface="Arial" panose="020B0604020202020204" pitchFamily="34" charset="0"/>
+                <a:cs typeface="Arial" panose="020B0604020202020204" pitchFamily="34" charset="0"/>
+              </a:rPr>
+              <a:t>Destacando</a:t>
+            </a:r>
+            <a:r>
+              <a:rPr lang="en-US" sz="1200" dirty="0">
+                <a:latin typeface="Arial" panose="020B0604020202020204" pitchFamily="34" charset="0"/>
+                <a:cs typeface="Arial" panose="020B0604020202020204" pitchFamily="34" charset="0"/>
+              </a:rPr>
+              <a:t> un mayor </a:t>
+            </a:r>
+            <a:r>
+              <a:rPr lang="en-US" sz="1200" dirty="0" err="1">
+                <a:latin typeface="Arial" panose="020B0604020202020204" pitchFamily="34" charset="0"/>
+                <a:cs typeface="Arial" panose="020B0604020202020204" pitchFamily="34" charset="0"/>
+              </a:rPr>
+              <a:t>confinamiento</a:t>
+            </a:r>
+            <a:r>
+              <a:rPr lang="en-US" sz="1200" dirty="0">
+                <a:latin typeface="Arial" panose="020B0604020202020204" pitchFamily="34" charset="0"/>
+                <a:cs typeface="Arial" panose="020B0604020202020204" pitchFamily="34" charset="0"/>
+              </a:rPr>
+              <a:t> </a:t>
+            </a:r>
+            <a:r>
+              <a:rPr lang="en-US" sz="1200" dirty="0" err="1">
+                <a:latin typeface="Arial" panose="020B0604020202020204" pitchFamily="34" charset="0"/>
+                <a:cs typeface="Arial" panose="020B0604020202020204" pitchFamily="34" charset="0"/>
+              </a:rPr>
+              <a:t>en</a:t>
+            </a:r>
+            <a:r>
+              <a:rPr lang="en-US" sz="1200" dirty="0">
+                <a:latin typeface="Arial" panose="020B0604020202020204" pitchFamily="34" charset="0"/>
+                <a:cs typeface="Arial" panose="020B0604020202020204" pitchFamily="34" charset="0"/>
+              </a:rPr>
+              <a:t> </a:t>
+            </a:r>
+            <a:r>
+              <a:rPr lang="en-US" sz="1200" dirty="0" err="1">
+                <a:latin typeface="Arial" panose="020B0604020202020204" pitchFamily="34" charset="0"/>
+                <a:cs typeface="Arial" panose="020B0604020202020204" pitchFamily="34" charset="0"/>
+              </a:rPr>
+              <a:t>los</a:t>
+            </a:r>
+            <a:r>
+              <a:rPr lang="en-US" sz="1200" dirty="0">
+                <a:latin typeface="Arial" panose="020B0604020202020204" pitchFamily="34" charset="0"/>
+                <a:cs typeface="Arial" panose="020B0604020202020204" pitchFamily="34" charset="0"/>
+              </a:rPr>
+              <a:t> </a:t>
+            </a:r>
+            <a:r>
+              <a:rPr lang="en-US" sz="1200" dirty="0" err="1">
+                <a:latin typeface="Arial" panose="020B0604020202020204" pitchFamily="34" charset="0"/>
+                <a:cs typeface="Arial" panose="020B0604020202020204" pitchFamily="34" charset="0"/>
+              </a:rPr>
+              <a:t>modos</a:t>
+            </a:r>
+            <a:r>
+              <a:rPr lang="en-US" sz="1200" dirty="0">
+                <a:latin typeface="Arial" panose="020B0604020202020204" pitchFamily="34" charset="0"/>
+                <a:cs typeface="Arial" panose="020B0604020202020204" pitchFamily="34" charset="0"/>
+              </a:rPr>
+              <a:t> TE, </a:t>
+            </a:r>
+            <a:r>
+              <a:rPr lang="en-US" sz="1200" dirty="0" err="1">
+                <a:latin typeface="Arial" panose="020B0604020202020204" pitchFamily="34" charset="0"/>
+                <a:cs typeface="Arial" panose="020B0604020202020204" pitchFamily="34" charset="0"/>
+              </a:rPr>
+              <a:t>debido</a:t>
+            </a:r>
+            <a:r>
+              <a:rPr lang="en-US" sz="1200" dirty="0">
+                <a:latin typeface="Arial" panose="020B0604020202020204" pitchFamily="34" charset="0"/>
+                <a:cs typeface="Arial" panose="020B0604020202020204" pitchFamily="34" charset="0"/>
+              </a:rPr>
+              <a:t> a </a:t>
+            </a:r>
+            <a:r>
+              <a:rPr lang="en-US" sz="1200" dirty="0" err="1">
+                <a:latin typeface="Arial" panose="020B0604020202020204" pitchFamily="34" charset="0"/>
+                <a:cs typeface="Arial" panose="020B0604020202020204" pitchFamily="34" charset="0"/>
+              </a:rPr>
+              <a:t>que</a:t>
+            </a:r>
+            <a:r>
+              <a:rPr lang="en-US" sz="1200" dirty="0">
+                <a:latin typeface="Arial" panose="020B0604020202020204" pitchFamily="34" charset="0"/>
+                <a:cs typeface="Arial" panose="020B0604020202020204" pitchFamily="34" charset="0"/>
+              </a:rPr>
+              <a:t> </a:t>
+            </a:r>
+            <a:r>
+              <a:rPr lang="en-US" sz="1200" dirty="0" err="1">
+                <a:latin typeface="Arial" panose="020B0604020202020204" pitchFamily="34" charset="0"/>
+                <a:cs typeface="Arial" panose="020B0604020202020204" pitchFamily="34" charset="0"/>
+              </a:rPr>
+              <a:t>su</a:t>
+            </a:r>
+            <a:r>
+              <a:rPr lang="en-US" sz="1200" dirty="0">
+                <a:latin typeface="Arial" panose="020B0604020202020204" pitchFamily="34" charset="0"/>
+                <a:cs typeface="Arial" panose="020B0604020202020204" pitchFamily="34" charset="0"/>
+              </a:rPr>
+              <a:t> </a:t>
+            </a:r>
+            <a:r>
+              <a:rPr lang="en-US" sz="1200" dirty="0" err="1">
+                <a:latin typeface="Arial" panose="020B0604020202020204" pitchFamily="34" charset="0"/>
+                <a:cs typeface="Arial" panose="020B0604020202020204" pitchFamily="34" charset="0"/>
+              </a:rPr>
+              <a:t>componente</a:t>
+            </a:r>
+            <a:r>
+              <a:rPr lang="en-US" sz="1200" dirty="0">
+                <a:latin typeface="Arial" panose="020B0604020202020204" pitchFamily="34" charset="0"/>
+                <a:cs typeface="Arial" panose="020B0604020202020204" pitchFamily="34" charset="0"/>
+              </a:rPr>
+              <a:t> principal del campo </a:t>
+            </a:r>
+            <a:r>
+              <a:rPr lang="en-US" sz="1200" dirty="0" err="1">
+                <a:latin typeface="Arial" panose="020B0604020202020204" pitchFamily="34" charset="0"/>
+                <a:cs typeface="Arial" panose="020B0604020202020204" pitchFamily="34" charset="0"/>
+              </a:rPr>
+              <a:t>eléctrico</a:t>
+            </a:r>
+            <a:r>
+              <a:rPr lang="en-US" sz="1200" dirty="0">
+                <a:latin typeface="Arial" panose="020B0604020202020204" pitchFamily="34" charset="0"/>
+                <a:cs typeface="Arial" panose="020B0604020202020204" pitchFamily="34" charset="0"/>
+              </a:rPr>
+              <a:t> es </a:t>
+            </a:r>
+            <a:r>
+              <a:rPr lang="en-US" sz="1200" dirty="0" err="1">
+                <a:latin typeface="Arial" panose="020B0604020202020204" pitchFamily="34" charset="0"/>
+                <a:cs typeface="Arial" panose="020B0604020202020204" pitchFamily="34" charset="0"/>
+              </a:rPr>
+              <a:t>en</a:t>
+            </a:r>
+            <a:r>
+              <a:rPr lang="en-US" sz="1200" dirty="0">
+                <a:latin typeface="Arial" panose="020B0604020202020204" pitchFamily="34" charset="0"/>
+                <a:cs typeface="Arial" panose="020B0604020202020204" pitchFamily="34" charset="0"/>
+              </a:rPr>
+              <a:t> </a:t>
+            </a:r>
+            <a:r>
+              <a:rPr lang="en-US" sz="1200" dirty="0" err="1">
+                <a:latin typeface="Arial" panose="020B0604020202020204" pitchFamily="34" charset="0"/>
+                <a:cs typeface="Arial" panose="020B0604020202020204" pitchFamily="34" charset="0"/>
+              </a:rPr>
+              <a:t>el</a:t>
+            </a:r>
+            <a:r>
+              <a:rPr lang="en-US" sz="1200" dirty="0">
+                <a:latin typeface="Arial" panose="020B0604020202020204" pitchFamily="34" charset="0"/>
+                <a:cs typeface="Arial" panose="020B0604020202020204" pitchFamily="34" charset="0"/>
+              </a:rPr>
+              <a:t> </a:t>
+            </a:r>
+            <a:r>
+              <a:rPr lang="en-US" sz="1200" dirty="0" err="1">
+                <a:latin typeface="Arial" panose="020B0604020202020204" pitchFamily="34" charset="0"/>
+                <a:cs typeface="Arial" panose="020B0604020202020204" pitchFamily="34" charset="0"/>
+              </a:rPr>
+              <a:t>eje</a:t>
+            </a:r>
+            <a:r>
+              <a:rPr lang="en-US" sz="1200" dirty="0">
+                <a:latin typeface="Arial" panose="020B0604020202020204" pitchFamily="34" charset="0"/>
+                <a:cs typeface="Arial" panose="020B0604020202020204" pitchFamily="34" charset="0"/>
+              </a:rPr>
+              <a:t> x (Ex), </a:t>
+            </a:r>
+            <a:r>
+              <a:rPr lang="en-US" sz="1200" dirty="0" err="1">
+                <a:latin typeface="Arial" panose="020B0604020202020204" pitchFamily="34" charset="0"/>
+                <a:cs typeface="Arial" panose="020B0604020202020204" pitchFamily="34" charset="0"/>
+              </a:rPr>
+              <a:t>que</a:t>
+            </a:r>
+            <a:r>
+              <a:rPr lang="en-US" sz="1200" dirty="0">
+                <a:latin typeface="Arial" panose="020B0604020202020204" pitchFamily="34" charset="0"/>
+                <a:cs typeface="Arial" panose="020B0604020202020204" pitchFamily="34" charset="0"/>
+              </a:rPr>
+              <a:t> se </a:t>
+            </a:r>
+            <a:r>
+              <a:rPr lang="en-US" sz="1200" dirty="0" err="1">
+                <a:latin typeface="Arial" panose="020B0604020202020204" pitchFamily="34" charset="0"/>
+                <a:cs typeface="Arial" panose="020B0604020202020204" pitchFamily="34" charset="0"/>
+              </a:rPr>
+              <a:t>extiende</a:t>
+            </a:r>
+            <a:r>
+              <a:rPr lang="en-US" sz="1200" dirty="0">
+                <a:latin typeface="Arial" panose="020B0604020202020204" pitchFamily="34" charset="0"/>
+                <a:cs typeface="Arial" panose="020B0604020202020204" pitchFamily="34" charset="0"/>
+              </a:rPr>
+              <a:t> a lo ancho de la </a:t>
+            </a:r>
+            <a:r>
+              <a:rPr lang="en-US" sz="1200" dirty="0" err="1">
+                <a:latin typeface="Arial" panose="020B0604020202020204" pitchFamily="34" charset="0"/>
+                <a:cs typeface="Arial" panose="020B0604020202020204" pitchFamily="34" charset="0"/>
+              </a:rPr>
+              <a:t>guía</a:t>
+            </a:r>
+            <a:r>
+              <a:rPr lang="en-US" sz="1200" dirty="0">
+                <a:latin typeface="Arial" panose="020B0604020202020204" pitchFamily="34" charset="0"/>
+                <a:cs typeface="Arial" panose="020B0604020202020204" pitchFamily="34" charset="0"/>
+              </a:rPr>
+              <a:t>.</a:t>
+            </a:r>
           </a:p>
           <a:p>
             <a:pPr algn="just"/>
@@ -6180,6 +8651,36 @@
           </a:p>
         </p:txBody>
       </p:sp>
+      <p:pic>
+        <p:nvPicPr>
+          <p:cNvPr id="9" name="Imagen 8" descr="Gráfico, Gráfico de líneas&#10;&#10;El contenido generado por IA puede ser incorrecto.">
+            <a:extLst>
+              <a:ext uri="{FF2B5EF4-FFF2-40B4-BE49-F238E27FC236}">
+                <a16:creationId xmlns:a16="http://schemas.microsoft.com/office/drawing/2014/main" id="{84A2167B-2F20-7988-627B-52805E9CA6AA}"/>
+              </a:ext>
+            </a:extLst>
+          </p:cNvPr>
+          <p:cNvPicPr>
+            <a:picLocks noChangeAspect="1"/>
+          </p:cNvPicPr>
+          <p:nvPr/>
+        </p:nvPicPr>
+        <p:blipFill>
+          <a:blip r:embed="rId5"/>
+          <a:stretch>
+            <a:fillRect/>
+          </a:stretch>
+        </p:blipFill>
+        <p:spPr>
+          <a:xfrm>
+            <a:off x="3335678" y="1472023"/>
+            <a:ext cx="5520643" cy="3213803"/>
+          </a:xfrm>
+          <a:prstGeom prst="rect">
+            <a:avLst/>
+          </a:prstGeom>
+        </p:spPr>
+      </p:pic>
     </p:spTree>
     <p:extLst>
       <p:ext uri="{BB962C8B-B14F-4D97-AF65-F5344CB8AC3E}">
@@ -6193,7 +8694,7 @@
 </p:sld>
 </file>
 
-<file path=ppt/slides/slide6.xml><?xml version="1.0" encoding="utf-8"?>
+<file path=ppt/slides/slide9.xml><?xml version="1.0" encoding="utf-8"?>
 <p:sld xmlns:a="http://schemas.openxmlformats.org/drawingml/2006/main" xmlns:r="http://schemas.openxmlformats.org/officeDocument/2006/relationships" xmlns:p="http://schemas.openxmlformats.org/presentationml/2006/main">
   <p:cSld>
     <p:spTree>
@@ -6357,7 +8858,7 @@
           <a:p>
             <a:fld id="{B6F15528-21DE-4FAA-801E-634DDDAF4B2B}" type="slidenum">
               <a:rPr lang="es-ES" smtClean="0"/>
-              <a:t>6</a:t>
+              <a:t>9</a:t>
             </a:fld>
             <a:endParaRPr lang="es-ES"/>
           </a:p>
@@ -7364,548 +9865,6 @@
         <p14:creationId xmlns:p14="http://schemas.microsoft.com/office/powerpoint/2010/main" val="236054401"/>
       </p:ext>
     </p:extLst>
-  </p:cSld>
-  <p:clrMapOvr>
-    <a:masterClrMapping/>
-  </p:clrMapOvr>
-</p:sld>
-</file>
-
-<file path=ppt/slides/slide7.xml><?xml version="1.0" encoding="utf-8"?>
-<p:sld xmlns:a="http://schemas.openxmlformats.org/drawingml/2006/main" xmlns:r="http://schemas.openxmlformats.org/officeDocument/2006/relationships" xmlns:p="http://schemas.openxmlformats.org/presentationml/2006/main">
-  <p:cSld>
-    <p:spTree>
-      <p:nvGrpSpPr>
-        <p:cNvPr id="1" name="">
-          <a:extLst>
-            <a:ext uri="{FF2B5EF4-FFF2-40B4-BE49-F238E27FC236}">
-              <a16:creationId xmlns:a16="http://schemas.microsoft.com/office/drawing/2014/main" id="{25434E70-43B1-3881-1771-20FB4358471D}"/>
-            </a:ext>
-          </a:extLst>
-        </p:cNvPr>
-        <p:cNvGrpSpPr/>
-        <p:nvPr/>
-      </p:nvGrpSpPr>
-      <p:grpSpPr>
-        <a:xfrm>
-          <a:off x="0" y="0"/>
-          <a:ext cx="0" cy="0"/>
-          <a:chOff x="0" y="0"/>
-          <a:chExt cx="0" cy="0"/>
-        </a:xfrm>
-      </p:grpSpPr>
-      <p:sp>
-        <p:nvSpPr>
-          <p:cNvPr id="16" name="object 16">
-            <a:extLst>
-              <a:ext uri="{FF2B5EF4-FFF2-40B4-BE49-F238E27FC236}">
-                <a16:creationId xmlns:a16="http://schemas.microsoft.com/office/drawing/2014/main" id="{742C31CE-19F0-B995-0997-9A2D6A879BF7}"/>
-              </a:ext>
-            </a:extLst>
-          </p:cNvPr>
-          <p:cNvSpPr txBox="1">
-            <a:spLocks noGrp="1"/>
-          </p:cNvSpPr>
-          <p:nvPr>
-            <p:ph type="title"/>
-          </p:nvPr>
-        </p:nvSpPr>
-        <p:spPr>
-          <a:xfrm>
-            <a:off x="685800" y="408883"/>
-            <a:ext cx="10994410" cy="1090042"/>
-          </a:xfrm>
-          <a:prstGeom prst="rect">
-            <a:avLst/>
-          </a:prstGeom>
-        </p:spPr>
-        <p:txBody>
-          <a:bodyPr vert="horz" wrap="square" lIns="0" tIns="12700" rIns="0" bIns="0" rtlCol="0">
-            <a:spAutoFit/>
-          </a:bodyPr>
-          <a:lstStyle/>
-          <a:p>
-            <a:pPr marL="12700">
-              <a:lnSpc>
-                <a:spcPct val="100000"/>
-              </a:lnSpc>
-              <a:spcBef>
-                <a:spcPts val="100"/>
-              </a:spcBef>
-            </a:pPr>
-            <a:r>
-              <a:rPr lang="en-US" sz="2500" dirty="0"/>
-              <a:t>Learning outcome #5 – Bend waveguide radius vs. loss – deep</a:t>
-            </a:r>
-            <a:br>
-              <a:rPr lang="en-US" sz="2500" dirty="0"/>
-            </a:br>
-            <a:r>
-              <a:rPr lang="en-US" b="0" dirty="0"/>
-              <a:t>Find  neff_TE0 for </a:t>
-            </a:r>
-            <a:r>
-              <a:rPr lang="en-US" b="0" dirty="0" err="1"/>
-              <a:t>wvl</a:t>
-            </a:r>
-            <a:r>
-              <a:rPr lang="en-US" b="0" dirty="0"/>
-              <a:t> 1.55 µm, width 1.2 µm for R=25,50,75,100, 125,150 µm</a:t>
-            </a:r>
-            <a:br>
-              <a:rPr lang="en-US" sz="2500" dirty="0"/>
-            </a:br>
-            <a:endParaRPr lang="en-US" sz="2500" b="0" dirty="0">
-              <a:latin typeface="+mj-lt"/>
-              <a:cs typeface="Lucida Sans"/>
-            </a:endParaRPr>
-          </a:p>
-        </p:txBody>
-      </p:sp>
-      <p:pic>
-        <p:nvPicPr>
-          <p:cNvPr id="83" name="Gráfico 82">
-            <a:extLst>
-              <a:ext uri="{FF2B5EF4-FFF2-40B4-BE49-F238E27FC236}">
-                <a16:creationId xmlns:a16="http://schemas.microsoft.com/office/drawing/2014/main" id="{D688A609-F3DC-EE34-C536-683E70F32EAE}"/>
-              </a:ext>
-            </a:extLst>
-          </p:cNvPr>
-          <p:cNvPicPr>
-            <a:picLocks noChangeAspect="1"/>
-          </p:cNvPicPr>
-          <p:nvPr/>
-        </p:nvPicPr>
-        <p:blipFill>
-          <a:blip r:embed="rId3">
-            <a:extLst>
-              <a:ext uri="{96DAC541-7B7A-43D3-8B79-37D633B846F1}">
-                <asvg:svgBlip xmlns:asvg="http://schemas.microsoft.com/office/drawing/2016/SVG/main" r:embed="rId4"/>
-              </a:ext>
-            </a:extLst>
-          </a:blip>
-          <a:stretch>
-            <a:fillRect/>
-          </a:stretch>
-        </p:blipFill>
-        <p:spPr>
-          <a:xfrm>
-            <a:off x="5045006" y="6356057"/>
-            <a:ext cx="6409575" cy="363174"/>
-          </a:xfrm>
-          <a:prstGeom prst="rect">
-            <a:avLst/>
-          </a:prstGeom>
-        </p:spPr>
-      </p:pic>
-      <p:sp>
-        <p:nvSpPr>
-          <p:cNvPr id="84" name="Marcador de número de diapositiva 83">
-            <a:extLst>
-              <a:ext uri="{FF2B5EF4-FFF2-40B4-BE49-F238E27FC236}">
-                <a16:creationId xmlns:a16="http://schemas.microsoft.com/office/drawing/2014/main" id="{B6C672C6-89D4-7E67-2B94-811D081786A7}"/>
-              </a:ext>
-            </a:extLst>
-          </p:cNvPr>
-          <p:cNvSpPr>
-            <a:spLocks noGrp="1"/>
-          </p:cNvSpPr>
-          <p:nvPr>
-            <p:ph type="sldNum" sz="quarter" idx="7"/>
-          </p:nvPr>
-        </p:nvSpPr>
-        <p:spPr/>
-        <p:txBody>
-          <a:bodyPr/>
-          <a:lstStyle/>
-          <a:p>
-            <a:fld id="{B6F15528-21DE-4FAA-801E-634DDDAF4B2B}" type="slidenum">
-              <a:rPr lang="es-ES" smtClean="0"/>
-              <a:t>7</a:t>
-            </a:fld>
-            <a:endParaRPr lang="es-ES"/>
-          </a:p>
-        </p:txBody>
-      </p:sp>
-      <p:sp>
-        <p:nvSpPr>
-          <p:cNvPr id="3" name="Marcador de pie de página 2">
-            <a:extLst>
-              <a:ext uri="{FF2B5EF4-FFF2-40B4-BE49-F238E27FC236}">
-                <a16:creationId xmlns:a16="http://schemas.microsoft.com/office/drawing/2014/main" id="{AA1F4313-D710-7A3E-7A8F-EB77DEE3C1A7}"/>
-              </a:ext>
-            </a:extLst>
-          </p:cNvPr>
-          <p:cNvSpPr>
-            <a:spLocks noGrp="1"/>
-          </p:cNvSpPr>
-          <p:nvPr>
-            <p:ph type="ftr" sz="quarter" idx="5"/>
-          </p:nvPr>
-        </p:nvSpPr>
-        <p:spPr/>
-        <p:txBody>
-          <a:bodyPr/>
-          <a:lstStyle/>
-          <a:p>
-            <a:pPr marL="12700">
-              <a:spcBef>
-                <a:spcPts val="15"/>
-              </a:spcBef>
-            </a:pPr>
-            <a:r>
-              <a:rPr lang="es-ES" spc="-5"/>
-              <a:t>LAB 1.0 WAVEGUIDES</a:t>
-            </a:r>
-            <a:endParaRPr lang="es-ES" spc="-5" dirty="0"/>
-          </a:p>
-        </p:txBody>
-      </p:sp>
-      <p:sp>
-        <p:nvSpPr>
-          <p:cNvPr id="2" name="CuadroTexto 1">
-            <a:extLst>
-              <a:ext uri="{FF2B5EF4-FFF2-40B4-BE49-F238E27FC236}">
-                <a16:creationId xmlns:a16="http://schemas.microsoft.com/office/drawing/2014/main" id="{FDE3A197-9508-F9F1-1FEB-FF883D78C151}"/>
-              </a:ext>
-            </a:extLst>
-          </p:cNvPr>
-          <p:cNvSpPr txBox="1"/>
-          <p:nvPr/>
-        </p:nvSpPr>
-        <p:spPr>
-          <a:xfrm>
-            <a:off x="609441" y="4860334"/>
-            <a:ext cx="11199971" cy="1200329"/>
-          </a:xfrm>
-          <a:prstGeom prst="rect">
-            <a:avLst/>
-          </a:prstGeom>
-          <a:solidFill>
-            <a:schemeClr val="bg1">
-              <a:lumMod val="95000"/>
-            </a:schemeClr>
-          </a:solidFill>
-          <a:ln w="28575">
-            <a:solidFill>
-              <a:srgbClr val="E0700D"/>
-            </a:solidFill>
-          </a:ln>
-        </p:spPr>
-        <p:txBody>
-          <a:bodyPr wrap="square" rtlCol="0">
-            <a:spAutoFit/>
-          </a:bodyPr>
-          <a:lstStyle/>
-          <a:p>
-            <a:pPr algn="just"/>
-            <a:r>
-              <a:rPr lang="en-US" sz="1200" dirty="0">
-                <a:latin typeface="Arial" panose="020B0604020202020204" pitchFamily="34" charset="0"/>
-                <a:cs typeface="Arial" panose="020B0604020202020204" pitchFamily="34" charset="0"/>
-              </a:rPr>
-              <a:t>Comment results, which is the safe radius?, consider safe means less than 0.1 dB/90º.</a:t>
-            </a:r>
-          </a:p>
-          <a:p>
-            <a:pPr algn="just"/>
-            <a:endParaRPr lang="en-US" sz="1200" u="sng" dirty="0">
-              <a:latin typeface="Arial" panose="020B0604020202020204" pitchFamily="34" charset="0"/>
-              <a:cs typeface="Arial" panose="020B0604020202020204" pitchFamily="34" charset="0"/>
-            </a:endParaRPr>
-          </a:p>
-          <a:p>
-            <a:pPr algn="just"/>
-            <a:endParaRPr lang="en-US" sz="1200" dirty="0">
-              <a:latin typeface="Arial" panose="020B0604020202020204" pitchFamily="34" charset="0"/>
-              <a:cs typeface="Arial" panose="020B0604020202020204" pitchFamily="34" charset="0"/>
-            </a:endParaRPr>
-          </a:p>
-          <a:p>
-            <a:pPr algn="just"/>
-            <a:endParaRPr lang="en-US" sz="1200" dirty="0">
-              <a:latin typeface="Arial" panose="020B0604020202020204" pitchFamily="34" charset="0"/>
-              <a:cs typeface="Arial" panose="020B0604020202020204" pitchFamily="34" charset="0"/>
-            </a:endParaRPr>
-          </a:p>
-          <a:p>
-            <a:pPr algn="just"/>
-            <a:endParaRPr lang="en-US" sz="1200" dirty="0">
-              <a:latin typeface="Arial" panose="020B0604020202020204" pitchFamily="34" charset="0"/>
-              <a:cs typeface="Arial" panose="020B0604020202020204" pitchFamily="34" charset="0"/>
-            </a:endParaRPr>
-          </a:p>
-          <a:p>
-            <a:pPr algn="just"/>
-            <a:endParaRPr lang="en-US" sz="1200" dirty="0">
-              <a:latin typeface="Arial" panose="020B0604020202020204" pitchFamily="34" charset="0"/>
-              <a:cs typeface="Arial" panose="020B0604020202020204" pitchFamily="34" charset="0"/>
-            </a:endParaRPr>
-          </a:p>
-        </p:txBody>
-      </p:sp>
-      <p:sp>
-        <p:nvSpPr>
-          <p:cNvPr id="7" name="Rectángulo 6">
-            <a:extLst>
-              <a:ext uri="{FF2B5EF4-FFF2-40B4-BE49-F238E27FC236}">
-                <a16:creationId xmlns:a16="http://schemas.microsoft.com/office/drawing/2014/main" id="{B5FE8755-B0BF-14B7-64E6-4BBB2560B9A6}"/>
-              </a:ext>
-            </a:extLst>
-          </p:cNvPr>
-          <p:cNvSpPr/>
-          <p:nvPr/>
-        </p:nvSpPr>
-        <p:spPr>
-          <a:xfrm>
-            <a:off x="609441" y="1418373"/>
-            <a:ext cx="11199971" cy="3306028"/>
-          </a:xfrm>
-          <a:prstGeom prst="rect">
-            <a:avLst/>
-          </a:prstGeom>
-          <a:noFill/>
-          <a:ln w="28575">
-            <a:solidFill>
-              <a:srgbClr val="E0700D"/>
-            </a:solidFill>
-          </a:ln>
-        </p:spPr>
-        <p:style>
-          <a:lnRef idx="2">
-            <a:schemeClr val="accent1">
-              <a:shade val="15000"/>
-            </a:schemeClr>
-          </a:lnRef>
-          <a:fillRef idx="1">
-            <a:schemeClr val="accent1"/>
-          </a:fillRef>
-          <a:effectRef idx="0">
-            <a:schemeClr val="accent1"/>
-          </a:effectRef>
-          <a:fontRef idx="minor">
-            <a:schemeClr val="lt1"/>
-          </a:fontRef>
-        </p:style>
-        <p:txBody>
-          <a:bodyPr rtlCol="0" anchor="ctr"/>
-          <a:lstStyle/>
-          <a:p>
-            <a:pPr algn="ctr"/>
-            <a:endParaRPr lang="en-US"/>
-          </a:p>
-        </p:txBody>
-      </p:sp>
-      <p:sp>
-        <p:nvSpPr>
-          <p:cNvPr id="8" name="CuadroTexto 7">
-            <a:extLst>
-              <a:ext uri="{FF2B5EF4-FFF2-40B4-BE49-F238E27FC236}">
-                <a16:creationId xmlns:a16="http://schemas.microsoft.com/office/drawing/2014/main" id="{331EBD86-BA6C-68C9-2D38-FC8CFBA7ADC4}"/>
-              </a:ext>
-            </a:extLst>
-          </p:cNvPr>
-          <p:cNvSpPr txBox="1"/>
-          <p:nvPr/>
-        </p:nvSpPr>
-        <p:spPr>
-          <a:xfrm>
-            <a:off x="2978141" y="2784355"/>
-            <a:ext cx="6235717" cy="923330"/>
-          </a:xfrm>
-          <a:prstGeom prst="rect">
-            <a:avLst/>
-          </a:prstGeom>
-          <a:noFill/>
-        </p:spPr>
-        <p:txBody>
-          <a:bodyPr wrap="square" rtlCol="0">
-            <a:spAutoFit/>
-          </a:bodyPr>
-          <a:lstStyle/>
-          <a:p>
-            <a:pPr algn="ctr"/>
-            <a:r>
-              <a:rPr lang="en-US" b="1" dirty="0"/>
-              <a:t>deep</a:t>
-            </a:r>
-            <a:r>
-              <a:rPr lang="en-US" dirty="0"/>
-              <a:t> waveguide</a:t>
-            </a:r>
-          </a:p>
-          <a:p>
-            <a:pPr algn="ctr"/>
-            <a:endParaRPr lang="en-US" dirty="0"/>
-          </a:p>
-          <a:p>
-            <a:pPr algn="ctr"/>
-            <a:r>
-              <a:rPr lang="en-US" dirty="0"/>
-              <a:t>Paste Total Loss (dB/90º) vs R &amp; neff_TE0 vs R</a:t>
-            </a:r>
-          </a:p>
-        </p:txBody>
-      </p:sp>
-    </p:spTree>
-    <p:extLst>
-      <p:ext uri="{BB962C8B-B14F-4D97-AF65-F5344CB8AC3E}">
-        <p14:creationId xmlns:p14="http://schemas.microsoft.com/office/powerpoint/2010/main" val="3660438245"/>
-      </p:ext>
-    </p:extLst>
-  </p:cSld>
-  <p:clrMapOvr>
-    <a:masterClrMapping/>
-  </p:clrMapOvr>
-</p:sld>
-</file>
-
-<file path=ppt/slides/slide8.xml><?xml version="1.0" encoding="utf-8"?>
-<p:sld xmlns:a="http://schemas.openxmlformats.org/drawingml/2006/main" xmlns:r="http://schemas.openxmlformats.org/officeDocument/2006/relationships" xmlns:p="http://schemas.openxmlformats.org/presentationml/2006/main">
-  <p:cSld>
-    <p:spTree>
-      <p:nvGrpSpPr>
-        <p:cNvPr id="1" name=""/>
-        <p:cNvGrpSpPr/>
-        <p:nvPr/>
-      </p:nvGrpSpPr>
-      <p:grpSpPr>
-        <a:xfrm>
-          <a:off x="0" y="0"/>
-          <a:ext cx="0" cy="0"/>
-          <a:chOff x="0" y="0"/>
-          <a:chExt cx="0" cy="0"/>
-        </a:xfrm>
-      </p:grpSpPr>
-      <p:sp>
-        <p:nvSpPr>
-          <p:cNvPr id="3" name="object 3"/>
-          <p:cNvSpPr/>
-          <p:nvPr/>
-        </p:nvSpPr>
-        <p:spPr>
-          <a:xfrm>
-            <a:off x="3945635" y="2636520"/>
-            <a:ext cx="8246363" cy="1584959"/>
-          </a:xfrm>
-          <a:prstGeom prst="rect">
-            <a:avLst/>
-          </a:prstGeom>
-          <a:blipFill>
-            <a:blip r:embed="rId2" cstate="print"/>
-            <a:stretch>
-              <a:fillRect/>
-            </a:stretch>
-          </a:blipFill>
-        </p:spPr>
-        <p:txBody>
-          <a:bodyPr wrap="square" lIns="0" tIns="0" rIns="0" bIns="0" rtlCol="0"/>
-          <a:lstStyle/>
-          <a:p>
-            <a:endParaRPr/>
-          </a:p>
-        </p:txBody>
-      </p:sp>
-      <p:sp>
-        <p:nvSpPr>
-          <p:cNvPr id="4" name="object 4"/>
-          <p:cNvSpPr txBox="1">
-            <a:spLocks noGrp="1"/>
-          </p:cNvSpPr>
-          <p:nvPr>
-            <p:ph type="title"/>
-          </p:nvPr>
-        </p:nvSpPr>
-        <p:spPr>
-          <a:xfrm>
-            <a:off x="4513326" y="3165729"/>
-            <a:ext cx="2233295" cy="513715"/>
-          </a:xfrm>
-          <a:prstGeom prst="rect">
-            <a:avLst/>
-          </a:prstGeom>
-        </p:spPr>
-        <p:txBody>
-          <a:bodyPr vert="horz" wrap="square" lIns="0" tIns="13335" rIns="0" bIns="0" rtlCol="0">
-            <a:spAutoFit/>
-          </a:bodyPr>
-          <a:lstStyle/>
-          <a:p>
-            <a:pPr marL="12700">
-              <a:lnSpc>
-                <a:spcPct val="100000"/>
-              </a:lnSpc>
-              <a:spcBef>
-                <a:spcPts val="105"/>
-              </a:spcBef>
-            </a:pPr>
-            <a:r>
-              <a:rPr sz="3200" b="1" spc="-5" dirty="0">
-                <a:solidFill>
-                  <a:srgbClr val="FFFFFF"/>
-                </a:solidFill>
-                <a:latin typeface="Lucida Sans"/>
-                <a:cs typeface="Lucida Sans"/>
-              </a:rPr>
-              <a:t>Thank</a:t>
-            </a:r>
-            <a:r>
-              <a:rPr sz="3200" b="1" spc="-55" dirty="0">
-                <a:solidFill>
-                  <a:srgbClr val="FFFFFF"/>
-                </a:solidFill>
-                <a:latin typeface="Lucida Sans"/>
-                <a:cs typeface="Lucida Sans"/>
-              </a:rPr>
-              <a:t> </a:t>
-            </a:r>
-            <a:r>
-              <a:rPr sz="3200" b="1" dirty="0">
-                <a:solidFill>
-                  <a:srgbClr val="FFFFFF"/>
-                </a:solidFill>
-                <a:latin typeface="Lucida Sans"/>
-                <a:cs typeface="Lucida Sans"/>
-              </a:rPr>
-              <a:t>you</a:t>
-            </a:r>
-            <a:endParaRPr sz="3200">
-              <a:latin typeface="Lucida Sans"/>
-              <a:cs typeface="Lucida Sans"/>
-            </a:endParaRPr>
-          </a:p>
-        </p:txBody>
-      </p:sp>
-      <p:sp>
-        <p:nvSpPr>
-          <p:cNvPr id="5" name="Marcador de número de diapositiva 4">
-            <a:extLst>
-              <a:ext uri="{FF2B5EF4-FFF2-40B4-BE49-F238E27FC236}">
-                <a16:creationId xmlns:a16="http://schemas.microsoft.com/office/drawing/2014/main" id="{B052DA19-AD24-7D24-2AE9-51F8F5A7F5E0}"/>
-              </a:ext>
-            </a:extLst>
-          </p:cNvPr>
-          <p:cNvSpPr>
-            <a:spLocks noGrp="1"/>
-          </p:cNvSpPr>
-          <p:nvPr>
-            <p:ph type="sldNum" sz="quarter" idx="7"/>
-          </p:nvPr>
-        </p:nvSpPr>
-        <p:spPr/>
-        <p:txBody>
-          <a:bodyPr/>
-          <a:lstStyle/>
-          <a:p>
-            <a:fld id="{B6F15528-21DE-4FAA-801E-634DDDAF4B2B}" type="slidenum">
-              <a:rPr lang="es-ES" smtClean="0"/>
-              <a:t>8</a:t>
-            </a:fld>
-            <a:endParaRPr lang="es-ES"/>
-          </a:p>
-        </p:txBody>
-      </p:sp>
-    </p:spTree>
   </p:cSld>
   <p:clrMapOvr>
     <a:masterClrMapping/>

--- a/LabBook_10.pptx
+++ b/LabBook_10.pptx
@@ -156,7 +156,7 @@
       <pc:sldMk xmlns:pc="http://schemas.microsoft.com/office/powerpoint/2013/main/command" cId="3712356003" sldId="291"/>
       <ac:spMk id="2" creationId="{CA5F0FDF-2A95-453B-4ECA-AEB637FF2694}"/>
       <ac:txMk cp="551" len="19">
-        <ac:context len="597" hash="3347251781"/>
+        <ac:context len="794" hash="3334446828"/>
       </ac:txMk>
     </ac:txMkLst>
     <p188:pos x="1541092" y="1159933"/>
@@ -268,7 +268,7 @@
           <a:p>
             <a:fld id="{8438F8DC-35B0-48E6-A86E-42F1F08DD00F}" type="datetimeFigureOut">
               <a:rPr lang="es-ES" smtClean="0"/>
-              <a:t>02/03/2026</a:t>
+              <a:t>06/03/2026</a:t>
             </a:fld>
             <a:endParaRPr lang="es-ES"/>
           </a:p>
@@ -445,7 +445,7 @@
           <a:p>
             <a:fld id="{FACBDC12-F39B-4B97-8F4D-6734F9D366FF}" type="datetimeFigureOut">
               <a:rPr lang="es-ES" smtClean="0"/>
-              <a:t>02/03/2026</a:t>
+              <a:t>06/03/2026</a:t>
             </a:fld>
             <a:endParaRPr lang="es-ES"/>
           </a:p>
@@ -6363,7 +6363,7 @@
         <p:spPr>
           <a:xfrm>
             <a:off x="381000" y="3746858"/>
-            <a:ext cx="11199971" cy="1200329"/>
+            <a:ext cx="11199971" cy="1569660"/>
           </a:xfrm>
           <a:prstGeom prst="rect">
             <a:avLst/>
@@ -6392,6 +6392,26 @@
                 <a:cs typeface="Arial" panose="020B0604020202020204" pitchFamily="34" charset="0"/>
               </a:rPr>
               <a:t>Las gráficas muestran la variación del índice de refracción (n) en función de la longitud de onda para el silicio, el nitruro de silicio y el dióxido de silicio. En los tres materiales se observa una ligera disminución de n a medida que aumenta la longitud de onda que puede dar lugar a dispersión cromática. Asimismo, se aprecia que cada material presenta un valor de índice de refracción distinto, lo que influye en el confinamiento y la propagación en la guía.</a:t>
+            </a:r>
+          </a:p>
+          <a:p>
+            <a:pPr algn="just"/>
+            <a:endParaRPr lang="es-ES" sz="1200" dirty="0">
+              <a:latin typeface="Arial" panose="020B0604020202020204" pitchFamily="34" charset="0"/>
+              <a:cs typeface="Arial" panose="020B0604020202020204" pitchFamily="34" charset="0"/>
+            </a:endParaRPr>
+          </a:p>
+          <a:p>
+            <a:pPr algn="just"/>
+            <a:r>
+              <a:rPr lang="es-ES" sz="1200" dirty="0">
+                <a:solidFill>
+                  <a:srgbClr val="FF0000"/>
+                </a:solidFill>
+                <a:latin typeface="Arial" panose="020B0604020202020204" pitchFamily="34" charset="0"/>
+                <a:cs typeface="Arial" panose="020B0604020202020204" pitchFamily="34" charset="0"/>
+              </a:rPr>
+              <a:t>COMENTAR QUE EL SIO2 ES CUBIERTA Y LOS OTROS DOS SON NUCLEO</a:t>
             </a:r>
           </a:p>
           <a:p>
@@ -7271,10 +7291,16 @@
           </a:p>
           <a:p>
             <a:pPr algn="just"/>
-            <a:endParaRPr lang="es-ES" sz="1200" dirty="0">
-              <a:latin typeface="Arial" panose="020B0604020202020204" pitchFamily="34" charset="0"/>
-              <a:cs typeface="Arial" panose="020B0604020202020204" pitchFamily="34" charset="0"/>
-            </a:endParaRPr>
+            <a:r>
+              <a:rPr lang="es-ES" sz="1200" dirty="0">
+                <a:solidFill>
+                  <a:srgbClr val="FF0000"/>
+                </a:solidFill>
+                <a:latin typeface="Arial" panose="020B0604020202020204" pitchFamily="34" charset="0"/>
+                <a:cs typeface="Arial" panose="020B0604020202020204" pitchFamily="34" charset="0"/>
+              </a:rPr>
+              <a:t>COMENTAR QUE EL MODO SE TE DISTRIBUYE EN HORIZONTAL Y EL TM EN VERTICAL</a:t>
+            </a:r>
           </a:p>
         </p:txBody>
       </p:sp>
@@ -7628,7 +7654,7 @@
         <p:spPr>
           <a:xfrm>
             <a:off x="609441" y="4800600"/>
-            <a:ext cx="11199971" cy="1200329"/>
+            <a:ext cx="11199971" cy="1754326"/>
           </a:xfrm>
           <a:prstGeom prst="rect">
             <a:avLst/>
@@ -7689,7 +7715,43 @@
               </a:rPr>
               <a:t> presenta un comportamiento multimodo, ya que permite la propagación de los modos 0, 1, 2 y 3, mientras que la guía Deep, debido a su menor confinamiento, soporta los modos 0 y 1.</a:t>
             </a:r>
+          </a:p>
+          <a:p>
+            <a:pPr algn="just"/>
+            <a:endParaRPr lang="es-ES" sz="1200" dirty="0">
+              <a:latin typeface="Arial" panose="020B0604020202020204" pitchFamily="34" charset="0"/>
+              <a:cs typeface="Arial" panose="020B0604020202020204" pitchFamily="34" charset="0"/>
+            </a:endParaRPr>
+          </a:p>
+          <a:p>
+            <a:pPr algn="just"/>
+            <a:r>
+              <a:rPr lang="es-ES" sz="1200" dirty="0">
+                <a:solidFill>
+                  <a:srgbClr val="FF0000"/>
+                </a:solidFill>
+                <a:latin typeface="Arial" panose="020B0604020202020204" pitchFamily="34" charset="0"/>
+                <a:cs typeface="Arial" panose="020B0604020202020204" pitchFamily="34" charset="0"/>
+              </a:rPr>
+              <a:t>COMENTAR QUE LA DEEP ES MONOMODO PQ SOLO SE PROPAGAN EL TE0 Y TM0, LA SHALLOW ES MULTIMODO.</a:t>
+            </a:r>
+          </a:p>
+          <a:p>
+            <a:pPr algn="just"/>
+            <a:r>
+              <a:rPr lang="es-ES" sz="1200" dirty="0">
+                <a:solidFill>
+                  <a:srgbClr val="FF0000"/>
+                </a:solidFill>
+                <a:latin typeface="Arial" panose="020B0604020202020204" pitchFamily="34" charset="0"/>
+                <a:cs typeface="Arial" panose="020B0604020202020204" pitchFamily="34" charset="0"/>
+              </a:rPr>
+              <a:t>ENCIMA DEL INDICE DE LA CUBIERTA ES UN MODO GUIADO, POR DEBAJO NO GUIADO PQ SE PROPAGA POR LA CUBIERTA.</a:t>
+            </a:r>
             <a:endParaRPr lang="en-US" sz="1200" dirty="0">
+              <a:solidFill>
+                <a:srgbClr val="FF0000"/>
+              </a:solidFill>
               <a:latin typeface="Arial" panose="020B0604020202020204" pitchFamily="34" charset="0"/>
               <a:cs typeface="Arial" panose="020B0604020202020204" pitchFamily="34" charset="0"/>
             </a:endParaRPr>
@@ -8116,7 +8178,7 @@
         <p:spPr>
           <a:xfrm>
             <a:off x="609441" y="4860334"/>
-            <a:ext cx="11199971" cy="1015663"/>
+            <a:ext cx="11199971" cy="1200329"/>
           </a:xfrm>
           <a:prstGeom prst="rect">
             <a:avLst/>
@@ -8531,6 +8593,19 @@
               <a:latin typeface="Arial" panose="020B0604020202020204" pitchFamily="34" charset="0"/>
               <a:cs typeface="Arial" panose="020B0604020202020204" pitchFamily="34" charset="0"/>
             </a:endParaRPr>
+          </a:p>
+          <a:p>
+            <a:pPr algn="just"/>
+            <a:r>
+              <a:rPr lang="en-US" sz="1200" dirty="0">
+                <a:solidFill>
+                  <a:srgbClr val="FF0000"/>
+                </a:solidFill>
+                <a:latin typeface="Arial" panose="020B0604020202020204" pitchFamily="34" charset="0"/>
+                <a:cs typeface="Arial" panose="020B0604020202020204" pitchFamily="34" charset="0"/>
+              </a:rPr>
+              <a:t>COMENTAR: MONOMODO HASTA UN VALOR DE W Y LUEGO MULTIMODO.</a:t>
+            </a:r>
           </a:p>
           <a:p>
             <a:pPr algn="just"/>
@@ -8898,522 +8973,468 @@
           </a:p>
         </p:txBody>
       </p:sp>
-      <mc:AlternateContent xmlns:mc="http://schemas.openxmlformats.org/markup-compatibility/2006" xmlns:a14="http://schemas.microsoft.com/office/drawing/2010/main">
-        <mc:Choice Requires="a14">
-          <p:sp>
-            <p:nvSpPr>
-              <p:cNvPr id="2" name="CuadroTexto 1">
-                <a:extLst>
-                  <a:ext uri="{FF2B5EF4-FFF2-40B4-BE49-F238E27FC236}">
-                    <a16:creationId xmlns:a16="http://schemas.microsoft.com/office/drawing/2014/main" id="{A440F587-93A3-E474-C0B0-883BB9DAFD85}"/>
-                  </a:ext>
-                </a:extLst>
-              </p:cNvPr>
-              <p:cNvSpPr txBox="1"/>
-              <p:nvPr/>
-            </p:nvSpPr>
-            <p:spPr>
-              <a:xfrm>
-                <a:off x="609441" y="4860334"/>
-                <a:ext cx="11198542" cy="1361911"/>
-              </a:xfrm>
-              <a:prstGeom prst="rect">
-                <a:avLst/>
-              </a:prstGeom>
-              <a:solidFill>
-                <a:schemeClr val="bg1">
-                  <a:lumMod val="95000"/>
-                </a:schemeClr>
-              </a:solidFill>
-              <a:ln w="28575">
-                <a:solidFill>
-                  <a:srgbClr val="E0700D"/>
-                </a:solidFill>
-              </a:ln>
-            </p:spPr>
-            <p:txBody>
-              <a:bodyPr wrap="square" rtlCol="0">
-                <a:spAutoFit/>
-              </a:bodyPr>
-              <a:lstStyle/>
-              <a:p>
-                <a:pPr algn="just"/>
-                <a:r>
-                  <a:rPr lang="en-US" sz="1200" dirty="0">
-                    <a:latin typeface="Arial" panose="020B0604020202020204" pitchFamily="34" charset="0"/>
-                    <a:cs typeface="Arial" panose="020B0604020202020204" pitchFamily="34" charset="0"/>
-                  </a:rPr>
-                  <a:t>Find the second-degree polynomial coefficients and relate them with the group index and the dispersion parameter. </a:t>
-                </a:r>
-                <a14:m>
-                  <m:oMath xmlns:m="http://schemas.openxmlformats.org/officeDocument/2006/math">
-                    <m:d>
-                      <m:dPr>
-                        <m:begChr m:val="{"/>
-                        <m:endChr m:val=""/>
-                        <m:ctrlPr>
-                          <a:rPr lang="es-ES" sz="1200" b="0" i="1" smtClean="0">
-                            <a:latin typeface="Cambria Math" panose="02040503050406030204" pitchFamily="18" charset="0"/>
-                            <a:cs typeface="Arial" panose="020B0604020202020204" pitchFamily="34" charset="0"/>
-                          </a:rPr>
-                        </m:ctrlPr>
-                      </m:dPr>
-                      <m:e>
-                        <m:eqArr>
-                          <m:eqArrPr>
-                            <m:ctrlPr>
-                              <a:rPr lang="es-ES" sz="1200" b="0" i="1" smtClean="0">
-                                <a:latin typeface="Cambria Math" panose="02040503050406030204" pitchFamily="18" charset="0"/>
-                                <a:cs typeface="Arial" panose="020B0604020202020204" pitchFamily="34" charset="0"/>
-                              </a:rPr>
-                            </m:ctrlPr>
-                          </m:eqArrPr>
-                          <m:e>
-                            <m:sSub>
-                              <m:sSubPr>
-                                <m:ctrlPr>
-                                  <a:rPr lang="es-ES" sz="1200" b="0" i="1" smtClean="0">
-                                    <a:latin typeface="Cambria Math" panose="02040503050406030204" pitchFamily="18" charset="0"/>
-                                    <a:cs typeface="Arial" panose="020B0604020202020204" pitchFamily="34" charset="0"/>
-                                  </a:rPr>
-                                </m:ctrlPr>
-                              </m:sSubPr>
-                              <m:e>
-                                <m:r>
-                                  <a:rPr lang="es-ES" sz="1200" b="0" i="1" smtClean="0">
-                                    <a:latin typeface="Cambria Math" panose="02040503050406030204" pitchFamily="18" charset="0"/>
-                                    <a:cs typeface="Arial" panose="020B0604020202020204" pitchFamily="34" charset="0"/>
-                                  </a:rPr>
-                                  <m:t>𝑛</m:t>
-                                </m:r>
-                              </m:e>
-                              <m:sub>
-                                <m:r>
-                                  <a:rPr lang="es-ES" sz="1200" b="0" i="1" smtClean="0">
-                                    <a:latin typeface="Cambria Math" panose="02040503050406030204" pitchFamily="18" charset="0"/>
-                                    <a:cs typeface="Arial" panose="020B0604020202020204" pitchFamily="34" charset="0"/>
-                                  </a:rPr>
-                                  <m:t>𝑒𝑓𝑓</m:t>
-                                </m:r>
-                              </m:sub>
-                            </m:sSub>
-                            <m:r>
-                              <a:rPr lang="es-ES" sz="1200" b="0" i="1" smtClean="0">
-                                <a:latin typeface="Cambria Math" panose="02040503050406030204" pitchFamily="18" charset="0"/>
-                                <a:cs typeface="Arial" panose="020B0604020202020204" pitchFamily="34" charset="0"/>
-                              </a:rPr>
-                              <m:t>=</m:t>
-                            </m:r>
-                            <m:sSub>
-                              <m:sSubPr>
-                                <m:ctrlPr>
-                                  <a:rPr lang="es-ES" sz="1200" b="0" i="1" smtClean="0">
-                                    <a:latin typeface="Cambria Math" panose="02040503050406030204" pitchFamily="18" charset="0"/>
-                                    <a:cs typeface="Arial" panose="020B0604020202020204" pitchFamily="34" charset="0"/>
-                                  </a:rPr>
-                                </m:ctrlPr>
-                              </m:sSubPr>
-                              <m:e>
-                                <m:r>
-                                  <a:rPr lang="es-ES" sz="1200" b="0" i="1" smtClean="0">
-                                    <a:latin typeface="Cambria Math" panose="02040503050406030204" pitchFamily="18" charset="0"/>
-                                    <a:cs typeface="Arial" panose="020B0604020202020204" pitchFamily="34" charset="0"/>
-                                  </a:rPr>
-                                  <m:t>𝑛</m:t>
-                                </m:r>
-                              </m:e>
-                              <m:sub>
-                                <m:r>
-                                  <a:rPr lang="es-ES" sz="1200" b="0" i="1" smtClean="0">
-                                    <a:latin typeface="Cambria Math" panose="02040503050406030204" pitchFamily="18" charset="0"/>
-                                    <a:cs typeface="Arial" panose="020B0604020202020204" pitchFamily="34" charset="0"/>
-                                  </a:rPr>
-                                  <m:t>1</m:t>
-                                </m:r>
-                              </m:sub>
-                            </m:sSub>
-                          </m:e>
-                          <m:e>
-                            <m:sSub>
-                              <m:sSubPr>
-                                <m:ctrlPr>
-                                  <a:rPr lang="es-ES" sz="1200" b="0" i="1" smtClean="0">
-                                    <a:latin typeface="Cambria Math" panose="02040503050406030204" pitchFamily="18" charset="0"/>
-                                    <a:cs typeface="Arial" panose="020B0604020202020204" pitchFamily="34" charset="0"/>
-                                  </a:rPr>
-                                </m:ctrlPr>
-                              </m:sSubPr>
-                              <m:e>
-                                <m:r>
-                                  <a:rPr lang="es-ES" sz="1200" b="0" i="1" smtClean="0">
-                                    <a:latin typeface="Cambria Math" panose="02040503050406030204" pitchFamily="18" charset="0"/>
-                                    <a:cs typeface="Arial" panose="020B0604020202020204" pitchFamily="34" charset="0"/>
-                                  </a:rPr>
-                                  <m:t>𝑛</m:t>
-                                </m:r>
-                              </m:e>
-                              <m:sub>
-                                <m:r>
-                                  <a:rPr lang="es-ES" sz="1200" b="0" i="1" smtClean="0">
-                                    <a:latin typeface="Cambria Math" panose="02040503050406030204" pitchFamily="18" charset="0"/>
-                                    <a:cs typeface="Arial" panose="020B0604020202020204" pitchFamily="34" charset="0"/>
-                                  </a:rPr>
-                                  <m:t>𝑔</m:t>
-                                </m:r>
-                              </m:sub>
-                            </m:sSub>
-                            <m:r>
-                              <a:rPr lang="es-ES" sz="1200" b="0" i="1" smtClean="0">
-                                <a:latin typeface="Cambria Math" panose="02040503050406030204" pitchFamily="18" charset="0"/>
-                                <a:cs typeface="Arial" panose="020B0604020202020204" pitchFamily="34" charset="0"/>
-                              </a:rPr>
-                              <m:t>=</m:t>
-                            </m:r>
-                            <m:sSub>
-                              <m:sSubPr>
-                                <m:ctrlPr>
-                                  <a:rPr lang="es-ES" sz="1200" b="0" i="1" smtClean="0">
-                                    <a:latin typeface="Cambria Math" panose="02040503050406030204" pitchFamily="18" charset="0"/>
-                                    <a:cs typeface="Arial" panose="020B0604020202020204" pitchFamily="34" charset="0"/>
-                                  </a:rPr>
-                                </m:ctrlPr>
-                              </m:sSubPr>
-                              <m:e>
-                                <m:r>
-                                  <a:rPr lang="es-ES" sz="1200" b="0" i="1" smtClean="0">
-                                    <a:latin typeface="Cambria Math" panose="02040503050406030204" pitchFamily="18" charset="0"/>
-                                    <a:cs typeface="Arial" panose="020B0604020202020204" pitchFamily="34" charset="0"/>
-                                  </a:rPr>
-                                  <m:t>𝑛</m:t>
-                                </m:r>
-                              </m:e>
-                              <m:sub>
-                                <m:r>
-                                  <a:rPr lang="es-ES" sz="1200" b="0" i="1" smtClean="0">
-                                    <a:latin typeface="Cambria Math" panose="02040503050406030204" pitchFamily="18" charset="0"/>
-                                    <a:cs typeface="Arial" panose="020B0604020202020204" pitchFamily="34" charset="0"/>
-                                  </a:rPr>
-                                  <m:t>1</m:t>
-                                </m:r>
-                              </m:sub>
-                            </m:sSub>
-                            <m:r>
-                              <a:rPr lang="es-ES" sz="1200" b="0" i="1" smtClean="0">
-                                <a:latin typeface="Cambria Math" panose="02040503050406030204" pitchFamily="18" charset="0"/>
-                                <a:cs typeface="Arial" panose="020B0604020202020204" pitchFamily="34" charset="0"/>
-                              </a:rPr>
-                              <m:t>−</m:t>
-                            </m:r>
-                            <m:sSub>
-                              <m:sSubPr>
-                                <m:ctrlPr>
-                                  <a:rPr lang="es-ES" sz="1200" b="0" i="1" smtClean="0">
-                                    <a:latin typeface="Cambria Math" panose="02040503050406030204" pitchFamily="18" charset="0"/>
-                                    <a:cs typeface="Arial" panose="020B0604020202020204" pitchFamily="34" charset="0"/>
-                                  </a:rPr>
-                                </m:ctrlPr>
-                              </m:sSubPr>
-                              <m:e>
-                                <m:r>
-                                  <a:rPr lang="es-ES" sz="1200" b="0" i="1" smtClean="0">
-                                    <a:latin typeface="Cambria Math" panose="02040503050406030204" pitchFamily="18" charset="0"/>
-                                    <a:cs typeface="Arial" panose="020B0604020202020204" pitchFamily="34" charset="0"/>
-                                  </a:rPr>
-                                  <m:t>𝑛</m:t>
-                                </m:r>
-                              </m:e>
-                              <m:sub>
-                                <m:r>
-                                  <a:rPr lang="es-ES" sz="1200" b="0" i="1" smtClean="0">
-                                    <a:latin typeface="Cambria Math" panose="02040503050406030204" pitchFamily="18" charset="0"/>
-                                    <a:cs typeface="Arial" panose="020B0604020202020204" pitchFamily="34" charset="0"/>
-                                  </a:rPr>
-                                  <m:t>2</m:t>
-                                </m:r>
-                              </m:sub>
-                            </m:sSub>
-                            <m:sSub>
-                              <m:sSubPr>
-                                <m:ctrlPr>
-                                  <a:rPr lang="es-ES" sz="1200" b="0" i="1" smtClean="0">
-                                    <a:latin typeface="Cambria Math" panose="02040503050406030204" pitchFamily="18" charset="0"/>
-                                    <a:cs typeface="Arial" panose="020B0604020202020204" pitchFamily="34" charset="0"/>
-                                  </a:rPr>
-                                </m:ctrlPr>
-                              </m:sSubPr>
-                              <m:e>
-                                <m:r>
-                                  <a:rPr lang="es-ES" sz="1200" b="0" i="1" smtClean="0">
-                                    <a:latin typeface="Cambria Math" panose="02040503050406030204" pitchFamily="18" charset="0"/>
-                                    <a:cs typeface="Arial" panose="020B0604020202020204" pitchFamily="34" charset="0"/>
-                                  </a:rPr>
-                                  <m:t>𝜆</m:t>
-                                </m:r>
-                              </m:e>
-                              <m:sub>
-                                <m:r>
-                                  <a:rPr lang="es-ES" sz="1200" b="0" i="1" smtClean="0">
-                                    <a:latin typeface="Cambria Math" panose="02040503050406030204" pitchFamily="18" charset="0"/>
-                                    <a:cs typeface="Arial" panose="020B0604020202020204" pitchFamily="34" charset="0"/>
-                                  </a:rPr>
-                                  <m:t>0</m:t>
-                                </m:r>
-                              </m:sub>
-                            </m:sSub>
-                          </m:e>
-                          <m:e>
-                            <m:r>
-                              <a:rPr lang="es-ES" sz="1200" b="0" i="1" smtClean="0">
-                                <a:latin typeface="Cambria Math" panose="02040503050406030204" pitchFamily="18" charset="0"/>
-                                <a:cs typeface="Arial" panose="020B0604020202020204" pitchFamily="34" charset="0"/>
-                              </a:rPr>
-                              <m:t>𝐷</m:t>
-                            </m:r>
-                            <m:r>
-                              <a:rPr lang="es-ES" sz="1200" b="0" i="1" smtClean="0">
-                                <a:latin typeface="Cambria Math" panose="02040503050406030204" pitchFamily="18" charset="0"/>
-                                <a:cs typeface="Arial" panose="020B0604020202020204" pitchFamily="34" charset="0"/>
-                              </a:rPr>
-                              <m:t>=−</m:t>
-                            </m:r>
-                            <m:f>
-                              <m:fPr>
-                                <m:ctrlPr>
-                                  <a:rPr lang="es-ES" sz="1200" b="0" i="1" smtClean="0">
-                                    <a:latin typeface="Cambria Math" panose="02040503050406030204" pitchFamily="18" charset="0"/>
-                                    <a:cs typeface="Arial" panose="020B0604020202020204" pitchFamily="34" charset="0"/>
-                                  </a:rPr>
-                                </m:ctrlPr>
-                              </m:fPr>
-                              <m:num>
-                                <m:r>
-                                  <a:rPr lang="es-ES" sz="1200" b="0" i="1" smtClean="0">
-                                    <a:latin typeface="Cambria Math" panose="02040503050406030204" pitchFamily="18" charset="0"/>
-                                    <a:cs typeface="Arial" panose="020B0604020202020204" pitchFamily="34" charset="0"/>
-                                  </a:rPr>
-                                  <m:t>2</m:t>
-                                </m:r>
-                                <m:sSub>
-                                  <m:sSubPr>
-                                    <m:ctrlPr>
-                                      <a:rPr lang="es-ES" sz="1200" b="0" i="1" smtClean="0">
-                                        <a:latin typeface="Cambria Math" panose="02040503050406030204" pitchFamily="18" charset="0"/>
-                                        <a:cs typeface="Arial" panose="020B0604020202020204" pitchFamily="34" charset="0"/>
-                                      </a:rPr>
-                                    </m:ctrlPr>
-                                  </m:sSubPr>
-                                  <m:e>
-                                    <m:r>
-                                      <a:rPr lang="es-ES" sz="1200" b="0" i="1" smtClean="0">
-                                        <a:latin typeface="Cambria Math" panose="02040503050406030204" pitchFamily="18" charset="0"/>
-                                        <a:cs typeface="Arial" panose="020B0604020202020204" pitchFamily="34" charset="0"/>
-                                      </a:rPr>
-                                      <m:t>𝜆</m:t>
-                                    </m:r>
-                                  </m:e>
-                                  <m:sub>
-                                    <m:r>
-                                      <a:rPr lang="es-ES" sz="1200" b="0" i="1" smtClean="0">
-                                        <a:latin typeface="Cambria Math" panose="02040503050406030204" pitchFamily="18" charset="0"/>
-                                        <a:cs typeface="Arial" panose="020B0604020202020204" pitchFamily="34" charset="0"/>
-                                      </a:rPr>
-                                      <m:t>0</m:t>
-                                    </m:r>
-                                  </m:sub>
-                                </m:sSub>
-                                <m:sSub>
-                                  <m:sSubPr>
-                                    <m:ctrlPr>
-                                      <a:rPr lang="es-ES" sz="1200" b="0" i="1" smtClean="0">
-                                        <a:latin typeface="Cambria Math" panose="02040503050406030204" pitchFamily="18" charset="0"/>
-                                        <a:cs typeface="Arial" panose="020B0604020202020204" pitchFamily="34" charset="0"/>
-                                      </a:rPr>
-                                    </m:ctrlPr>
-                                  </m:sSubPr>
-                                  <m:e>
-                                    <m:r>
-                                      <a:rPr lang="es-ES" sz="1200" b="0" i="1" smtClean="0">
-                                        <a:latin typeface="Cambria Math" panose="02040503050406030204" pitchFamily="18" charset="0"/>
-                                        <a:cs typeface="Arial" panose="020B0604020202020204" pitchFamily="34" charset="0"/>
-                                      </a:rPr>
-                                      <m:t>𝑛</m:t>
-                                    </m:r>
-                                  </m:e>
-                                  <m:sub>
-                                    <m:r>
-                                      <a:rPr lang="es-ES" sz="1200" b="0" i="1" smtClean="0">
-                                        <a:latin typeface="Cambria Math" panose="02040503050406030204" pitchFamily="18" charset="0"/>
-                                        <a:cs typeface="Arial" panose="020B0604020202020204" pitchFamily="34" charset="0"/>
-                                      </a:rPr>
-                                      <m:t>3</m:t>
-                                    </m:r>
-                                  </m:sub>
-                                </m:sSub>
-                              </m:num>
-                              <m:den>
-                                <m:r>
-                                  <a:rPr lang="es-ES" sz="1200" b="0" i="1" smtClean="0">
-                                    <a:latin typeface="Cambria Math" panose="02040503050406030204" pitchFamily="18" charset="0"/>
-                                    <a:cs typeface="Arial" panose="020B0604020202020204" pitchFamily="34" charset="0"/>
-                                  </a:rPr>
-                                  <m:t>𝑐</m:t>
-                                </m:r>
-                              </m:den>
-                            </m:f>
-                            <m:d>
-                              <m:dPr>
-                                <m:begChr m:val="["/>
-                                <m:endChr m:val="]"/>
-                                <m:ctrlPr>
-                                  <a:rPr lang="es-ES" sz="1200" b="0" i="1" smtClean="0">
-                                    <a:latin typeface="Cambria Math" panose="02040503050406030204" pitchFamily="18" charset="0"/>
-                                    <a:cs typeface="Arial" panose="020B0604020202020204" pitchFamily="34" charset="0"/>
-                                  </a:rPr>
-                                </m:ctrlPr>
-                              </m:dPr>
-                              <m:e>
-                                <m:f>
-                                  <m:fPr>
-                                    <m:ctrlPr>
-                                      <a:rPr lang="es-ES" sz="1200" b="0" i="1" smtClean="0">
-                                        <a:latin typeface="Cambria Math" panose="02040503050406030204" pitchFamily="18" charset="0"/>
-                                        <a:cs typeface="Arial" panose="020B0604020202020204" pitchFamily="34" charset="0"/>
-                                      </a:rPr>
-                                    </m:ctrlPr>
-                                  </m:fPr>
-                                  <m:num>
-                                    <m:sSup>
-                                      <m:sSupPr>
-                                        <m:ctrlPr>
-                                          <a:rPr lang="es-ES" sz="1200" b="0" i="1" smtClean="0">
-                                            <a:latin typeface="Cambria Math" panose="02040503050406030204" pitchFamily="18" charset="0"/>
-                                            <a:cs typeface="Arial" panose="020B0604020202020204" pitchFamily="34" charset="0"/>
-                                          </a:rPr>
-                                        </m:ctrlPr>
-                                      </m:sSupPr>
-                                      <m:e>
-                                        <m:r>
-                                          <a:rPr lang="es-ES" sz="1200" b="0" i="1" smtClean="0">
-                                            <a:latin typeface="Cambria Math" panose="02040503050406030204" pitchFamily="18" charset="0"/>
-                                            <a:cs typeface="Arial" panose="020B0604020202020204" pitchFamily="34" charset="0"/>
-                                          </a:rPr>
-                                          <m:t>𝑠</m:t>
-                                        </m:r>
-                                      </m:e>
-                                      <m:sup>
-                                        <m:r>
-                                          <a:rPr lang="es-ES" sz="1200" b="0" i="1" smtClean="0">
-                                            <a:latin typeface="Cambria Math" panose="02040503050406030204" pitchFamily="18" charset="0"/>
-                                            <a:cs typeface="Arial" panose="020B0604020202020204" pitchFamily="34" charset="0"/>
-                                          </a:rPr>
-                                          <m:t>2</m:t>
-                                        </m:r>
-                                      </m:sup>
-                                    </m:sSup>
-                                  </m:num>
-                                  <m:den>
-                                    <m:r>
-                                      <a:rPr lang="es-ES" sz="1200" b="0" i="1" smtClean="0">
-                                        <a:latin typeface="Cambria Math" panose="02040503050406030204" pitchFamily="18" charset="0"/>
-                                        <a:cs typeface="Arial" panose="020B0604020202020204" pitchFamily="34" charset="0"/>
-                                      </a:rPr>
-                                      <m:t>𝑚</m:t>
-                                    </m:r>
-                                  </m:den>
-                                </m:f>
-                              </m:e>
-                            </m:d>
-                          </m:e>
-                        </m:eqArr>
-                      </m:e>
-                    </m:d>
-                  </m:oMath>
-                </a14:m>
-                <a:endParaRPr lang="es-ES" sz="1200" b="0" dirty="0">
-                  <a:latin typeface="Arial" panose="020B0604020202020204" pitchFamily="34" charset="0"/>
-                  <a:cs typeface="Arial" panose="020B0604020202020204" pitchFamily="34" charset="0"/>
-                </a:endParaRPr>
-              </a:p>
-              <a:p>
-                <a:pPr algn="just"/>
-                <a:r>
-                  <a:rPr lang="en-US" sz="1200" dirty="0">
-                    <a:latin typeface="Arial" panose="020B0604020202020204" pitchFamily="34" charset="0"/>
-                    <a:cs typeface="Arial" panose="020B0604020202020204" pitchFamily="34" charset="0"/>
-                  </a:rPr>
-                  <a:t> </a:t>
-                </a:r>
-              </a:p>
-              <a:p>
-                <a:pPr algn="just"/>
-                <a:r>
-                  <a:rPr lang="en-US" sz="1200" dirty="0">
-                    <a:latin typeface="Arial" panose="020B0604020202020204" pitchFamily="34" charset="0"/>
-                    <a:cs typeface="Arial" panose="020B0604020202020204" pitchFamily="34" charset="0"/>
-                  </a:rPr>
-                  <a:t>Comment on the results found for the TE0 and TM0 for both deep and shallow waveguides. </a:t>
-                </a:r>
-              </a:p>
-              <a:p>
-                <a:pPr algn="just"/>
-                <a:endParaRPr lang="en-US" sz="1200" dirty="0">
-                  <a:latin typeface="Arial" panose="020B0604020202020204" pitchFamily="34" charset="0"/>
-                  <a:cs typeface="Arial" panose="020B0604020202020204" pitchFamily="34" charset="0"/>
-                </a:endParaRPr>
-              </a:p>
-            </p:txBody>
-          </p:sp>
-        </mc:Choice>
-        <mc:Fallback xmlns="">
-          <p:sp>
-            <p:nvSpPr>
-              <p:cNvPr id="2" name="CuadroTexto 1">
-                <a:extLst>
-                  <a:ext uri="{FF2B5EF4-FFF2-40B4-BE49-F238E27FC236}">
-                    <a16:creationId xmlns:a16="http://schemas.microsoft.com/office/drawing/2014/main" id="{A440F587-93A3-E474-C0B0-883BB9DAFD85}"/>
-                  </a:ext>
-                </a:extLst>
-              </p:cNvPr>
-              <p:cNvSpPr txBox="1">
-                <a:spLocks noRot="1" noChangeAspect="1" noMove="1" noResize="1" noEditPoints="1" noAdjustHandles="1" noChangeArrowheads="1" noChangeShapeType="1" noTextEdit="1"/>
-              </p:cNvSpPr>
-              <p:nvPr/>
-            </p:nvSpPr>
-            <p:spPr>
-              <a:xfrm>
-                <a:off x="609441" y="4860334"/>
-                <a:ext cx="11198542" cy="1361911"/>
-              </a:xfrm>
-              <a:prstGeom prst="rect">
-                <a:avLst/>
-              </a:prstGeom>
-              <a:blipFill>
-                <a:blip r:embed="rId6"/>
-                <a:stretch>
-                  <a:fillRect/>
-                </a:stretch>
-              </a:blipFill>
-              <a:ln w="28575">
-                <a:solidFill>
-                  <a:srgbClr val="E0700D"/>
-                </a:solidFill>
-              </a:ln>
-            </p:spPr>
-            <p:txBody>
-              <a:bodyPr/>
-              <a:lstStyle/>
-              <a:p>
-                <a:r>
-                  <a:rPr lang="es-ES">
-                    <a:noFill/>
-                  </a:rPr>
-                  <a:t> </a:t>
-                </a:r>
-              </a:p>
-            </p:txBody>
-          </p:sp>
-        </mc:Fallback>
-      </mc:AlternateContent>
+      <p:sp>
+        <p:nvSpPr>
+          <p:cNvPr id="2" name="CuadroTexto 1">
+            <a:extLst>
+              <a:ext uri="{FF2B5EF4-FFF2-40B4-BE49-F238E27FC236}">
+                <a16:creationId xmlns:a16="http://schemas.microsoft.com/office/drawing/2014/main" id="{A440F587-93A3-E474-C0B0-883BB9DAFD85}"/>
+              </a:ext>
+            </a:extLst>
+          </p:cNvPr>
+          <p:cNvSpPr txBox="1"/>
+          <p:nvPr/>
+        </p:nvSpPr>
+        <p:spPr>
+          <a:xfrm>
+            <a:off x="609441" y="4419600"/>
+            <a:ext cx="5562759" cy="1384995"/>
+          </a:xfrm>
+          <a:prstGeom prst="rect">
+            <a:avLst/>
+          </a:prstGeom>
+          <a:solidFill>
+            <a:schemeClr val="bg1">
+              <a:lumMod val="95000"/>
+            </a:schemeClr>
+          </a:solidFill>
+          <a:ln w="28575">
+            <a:solidFill>
+              <a:srgbClr val="E0700D"/>
+            </a:solidFill>
+          </a:ln>
+        </p:spPr>
+        <p:txBody>
+          <a:bodyPr wrap="square" rtlCol="0">
+            <a:spAutoFit/>
+          </a:bodyPr>
+          <a:lstStyle/>
+          <a:p>
+            <a:pPr algn="just"/>
+            <a:r>
+              <a:rPr lang="es-ES" sz="1200" b="1" dirty="0">
+                <a:latin typeface="Arial" panose="020B0604020202020204" pitchFamily="34" charset="0"/>
+                <a:cs typeface="Arial" panose="020B0604020202020204" pitchFamily="34" charset="0"/>
+              </a:rPr>
+              <a:t>Deep </a:t>
+            </a:r>
+            <a:r>
+              <a:rPr lang="es-ES" sz="1200" b="1" dirty="0" err="1">
+                <a:latin typeface="Arial" panose="020B0604020202020204" pitchFamily="34" charset="0"/>
+                <a:cs typeface="Arial" panose="020B0604020202020204" pitchFamily="34" charset="0"/>
+              </a:rPr>
+              <a:t>waveguide</a:t>
+            </a:r>
+            <a:r>
+              <a:rPr lang="es-ES" sz="1200" b="1" dirty="0">
+                <a:latin typeface="Arial" panose="020B0604020202020204" pitchFamily="34" charset="0"/>
+                <a:cs typeface="Arial" panose="020B0604020202020204" pitchFamily="34" charset="0"/>
+              </a:rPr>
+              <a:t>:</a:t>
+            </a:r>
+          </a:p>
+          <a:p>
+            <a:pPr algn="just"/>
+            <a:r>
+              <a:rPr lang="es-ES" sz="1200" dirty="0">
+                <a:latin typeface="Arial" panose="020B0604020202020204" pitchFamily="34" charset="0"/>
+                <a:cs typeface="Arial" panose="020B0604020202020204" pitchFamily="34" charset="0"/>
+              </a:rPr>
+              <a:t>TE0 central </a:t>
+            </a:r>
+            <a:r>
+              <a:rPr lang="es-ES" sz="1200" dirty="0" err="1">
+                <a:latin typeface="Arial" panose="020B0604020202020204" pitchFamily="34" charset="0"/>
+                <a:cs typeface="Arial" panose="020B0604020202020204" pitchFamily="34" charset="0"/>
+              </a:rPr>
+              <a:t>wavelength</a:t>
+            </a:r>
+            <a:r>
+              <a:rPr lang="es-ES" sz="1200" dirty="0">
+                <a:latin typeface="Arial" panose="020B0604020202020204" pitchFamily="34" charset="0"/>
+                <a:cs typeface="Arial" panose="020B0604020202020204" pitchFamily="34" charset="0"/>
+              </a:rPr>
+              <a:t> </a:t>
+            </a:r>
+            <a:r>
+              <a:rPr lang="es-ES" sz="1200" dirty="0" err="1">
+                <a:latin typeface="Arial" panose="020B0604020202020204" pitchFamily="34" charset="0"/>
+                <a:cs typeface="Arial" panose="020B0604020202020204" pitchFamily="34" charset="0"/>
+              </a:rPr>
+              <a:t>effective</a:t>
+            </a:r>
+            <a:r>
+              <a:rPr lang="es-ES" sz="1200" dirty="0">
+                <a:latin typeface="Arial" panose="020B0604020202020204" pitchFamily="34" charset="0"/>
+                <a:cs typeface="Arial" panose="020B0604020202020204" pitchFamily="34" charset="0"/>
+              </a:rPr>
+              <a:t> </a:t>
+            </a:r>
+            <a:r>
+              <a:rPr lang="es-ES" sz="1200" dirty="0" err="1">
+                <a:latin typeface="Arial" panose="020B0604020202020204" pitchFamily="34" charset="0"/>
+                <a:cs typeface="Arial" panose="020B0604020202020204" pitchFamily="34" charset="0"/>
+              </a:rPr>
+              <a:t>index</a:t>
+            </a:r>
+            <a:r>
+              <a:rPr lang="es-ES" sz="1200" dirty="0">
+                <a:latin typeface="Arial" panose="020B0604020202020204" pitchFamily="34" charset="0"/>
+                <a:cs typeface="Arial" panose="020B0604020202020204" pitchFamily="34" charset="0"/>
+              </a:rPr>
+              <a:t> (</a:t>
+            </a:r>
+            <a:r>
+              <a:rPr lang="es-ES" sz="1200" dirty="0" err="1">
+                <a:latin typeface="Arial" panose="020B0604020202020204" pitchFamily="34" charset="0"/>
+                <a:cs typeface="Arial" panose="020B0604020202020204" pitchFamily="34" charset="0"/>
+              </a:rPr>
+              <a:t>polyfit</a:t>
+            </a:r>
+            <a:r>
+              <a:rPr lang="es-ES" sz="1200" dirty="0">
+                <a:latin typeface="Arial" panose="020B0604020202020204" pitchFamily="34" charset="0"/>
+                <a:cs typeface="Arial" panose="020B0604020202020204" pitchFamily="34" charset="0"/>
+              </a:rPr>
+              <a:t>): 1.6049166291026744</a:t>
+            </a:r>
+          </a:p>
+          <a:p>
+            <a:pPr algn="just"/>
+            <a:r>
+              <a:rPr lang="es-ES" sz="1200" dirty="0">
+                <a:latin typeface="Arial" panose="020B0604020202020204" pitchFamily="34" charset="0"/>
+                <a:cs typeface="Arial" panose="020B0604020202020204" pitchFamily="34" charset="0"/>
+              </a:rPr>
+              <a:t>TE0 central </a:t>
+            </a:r>
+            <a:r>
+              <a:rPr lang="es-ES" sz="1200" dirty="0" err="1">
+                <a:latin typeface="Arial" panose="020B0604020202020204" pitchFamily="34" charset="0"/>
+                <a:cs typeface="Arial" panose="020B0604020202020204" pitchFamily="34" charset="0"/>
+              </a:rPr>
+              <a:t>wavelength</a:t>
+            </a:r>
+            <a:r>
+              <a:rPr lang="es-ES" sz="1200" dirty="0">
+                <a:latin typeface="Arial" panose="020B0604020202020204" pitchFamily="34" charset="0"/>
+                <a:cs typeface="Arial" panose="020B0604020202020204" pitchFamily="34" charset="0"/>
+              </a:rPr>
+              <a:t> </a:t>
+            </a:r>
+            <a:r>
+              <a:rPr lang="es-ES" sz="1200" dirty="0" err="1">
+                <a:latin typeface="Arial" panose="020B0604020202020204" pitchFamily="34" charset="0"/>
+                <a:cs typeface="Arial" panose="020B0604020202020204" pitchFamily="34" charset="0"/>
+              </a:rPr>
+              <a:t>group</a:t>
+            </a:r>
+            <a:r>
+              <a:rPr lang="es-ES" sz="1200" dirty="0">
+                <a:latin typeface="Arial" panose="020B0604020202020204" pitchFamily="34" charset="0"/>
+                <a:cs typeface="Arial" panose="020B0604020202020204" pitchFamily="34" charset="0"/>
+              </a:rPr>
+              <a:t> </a:t>
+            </a:r>
+            <a:r>
+              <a:rPr lang="es-ES" sz="1200" dirty="0" err="1">
+                <a:latin typeface="Arial" panose="020B0604020202020204" pitchFamily="34" charset="0"/>
+                <a:cs typeface="Arial" panose="020B0604020202020204" pitchFamily="34" charset="0"/>
+              </a:rPr>
+              <a:t>index</a:t>
+            </a:r>
+            <a:r>
+              <a:rPr lang="es-ES" sz="1200" dirty="0">
+                <a:latin typeface="Arial" panose="020B0604020202020204" pitchFamily="34" charset="0"/>
+                <a:cs typeface="Arial" panose="020B0604020202020204" pitchFamily="34" charset="0"/>
+              </a:rPr>
+              <a:t> (</a:t>
+            </a:r>
+            <a:r>
+              <a:rPr lang="es-ES" sz="1200" dirty="0" err="1">
+                <a:latin typeface="Arial" panose="020B0604020202020204" pitchFamily="34" charset="0"/>
+                <a:cs typeface="Arial" panose="020B0604020202020204" pitchFamily="34" charset="0"/>
+              </a:rPr>
+              <a:t>polyfit</a:t>
+            </a:r>
+            <a:r>
+              <a:rPr lang="es-ES" sz="1200" dirty="0">
+                <a:latin typeface="Arial" panose="020B0604020202020204" pitchFamily="34" charset="0"/>
+                <a:cs typeface="Arial" panose="020B0604020202020204" pitchFamily="34" charset="0"/>
+              </a:rPr>
+              <a:t>): 1.9399909008100613</a:t>
+            </a:r>
+          </a:p>
+          <a:p>
+            <a:pPr algn="just"/>
+            <a:r>
+              <a:rPr lang="es-ES" sz="1200" dirty="0">
+                <a:latin typeface="Arial" panose="020B0604020202020204" pitchFamily="34" charset="0"/>
+                <a:cs typeface="Arial" panose="020B0604020202020204" pitchFamily="34" charset="0"/>
+              </a:rPr>
+              <a:t>TE0 central </a:t>
+            </a:r>
+            <a:r>
+              <a:rPr lang="es-ES" sz="1200" dirty="0" err="1">
+                <a:latin typeface="Arial" panose="020B0604020202020204" pitchFamily="34" charset="0"/>
+                <a:cs typeface="Arial" panose="020B0604020202020204" pitchFamily="34" charset="0"/>
+              </a:rPr>
+              <a:t>wavelength</a:t>
+            </a:r>
+            <a:r>
+              <a:rPr lang="es-ES" sz="1200" dirty="0">
+                <a:latin typeface="Arial" panose="020B0604020202020204" pitchFamily="34" charset="0"/>
+                <a:cs typeface="Arial" panose="020B0604020202020204" pitchFamily="34" charset="0"/>
+              </a:rPr>
+              <a:t> </a:t>
+            </a:r>
+            <a:r>
+              <a:rPr lang="es-ES" sz="1200" dirty="0" err="1">
+                <a:latin typeface="Arial" panose="020B0604020202020204" pitchFamily="34" charset="0"/>
+                <a:cs typeface="Arial" panose="020B0604020202020204" pitchFamily="34" charset="0"/>
+              </a:rPr>
+              <a:t>dispersion</a:t>
+            </a:r>
+            <a:r>
+              <a:rPr lang="es-ES" sz="1200" dirty="0">
+                <a:latin typeface="Arial" panose="020B0604020202020204" pitchFamily="34" charset="0"/>
+                <a:cs typeface="Arial" panose="020B0604020202020204" pitchFamily="34" charset="0"/>
+              </a:rPr>
+              <a:t> (</a:t>
+            </a:r>
+            <a:r>
+              <a:rPr lang="es-ES" sz="1200" dirty="0" err="1">
+                <a:latin typeface="Arial" panose="020B0604020202020204" pitchFamily="34" charset="0"/>
+                <a:cs typeface="Arial" panose="020B0604020202020204" pitchFamily="34" charset="0"/>
+              </a:rPr>
+              <a:t>polyfit</a:t>
+            </a:r>
+            <a:r>
+              <a:rPr lang="es-ES" sz="1200" dirty="0">
+                <a:latin typeface="Arial" panose="020B0604020202020204" pitchFamily="34" charset="0"/>
+                <a:cs typeface="Arial" panose="020B0604020202020204" pitchFamily="34" charset="0"/>
+              </a:rPr>
+              <a:t>): -1006.6987866611223 </a:t>
+            </a:r>
+            <a:r>
+              <a:rPr lang="es-ES" sz="1200" dirty="0" err="1">
+                <a:latin typeface="Arial" panose="020B0604020202020204" pitchFamily="34" charset="0"/>
+                <a:cs typeface="Arial" panose="020B0604020202020204" pitchFamily="34" charset="0"/>
+              </a:rPr>
+              <a:t>ps</a:t>
+            </a:r>
+            <a:r>
+              <a:rPr lang="es-ES" sz="1200" dirty="0">
+                <a:latin typeface="Arial" panose="020B0604020202020204" pitchFamily="34" charset="0"/>
+                <a:cs typeface="Arial" panose="020B0604020202020204" pitchFamily="34" charset="0"/>
+              </a:rPr>
+              <a:t>/(km*nm)</a:t>
+            </a:r>
+          </a:p>
+          <a:p>
+            <a:pPr algn="just"/>
+            <a:r>
+              <a:rPr lang="es-ES" sz="1200" dirty="0">
+                <a:latin typeface="Arial" panose="020B0604020202020204" pitchFamily="34" charset="0"/>
+                <a:cs typeface="Arial" panose="020B0604020202020204" pitchFamily="34" charset="0"/>
+              </a:rPr>
+              <a:t>TM0 central </a:t>
+            </a:r>
+            <a:r>
+              <a:rPr lang="es-ES" sz="1200" dirty="0" err="1">
+                <a:latin typeface="Arial" panose="020B0604020202020204" pitchFamily="34" charset="0"/>
+                <a:cs typeface="Arial" panose="020B0604020202020204" pitchFamily="34" charset="0"/>
+              </a:rPr>
+              <a:t>wavelength</a:t>
+            </a:r>
+            <a:r>
+              <a:rPr lang="es-ES" sz="1200" dirty="0">
+                <a:latin typeface="Arial" panose="020B0604020202020204" pitchFamily="34" charset="0"/>
+                <a:cs typeface="Arial" panose="020B0604020202020204" pitchFamily="34" charset="0"/>
+              </a:rPr>
+              <a:t> </a:t>
+            </a:r>
+            <a:r>
+              <a:rPr lang="es-ES" sz="1200" dirty="0" err="1">
+                <a:latin typeface="Arial" panose="020B0604020202020204" pitchFamily="34" charset="0"/>
+                <a:cs typeface="Arial" panose="020B0604020202020204" pitchFamily="34" charset="0"/>
+              </a:rPr>
+              <a:t>effective</a:t>
+            </a:r>
+            <a:r>
+              <a:rPr lang="es-ES" sz="1200" dirty="0">
+                <a:latin typeface="Arial" panose="020B0604020202020204" pitchFamily="34" charset="0"/>
+                <a:cs typeface="Arial" panose="020B0604020202020204" pitchFamily="34" charset="0"/>
+              </a:rPr>
+              <a:t> </a:t>
+            </a:r>
+            <a:r>
+              <a:rPr lang="es-ES" sz="1200" dirty="0" err="1">
+                <a:latin typeface="Arial" panose="020B0604020202020204" pitchFamily="34" charset="0"/>
+                <a:cs typeface="Arial" panose="020B0604020202020204" pitchFamily="34" charset="0"/>
+              </a:rPr>
+              <a:t>index</a:t>
+            </a:r>
+            <a:r>
+              <a:rPr lang="es-ES" sz="1200" dirty="0">
+                <a:latin typeface="Arial" panose="020B0604020202020204" pitchFamily="34" charset="0"/>
+                <a:cs typeface="Arial" panose="020B0604020202020204" pitchFamily="34" charset="0"/>
+              </a:rPr>
+              <a:t> (</a:t>
+            </a:r>
+            <a:r>
+              <a:rPr lang="es-ES" sz="1200" dirty="0" err="1">
+                <a:latin typeface="Arial" panose="020B0604020202020204" pitchFamily="34" charset="0"/>
+                <a:cs typeface="Arial" panose="020B0604020202020204" pitchFamily="34" charset="0"/>
+              </a:rPr>
+              <a:t>polyfit</a:t>
+            </a:r>
+            <a:r>
+              <a:rPr lang="es-ES" sz="1200" dirty="0">
+                <a:latin typeface="Arial" panose="020B0604020202020204" pitchFamily="34" charset="0"/>
+                <a:cs typeface="Arial" panose="020B0604020202020204" pitchFamily="34" charset="0"/>
+              </a:rPr>
+              <a:t>): 1.5271892343288158</a:t>
+            </a:r>
+          </a:p>
+          <a:p>
+            <a:pPr algn="just"/>
+            <a:r>
+              <a:rPr lang="es-ES" sz="1200" dirty="0">
+                <a:latin typeface="Arial" panose="020B0604020202020204" pitchFamily="34" charset="0"/>
+                <a:cs typeface="Arial" panose="020B0604020202020204" pitchFamily="34" charset="0"/>
+              </a:rPr>
+              <a:t>TM0 central </a:t>
+            </a:r>
+            <a:r>
+              <a:rPr lang="es-ES" sz="1200" dirty="0" err="1">
+                <a:latin typeface="Arial" panose="020B0604020202020204" pitchFamily="34" charset="0"/>
+                <a:cs typeface="Arial" panose="020B0604020202020204" pitchFamily="34" charset="0"/>
+              </a:rPr>
+              <a:t>wavelength</a:t>
+            </a:r>
+            <a:r>
+              <a:rPr lang="es-ES" sz="1200" dirty="0">
+                <a:latin typeface="Arial" panose="020B0604020202020204" pitchFamily="34" charset="0"/>
+                <a:cs typeface="Arial" panose="020B0604020202020204" pitchFamily="34" charset="0"/>
+              </a:rPr>
+              <a:t> </a:t>
+            </a:r>
+            <a:r>
+              <a:rPr lang="es-ES" sz="1200" dirty="0" err="1">
+                <a:latin typeface="Arial" panose="020B0604020202020204" pitchFamily="34" charset="0"/>
+                <a:cs typeface="Arial" panose="020B0604020202020204" pitchFamily="34" charset="0"/>
+              </a:rPr>
+              <a:t>group</a:t>
+            </a:r>
+            <a:r>
+              <a:rPr lang="es-ES" sz="1200" dirty="0">
+                <a:latin typeface="Arial" panose="020B0604020202020204" pitchFamily="34" charset="0"/>
+                <a:cs typeface="Arial" panose="020B0604020202020204" pitchFamily="34" charset="0"/>
+              </a:rPr>
+              <a:t> </a:t>
+            </a:r>
+            <a:r>
+              <a:rPr lang="es-ES" sz="1200" dirty="0" err="1">
+                <a:latin typeface="Arial" panose="020B0604020202020204" pitchFamily="34" charset="0"/>
+                <a:cs typeface="Arial" panose="020B0604020202020204" pitchFamily="34" charset="0"/>
+              </a:rPr>
+              <a:t>index</a:t>
+            </a:r>
+            <a:r>
+              <a:rPr lang="es-ES" sz="1200" dirty="0">
+                <a:latin typeface="Arial" panose="020B0604020202020204" pitchFamily="34" charset="0"/>
+                <a:cs typeface="Arial" panose="020B0604020202020204" pitchFamily="34" charset="0"/>
+              </a:rPr>
+              <a:t> (</a:t>
+            </a:r>
+            <a:r>
+              <a:rPr lang="es-ES" sz="1200" dirty="0" err="1">
+                <a:latin typeface="Arial" panose="020B0604020202020204" pitchFamily="34" charset="0"/>
+                <a:cs typeface="Arial" panose="020B0604020202020204" pitchFamily="34" charset="0"/>
+              </a:rPr>
+              <a:t>polyfit</a:t>
+            </a:r>
+            <a:r>
+              <a:rPr lang="es-ES" sz="1200" dirty="0">
+                <a:latin typeface="Arial" panose="020B0604020202020204" pitchFamily="34" charset="0"/>
+                <a:cs typeface="Arial" panose="020B0604020202020204" pitchFamily="34" charset="0"/>
+              </a:rPr>
+              <a:t>): 1.772025347866792</a:t>
+            </a:r>
+          </a:p>
+          <a:p>
+            <a:pPr algn="just"/>
+            <a:r>
+              <a:rPr lang="es-ES" sz="1200" dirty="0">
+                <a:latin typeface="Arial" panose="020B0604020202020204" pitchFamily="34" charset="0"/>
+                <a:cs typeface="Arial" panose="020B0604020202020204" pitchFamily="34" charset="0"/>
+              </a:rPr>
+              <a:t>TM0 central </a:t>
+            </a:r>
+            <a:r>
+              <a:rPr lang="es-ES" sz="1200" dirty="0" err="1">
+                <a:latin typeface="Arial" panose="020B0604020202020204" pitchFamily="34" charset="0"/>
+                <a:cs typeface="Arial" panose="020B0604020202020204" pitchFamily="34" charset="0"/>
+              </a:rPr>
+              <a:t>wavelength</a:t>
+            </a:r>
+            <a:r>
+              <a:rPr lang="es-ES" sz="1200" dirty="0">
+                <a:latin typeface="Arial" panose="020B0604020202020204" pitchFamily="34" charset="0"/>
+                <a:cs typeface="Arial" panose="020B0604020202020204" pitchFamily="34" charset="0"/>
+              </a:rPr>
+              <a:t> </a:t>
+            </a:r>
+            <a:r>
+              <a:rPr lang="es-ES" sz="1200" dirty="0" err="1">
+                <a:latin typeface="Arial" panose="020B0604020202020204" pitchFamily="34" charset="0"/>
+                <a:cs typeface="Arial" panose="020B0604020202020204" pitchFamily="34" charset="0"/>
+              </a:rPr>
+              <a:t>dispersion</a:t>
+            </a:r>
+            <a:r>
+              <a:rPr lang="es-ES" sz="1200" dirty="0">
+                <a:latin typeface="Arial" panose="020B0604020202020204" pitchFamily="34" charset="0"/>
+                <a:cs typeface="Arial" panose="020B0604020202020204" pitchFamily="34" charset="0"/>
+              </a:rPr>
+              <a:t> (</a:t>
+            </a:r>
+            <a:r>
+              <a:rPr lang="es-ES" sz="1200" dirty="0" err="1">
+                <a:latin typeface="Arial" panose="020B0604020202020204" pitchFamily="34" charset="0"/>
+                <a:cs typeface="Arial" panose="020B0604020202020204" pitchFamily="34" charset="0"/>
+              </a:rPr>
+              <a:t>polyfit</a:t>
+            </a:r>
+            <a:r>
+              <a:rPr lang="es-ES" sz="1200" dirty="0">
+                <a:latin typeface="Arial" panose="020B0604020202020204" pitchFamily="34" charset="0"/>
+                <a:cs typeface="Arial" panose="020B0604020202020204" pitchFamily="34" charset="0"/>
+              </a:rPr>
+              <a:t>): -1590.6948234078707 </a:t>
+            </a:r>
+            <a:r>
+              <a:rPr lang="es-ES" sz="1200" dirty="0" err="1">
+                <a:latin typeface="Arial" panose="020B0604020202020204" pitchFamily="34" charset="0"/>
+                <a:cs typeface="Arial" panose="020B0604020202020204" pitchFamily="34" charset="0"/>
+              </a:rPr>
+              <a:t>ps</a:t>
+            </a:r>
+            <a:r>
+              <a:rPr lang="es-ES" sz="1200" dirty="0">
+                <a:latin typeface="Arial" panose="020B0604020202020204" pitchFamily="34" charset="0"/>
+                <a:cs typeface="Arial" panose="020B0604020202020204" pitchFamily="34" charset="0"/>
+              </a:rPr>
+              <a:t>/(km*nm)</a:t>
+            </a:r>
+            <a:endParaRPr lang="en-US" sz="1200" dirty="0">
+              <a:latin typeface="Arial" panose="020B0604020202020204" pitchFamily="34" charset="0"/>
+              <a:cs typeface="Arial" panose="020B0604020202020204" pitchFamily="34" charset="0"/>
+            </a:endParaRPr>
+          </a:p>
+        </p:txBody>
+      </p:sp>
       <p:sp>
         <p:nvSpPr>
           <p:cNvPr id="5" name="Rectángulo 4">
@@ -9429,7 +9450,7 @@
         <p:spPr>
           <a:xfrm>
             <a:off x="609441" y="1447800"/>
-            <a:ext cx="5486559" cy="3306028"/>
+            <a:ext cx="5486559" cy="2971800"/>
           </a:xfrm>
           <a:prstGeom prst="rect">
             <a:avLst/>
@@ -9481,7 +9502,7 @@
         <p:spPr>
           <a:xfrm>
             <a:off x="6321424" y="1447800"/>
-            <a:ext cx="5486559" cy="3306028"/>
+            <a:ext cx="5486559" cy="2966289"/>
           </a:xfrm>
           <a:prstGeom prst="rect">
             <a:avLst/>
@@ -9518,298 +9539,66 @@
           </a:p>
         </p:txBody>
       </p:sp>
-      <mc:AlternateContent xmlns:mc="http://schemas.openxmlformats.org/markup-compatibility/2006" xmlns:a14="http://schemas.microsoft.com/office/drawing/2010/main">
-        <mc:Choice Requires="a14">
-          <p:sp>
-            <p:nvSpPr>
-              <p:cNvPr id="9" name="CuadroTexto 8">
-                <a:extLst>
-                  <a:ext uri="{FF2B5EF4-FFF2-40B4-BE49-F238E27FC236}">
-                    <a16:creationId xmlns:a16="http://schemas.microsoft.com/office/drawing/2014/main" id="{C59B6428-4395-242F-54D8-A9FC610F2D7A}"/>
-                  </a:ext>
-                </a:extLst>
-              </p:cNvPr>
-              <p:cNvSpPr txBox="1"/>
-              <p:nvPr/>
-            </p:nvSpPr>
-            <p:spPr>
-              <a:xfrm>
-                <a:off x="609440" y="2709096"/>
-                <a:ext cx="5486559" cy="1200329"/>
-              </a:xfrm>
-              <a:prstGeom prst="rect">
-                <a:avLst/>
-              </a:prstGeom>
-              <a:noFill/>
-            </p:spPr>
-            <p:txBody>
-              <a:bodyPr wrap="square" rtlCol="0">
-                <a:spAutoFit/>
-              </a:bodyPr>
-              <a:lstStyle/>
-              <a:p>
-                <a:pPr algn="ctr"/>
-                <a:r>
-                  <a:rPr lang="en-US" b="1" dirty="0"/>
-                  <a:t>deep</a:t>
-                </a:r>
-                <a:r>
-                  <a:rPr lang="en-US" dirty="0"/>
-                  <a:t> waveguide</a:t>
-                </a:r>
-              </a:p>
-              <a:p>
-                <a:pPr algn="ctr"/>
-                <a:endParaRPr lang="en-US" dirty="0"/>
-              </a:p>
-              <a:p>
-                <a:pPr algn="ctr"/>
-                <a:r>
-                  <a:rPr lang="en-US" b="1" dirty="0"/>
-                  <a:t>neff_TE0 vs </a:t>
-                </a:r>
-                <a14:m>
-                  <m:oMath xmlns:m="http://schemas.openxmlformats.org/officeDocument/2006/math">
-                    <m:r>
-                      <a:rPr lang="es-ES" b="1" i="1" smtClean="0">
-                        <a:latin typeface="Cambria Math" panose="02040503050406030204" pitchFamily="18" charset="0"/>
-                      </a:rPr>
-                      <m:t>𝝀</m:t>
-                    </m:r>
-                  </m:oMath>
-                </a14:m>
-                <a:r>
-                  <a:rPr lang="en-US" b="1" dirty="0"/>
-                  <a:t> </a:t>
-                </a:r>
-                <a:r>
-                  <a:rPr lang="en-US" dirty="0"/>
-                  <a:t>with the second-degree polynomial fit  </a:t>
-                </a:r>
-              </a:p>
-              <a:p>
-                <a:pPr algn="ctr"/>
-                <a:r>
-                  <a:rPr lang="en-US" dirty="0"/>
-                  <a:t>&amp; </a:t>
-                </a:r>
-                <a:r>
-                  <a:rPr lang="en-US" b="1" dirty="0"/>
-                  <a:t>neff_TM0 vs </a:t>
-                </a:r>
-                <a14:m>
-                  <m:oMath xmlns:m="http://schemas.openxmlformats.org/officeDocument/2006/math">
-                    <m:r>
-                      <a:rPr lang="es-ES" b="1" i="1">
-                        <a:latin typeface="Cambria Math" panose="02040503050406030204" pitchFamily="18" charset="0"/>
-                      </a:rPr>
-                      <m:t>𝝀</m:t>
-                    </m:r>
-                  </m:oMath>
-                </a14:m>
-                <a:r>
-                  <a:rPr lang="en-US" b="1" dirty="0"/>
-                  <a:t> </a:t>
-                </a:r>
-                <a:r>
-                  <a:rPr lang="en-US" dirty="0"/>
-                  <a:t>with the second-degree polynomial fit </a:t>
-                </a:r>
-              </a:p>
-            </p:txBody>
-          </p:sp>
-        </mc:Choice>
-        <mc:Fallback xmlns="">
-          <p:sp>
-            <p:nvSpPr>
-              <p:cNvPr id="9" name="CuadroTexto 8">
-                <a:extLst>
-                  <a:ext uri="{FF2B5EF4-FFF2-40B4-BE49-F238E27FC236}">
-                    <a16:creationId xmlns:a16="http://schemas.microsoft.com/office/drawing/2014/main" id="{C59B6428-4395-242F-54D8-A9FC610F2D7A}"/>
-                  </a:ext>
-                </a:extLst>
-              </p:cNvPr>
-              <p:cNvSpPr txBox="1">
-                <a:spLocks noRot="1" noChangeAspect="1" noMove="1" noResize="1" noEditPoints="1" noAdjustHandles="1" noChangeArrowheads="1" noChangeShapeType="1" noTextEdit="1"/>
-              </p:cNvSpPr>
-              <p:nvPr/>
-            </p:nvSpPr>
-            <p:spPr>
-              <a:xfrm>
-                <a:off x="609440" y="2709096"/>
-                <a:ext cx="5486559" cy="1200329"/>
-              </a:xfrm>
-              <a:prstGeom prst="rect">
-                <a:avLst/>
-              </a:prstGeom>
-              <a:blipFill>
-                <a:blip r:embed="rId7"/>
-                <a:stretch>
-                  <a:fillRect t="-2538" r="-556" b="-7107"/>
-                </a:stretch>
-              </a:blipFill>
-            </p:spPr>
-            <p:txBody>
-              <a:bodyPr/>
-              <a:lstStyle/>
-              <a:p>
-                <a:r>
-                  <a:rPr lang="es-ES">
-                    <a:noFill/>
-                  </a:rPr>
-                  <a:t> </a:t>
-                </a:r>
-              </a:p>
-            </p:txBody>
-          </p:sp>
-        </mc:Fallback>
-      </mc:AlternateContent>
-      <mc:AlternateContent xmlns:mc="http://schemas.openxmlformats.org/markup-compatibility/2006" xmlns:a14="http://schemas.microsoft.com/office/drawing/2010/main">
-        <mc:Choice Requires="a14">
-          <p:sp>
-            <p:nvSpPr>
-              <p:cNvPr id="10" name="CuadroTexto 9">
-                <a:extLst>
-                  <a:ext uri="{FF2B5EF4-FFF2-40B4-BE49-F238E27FC236}">
-                    <a16:creationId xmlns:a16="http://schemas.microsoft.com/office/drawing/2014/main" id="{9320AF78-1FC6-19F4-8E0B-8A414F20C6DE}"/>
-                  </a:ext>
-                </a:extLst>
-              </p:cNvPr>
-              <p:cNvSpPr txBox="1"/>
-              <p:nvPr/>
-            </p:nvSpPr>
-            <p:spPr>
-              <a:xfrm>
-                <a:off x="6321421" y="2709096"/>
-                <a:ext cx="5486559" cy="1200329"/>
-              </a:xfrm>
-              <a:prstGeom prst="rect">
-                <a:avLst/>
-              </a:prstGeom>
-              <a:noFill/>
-            </p:spPr>
-            <p:txBody>
-              <a:bodyPr wrap="square" rtlCol="0">
-                <a:spAutoFit/>
-              </a:bodyPr>
-              <a:lstStyle/>
-              <a:p>
-                <a:pPr algn="ctr"/>
-                <a:r>
-                  <a:rPr lang="en-US" b="1" dirty="0"/>
-                  <a:t>shallow</a:t>
-                </a:r>
-                <a:r>
-                  <a:rPr lang="en-US" dirty="0"/>
-                  <a:t> waveguide</a:t>
-                </a:r>
-              </a:p>
-              <a:p>
-                <a:pPr algn="ctr"/>
-                <a:endParaRPr lang="en-US" dirty="0"/>
-              </a:p>
-              <a:p>
-                <a:pPr algn="ctr"/>
-                <a:r>
-                  <a:rPr lang="en-US" b="1" dirty="0"/>
-                  <a:t>neff_TE0 vs </a:t>
-                </a:r>
-                <a14:m>
-                  <m:oMath xmlns:m="http://schemas.openxmlformats.org/officeDocument/2006/math">
-                    <m:r>
-                      <a:rPr lang="es-ES" b="1" i="1">
-                        <a:latin typeface="Cambria Math" panose="02040503050406030204" pitchFamily="18" charset="0"/>
-                      </a:rPr>
-                      <m:t>𝝀</m:t>
-                    </m:r>
-                  </m:oMath>
-                </a14:m>
-                <a:r>
-                  <a:rPr lang="en-US" b="1" dirty="0"/>
-                  <a:t> </a:t>
-                </a:r>
-                <a:r>
-                  <a:rPr lang="en-US" dirty="0"/>
-                  <a:t>with the second-degree polynomial fit  </a:t>
-                </a:r>
-              </a:p>
-              <a:p>
-                <a:pPr algn="ctr"/>
-                <a:r>
-                  <a:rPr lang="en-US" dirty="0"/>
-                  <a:t>&amp; </a:t>
-                </a:r>
-                <a:r>
-                  <a:rPr lang="en-US" b="1" dirty="0"/>
-                  <a:t>neff_TM0 vs </a:t>
-                </a:r>
-                <a14:m>
-                  <m:oMath xmlns:m="http://schemas.openxmlformats.org/officeDocument/2006/math">
-                    <m:r>
-                      <a:rPr lang="es-ES" b="1" i="1">
-                        <a:latin typeface="Cambria Math" panose="02040503050406030204" pitchFamily="18" charset="0"/>
-                      </a:rPr>
-                      <m:t>𝝀</m:t>
-                    </m:r>
-                  </m:oMath>
-                </a14:m>
-                <a:r>
-                  <a:rPr lang="en-US" b="1" dirty="0"/>
-                  <a:t> </a:t>
-                </a:r>
-                <a:r>
-                  <a:rPr lang="en-US" dirty="0"/>
-                  <a:t>with the second-degree polynomial fit </a:t>
-                </a:r>
-              </a:p>
-            </p:txBody>
-          </p:sp>
-        </mc:Choice>
-        <mc:Fallback xmlns="">
-          <p:sp>
-            <p:nvSpPr>
-              <p:cNvPr id="10" name="CuadroTexto 9">
-                <a:extLst>
-                  <a:ext uri="{FF2B5EF4-FFF2-40B4-BE49-F238E27FC236}">
-                    <a16:creationId xmlns:a16="http://schemas.microsoft.com/office/drawing/2014/main" id="{9320AF78-1FC6-19F4-8E0B-8A414F20C6DE}"/>
-                  </a:ext>
-                </a:extLst>
-              </p:cNvPr>
-              <p:cNvSpPr txBox="1">
-                <a:spLocks noRot="1" noChangeAspect="1" noMove="1" noResize="1" noEditPoints="1" noAdjustHandles="1" noChangeArrowheads="1" noChangeShapeType="1" noTextEdit="1"/>
-              </p:cNvSpPr>
-              <p:nvPr/>
-            </p:nvSpPr>
-            <p:spPr>
-              <a:xfrm>
-                <a:off x="6321421" y="2709096"/>
-                <a:ext cx="5486559" cy="1200329"/>
-              </a:xfrm>
-              <a:prstGeom prst="rect">
-                <a:avLst/>
-              </a:prstGeom>
-              <a:blipFill>
-                <a:blip r:embed="rId8"/>
-                <a:stretch>
-                  <a:fillRect t="-2538" r="-556" b="-7107"/>
-                </a:stretch>
-              </a:blipFill>
-            </p:spPr>
-            <p:txBody>
-              <a:bodyPr/>
-              <a:lstStyle/>
-              <a:p>
-                <a:r>
-                  <a:rPr lang="es-ES">
-                    <a:noFill/>
-                  </a:rPr>
-                  <a:t> </a:t>
-                </a:r>
-              </a:p>
-            </p:txBody>
-          </p:sp>
-        </mc:Fallback>
-      </mc:AlternateContent>
+      <p:pic>
+        <p:nvPicPr>
+          <p:cNvPr id="7" name="Imagen 6" descr="Gráfico, Gráfico de líneas&#10;&#10;El contenido generado por IA puede ser incorrecto.">
+            <a:extLst>
+              <a:ext uri="{FF2B5EF4-FFF2-40B4-BE49-F238E27FC236}">
+                <a16:creationId xmlns:a16="http://schemas.microsoft.com/office/drawing/2014/main" id="{3B53A3E9-3AD7-5990-85BC-58F21A532BA3}"/>
+              </a:ext>
+            </a:extLst>
+          </p:cNvPr>
+          <p:cNvPicPr>
+            <a:picLocks noChangeAspect="1"/>
+          </p:cNvPicPr>
+          <p:nvPr/>
+        </p:nvPicPr>
+        <p:blipFill>
+          <a:blip r:embed="rId5"/>
+          <a:stretch>
+            <a:fillRect/>
+          </a:stretch>
+        </p:blipFill>
+        <p:spPr>
+          <a:xfrm>
+            <a:off x="1354082" y="1476375"/>
+            <a:ext cx="3690924" cy="2915574"/>
+          </a:xfrm>
+          <a:prstGeom prst="rect">
+            <a:avLst/>
+          </a:prstGeom>
+        </p:spPr>
+      </p:pic>
+      <p:pic>
+        <p:nvPicPr>
+          <p:cNvPr id="12" name="Imagen 11" descr="Gráfico, Gráfico de líneas&#10;&#10;El contenido generado por IA puede ser incorrecto.">
+            <a:extLst>
+              <a:ext uri="{FF2B5EF4-FFF2-40B4-BE49-F238E27FC236}">
+                <a16:creationId xmlns:a16="http://schemas.microsoft.com/office/drawing/2014/main" id="{37B6F8FA-9C3C-702C-F051-432029EC98F0}"/>
+              </a:ext>
+            </a:extLst>
+          </p:cNvPr>
+          <p:cNvPicPr>
+            <a:picLocks noChangeAspect="1"/>
+          </p:cNvPicPr>
+          <p:nvPr/>
+        </p:nvPicPr>
+        <p:blipFill>
+          <a:blip r:embed="rId6"/>
+          <a:stretch>
+            <a:fillRect/>
+          </a:stretch>
+        </p:blipFill>
+        <p:spPr>
+          <a:xfrm>
+            <a:off x="7170712" y="1476434"/>
+            <a:ext cx="3695781" cy="2919410"/>
+          </a:xfrm>
+          <a:prstGeom prst="rect">
+            <a:avLst/>
+          </a:prstGeom>
+        </p:spPr>
+      </p:pic>
       <p:sp>
         <p:nvSpPr>
           <p:cNvPr id="8" name="CuadroTexto 7">
@@ -9855,6 +9644,526 @@
               </a:solidFill>
               <a:latin typeface="Arial" panose="020B0604020202020204" pitchFamily="34" charset="0"/>
               <a:cs typeface="Arial" panose="020B0604020202020204" pitchFamily="34" charset="0"/>
+            </a:endParaRPr>
+          </a:p>
+        </p:txBody>
+      </p:sp>
+      <p:sp>
+        <p:nvSpPr>
+          <p:cNvPr id="13" name="CuadroTexto 12">
+            <a:extLst>
+              <a:ext uri="{FF2B5EF4-FFF2-40B4-BE49-F238E27FC236}">
+                <a16:creationId xmlns:a16="http://schemas.microsoft.com/office/drawing/2014/main" id="{CC42190F-CE2B-55BE-B54C-B246857FD9A0}"/>
+              </a:ext>
+            </a:extLst>
+          </p:cNvPr>
+          <p:cNvSpPr txBox="1"/>
+          <p:nvPr/>
+        </p:nvSpPr>
+        <p:spPr>
+          <a:xfrm>
+            <a:off x="6248400" y="4419600"/>
+            <a:ext cx="5562759" cy="1384995"/>
+          </a:xfrm>
+          <a:prstGeom prst="rect">
+            <a:avLst/>
+          </a:prstGeom>
+          <a:solidFill>
+            <a:schemeClr val="bg1">
+              <a:lumMod val="95000"/>
+            </a:schemeClr>
+          </a:solidFill>
+          <a:ln w="28575">
+            <a:solidFill>
+              <a:srgbClr val="E0700D"/>
+            </a:solidFill>
+          </a:ln>
+        </p:spPr>
+        <p:txBody>
+          <a:bodyPr wrap="square" rtlCol="0">
+            <a:spAutoFit/>
+          </a:bodyPr>
+          <a:lstStyle/>
+          <a:p>
+            <a:r>
+              <a:rPr lang="es-ES" sz="1200" b="1" dirty="0" err="1">
+                <a:latin typeface="Arial" panose="020B0604020202020204" pitchFamily="34" charset="0"/>
+                <a:cs typeface="Arial" panose="020B0604020202020204" pitchFamily="34" charset="0"/>
+              </a:rPr>
+              <a:t>Shallow</a:t>
+            </a:r>
+            <a:r>
+              <a:rPr lang="es-ES" sz="1200" b="1" dirty="0">
+                <a:latin typeface="Arial" panose="020B0604020202020204" pitchFamily="34" charset="0"/>
+                <a:cs typeface="Arial" panose="020B0604020202020204" pitchFamily="34" charset="0"/>
+              </a:rPr>
+              <a:t> </a:t>
+            </a:r>
+            <a:r>
+              <a:rPr lang="es-ES" sz="1200" b="1" dirty="0" err="1">
+                <a:latin typeface="Arial" panose="020B0604020202020204" pitchFamily="34" charset="0"/>
+                <a:cs typeface="Arial" panose="020B0604020202020204" pitchFamily="34" charset="0"/>
+              </a:rPr>
+              <a:t>waveguide</a:t>
+            </a:r>
+            <a:r>
+              <a:rPr lang="es-ES" sz="1200" b="1" dirty="0">
+                <a:latin typeface="Arial" panose="020B0604020202020204" pitchFamily="34" charset="0"/>
+                <a:cs typeface="Arial" panose="020B0604020202020204" pitchFamily="34" charset="0"/>
+              </a:rPr>
+              <a:t>:</a:t>
+            </a:r>
+            <a:endParaRPr lang="es-ES" sz="1200" dirty="0">
+              <a:latin typeface="Arial" panose="020B0604020202020204" pitchFamily="34" charset="0"/>
+              <a:cs typeface="Arial" panose="020B0604020202020204" pitchFamily="34" charset="0"/>
+            </a:endParaRPr>
+          </a:p>
+          <a:p>
+            <a:r>
+              <a:rPr lang="es-ES" sz="1200" dirty="0">
+                <a:latin typeface="Arial" panose="020B0604020202020204" pitchFamily="34" charset="0"/>
+                <a:cs typeface="Arial" panose="020B0604020202020204" pitchFamily="34" charset="0"/>
+              </a:rPr>
+              <a:t>TE0 central </a:t>
+            </a:r>
+            <a:r>
+              <a:rPr lang="es-ES" sz="1200" dirty="0" err="1">
+                <a:latin typeface="Arial" panose="020B0604020202020204" pitchFamily="34" charset="0"/>
+                <a:cs typeface="Arial" panose="020B0604020202020204" pitchFamily="34" charset="0"/>
+              </a:rPr>
+              <a:t>wavelength</a:t>
+            </a:r>
+            <a:r>
+              <a:rPr lang="es-ES" sz="1200" dirty="0">
+                <a:latin typeface="Arial" panose="020B0604020202020204" pitchFamily="34" charset="0"/>
+                <a:cs typeface="Arial" panose="020B0604020202020204" pitchFamily="34" charset="0"/>
+              </a:rPr>
+              <a:t> </a:t>
+            </a:r>
+            <a:r>
+              <a:rPr lang="es-ES" sz="1200" dirty="0" err="1">
+                <a:latin typeface="Arial" panose="020B0604020202020204" pitchFamily="34" charset="0"/>
+                <a:cs typeface="Arial" panose="020B0604020202020204" pitchFamily="34" charset="0"/>
+              </a:rPr>
+              <a:t>effective</a:t>
+            </a:r>
+            <a:r>
+              <a:rPr lang="es-ES" sz="1200" dirty="0">
+                <a:latin typeface="Arial" panose="020B0604020202020204" pitchFamily="34" charset="0"/>
+                <a:cs typeface="Arial" panose="020B0604020202020204" pitchFamily="34" charset="0"/>
+              </a:rPr>
+              <a:t> </a:t>
+            </a:r>
+            <a:r>
+              <a:rPr lang="es-ES" sz="1200" dirty="0" err="1">
+                <a:latin typeface="Arial" panose="020B0604020202020204" pitchFamily="34" charset="0"/>
+                <a:cs typeface="Arial" panose="020B0604020202020204" pitchFamily="34" charset="0"/>
+              </a:rPr>
+              <a:t>index</a:t>
+            </a:r>
+            <a:r>
+              <a:rPr lang="es-ES" sz="1200" dirty="0">
+                <a:latin typeface="Arial" panose="020B0604020202020204" pitchFamily="34" charset="0"/>
+                <a:cs typeface="Arial" panose="020B0604020202020204" pitchFamily="34" charset="0"/>
+              </a:rPr>
+              <a:t> (</a:t>
+            </a:r>
+            <a:r>
+              <a:rPr lang="es-ES" sz="1200" dirty="0" err="1">
+                <a:latin typeface="Arial" panose="020B0604020202020204" pitchFamily="34" charset="0"/>
+                <a:cs typeface="Arial" panose="020B0604020202020204" pitchFamily="34" charset="0"/>
+              </a:rPr>
+              <a:t>polyfit</a:t>
+            </a:r>
+            <a:r>
+              <a:rPr lang="es-ES" sz="1200" dirty="0">
+                <a:latin typeface="Arial" panose="020B0604020202020204" pitchFamily="34" charset="0"/>
+                <a:cs typeface="Arial" panose="020B0604020202020204" pitchFamily="34" charset="0"/>
+              </a:rPr>
+              <a:t>): 1.6240906297465494</a:t>
+            </a:r>
+          </a:p>
+          <a:p>
+            <a:r>
+              <a:rPr lang="es-ES" sz="1200" dirty="0">
+                <a:latin typeface="Arial" panose="020B0604020202020204" pitchFamily="34" charset="0"/>
+                <a:cs typeface="Arial" panose="020B0604020202020204" pitchFamily="34" charset="0"/>
+              </a:rPr>
+              <a:t>TE0 central </a:t>
+            </a:r>
+            <a:r>
+              <a:rPr lang="es-ES" sz="1200" dirty="0" err="1">
+                <a:latin typeface="Arial" panose="020B0604020202020204" pitchFamily="34" charset="0"/>
+                <a:cs typeface="Arial" panose="020B0604020202020204" pitchFamily="34" charset="0"/>
+              </a:rPr>
+              <a:t>wavelength</a:t>
+            </a:r>
+            <a:r>
+              <a:rPr lang="es-ES" sz="1200" dirty="0">
+                <a:latin typeface="Arial" panose="020B0604020202020204" pitchFamily="34" charset="0"/>
+                <a:cs typeface="Arial" panose="020B0604020202020204" pitchFamily="34" charset="0"/>
+              </a:rPr>
+              <a:t> </a:t>
+            </a:r>
+            <a:r>
+              <a:rPr lang="es-ES" sz="1200" dirty="0" err="1">
+                <a:latin typeface="Arial" panose="020B0604020202020204" pitchFamily="34" charset="0"/>
+                <a:cs typeface="Arial" panose="020B0604020202020204" pitchFamily="34" charset="0"/>
+              </a:rPr>
+              <a:t>group</a:t>
+            </a:r>
+            <a:r>
+              <a:rPr lang="es-ES" sz="1200" dirty="0">
+                <a:latin typeface="Arial" panose="020B0604020202020204" pitchFamily="34" charset="0"/>
+                <a:cs typeface="Arial" panose="020B0604020202020204" pitchFamily="34" charset="0"/>
+              </a:rPr>
+              <a:t> </a:t>
+            </a:r>
+            <a:r>
+              <a:rPr lang="es-ES" sz="1200" dirty="0" err="1">
+                <a:latin typeface="Arial" panose="020B0604020202020204" pitchFamily="34" charset="0"/>
+                <a:cs typeface="Arial" panose="020B0604020202020204" pitchFamily="34" charset="0"/>
+              </a:rPr>
+              <a:t>index</a:t>
+            </a:r>
+            <a:r>
+              <a:rPr lang="es-ES" sz="1200" dirty="0">
+                <a:latin typeface="Arial" panose="020B0604020202020204" pitchFamily="34" charset="0"/>
+                <a:cs typeface="Arial" panose="020B0604020202020204" pitchFamily="34" charset="0"/>
+              </a:rPr>
+              <a:t> (</a:t>
+            </a:r>
+            <a:r>
+              <a:rPr lang="es-ES" sz="1200" dirty="0" err="1">
+                <a:latin typeface="Arial" panose="020B0604020202020204" pitchFamily="34" charset="0"/>
+                <a:cs typeface="Arial" panose="020B0604020202020204" pitchFamily="34" charset="0"/>
+              </a:rPr>
+              <a:t>polyfit</a:t>
+            </a:r>
+            <a:r>
+              <a:rPr lang="es-ES" sz="1200" dirty="0">
+                <a:latin typeface="Arial" panose="020B0604020202020204" pitchFamily="34" charset="0"/>
+                <a:cs typeface="Arial" panose="020B0604020202020204" pitchFamily="34" charset="0"/>
+              </a:rPr>
+              <a:t>): 1.9157617116967773</a:t>
+            </a:r>
+          </a:p>
+          <a:p>
+            <a:r>
+              <a:rPr lang="es-ES" sz="1200" dirty="0">
+                <a:latin typeface="Arial" panose="020B0604020202020204" pitchFamily="34" charset="0"/>
+                <a:cs typeface="Arial" panose="020B0604020202020204" pitchFamily="34" charset="0"/>
+              </a:rPr>
+              <a:t>TE0 central </a:t>
+            </a:r>
+            <a:r>
+              <a:rPr lang="es-ES" sz="1200" dirty="0" err="1">
+                <a:latin typeface="Arial" panose="020B0604020202020204" pitchFamily="34" charset="0"/>
+                <a:cs typeface="Arial" panose="020B0604020202020204" pitchFamily="34" charset="0"/>
+              </a:rPr>
+              <a:t>wavelength</a:t>
+            </a:r>
+            <a:r>
+              <a:rPr lang="es-ES" sz="1200" dirty="0">
+                <a:latin typeface="Arial" panose="020B0604020202020204" pitchFamily="34" charset="0"/>
+                <a:cs typeface="Arial" panose="020B0604020202020204" pitchFamily="34" charset="0"/>
+              </a:rPr>
+              <a:t> </a:t>
+            </a:r>
+            <a:r>
+              <a:rPr lang="es-ES" sz="1200" dirty="0" err="1">
+                <a:latin typeface="Arial" panose="020B0604020202020204" pitchFamily="34" charset="0"/>
+                <a:cs typeface="Arial" panose="020B0604020202020204" pitchFamily="34" charset="0"/>
+              </a:rPr>
+              <a:t>dispersion</a:t>
+            </a:r>
+            <a:r>
+              <a:rPr lang="es-ES" sz="1200" dirty="0">
+                <a:latin typeface="Arial" panose="020B0604020202020204" pitchFamily="34" charset="0"/>
+                <a:cs typeface="Arial" panose="020B0604020202020204" pitchFamily="34" charset="0"/>
+              </a:rPr>
+              <a:t> (</a:t>
+            </a:r>
+            <a:r>
+              <a:rPr lang="es-ES" sz="1200" dirty="0" err="1">
+                <a:latin typeface="Arial" panose="020B0604020202020204" pitchFamily="34" charset="0"/>
+                <a:cs typeface="Arial" panose="020B0604020202020204" pitchFamily="34" charset="0"/>
+              </a:rPr>
+              <a:t>polyfit</a:t>
+            </a:r>
+            <a:r>
+              <a:rPr lang="es-ES" sz="1200" dirty="0">
+                <a:latin typeface="Arial" panose="020B0604020202020204" pitchFamily="34" charset="0"/>
+                <a:cs typeface="Arial" panose="020B0604020202020204" pitchFamily="34" charset="0"/>
+              </a:rPr>
+              <a:t>): -989.5411991927712 </a:t>
+            </a:r>
+            <a:r>
+              <a:rPr lang="es-ES" sz="1200" dirty="0" err="1">
+                <a:latin typeface="Arial" panose="020B0604020202020204" pitchFamily="34" charset="0"/>
+                <a:cs typeface="Arial" panose="020B0604020202020204" pitchFamily="34" charset="0"/>
+              </a:rPr>
+              <a:t>ps</a:t>
+            </a:r>
+            <a:r>
+              <a:rPr lang="es-ES" sz="1200" dirty="0">
+                <a:latin typeface="Arial" panose="020B0604020202020204" pitchFamily="34" charset="0"/>
+                <a:cs typeface="Arial" panose="020B0604020202020204" pitchFamily="34" charset="0"/>
+              </a:rPr>
+              <a:t>/(km*nm)</a:t>
+            </a:r>
+          </a:p>
+          <a:p>
+            <a:r>
+              <a:rPr lang="es-ES" sz="1200" dirty="0">
+                <a:latin typeface="Arial" panose="020B0604020202020204" pitchFamily="34" charset="0"/>
+                <a:cs typeface="Arial" panose="020B0604020202020204" pitchFamily="34" charset="0"/>
+              </a:rPr>
+              <a:t>TM0 central </a:t>
+            </a:r>
+            <a:r>
+              <a:rPr lang="es-ES" sz="1200" dirty="0" err="1">
+                <a:latin typeface="Arial" panose="020B0604020202020204" pitchFamily="34" charset="0"/>
+                <a:cs typeface="Arial" panose="020B0604020202020204" pitchFamily="34" charset="0"/>
+              </a:rPr>
+              <a:t>wavelength</a:t>
+            </a:r>
+            <a:r>
+              <a:rPr lang="es-ES" sz="1200" dirty="0">
+                <a:latin typeface="Arial" panose="020B0604020202020204" pitchFamily="34" charset="0"/>
+                <a:cs typeface="Arial" panose="020B0604020202020204" pitchFamily="34" charset="0"/>
+              </a:rPr>
+              <a:t> </a:t>
+            </a:r>
+            <a:r>
+              <a:rPr lang="es-ES" sz="1200" dirty="0" err="1">
+                <a:latin typeface="Arial" panose="020B0604020202020204" pitchFamily="34" charset="0"/>
+                <a:cs typeface="Arial" panose="020B0604020202020204" pitchFamily="34" charset="0"/>
+              </a:rPr>
+              <a:t>effective</a:t>
+            </a:r>
+            <a:r>
+              <a:rPr lang="es-ES" sz="1200" dirty="0">
+                <a:latin typeface="Arial" panose="020B0604020202020204" pitchFamily="34" charset="0"/>
+                <a:cs typeface="Arial" panose="020B0604020202020204" pitchFamily="34" charset="0"/>
+              </a:rPr>
+              <a:t> </a:t>
+            </a:r>
+            <a:r>
+              <a:rPr lang="es-ES" sz="1200" dirty="0" err="1">
+                <a:latin typeface="Arial" panose="020B0604020202020204" pitchFamily="34" charset="0"/>
+                <a:cs typeface="Arial" panose="020B0604020202020204" pitchFamily="34" charset="0"/>
+              </a:rPr>
+              <a:t>index</a:t>
+            </a:r>
+            <a:r>
+              <a:rPr lang="es-ES" sz="1200" dirty="0">
+                <a:latin typeface="Arial" panose="020B0604020202020204" pitchFamily="34" charset="0"/>
+                <a:cs typeface="Arial" panose="020B0604020202020204" pitchFamily="34" charset="0"/>
+              </a:rPr>
+              <a:t> (</a:t>
+            </a:r>
+            <a:r>
+              <a:rPr lang="es-ES" sz="1200" dirty="0" err="1">
+                <a:latin typeface="Arial" panose="020B0604020202020204" pitchFamily="34" charset="0"/>
+                <a:cs typeface="Arial" panose="020B0604020202020204" pitchFamily="34" charset="0"/>
+              </a:rPr>
+              <a:t>polyfit</a:t>
+            </a:r>
+            <a:r>
+              <a:rPr lang="es-ES" sz="1200" dirty="0">
+                <a:latin typeface="Arial" panose="020B0604020202020204" pitchFamily="34" charset="0"/>
+                <a:cs typeface="Arial" panose="020B0604020202020204" pitchFamily="34" charset="0"/>
+              </a:rPr>
+              <a:t>): 1.5361017569770001</a:t>
+            </a:r>
+          </a:p>
+          <a:p>
+            <a:r>
+              <a:rPr lang="es-ES" sz="1200" dirty="0">
+                <a:latin typeface="Arial" panose="020B0604020202020204" pitchFamily="34" charset="0"/>
+                <a:cs typeface="Arial" panose="020B0604020202020204" pitchFamily="34" charset="0"/>
+              </a:rPr>
+              <a:t>TM0 central </a:t>
+            </a:r>
+            <a:r>
+              <a:rPr lang="es-ES" sz="1200" dirty="0" err="1">
+                <a:latin typeface="Arial" panose="020B0604020202020204" pitchFamily="34" charset="0"/>
+                <a:cs typeface="Arial" panose="020B0604020202020204" pitchFamily="34" charset="0"/>
+              </a:rPr>
+              <a:t>wavelength</a:t>
+            </a:r>
+            <a:r>
+              <a:rPr lang="es-ES" sz="1200" dirty="0">
+                <a:latin typeface="Arial" panose="020B0604020202020204" pitchFamily="34" charset="0"/>
+                <a:cs typeface="Arial" panose="020B0604020202020204" pitchFamily="34" charset="0"/>
+              </a:rPr>
+              <a:t> </a:t>
+            </a:r>
+            <a:r>
+              <a:rPr lang="es-ES" sz="1200" dirty="0" err="1">
+                <a:latin typeface="Arial" panose="020B0604020202020204" pitchFamily="34" charset="0"/>
+                <a:cs typeface="Arial" panose="020B0604020202020204" pitchFamily="34" charset="0"/>
+              </a:rPr>
+              <a:t>group</a:t>
+            </a:r>
+            <a:r>
+              <a:rPr lang="es-ES" sz="1200" dirty="0">
+                <a:latin typeface="Arial" panose="020B0604020202020204" pitchFamily="34" charset="0"/>
+                <a:cs typeface="Arial" panose="020B0604020202020204" pitchFamily="34" charset="0"/>
+              </a:rPr>
+              <a:t> </a:t>
+            </a:r>
+            <a:r>
+              <a:rPr lang="es-ES" sz="1200" dirty="0" err="1">
+                <a:latin typeface="Arial" panose="020B0604020202020204" pitchFamily="34" charset="0"/>
+                <a:cs typeface="Arial" panose="020B0604020202020204" pitchFamily="34" charset="0"/>
+              </a:rPr>
+              <a:t>index</a:t>
+            </a:r>
+            <a:r>
+              <a:rPr lang="es-ES" sz="1200" dirty="0">
+                <a:latin typeface="Arial" panose="020B0604020202020204" pitchFamily="34" charset="0"/>
+                <a:cs typeface="Arial" panose="020B0604020202020204" pitchFamily="34" charset="0"/>
+              </a:rPr>
+              <a:t> (</a:t>
+            </a:r>
+            <a:r>
+              <a:rPr lang="es-ES" sz="1200" dirty="0" err="1">
+                <a:latin typeface="Arial" panose="020B0604020202020204" pitchFamily="34" charset="0"/>
+                <a:cs typeface="Arial" panose="020B0604020202020204" pitchFamily="34" charset="0"/>
+              </a:rPr>
+              <a:t>polyfit</a:t>
+            </a:r>
+            <a:r>
+              <a:rPr lang="es-ES" sz="1200" dirty="0">
+                <a:latin typeface="Arial" panose="020B0604020202020204" pitchFamily="34" charset="0"/>
+                <a:cs typeface="Arial" panose="020B0604020202020204" pitchFamily="34" charset="0"/>
+              </a:rPr>
+              <a:t>): 1.751028636956494</a:t>
+            </a:r>
+          </a:p>
+          <a:p>
+            <a:r>
+              <a:rPr lang="es-ES" sz="1200" dirty="0">
+                <a:latin typeface="Arial" panose="020B0604020202020204" pitchFamily="34" charset="0"/>
+                <a:cs typeface="Arial" panose="020B0604020202020204" pitchFamily="34" charset="0"/>
+              </a:rPr>
+              <a:t>TM0 central </a:t>
+            </a:r>
+            <a:r>
+              <a:rPr lang="es-ES" sz="1200" dirty="0" err="1">
+                <a:latin typeface="Arial" panose="020B0604020202020204" pitchFamily="34" charset="0"/>
+                <a:cs typeface="Arial" panose="020B0604020202020204" pitchFamily="34" charset="0"/>
+              </a:rPr>
+              <a:t>wavelength</a:t>
+            </a:r>
+            <a:r>
+              <a:rPr lang="es-ES" sz="1200" dirty="0">
+                <a:latin typeface="Arial" panose="020B0604020202020204" pitchFamily="34" charset="0"/>
+                <a:cs typeface="Arial" panose="020B0604020202020204" pitchFamily="34" charset="0"/>
+              </a:rPr>
+              <a:t> </a:t>
+            </a:r>
+            <a:r>
+              <a:rPr lang="es-ES" sz="1200" dirty="0" err="1">
+                <a:latin typeface="Arial" panose="020B0604020202020204" pitchFamily="34" charset="0"/>
+                <a:cs typeface="Arial" panose="020B0604020202020204" pitchFamily="34" charset="0"/>
+              </a:rPr>
+              <a:t>dispersion</a:t>
+            </a:r>
+            <a:r>
+              <a:rPr lang="es-ES" sz="1200" dirty="0">
+                <a:latin typeface="Arial" panose="020B0604020202020204" pitchFamily="34" charset="0"/>
+                <a:cs typeface="Arial" panose="020B0604020202020204" pitchFamily="34" charset="0"/>
+              </a:rPr>
+              <a:t> (</a:t>
+            </a:r>
+            <a:r>
+              <a:rPr lang="es-ES" sz="1200" dirty="0" err="1">
+                <a:latin typeface="Arial" panose="020B0604020202020204" pitchFamily="34" charset="0"/>
+                <a:cs typeface="Arial" panose="020B0604020202020204" pitchFamily="34" charset="0"/>
+              </a:rPr>
+              <a:t>polyfit</a:t>
+            </a:r>
+            <a:r>
+              <a:rPr lang="es-ES" sz="1200" dirty="0">
+                <a:latin typeface="Arial" panose="020B0604020202020204" pitchFamily="34" charset="0"/>
+                <a:cs typeface="Arial" panose="020B0604020202020204" pitchFamily="34" charset="0"/>
+              </a:rPr>
+              <a:t>): -1013.1548259425633 </a:t>
+            </a:r>
+            <a:r>
+              <a:rPr lang="es-ES" sz="1200" dirty="0" err="1">
+                <a:latin typeface="Arial" panose="020B0604020202020204" pitchFamily="34" charset="0"/>
+                <a:cs typeface="Arial" panose="020B0604020202020204" pitchFamily="34" charset="0"/>
+              </a:rPr>
+              <a:t>ps</a:t>
+            </a:r>
+            <a:r>
+              <a:rPr lang="es-ES" sz="1200" dirty="0">
+                <a:latin typeface="Arial" panose="020B0604020202020204" pitchFamily="34" charset="0"/>
+                <a:cs typeface="Arial" panose="020B0604020202020204" pitchFamily="34" charset="0"/>
+              </a:rPr>
+              <a:t>/(km*nm)</a:t>
+            </a:r>
+            <a:endParaRPr lang="en-US" sz="1200" dirty="0">
+              <a:latin typeface="Arial" panose="020B0604020202020204" pitchFamily="34" charset="0"/>
+              <a:cs typeface="Arial" panose="020B0604020202020204" pitchFamily="34" charset="0"/>
+            </a:endParaRPr>
+          </a:p>
+        </p:txBody>
+      </p:sp>
+      <p:sp>
+        <p:nvSpPr>
+          <p:cNvPr id="14" name="CuadroTexto 13">
+            <a:extLst>
+              <a:ext uri="{FF2B5EF4-FFF2-40B4-BE49-F238E27FC236}">
+                <a16:creationId xmlns:a16="http://schemas.microsoft.com/office/drawing/2014/main" id="{E7368598-976A-BC09-D873-88BA744122EA}"/>
+              </a:ext>
+            </a:extLst>
+          </p:cNvPr>
+          <p:cNvSpPr txBox="1"/>
+          <p:nvPr/>
+        </p:nvSpPr>
+        <p:spPr>
+          <a:xfrm>
+            <a:off x="609440" y="5843132"/>
+            <a:ext cx="11198543" cy="369332"/>
+          </a:xfrm>
+          <a:prstGeom prst="rect">
+            <a:avLst/>
+          </a:prstGeom>
+          <a:solidFill>
+            <a:schemeClr val="bg1">
+              <a:lumMod val="95000"/>
+            </a:schemeClr>
+          </a:solidFill>
+          <a:ln w="28575">
+            <a:solidFill>
+              <a:srgbClr val="E0700D"/>
+            </a:solidFill>
+          </a:ln>
+        </p:spPr>
+        <p:txBody>
+          <a:bodyPr wrap="square" rtlCol="0">
+            <a:spAutoFit/>
+          </a:bodyPr>
+          <a:lstStyle/>
+          <a:p>
+            <a:pPr algn="just"/>
+            <a:r>
+              <a:rPr lang="en-US" dirty="0">
+                <a:solidFill>
+                  <a:srgbClr val="FF0000"/>
+                </a:solidFill>
+              </a:rPr>
+              <a:t>Comment on the results found for the TE0 and TM0 for both deep and shallow waveguides. </a:t>
+            </a:r>
+            <a:endParaRPr lang="es-ES" sz="1200" dirty="0">
+              <a:solidFill>
+                <a:srgbClr val="FF0000"/>
+              </a:solidFill>
             </a:endParaRPr>
           </a:p>
         </p:txBody>

--- a/LabBook_10.pptx
+++ b/LabBook_10.pptx
@@ -268,7 +268,7 @@
           <a:p>
             <a:fld id="{8438F8DC-35B0-48E6-A86E-42F1F08DD00F}" type="datetimeFigureOut">
               <a:rPr lang="es-ES" smtClean="0"/>
-              <a:t>06/03/2026</a:t>
+              <a:t>07/03/2026</a:t>
             </a:fld>
             <a:endParaRPr lang="es-ES"/>
           </a:p>
@@ -445,7 +445,7 @@
           <a:p>
             <a:fld id="{FACBDC12-F39B-4B97-8F4D-6734F9D366FF}" type="datetimeFigureOut">
               <a:rPr lang="es-ES" smtClean="0"/>
-              <a:t>06/03/2026</a:t>
+              <a:t>07/03/2026</a:t>
             </a:fld>
             <a:endParaRPr lang="es-ES"/>
           </a:p>
@@ -3551,6 +3551,66 @@
           </a:p>
         </p:txBody>
       </p:sp>
+      <p:pic>
+        <p:nvPicPr>
+          <p:cNvPr id="9" name="Imagen 8">
+            <a:extLst>
+              <a:ext uri="{FF2B5EF4-FFF2-40B4-BE49-F238E27FC236}">
+                <a16:creationId xmlns:a16="http://schemas.microsoft.com/office/drawing/2014/main" id="{F8D6361A-60D6-D762-4EEC-7D641561139F}"/>
+              </a:ext>
+            </a:extLst>
+          </p:cNvPr>
+          <p:cNvPicPr>
+            <a:picLocks noChangeAspect="1"/>
+          </p:cNvPicPr>
+          <p:nvPr/>
+        </p:nvPicPr>
+        <p:blipFill>
+          <a:blip r:embed="rId5"/>
+          <a:stretch>
+            <a:fillRect/>
+          </a:stretch>
+        </p:blipFill>
+        <p:spPr>
+          <a:xfrm>
+            <a:off x="1524000" y="1739453"/>
+            <a:ext cx="3429000" cy="2708672"/>
+          </a:xfrm>
+          <a:prstGeom prst="rect">
+            <a:avLst/>
+          </a:prstGeom>
+        </p:spPr>
+      </p:pic>
+      <p:pic>
+        <p:nvPicPr>
+          <p:cNvPr id="11" name="Imagen 10">
+            <a:extLst>
+              <a:ext uri="{FF2B5EF4-FFF2-40B4-BE49-F238E27FC236}">
+                <a16:creationId xmlns:a16="http://schemas.microsoft.com/office/drawing/2014/main" id="{E06F18D7-4C12-4E46-4877-EE4E7B6B5983}"/>
+              </a:ext>
+            </a:extLst>
+          </p:cNvPr>
+          <p:cNvPicPr>
+            <a:picLocks noChangeAspect="1"/>
+          </p:cNvPicPr>
+          <p:nvPr/>
+        </p:nvPicPr>
+        <p:blipFill>
+          <a:blip r:embed="rId6"/>
+          <a:stretch>
+            <a:fillRect/>
+          </a:stretch>
+        </p:blipFill>
+        <p:spPr>
+          <a:xfrm>
+            <a:off x="6850725" y="1606918"/>
+            <a:ext cx="3817274" cy="2928937"/>
+          </a:xfrm>
+          <a:prstGeom prst="rect">
+            <a:avLst/>
+          </a:prstGeom>
+        </p:spPr>
+      </p:pic>
     </p:spTree>
     <p:extLst>
       <p:ext uri="{BB962C8B-B14F-4D97-AF65-F5344CB8AC3E}">
@@ -8156,10 +8216,9 @@
               </a:spcBef>
             </a:pPr>
             <a:r>
-              <a:rPr lang="es-ES" spc="-5"/>
+              <a:rPr lang="es-ES" spc="-5" dirty="0"/>
               <a:t>LAB 1.0 WAVEGUIDES</a:t>
             </a:r>
-            <a:endParaRPr lang="es-ES" spc="-5" dirty="0"/>
           </a:p>
         </p:txBody>
       </p:sp>

--- a/LabBook_10.pptx
+++ b/LabBook_10.pptx
@@ -5,10 +5,10 @@
     <p:sldMasterId id="2147483648" r:id="rId1"/>
   </p:sldMasterIdLst>
   <p:notesMasterIdLst>
-    <p:notesMasterId r:id="rId13"/>
+    <p:notesMasterId r:id="rId17"/>
   </p:notesMasterIdLst>
   <p:handoutMasterIdLst>
-    <p:handoutMasterId r:id="rId14"/>
+    <p:handoutMasterId r:id="rId18"/>
   </p:handoutMasterIdLst>
   <p:sldIdLst>
     <p:sldId id="256" r:id="rId2"/>
@@ -21,7 +21,11 @@
     <p:sldId id="292" r:id="rId9"/>
     <p:sldId id="297" r:id="rId10"/>
     <p:sldId id="293" r:id="rId11"/>
-    <p:sldId id="288" r:id="rId12"/>
+    <p:sldId id="301" r:id="rId12"/>
+    <p:sldId id="302" r:id="rId13"/>
+    <p:sldId id="303" r:id="rId14"/>
+    <p:sldId id="304" r:id="rId15"/>
+    <p:sldId id="288" r:id="rId16"/>
   </p:sldIdLst>
   <p:sldSz cx="12192000" cy="6858000"/>
   <p:notesSz cx="12192000" cy="6858000"/>
@@ -796,6 +800,330 @@
 </p:notes>
 </file>
 
+<file path=ppt/notesSlides/notesSlide10.xml><?xml version="1.0" encoding="utf-8"?>
+<p:notes xmlns:a="http://schemas.openxmlformats.org/drawingml/2006/main" xmlns:r="http://schemas.openxmlformats.org/officeDocument/2006/relationships" xmlns:p="http://schemas.openxmlformats.org/presentationml/2006/main">
+  <p:cSld>
+    <p:spTree>
+      <p:nvGrpSpPr>
+        <p:cNvPr id="1" name="">
+          <a:extLst>
+            <a:ext uri="{FF2B5EF4-FFF2-40B4-BE49-F238E27FC236}">
+              <a16:creationId xmlns:a16="http://schemas.microsoft.com/office/drawing/2014/main" id="{34C2C07F-E18C-9CA1-2FE6-7E5EB7B80A6B}"/>
+            </a:ext>
+          </a:extLst>
+        </p:cNvPr>
+        <p:cNvGrpSpPr/>
+        <p:nvPr/>
+      </p:nvGrpSpPr>
+      <p:grpSpPr>
+        <a:xfrm>
+          <a:off x="0" y="0"/>
+          <a:ext cx="0" cy="0"/>
+          <a:chOff x="0" y="0"/>
+          <a:chExt cx="0" cy="0"/>
+        </a:xfrm>
+      </p:grpSpPr>
+      <p:sp>
+        <p:nvSpPr>
+          <p:cNvPr id="2" name="Marcador de imagen de diapositiva 1">
+            <a:extLst>
+              <a:ext uri="{FF2B5EF4-FFF2-40B4-BE49-F238E27FC236}">
+                <a16:creationId xmlns:a16="http://schemas.microsoft.com/office/drawing/2014/main" id="{C7BA0930-6213-7538-A132-6A6802721882}"/>
+              </a:ext>
+            </a:extLst>
+          </p:cNvPr>
+          <p:cNvSpPr>
+            <a:spLocks noGrp="1" noRot="1" noChangeAspect="1"/>
+          </p:cNvSpPr>
+          <p:nvPr>
+            <p:ph type="sldImg"/>
+          </p:nvPr>
+        </p:nvSpPr>
+        <p:spPr/>
+      </p:sp>
+      <p:sp>
+        <p:nvSpPr>
+          <p:cNvPr id="3" name="Marcador de notas 2">
+            <a:extLst>
+              <a:ext uri="{FF2B5EF4-FFF2-40B4-BE49-F238E27FC236}">
+                <a16:creationId xmlns:a16="http://schemas.microsoft.com/office/drawing/2014/main" id="{638A00DA-25FA-4704-3696-91386D808040}"/>
+              </a:ext>
+            </a:extLst>
+          </p:cNvPr>
+          <p:cNvSpPr>
+            <a:spLocks noGrp="1"/>
+          </p:cNvSpPr>
+          <p:nvPr>
+            <p:ph type="body" idx="1"/>
+          </p:nvPr>
+        </p:nvSpPr>
+        <p:spPr/>
+        <p:txBody>
+          <a:bodyPr/>
+          <a:lstStyle/>
+          <a:p>
+            <a:endParaRPr lang="es-ES" dirty="0"/>
+          </a:p>
+        </p:txBody>
+      </p:sp>
+      <p:sp>
+        <p:nvSpPr>
+          <p:cNvPr id="4" name="Marcador de número de diapositiva 3">
+            <a:extLst>
+              <a:ext uri="{FF2B5EF4-FFF2-40B4-BE49-F238E27FC236}">
+                <a16:creationId xmlns:a16="http://schemas.microsoft.com/office/drawing/2014/main" id="{78998A66-5D98-A9ED-6975-5A39135A37B3}"/>
+              </a:ext>
+            </a:extLst>
+          </p:cNvPr>
+          <p:cNvSpPr>
+            <a:spLocks noGrp="1"/>
+          </p:cNvSpPr>
+          <p:nvPr>
+            <p:ph type="sldNum" sz="quarter" idx="5"/>
+          </p:nvPr>
+        </p:nvSpPr>
+        <p:spPr/>
+        <p:txBody>
+          <a:bodyPr/>
+          <a:lstStyle/>
+          <a:p>
+            <a:fld id="{676223B9-C868-4436-87D9-1A3152E1157A}" type="slidenum">
+              <a:rPr lang="es-ES" smtClean="0"/>
+              <a:t>12</a:t>
+            </a:fld>
+            <a:endParaRPr lang="es-ES"/>
+          </a:p>
+        </p:txBody>
+      </p:sp>
+    </p:spTree>
+    <p:extLst>
+      <p:ext uri="{BB962C8B-B14F-4D97-AF65-F5344CB8AC3E}">
+        <p14:creationId xmlns:p14="http://schemas.microsoft.com/office/powerpoint/2010/main" val="737430653"/>
+      </p:ext>
+    </p:extLst>
+  </p:cSld>
+  <p:clrMapOvr>
+    <a:masterClrMapping/>
+  </p:clrMapOvr>
+</p:notes>
+</file>
+
+<file path=ppt/notesSlides/notesSlide11.xml><?xml version="1.0" encoding="utf-8"?>
+<p:notes xmlns:a="http://schemas.openxmlformats.org/drawingml/2006/main" xmlns:r="http://schemas.openxmlformats.org/officeDocument/2006/relationships" xmlns:p="http://schemas.openxmlformats.org/presentationml/2006/main">
+  <p:cSld>
+    <p:spTree>
+      <p:nvGrpSpPr>
+        <p:cNvPr id="1" name="">
+          <a:extLst>
+            <a:ext uri="{FF2B5EF4-FFF2-40B4-BE49-F238E27FC236}">
+              <a16:creationId xmlns:a16="http://schemas.microsoft.com/office/drawing/2014/main" id="{4CFF2CC8-05DB-4691-975B-5CB4F6F72229}"/>
+            </a:ext>
+          </a:extLst>
+        </p:cNvPr>
+        <p:cNvGrpSpPr/>
+        <p:nvPr/>
+      </p:nvGrpSpPr>
+      <p:grpSpPr>
+        <a:xfrm>
+          <a:off x="0" y="0"/>
+          <a:ext cx="0" cy="0"/>
+          <a:chOff x="0" y="0"/>
+          <a:chExt cx="0" cy="0"/>
+        </a:xfrm>
+      </p:grpSpPr>
+      <p:sp>
+        <p:nvSpPr>
+          <p:cNvPr id="2" name="Marcador de imagen de diapositiva 1">
+            <a:extLst>
+              <a:ext uri="{FF2B5EF4-FFF2-40B4-BE49-F238E27FC236}">
+                <a16:creationId xmlns:a16="http://schemas.microsoft.com/office/drawing/2014/main" id="{4E0BA263-33B5-7053-6336-32E955917816}"/>
+              </a:ext>
+            </a:extLst>
+          </p:cNvPr>
+          <p:cNvSpPr>
+            <a:spLocks noGrp="1" noRot="1" noChangeAspect="1"/>
+          </p:cNvSpPr>
+          <p:nvPr>
+            <p:ph type="sldImg"/>
+          </p:nvPr>
+        </p:nvSpPr>
+        <p:spPr/>
+      </p:sp>
+      <p:sp>
+        <p:nvSpPr>
+          <p:cNvPr id="3" name="Marcador de notas 2">
+            <a:extLst>
+              <a:ext uri="{FF2B5EF4-FFF2-40B4-BE49-F238E27FC236}">
+                <a16:creationId xmlns:a16="http://schemas.microsoft.com/office/drawing/2014/main" id="{9C1ACDD5-0C09-CF66-497D-1725738EE0DF}"/>
+              </a:ext>
+            </a:extLst>
+          </p:cNvPr>
+          <p:cNvSpPr>
+            <a:spLocks noGrp="1"/>
+          </p:cNvSpPr>
+          <p:nvPr>
+            <p:ph type="body" idx="1"/>
+          </p:nvPr>
+        </p:nvSpPr>
+        <p:spPr/>
+        <p:txBody>
+          <a:bodyPr/>
+          <a:lstStyle/>
+          <a:p>
+            <a:endParaRPr lang="es-ES" dirty="0"/>
+          </a:p>
+        </p:txBody>
+      </p:sp>
+      <p:sp>
+        <p:nvSpPr>
+          <p:cNvPr id="4" name="Marcador de número de diapositiva 3">
+            <a:extLst>
+              <a:ext uri="{FF2B5EF4-FFF2-40B4-BE49-F238E27FC236}">
+                <a16:creationId xmlns:a16="http://schemas.microsoft.com/office/drawing/2014/main" id="{89F05E02-6563-E17B-67B8-CBA0BE8A22D0}"/>
+              </a:ext>
+            </a:extLst>
+          </p:cNvPr>
+          <p:cNvSpPr>
+            <a:spLocks noGrp="1"/>
+          </p:cNvSpPr>
+          <p:nvPr>
+            <p:ph type="sldNum" sz="quarter" idx="5"/>
+          </p:nvPr>
+        </p:nvSpPr>
+        <p:spPr/>
+        <p:txBody>
+          <a:bodyPr/>
+          <a:lstStyle/>
+          <a:p>
+            <a:fld id="{676223B9-C868-4436-87D9-1A3152E1157A}" type="slidenum">
+              <a:rPr lang="es-ES" smtClean="0"/>
+              <a:t>13</a:t>
+            </a:fld>
+            <a:endParaRPr lang="es-ES"/>
+          </a:p>
+        </p:txBody>
+      </p:sp>
+    </p:spTree>
+    <p:extLst>
+      <p:ext uri="{BB962C8B-B14F-4D97-AF65-F5344CB8AC3E}">
+        <p14:creationId xmlns:p14="http://schemas.microsoft.com/office/powerpoint/2010/main" val="3072001755"/>
+      </p:ext>
+    </p:extLst>
+  </p:cSld>
+  <p:clrMapOvr>
+    <a:masterClrMapping/>
+  </p:clrMapOvr>
+</p:notes>
+</file>
+
+<file path=ppt/notesSlides/notesSlide12.xml><?xml version="1.0" encoding="utf-8"?>
+<p:notes xmlns:a="http://schemas.openxmlformats.org/drawingml/2006/main" xmlns:r="http://schemas.openxmlformats.org/officeDocument/2006/relationships" xmlns:p="http://schemas.openxmlformats.org/presentationml/2006/main">
+  <p:cSld>
+    <p:spTree>
+      <p:nvGrpSpPr>
+        <p:cNvPr id="1" name="">
+          <a:extLst>
+            <a:ext uri="{FF2B5EF4-FFF2-40B4-BE49-F238E27FC236}">
+              <a16:creationId xmlns:a16="http://schemas.microsoft.com/office/drawing/2014/main" id="{868F883C-2214-83DE-A46F-0B4499EEAD7F}"/>
+            </a:ext>
+          </a:extLst>
+        </p:cNvPr>
+        <p:cNvGrpSpPr/>
+        <p:nvPr/>
+      </p:nvGrpSpPr>
+      <p:grpSpPr>
+        <a:xfrm>
+          <a:off x="0" y="0"/>
+          <a:ext cx="0" cy="0"/>
+          <a:chOff x="0" y="0"/>
+          <a:chExt cx="0" cy="0"/>
+        </a:xfrm>
+      </p:grpSpPr>
+      <p:sp>
+        <p:nvSpPr>
+          <p:cNvPr id="2" name="Marcador de imagen de diapositiva 1">
+            <a:extLst>
+              <a:ext uri="{FF2B5EF4-FFF2-40B4-BE49-F238E27FC236}">
+                <a16:creationId xmlns:a16="http://schemas.microsoft.com/office/drawing/2014/main" id="{3644840D-1C40-39C0-A29B-92A9DEDB14B5}"/>
+              </a:ext>
+            </a:extLst>
+          </p:cNvPr>
+          <p:cNvSpPr>
+            <a:spLocks noGrp="1" noRot="1" noChangeAspect="1"/>
+          </p:cNvSpPr>
+          <p:nvPr>
+            <p:ph type="sldImg"/>
+          </p:nvPr>
+        </p:nvSpPr>
+        <p:spPr/>
+      </p:sp>
+      <p:sp>
+        <p:nvSpPr>
+          <p:cNvPr id="3" name="Marcador de notas 2">
+            <a:extLst>
+              <a:ext uri="{FF2B5EF4-FFF2-40B4-BE49-F238E27FC236}">
+                <a16:creationId xmlns:a16="http://schemas.microsoft.com/office/drawing/2014/main" id="{1E00F841-88B5-28D2-B8AD-7572489A8563}"/>
+              </a:ext>
+            </a:extLst>
+          </p:cNvPr>
+          <p:cNvSpPr>
+            <a:spLocks noGrp="1"/>
+          </p:cNvSpPr>
+          <p:nvPr>
+            <p:ph type="body" idx="1"/>
+          </p:nvPr>
+        </p:nvSpPr>
+        <p:spPr/>
+        <p:txBody>
+          <a:bodyPr/>
+          <a:lstStyle/>
+          <a:p>
+            <a:endParaRPr lang="es-ES" dirty="0"/>
+          </a:p>
+        </p:txBody>
+      </p:sp>
+      <p:sp>
+        <p:nvSpPr>
+          <p:cNvPr id="4" name="Marcador de número de diapositiva 3">
+            <a:extLst>
+              <a:ext uri="{FF2B5EF4-FFF2-40B4-BE49-F238E27FC236}">
+                <a16:creationId xmlns:a16="http://schemas.microsoft.com/office/drawing/2014/main" id="{CD20CB20-0871-B81E-C209-7CB477169152}"/>
+              </a:ext>
+            </a:extLst>
+          </p:cNvPr>
+          <p:cNvSpPr>
+            <a:spLocks noGrp="1"/>
+          </p:cNvSpPr>
+          <p:nvPr>
+            <p:ph type="sldNum" sz="quarter" idx="5"/>
+          </p:nvPr>
+        </p:nvSpPr>
+        <p:spPr/>
+        <p:txBody>
+          <a:bodyPr/>
+          <a:lstStyle/>
+          <a:p>
+            <a:fld id="{676223B9-C868-4436-87D9-1A3152E1157A}" type="slidenum">
+              <a:rPr lang="es-ES" smtClean="0"/>
+              <a:t>14</a:t>
+            </a:fld>
+            <a:endParaRPr lang="es-ES"/>
+          </a:p>
+        </p:txBody>
+      </p:sp>
+    </p:spTree>
+    <p:extLst>
+      <p:ext uri="{BB962C8B-B14F-4D97-AF65-F5344CB8AC3E}">
+        <p14:creationId xmlns:p14="http://schemas.microsoft.com/office/powerpoint/2010/main" val="2941625907"/>
+      </p:ext>
+    </p:extLst>
+  </p:cSld>
+  <p:clrMapOvr>
+    <a:masterClrMapping/>
+  </p:clrMapOvr>
+</p:notes>
+</file>
+
 <file path=ppt/notesSlides/notesSlide2.xml><?xml version="1.0" encoding="utf-8"?>
 <p:notes xmlns:a="http://schemas.openxmlformats.org/drawingml/2006/main" xmlns:r="http://schemas.openxmlformats.org/officeDocument/2006/relationships" xmlns:p="http://schemas.openxmlformats.org/presentationml/2006/main">
   <p:cSld>
@@ -1543,6 +1871,114 @@
     <p:extLst>
       <p:ext uri="{BB962C8B-B14F-4D97-AF65-F5344CB8AC3E}">
         <p14:creationId xmlns:p14="http://schemas.microsoft.com/office/powerpoint/2010/main" val="2917382716"/>
+      </p:ext>
+    </p:extLst>
+  </p:cSld>
+  <p:clrMapOvr>
+    <a:masterClrMapping/>
+  </p:clrMapOvr>
+</p:notes>
+</file>
+
+<file path=ppt/notesSlides/notesSlide9.xml><?xml version="1.0" encoding="utf-8"?>
+<p:notes xmlns:a="http://schemas.openxmlformats.org/drawingml/2006/main" xmlns:r="http://schemas.openxmlformats.org/officeDocument/2006/relationships" xmlns:p="http://schemas.openxmlformats.org/presentationml/2006/main">
+  <p:cSld>
+    <p:spTree>
+      <p:nvGrpSpPr>
+        <p:cNvPr id="1" name="">
+          <a:extLst>
+            <a:ext uri="{FF2B5EF4-FFF2-40B4-BE49-F238E27FC236}">
+              <a16:creationId xmlns:a16="http://schemas.microsoft.com/office/drawing/2014/main" id="{23F372A6-6C95-E4D4-BF5C-B643A29942BD}"/>
+            </a:ext>
+          </a:extLst>
+        </p:cNvPr>
+        <p:cNvGrpSpPr/>
+        <p:nvPr/>
+      </p:nvGrpSpPr>
+      <p:grpSpPr>
+        <a:xfrm>
+          <a:off x="0" y="0"/>
+          <a:ext cx="0" cy="0"/>
+          <a:chOff x="0" y="0"/>
+          <a:chExt cx="0" cy="0"/>
+        </a:xfrm>
+      </p:grpSpPr>
+      <p:sp>
+        <p:nvSpPr>
+          <p:cNvPr id="2" name="Marcador de imagen de diapositiva 1">
+            <a:extLst>
+              <a:ext uri="{FF2B5EF4-FFF2-40B4-BE49-F238E27FC236}">
+                <a16:creationId xmlns:a16="http://schemas.microsoft.com/office/drawing/2014/main" id="{6CA5B3AE-FFEA-66C4-12E9-861082361B65}"/>
+              </a:ext>
+            </a:extLst>
+          </p:cNvPr>
+          <p:cNvSpPr>
+            <a:spLocks noGrp="1" noRot="1" noChangeAspect="1"/>
+          </p:cNvSpPr>
+          <p:nvPr>
+            <p:ph type="sldImg"/>
+          </p:nvPr>
+        </p:nvSpPr>
+        <p:spPr/>
+      </p:sp>
+      <p:sp>
+        <p:nvSpPr>
+          <p:cNvPr id="3" name="Marcador de notas 2">
+            <a:extLst>
+              <a:ext uri="{FF2B5EF4-FFF2-40B4-BE49-F238E27FC236}">
+                <a16:creationId xmlns:a16="http://schemas.microsoft.com/office/drawing/2014/main" id="{171FF9E9-532D-BE68-1E4F-4E86497D4B08}"/>
+              </a:ext>
+            </a:extLst>
+          </p:cNvPr>
+          <p:cNvSpPr>
+            <a:spLocks noGrp="1"/>
+          </p:cNvSpPr>
+          <p:nvPr>
+            <p:ph type="body" idx="1"/>
+          </p:nvPr>
+        </p:nvSpPr>
+        <p:spPr/>
+        <p:txBody>
+          <a:bodyPr/>
+          <a:lstStyle/>
+          <a:p>
+            <a:endParaRPr lang="es-ES" dirty="0"/>
+          </a:p>
+        </p:txBody>
+      </p:sp>
+      <p:sp>
+        <p:nvSpPr>
+          <p:cNvPr id="4" name="Marcador de número de diapositiva 3">
+            <a:extLst>
+              <a:ext uri="{FF2B5EF4-FFF2-40B4-BE49-F238E27FC236}">
+                <a16:creationId xmlns:a16="http://schemas.microsoft.com/office/drawing/2014/main" id="{D024E5AF-CFAF-AABF-8D97-2F2BE50E7C80}"/>
+              </a:ext>
+            </a:extLst>
+          </p:cNvPr>
+          <p:cNvSpPr>
+            <a:spLocks noGrp="1"/>
+          </p:cNvSpPr>
+          <p:nvPr>
+            <p:ph type="sldNum" sz="quarter" idx="5"/>
+          </p:nvPr>
+        </p:nvSpPr>
+        <p:spPr/>
+        <p:txBody>
+          <a:bodyPr/>
+          <a:lstStyle/>
+          <a:p>
+            <a:fld id="{676223B9-C868-4436-87D9-1A3152E1157A}" type="slidenum">
+              <a:rPr lang="es-ES" smtClean="0"/>
+              <a:t>11</a:t>
+            </a:fld>
+            <a:endParaRPr lang="es-ES"/>
+          </a:p>
+        </p:txBody>
+      </p:sp>
+    </p:spTree>
+    <p:extLst>
+      <p:ext uri="{BB962C8B-B14F-4D97-AF65-F5344CB8AC3E}">
+        <p14:creationId xmlns:p14="http://schemas.microsoft.com/office/powerpoint/2010/main" val="2006642282"/>
       </p:ext>
     </p:extLst>
   </p:cSld>
@@ -3629,6 +4065,1491 @@
   <p:cSld>
     <p:spTree>
       <p:nvGrpSpPr>
+        <p:cNvPr id="1" name="">
+          <a:extLst>
+            <a:ext uri="{FF2B5EF4-FFF2-40B4-BE49-F238E27FC236}">
+              <a16:creationId xmlns:a16="http://schemas.microsoft.com/office/drawing/2014/main" id="{78D6BBC3-5145-4705-5F65-216325E77B3E}"/>
+            </a:ext>
+          </a:extLst>
+        </p:cNvPr>
+        <p:cNvGrpSpPr/>
+        <p:nvPr/>
+      </p:nvGrpSpPr>
+      <p:grpSpPr>
+        <a:xfrm>
+          <a:off x="0" y="0"/>
+          <a:ext cx="0" cy="0"/>
+          <a:chOff x="0" y="0"/>
+          <a:chExt cx="0" cy="0"/>
+        </a:xfrm>
+      </p:grpSpPr>
+      <p:sp>
+        <p:nvSpPr>
+          <p:cNvPr id="16" name="object 16">
+            <a:extLst>
+              <a:ext uri="{FF2B5EF4-FFF2-40B4-BE49-F238E27FC236}">
+                <a16:creationId xmlns:a16="http://schemas.microsoft.com/office/drawing/2014/main" id="{BC15E1E5-7A56-2995-4D67-273F419F1269}"/>
+              </a:ext>
+            </a:extLst>
+          </p:cNvPr>
+          <p:cNvSpPr txBox="1">
+            <a:spLocks noGrp="1"/>
+          </p:cNvSpPr>
+          <p:nvPr>
+            <p:ph type="title"/>
+          </p:nvPr>
+        </p:nvSpPr>
+        <p:spPr>
+          <a:xfrm>
+            <a:off x="685800" y="408883"/>
+            <a:ext cx="10994410" cy="2398092"/>
+          </a:xfrm>
+          <a:prstGeom prst="rect">
+            <a:avLst/>
+          </a:prstGeom>
+        </p:spPr>
+        <p:txBody>
+          <a:bodyPr vert="horz" wrap="square" lIns="0" tIns="12700" rIns="0" bIns="0" rtlCol="0">
+            <a:spAutoFit/>
+          </a:bodyPr>
+          <a:lstStyle/>
+          <a:p>
+            <a:pPr marL="12700">
+              <a:spcBef>
+                <a:spcPts val="100"/>
+              </a:spcBef>
+            </a:pPr>
+            <a:r>
+              <a:rPr lang="en-US" sz="2500" dirty="0"/>
+              <a:t># EXTRA.1 - Wavelength behavior</a:t>
+            </a:r>
+            <a:br>
+              <a:rPr lang="en-US" sz="2500" dirty="0"/>
+            </a:br>
+            <a:r>
+              <a:rPr lang="en-US" b="0" dirty="0"/>
+              <a:t>Now, Simulate the Silicon-On-Insulator technology changing the core material to Silicon (Si). In this case, the dimensions will be 220 nm </a:t>
+            </a:r>
+            <a:r>
+              <a:rPr lang="en-US" b="0" dirty="0" err="1"/>
+              <a:t>heigth</a:t>
+            </a:r>
+            <a:r>
+              <a:rPr lang="en-US" b="0" dirty="0"/>
+              <a:t> and 500 nm width. </a:t>
+            </a:r>
+            <a:br>
+              <a:rPr lang="en-US" b="0" dirty="0"/>
+            </a:br>
+            <a:r>
+              <a:rPr lang="en-US" dirty="0"/>
+              <a:t>1. </a:t>
+            </a:r>
+            <a:r>
+              <a:rPr lang="en-US" b="0" dirty="0"/>
+              <a:t>Repeat the LO.2. wavelength behavior simulations, considering the updated materials and dimensions. </a:t>
+            </a:r>
+            <a:br>
+              <a:rPr lang="en-US" b="0" dirty="0"/>
+            </a:br>
+            <a:br>
+              <a:rPr lang="en-US" b="0" dirty="0"/>
+            </a:br>
+            <a:br>
+              <a:rPr lang="en-US" sz="2500" dirty="0"/>
+            </a:br>
+            <a:endParaRPr lang="en-US" sz="2500" b="0" dirty="0">
+              <a:latin typeface="+mj-lt"/>
+              <a:cs typeface="Lucida Sans"/>
+            </a:endParaRPr>
+          </a:p>
+        </p:txBody>
+      </p:sp>
+      <p:pic>
+        <p:nvPicPr>
+          <p:cNvPr id="83" name="Gráfico 82">
+            <a:extLst>
+              <a:ext uri="{FF2B5EF4-FFF2-40B4-BE49-F238E27FC236}">
+                <a16:creationId xmlns:a16="http://schemas.microsoft.com/office/drawing/2014/main" id="{3402F5B0-BE89-6EC8-DE18-8C9902A6259A}"/>
+              </a:ext>
+            </a:extLst>
+          </p:cNvPr>
+          <p:cNvPicPr>
+            <a:picLocks noChangeAspect="1"/>
+          </p:cNvPicPr>
+          <p:nvPr/>
+        </p:nvPicPr>
+        <p:blipFill>
+          <a:blip r:embed="rId3">
+            <a:extLst>
+              <a:ext uri="{96DAC541-7B7A-43D3-8B79-37D633B846F1}">
+                <asvg:svgBlip xmlns:asvg="http://schemas.microsoft.com/office/drawing/2016/SVG/main" r:embed="rId4"/>
+              </a:ext>
+            </a:extLst>
+          </a:blip>
+          <a:stretch>
+            <a:fillRect/>
+          </a:stretch>
+        </p:blipFill>
+        <p:spPr>
+          <a:xfrm>
+            <a:off x="5045006" y="6356057"/>
+            <a:ext cx="6409575" cy="363174"/>
+          </a:xfrm>
+          <a:prstGeom prst="rect">
+            <a:avLst/>
+          </a:prstGeom>
+        </p:spPr>
+      </p:pic>
+      <p:sp>
+        <p:nvSpPr>
+          <p:cNvPr id="84" name="Marcador de número de diapositiva 83">
+            <a:extLst>
+              <a:ext uri="{FF2B5EF4-FFF2-40B4-BE49-F238E27FC236}">
+                <a16:creationId xmlns:a16="http://schemas.microsoft.com/office/drawing/2014/main" id="{ABED5594-721A-740B-E9D0-284907D21043}"/>
+              </a:ext>
+            </a:extLst>
+          </p:cNvPr>
+          <p:cNvSpPr>
+            <a:spLocks noGrp="1"/>
+          </p:cNvSpPr>
+          <p:nvPr>
+            <p:ph type="sldNum" sz="quarter" idx="7"/>
+          </p:nvPr>
+        </p:nvSpPr>
+        <p:spPr/>
+        <p:txBody>
+          <a:bodyPr/>
+          <a:lstStyle/>
+          <a:p>
+            <a:fld id="{B6F15528-21DE-4FAA-801E-634DDDAF4B2B}" type="slidenum">
+              <a:rPr lang="es-ES" smtClean="0"/>
+              <a:t>11</a:t>
+            </a:fld>
+            <a:endParaRPr lang="es-ES"/>
+          </a:p>
+        </p:txBody>
+      </p:sp>
+      <p:sp>
+        <p:nvSpPr>
+          <p:cNvPr id="3" name="Marcador de pie de página 2">
+            <a:extLst>
+              <a:ext uri="{FF2B5EF4-FFF2-40B4-BE49-F238E27FC236}">
+                <a16:creationId xmlns:a16="http://schemas.microsoft.com/office/drawing/2014/main" id="{E2C3C16A-8F1C-075F-485A-4A291213F56E}"/>
+              </a:ext>
+            </a:extLst>
+          </p:cNvPr>
+          <p:cNvSpPr>
+            <a:spLocks noGrp="1"/>
+          </p:cNvSpPr>
+          <p:nvPr>
+            <p:ph type="ftr" sz="quarter" idx="5"/>
+          </p:nvPr>
+        </p:nvSpPr>
+        <p:spPr/>
+        <p:txBody>
+          <a:bodyPr/>
+          <a:lstStyle/>
+          <a:p>
+            <a:pPr marL="12700">
+              <a:spcBef>
+                <a:spcPts val="15"/>
+              </a:spcBef>
+            </a:pPr>
+            <a:r>
+              <a:rPr lang="es-ES" spc="-5"/>
+              <a:t>LAB 1.0 WAVEGUIDES</a:t>
+            </a:r>
+            <a:endParaRPr lang="es-ES" spc="-5" dirty="0"/>
+          </a:p>
+        </p:txBody>
+      </p:sp>
+      <p:sp>
+        <p:nvSpPr>
+          <p:cNvPr id="2" name="CuadroTexto 1">
+            <a:extLst>
+              <a:ext uri="{FF2B5EF4-FFF2-40B4-BE49-F238E27FC236}">
+                <a16:creationId xmlns:a16="http://schemas.microsoft.com/office/drawing/2014/main" id="{4F885DF2-D695-6C6F-F4F1-913A39EAE30C}"/>
+              </a:ext>
+            </a:extLst>
+          </p:cNvPr>
+          <p:cNvSpPr txBox="1"/>
+          <p:nvPr/>
+        </p:nvSpPr>
+        <p:spPr>
+          <a:xfrm>
+            <a:off x="609441" y="4860334"/>
+            <a:ext cx="11199971" cy="646331"/>
+          </a:xfrm>
+          <a:prstGeom prst="rect">
+            <a:avLst/>
+          </a:prstGeom>
+          <a:solidFill>
+            <a:schemeClr val="bg1">
+              <a:lumMod val="95000"/>
+            </a:schemeClr>
+          </a:solidFill>
+          <a:ln w="28575">
+            <a:solidFill>
+              <a:srgbClr val="E0700D"/>
+            </a:solidFill>
+          </a:ln>
+        </p:spPr>
+        <p:txBody>
+          <a:bodyPr wrap="square" rtlCol="0">
+            <a:spAutoFit/>
+          </a:bodyPr>
+          <a:lstStyle/>
+          <a:p>
+            <a:pPr algn="just"/>
+            <a:endParaRPr lang="en-US" sz="1200" dirty="0">
+              <a:latin typeface="Arial" panose="020B0604020202020204" pitchFamily="34" charset="0"/>
+              <a:cs typeface="Arial" panose="020B0604020202020204" pitchFamily="34" charset="0"/>
+            </a:endParaRPr>
+          </a:p>
+          <a:p>
+            <a:pPr algn="just"/>
+            <a:endParaRPr lang="en-US" sz="1200" dirty="0">
+              <a:latin typeface="Arial" panose="020B0604020202020204" pitchFamily="34" charset="0"/>
+              <a:cs typeface="Arial" panose="020B0604020202020204" pitchFamily="34" charset="0"/>
+            </a:endParaRPr>
+          </a:p>
+          <a:p>
+            <a:pPr algn="just"/>
+            <a:endParaRPr lang="en-US" sz="1200" dirty="0">
+              <a:latin typeface="Arial" panose="020B0604020202020204" pitchFamily="34" charset="0"/>
+              <a:cs typeface="Arial" panose="020B0604020202020204" pitchFamily="34" charset="0"/>
+            </a:endParaRPr>
+          </a:p>
+        </p:txBody>
+      </p:sp>
+      <p:sp>
+        <p:nvSpPr>
+          <p:cNvPr id="4" name="Rectángulo 3">
+            <a:extLst>
+              <a:ext uri="{FF2B5EF4-FFF2-40B4-BE49-F238E27FC236}">
+                <a16:creationId xmlns:a16="http://schemas.microsoft.com/office/drawing/2014/main" id="{2993ADF6-D21D-2668-6DDA-58105166CF68}"/>
+              </a:ext>
+            </a:extLst>
+          </p:cNvPr>
+          <p:cNvSpPr/>
+          <p:nvPr/>
+        </p:nvSpPr>
+        <p:spPr>
+          <a:xfrm>
+            <a:off x="609441" y="1752600"/>
+            <a:ext cx="5332571" cy="2870200"/>
+          </a:xfrm>
+          <a:prstGeom prst="rect">
+            <a:avLst/>
+          </a:prstGeom>
+          <a:noFill/>
+          <a:ln w="28575">
+            <a:solidFill>
+              <a:srgbClr val="E0700D"/>
+            </a:solidFill>
+          </a:ln>
+        </p:spPr>
+        <p:style>
+          <a:lnRef idx="2">
+            <a:schemeClr val="accent1">
+              <a:shade val="15000"/>
+            </a:schemeClr>
+          </a:lnRef>
+          <a:fillRef idx="1">
+            <a:schemeClr val="accent1"/>
+          </a:fillRef>
+          <a:effectRef idx="0">
+            <a:schemeClr val="accent1"/>
+          </a:effectRef>
+          <a:fontRef idx="minor">
+            <a:schemeClr val="lt1"/>
+          </a:fontRef>
+        </p:style>
+        <p:txBody>
+          <a:bodyPr rtlCol="0" anchor="ctr"/>
+          <a:lstStyle/>
+          <a:p>
+            <a:pPr algn="ctr"/>
+            <a:endParaRPr lang="en-US"/>
+          </a:p>
+        </p:txBody>
+      </p:sp>
+      <p:sp>
+        <p:nvSpPr>
+          <p:cNvPr id="5" name="Rectángulo 4">
+            <a:extLst>
+              <a:ext uri="{FF2B5EF4-FFF2-40B4-BE49-F238E27FC236}">
+                <a16:creationId xmlns:a16="http://schemas.microsoft.com/office/drawing/2014/main" id="{BEF898AD-9255-52C1-491D-0B1979BEB031}"/>
+              </a:ext>
+            </a:extLst>
+          </p:cNvPr>
+          <p:cNvSpPr/>
+          <p:nvPr/>
+        </p:nvSpPr>
+        <p:spPr>
+          <a:xfrm>
+            <a:off x="6476841" y="1752600"/>
+            <a:ext cx="5332571" cy="2870200"/>
+          </a:xfrm>
+          <a:prstGeom prst="rect">
+            <a:avLst/>
+          </a:prstGeom>
+          <a:noFill/>
+          <a:ln w="28575">
+            <a:solidFill>
+              <a:srgbClr val="E0700D"/>
+            </a:solidFill>
+          </a:ln>
+        </p:spPr>
+        <p:style>
+          <a:lnRef idx="2">
+            <a:schemeClr val="accent1">
+              <a:shade val="15000"/>
+            </a:schemeClr>
+          </a:lnRef>
+          <a:fillRef idx="1">
+            <a:schemeClr val="accent1"/>
+          </a:fillRef>
+          <a:effectRef idx="0">
+            <a:schemeClr val="accent1"/>
+          </a:effectRef>
+          <a:fontRef idx="minor">
+            <a:schemeClr val="lt1"/>
+          </a:fontRef>
+        </p:style>
+        <p:txBody>
+          <a:bodyPr rtlCol="0" anchor="ctr"/>
+          <a:lstStyle/>
+          <a:p>
+            <a:pPr algn="ctr"/>
+            <a:endParaRPr lang="en-US"/>
+          </a:p>
+        </p:txBody>
+      </p:sp>
+      <p:pic>
+        <p:nvPicPr>
+          <p:cNvPr id="14" name="Imagen 13">
+            <a:extLst>
+              <a:ext uri="{FF2B5EF4-FFF2-40B4-BE49-F238E27FC236}">
+                <a16:creationId xmlns:a16="http://schemas.microsoft.com/office/drawing/2014/main" id="{EC53BC5F-BC37-D980-85A8-6605193EB660}"/>
+              </a:ext>
+            </a:extLst>
+          </p:cNvPr>
+          <p:cNvPicPr>
+            <a:picLocks noChangeAspect="1"/>
+          </p:cNvPicPr>
+          <p:nvPr/>
+        </p:nvPicPr>
+        <p:blipFill>
+          <a:blip r:embed="rId5"/>
+          <a:stretch>
+            <a:fillRect/>
+          </a:stretch>
+        </p:blipFill>
+        <p:spPr>
+          <a:xfrm>
+            <a:off x="1074403" y="1765908"/>
+            <a:ext cx="4798341" cy="2799032"/>
+          </a:xfrm>
+          <a:prstGeom prst="rect">
+            <a:avLst/>
+          </a:prstGeom>
+        </p:spPr>
+      </p:pic>
+      <p:sp>
+        <p:nvSpPr>
+          <p:cNvPr id="12" name="CuadroTexto 11">
+            <a:extLst>
+              <a:ext uri="{FF2B5EF4-FFF2-40B4-BE49-F238E27FC236}">
+                <a16:creationId xmlns:a16="http://schemas.microsoft.com/office/drawing/2014/main" id="{7CFC0A78-BE03-5EC6-463D-56F6288FB880}"/>
+              </a:ext>
+            </a:extLst>
+          </p:cNvPr>
+          <p:cNvSpPr txBox="1"/>
+          <p:nvPr/>
+        </p:nvSpPr>
+        <p:spPr>
+          <a:xfrm>
+            <a:off x="665927" y="4277043"/>
+            <a:ext cx="2269787" cy="338554"/>
+          </a:xfrm>
+          <a:prstGeom prst="rect">
+            <a:avLst/>
+          </a:prstGeom>
+          <a:noFill/>
+        </p:spPr>
+        <p:txBody>
+          <a:bodyPr wrap="square">
+            <a:spAutoFit/>
+          </a:bodyPr>
+          <a:lstStyle/>
+          <a:p>
+            <a:r>
+              <a:rPr lang="en-US" sz="1600" dirty="0"/>
+              <a:t>slab = 150nm</a:t>
+            </a:r>
+            <a:endParaRPr lang="es-ES" sz="1600" dirty="0"/>
+          </a:p>
+        </p:txBody>
+      </p:sp>
+      <p:pic>
+        <p:nvPicPr>
+          <p:cNvPr id="17" name="Imagen 16">
+            <a:extLst>
+              <a:ext uri="{FF2B5EF4-FFF2-40B4-BE49-F238E27FC236}">
+                <a16:creationId xmlns:a16="http://schemas.microsoft.com/office/drawing/2014/main" id="{7FAAAA22-83B2-4C31-47B6-D917F1DCDBB2}"/>
+              </a:ext>
+            </a:extLst>
+          </p:cNvPr>
+          <p:cNvPicPr>
+            <a:picLocks noChangeAspect="1"/>
+          </p:cNvPicPr>
+          <p:nvPr/>
+        </p:nvPicPr>
+        <p:blipFill>
+          <a:blip r:embed="rId6"/>
+          <a:stretch>
+            <a:fillRect/>
+          </a:stretch>
+        </p:blipFill>
+        <p:spPr>
+          <a:xfrm>
+            <a:off x="6882881" y="1846948"/>
+            <a:ext cx="4520490" cy="2636952"/>
+          </a:xfrm>
+          <a:prstGeom prst="rect">
+            <a:avLst/>
+          </a:prstGeom>
+        </p:spPr>
+      </p:pic>
+    </p:spTree>
+    <p:extLst>
+      <p:ext uri="{BB962C8B-B14F-4D97-AF65-F5344CB8AC3E}">
+        <p14:creationId xmlns:p14="http://schemas.microsoft.com/office/powerpoint/2010/main" val="3626364499"/>
+      </p:ext>
+    </p:extLst>
+  </p:cSld>
+  <p:clrMapOvr>
+    <a:masterClrMapping/>
+  </p:clrMapOvr>
+</p:sld>
+</file>
+
+<file path=ppt/slides/slide12.xml><?xml version="1.0" encoding="utf-8"?>
+<p:sld xmlns:a="http://schemas.openxmlformats.org/drawingml/2006/main" xmlns:r="http://schemas.openxmlformats.org/officeDocument/2006/relationships" xmlns:p="http://schemas.openxmlformats.org/presentationml/2006/main">
+  <p:cSld>
+    <p:spTree>
+      <p:nvGrpSpPr>
+        <p:cNvPr id="1" name="">
+          <a:extLst>
+            <a:ext uri="{FF2B5EF4-FFF2-40B4-BE49-F238E27FC236}">
+              <a16:creationId xmlns:a16="http://schemas.microsoft.com/office/drawing/2014/main" id="{ECC43A31-2DA9-8AED-9052-D527F9CE58FF}"/>
+            </a:ext>
+          </a:extLst>
+        </p:cNvPr>
+        <p:cNvGrpSpPr/>
+        <p:nvPr/>
+      </p:nvGrpSpPr>
+      <p:grpSpPr>
+        <a:xfrm>
+          <a:off x="0" y="0"/>
+          <a:ext cx="0" cy="0"/>
+          <a:chOff x="0" y="0"/>
+          <a:chExt cx="0" cy="0"/>
+        </a:xfrm>
+      </p:grpSpPr>
+      <p:sp>
+        <p:nvSpPr>
+          <p:cNvPr id="16" name="object 16">
+            <a:extLst>
+              <a:ext uri="{FF2B5EF4-FFF2-40B4-BE49-F238E27FC236}">
+                <a16:creationId xmlns:a16="http://schemas.microsoft.com/office/drawing/2014/main" id="{7F8C5194-75E5-7874-4FFE-C6C0FC4070AC}"/>
+              </a:ext>
+            </a:extLst>
+          </p:cNvPr>
+          <p:cNvSpPr txBox="1">
+            <a:spLocks noGrp="1"/>
+          </p:cNvSpPr>
+          <p:nvPr>
+            <p:ph type="title"/>
+          </p:nvPr>
+        </p:nvSpPr>
+        <p:spPr>
+          <a:xfrm>
+            <a:off x="685800" y="408883"/>
+            <a:ext cx="10994410" cy="1782539"/>
+          </a:xfrm>
+          <a:prstGeom prst="rect">
+            <a:avLst/>
+          </a:prstGeom>
+        </p:spPr>
+        <p:txBody>
+          <a:bodyPr vert="horz" wrap="square" lIns="0" tIns="12700" rIns="0" bIns="0" rtlCol="0">
+            <a:spAutoFit/>
+          </a:bodyPr>
+          <a:lstStyle/>
+          <a:p>
+            <a:pPr marL="12700">
+              <a:spcBef>
+                <a:spcPts val="100"/>
+              </a:spcBef>
+            </a:pPr>
+            <a:r>
+              <a:rPr lang="en-US" sz="2500" dirty="0"/>
+              <a:t># EXTRA.2 - Width dependence</a:t>
+            </a:r>
+            <a:br>
+              <a:rPr lang="en-US" sz="2500" dirty="0"/>
+            </a:br>
+            <a:r>
+              <a:rPr lang="en-US" dirty="0"/>
+              <a:t>2.</a:t>
+            </a:r>
+            <a:r>
+              <a:rPr lang="en-US" b="0" dirty="0"/>
+              <a:t> Repeat the LO.3. width dependence analysis, now sweeping in a 300nm - 1um range. </a:t>
+            </a:r>
+            <a:br>
+              <a:rPr lang="en-US" b="0" dirty="0"/>
+            </a:br>
+            <a:br>
+              <a:rPr lang="en-US" b="0" dirty="0"/>
+            </a:br>
+            <a:br>
+              <a:rPr lang="en-US" sz="2500" dirty="0"/>
+            </a:br>
+            <a:endParaRPr lang="en-US" sz="2500" b="0" dirty="0">
+              <a:latin typeface="+mj-lt"/>
+              <a:cs typeface="Lucida Sans"/>
+            </a:endParaRPr>
+          </a:p>
+        </p:txBody>
+      </p:sp>
+      <p:pic>
+        <p:nvPicPr>
+          <p:cNvPr id="83" name="Gráfico 82">
+            <a:extLst>
+              <a:ext uri="{FF2B5EF4-FFF2-40B4-BE49-F238E27FC236}">
+                <a16:creationId xmlns:a16="http://schemas.microsoft.com/office/drawing/2014/main" id="{37174BD2-88A1-56BC-6299-366D2C911E3C}"/>
+              </a:ext>
+            </a:extLst>
+          </p:cNvPr>
+          <p:cNvPicPr>
+            <a:picLocks noChangeAspect="1"/>
+          </p:cNvPicPr>
+          <p:nvPr/>
+        </p:nvPicPr>
+        <p:blipFill>
+          <a:blip r:embed="rId3">
+            <a:extLst>
+              <a:ext uri="{96DAC541-7B7A-43D3-8B79-37D633B846F1}">
+                <asvg:svgBlip xmlns:asvg="http://schemas.microsoft.com/office/drawing/2016/SVG/main" r:embed="rId4"/>
+              </a:ext>
+            </a:extLst>
+          </a:blip>
+          <a:stretch>
+            <a:fillRect/>
+          </a:stretch>
+        </p:blipFill>
+        <p:spPr>
+          <a:xfrm>
+            <a:off x="5045006" y="6356057"/>
+            <a:ext cx="6409575" cy="363174"/>
+          </a:xfrm>
+          <a:prstGeom prst="rect">
+            <a:avLst/>
+          </a:prstGeom>
+        </p:spPr>
+      </p:pic>
+      <p:sp>
+        <p:nvSpPr>
+          <p:cNvPr id="84" name="Marcador de número de diapositiva 83">
+            <a:extLst>
+              <a:ext uri="{FF2B5EF4-FFF2-40B4-BE49-F238E27FC236}">
+                <a16:creationId xmlns:a16="http://schemas.microsoft.com/office/drawing/2014/main" id="{ECA7CA9E-67A5-1004-15C0-E24A5FCE8CD4}"/>
+              </a:ext>
+            </a:extLst>
+          </p:cNvPr>
+          <p:cNvSpPr>
+            <a:spLocks noGrp="1"/>
+          </p:cNvSpPr>
+          <p:nvPr>
+            <p:ph type="sldNum" sz="quarter" idx="7"/>
+          </p:nvPr>
+        </p:nvSpPr>
+        <p:spPr/>
+        <p:txBody>
+          <a:bodyPr/>
+          <a:lstStyle/>
+          <a:p>
+            <a:fld id="{B6F15528-21DE-4FAA-801E-634DDDAF4B2B}" type="slidenum">
+              <a:rPr lang="es-ES" smtClean="0"/>
+              <a:t>12</a:t>
+            </a:fld>
+            <a:endParaRPr lang="es-ES"/>
+          </a:p>
+        </p:txBody>
+      </p:sp>
+      <p:sp>
+        <p:nvSpPr>
+          <p:cNvPr id="3" name="Marcador de pie de página 2">
+            <a:extLst>
+              <a:ext uri="{FF2B5EF4-FFF2-40B4-BE49-F238E27FC236}">
+                <a16:creationId xmlns:a16="http://schemas.microsoft.com/office/drawing/2014/main" id="{3BB2435A-FA03-213C-050A-106A34FB237F}"/>
+              </a:ext>
+            </a:extLst>
+          </p:cNvPr>
+          <p:cNvSpPr>
+            <a:spLocks noGrp="1"/>
+          </p:cNvSpPr>
+          <p:nvPr>
+            <p:ph type="ftr" sz="quarter" idx="5"/>
+          </p:nvPr>
+        </p:nvSpPr>
+        <p:spPr/>
+        <p:txBody>
+          <a:bodyPr/>
+          <a:lstStyle/>
+          <a:p>
+            <a:pPr marL="12700">
+              <a:spcBef>
+                <a:spcPts val="15"/>
+              </a:spcBef>
+            </a:pPr>
+            <a:r>
+              <a:rPr lang="es-ES" spc="-5"/>
+              <a:t>LAB 1.0 WAVEGUIDES</a:t>
+            </a:r>
+            <a:endParaRPr lang="es-ES" spc="-5" dirty="0"/>
+          </a:p>
+        </p:txBody>
+      </p:sp>
+      <p:sp>
+        <p:nvSpPr>
+          <p:cNvPr id="2" name="CuadroTexto 1">
+            <a:extLst>
+              <a:ext uri="{FF2B5EF4-FFF2-40B4-BE49-F238E27FC236}">
+                <a16:creationId xmlns:a16="http://schemas.microsoft.com/office/drawing/2014/main" id="{6A2291EA-A955-D9A9-3AA1-672467A8E219}"/>
+              </a:ext>
+            </a:extLst>
+          </p:cNvPr>
+          <p:cNvSpPr txBox="1"/>
+          <p:nvPr/>
+        </p:nvSpPr>
+        <p:spPr>
+          <a:xfrm>
+            <a:off x="609441" y="4860334"/>
+            <a:ext cx="11199971" cy="1015663"/>
+          </a:xfrm>
+          <a:prstGeom prst="rect">
+            <a:avLst/>
+          </a:prstGeom>
+          <a:solidFill>
+            <a:schemeClr val="bg1">
+              <a:lumMod val="95000"/>
+            </a:schemeClr>
+          </a:solidFill>
+          <a:ln w="28575">
+            <a:solidFill>
+              <a:srgbClr val="E0700D"/>
+            </a:solidFill>
+          </a:ln>
+        </p:spPr>
+        <p:txBody>
+          <a:bodyPr wrap="square" rtlCol="0">
+            <a:spAutoFit/>
+          </a:bodyPr>
+          <a:lstStyle/>
+          <a:p>
+            <a:pPr algn="just"/>
+            <a:r>
+              <a:rPr lang="en-US" sz="1200" dirty="0">
+                <a:latin typeface="Arial" panose="020B0604020202020204" pitchFamily="34" charset="0"/>
+                <a:cs typeface="Arial" panose="020B0604020202020204" pitchFamily="34" charset="0"/>
+              </a:rPr>
+              <a:t>a</a:t>
+            </a:r>
+            <a:endParaRPr lang="en-US" sz="1200" u="sng" dirty="0">
+              <a:latin typeface="Arial" panose="020B0604020202020204" pitchFamily="34" charset="0"/>
+              <a:cs typeface="Arial" panose="020B0604020202020204" pitchFamily="34" charset="0"/>
+            </a:endParaRPr>
+          </a:p>
+          <a:p>
+            <a:pPr algn="just"/>
+            <a:endParaRPr lang="en-US" sz="1200" dirty="0">
+              <a:latin typeface="Arial" panose="020B0604020202020204" pitchFamily="34" charset="0"/>
+              <a:cs typeface="Arial" panose="020B0604020202020204" pitchFamily="34" charset="0"/>
+            </a:endParaRPr>
+          </a:p>
+          <a:p>
+            <a:pPr algn="just"/>
+            <a:endParaRPr lang="en-US" sz="1200" dirty="0">
+              <a:latin typeface="Arial" panose="020B0604020202020204" pitchFamily="34" charset="0"/>
+              <a:cs typeface="Arial" panose="020B0604020202020204" pitchFamily="34" charset="0"/>
+            </a:endParaRPr>
+          </a:p>
+          <a:p>
+            <a:pPr algn="just"/>
+            <a:endParaRPr lang="en-US" sz="1200" dirty="0">
+              <a:latin typeface="Arial" panose="020B0604020202020204" pitchFamily="34" charset="0"/>
+              <a:cs typeface="Arial" panose="020B0604020202020204" pitchFamily="34" charset="0"/>
+            </a:endParaRPr>
+          </a:p>
+          <a:p>
+            <a:pPr algn="just"/>
+            <a:endParaRPr lang="en-US" sz="1200" dirty="0">
+              <a:latin typeface="Arial" panose="020B0604020202020204" pitchFamily="34" charset="0"/>
+              <a:cs typeface="Arial" panose="020B0604020202020204" pitchFamily="34" charset="0"/>
+            </a:endParaRPr>
+          </a:p>
+        </p:txBody>
+      </p:sp>
+      <p:sp>
+        <p:nvSpPr>
+          <p:cNvPr id="5" name="Rectángulo 4">
+            <a:extLst>
+              <a:ext uri="{FF2B5EF4-FFF2-40B4-BE49-F238E27FC236}">
+                <a16:creationId xmlns:a16="http://schemas.microsoft.com/office/drawing/2014/main" id="{99C7BC53-FCEA-315B-8AAF-9470C09E243B}"/>
+              </a:ext>
+            </a:extLst>
+          </p:cNvPr>
+          <p:cNvSpPr/>
+          <p:nvPr/>
+        </p:nvSpPr>
+        <p:spPr>
+          <a:xfrm>
+            <a:off x="609441" y="1219200"/>
+            <a:ext cx="11199971" cy="3403600"/>
+          </a:xfrm>
+          <a:prstGeom prst="rect">
+            <a:avLst/>
+          </a:prstGeom>
+          <a:noFill/>
+          <a:ln w="28575">
+            <a:solidFill>
+              <a:srgbClr val="E0700D"/>
+            </a:solidFill>
+          </a:ln>
+        </p:spPr>
+        <p:style>
+          <a:lnRef idx="2">
+            <a:schemeClr val="accent1">
+              <a:shade val="15000"/>
+            </a:schemeClr>
+          </a:lnRef>
+          <a:fillRef idx="1">
+            <a:schemeClr val="accent1"/>
+          </a:fillRef>
+          <a:effectRef idx="0">
+            <a:schemeClr val="accent1"/>
+          </a:effectRef>
+          <a:fontRef idx="minor">
+            <a:schemeClr val="lt1"/>
+          </a:fontRef>
+        </p:style>
+        <p:txBody>
+          <a:bodyPr rtlCol="0" anchor="ctr"/>
+          <a:lstStyle/>
+          <a:p>
+            <a:pPr algn="ctr"/>
+            <a:endParaRPr lang="en-US"/>
+          </a:p>
+        </p:txBody>
+      </p:sp>
+    </p:spTree>
+    <p:extLst>
+      <p:ext uri="{BB962C8B-B14F-4D97-AF65-F5344CB8AC3E}">
+        <p14:creationId xmlns:p14="http://schemas.microsoft.com/office/powerpoint/2010/main" val="894238167"/>
+      </p:ext>
+    </p:extLst>
+  </p:cSld>
+  <p:clrMapOvr>
+    <a:masterClrMapping/>
+  </p:clrMapOvr>
+</p:sld>
+</file>
+
+<file path=ppt/slides/slide13.xml><?xml version="1.0" encoding="utf-8"?>
+<p:sld xmlns:a="http://schemas.openxmlformats.org/drawingml/2006/main" xmlns:r="http://schemas.openxmlformats.org/officeDocument/2006/relationships" xmlns:p="http://schemas.openxmlformats.org/presentationml/2006/main">
+  <p:cSld>
+    <p:spTree>
+      <p:nvGrpSpPr>
+        <p:cNvPr id="1" name="">
+          <a:extLst>
+            <a:ext uri="{FF2B5EF4-FFF2-40B4-BE49-F238E27FC236}">
+              <a16:creationId xmlns:a16="http://schemas.microsoft.com/office/drawing/2014/main" id="{F83BB253-D366-6AC7-6EC6-3467BBA4AC59}"/>
+            </a:ext>
+          </a:extLst>
+        </p:cNvPr>
+        <p:cNvGrpSpPr/>
+        <p:nvPr/>
+      </p:nvGrpSpPr>
+      <p:grpSpPr>
+        <a:xfrm>
+          <a:off x="0" y="0"/>
+          <a:ext cx="0" cy="0"/>
+          <a:chOff x="0" y="0"/>
+          <a:chExt cx="0" cy="0"/>
+        </a:xfrm>
+      </p:grpSpPr>
+      <p:sp>
+        <p:nvSpPr>
+          <p:cNvPr id="16" name="object 16">
+            <a:extLst>
+              <a:ext uri="{FF2B5EF4-FFF2-40B4-BE49-F238E27FC236}">
+                <a16:creationId xmlns:a16="http://schemas.microsoft.com/office/drawing/2014/main" id="{B5EACF51-6C0D-AAF0-97A2-1D61E1878E7C}"/>
+              </a:ext>
+            </a:extLst>
+          </p:cNvPr>
+          <p:cNvSpPr txBox="1">
+            <a:spLocks noGrp="1"/>
+          </p:cNvSpPr>
+          <p:nvPr>
+            <p:ph type="title"/>
+          </p:nvPr>
+        </p:nvSpPr>
+        <p:spPr>
+          <a:xfrm>
+            <a:off x="685800" y="408883"/>
+            <a:ext cx="10994410" cy="1090042"/>
+          </a:xfrm>
+          <a:prstGeom prst="rect">
+            <a:avLst/>
+          </a:prstGeom>
+        </p:spPr>
+        <p:txBody>
+          <a:bodyPr vert="horz" wrap="square" lIns="0" tIns="12700" rIns="0" bIns="0" rtlCol="0">
+            <a:spAutoFit/>
+          </a:bodyPr>
+          <a:lstStyle/>
+          <a:p>
+            <a:pPr marL="12700">
+              <a:spcBef>
+                <a:spcPts val="100"/>
+              </a:spcBef>
+            </a:pPr>
+            <a:r>
+              <a:rPr lang="en-US" sz="2500" dirty="0"/>
+              <a:t># EXTRA.3 - Bend waveguide radius </a:t>
+            </a:r>
+            <a:br>
+              <a:rPr lang="en-US" sz="2500" dirty="0"/>
+            </a:br>
+            <a:r>
+              <a:rPr lang="en-US" dirty="0"/>
+              <a:t>3. </a:t>
+            </a:r>
+            <a:r>
+              <a:rPr lang="en-US" b="0" dirty="0"/>
+              <a:t>Find the safe radius for this technology. Consider sweeping the radius in a 5um to 30um range. </a:t>
+            </a:r>
+            <a:br>
+              <a:rPr lang="en-US" sz="2500" dirty="0"/>
+            </a:br>
+            <a:endParaRPr lang="en-US" sz="2500" b="0" dirty="0">
+              <a:latin typeface="+mj-lt"/>
+              <a:cs typeface="Lucida Sans"/>
+            </a:endParaRPr>
+          </a:p>
+        </p:txBody>
+      </p:sp>
+      <p:pic>
+        <p:nvPicPr>
+          <p:cNvPr id="83" name="Gráfico 82">
+            <a:extLst>
+              <a:ext uri="{FF2B5EF4-FFF2-40B4-BE49-F238E27FC236}">
+                <a16:creationId xmlns:a16="http://schemas.microsoft.com/office/drawing/2014/main" id="{44F58A6F-E893-C84B-50ED-50E27C4DC67B}"/>
+              </a:ext>
+            </a:extLst>
+          </p:cNvPr>
+          <p:cNvPicPr>
+            <a:picLocks noChangeAspect="1"/>
+          </p:cNvPicPr>
+          <p:nvPr/>
+        </p:nvPicPr>
+        <p:blipFill>
+          <a:blip r:embed="rId3">
+            <a:extLst>
+              <a:ext uri="{96DAC541-7B7A-43D3-8B79-37D633B846F1}">
+                <asvg:svgBlip xmlns:asvg="http://schemas.microsoft.com/office/drawing/2016/SVG/main" r:embed="rId4"/>
+              </a:ext>
+            </a:extLst>
+          </a:blip>
+          <a:stretch>
+            <a:fillRect/>
+          </a:stretch>
+        </p:blipFill>
+        <p:spPr>
+          <a:xfrm>
+            <a:off x="5045006" y="6356057"/>
+            <a:ext cx="6409575" cy="363174"/>
+          </a:xfrm>
+          <a:prstGeom prst="rect">
+            <a:avLst/>
+          </a:prstGeom>
+        </p:spPr>
+      </p:pic>
+      <p:sp>
+        <p:nvSpPr>
+          <p:cNvPr id="84" name="Marcador de número de diapositiva 83">
+            <a:extLst>
+              <a:ext uri="{FF2B5EF4-FFF2-40B4-BE49-F238E27FC236}">
+                <a16:creationId xmlns:a16="http://schemas.microsoft.com/office/drawing/2014/main" id="{A6D0AC85-066A-E825-DB4B-6104E5DCF634}"/>
+              </a:ext>
+            </a:extLst>
+          </p:cNvPr>
+          <p:cNvSpPr>
+            <a:spLocks noGrp="1"/>
+          </p:cNvSpPr>
+          <p:nvPr>
+            <p:ph type="sldNum" sz="quarter" idx="7"/>
+          </p:nvPr>
+        </p:nvSpPr>
+        <p:spPr/>
+        <p:txBody>
+          <a:bodyPr/>
+          <a:lstStyle/>
+          <a:p>
+            <a:fld id="{B6F15528-21DE-4FAA-801E-634DDDAF4B2B}" type="slidenum">
+              <a:rPr lang="es-ES" smtClean="0"/>
+              <a:t>13</a:t>
+            </a:fld>
+            <a:endParaRPr lang="es-ES"/>
+          </a:p>
+        </p:txBody>
+      </p:sp>
+      <p:sp>
+        <p:nvSpPr>
+          <p:cNvPr id="3" name="Marcador de pie de página 2">
+            <a:extLst>
+              <a:ext uri="{FF2B5EF4-FFF2-40B4-BE49-F238E27FC236}">
+                <a16:creationId xmlns:a16="http://schemas.microsoft.com/office/drawing/2014/main" id="{0C5A2601-310F-D2C2-25AE-E7A5F5E9E555}"/>
+              </a:ext>
+            </a:extLst>
+          </p:cNvPr>
+          <p:cNvSpPr>
+            <a:spLocks noGrp="1"/>
+          </p:cNvSpPr>
+          <p:nvPr>
+            <p:ph type="ftr" sz="quarter" idx="5"/>
+          </p:nvPr>
+        </p:nvSpPr>
+        <p:spPr/>
+        <p:txBody>
+          <a:bodyPr/>
+          <a:lstStyle/>
+          <a:p>
+            <a:pPr marL="12700">
+              <a:spcBef>
+                <a:spcPts val="15"/>
+              </a:spcBef>
+            </a:pPr>
+            <a:r>
+              <a:rPr lang="es-ES" spc="-5"/>
+              <a:t>LAB 1.0 WAVEGUIDES</a:t>
+            </a:r>
+            <a:endParaRPr lang="es-ES" spc="-5" dirty="0"/>
+          </a:p>
+        </p:txBody>
+      </p:sp>
+      <p:sp>
+        <p:nvSpPr>
+          <p:cNvPr id="2" name="CuadroTexto 1">
+            <a:extLst>
+              <a:ext uri="{FF2B5EF4-FFF2-40B4-BE49-F238E27FC236}">
+                <a16:creationId xmlns:a16="http://schemas.microsoft.com/office/drawing/2014/main" id="{02DCB6B3-3A3C-1858-E0E7-10CB3195D67C}"/>
+              </a:ext>
+            </a:extLst>
+          </p:cNvPr>
+          <p:cNvSpPr txBox="1"/>
+          <p:nvPr/>
+        </p:nvSpPr>
+        <p:spPr>
+          <a:xfrm>
+            <a:off x="609441" y="4860334"/>
+            <a:ext cx="11199971" cy="1200329"/>
+          </a:xfrm>
+          <a:prstGeom prst="rect">
+            <a:avLst/>
+          </a:prstGeom>
+          <a:solidFill>
+            <a:schemeClr val="bg1">
+              <a:lumMod val="95000"/>
+            </a:schemeClr>
+          </a:solidFill>
+          <a:ln w="28575">
+            <a:solidFill>
+              <a:srgbClr val="E0700D"/>
+            </a:solidFill>
+          </a:ln>
+        </p:spPr>
+        <p:txBody>
+          <a:bodyPr wrap="square" rtlCol="0">
+            <a:spAutoFit/>
+          </a:bodyPr>
+          <a:lstStyle/>
+          <a:p>
+            <a:pPr algn="just"/>
+            <a:r>
+              <a:rPr lang="en-US" sz="1200" dirty="0">
+                <a:latin typeface="Arial" panose="020B0604020202020204" pitchFamily="34" charset="0"/>
+                <a:cs typeface="Arial" panose="020B0604020202020204" pitchFamily="34" charset="0"/>
+              </a:rPr>
+              <a:t>a</a:t>
+            </a:r>
+          </a:p>
+          <a:p>
+            <a:pPr algn="just"/>
+            <a:endParaRPr lang="en-US" sz="1200" u="sng" dirty="0">
+              <a:latin typeface="Arial" panose="020B0604020202020204" pitchFamily="34" charset="0"/>
+              <a:cs typeface="Arial" panose="020B0604020202020204" pitchFamily="34" charset="0"/>
+            </a:endParaRPr>
+          </a:p>
+          <a:p>
+            <a:pPr algn="just"/>
+            <a:endParaRPr lang="en-US" sz="1200" dirty="0">
+              <a:latin typeface="Arial" panose="020B0604020202020204" pitchFamily="34" charset="0"/>
+              <a:cs typeface="Arial" panose="020B0604020202020204" pitchFamily="34" charset="0"/>
+            </a:endParaRPr>
+          </a:p>
+          <a:p>
+            <a:pPr algn="just"/>
+            <a:endParaRPr lang="en-US" sz="1200" dirty="0">
+              <a:latin typeface="Arial" panose="020B0604020202020204" pitchFamily="34" charset="0"/>
+              <a:cs typeface="Arial" panose="020B0604020202020204" pitchFamily="34" charset="0"/>
+            </a:endParaRPr>
+          </a:p>
+          <a:p>
+            <a:pPr algn="just"/>
+            <a:endParaRPr lang="en-US" sz="1200" dirty="0">
+              <a:latin typeface="Arial" panose="020B0604020202020204" pitchFamily="34" charset="0"/>
+              <a:cs typeface="Arial" panose="020B0604020202020204" pitchFamily="34" charset="0"/>
+            </a:endParaRPr>
+          </a:p>
+          <a:p>
+            <a:pPr algn="just"/>
+            <a:endParaRPr lang="en-US" sz="1200" dirty="0">
+              <a:latin typeface="Arial" panose="020B0604020202020204" pitchFamily="34" charset="0"/>
+              <a:cs typeface="Arial" panose="020B0604020202020204" pitchFamily="34" charset="0"/>
+            </a:endParaRPr>
+          </a:p>
+        </p:txBody>
+      </p:sp>
+      <p:sp>
+        <p:nvSpPr>
+          <p:cNvPr id="7" name="Rectángulo 6">
+            <a:extLst>
+              <a:ext uri="{FF2B5EF4-FFF2-40B4-BE49-F238E27FC236}">
+                <a16:creationId xmlns:a16="http://schemas.microsoft.com/office/drawing/2014/main" id="{96288F58-55F0-F85E-9BF8-921F152A379D}"/>
+              </a:ext>
+            </a:extLst>
+          </p:cNvPr>
+          <p:cNvSpPr/>
+          <p:nvPr/>
+        </p:nvSpPr>
+        <p:spPr>
+          <a:xfrm>
+            <a:off x="609441" y="1418373"/>
+            <a:ext cx="11199971" cy="3306028"/>
+          </a:xfrm>
+          <a:prstGeom prst="rect">
+            <a:avLst/>
+          </a:prstGeom>
+          <a:noFill/>
+          <a:ln w="28575">
+            <a:solidFill>
+              <a:srgbClr val="E0700D"/>
+            </a:solidFill>
+          </a:ln>
+        </p:spPr>
+        <p:style>
+          <a:lnRef idx="2">
+            <a:schemeClr val="accent1">
+              <a:shade val="15000"/>
+            </a:schemeClr>
+          </a:lnRef>
+          <a:fillRef idx="1">
+            <a:schemeClr val="accent1"/>
+          </a:fillRef>
+          <a:effectRef idx="0">
+            <a:schemeClr val="accent1"/>
+          </a:effectRef>
+          <a:fontRef idx="minor">
+            <a:schemeClr val="lt1"/>
+          </a:fontRef>
+        </p:style>
+        <p:txBody>
+          <a:bodyPr rtlCol="0" anchor="ctr"/>
+          <a:lstStyle/>
+          <a:p>
+            <a:pPr algn="ctr"/>
+            <a:endParaRPr lang="en-US"/>
+          </a:p>
+        </p:txBody>
+      </p:sp>
+    </p:spTree>
+    <p:extLst>
+      <p:ext uri="{BB962C8B-B14F-4D97-AF65-F5344CB8AC3E}">
+        <p14:creationId xmlns:p14="http://schemas.microsoft.com/office/powerpoint/2010/main" val="3390498920"/>
+      </p:ext>
+    </p:extLst>
+  </p:cSld>
+  <p:clrMapOvr>
+    <a:masterClrMapping/>
+  </p:clrMapOvr>
+</p:sld>
+</file>
+
+<file path=ppt/slides/slide14.xml><?xml version="1.0" encoding="utf-8"?>
+<p:sld xmlns:a="http://schemas.openxmlformats.org/drawingml/2006/main" xmlns:r="http://schemas.openxmlformats.org/officeDocument/2006/relationships" xmlns:p="http://schemas.openxmlformats.org/presentationml/2006/main">
+  <p:cSld>
+    <p:spTree>
+      <p:nvGrpSpPr>
+        <p:cNvPr id="1" name="">
+          <a:extLst>
+            <a:ext uri="{FF2B5EF4-FFF2-40B4-BE49-F238E27FC236}">
+              <a16:creationId xmlns:a16="http://schemas.microsoft.com/office/drawing/2014/main" id="{5F793372-9B7F-3F8B-66BA-A27873B241DA}"/>
+            </a:ext>
+          </a:extLst>
+        </p:cNvPr>
+        <p:cNvGrpSpPr/>
+        <p:nvPr/>
+      </p:nvGrpSpPr>
+      <p:grpSpPr>
+        <a:xfrm>
+          <a:off x="0" y="0"/>
+          <a:ext cx="0" cy="0"/>
+          <a:chOff x="0" y="0"/>
+          <a:chExt cx="0" cy="0"/>
+        </a:xfrm>
+      </p:grpSpPr>
+      <p:sp>
+        <p:nvSpPr>
+          <p:cNvPr id="16" name="object 16">
+            <a:extLst>
+              <a:ext uri="{FF2B5EF4-FFF2-40B4-BE49-F238E27FC236}">
+                <a16:creationId xmlns:a16="http://schemas.microsoft.com/office/drawing/2014/main" id="{F5E49F78-BF77-6C19-547B-D0618B73E681}"/>
+              </a:ext>
+            </a:extLst>
+          </p:cNvPr>
+          <p:cNvSpPr txBox="1">
+            <a:spLocks noGrp="1"/>
+          </p:cNvSpPr>
+          <p:nvPr>
+            <p:ph type="title"/>
+          </p:nvPr>
+        </p:nvSpPr>
+        <p:spPr>
+          <a:xfrm>
+            <a:off x="685800" y="408883"/>
+            <a:ext cx="10994410" cy="1090042"/>
+          </a:xfrm>
+          <a:prstGeom prst="rect">
+            <a:avLst/>
+          </a:prstGeom>
+        </p:spPr>
+        <p:txBody>
+          <a:bodyPr vert="horz" wrap="square" lIns="0" tIns="12700" rIns="0" bIns="0" rtlCol="0">
+            <a:spAutoFit/>
+          </a:bodyPr>
+          <a:lstStyle/>
+          <a:p>
+            <a:pPr marL="12700">
+              <a:spcBef>
+                <a:spcPts val="100"/>
+              </a:spcBef>
+            </a:pPr>
+            <a:r>
+              <a:rPr lang="en-US" sz="2500" dirty="0"/>
+              <a:t># EXTRA - Comparative</a:t>
+            </a:r>
+            <a:br>
+              <a:rPr lang="en-US" sz="2500" dirty="0"/>
+            </a:br>
+            <a:r>
+              <a:rPr lang="es-ES" dirty="0"/>
+              <a:t>4. </a:t>
+            </a:r>
+            <a:r>
+              <a:rPr lang="es-ES" b="0" dirty="0"/>
+              <a:t>Compare </a:t>
+            </a:r>
+            <a:r>
+              <a:rPr lang="es-ES" b="0" dirty="0" err="1"/>
+              <a:t>the</a:t>
+            </a:r>
+            <a:r>
+              <a:rPr lang="es-ES" b="0" dirty="0"/>
+              <a:t> </a:t>
+            </a:r>
+            <a:r>
+              <a:rPr lang="es-ES" b="0" dirty="0" err="1"/>
+              <a:t>SiNx</a:t>
+            </a:r>
+            <a:r>
+              <a:rPr lang="es-ES" b="0" dirty="0"/>
+              <a:t> and SOI </a:t>
+            </a:r>
+            <a:r>
+              <a:rPr lang="es-ES" b="0" dirty="0" err="1"/>
+              <a:t>technologies</a:t>
+            </a:r>
+            <a:br>
+              <a:rPr lang="es-ES" b="0" dirty="0"/>
+            </a:br>
+            <a:endParaRPr lang="en-US" sz="2500" b="0" dirty="0">
+              <a:latin typeface="+mj-lt"/>
+              <a:cs typeface="Lucida Sans"/>
+            </a:endParaRPr>
+          </a:p>
+        </p:txBody>
+      </p:sp>
+      <p:pic>
+        <p:nvPicPr>
+          <p:cNvPr id="83" name="Gráfico 82">
+            <a:extLst>
+              <a:ext uri="{FF2B5EF4-FFF2-40B4-BE49-F238E27FC236}">
+                <a16:creationId xmlns:a16="http://schemas.microsoft.com/office/drawing/2014/main" id="{8BF27F03-405A-B058-6A48-6D09BA87FA04}"/>
+              </a:ext>
+            </a:extLst>
+          </p:cNvPr>
+          <p:cNvPicPr>
+            <a:picLocks noChangeAspect="1"/>
+          </p:cNvPicPr>
+          <p:nvPr/>
+        </p:nvPicPr>
+        <p:blipFill>
+          <a:blip r:embed="rId3">
+            <a:extLst>
+              <a:ext uri="{96DAC541-7B7A-43D3-8B79-37D633B846F1}">
+                <asvg:svgBlip xmlns:asvg="http://schemas.microsoft.com/office/drawing/2016/SVG/main" r:embed="rId4"/>
+              </a:ext>
+            </a:extLst>
+          </a:blip>
+          <a:stretch>
+            <a:fillRect/>
+          </a:stretch>
+        </p:blipFill>
+        <p:spPr>
+          <a:xfrm>
+            <a:off x="5045006" y="6356057"/>
+            <a:ext cx="6409575" cy="363174"/>
+          </a:xfrm>
+          <a:prstGeom prst="rect">
+            <a:avLst/>
+          </a:prstGeom>
+        </p:spPr>
+      </p:pic>
+      <p:sp>
+        <p:nvSpPr>
+          <p:cNvPr id="84" name="Marcador de número de diapositiva 83">
+            <a:extLst>
+              <a:ext uri="{FF2B5EF4-FFF2-40B4-BE49-F238E27FC236}">
+                <a16:creationId xmlns:a16="http://schemas.microsoft.com/office/drawing/2014/main" id="{16C77210-3168-5AE1-488E-E190BB6C0E52}"/>
+              </a:ext>
+            </a:extLst>
+          </p:cNvPr>
+          <p:cNvSpPr>
+            <a:spLocks noGrp="1"/>
+          </p:cNvSpPr>
+          <p:nvPr>
+            <p:ph type="sldNum" sz="quarter" idx="7"/>
+          </p:nvPr>
+        </p:nvSpPr>
+        <p:spPr/>
+        <p:txBody>
+          <a:bodyPr/>
+          <a:lstStyle/>
+          <a:p>
+            <a:fld id="{B6F15528-21DE-4FAA-801E-634DDDAF4B2B}" type="slidenum">
+              <a:rPr lang="es-ES" smtClean="0"/>
+              <a:t>14</a:t>
+            </a:fld>
+            <a:endParaRPr lang="es-ES"/>
+          </a:p>
+        </p:txBody>
+      </p:sp>
+      <p:sp>
+        <p:nvSpPr>
+          <p:cNvPr id="3" name="Marcador de pie de página 2">
+            <a:extLst>
+              <a:ext uri="{FF2B5EF4-FFF2-40B4-BE49-F238E27FC236}">
+                <a16:creationId xmlns:a16="http://schemas.microsoft.com/office/drawing/2014/main" id="{9BAA289B-80F5-66DC-E4D9-D509FB485DA7}"/>
+              </a:ext>
+            </a:extLst>
+          </p:cNvPr>
+          <p:cNvSpPr>
+            <a:spLocks noGrp="1"/>
+          </p:cNvSpPr>
+          <p:nvPr>
+            <p:ph type="ftr" sz="quarter" idx="5"/>
+          </p:nvPr>
+        </p:nvSpPr>
+        <p:spPr/>
+        <p:txBody>
+          <a:bodyPr/>
+          <a:lstStyle/>
+          <a:p>
+            <a:pPr marL="12700">
+              <a:spcBef>
+                <a:spcPts val="15"/>
+              </a:spcBef>
+            </a:pPr>
+            <a:r>
+              <a:rPr lang="es-ES" spc="-5"/>
+              <a:t>LAB 1.0 WAVEGUIDES</a:t>
+            </a:r>
+            <a:endParaRPr lang="es-ES" spc="-5" dirty="0"/>
+          </a:p>
+        </p:txBody>
+      </p:sp>
+      <p:sp>
+        <p:nvSpPr>
+          <p:cNvPr id="2" name="CuadroTexto 1">
+            <a:extLst>
+              <a:ext uri="{FF2B5EF4-FFF2-40B4-BE49-F238E27FC236}">
+                <a16:creationId xmlns:a16="http://schemas.microsoft.com/office/drawing/2014/main" id="{81E77402-20CB-B5B9-6221-36355FD8F679}"/>
+              </a:ext>
+            </a:extLst>
+          </p:cNvPr>
+          <p:cNvSpPr txBox="1"/>
+          <p:nvPr/>
+        </p:nvSpPr>
+        <p:spPr>
+          <a:xfrm>
+            <a:off x="609441" y="4860334"/>
+            <a:ext cx="11199971" cy="1015663"/>
+          </a:xfrm>
+          <a:prstGeom prst="rect">
+            <a:avLst/>
+          </a:prstGeom>
+          <a:solidFill>
+            <a:schemeClr val="bg1">
+              <a:lumMod val="95000"/>
+            </a:schemeClr>
+          </a:solidFill>
+          <a:ln w="28575">
+            <a:solidFill>
+              <a:srgbClr val="E0700D"/>
+            </a:solidFill>
+          </a:ln>
+        </p:spPr>
+        <p:txBody>
+          <a:bodyPr wrap="square" rtlCol="0">
+            <a:spAutoFit/>
+          </a:bodyPr>
+          <a:lstStyle/>
+          <a:p>
+            <a:pPr algn="just"/>
+            <a:r>
+              <a:rPr lang="en-US" sz="1200" u="sng" dirty="0">
+                <a:latin typeface="Arial" panose="020B0604020202020204" pitchFamily="34" charset="0"/>
+                <a:cs typeface="Arial" panose="020B0604020202020204" pitchFamily="34" charset="0"/>
+              </a:rPr>
+              <a:t>aa</a:t>
+            </a:r>
+          </a:p>
+          <a:p>
+            <a:pPr algn="just"/>
+            <a:endParaRPr lang="en-US" sz="1200" dirty="0">
+              <a:latin typeface="Arial" panose="020B0604020202020204" pitchFamily="34" charset="0"/>
+              <a:cs typeface="Arial" panose="020B0604020202020204" pitchFamily="34" charset="0"/>
+            </a:endParaRPr>
+          </a:p>
+          <a:p>
+            <a:pPr algn="just"/>
+            <a:endParaRPr lang="en-US" sz="1200" dirty="0">
+              <a:latin typeface="Arial" panose="020B0604020202020204" pitchFamily="34" charset="0"/>
+              <a:cs typeface="Arial" panose="020B0604020202020204" pitchFamily="34" charset="0"/>
+            </a:endParaRPr>
+          </a:p>
+          <a:p>
+            <a:pPr algn="just"/>
+            <a:endParaRPr lang="en-US" sz="1200" dirty="0">
+              <a:latin typeface="Arial" panose="020B0604020202020204" pitchFamily="34" charset="0"/>
+              <a:cs typeface="Arial" panose="020B0604020202020204" pitchFamily="34" charset="0"/>
+            </a:endParaRPr>
+          </a:p>
+          <a:p>
+            <a:pPr algn="just"/>
+            <a:endParaRPr lang="en-US" sz="1200" dirty="0">
+              <a:latin typeface="Arial" panose="020B0604020202020204" pitchFamily="34" charset="0"/>
+              <a:cs typeface="Arial" panose="020B0604020202020204" pitchFamily="34" charset="0"/>
+            </a:endParaRPr>
+          </a:p>
+        </p:txBody>
+      </p:sp>
+      <p:sp>
+        <p:nvSpPr>
+          <p:cNvPr id="7" name="Rectángulo 6">
+            <a:extLst>
+              <a:ext uri="{FF2B5EF4-FFF2-40B4-BE49-F238E27FC236}">
+                <a16:creationId xmlns:a16="http://schemas.microsoft.com/office/drawing/2014/main" id="{2E31592D-03C8-77E9-9305-A5B7EBAC2856}"/>
+              </a:ext>
+            </a:extLst>
+          </p:cNvPr>
+          <p:cNvSpPr/>
+          <p:nvPr/>
+        </p:nvSpPr>
+        <p:spPr>
+          <a:xfrm>
+            <a:off x="609441" y="1418373"/>
+            <a:ext cx="11199971" cy="3306028"/>
+          </a:xfrm>
+          <a:prstGeom prst="rect">
+            <a:avLst/>
+          </a:prstGeom>
+          <a:noFill/>
+          <a:ln w="28575">
+            <a:solidFill>
+              <a:srgbClr val="E0700D"/>
+            </a:solidFill>
+          </a:ln>
+        </p:spPr>
+        <p:style>
+          <a:lnRef idx="2">
+            <a:schemeClr val="accent1">
+              <a:shade val="15000"/>
+            </a:schemeClr>
+          </a:lnRef>
+          <a:fillRef idx="1">
+            <a:schemeClr val="accent1"/>
+          </a:fillRef>
+          <a:effectRef idx="0">
+            <a:schemeClr val="accent1"/>
+          </a:effectRef>
+          <a:fontRef idx="minor">
+            <a:schemeClr val="lt1"/>
+          </a:fontRef>
+        </p:style>
+        <p:txBody>
+          <a:bodyPr rtlCol="0" anchor="ctr"/>
+          <a:lstStyle/>
+          <a:p>
+            <a:pPr algn="ctr"/>
+            <a:endParaRPr lang="en-US"/>
+          </a:p>
+        </p:txBody>
+      </p:sp>
+    </p:spTree>
+    <p:extLst>
+      <p:ext uri="{BB962C8B-B14F-4D97-AF65-F5344CB8AC3E}">
+        <p14:creationId xmlns:p14="http://schemas.microsoft.com/office/powerpoint/2010/main" val="3164561370"/>
+      </p:ext>
+    </p:extLst>
+  </p:cSld>
+  <p:clrMapOvr>
+    <a:masterClrMapping/>
+  </p:clrMapOvr>
+</p:sld>
+</file>
+
+<file path=ppt/slides/slide15.xml><?xml version="1.0" encoding="utf-8"?>
+<p:sld xmlns:a="http://schemas.openxmlformats.org/drawingml/2006/main" xmlns:r="http://schemas.openxmlformats.org/officeDocument/2006/relationships" xmlns:p="http://schemas.openxmlformats.org/presentationml/2006/main">
+  <p:cSld>
+    <p:spTree>
+      <p:nvGrpSpPr>
         <p:cNvPr id="1" name=""/>
         <p:cNvGrpSpPr/>
         <p:nvPr/>
@@ -3763,7 +5684,7 @@
           <a:p>
             <a:fld id="{B6F15528-21DE-4FAA-801E-634DDDAF4B2B}" type="slidenum">
               <a:rPr lang="es-ES" smtClean="0"/>
-              <a:t>11</a:t>
+              <a:t>15</a:t>
             </a:fld>
             <a:endParaRPr lang="es-ES"/>
           </a:p>

--- a/LabBook_10.pptx
+++ b/LabBook_10.pptx
@@ -3899,7 +3899,7 @@
         <p:spPr>
           <a:xfrm>
             <a:off x="609441" y="1418373"/>
-            <a:ext cx="11199971" cy="3306028"/>
+            <a:ext cx="5484812" cy="3306028"/>
           </a:xfrm>
           <a:prstGeom prst="rect">
             <a:avLst/>
@@ -3936,57 +3936,6 @@
           </a:p>
         </p:txBody>
       </p:sp>
-      <p:sp>
-        <p:nvSpPr>
-          <p:cNvPr id="8" name="CuadroTexto 7">
-            <a:extLst>
-              <a:ext uri="{FF2B5EF4-FFF2-40B4-BE49-F238E27FC236}">
-                <a16:creationId xmlns:a16="http://schemas.microsoft.com/office/drawing/2014/main" id="{331EBD86-BA6C-68C9-2D38-FC8CFBA7ADC4}"/>
-              </a:ext>
-            </a:extLst>
-          </p:cNvPr>
-          <p:cNvSpPr txBox="1"/>
-          <p:nvPr/>
-        </p:nvSpPr>
-        <p:spPr>
-          <a:xfrm>
-            <a:off x="2978141" y="2784355"/>
-            <a:ext cx="6235717" cy="923330"/>
-          </a:xfrm>
-          <a:prstGeom prst="rect">
-            <a:avLst/>
-          </a:prstGeom>
-          <a:noFill/>
-        </p:spPr>
-        <p:txBody>
-          <a:bodyPr wrap="square" rtlCol="0">
-            <a:spAutoFit/>
-          </a:bodyPr>
-          <a:lstStyle/>
-          <a:p>
-            <a:pPr algn="ctr"/>
-            <a:r>
-              <a:rPr lang="en-US" b="1" dirty="0"/>
-              <a:t>deep</a:t>
-            </a:r>
-            <a:r>
-              <a:rPr lang="en-US" dirty="0"/>
-              <a:t> waveguide</a:t>
-            </a:r>
-          </a:p>
-          <a:p>
-            <a:pPr algn="ctr"/>
-            <a:endParaRPr lang="en-US" dirty="0"/>
-          </a:p>
-          <a:p>
-            <a:pPr algn="ctr"/>
-            <a:r>
-              <a:rPr lang="en-US" dirty="0"/>
-              <a:t>Paste Total Loss (dB/90º) vs R &amp; neff_TE0 vs R</a:t>
-            </a:r>
-          </a:p>
-        </p:txBody>
-      </p:sp>
       <p:pic>
         <p:nvPicPr>
           <p:cNvPr id="9" name="Imagen 8">
@@ -4002,15 +3951,20 @@
           <p:nvPr/>
         </p:nvPicPr>
         <p:blipFill>
-          <a:blip r:embed="rId5"/>
-          <a:stretch>
-            <a:fillRect/>
-          </a:stretch>
+          <a:blip r:embed="rId5">
+            <a:extLst>
+              <a:ext uri="{28A0092B-C50C-407E-A947-70E740481C1C}">
+                <a14:useLocalDpi xmlns:a14="http://schemas.microsoft.com/office/drawing/2010/main" val="0"/>
+              </a:ext>
+            </a:extLst>
+          </a:blip>
+          <a:srcRect/>
+          <a:stretch/>
         </p:blipFill>
         <p:spPr>
           <a:xfrm>
-            <a:off x="1524000" y="1739453"/>
-            <a:ext cx="3429000" cy="2708672"/>
+            <a:off x="1370647" y="1538730"/>
+            <a:ext cx="3962400" cy="3130020"/>
           </a:xfrm>
           <a:prstGeom prst="rect">
             <a:avLst/>
@@ -4039,14 +3993,66 @@
         </p:blipFill>
         <p:spPr>
           <a:xfrm>
-            <a:off x="6850725" y="1606918"/>
-            <a:ext cx="3817274" cy="2928937"/>
+            <a:off x="7084512" y="1582601"/>
+            <a:ext cx="3964990" cy="3042277"/>
           </a:xfrm>
           <a:prstGeom prst="rect">
             <a:avLst/>
           </a:prstGeom>
         </p:spPr>
       </p:pic>
+      <p:sp>
+        <p:nvSpPr>
+          <p:cNvPr id="6" name="Rectángulo 5">
+            <a:extLst>
+              <a:ext uri="{FF2B5EF4-FFF2-40B4-BE49-F238E27FC236}">
+                <a16:creationId xmlns:a16="http://schemas.microsoft.com/office/drawing/2014/main" id="{3648DE4D-6003-93D7-5F17-295114C242BF}"/>
+              </a:ext>
+            </a:extLst>
+          </p:cNvPr>
+          <p:cNvSpPr/>
+          <p:nvPr/>
+        </p:nvSpPr>
+        <p:spPr>
+          <a:xfrm>
+            <a:off x="6324601" y="1418373"/>
+            <a:ext cx="5484812" cy="3306028"/>
+          </a:xfrm>
+          <a:prstGeom prst="rect">
+            <a:avLst/>
+          </a:prstGeom>
+          <a:noFill/>
+          <a:ln w="28575">
+            <a:solidFill>
+              <a:srgbClr val="E0700D"/>
+            </a:solidFill>
+          </a:ln>
+        </p:spPr>
+        <p:style>
+          <a:lnRef idx="2">
+            <a:schemeClr val="accent1">
+              <a:shade val="15000"/>
+            </a:schemeClr>
+          </a:lnRef>
+          <a:fillRef idx="1">
+            <a:schemeClr val="accent1"/>
+          </a:fillRef>
+          <a:effectRef idx="0">
+            <a:schemeClr val="accent1"/>
+          </a:effectRef>
+          <a:fontRef idx="minor">
+            <a:schemeClr val="lt1"/>
+          </a:fontRef>
+        </p:style>
+        <p:txBody>
+          <a:bodyPr rtlCol="0" anchor="ctr"/>
+          <a:lstStyle/>
+          <a:p>
+            <a:pPr algn="ctr"/>
+            <a:endParaRPr lang="en-US"/>
+          </a:p>
+        </p:txBody>
+      </p:sp>
     </p:spTree>
     <p:extLst>
       <p:ext uri="{BB962C8B-B14F-4D97-AF65-F5344CB8AC3E}">
@@ -4449,8 +4455,8 @@
         </p:blipFill>
         <p:spPr>
           <a:xfrm>
-            <a:off x="1074403" y="1765908"/>
-            <a:ext cx="4798341" cy="2799032"/>
+            <a:off x="1213329" y="1846948"/>
+            <a:ext cx="4659415" cy="2717992"/>
           </a:xfrm>
           <a:prstGeom prst="rect">
             <a:avLst/>
@@ -4857,6 +4863,36 @@
           </a:p>
         </p:txBody>
       </p:sp>
+      <p:pic>
+        <p:nvPicPr>
+          <p:cNvPr id="6" name="Imagen 5">
+            <a:extLst>
+              <a:ext uri="{FF2B5EF4-FFF2-40B4-BE49-F238E27FC236}">
+                <a16:creationId xmlns:a16="http://schemas.microsoft.com/office/drawing/2014/main" id="{61B0329E-6D40-5235-A888-35A3376E9B5D}"/>
+              </a:ext>
+            </a:extLst>
+          </p:cNvPr>
+          <p:cNvPicPr>
+            <a:picLocks noChangeAspect="1"/>
+          </p:cNvPicPr>
+          <p:nvPr/>
+        </p:nvPicPr>
+        <p:blipFill>
+          <a:blip r:embed="rId5"/>
+          <a:stretch>
+            <a:fillRect/>
+          </a:stretch>
+        </p:blipFill>
+        <p:spPr>
+          <a:xfrm>
+            <a:off x="3372871" y="1271374"/>
+            <a:ext cx="5667428" cy="3299252"/>
+          </a:xfrm>
+          <a:prstGeom prst="rect">
+            <a:avLst/>
+          </a:prstGeom>
+        </p:spPr>
+      </p:pic>
     </p:spTree>
     <p:extLst>
       <p:ext uri="{BB962C8B-B14F-4D97-AF65-F5344CB8AC3E}">
@@ -5136,12 +5172,72 @@
           </a:p>
         </p:txBody>
       </p:sp>
-      <p:sp>
-        <p:nvSpPr>
-          <p:cNvPr id="7" name="Rectángulo 6">
-            <a:extLst>
-              <a:ext uri="{FF2B5EF4-FFF2-40B4-BE49-F238E27FC236}">
-                <a16:creationId xmlns:a16="http://schemas.microsoft.com/office/drawing/2014/main" id="{96288F58-55F0-F85E-9BF8-921F152A379D}"/>
+      <p:pic>
+        <p:nvPicPr>
+          <p:cNvPr id="5" name="Imagen 4">
+            <a:extLst>
+              <a:ext uri="{FF2B5EF4-FFF2-40B4-BE49-F238E27FC236}">
+                <a16:creationId xmlns:a16="http://schemas.microsoft.com/office/drawing/2014/main" id="{C9D037FD-73B4-43A9-F104-658A35532598}"/>
+              </a:ext>
+            </a:extLst>
+          </p:cNvPr>
+          <p:cNvPicPr>
+            <a:picLocks noChangeAspect="1"/>
+          </p:cNvPicPr>
+          <p:nvPr/>
+        </p:nvPicPr>
+        <p:blipFill>
+          <a:blip r:embed="rId5"/>
+          <a:stretch>
+            <a:fillRect/>
+          </a:stretch>
+        </p:blipFill>
+        <p:spPr>
+          <a:xfrm>
+            <a:off x="1389697" y="1571670"/>
+            <a:ext cx="3924300" cy="3057460"/>
+          </a:xfrm>
+          <a:prstGeom prst="rect">
+            <a:avLst/>
+          </a:prstGeom>
+        </p:spPr>
+      </p:pic>
+      <p:pic>
+        <p:nvPicPr>
+          <p:cNvPr id="8" name="Imagen 7">
+            <a:extLst>
+              <a:ext uri="{FF2B5EF4-FFF2-40B4-BE49-F238E27FC236}">
+                <a16:creationId xmlns:a16="http://schemas.microsoft.com/office/drawing/2014/main" id="{12023A00-8315-8679-AF53-7F0834878E82}"/>
+              </a:ext>
+            </a:extLst>
+          </p:cNvPr>
+          <p:cNvPicPr>
+            <a:picLocks noChangeAspect="1"/>
+          </p:cNvPicPr>
+          <p:nvPr/>
+        </p:nvPicPr>
+        <p:blipFill>
+          <a:blip r:embed="rId6"/>
+          <a:stretch>
+            <a:fillRect/>
+          </a:stretch>
+        </p:blipFill>
+        <p:spPr>
+          <a:xfrm>
+            <a:off x="6969447" y="1520808"/>
+            <a:ext cx="4195120" cy="3218852"/>
+          </a:xfrm>
+          <a:prstGeom prst="rect">
+            <a:avLst/>
+          </a:prstGeom>
+        </p:spPr>
+      </p:pic>
+      <p:sp>
+        <p:nvSpPr>
+          <p:cNvPr id="9" name="Rectángulo 8">
+            <a:extLst>
+              <a:ext uri="{FF2B5EF4-FFF2-40B4-BE49-F238E27FC236}">
+                <a16:creationId xmlns:a16="http://schemas.microsoft.com/office/drawing/2014/main" id="{BF1B392D-339F-B2E5-3746-0D3EC9259B0D}"/>
               </a:ext>
             </a:extLst>
           </p:cNvPr>
@@ -5151,7 +5247,59 @@
         <p:spPr>
           <a:xfrm>
             <a:off x="609441" y="1418373"/>
-            <a:ext cx="11199971" cy="3306028"/>
+            <a:ext cx="5484812" cy="3306028"/>
+          </a:xfrm>
+          <a:prstGeom prst="rect">
+            <a:avLst/>
+          </a:prstGeom>
+          <a:noFill/>
+          <a:ln w="28575">
+            <a:solidFill>
+              <a:srgbClr val="E0700D"/>
+            </a:solidFill>
+          </a:ln>
+        </p:spPr>
+        <p:style>
+          <a:lnRef idx="2">
+            <a:schemeClr val="accent1">
+              <a:shade val="15000"/>
+            </a:schemeClr>
+          </a:lnRef>
+          <a:fillRef idx="1">
+            <a:schemeClr val="accent1"/>
+          </a:fillRef>
+          <a:effectRef idx="0">
+            <a:schemeClr val="accent1"/>
+          </a:effectRef>
+          <a:fontRef idx="minor">
+            <a:schemeClr val="lt1"/>
+          </a:fontRef>
+        </p:style>
+        <p:txBody>
+          <a:bodyPr rtlCol="0" anchor="ctr"/>
+          <a:lstStyle/>
+          <a:p>
+            <a:pPr algn="ctr"/>
+            <a:endParaRPr lang="en-US"/>
+          </a:p>
+        </p:txBody>
+      </p:sp>
+      <p:sp>
+        <p:nvSpPr>
+          <p:cNvPr id="10" name="Rectángulo 9">
+            <a:extLst>
+              <a:ext uri="{FF2B5EF4-FFF2-40B4-BE49-F238E27FC236}">
+                <a16:creationId xmlns:a16="http://schemas.microsoft.com/office/drawing/2014/main" id="{23BA1AB5-759C-50A0-873A-DF0F65647685}"/>
+              </a:ext>
+            </a:extLst>
+          </p:cNvPr>
+          <p:cNvSpPr/>
+          <p:nvPr/>
+        </p:nvSpPr>
+        <p:spPr>
+          <a:xfrm>
+            <a:off x="6324601" y="1418373"/>
+            <a:ext cx="5484812" cy="3306028"/>
           </a:xfrm>
           <a:prstGeom prst="rect">
             <a:avLst/>
@@ -10655,57 +10803,6 @@
           </a:p>
         </p:txBody>
       </p:sp>
-      <p:sp>
-        <p:nvSpPr>
-          <p:cNvPr id="8" name="CuadroTexto 7">
-            <a:extLst>
-              <a:ext uri="{FF2B5EF4-FFF2-40B4-BE49-F238E27FC236}">
-                <a16:creationId xmlns:a16="http://schemas.microsoft.com/office/drawing/2014/main" id="{1EF5BFDA-8EC1-8C73-A932-F36C4DB93C73}"/>
-              </a:ext>
-            </a:extLst>
-          </p:cNvPr>
-          <p:cNvSpPr txBox="1"/>
-          <p:nvPr/>
-        </p:nvSpPr>
-        <p:spPr>
-          <a:xfrm>
-            <a:off x="2286000" y="2671278"/>
-            <a:ext cx="7718580" cy="923330"/>
-          </a:xfrm>
-          <a:prstGeom prst="rect">
-            <a:avLst/>
-          </a:prstGeom>
-          <a:noFill/>
-        </p:spPr>
-        <p:txBody>
-          <a:bodyPr wrap="square" rtlCol="0">
-            <a:spAutoFit/>
-          </a:bodyPr>
-          <a:lstStyle/>
-          <a:p>
-            <a:pPr algn="ctr"/>
-            <a:r>
-              <a:rPr lang="en-US" b="1" dirty="0"/>
-              <a:t>deep</a:t>
-            </a:r>
-            <a:r>
-              <a:rPr lang="en-US" dirty="0"/>
-              <a:t> waveguide</a:t>
-            </a:r>
-          </a:p>
-          <a:p>
-            <a:pPr algn="ctr"/>
-            <a:endParaRPr lang="en-US" dirty="0"/>
-          </a:p>
-          <a:p>
-            <a:pPr algn="ctr"/>
-            <a:r>
-              <a:rPr lang="en-US" dirty="0"/>
-              <a:t>Paste plot here</a:t>
-            </a:r>
-          </a:p>
-        </p:txBody>
-      </p:sp>
       <p:pic>
         <p:nvPicPr>
           <p:cNvPr id="9" name="Imagen 8" descr="Gráfico, Gráfico de líneas&#10;&#10;El contenido generado por IA puede ser incorrecto.">
@@ -10728,8 +10825,8 @@
         </p:blipFill>
         <p:spPr>
           <a:xfrm>
-            <a:off x="3335678" y="1472023"/>
-            <a:ext cx="5520643" cy="3213803"/>
+            <a:off x="3380321" y="1516121"/>
+            <a:ext cx="5431357" cy="3161826"/>
           </a:xfrm>
           <a:prstGeom prst="rect">
             <a:avLst/>

--- a/LabBook_10.pptx
+++ b/LabBook_10.pptx
@@ -159,8 +159,8 @@
       <pc:docMk xmlns:pc="http://schemas.microsoft.com/office/powerpoint/2013/main/command"/>
       <pc:sldMk xmlns:pc="http://schemas.microsoft.com/office/powerpoint/2013/main/command" cId="3712356003" sldId="291"/>
       <ac:spMk id="2" creationId="{CA5F0FDF-2A95-453B-4ECA-AEB637FF2694}"/>
-      <ac:txMk cp="551" len="19">
-        <ac:context len="794" hash="3334446828"/>
+      <ac:txMk cp="641">
+        <ac:context len="1042" hash="1794452772"/>
       </ac:txMk>
     </ac:txMkLst>
     <p188:pos x="1541092" y="1159933"/>
@@ -8492,7 +8492,7 @@
         <p:spPr>
           <a:xfrm>
             <a:off x="381000" y="3746858"/>
-            <a:ext cx="11199971" cy="1569660"/>
+            <a:ext cx="11199971" cy="1200329"/>
           </a:xfrm>
           <a:prstGeom prst="rect">
             <a:avLst/>
@@ -8520,7 +8520,21 @@
                 <a:latin typeface="Arial" panose="020B0604020202020204" pitchFamily="34" charset="0"/>
                 <a:cs typeface="Arial" panose="020B0604020202020204" pitchFamily="34" charset="0"/>
               </a:rPr>
-              <a:t>Las gráficas muestran la variación del índice de refracción (n) en función de la longitud de onda para el silicio, el nitruro de silicio y el dióxido de silicio. En los tres materiales se observa una ligera disminución de n a medida que aumenta la longitud de onda que puede dar lugar a dispersión cromática. Asimismo, se aprecia que cada material presenta un valor de índice de refracción distinto, lo que influye en el confinamiento y la propagación en la guía.</a:t>
+              <a:t>Las gráficas muestran la variación del índice de refracción (n) en función de la longitud de onda para el silicio (Si), el nitruro de silicio (</a:t>
+            </a:r>
+            <a:r>
+              <a:rPr lang="es-ES" sz="1200" dirty="0" err="1">
+                <a:latin typeface="Arial" panose="020B0604020202020204" pitchFamily="34" charset="0"/>
+                <a:cs typeface="Arial" panose="020B0604020202020204" pitchFamily="34" charset="0"/>
+              </a:rPr>
+              <a:t>SiNx</a:t>
+            </a:r>
+            <a:r>
+              <a:rPr lang="es-ES" sz="1200" dirty="0">
+                <a:latin typeface="Arial" panose="020B0604020202020204" pitchFamily="34" charset="0"/>
+                <a:cs typeface="Arial" panose="020B0604020202020204" pitchFamily="34" charset="0"/>
+              </a:rPr>
+              <a:t>) y el dióxido de silicio (SiO2). En los tres materiales se observa una ligera disminución de n a medida que aumenta la longitud de onda que puede dar lugar a dispersión cromática. Asimismo, se aprecia que cada material presenta un valor de índice de refracción distinto, lo que influye en el confinamiento y la propagación en la guía.</a:t>
             </a:r>
           </a:p>
           <a:p>
@@ -8534,28 +8548,34 @@
             <a:pPr algn="just"/>
             <a:r>
               <a:rPr lang="es-ES" sz="1200" dirty="0">
-                <a:solidFill>
-                  <a:srgbClr val="FF0000"/>
-                </a:solidFill>
-                <a:latin typeface="Arial" panose="020B0604020202020204" pitchFamily="34" charset="0"/>
-                <a:cs typeface="Arial" panose="020B0604020202020204" pitchFamily="34" charset="0"/>
-              </a:rPr>
-              <a:t>COMENTAR QUE EL SIO2 ES CUBIERTA Y LOS OTROS DOS SON NUCLEO</a:t>
-            </a:r>
-          </a:p>
-          <a:p>
-            <a:pPr algn="just"/>
-            <a:endParaRPr lang="es-ES" sz="1200" dirty="0">
-              <a:latin typeface="Arial" panose="020B0604020202020204" pitchFamily="34" charset="0"/>
-              <a:cs typeface="Arial" panose="020B0604020202020204" pitchFamily="34" charset="0"/>
-            </a:endParaRPr>
-          </a:p>
-          <a:p>
-            <a:pPr algn="just"/>
-            <a:endParaRPr lang="es-ES" sz="1200" dirty="0">
-              <a:latin typeface="Arial" panose="020B0604020202020204" pitchFamily="34" charset="0"/>
-              <a:cs typeface="Arial" panose="020B0604020202020204" pitchFamily="34" charset="0"/>
-            </a:endParaRPr>
+                <a:highlight>
+                  <a:srgbClr val="FFFF00"/>
+                </a:highlight>
+                <a:latin typeface="Arial" panose="020B0604020202020204" pitchFamily="34" charset="0"/>
+                <a:cs typeface="Arial" panose="020B0604020202020204" pitchFamily="34" charset="0"/>
+              </a:rPr>
+              <a:t>En concreto, los materiales Si y </a:t>
+            </a:r>
+            <a:r>
+              <a:rPr lang="es-ES" sz="1200" dirty="0" err="1">
+                <a:highlight>
+                  <a:srgbClr val="FFFF00"/>
+                </a:highlight>
+                <a:latin typeface="Arial" panose="020B0604020202020204" pitchFamily="34" charset="0"/>
+                <a:cs typeface="Arial" panose="020B0604020202020204" pitchFamily="34" charset="0"/>
+              </a:rPr>
+              <a:t>SiNx</a:t>
+            </a:r>
+            <a:r>
+              <a:rPr lang="es-ES" sz="1200" dirty="0">
+                <a:highlight>
+                  <a:srgbClr val="FFFF00"/>
+                </a:highlight>
+                <a:latin typeface="Arial" panose="020B0604020202020204" pitchFamily="34" charset="0"/>
+                <a:cs typeface="Arial" panose="020B0604020202020204" pitchFamily="34" charset="0"/>
+              </a:rPr>
+              <a:t> se van a usar como núcleo y el SiO2 como cubierta en esta práctica.</a:t>
+            </a:r>
           </a:p>
           <a:p>
             <a:pPr algn="just"/>
@@ -9405,10 +9425,20 @@
             <a:pPr algn="just"/>
             <a:r>
               <a:rPr lang="es-ES" sz="1200" dirty="0">
-                <a:latin typeface="Arial" panose="020B0604020202020204" pitchFamily="34" charset="0"/>
-                <a:cs typeface="Arial" panose="020B0604020202020204" pitchFamily="34" charset="0"/>
-              </a:rPr>
-              <a:t>Se observa como el modo TE0 está confinado mayoritariamente en el núcleo al igual que el modo TM0, aunque este está menos confinado. Además, los modos TE1 y TM1 apenas se propagan por el núcleo.</a:t>
+                <a:highlight>
+                  <a:srgbClr val="FFFF00"/>
+                </a:highlight>
+                <a:latin typeface="Arial" panose="020B0604020202020204" pitchFamily="34" charset="0"/>
+                <a:cs typeface="Arial" panose="020B0604020202020204" pitchFamily="34" charset="0"/>
+              </a:rPr>
+              <a:t>Se observa como, en general, los modos TE se distribuyen en horizontal y los TM en vertical.</a:t>
+            </a:r>
+            <a:r>
+              <a:rPr lang="es-ES" sz="1200" dirty="0">
+                <a:latin typeface="Arial" panose="020B0604020202020204" pitchFamily="34" charset="0"/>
+                <a:cs typeface="Arial" panose="020B0604020202020204" pitchFamily="34" charset="0"/>
+              </a:rPr>
+              <a:t> De esta forma, el modo TE0 está confinado mayoritariamente en el núcleo, al igual que el modo TM0, aunque este está menos confinado. Además, los modos TE1 y TM1 apenas se propagan por el núcleo.</a:t>
             </a:r>
           </a:p>
           <a:p>
@@ -9425,6 +9455,9 @@
                 <a:solidFill>
                   <a:srgbClr val="FF0000"/>
                 </a:solidFill>
+                <a:highlight>
+                  <a:srgbClr val="FFFF00"/>
+                </a:highlight>
                 <a:latin typeface="Arial" panose="020B0604020202020204" pitchFamily="34" charset="0"/>
                 <a:cs typeface="Arial" panose="020B0604020202020204" pitchFamily="34" charset="0"/>
               </a:rPr>
@@ -9783,7 +9816,7 @@
         <p:spPr>
           <a:xfrm>
             <a:off x="609441" y="4800600"/>
-            <a:ext cx="11199971" cy="1754326"/>
+            <a:ext cx="11199971" cy="1938992"/>
           </a:xfrm>
           <a:prstGeom prst="rect">
             <a:avLst/>
@@ -9825,13 +9858,19 @@
             <a:pPr algn="just"/>
             <a:r>
               <a:rPr lang="es-ES" sz="1200" dirty="0">
-                <a:latin typeface="Arial" panose="020B0604020202020204" pitchFamily="34" charset="0"/>
-                <a:cs typeface="Arial" panose="020B0604020202020204" pitchFamily="34" charset="0"/>
-              </a:rPr>
-              <a:t>Además, la guía </a:t>
+                <a:highlight>
+                  <a:srgbClr val="FFFF00"/>
+                </a:highlight>
+                <a:latin typeface="Arial" panose="020B0604020202020204" pitchFamily="34" charset="0"/>
+                <a:cs typeface="Arial" panose="020B0604020202020204" pitchFamily="34" charset="0"/>
+              </a:rPr>
+              <a:t>Teniendo esto en cuenta, se observa como la guía </a:t>
             </a:r>
             <a:r>
               <a:rPr lang="es-ES" sz="1200" dirty="0" err="1">
+                <a:highlight>
+                  <a:srgbClr val="FFFF00"/>
+                </a:highlight>
                 <a:latin typeface="Arial" panose="020B0604020202020204" pitchFamily="34" charset="0"/>
                 <a:cs typeface="Arial" panose="020B0604020202020204" pitchFamily="34" charset="0"/>
               </a:rPr>
@@ -9839,10 +9878,13 @@
             </a:r>
             <a:r>
               <a:rPr lang="es-ES" sz="1200" dirty="0">
-                <a:latin typeface="Arial" panose="020B0604020202020204" pitchFamily="34" charset="0"/>
-                <a:cs typeface="Arial" panose="020B0604020202020204" pitchFamily="34" charset="0"/>
-              </a:rPr>
-              <a:t> presenta un comportamiento multimodo, ya que permite la propagación de los modos 0, 1, 2 y 3, mientras que la guía Deep, debido a su menor confinamiento, soporta los modos 0 y 1.</a:t>
+                <a:highlight>
+                  <a:srgbClr val="FFFF00"/>
+                </a:highlight>
+                <a:latin typeface="Arial" panose="020B0604020202020204" pitchFamily="34" charset="0"/>
+                <a:cs typeface="Arial" panose="020B0604020202020204" pitchFamily="34" charset="0"/>
+              </a:rPr>
+              <a:t> presenta un comportamiento multimodo, ya que permite la propagación de los modos guiados 0, 1, 2 y 3, que corresponden a los TE0, TE1, TM0 y TE2, respectivamente. Mientras que la guía Deep, soporta la propagación de los modos guiados 0 y 1, que corresponden a los TE0 y TM0, lo que indica que se comporta como monomodo, ya que los modos 2 y 3 son no guiados porque se propagan por la cubierta.</a:t>
             </a:r>
           </a:p>
           <a:p>
@@ -9859,6 +9901,9 @@
                 <a:solidFill>
                   <a:srgbClr val="FF0000"/>
                 </a:solidFill>
+                <a:highlight>
+                  <a:srgbClr val="FFFF00"/>
+                </a:highlight>
                 <a:latin typeface="Arial" panose="020B0604020202020204" pitchFamily="34" charset="0"/>
                 <a:cs typeface="Arial" panose="020B0604020202020204" pitchFamily="34" charset="0"/>
               </a:rPr>
@@ -9872,6 +9917,9 @@
                 <a:solidFill>
                   <a:srgbClr val="FF0000"/>
                 </a:solidFill>
+                <a:highlight>
+                  <a:srgbClr val="FFFF00"/>
+                </a:highlight>
                 <a:latin typeface="Arial" panose="020B0604020202020204" pitchFamily="34" charset="0"/>
                 <a:cs typeface="Arial" panose="020B0604020202020204" pitchFamily="34" charset="0"/>
               </a:rPr>
@@ -9881,6 +9929,9 @@
               <a:solidFill>
                 <a:srgbClr val="FF0000"/>
               </a:solidFill>
+              <a:highlight>
+                <a:srgbClr val="FFFF00"/>
+              </a:highlight>
               <a:latin typeface="Arial" panose="020B0604020202020204" pitchFamily="34" charset="0"/>
               <a:cs typeface="Arial" panose="020B0604020202020204" pitchFamily="34" charset="0"/>
             </a:endParaRPr>
@@ -10306,7 +10357,7 @@
         <p:spPr>
           <a:xfrm>
             <a:off x="609441" y="4860334"/>
-            <a:ext cx="11199971" cy="1200329"/>
+            <a:ext cx="11199971" cy="1754326"/>
           </a:xfrm>
           <a:prstGeom prst="rect">
             <a:avLst/>
@@ -10390,6 +10441,20 @@
                 <a:latin typeface="Arial" panose="020B0604020202020204" pitchFamily="34" charset="0"/>
                 <a:cs typeface="Arial" panose="020B0604020202020204" pitchFamily="34" charset="0"/>
               </a:rPr>
+              <a:t>, </a:t>
+            </a:r>
+            <a:r>
+              <a:rPr lang="en-US" sz="1200" dirty="0" err="1">
+                <a:latin typeface="Arial" panose="020B0604020202020204" pitchFamily="34" charset="0"/>
+                <a:cs typeface="Arial" panose="020B0604020202020204" pitchFamily="34" charset="0"/>
+              </a:rPr>
+              <a:t>el</a:t>
+            </a:r>
+            <a:r>
+              <a:rPr lang="en-US" sz="1200" dirty="0">
+                <a:latin typeface="Arial" panose="020B0604020202020204" pitchFamily="34" charset="0"/>
+                <a:cs typeface="Arial" panose="020B0604020202020204" pitchFamily="34" charset="0"/>
+              </a:rPr>
               <a:t> </a:t>
             </a:r>
             <a:r>
@@ -10397,6 +10462,244 @@
                 <a:latin typeface="Arial" panose="020B0604020202020204" pitchFamily="34" charset="0"/>
                 <a:cs typeface="Arial" panose="020B0604020202020204" pitchFamily="34" charset="0"/>
               </a:rPr>
+              <a:t>indice</a:t>
+            </a:r>
+            <a:r>
+              <a:rPr lang="en-US" sz="1200" dirty="0">
+                <a:latin typeface="Arial" panose="020B0604020202020204" pitchFamily="34" charset="0"/>
+                <a:cs typeface="Arial" panose="020B0604020202020204" pitchFamily="34" charset="0"/>
+              </a:rPr>
+              <a:t> </a:t>
+            </a:r>
+            <a:r>
+              <a:rPr lang="en-US" sz="1200" dirty="0" err="1">
+                <a:latin typeface="Arial" panose="020B0604020202020204" pitchFamily="34" charset="0"/>
+                <a:cs typeface="Arial" panose="020B0604020202020204" pitchFamily="34" charset="0"/>
+              </a:rPr>
+              <a:t>efectivo</a:t>
+            </a:r>
+            <a:r>
+              <a:rPr lang="en-US" sz="1200" dirty="0">
+                <a:latin typeface="Arial" panose="020B0604020202020204" pitchFamily="34" charset="0"/>
+                <a:cs typeface="Arial" panose="020B0604020202020204" pitchFamily="34" charset="0"/>
+              </a:rPr>
+              <a:t> de </a:t>
+            </a:r>
+            <a:r>
+              <a:rPr lang="en-US" sz="1200" dirty="0" err="1">
+                <a:latin typeface="Arial" panose="020B0604020202020204" pitchFamily="34" charset="0"/>
+                <a:cs typeface="Arial" panose="020B0604020202020204" pitchFamily="34" charset="0"/>
+              </a:rPr>
+              <a:t>los</a:t>
+            </a:r>
+            <a:r>
+              <a:rPr lang="en-US" sz="1200" dirty="0">
+                <a:latin typeface="Arial" panose="020B0604020202020204" pitchFamily="34" charset="0"/>
+                <a:cs typeface="Arial" panose="020B0604020202020204" pitchFamily="34" charset="0"/>
+              </a:rPr>
+              <a:t> </a:t>
+            </a:r>
+            <a:r>
+              <a:rPr lang="en-US" sz="1200" dirty="0" err="1">
+                <a:latin typeface="Arial" panose="020B0604020202020204" pitchFamily="34" charset="0"/>
+                <a:cs typeface="Arial" panose="020B0604020202020204" pitchFamily="34" charset="0"/>
+              </a:rPr>
+              <a:t>distintos</a:t>
+            </a:r>
+            <a:r>
+              <a:rPr lang="en-US" sz="1200" dirty="0">
+                <a:latin typeface="Arial" panose="020B0604020202020204" pitchFamily="34" charset="0"/>
+                <a:cs typeface="Arial" panose="020B0604020202020204" pitchFamily="34" charset="0"/>
+              </a:rPr>
+              <a:t> </a:t>
+            </a:r>
+            <a:r>
+              <a:rPr lang="en-US" sz="1200" dirty="0" err="1">
+                <a:latin typeface="Arial" panose="020B0604020202020204" pitchFamily="34" charset="0"/>
+                <a:cs typeface="Arial" panose="020B0604020202020204" pitchFamily="34" charset="0"/>
+              </a:rPr>
+              <a:t>modos</a:t>
+            </a:r>
+            <a:r>
+              <a:rPr lang="en-US" sz="1200" dirty="0">
+                <a:latin typeface="Arial" panose="020B0604020202020204" pitchFamily="34" charset="0"/>
+                <a:cs typeface="Arial" panose="020B0604020202020204" pitchFamily="34" charset="0"/>
+              </a:rPr>
+              <a:t> </a:t>
+            </a:r>
+            <a:r>
+              <a:rPr lang="en-US" sz="1200" dirty="0" err="1">
+                <a:latin typeface="Arial" panose="020B0604020202020204" pitchFamily="34" charset="0"/>
+                <a:cs typeface="Arial" panose="020B0604020202020204" pitchFamily="34" charset="0"/>
+              </a:rPr>
+              <a:t>aumenta</a:t>
+            </a:r>
+            <a:r>
+              <a:rPr lang="en-US" sz="1200" dirty="0">
+                <a:latin typeface="Arial" panose="020B0604020202020204" pitchFamily="34" charset="0"/>
+                <a:cs typeface="Arial" panose="020B0604020202020204" pitchFamily="34" charset="0"/>
+              </a:rPr>
+              <a:t>. </a:t>
+            </a:r>
+            <a:r>
+              <a:rPr lang="en-US" sz="1200" dirty="0" err="1">
+                <a:latin typeface="Arial" panose="020B0604020202020204" pitchFamily="34" charset="0"/>
+                <a:cs typeface="Arial" panose="020B0604020202020204" pitchFamily="34" charset="0"/>
+              </a:rPr>
+              <a:t>Destacando</a:t>
+            </a:r>
+            <a:r>
+              <a:rPr lang="en-US" sz="1200" dirty="0">
+                <a:latin typeface="Arial" panose="020B0604020202020204" pitchFamily="34" charset="0"/>
+                <a:cs typeface="Arial" panose="020B0604020202020204" pitchFamily="34" charset="0"/>
+              </a:rPr>
+              <a:t> un mayor </a:t>
+            </a:r>
+            <a:r>
+              <a:rPr lang="en-US" sz="1200" dirty="0" err="1">
+                <a:latin typeface="Arial" panose="020B0604020202020204" pitchFamily="34" charset="0"/>
+                <a:cs typeface="Arial" panose="020B0604020202020204" pitchFamily="34" charset="0"/>
+              </a:rPr>
+              <a:t>confinamiento</a:t>
+            </a:r>
+            <a:r>
+              <a:rPr lang="en-US" sz="1200" dirty="0">
+                <a:latin typeface="Arial" panose="020B0604020202020204" pitchFamily="34" charset="0"/>
+                <a:cs typeface="Arial" panose="020B0604020202020204" pitchFamily="34" charset="0"/>
+              </a:rPr>
+              <a:t> </a:t>
+            </a:r>
+            <a:r>
+              <a:rPr lang="en-US" sz="1200" dirty="0" err="1">
+                <a:latin typeface="Arial" panose="020B0604020202020204" pitchFamily="34" charset="0"/>
+                <a:cs typeface="Arial" panose="020B0604020202020204" pitchFamily="34" charset="0"/>
+              </a:rPr>
+              <a:t>en</a:t>
+            </a:r>
+            <a:r>
+              <a:rPr lang="en-US" sz="1200" dirty="0">
+                <a:latin typeface="Arial" panose="020B0604020202020204" pitchFamily="34" charset="0"/>
+                <a:cs typeface="Arial" panose="020B0604020202020204" pitchFamily="34" charset="0"/>
+              </a:rPr>
+              <a:t> </a:t>
+            </a:r>
+            <a:r>
+              <a:rPr lang="en-US" sz="1200" dirty="0" err="1">
+                <a:latin typeface="Arial" panose="020B0604020202020204" pitchFamily="34" charset="0"/>
+                <a:cs typeface="Arial" panose="020B0604020202020204" pitchFamily="34" charset="0"/>
+              </a:rPr>
+              <a:t>los</a:t>
+            </a:r>
+            <a:r>
+              <a:rPr lang="en-US" sz="1200" dirty="0">
+                <a:latin typeface="Arial" panose="020B0604020202020204" pitchFamily="34" charset="0"/>
+                <a:cs typeface="Arial" panose="020B0604020202020204" pitchFamily="34" charset="0"/>
+              </a:rPr>
+              <a:t> </a:t>
+            </a:r>
+            <a:r>
+              <a:rPr lang="en-US" sz="1200" dirty="0" err="1">
+                <a:latin typeface="Arial" panose="020B0604020202020204" pitchFamily="34" charset="0"/>
+                <a:cs typeface="Arial" panose="020B0604020202020204" pitchFamily="34" charset="0"/>
+              </a:rPr>
+              <a:t>modos</a:t>
+            </a:r>
+            <a:r>
+              <a:rPr lang="en-US" sz="1200" dirty="0">
+                <a:latin typeface="Arial" panose="020B0604020202020204" pitchFamily="34" charset="0"/>
+                <a:cs typeface="Arial" panose="020B0604020202020204" pitchFamily="34" charset="0"/>
+              </a:rPr>
+              <a:t> TE, </a:t>
+            </a:r>
+            <a:r>
+              <a:rPr lang="en-US" sz="1200" dirty="0" err="1">
+                <a:latin typeface="Arial" panose="020B0604020202020204" pitchFamily="34" charset="0"/>
+                <a:cs typeface="Arial" panose="020B0604020202020204" pitchFamily="34" charset="0"/>
+              </a:rPr>
+              <a:t>debido</a:t>
+            </a:r>
+            <a:r>
+              <a:rPr lang="en-US" sz="1200" dirty="0">
+                <a:latin typeface="Arial" panose="020B0604020202020204" pitchFamily="34" charset="0"/>
+                <a:cs typeface="Arial" panose="020B0604020202020204" pitchFamily="34" charset="0"/>
+              </a:rPr>
+              <a:t> a </a:t>
+            </a:r>
+            <a:r>
+              <a:rPr lang="en-US" sz="1200" dirty="0" err="1">
+                <a:latin typeface="Arial" panose="020B0604020202020204" pitchFamily="34" charset="0"/>
+                <a:cs typeface="Arial" panose="020B0604020202020204" pitchFamily="34" charset="0"/>
+              </a:rPr>
+              <a:t>que</a:t>
+            </a:r>
+            <a:r>
+              <a:rPr lang="en-US" sz="1200" dirty="0">
+                <a:latin typeface="Arial" panose="020B0604020202020204" pitchFamily="34" charset="0"/>
+                <a:cs typeface="Arial" panose="020B0604020202020204" pitchFamily="34" charset="0"/>
+              </a:rPr>
+              <a:t> </a:t>
+            </a:r>
+            <a:r>
+              <a:rPr lang="en-US" sz="1200" dirty="0" err="1">
+                <a:latin typeface="Arial" panose="020B0604020202020204" pitchFamily="34" charset="0"/>
+                <a:cs typeface="Arial" panose="020B0604020202020204" pitchFamily="34" charset="0"/>
+              </a:rPr>
+              <a:t>su</a:t>
+            </a:r>
+            <a:r>
+              <a:rPr lang="en-US" sz="1200" dirty="0">
+                <a:latin typeface="Arial" panose="020B0604020202020204" pitchFamily="34" charset="0"/>
+                <a:cs typeface="Arial" panose="020B0604020202020204" pitchFamily="34" charset="0"/>
+              </a:rPr>
+              <a:t> </a:t>
+            </a:r>
+            <a:r>
+              <a:rPr lang="en-US" sz="1200" dirty="0" err="1">
+                <a:latin typeface="Arial" panose="020B0604020202020204" pitchFamily="34" charset="0"/>
+                <a:cs typeface="Arial" panose="020B0604020202020204" pitchFamily="34" charset="0"/>
+              </a:rPr>
+              <a:t>componente</a:t>
+            </a:r>
+            <a:r>
+              <a:rPr lang="en-US" sz="1200" dirty="0">
+                <a:latin typeface="Arial" panose="020B0604020202020204" pitchFamily="34" charset="0"/>
+                <a:cs typeface="Arial" panose="020B0604020202020204" pitchFamily="34" charset="0"/>
+              </a:rPr>
+              <a:t> principal del campo </a:t>
+            </a:r>
+            <a:r>
+              <a:rPr lang="en-US" sz="1200" dirty="0" err="1">
+                <a:latin typeface="Arial" panose="020B0604020202020204" pitchFamily="34" charset="0"/>
+                <a:cs typeface="Arial" panose="020B0604020202020204" pitchFamily="34" charset="0"/>
+              </a:rPr>
+              <a:t>eléctrico</a:t>
+            </a:r>
+            <a:r>
+              <a:rPr lang="en-US" sz="1200" dirty="0">
+                <a:latin typeface="Arial" panose="020B0604020202020204" pitchFamily="34" charset="0"/>
+                <a:cs typeface="Arial" panose="020B0604020202020204" pitchFamily="34" charset="0"/>
+              </a:rPr>
+              <a:t> es </a:t>
+            </a:r>
+            <a:r>
+              <a:rPr lang="en-US" sz="1200" dirty="0" err="1">
+                <a:latin typeface="Arial" panose="020B0604020202020204" pitchFamily="34" charset="0"/>
+                <a:cs typeface="Arial" panose="020B0604020202020204" pitchFamily="34" charset="0"/>
+              </a:rPr>
+              <a:t>en</a:t>
+            </a:r>
+            <a:r>
+              <a:rPr lang="en-US" sz="1200" dirty="0">
+                <a:latin typeface="Arial" panose="020B0604020202020204" pitchFamily="34" charset="0"/>
+                <a:cs typeface="Arial" panose="020B0604020202020204" pitchFamily="34" charset="0"/>
+              </a:rPr>
+              <a:t> </a:t>
+            </a:r>
+            <a:r>
+              <a:rPr lang="en-US" sz="1200" dirty="0" err="1">
+                <a:latin typeface="Arial" panose="020B0604020202020204" pitchFamily="34" charset="0"/>
+                <a:cs typeface="Arial" panose="020B0604020202020204" pitchFamily="34" charset="0"/>
+              </a:rPr>
               <a:t>el</a:t>
             </a:r>
             <a:r>
@@ -10411,308 +10714,70 @@
                 <a:latin typeface="Arial" panose="020B0604020202020204" pitchFamily="34" charset="0"/>
                 <a:cs typeface="Arial" panose="020B0604020202020204" pitchFamily="34" charset="0"/>
               </a:rPr>
-              <a:t>indice</a:t>
+              <a:t>eje</a:t>
             </a:r>
             <a:r>
               <a:rPr lang="en-US" sz="1200" dirty="0">
                 <a:latin typeface="Arial" panose="020B0604020202020204" pitchFamily="34" charset="0"/>
                 <a:cs typeface="Arial" panose="020B0604020202020204" pitchFamily="34" charset="0"/>
               </a:rPr>
-              <a:t> </a:t>
+              <a:t> x (Ex), </a:t>
             </a:r>
             <a:r>
               <a:rPr lang="en-US" sz="1200" dirty="0" err="1">
                 <a:latin typeface="Arial" panose="020B0604020202020204" pitchFamily="34" charset="0"/>
                 <a:cs typeface="Arial" panose="020B0604020202020204" pitchFamily="34" charset="0"/>
               </a:rPr>
-              <a:t>efectivo</a:t>
+              <a:t>que</a:t>
             </a:r>
             <a:r>
               <a:rPr lang="en-US" sz="1200" dirty="0">
                 <a:latin typeface="Arial" panose="020B0604020202020204" pitchFamily="34" charset="0"/>
                 <a:cs typeface="Arial" panose="020B0604020202020204" pitchFamily="34" charset="0"/>
               </a:rPr>
-              <a:t> de </a:t>
+              <a:t> se </a:t>
             </a:r>
             <a:r>
               <a:rPr lang="en-US" sz="1200" dirty="0" err="1">
                 <a:latin typeface="Arial" panose="020B0604020202020204" pitchFamily="34" charset="0"/>
                 <a:cs typeface="Arial" panose="020B0604020202020204" pitchFamily="34" charset="0"/>
               </a:rPr>
-              <a:t>los</a:t>
+              <a:t>extiende</a:t>
             </a:r>
             <a:r>
               <a:rPr lang="en-US" sz="1200" dirty="0">
                 <a:latin typeface="Arial" panose="020B0604020202020204" pitchFamily="34" charset="0"/>
                 <a:cs typeface="Arial" panose="020B0604020202020204" pitchFamily="34" charset="0"/>
               </a:rPr>
-              <a:t> </a:t>
+              <a:t> a lo ancho de la </a:t>
             </a:r>
             <a:r>
               <a:rPr lang="en-US" sz="1200" dirty="0" err="1">
                 <a:latin typeface="Arial" panose="020B0604020202020204" pitchFamily="34" charset="0"/>
                 <a:cs typeface="Arial" panose="020B0604020202020204" pitchFamily="34" charset="0"/>
               </a:rPr>
-              <a:t>distintos</a:t>
+              <a:t>guía</a:t>
             </a:r>
             <a:r>
               <a:rPr lang="en-US" sz="1200" dirty="0">
                 <a:latin typeface="Arial" panose="020B0604020202020204" pitchFamily="34" charset="0"/>
                 <a:cs typeface="Arial" panose="020B0604020202020204" pitchFamily="34" charset="0"/>
               </a:rPr>
-              <a:t> </a:t>
+              <a:t> (</a:t>
             </a:r>
             <a:r>
               <a:rPr lang="en-US" sz="1200" dirty="0" err="1">
                 <a:latin typeface="Arial" panose="020B0604020202020204" pitchFamily="34" charset="0"/>
                 <a:cs typeface="Arial" panose="020B0604020202020204" pitchFamily="34" charset="0"/>
               </a:rPr>
-              <a:t>modos</a:t>
+              <a:t>en</a:t>
             </a:r>
             <a:r>
               <a:rPr lang="en-US" sz="1200" dirty="0">
                 <a:latin typeface="Arial" panose="020B0604020202020204" pitchFamily="34" charset="0"/>
                 <a:cs typeface="Arial" panose="020B0604020202020204" pitchFamily="34" charset="0"/>
               </a:rPr>
-              <a:t> </a:t>
-            </a:r>
-            <a:r>
-              <a:rPr lang="en-US" sz="1200" dirty="0" err="1">
-                <a:latin typeface="Arial" panose="020B0604020202020204" pitchFamily="34" charset="0"/>
-                <a:cs typeface="Arial" panose="020B0604020202020204" pitchFamily="34" charset="0"/>
-              </a:rPr>
-              <a:t>aumenta</a:t>
-            </a:r>
-            <a:r>
-              <a:rPr lang="en-US" sz="1200" dirty="0">
-                <a:latin typeface="Arial" panose="020B0604020202020204" pitchFamily="34" charset="0"/>
-                <a:cs typeface="Arial" panose="020B0604020202020204" pitchFamily="34" charset="0"/>
-              </a:rPr>
-              <a:t>. </a:t>
-            </a:r>
-            <a:r>
-              <a:rPr lang="en-US" sz="1200" dirty="0" err="1">
-                <a:latin typeface="Arial" panose="020B0604020202020204" pitchFamily="34" charset="0"/>
-                <a:cs typeface="Arial" panose="020B0604020202020204" pitchFamily="34" charset="0"/>
-              </a:rPr>
-              <a:t>Destacando</a:t>
-            </a:r>
-            <a:r>
-              <a:rPr lang="en-US" sz="1200" dirty="0">
-                <a:latin typeface="Arial" panose="020B0604020202020204" pitchFamily="34" charset="0"/>
-                <a:cs typeface="Arial" panose="020B0604020202020204" pitchFamily="34" charset="0"/>
-              </a:rPr>
-              <a:t> un mayor </a:t>
-            </a:r>
-            <a:r>
-              <a:rPr lang="en-US" sz="1200" dirty="0" err="1">
-                <a:latin typeface="Arial" panose="020B0604020202020204" pitchFamily="34" charset="0"/>
-                <a:cs typeface="Arial" panose="020B0604020202020204" pitchFamily="34" charset="0"/>
-              </a:rPr>
-              <a:t>confinamiento</a:t>
-            </a:r>
-            <a:r>
-              <a:rPr lang="en-US" sz="1200" dirty="0">
-                <a:latin typeface="Arial" panose="020B0604020202020204" pitchFamily="34" charset="0"/>
-                <a:cs typeface="Arial" panose="020B0604020202020204" pitchFamily="34" charset="0"/>
-              </a:rPr>
-              <a:t> </a:t>
-            </a:r>
-            <a:r>
-              <a:rPr lang="en-US" sz="1200" dirty="0" err="1">
-                <a:latin typeface="Arial" panose="020B0604020202020204" pitchFamily="34" charset="0"/>
-                <a:cs typeface="Arial" panose="020B0604020202020204" pitchFamily="34" charset="0"/>
-              </a:rPr>
-              <a:t>en</a:t>
-            </a:r>
-            <a:r>
-              <a:rPr lang="en-US" sz="1200" dirty="0">
-                <a:latin typeface="Arial" panose="020B0604020202020204" pitchFamily="34" charset="0"/>
-                <a:cs typeface="Arial" panose="020B0604020202020204" pitchFamily="34" charset="0"/>
-              </a:rPr>
-              <a:t> </a:t>
-            </a:r>
-            <a:r>
-              <a:rPr lang="en-US" sz="1200" dirty="0" err="1">
-                <a:latin typeface="Arial" panose="020B0604020202020204" pitchFamily="34" charset="0"/>
-                <a:cs typeface="Arial" panose="020B0604020202020204" pitchFamily="34" charset="0"/>
-              </a:rPr>
-              <a:t>los</a:t>
-            </a:r>
-            <a:r>
-              <a:rPr lang="en-US" sz="1200" dirty="0">
-                <a:latin typeface="Arial" panose="020B0604020202020204" pitchFamily="34" charset="0"/>
-                <a:cs typeface="Arial" panose="020B0604020202020204" pitchFamily="34" charset="0"/>
-              </a:rPr>
-              <a:t> </a:t>
-            </a:r>
-            <a:r>
-              <a:rPr lang="en-US" sz="1200" dirty="0" err="1">
-                <a:latin typeface="Arial" panose="020B0604020202020204" pitchFamily="34" charset="0"/>
-                <a:cs typeface="Arial" panose="020B0604020202020204" pitchFamily="34" charset="0"/>
-              </a:rPr>
-              <a:t>modos</a:t>
-            </a:r>
-            <a:r>
-              <a:rPr lang="en-US" sz="1200" dirty="0">
-                <a:latin typeface="Arial" panose="020B0604020202020204" pitchFamily="34" charset="0"/>
-                <a:cs typeface="Arial" panose="020B0604020202020204" pitchFamily="34" charset="0"/>
-              </a:rPr>
-              <a:t> TE, </a:t>
-            </a:r>
-            <a:r>
-              <a:rPr lang="en-US" sz="1200" dirty="0" err="1">
-                <a:latin typeface="Arial" panose="020B0604020202020204" pitchFamily="34" charset="0"/>
-                <a:cs typeface="Arial" panose="020B0604020202020204" pitchFamily="34" charset="0"/>
-              </a:rPr>
-              <a:t>debido</a:t>
-            </a:r>
-            <a:r>
-              <a:rPr lang="en-US" sz="1200" dirty="0">
-                <a:latin typeface="Arial" panose="020B0604020202020204" pitchFamily="34" charset="0"/>
-                <a:cs typeface="Arial" panose="020B0604020202020204" pitchFamily="34" charset="0"/>
-              </a:rPr>
-              <a:t> a </a:t>
-            </a:r>
-            <a:r>
-              <a:rPr lang="en-US" sz="1200" dirty="0" err="1">
-                <a:latin typeface="Arial" panose="020B0604020202020204" pitchFamily="34" charset="0"/>
-                <a:cs typeface="Arial" panose="020B0604020202020204" pitchFamily="34" charset="0"/>
-              </a:rPr>
-              <a:t>que</a:t>
-            </a:r>
-            <a:r>
-              <a:rPr lang="en-US" sz="1200" dirty="0">
-                <a:latin typeface="Arial" panose="020B0604020202020204" pitchFamily="34" charset="0"/>
-                <a:cs typeface="Arial" panose="020B0604020202020204" pitchFamily="34" charset="0"/>
-              </a:rPr>
-              <a:t> </a:t>
-            </a:r>
-            <a:r>
-              <a:rPr lang="en-US" sz="1200" dirty="0" err="1">
-                <a:latin typeface="Arial" panose="020B0604020202020204" pitchFamily="34" charset="0"/>
-                <a:cs typeface="Arial" panose="020B0604020202020204" pitchFamily="34" charset="0"/>
-              </a:rPr>
-              <a:t>su</a:t>
-            </a:r>
-            <a:r>
-              <a:rPr lang="en-US" sz="1200" dirty="0">
-                <a:latin typeface="Arial" panose="020B0604020202020204" pitchFamily="34" charset="0"/>
-                <a:cs typeface="Arial" panose="020B0604020202020204" pitchFamily="34" charset="0"/>
-              </a:rPr>
-              <a:t> </a:t>
-            </a:r>
-            <a:r>
-              <a:rPr lang="en-US" sz="1200" dirty="0" err="1">
-                <a:latin typeface="Arial" panose="020B0604020202020204" pitchFamily="34" charset="0"/>
-                <a:cs typeface="Arial" panose="020B0604020202020204" pitchFamily="34" charset="0"/>
-              </a:rPr>
-              <a:t>componente</a:t>
-            </a:r>
-            <a:r>
-              <a:rPr lang="en-US" sz="1200" dirty="0">
-                <a:latin typeface="Arial" panose="020B0604020202020204" pitchFamily="34" charset="0"/>
-                <a:cs typeface="Arial" panose="020B0604020202020204" pitchFamily="34" charset="0"/>
-              </a:rPr>
-              <a:t> principal del campo </a:t>
-            </a:r>
-            <a:r>
-              <a:rPr lang="en-US" sz="1200" dirty="0" err="1">
-                <a:latin typeface="Arial" panose="020B0604020202020204" pitchFamily="34" charset="0"/>
-                <a:cs typeface="Arial" panose="020B0604020202020204" pitchFamily="34" charset="0"/>
-              </a:rPr>
-              <a:t>eléctrico</a:t>
-            </a:r>
-            <a:r>
-              <a:rPr lang="en-US" sz="1200" dirty="0">
-                <a:latin typeface="Arial" panose="020B0604020202020204" pitchFamily="34" charset="0"/>
-                <a:cs typeface="Arial" panose="020B0604020202020204" pitchFamily="34" charset="0"/>
-              </a:rPr>
-              <a:t> es </a:t>
-            </a:r>
-            <a:r>
-              <a:rPr lang="en-US" sz="1200" dirty="0" err="1">
-                <a:latin typeface="Arial" panose="020B0604020202020204" pitchFamily="34" charset="0"/>
-                <a:cs typeface="Arial" panose="020B0604020202020204" pitchFamily="34" charset="0"/>
-              </a:rPr>
-              <a:t>en</a:t>
-            </a:r>
-            <a:r>
-              <a:rPr lang="en-US" sz="1200" dirty="0">
-                <a:latin typeface="Arial" panose="020B0604020202020204" pitchFamily="34" charset="0"/>
-                <a:cs typeface="Arial" panose="020B0604020202020204" pitchFamily="34" charset="0"/>
-              </a:rPr>
-              <a:t> </a:t>
-            </a:r>
-            <a:r>
-              <a:rPr lang="en-US" sz="1200" dirty="0" err="1">
-                <a:latin typeface="Arial" panose="020B0604020202020204" pitchFamily="34" charset="0"/>
-                <a:cs typeface="Arial" panose="020B0604020202020204" pitchFamily="34" charset="0"/>
-              </a:rPr>
-              <a:t>el</a:t>
-            </a:r>
-            <a:r>
-              <a:rPr lang="en-US" sz="1200" dirty="0">
-                <a:latin typeface="Arial" panose="020B0604020202020204" pitchFamily="34" charset="0"/>
-                <a:cs typeface="Arial" panose="020B0604020202020204" pitchFamily="34" charset="0"/>
-              </a:rPr>
-              <a:t> </a:t>
-            </a:r>
-            <a:r>
-              <a:rPr lang="en-US" sz="1200" dirty="0" err="1">
-                <a:latin typeface="Arial" panose="020B0604020202020204" pitchFamily="34" charset="0"/>
-                <a:cs typeface="Arial" panose="020B0604020202020204" pitchFamily="34" charset="0"/>
-              </a:rPr>
-              <a:t>eje</a:t>
-            </a:r>
-            <a:r>
-              <a:rPr lang="en-US" sz="1200" dirty="0">
-                <a:latin typeface="Arial" panose="020B0604020202020204" pitchFamily="34" charset="0"/>
-                <a:cs typeface="Arial" panose="020B0604020202020204" pitchFamily="34" charset="0"/>
-              </a:rPr>
-              <a:t> x (Ex), </a:t>
-            </a:r>
-            <a:r>
-              <a:rPr lang="en-US" sz="1200" dirty="0" err="1">
-                <a:latin typeface="Arial" panose="020B0604020202020204" pitchFamily="34" charset="0"/>
-                <a:cs typeface="Arial" panose="020B0604020202020204" pitchFamily="34" charset="0"/>
-              </a:rPr>
-              <a:t>que</a:t>
-            </a:r>
-            <a:r>
-              <a:rPr lang="en-US" sz="1200" dirty="0">
-                <a:latin typeface="Arial" panose="020B0604020202020204" pitchFamily="34" charset="0"/>
-                <a:cs typeface="Arial" panose="020B0604020202020204" pitchFamily="34" charset="0"/>
-              </a:rPr>
-              <a:t> se </a:t>
-            </a:r>
-            <a:r>
-              <a:rPr lang="en-US" sz="1200" dirty="0" err="1">
-                <a:latin typeface="Arial" panose="020B0604020202020204" pitchFamily="34" charset="0"/>
-                <a:cs typeface="Arial" panose="020B0604020202020204" pitchFamily="34" charset="0"/>
-              </a:rPr>
-              <a:t>extiende</a:t>
-            </a:r>
-            <a:r>
-              <a:rPr lang="en-US" sz="1200" dirty="0">
-                <a:latin typeface="Arial" panose="020B0604020202020204" pitchFamily="34" charset="0"/>
-                <a:cs typeface="Arial" panose="020B0604020202020204" pitchFamily="34" charset="0"/>
-              </a:rPr>
-              <a:t> a lo ancho de la </a:t>
-            </a:r>
-            <a:r>
-              <a:rPr lang="en-US" sz="1200" dirty="0" err="1">
-                <a:latin typeface="Arial" panose="020B0604020202020204" pitchFamily="34" charset="0"/>
-                <a:cs typeface="Arial" panose="020B0604020202020204" pitchFamily="34" charset="0"/>
-              </a:rPr>
-              <a:t>guía</a:t>
-            </a:r>
-            <a:r>
-              <a:rPr lang="en-US" sz="1200" dirty="0">
-                <a:latin typeface="Arial" panose="020B0604020202020204" pitchFamily="34" charset="0"/>
-                <a:cs typeface="Arial" panose="020B0604020202020204" pitchFamily="34" charset="0"/>
-              </a:rPr>
-              <a:t>.</a:t>
+              <a:t> horizontal).</a:t>
             </a:r>
           </a:p>
           <a:p>
@@ -10725,10 +10790,403 @@
           <a:p>
             <a:pPr algn="just"/>
             <a:r>
+              <a:rPr lang="en-US" sz="1200" dirty="0" err="1">
+                <a:highlight>
+                  <a:srgbClr val="FFFF00"/>
+                </a:highlight>
+                <a:latin typeface="Arial" panose="020B0604020202020204" pitchFamily="34" charset="0"/>
+                <a:cs typeface="Arial" panose="020B0604020202020204" pitchFamily="34" charset="0"/>
+              </a:rPr>
+              <a:t>Debido</a:t>
+            </a:r>
+            <a:r>
+              <a:rPr lang="en-US" sz="1200" dirty="0">
+                <a:highlight>
+                  <a:srgbClr val="FFFF00"/>
+                </a:highlight>
+                <a:latin typeface="Arial" panose="020B0604020202020204" pitchFamily="34" charset="0"/>
+                <a:cs typeface="Arial" panose="020B0604020202020204" pitchFamily="34" charset="0"/>
+              </a:rPr>
+              <a:t> a </a:t>
+            </a:r>
+            <a:r>
+              <a:rPr lang="en-US" sz="1200" dirty="0" err="1">
+                <a:highlight>
+                  <a:srgbClr val="FFFF00"/>
+                </a:highlight>
+                <a:latin typeface="Arial" panose="020B0604020202020204" pitchFamily="34" charset="0"/>
+                <a:cs typeface="Arial" panose="020B0604020202020204" pitchFamily="34" charset="0"/>
+              </a:rPr>
+              <a:t>este</a:t>
+            </a:r>
+            <a:r>
+              <a:rPr lang="en-US" sz="1200" dirty="0">
+                <a:highlight>
+                  <a:srgbClr val="FFFF00"/>
+                </a:highlight>
+                <a:latin typeface="Arial" panose="020B0604020202020204" pitchFamily="34" charset="0"/>
+                <a:cs typeface="Arial" panose="020B0604020202020204" pitchFamily="34" charset="0"/>
+              </a:rPr>
+              <a:t> </a:t>
+            </a:r>
+            <a:r>
+              <a:rPr lang="en-US" sz="1200" dirty="0" err="1">
+                <a:highlight>
+                  <a:srgbClr val="FFFF00"/>
+                </a:highlight>
+                <a:latin typeface="Arial" panose="020B0604020202020204" pitchFamily="34" charset="0"/>
+                <a:cs typeface="Arial" panose="020B0604020202020204" pitchFamily="34" charset="0"/>
+              </a:rPr>
+              <a:t>aumento</a:t>
+            </a:r>
+            <a:r>
+              <a:rPr lang="en-US" sz="1200" dirty="0">
+                <a:highlight>
+                  <a:srgbClr val="FFFF00"/>
+                </a:highlight>
+                <a:latin typeface="Arial" panose="020B0604020202020204" pitchFamily="34" charset="0"/>
+                <a:cs typeface="Arial" panose="020B0604020202020204" pitchFamily="34" charset="0"/>
+              </a:rPr>
+              <a:t>, se produce un </a:t>
+            </a:r>
+            <a:r>
+              <a:rPr lang="en-US" sz="1200" dirty="0" err="1">
+                <a:highlight>
+                  <a:srgbClr val="FFFF00"/>
+                </a:highlight>
+                <a:latin typeface="Arial" panose="020B0604020202020204" pitchFamily="34" charset="0"/>
+                <a:cs typeface="Arial" panose="020B0604020202020204" pitchFamily="34" charset="0"/>
+              </a:rPr>
+              <a:t>cambio</a:t>
+            </a:r>
+            <a:r>
+              <a:rPr lang="en-US" sz="1200" dirty="0">
+                <a:highlight>
+                  <a:srgbClr val="FFFF00"/>
+                </a:highlight>
+                <a:latin typeface="Arial" panose="020B0604020202020204" pitchFamily="34" charset="0"/>
+                <a:cs typeface="Arial" panose="020B0604020202020204" pitchFamily="34" charset="0"/>
+              </a:rPr>
+              <a:t> </a:t>
+            </a:r>
+            <a:r>
+              <a:rPr lang="en-US" sz="1200" dirty="0" err="1">
+                <a:highlight>
+                  <a:srgbClr val="FFFF00"/>
+                </a:highlight>
+                <a:latin typeface="Arial" panose="020B0604020202020204" pitchFamily="34" charset="0"/>
+                <a:cs typeface="Arial" panose="020B0604020202020204" pitchFamily="34" charset="0"/>
+              </a:rPr>
+              <a:t>en</a:t>
+            </a:r>
+            <a:r>
+              <a:rPr lang="en-US" sz="1200" dirty="0">
+                <a:highlight>
+                  <a:srgbClr val="FFFF00"/>
+                </a:highlight>
+                <a:latin typeface="Arial" panose="020B0604020202020204" pitchFamily="34" charset="0"/>
+                <a:cs typeface="Arial" panose="020B0604020202020204" pitchFamily="34" charset="0"/>
+              </a:rPr>
+              <a:t> </a:t>
+            </a:r>
+            <a:r>
+              <a:rPr lang="en-US" sz="1200" dirty="0" err="1">
+                <a:highlight>
+                  <a:srgbClr val="FFFF00"/>
+                </a:highlight>
+                <a:latin typeface="Arial" panose="020B0604020202020204" pitchFamily="34" charset="0"/>
+                <a:cs typeface="Arial" panose="020B0604020202020204" pitchFamily="34" charset="0"/>
+              </a:rPr>
+              <a:t>el</a:t>
+            </a:r>
+            <a:r>
+              <a:rPr lang="en-US" sz="1200" dirty="0">
+                <a:highlight>
+                  <a:srgbClr val="FFFF00"/>
+                </a:highlight>
+                <a:latin typeface="Arial" panose="020B0604020202020204" pitchFamily="34" charset="0"/>
+                <a:cs typeface="Arial" panose="020B0604020202020204" pitchFamily="34" charset="0"/>
+              </a:rPr>
+              <a:t> </a:t>
+            </a:r>
+            <a:r>
+              <a:rPr lang="en-US" sz="1200" dirty="0" err="1">
+                <a:highlight>
+                  <a:srgbClr val="FFFF00"/>
+                </a:highlight>
+                <a:latin typeface="Arial" panose="020B0604020202020204" pitchFamily="34" charset="0"/>
+                <a:cs typeface="Arial" panose="020B0604020202020204" pitchFamily="34" charset="0"/>
+              </a:rPr>
+              <a:t>comportamiento</a:t>
+            </a:r>
+            <a:r>
+              <a:rPr lang="en-US" sz="1200" dirty="0">
+                <a:highlight>
+                  <a:srgbClr val="FFFF00"/>
+                </a:highlight>
+                <a:latin typeface="Arial" panose="020B0604020202020204" pitchFamily="34" charset="0"/>
+                <a:cs typeface="Arial" panose="020B0604020202020204" pitchFamily="34" charset="0"/>
+              </a:rPr>
+              <a:t> de la </a:t>
+            </a:r>
+            <a:r>
+              <a:rPr lang="en-US" sz="1200" dirty="0" err="1">
+                <a:highlight>
+                  <a:srgbClr val="FFFF00"/>
+                </a:highlight>
+                <a:latin typeface="Arial" panose="020B0604020202020204" pitchFamily="34" charset="0"/>
+                <a:cs typeface="Arial" panose="020B0604020202020204" pitchFamily="34" charset="0"/>
+              </a:rPr>
+              <a:t>guía</a:t>
+            </a:r>
+            <a:r>
+              <a:rPr lang="en-US" sz="1200" dirty="0">
+                <a:highlight>
+                  <a:srgbClr val="FFFF00"/>
+                </a:highlight>
+                <a:latin typeface="Arial" panose="020B0604020202020204" pitchFamily="34" charset="0"/>
+                <a:cs typeface="Arial" panose="020B0604020202020204" pitchFamily="34" charset="0"/>
+              </a:rPr>
+              <a:t> </a:t>
+            </a:r>
+            <a:r>
+              <a:rPr lang="en-US" sz="1200" dirty="0" err="1">
+                <a:highlight>
+                  <a:srgbClr val="FFFF00"/>
+                </a:highlight>
+                <a:latin typeface="Arial" panose="020B0604020202020204" pitchFamily="34" charset="0"/>
+                <a:cs typeface="Arial" panose="020B0604020202020204" pitchFamily="34" charset="0"/>
+              </a:rPr>
+              <a:t>aproximadamente</a:t>
+            </a:r>
+            <a:r>
+              <a:rPr lang="en-US" sz="1200" dirty="0">
+                <a:highlight>
+                  <a:srgbClr val="FFFF00"/>
+                </a:highlight>
+                <a:latin typeface="Arial" panose="020B0604020202020204" pitchFamily="34" charset="0"/>
+                <a:cs typeface="Arial" panose="020B0604020202020204" pitchFamily="34" charset="0"/>
+              </a:rPr>
+              <a:t> </a:t>
+            </a:r>
+            <a:r>
+              <a:rPr lang="en-US" sz="1200" dirty="0" err="1">
+                <a:highlight>
+                  <a:srgbClr val="FFFF00"/>
+                </a:highlight>
+                <a:latin typeface="Arial" panose="020B0604020202020204" pitchFamily="34" charset="0"/>
+                <a:cs typeface="Arial" panose="020B0604020202020204" pitchFamily="34" charset="0"/>
+              </a:rPr>
+              <a:t>en</a:t>
+            </a:r>
+            <a:r>
+              <a:rPr lang="en-US" sz="1200" dirty="0">
+                <a:highlight>
+                  <a:srgbClr val="FFFF00"/>
+                </a:highlight>
+                <a:latin typeface="Arial" panose="020B0604020202020204" pitchFamily="34" charset="0"/>
+                <a:cs typeface="Arial" panose="020B0604020202020204" pitchFamily="34" charset="0"/>
+              </a:rPr>
+              <a:t> un ancho de 1,27 um, a </a:t>
+            </a:r>
+            <a:r>
+              <a:rPr lang="en-US" sz="1200" dirty="0" err="1">
+                <a:highlight>
+                  <a:srgbClr val="FFFF00"/>
+                </a:highlight>
+                <a:latin typeface="Arial" panose="020B0604020202020204" pitchFamily="34" charset="0"/>
+                <a:cs typeface="Arial" panose="020B0604020202020204" pitchFamily="34" charset="0"/>
+              </a:rPr>
+              <a:t>partir</a:t>
+            </a:r>
+            <a:r>
+              <a:rPr lang="en-US" sz="1200" dirty="0">
+                <a:highlight>
+                  <a:srgbClr val="FFFF00"/>
+                </a:highlight>
+                <a:latin typeface="Arial" panose="020B0604020202020204" pitchFamily="34" charset="0"/>
+                <a:cs typeface="Arial" panose="020B0604020202020204" pitchFamily="34" charset="0"/>
+              </a:rPr>
+              <a:t> del </a:t>
+            </a:r>
+            <a:r>
+              <a:rPr lang="en-US" sz="1200" dirty="0" err="1">
+                <a:highlight>
+                  <a:srgbClr val="FFFF00"/>
+                </a:highlight>
+                <a:latin typeface="Arial" panose="020B0604020202020204" pitchFamily="34" charset="0"/>
+                <a:cs typeface="Arial" panose="020B0604020202020204" pitchFamily="34" charset="0"/>
+              </a:rPr>
+              <a:t>cual</a:t>
+            </a:r>
+            <a:r>
+              <a:rPr lang="en-US" sz="1200" dirty="0">
+                <a:highlight>
+                  <a:srgbClr val="FFFF00"/>
+                </a:highlight>
+                <a:latin typeface="Arial" panose="020B0604020202020204" pitchFamily="34" charset="0"/>
+                <a:cs typeface="Arial" panose="020B0604020202020204" pitchFamily="34" charset="0"/>
+              </a:rPr>
+              <a:t>, para </a:t>
+            </a:r>
+            <a:r>
+              <a:rPr lang="en-US" sz="1200" dirty="0" err="1">
+                <a:highlight>
+                  <a:srgbClr val="FFFF00"/>
+                </a:highlight>
+                <a:latin typeface="Arial" panose="020B0604020202020204" pitchFamily="34" charset="0"/>
+                <a:cs typeface="Arial" panose="020B0604020202020204" pitchFamily="34" charset="0"/>
+              </a:rPr>
+              <a:t>anchos</a:t>
+            </a:r>
+            <a:r>
+              <a:rPr lang="en-US" sz="1200" dirty="0">
+                <a:highlight>
+                  <a:srgbClr val="FFFF00"/>
+                </a:highlight>
+                <a:latin typeface="Arial" panose="020B0604020202020204" pitchFamily="34" charset="0"/>
+                <a:cs typeface="Arial" panose="020B0604020202020204" pitchFamily="34" charset="0"/>
+              </a:rPr>
+              <a:t> </a:t>
+            </a:r>
+            <a:r>
+              <a:rPr lang="en-US" sz="1200" dirty="0" err="1">
+                <a:highlight>
+                  <a:srgbClr val="FFFF00"/>
+                </a:highlight>
+                <a:latin typeface="Arial" panose="020B0604020202020204" pitchFamily="34" charset="0"/>
+                <a:cs typeface="Arial" panose="020B0604020202020204" pitchFamily="34" charset="0"/>
+              </a:rPr>
+              <a:t>mayores</a:t>
+            </a:r>
+            <a:r>
+              <a:rPr lang="en-US" sz="1200" dirty="0">
+                <a:highlight>
+                  <a:srgbClr val="FFFF00"/>
+                </a:highlight>
+                <a:latin typeface="Arial" panose="020B0604020202020204" pitchFamily="34" charset="0"/>
+                <a:cs typeface="Arial" panose="020B0604020202020204" pitchFamily="34" charset="0"/>
+              </a:rPr>
+              <a:t> es </a:t>
+            </a:r>
+            <a:r>
+              <a:rPr lang="en-US" sz="1200" dirty="0" err="1">
+                <a:highlight>
+                  <a:srgbClr val="FFFF00"/>
+                </a:highlight>
+                <a:latin typeface="Arial" panose="020B0604020202020204" pitchFamily="34" charset="0"/>
+                <a:cs typeface="Arial" panose="020B0604020202020204" pitchFamily="34" charset="0"/>
+              </a:rPr>
+              <a:t>multimodo</a:t>
+            </a:r>
+            <a:r>
+              <a:rPr lang="en-US" sz="1200" dirty="0">
+                <a:highlight>
+                  <a:srgbClr val="FFFF00"/>
+                </a:highlight>
+                <a:latin typeface="Arial" panose="020B0604020202020204" pitchFamily="34" charset="0"/>
+                <a:cs typeface="Arial" panose="020B0604020202020204" pitchFamily="34" charset="0"/>
+              </a:rPr>
+              <a:t> (se </a:t>
+            </a:r>
+            <a:r>
+              <a:rPr lang="en-US" sz="1200" dirty="0" err="1">
+                <a:highlight>
+                  <a:srgbClr val="FFFF00"/>
+                </a:highlight>
+                <a:latin typeface="Arial" panose="020B0604020202020204" pitchFamily="34" charset="0"/>
+                <a:cs typeface="Arial" panose="020B0604020202020204" pitchFamily="34" charset="0"/>
+              </a:rPr>
+              <a:t>propagan</a:t>
+            </a:r>
+            <a:r>
+              <a:rPr lang="en-US" sz="1200" dirty="0">
+                <a:highlight>
+                  <a:srgbClr val="FFFF00"/>
+                </a:highlight>
+                <a:latin typeface="Arial" panose="020B0604020202020204" pitchFamily="34" charset="0"/>
+                <a:cs typeface="Arial" panose="020B0604020202020204" pitchFamily="34" charset="0"/>
+              </a:rPr>
+              <a:t> TE0 y TM0) y para </a:t>
+            </a:r>
+            <a:r>
+              <a:rPr lang="en-US" sz="1200" dirty="0" err="1">
+                <a:highlight>
+                  <a:srgbClr val="FFFF00"/>
+                </a:highlight>
+                <a:latin typeface="Arial" panose="020B0604020202020204" pitchFamily="34" charset="0"/>
+                <a:cs typeface="Arial" panose="020B0604020202020204" pitchFamily="34" charset="0"/>
+              </a:rPr>
+              <a:t>menores</a:t>
+            </a:r>
+            <a:r>
+              <a:rPr lang="en-US" sz="1200" dirty="0">
+                <a:highlight>
+                  <a:srgbClr val="FFFF00"/>
+                </a:highlight>
+                <a:latin typeface="Arial" panose="020B0604020202020204" pitchFamily="34" charset="0"/>
+                <a:cs typeface="Arial" panose="020B0604020202020204" pitchFamily="34" charset="0"/>
+              </a:rPr>
+              <a:t>, </a:t>
+            </a:r>
+            <a:r>
+              <a:rPr lang="en-US" sz="1200" dirty="0" err="1">
+                <a:highlight>
+                  <a:srgbClr val="FFFF00"/>
+                </a:highlight>
+                <a:latin typeface="Arial" panose="020B0604020202020204" pitchFamily="34" charset="0"/>
+                <a:cs typeface="Arial" panose="020B0604020202020204" pitchFamily="34" charset="0"/>
+              </a:rPr>
+              <a:t>monomodo</a:t>
+            </a:r>
+            <a:r>
+              <a:rPr lang="en-US" sz="1200" dirty="0">
+                <a:highlight>
+                  <a:srgbClr val="FFFF00"/>
+                </a:highlight>
+                <a:latin typeface="Arial" panose="020B0604020202020204" pitchFamily="34" charset="0"/>
+                <a:cs typeface="Arial" panose="020B0604020202020204" pitchFamily="34" charset="0"/>
+              </a:rPr>
+              <a:t> (se </a:t>
+            </a:r>
+            <a:r>
+              <a:rPr lang="en-US" sz="1200" dirty="0" err="1">
+                <a:highlight>
+                  <a:srgbClr val="FFFF00"/>
+                </a:highlight>
+                <a:latin typeface="Arial" panose="020B0604020202020204" pitchFamily="34" charset="0"/>
+                <a:cs typeface="Arial" panose="020B0604020202020204" pitchFamily="34" charset="0"/>
+              </a:rPr>
+              <a:t>propagan</a:t>
+            </a:r>
+            <a:r>
+              <a:rPr lang="en-US" sz="1200" dirty="0">
+                <a:highlight>
+                  <a:srgbClr val="FFFF00"/>
+                </a:highlight>
+                <a:latin typeface="Arial" panose="020B0604020202020204" pitchFamily="34" charset="0"/>
+                <a:cs typeface="Arial" panose="020B0604020202020204" pitchFamily="34" charset="0"/>
+              </a:rPr>
+              <a:t> TE0, TM0 y TE1).</a:t>
+            </a:r>
+          </a:p>
+          <a:p>
+            <a:pPr algn="just"/>
+            <a:endParaRPr lang="en-US" sz="1200" dirty="0">
+              <a:latin typeface="Arial" panose="020B0604020202020204" pitchFamily="34" charset="0"/>
+              <a:cs typeface="Arial" panose="020B0604020202020204" pitchFamily="34" charset="0"/>
+            </a:endParaRPr>
+          </a:p>
+          <a:p>
+            <a:pPr algn="just"/>
+            <a:r>
               <a:rPr lang="en-US" sz="1200" dirty="0">
                 <a:solidFill>
                   <a:srgbClr val="FF0000"/>
                 </a:solidFill>
+                <a:highlight>
+                  <a:srgbClr val="FFFF00"/>
+                </a:highlight>
                 <a:latin typeface="Arial" panose="020B0604020202020204" pitchFamily="34" charset="0"/>
                 <a:cs typeface="Arial" panose="020B0604020202020204" pitchFamily="34" charset="0"/>
               </a:rPr>
@@ -11065,7 +11523,7 @@
         <p:spPr>
           <a:xfrm>
             <a:off x="609441" y="4419600"/>
-            <a:ext cx="5562759" cy="1384995"/>
+            <a:ext cx="5261137" cy="1169551"/>
           </a:xfrm>
           <a:prstGeom prst="rect">
             <a:avLst/>
@@ -11089,21 +11547,21 @@
           <a:p>
             <a:pPr algn="just"/>
             <a:r>
-              <a:rPr lang="es-ES" sz="1200" b="1" dirty="0">
+              <a:rPr lang="es-ES" sz="1000" b="1" dirty="0">
                 <a:latin typeface="Arial" panose="020B0604020202020204" pitchFamily="34" charset="0"/>
                 <a:cs typeface="Arial" panose="020B0604020202020204" pitchFamily="34" charset="0"/>
               </a:rPr>
               <a:t>Deep </a:t>
             </a:r>
             <a:r>
-              <a:rPr lang="es-ES" sz="1200" b="1" dirty="0" err="1">
+              <a:rPr lang="es-ES" sz="1000" b="1" dirty="0" err="1">
                 <a:latin typeface="Arial" panose="020B0604020202020204" pitchFamily="34" charset="0"/>
                 <a:cs typeface="Arial" panose="020B0604020202020204" pitchFamily="34" charset="0"/>
               </a:rPr>
               <a:t>waveguide</a:t>
             </a:r>
             <a:r>
-              <a:rPr lang="es-ES" sz="1200" b="1" dirty="0">
+              <a:rPr lang="es-ES" sz="1000" b="1" dirty="0">
                 <a:latin typeface="Arial" panose="020B0604020202020204" pitchFamily="34" charset="0"/>
                 <a:cs typeface="Arial" panose="020B0604020202020204" pitchFamily="34" charset="0"/>
               </a:rPr>
@@ -11113,399 +11571,427 @@
           <a:p>
             <a:pPr algn="just"/>
             <a:r>
-              <a:rPr lang="es-ES" sz="1200" dirty="0">
-                <a:latin typeface="Arial" panose="020B0604020202020204" pitchFamily="34" charset="0"/>
-                <a:cs typeface="Arial" panose="020B0604020202020204" pitchFamily="34" charset="0"/>
-              </a:rPr>
-              <a:t>TE0 central </a:t>
-            </a:r>
-            <a:r>
-              <a:rPr lang="es-ES" sz="1200" dirty="0" err="1">
-                <a:latin typeface="Arial" panose="020B0604020202020204" pitchFamily="34" charset="0"/>
-                <a:cs typeface="Arial" panose="020B0604020202020204" pitchFamily="34" charset="0"/>
-              </a:rPr>
-              <a:t>wavelength</a:t>
-            </a:r>
-            <a:r>
-              <a:rPr lang="es-ES" sz="1200" dirty="0">
+              <a:rPr lang="es-ES" sz="1000" dirty="0">
+                <a:latin typeface="Arial" panose="020B0604020202020204" pitchFamily="34" charset="0"/>
+                <a:cs typeface="Arial" panose="020B0604020202020204" pitchFamily="34" charset="0"/>
+              </a:rPr>
+              <a:t>TE0 (</a:t>
+            </a:r>
+            <a:r>
+              <a:rPr lang="es-ES" sz="1000" dirty="0" err="1">
+                <a:latin typeface="Arial" panose="020B0604020202020204" pitchFamily="34" charset="0"/>
+                <a:cs typeface="Arial" panose="020B0604020202020204" pitchFamily="34" charset="0"/>
+              </a:rPr>
+              <a:t>wl</a:t>
+            </a:r>
+            <a:r>
+              <a:rPr lang="es-ES" sz="1000" dirty="0">
+                <a:latin typeface="Arial" panose="020B0604020202020204" pitchFamily="34" charset="0"/>
+                <a:cs typeface="Arial" panose="020B0604020202020204" pitchFamily="34" charset="0"/>
+              </a:rPr>
+              <a:t>=1550um) </a:t>
+            </a:r>
+            <a:r>
+              <a:rPr lang="es-ES" sz="1000" b="1" dirty="0" err="1">
+                <a:latin typeface="Arial" panose="020B0604020202020204" pitchFamily="34" charset="0"/>
+                <a:cs typeface="Arial" panose="020B0604020202020204" pitchFamily="34" charset="0"/>
+              </a:rPr>
+              <a:t>effective</a:t>
+            </a:r>
+            <a:r>
+              <a:rPr lang="es-ES" sz="1000" b="1" dirty="0">
                 <a:latin typeface="Arial" panose="020B0604020202020204" pitchFamily="34" charset="0"/>
                 <a:cs typeface="Arial" panose="020B0604020202020204" pitchFamily="34" charset="0"/>
               </a:rPr>
               <a:t> </a:t>
             </a:r>
             <a:r>
-              <a:rPr lang="es-ES" sz="1200" dirty="0" err="1">
+              <a:rPr lang="es-ES" sz="1000" b="1" dirty="0" err="1">
+                <a:latin typeface="Arial" panose="020B0604020202020204" pitchFamily="34" charset="0"/>
+                <a:cs typeface="Arial" panose="020B0604020202020204" pitchFamily="34" charset="0"/>
+              </a:rPr>
+              <a:t>index</a:t>
+            </a:r>
+            <a:r>
+              <a:rPr lang="es-ES" sz="1000" b="1" dirty="0">
+                <a:latin typeface="Arial" panose="020B0604020202020204" pitchFamily="34" charset="0"/>
+                <a:cs typeface="Arial" panose="020B0604020202020204" pitchFamily="34" charset="0"/>
+              </a:rPr>
+              <a:t> </a:t>
+            </a:r>
+            <a:r>
+              <a:rPr lang="es-ES" sz="1000" dirty="0">
+                <a:latin typeface="Arial" panose="020B0604020202020204" pitchFamily="34" charset="0"/>
+                <a:cs typeface="Arial" panose="020B0604020202020204" pitchFamily="34" charset="0"/>
+              </a:rPr>
+              <a:t>(</a:t>
+            </a:r>
+            <a:r>
+              <a:rPr lang="es-ES" sz="1000" dirty="0" err="1">
+                <a:latin typeface="Arial" panose="020B0604020202020204" pitchFamily="34" charset="0"/>
+                <a:cs typeface="Arial" panose="020B0604020202020204" pitchFamily="34" charset="0"/>
+              </a:rPr>
+              <a:t>polyfit</a:t>
+            </a:r>
+            <a:r>
+              <a:rPr lang="es-ES" sz="1000" dirty="0">
+                <a:latin typeface="Arial" panose="020B0604020202020204" pitchFamily="34" charset="0"/>
+                <a:cs typeface="Arial" panose="020B0604020202020204" pitchFamily="34" charset="0"/>
+              </a:rPr>
+              <a:t>): 1.6049166291026744</a:t>
+            </a:r>
+          </a:p>
+          <a:p>
+            <a:pPr algn="just"/>
+            <a:r>
+              <a:rPr lang="es-ES" sz="1000" dirty="0">
+                <a:latin typeface="Arial" panose="020B0604020202020204" pitchFamily="34" charset="0"/>
+                <a:cs typeface="Arial" panose="020B0604020202020204" pitchFamily="34" charset="0"/>
+              </a:rPr>
+              <a:t>TE0 (</a:t>
+            </a:r>
+            <a:r>
+              <a:rPr lang="es-ES" sz="1000" dirty="0" err="1">
+                <a:latin typeface="Arial" panose="020B0604020202020204" pitchFamily="34" charset="0"/>
+                <a:cs typeface="Arial" panose="020B0604020202020204" pitchFamily="34" charset="0"/>
+              </a:rPr>
+              <a:t>wl</a:t>
+            </a:r>
+            <a:r>
+              <a:rPr lang="es-ES" sz="1000" dirty="0">
+                <a:latin typeface="Arial" panose="020B0604020202020204" pitchFamily="34" charset="0"/>
+                <a:cs typeface="Arial" panose="020B0604020202020204" pitchFamily="34" charset="0"/>
+              </a:rPr>
+              <a:t>=1550um) </a:t>
+            </a:r>
+            <a:r>
+              <a:rPr lang="es-ES" sz="1000" b="1" dirty="0" err="1">
+                <a:latin typeface="Arial" panose="020B0604020202020204" pitchFamily="34" charset="0"/>
+                <a:cs typeface="Arial" panose="020B0604020202020204" pitchFamily="34" charset="0"/>
+              </a:rPr>
+              <a:t>group</a:t>
+            </a:r>
+            <a:r>
+              <a:rPr lang="es-ES" sz="1000" b="1" dirty="0">
+                <a:latin typeface="Arial" panose="020B0604020202020204" pitchFamily="34" charset="0"/>
+                <a:cs typeface="Arial" panose="020B0604020202020204" pitchFamily="34" charset="0"/>
+              </a:rPr>
+              <a:t> </a:t>
+            </a:r>
+            <a:r>
+              <a:rPr lang="es-ES" sz="1000" b="1" dirty="0" err="1">
+                <a:latin typeface="Arial" panose="020B0604020202020204" pitchFamily="34" charset="0"/>
+                <a:cs typeface="Arial" panose="020B0604020202020204" pitchFamily="34" charset="0"/>
+              </a:rPr>
+              <a:t>index</a:t>
+            </a:r>
+            <a:r>
+              <a:rPr lang="es-ES" sz="1000" b="1" dirty="0">
+                <a:latin typeface="Arial" panose="020B0604020202020204" pitchFamily="34" charset="0"/>
+                <a:cs typeface="Arial" panose="020B0604020202020204" pitchFamily="34" charset="0"/>
+              </a:rPr>
+              <a:t> </a:t>
+            </a:r>
+            <a:r>
+              <a:rPr lang="es-ES" sz="1000" dirty="0">
+                <a:latin typeface="Arial" panose="020B0604020202020204" pitchFamily="34" charset="0"/>
+                <a:cs typeface="Arial" panose="020B0604020202020204" pitchFamily="34" charset="0"/>
+              </a:rPr>
+              <a:t>(</a:t>
+            </a:r>
+            <a:r>
+              <a:rPr lang="es-ES" sz="1000" dirty="0" err="1">
+                <a:latin typeface="Arial" panose="020B0604020202020204" pitchFamily="34" charset="0"/>
+                <a:cs typeface="Arial" panose="020B0604020202020204" pitchFamily="34" charset="0"/>
+              </a:rPr>
+              <a:t>polyfit</a:t>
+            </a:r>
+            <a:r>
+              <a:rPr lang="es-ES" sz="1000" dirty="0">
+                <a:latin typeface="Arial" panose="020B0604020202020204" pitchFamily="34" charset="0"/>
+                <a:cs typeface="Arial" panose="020B0604020202020204" pitchFamily="34" charset="0"/>
+              </a:rPr>
+              <a:t>): 1.9399909008100613</a:t>
+            </a:r>
+          </a:p>
+          <a:p>
+            <a:pPr algn="just"/>
+            <a:r>
+              <a:rPr lang="es-ES" sz="1000" dirty="0">
+                <a:latin typeface="Arial" panose="020B0604020202020204" pitchFamily="34" charset="0"/>
+                <a:cs typeface="Arial" panose="020B0604020202020204" pitchFamily="34" charset="0"/>
+              </a:rPr>
+              <a:t>TE0 (</a:t>
+            </a:r>
+            <a:r>
+              <a:rPr lang="es-ES" sz="1000" dirty="0" err="1">
+                <a:latin typeface="Arial" panose="020B0604020202020204" pitchFamily="34" charset="0"/>
+                <a:cs typeface="Arial" panose="020B0604020202020204" pitchFamily="34" charset="0"/>
+              </a:rPr>
+              <a:t>wl</a:t>
+            </a:r>
+            <a:r>
+              <a:rPr lang="es-ES" sz="1000" dirty="0">
+                <a:latin typeface="Arial" panose="020B0604020202020204" pitchFamily="34" charset="0"/>
+                <a:cs typeface="Arial" panose="020B0604020202020204" pitchFamily="34" charset="0"/>
+              </a:rPr>
+              <a:t>=1550um) </a:t>
+            </a:r>
+            <a:r>
+              <a:rPr lang="es-ES" sz="1000" b="1" dirty="0" err="1">
+                <a:latin typeface="Arial" panose="020B0604020202020204" pitchFamily="34" charset="0"/>
+                <a:cs typeface="Arial" panose="020B0604020202020204" pitchFamily="34" charset="0"/>
+              </a:rPr>
+              <a:t>dispersion</a:t>
+            </a:r>
+            <a:r>
+              <a:rPr lang="es-ES" sz="1000" dirty="0">
+                <a:latin typeface="Arial" panose="020B0604020202020204" pitchFamily="34" charset="0"/>
+                <a:cs typeface="Arial" panose="020B0604020202020204" pitchFamily="34" charset="0"/>
+              </a:rPr>
+              <a:t> (</a:t>
+            </a:r>
+            <a:r>
+              <a:rPr lang="es-ES" sz="1000" dirty="0" err="1">
+                <a:latin typeface="Arial" panose="020B0604020202020204" pitchFamily="34" charset="0"/>
+                <a:cs typeface="Arial" panose="020B0604020202020204" pitchFamily="34" charset="0"/>
+              </a:rPr>
+              <a:t>polyfit</a:t>
+            </a:r>
+            <a:r>
+              <a:rPr lang="es-ES" sz="1000" dirty="0">
+                <a:latin typeface="Arial" panose="020B0604020202020204" pitchFamily="34" charset="0"/>
+                <a:cs typeface="Arial" panose="020B0604020202020204" pitchFamily="34" charset="0"/>
+              </a:rPr>
+              <a:t>): -1006.6987866611223 </a:t>
+            </a:r>
+            <a:r>
+              <a:rPr lang="es-ES" sz="1000" dirty="0" err="1">
+                <a:latin typeface="Arial" panose="020B0604020202020204" pitchFamily="34" charset="0"/>
+                <a:cs typeface="Arial" panose="020B0604020202020204" pitchFamily="34" charset="0"/>
+              </a:rPr>
+              <a:t>ps</a:t>
+            </a:r>
+            <a:r>
+              <a:rPr lang="es-ES" sz="1000" dirty="0">
+                <a:latin typeface="Arial" panose="020B0604020202020204" pitchFamily="34" charset="0"/>
+                <a:cs typeface="Arial" panose="020B0604020202020204" pitchFamily="34" charset="0"/>
+              </a:rPr>
+              <a:t>/(km*nm)</a:t>
+            </a:r>
+          </a:p>
+          <a:p>
+            <a:pPr algn="just"/>
+            <a:r>
+              <a:rPr lang="es-ES" sz="1000" dirty="0">
+                <a:latin typeface="Arial" panose="020B0604020202020204" pitchFamily="34" charset="0"/>
+                <a:cs typeface="Arial" panose="020B0604020202020204" pitchFamily="34" charset="0"/>
+              </a:rPr>
+              <a:t>TM0 (</a:t>
+            </a:r>
+            <a:r>
+              <a:rPr lang="es-ES" sz="1000" dirty="0" err="1">
+                <a:latin typeface="Arial" panose="020B0604020202020204" pitchFamily="34" charset="0"/>
+                <a:cs typeface="Arial" panose="020B0604020202020204" pitchFamily="34" charset="0"/>
+              </a:rPr>
+              <a:t>wl</a:t>
+            </a:r>
+            <a:r>
+              <a:rPr lang="es-ES" sz="1000" dirty="0">
+                <a:latin typeface="Arial" panose="020B0604020202020204" pitchFamily="34" charset="0"/>
+                <a:cs typeface="Arial" panose="020B0604020202020204" pitchFamily="34" charset="0"/>
+              </a:rPr>
+              <a:t>=1550um) </a:t>
+            </a:r>
+            <a:r>
+              <a:rPr lang="es-ES" sz="1000" b="1" dirty="0" err="1">
                 <a:latin typeface="Arial" panose="020B0604020202020204" pitchFamily="34" charset="0"/>
                 <a:cs typeface="Arial" panose="020B0604020202020204" pitchFamily="34" charset="0"/>
               </a:rPr>
               <a:t>effective</a:t>
             </a:r>
             <a:r>
-              <a:rPr lang="es-ES" sz="1200" dirty="0">
+              <a:rPr lang="es-ES" sz="1000" b="1" dirty="0">
                 <a:latin typeface="Arial" panose="020B0604020202020204" pitchFamily="34" charset="0"/>
                 <a:cs typeface="Arial" panose="020B0604020202020204" pitchFamily="34" charset="0"/>
               </a:rPr>
               <a:t> </a:t>
             </a:r>
             <a:r>
-              <a:rPr lang="es-ES" sz="1200" dirty="0" err="1">
+              <a:rPr lang="es-ES" sz="1000" b="1" dirty="0" err="1">
                 <a:latin typeface="Arial" panose="020B0604020202020204" pitchFamily="34" charset="0"/>
                 <a:cs typeface="Arial" panose="020B0604020202020204" pitchFamily="34" charset="0"/>
               </a:rPr>
               <a:t>index</a:t>
             </a:r>
             <a:r>
-              <a:rPr lang="es-ES" sz="1200" dirty="0">
+              <a:rPr lang="es-ES" sz="1000" b="1" dirty="0">
+                <a:latin typeface="Arial" panose="020B0604020202020204" pitchFamily="34" charset="0"/>
+                <a:cs typeface="Arial" panose="020B0604020202020204" pitchFamily="34" charset="0"/>
+              </a:rPr>
+              <a:t> </a:t>
+            </a:r>
+            <a:r>
+              <a:rPr lang="es-ES" sz="1000" dirty="0">
+                <a:latin typeface="Arial" panose="020B0604020202020204" pitchFamily="34" charset="0"/>
+                <a:cs typeface="Arial" panose="020B0604020202020204" pitchFamily="34" charset="0"/>
+              </a:rPr>
+              <a:t>(</a:t>
+            </a:r>
+            <a:r>
+              <a:rPr lang="es-ES" sz="1000" dirty="0" err="1">
+                <a:latin typeface="Arial" panose="020B0604020202020204" pitchFamily="34" charset="0"/>
+                <a:cs typeface="Arial" panose="020B0604020202020204" pitchFamily="34" charset="0"/>
+              </a:rPr>
+              <a:t>polyfit</a:t>
+            </a:r>
+            <a:r>
+              <a:rPr lang="es-ES" sz="1000" dirty="0">
+                <a:latin typeface="Arial" panose="020B0604020202020204" pitchFamily="34" charset="0"/>
+                <a:cs typeface="Arial" panose="020B0604020202020204" pitchFamily="34" charset="0"/>
+              </a:rPr>
+              <a:t>): 1.5271892343288158</a:t>
+            </a:r>
+          </a:p>
+          <a:p>
+            <a:pPr algn="just"/>
+            <a:r>
+              <a:rPr lang="es-ES" sz="1000" dirty="0">
+                <a:latin typeface="Arial" panose="020B0604020202020204" pitchFamily="34" charset="0"/>
+                <a:cs typeface="Arial" panose="020B0604020202020204" pitchFamily="34" charset="0"/>
+              </a:rPr>
+              <a:t>TM0 (</a:t>
+            </a:r>
+            <a:r>
+              <a:rPr lang="es-ES" sz="1000" dirty="0" err="1">
+                <a:latin typeface="Arial" panose="020B0604020202020204" pitchFamily="34" charset="0"/>
+                <a:cs typeface="Arial" panose="020B0604020202020204" pitchFamily="34" charset="0"/>
+              </a:rPr>
+              <a:t>wl</a:t>
+            </a:r>
+            <a:r>
+              <a:rPr lang="es-ES" sz="1000" dirty="0">
+                <a:latin typeface="Arial" panose="020B0604020202020204" pitchFamily="34" charset="0"/>
+                <a:cs typeface="Arial" panose="020B0604020202020204" pitchFamily="34" charset="0"/>
+              </a:rPr>
+              <a:t>=1550um) </a:t>
+            </a:r>
+            <a:r>
+              <a:rPr lang="es-ES" sz="1000" b="1" dirty="0" err="1">
+                <a:latin typeface="Arial" panose="020B0604020202020204" pitchFamily="34" charset="0"/>
+                <a:cs typeface="Arial" panose="020B0604020202020204" pitchFamily="34" charset="0"/>
+              </a:rPr>
+              <a:t>group</a:t>
+            </a:r>
+            <a:r>
+              <a:rPr lang="es-ES" sz="1000" b="1" dirty="0">
+                <a:latin typeface="Arial" panose="020B0604020202020204" pitchFamily="34" charset="0"/>
+                <a:cs typeface="Arial" panose="020B0604020202020204" pitchFamily="34" charset="0"/>
+              </a:rPr>
+              <a:t> </a:t>
+            </a:r>
+            <a:r>
+              <a:rPr lang="es-ES" sz="1000" b="1" dirty="0" err="1">
+                <a:latin typeface="Arial" panose="020B0604020202020204" pitchFamily="34" charset="0"/>
+                <a:cs typeface="Arial" panose="020B0604020202020204" pitchFamily="34" charset="0"/>
+              </a:rPr>
+              <a:t>index</a:t>
+            </a:r>
+            <a:r>
+              <a:rPr lang="es-ES" sz="1000" b="1" dirty="0">
+                <a:latin typeface="Arial" panose="020B0604020202020204" pitchFamily="34" charset="0"/>
+                <a:cs typeface="Arial" panose="020B0604020202020204" pitchFamily="34" charset="0"/>
+              </a:rPr>
+              <a:t> </a:t>
+            </a:r>
+            <a:r>
+              <a:rPr lang="es-ES" sz="1000" dirty="0">
+                <a:latin typeface="Arial" panose="020B0604020202020204" pitchFamily="34" charset="0"/>
+                <a:cs typeface="Arial" panose="020B0604020202020204" pitchFamily="34" charset="0"/>
+              </a:rPr>
+              <a:t>(</a:t>
+            </a:r>
+            <a:r>
+              <a:rPr lang="es-ES" sz="1000" dirty="0" err="1">
+                <a:latin typeface="Arial" panose="020B0604020202020204" pitchFamily="34" charset="0"/>
+                <a:cs typeface="Arial" panose="020B0604020202020204" pitchFamily="34" charset="0"/>
+              </a:rPr>
+              <a:t>polyfit</a:t>
+            </a:r>
+            <a:r>
+              <a:rPr lang="es-ES" sz="1000" dirty="0">
+                <a:latin typeface="Arial" panose="020B0604020202020204" pitchFamily="34" charset="0"/>
+                <a:cs typeface="Arial" panose="020B0604020202020204" pitchFamily="34" charset="0"/>
+              </a:rPr>
+              <a:t>): 1.772025347866792</a:t>
+            </a:r>
+          </a:p>
+          <a:p>
+            <a:pPr algn="just"/>
+            <a:r>
+              <a:rPr lang="es-ES" sz="1000" dirty="0">
+                <a:latin typeface="Arial" panose="020B0604020202020204" pitchFamily="34" charset="0"/>
+                <a:cs typeface="Arial" panose="020B0604020202020204" pitchFamily="34" charset="0"/>
+              </a:rPr>
+              <a:t>TM0 (</a:t>
+            </a:r>
+            <a:r>
+              <a:rPr lang="es-ES" sz="1000" dirty="0" err="1">
+                <a:latin typeface="Arial" panose="020B0604020202020204" pitchFamily="34" charset="0"/>
+                <a:cs typeface="Arial" panose="020B0604020202020204" pitchFamily="34" charset="0"/>
+              </a:rPr>
+              <a:t>wl</a:t>
+            </a:r>
+            <a:r>
+              <a:rPr lang="es-ES" sz="1000" dirty="0">
+                <a:latin typeface="Arial" panose="020B0604020202020204" pitchFamily="34" charset="0"/>
+                <a:cs typeface="Arial" panose="020B0604020202020204" pitchFamily="34" charset="0"/>
+              </a:rPr>
+              <a:t>=1550um) </a:t>
+            </a:r>
+            <a:r>
+              <a:rPr lang="es-ES" sz="1000" b="1" dirty="0" err="1">
+                <a:latin typeface="Arial" panose="020B0604020202020204" pitchFamily="34" charset="0"/>
+                <a:cs typeface="Arial" panose="020B0604020202020204" pitchFamily="34" charset="0"/>
+              </a:rPr>
+              <a:t>dispersion</a:t>
+            </a:r>
+            <a:r>
+              <a:rPr lang="es-ES" sz="1000" dirty="0">
                 <a:latin typeface="Arial" panose="020B0604020202020204" pitchFamily="34" charset="0"/>
                 <a:cs typeface="Arial" panose="020B0604020202020204" pitchFamily="34" charset="0"/>
               </a:rPr>
               <a:t> (</a:t>
             </a:r>
             <a:r>
-              <a:rPr lang="es-ES" sz="1200" dirty="0" err="1">
+              <a:rPr lang="es-ES" sz="1000" dirty="0" err="1">
                 <a:latin typeface="Arial" panose="020B0604020202020204" pitchFamily="34" charset="0"/>
                 <a:cs typeface="Arial" panose="020B0604020202020204" pitchFamily="34" charset="0"/>
               </a:rPr>
               <a:t>polyfit</a:t>
             </a:r>
             <a:r>
-              <a:rPr lang="es-ES" sz="1200" dirty="0">
-                <a:latin typeface="Arial" panose="020B0604020202020204" pitchFamily="34" charset="0"/>
-                <a:cs typeface="Arial" panose="020B0604020202020204" pitchFamily="34" charset="0"/>
-              </a:rPr>
-              <a:t>): 1.6049166291026744</a:t>
-            </a:r>
-          </a:p>
-          <a:p>
-            <a:pPr algn="just"/>
-            <a:r>
-              <a:rPr lang="es-ES" sz="1200" dirty="0">
-                <a:latin typeface="Arial" panose="020B0604020202020204" pitchFamily="34" charset="0"/>
-                <a:cs typeface="Arial" panose="020B0604020202020204" pitchFamily="34" charset="0"/>
-              </a:rPr>
-              <a:t>TE0 central </a:t>
-            </a:r>
-            <a:r>
-              <a:rPr lang="es-ES" sz="1200" dirty="0" err="1">
-                <a:latin typeface="Arial" panose="020B0604020202020204" pitchFamily="34" charset="0"/>
-                <a:cs typeface="Arial" panose="020B0604020202020204" pitchFamily="34" charset="0"/>
-              </a:rPr>
-              <a:t>wavelength</a:t>
-            </a:r>
-            <a:r>
-              <a:rPr lang="es-ES" sz="1200" dirty="0">
-                <a:latin typeface="Arial" panose="020B0604020202020204" pitchFamily="34" charset="0"/>
-                <a:cs typeface="Arial" panose="020B0604020202020204" pitchFamily="34" charset="0"/>
-              </a:rPr>
-              <a:t> </a:t>
-            </a:r>
-            <a:r>
-              <a:rPr lang="es-ES" sz="1200" dirty="0" err="1">
-                <a:latin typeface="Arial" panose="020B0604020202020204" pitchFamily="34" charset="0"/>
-                <a:cs typeface="Arial" panose="020B0604020202020204" pitchFamily="34" charset="0"/>
-              </a:rPr>
-              <a:t>group</a:t>
-            </a:r>
-            <a:r>
-              <a:rPr lang="es-ES" sz="1200" dirty="0">
-                <a:latin typeface="Arial" panose="020B0604020202020204" pitchFamily="34" charset="0"/>
-                <a:cs typeface="Arial" panose="020B0604020202020204" pitchFamily="34" charset="0"/>
-              </a:rPr>
-              <a:t> </a:t>
-            </a:r>
-            <a:r>
-              <a:rPr lang="es-ES" sz="1200" dirty="0" err="1">
-                <a:latin typeface="Arial" panose="020B0604020202020204" pitchFamily="34" charset="0"/>
-                <a:cs typeface="Arial" panose="020B0604020202020204" pitchFamily="34" charset="0"/>
-              </a:rPr>
-              <a:t>index</a:t>
-            </a:r>
-            <a:r>
-              <a:rPr lang="es-ES" sz="1200" dirty="0">
-                <a:latin typeface="Arial" panose="020B0604020202020204" pitchFamily="34" charset="0"/>
-                <a:cs typeface="Arial" panose="020B0604020202020204" pitchFamily="34" charset="0"/>
-              </a:rPr>
-              <a:t> (</a:t>
-            </a:r>
-            <a:r>
-              <a:rPr lang="es-ES" sz="1200" dirty="0" err="1">
-                <a:latin typeface="Arial" panose="020B0604020202020204" pitchFamily="34" charset="0"/>
-                <a:cs typeface="Arial" panose="020B0604020202020204" pitchFamily="34" charset="0"/>
-              </a:rPr>
-              <a:t>polyfit</a:t>
-            </a:r>
-            <a:r>
-              <a:rPr lang="es-ES" sz="1200" dirty="0">
-                <a:latin typeface="Arial" panose="020B0604020202020204" pitchFamily="34" charset="0"/>
-                <a:cs typeface="Arial" panose="020B0604020202020204" pitchFamily="34" charset="0"/>
-              </a:rPr>
-              <a:t>): 1.9399909008100613</a:t>
-            </a:r>
-          </a:p>
-          <a:p>
-            <a:pPr algn="just"/>
-            <a:r>
-              <a:rPr lang="es-ES" sz="1200" dirty="0">
-                <a:latin typeface="Arial" panose="020B0604020202020204" pitchFamily="34" charset="0"/>
-                <a:cs typeface="Arial" panose="020B0604020202020204" pitchFamily="34" charset="0"/>
-              </a:rPr>
-              <a:t>TE0 central </a:t>
-            </a:r>
-            <a:r>
-              <a:rPr lang="es-ES" sz="1200" dirty="0" err="1">
-                <a:latin typeface="Arial" panose="020B0604020202020204" pitchFamily="34" charset="0"/>
-                <a:cs typeface="Arial" panose="020B0604020202020204" pitchFamily="34" charset="0"/>
-              </a:rPr>
-              <a:t>wavelength</a:t>
-            </a:r>
-            <a:r>
-              <a:rPr lang="es-ES" sz="1200" dirty="0">
-                <a:latin typeface="Arial" panose="020B0604020202020204" pitchFamily="34" charset="0"/>
-                <a:cs typeface="Arial" panose="020B0604020202020204" pitchFamily="34" charset="0"/>
-              </a:rPr>
-              <a:t> </a:t>
-            </a:r>
-            <a:r>
-              <a:rPr lang="es-ES" sz="1200" dirty="0" err="1">
-                <a:latin typeface="Arial" panose="020B0604020202020204" pitchFamily="34" charset="0"/>
-                <a:cs typeface="Arial" panose="020B0604020202020204" pitchFamily="34" charset="0"/>
-              </a:rPr>
-              <a:t>dispersion</a:t>
-            </a:r>
-            <a:r>
-              <a:rPr lang="es-ES" sz="1200" dirty="0">
-                <a:latin typeface="Arial" panose="020B0604020202020204" pitchFamily="34" charset="0"/>
-                <a:cs typeface="Arial" panose="020B0604020202020204" pitchFamily="34" charset="0"/>
-              </a:rPr>
-              <a:t> (</a:t>
-            </a:r>
-            <a:r>
-              <a:rPr lang="es-ES" sz="1200" dirty="0" err="1">
-                <a:latin typeface="Arial" panose="020B0604020202020204" pitchFamily="34" charset="0"/>
-                <a:cs typeface="Arial" panose="020B0604020202020204" pitchFamily="34" charset="0"/>
-              </a:rPr>
-              <a:t>polyfit</a:t>
-            </a:r>
-            <a:r>
-              <a:rPr lang="es-ES" sz="1200" dirty="0">
-                <a:latin typeface="Arial" panose="020B0604020202020204" pitchFamily="34" charset="0"/>
-                <a:cs typeface="Arial" panose="020B0604020202020204" pitchFamily="34" charset="0"/>
-              </a:rPr>
-              <a:t>): -1006.6987866611223 </a:t>
-            </a:r>
-            <a:r>
-              <a:rPr lang="es-ES" sz="1200" dirty="0" err="1">
+              <a:rPr lang="es-ES" sz="1000" dirty="0">
+                <a:latin typeface="Arial" panose="020B0604020202020204" pitchFamily="34" charset="0"/>
+                <a:cs typeface="Arial" panose="020B0604020202020204" pitchFamily="34" charset="0"/>
+              </a:rPr>
+              <a:t>): -1590.6948234078707 </a:t>
+            </a:r>
+            <a:r>
+              <a:rPr lang="es-ES" sz="1000" dirty="0" err="1">
                 <a:latin typeface="Arial" panose="020B0604020202020204" pitchFamily="34" charset="0"/>
                 <a:cs typeface="Arial" panose="020B0604020202020204" pitchFamily="34" charset="0"/>
               </a:rPr>
               <a:t>ps</a:t>
             </a:r>
             <a:r>
-              <a:rPr lang="es-ES" sz="1200" dirty="0">
+              <a:rPr lang="es-ES" sz="1000" dirty="0">
                 <a:latin typeface="Arial" panose="020B0604020202020204" pitchFamily="34" charset="0"/>
                 <a:cs typeface="Arial" panose="020B0604020202020204" pitchFamily="34" charset="0"/>
               </a:rPr>
               <a:t>/(km*nm)</a:t>
             </a:r>
-          </a:p>
-          <a:p>
-            <a:pPr algn="just"/>
-            <a:r>
-              <a:rPr lang="es-ES" sz="1200" dirty="0">
-                <a:latin typeface="Arial" panose="020B0604020202020204" pitchFamily="34" charset="0"/>
-                <a:cs typeface="Arial" panose="020B0604020202020204" pitchFamily="34" charset="0"/>
-              </a:rPr>
-              <a:t>TM0 central </a:t>
-            </a:r>
-            <a:r>
-              <a:rPr lang="es-ES" sz="1200" dirty="0" err="1">
-                <a:latin typeface="Arial" panose="020B0604020202020204" pitchFamily="34" charset="0"/>
-                <a:cs typeface="Arial" panose="020B0604020202020204" pitchFamily="34" charset="0"/>
-              </a:rPr>
-              <a:t>wavelength</a:t>
-            </a:r>
-            <a:r>
-              <a:rPr lang="es-ES" sz="1200" dirty="0">
-                <a:latin typeface="Arial" panose="020B0604020202020204" pitchFamily="34" charset="0"/>
-                <a:cs typeface="Arial" panose="020B0604020202020204" pitchFamily="34" charset="0"/>
-              </a:rPr>
-              <a:t> </a:t>
-            </a:r>
-            <a:r>
-              <a:rPr lang="es-ES" sz="1200" dirty="0" err="1">
-                <a:latin typeface="Arial" panose="020B0604020202020204" pitchFamily="34" charset="0"/>
-                <a:cs typeface="Arial" panose="020B0604020202020204" pitchFamily="34" charset="0"/>
-              </a:rPr>
-              <a:t>effective</a:t>
-            </a:r>
-            <a:r>
-              <a:rPr lang="es-ES" sz="1200" dirty="0">
-                <a:latin typeface="Arial" panose="020B0604020202020204" pitchFamily="34" charset="0"/>
-                <a:cs typeface="Arial" panose="020B0604020202020204" pitchFamily="34" charset="0"/>
-              </a:rPr>
-              <a:t> </a:t>
-            </a:r>
-            <a:r>
-              <a:rPr lang="es-ES" sz="1200" dirty="0" err="1">
-                <a:latin typeface="Arial" panose="020B0604020202020204" pitchFamily="34" charset="0"/>
-                <a:cs typeface="Arial" panose="020B0604020202020204" pitchFamily="34" charset="0"/>
-              </a:rPr>
-              <a:t>index</a:t>
-            </a:r>
-            <a:r>
-              <a:rPr lang="es-ES" sz="1200" dirty="0">
-                <a:latin typeface="Arial" panose="020B0604020202020204" pitchFamily="34" charset="0"/>
-                <a:cs typeface="Arial" panose="020B0604020202020204" pitchFamily="34" charset="0"/>
-              </a:rPr>
-              <a:t> (</a:t>
-            </a:r>
-            <a:r>
-              <a:rPr lang="es-ES" sz="1200" dirty="0" err="1">
-                <a:latin typeface="Arial" panose="020B0604020202020204" pitchFamily="34" charset="0"/>
-                <a:cs typeface="Arial" panose="020B0604020202020204" pitchFamily="34" charset="0"/>
-              </a:rPr>
-              <a:t>polyfit</a:t>
-            </a:r>
-            <a:r>
-              <a:rPr lang="es-ES" sz="1200" dirty="0">
-                <a:latin typeface="Arial" panose="020B0604020202020204" pitchFamily="34" charset="0"/>
-                <a:cs typeface="Arial" panose="020B0604020202020204" pitchFamily="34" charset="0"/>
-              </a:rPr>
-              <a:t>): 1.5271892343288158</a:t>
-            </a:r>
-          </a:p>
-          <a:p>
-            <a:pPr algn="just"/>
-            <a:r>
-              <a:rPr lang="es-ES" sz="1200" dirty="0">
-                <a:latin typeface="Arial" panose="020B0604020202020204" pitchFamily="34" charset="0"/>
-                <a:cs typeface="Arial" panose="020B0604020202020204" pitchFamily="34" charset="0"/>
-              </a:rPr>
-              <a:t>TM0 central </a:t>
-            </a:r>
-            <a:r>
-              <a:rPr lang="es-ES" sz="1200" dirty="0" err="1">
-                <a:latin typeface="Arial" panose="020B0604020202020204" pitchFamily="34" charset="0"/>
-                <a:cs typeface="Arial" panose="020B0604020202020204" pitchFamily="34" charset="0"/>
-              </a:rPr>
-              <a:t>wavelength</a:t>
-            </a:r>
-            <a:r>
-              <a:rPr lang="es-ES" sz="1200" dirty="0">
-                <a:latin typeface="Arial" panose="020B0604020202020204" pitchFamily="34" charset="0"/>
-                <a:cs typeface="Arial" panose="020B0604020202020204" pitchFamily="34" charset="0"/>
-              </a:rPr>
-              <a:t> </a:t>
-            </a:r>
-            <a:r>
-              <a:rPr lang="es-ES" sz="1200" dirty="0" err="1">
-                <a:latin typeface="Arial" panose="020B0604020202020204" pitchFamily="34" charset="0"/>
-                <a:cs typeface="Arial" panose="020B0604020202020204" pitchFamily="34" charset="0"/>
-              </a:rPr>
-              <a:t>group</a:t>
-            </a:r>
-            <a:r>
-              <a:rPr lang="es-ES" sz="1200" dirty="0">
-                <a:latin typeface="Arial" panose="020B0604020202020204" pitchFamily="34" charset="0"/>
-                <a:cs typeface="Arial" panose="020B0604020202020204" pitchFamily="34" charset="0"/>
-              </a:rPr>
-              <a:t> </a:t>
-            </a:r>
-            <a:r>
-              <a:rPr lang="es-ES" sz="1200" dirty="0" err="1">
-                <a:latin typeface="Arial" panose="020B0604020202020204" pitchFamily="34" charset="0"/>
-                <a:cs typeface="Arial" panose="020B0604020202020204" pitchFamily="34" charset="0"/>
-              </a:rPr>
-              <a:t>index</a:t>
-            </a:r>
-            <a:r>
-              <a:rPr lang="es-ES" sz="1200" dirty="0">
-                <a:latin typeface="Arial" panose="020B0604020202020204" pitchFamily="34" charset="0"/>
-                <a:cs typeface="Arial" panose="020B0604020202020204" pitchFamily="34" charset="0"/>
-              </a:rPr>
-              <a:t> (</a:t>
-            </a:r>
-            <a:r>
-              <a:rPr lang="es-ES" sz="1200" dirty="0" err="1">
-                <a:latin typeface="Arial" panose="020B0604020202020204" pitchFamily="34" charset="0"/>
-                <a:cs typeface="Arial" panose="020B0604020202020204" pitchFamily="34" charset="0"/>
-              </a:rPr>
-              <a:t>polyfit</a:t>
-            </a:r>
-            <a:r>
-              <a:rPr lang="es-ES" sz="1200" dirty="0">
-                <a:latin typeface="Arial" panose="020B0604020202020204" pitchFamily="34" charset="0"/>
-                <a:cs typeface="Arial" panose="020B0604020202020204" pitchFamily="34" charset="0"/>
-              </a:rPr>
-              <a:t>): 1.772025347866792</a:t>
-            </a:r>
-          </a:p>
-          <a:p>
-            <a:pPr algn="just"/>
-            <a:r>
-              <a:rPr lang="es-ES" sz="1200" dirty="0">
-                <a:latin typeface="Arial" panose="020B0604020202020204" pitchFamily="34" charset="0"/>
-                <a:cs typeface="Arial" panose="020B0604020202020204" pitchFamily="34" charset="0"/>
-              </a:rPr>
-              <a:t>TM0 central </a:t>
-            </a:r>
-            <a:r>
-              <a:rPr lang="es-ES" sz="1200" dirty="0" err="1">
-                <a:latin typeface="Arial" panose="020B0604020202020204" pitchFamily="34" charset="0"/>
-                <a:cs typeface="Arial" panose="020B0604020202020204" pitchFamily="34" charset="0"/>
-              </a:rPr>
-              <a:t>wavelength</a:t>
-            </a:r>
-            <a:r>
-              <a:rPr lang="es-ES" sz="1200" dirty="0">
-                <a:latin typeface="Arial" panose="020B0604020202020204" pitchFamily="34" charset="0"/>
-                <a:cs typeface="Arial" panose="020B0604020202020204" pitchFamily="34" charset="0"/>
-              </a:rPr>
-              <a:t> </a:t>
-            </a:r>
-            <a:r>
-              <a:rPr lang="es-ES" sz="1200" dirty="0" err="1">
-                <a:latin typeface="Arial" panose="020B0604020202020204" pitchFamily="34" charset="0"/>
-                <a:cs typeface="Arial" panose="020B0604020202020204" pitchFamily="34" charset="0"/>
-              </a:rPr>
-              <a:t>dispersion</a:t>
-            </a:r>
-            <a:r>
-              <a:rPr lang="es-ES" sz="1200" dirty="0">
-                <a:latin typeface="Arial" panose="020B0604020202020204" pitchFamily="34" charset="0"/>
-                <a:cs typeface="Arial" panose="020B0604020202020204" pitchFamily="34" charset="0"/>
-              </a:rPr>
-              <a:t> (</a:t>
-            </a:r>
-            <a:r>
-              <a:rPr lang="es-ES" sz="1200" dirty="0" err="1">
-                <a:latin typeface="Arial" panose="020B0604020202020204" pitchFamily="34" charset="0"/>
-                <a:cs typeface="Arial" panose="020B0604020202020204" pitchFamily="34" charset="0"/>
-              </a:rPr>
-              <a:t>polyfit</a:t>
-            </a:r>
-            <a:r>
-              <a:rPr lang="es-ES" sz="1200" dirty="0">
-                <a:latin typeface="Arial" panose="020B0604020202020204" pitchFamily="34" charset="0"/>
-                <a:cs typeface="Arial" panose="020B0604020202020204" pitchFamily="34" charset="0"/>
-              </a:rPr>
-              <a:t>): -1590.6948234078707 </a:t>
-            </a:r>
-            <a:r>
-              <a:rPr lang="es-ES" sz="1200" dirty="0" err="1">
-                <a:latin typeface="Arial" panose="020B0604020202020204" pitchFamily="34" charset="0"/>
-                <a:cs typeface="Arial" panose="020B0604020202020204" pitchFamily="34" charset="0"/>
-              </a:rPr>
-              <a:t>ps</a:t>
-            </a:r>
-            <a:r>
-              <a:rPr lang="es-ES" sz="1200" dirty="0">
-                <a:latin typeface="Arial" panose="020B0604020202020204" pitchFamily="34" charset="0"/>
-                <a:cs typeface="Arial" panose="020B0604020202020204" pitchFamily="34" charset="0"/>
-              </a:rPr>
-              <a:t>/(km*nm)</a:t>
-            </a:r>
-            <a:endParaRPr lang="en-US" sz="1200" dirty="0">
+            <a:endParaRPr lang="en-US" sz="1000" dirty="0">
               <a:latin typeface="Arial" panose="020B0604020202020204" pitchFamily="34" charset="0"/>
               <a:cs typeface="Arial" panose="020B0604020202020204" pitchFamily="34" charset="0"/>
             </a:endParaRPr>
@@ -11526,8 +12012,8 @@
         </p:nvSpPr>
         <p:spPr>
           <a:xfrm>
-            <a:off x="609441" y="1447800"/>
-            <a:ext cx="5486559" cy="2971800"/>
+            <a:off x="609442" y="1447800"/>
+            <a:ext cx="5261136" cy="2971800"/>
           </a:xfrm>
           <a:prstGeom prst="rect">
             <a:avLst/>
@@ -11578,8 +12064,8 @@
         </p:nvSpPr>
         <p:spPr>
           <a:xfrm>
-            <a:off x="6321424" y="1447800"/>
-            <a:ext cx="5486559" cy="2966289"/>
+            <a:off x="6245224" y="1447800"/>
+            <a:ext cx="5209357" cy="2966289"/>
           </a:xfrm>
           <a:prstGeom prst="rect">
             <a:avLst/>
@@ -11668,7 +12154,7 @@
         </p:blipFill>
         <p:spPr>
           <a:xfrm>
-            <a:off x="7170712" y="1476434"/>
+            <a:off x="7002011" y="1489249"/>
             <a:ext cx="3695781" cy="2919410"/>
           </a:xfrm>
           <a:prstGeom prst="rect">
@@ -11678,55 +12164,6 @@
       </p:pic>
       <p:sp>
         <p:nvSpPr>
-          <p:cNvPr id="8" name="CuadroTexto 7">
-            <a:extLst>
-              <a:ext uri="{FF2B5EF4-FFF2-40B4-BE49-F238E27FC236}">
-                <a16:creationId xmlns:a16="http://schemas.microsoft.com/office/drawing/2014/main" id="{0F38E924-A0E7-A039-C837-916BA77FE89B}"/>
-              </a:ext>
-            </a:extLst>
-          </p:cNvPr>
-          <p:cNvSpPr txBox="1"/>
-          <p:nvPr/>
-        </p:nvSpPr>
-        <p:spPr>
-          <a:xfrm>
-            <a:off x="6347361" y="4498712"/>
-            <a:ext cx="5486560" cy="276999"/>
-          </a:xfrm>
-          <a:prstGeom prst="rect">
-            <a:avLst/>
-          </a:prstGeom>
-          <a:noFill/>
-        </p:spPr>
-        <p:txBody>
-          <a:bodyPr wrap="square">
-            <a:spAutoFit/>
-          </a:bodyPr>
-          <a:lstStyle/>
-          <a:p>
-            <a:pPr algn="r"/>
-            <a:r>
-              <a:rPr lang="en-US" sz="1200" b="1" dirty="0">
-                <a:solidFill>
-                  <a:schemeClr val="tx1"/>
-                </a:solidFill>
-                <a:latin typeface="Arial" panose="020B0604020202020204" pitchFamily="34" charset="0"/>
-                <a:cs typeface="Arial" panose="020B0604020202020204" pitchFamily="34" charset="0"/>
-              </a:rPr>
-              <a:t>slab: 150nm</a:t>
-            </a:r>
-            <a:endParaRPr lang="en-US" sz="1200" dirty="0">
-              <a:solidFill>
-                <a:schemeClr val="tx1"/>
-              </a:solidFill>
-              <a:latin typeface="Arial" panose="020B0604020202020204" pitchFamily="34" charset="0"/>
-              <a:cs typeface="Arial" panose="020B0604020202020204" pitchFamily="34" charset="0"/>
-            </a:endParaRPr>
-          </a:p>
-        </p:txBody>
-      </p:sp>
-      <p:sp>
-        <p:nvSpPr>
           <p:cNvPr id="13" name="CuadroTexto 12">
             <a:extLst>
               <a:ext uri="{FF2B5EF4-FFF2-40B4-BE49-F238E27FC236}">
@@ -11740,7 +12177,7 @@
         <p:spPr>
           <a:xfrm>
             <a:off x="6248400" y="4419600"/>
-            <a:ext cx="5562759" cy="1384995"/>
+            <a:ext cx="5206181" cy="1169551"/>
           </a:xfrm>
           <a:prstGeom prst="rect">
             <a:avLst/>
@@ -11763,428 +12200,456 @@
           <a:lstStyle/>
           <a:p>
             <a:r>
-              <a:rPr lang="es-ES" sz="1200" b="1" dirty="0" err="1">
+              <a:rPr lang="es-ES" sz="1000" b="1" dirty="0" err="1">
                 <a:latin typeface="Arial" panose="020B0604020202020204" pitchFamily="34" charset="0"/>
                 <a:cs typeface="Arial" panose="020B0604020202020204" pitchFamily="34" charset="0"/>
               </a:rPr>
               <a:t>Shallow</a:t>
             </a:r>
             <a:r>
-              <a:rPr lang="es-ES" sz="1200" b="1" dirty="0">
+              <a:rPr lang="es-ES" sz="1000" b="1" dirty="0">
                 <a:latin typeface="Arial" panose="020B0604020202020204" pitchFamily="34" charset="0"/>
                 <a:cs typeface="Arial" panose="020B0604020202020204" pitchFamily="34" charset="0"/>
               </a:rPr>
               <a:t> </a:t>
             </a:r>
             <a:r>
-              <a:rPr lang="es-ES" sz="1200" b="1" dirty="0" err="1">
+              <a:rPr lang="es-ES" sz="1000" b="1" dirty="0" err="1">
                 <a:latin typeface="Arial" panose="020B0604020202020204" pitchFamily="34" charset="0"/>
                 <a:cs typeface="Arial" panose="020B0604020202020204" pitchFamily="34" charset="0"/>
               </a:rPr>
               <a:t>waveguide</a:t>
             </a:r>
             <a:r>
-              <a:rPr lang="es-ES" sz="1200" b="1" dirty="0">
+              <a:rPr lang="es-ES" sz="1000" b="1" dirty="0">
                 <a:latin typeface="Arial" panose="020B0604020202020204" pitchFamily="34" charset="0"/>
                 <a:cs typeface="Arial" panose="020B0604020202020204" pitchFamily="34" charset="0"/>
               </a:rPr>
               <a:t>:</a:t>
             </a:r>
-            <a:endParaRPr lang="es-ES" sz="1200" dirty="0">
+            <a:endParaRPr lang="es-ES" sz="1000" dirty="0">
               <a:latin typeface="Arial" panose="020B0604020202020204" pitchFamily="34" charset="0"/>
               <a:cs typeface="Arial" panose="020B0604020202020204" pitchFamily="34" charset="0"/>
             </a:endParaRPr>
           </a:p>
           <a:p>
             <a:r>
-              <a:rPr lang="es-ES" sz="1200" dirty="0">
-                <a:latin typeface="Arial" panose="020B0604020202020204" pitchFamily="34" charset="0"/>
-                <a:cs typeface="Arial" panose="020B0604020202020204" pitchFamily="34" charset="0"/>
-              </a:rPr>
-              <a:t>TE0 central </a:t>
-            </a:r>
-            <a:r>
-              <a:rPr lang="es-ES" sz="1200" dirty="0" err="1">
-                <a:latin typeface="Arial" panose="020B0604020202020204" pitchFamily="34" charset="0"/>
-                <a:cs typeface="Arial" panose="020B0604020202020204" pitchFamily="34" charset="0"/>
-              </a:rPr>
-              <a:t>wavelength</a:t>
-            </a:r>
-            <a:r>
-              <a:rPr lang="es-ES" sz="1200" dirty="0">
+              <a:rPr lang="es-ES" sz="1000" dirty="0">
+                <a:latin typeface="Arial" panose="020B0604020202020204" pitchFamily="34" charset="0"/>
+                <a:cs typeface="Arial" panose="020B0604020202020204" pitchFamily="34" charset="0"/>
+              </a:rPr>
+              <a:t>TE0 (</a:t>
+            </a:r>
+            <a:r>
+              <a:rPr lang="es-ES" sz="1000" dirty="0" err="1">
+                <a:latin typeface="Arial" panose="020B0604020202020204" pitchFamily="34" charset="0"/>
+                <a:cs typeface="Arial" panose="020B0604020202020204" pitchFamily="34" charset="0"/>
+              </a:rPr>
+              <a:t>wl</a:t>
+            </a:r>
+            <a:r>
+              <a:rPr lang="es-ES" sz="1000" dirty="0">
+                <a:latin typeface="Arial" panose="020B0604020202020204" pitchFamily="34" charset="0"/>
+                <a:cs typeface="Arial" panose="020B0604020202020204" pitchFamily="34" charset="0"/>
+              </a:rPr>
+              <a:t>=1550um) </a:t>
+            </a:r>
+            <a:r>
+              <a:rPr lang="es-ES" sz="1000" b="1" dirty="0" err="1">
+                <a:latin typeface="Arial" panose="020B0604020202020204" pitchFamily="34" charset="0"/>
+                <a:cs typeface="Arial" panose="020B0604020202020204" pitchFamily="34" charset="0"/>
+              </a:rPr>
+              <a:t>effective</a:t>
+            </a:r>
+            <a:r>
+              <a:rPr lang="es-ES" sz="1000" b="1" dirty="0">
                 <a:latin typeface="Arial" panose="020B0604020202020204" pitchFamily="34" charset="0"/>
                 <a:cs typeface="Arial" panose="020B0604020202020204" pitchFamily="34" charset="0"/>
               </a:rPr>
               <a:t> </a:t>
             </a:r>
             <a:r>
-              <a:rPr lang="es-ES" sz="1200" dirty="0" err="1">
+              <a:rPr lang="es-ES" sz="1000" b="1" dirty="0" err="1">
+                <a:latin typeface="Arial" panose="020B0604020202020204" pitchFamily="34" charset="0"/>
+                <a:cs typeface="Arial" panose="020B0604020202020204" pitchFamily="34" charset="0"/>
+              </a:rPr>
+              <a:t>index</a:t>
+            </a:r>
+            <a:r>
+              <a:rPr lang="es-ES" sz="1000" b="1" dirty="0">
+                <a:latin typeface="Arial" panose="020B0604020202020204" pitchFamily="34" charset="0"/>
+                <a:cs typeface="Arial" panose="020B0604020202020204" pitchFamily="34" charset="0"/>
+              </a:rPr>
+              <a:t> </a:t>
+            </a:r>
+            <a:r>
+              <a:rPr lang="es-ES" sz="1000" dirty="0">
+                <a:latin typeface="Arial" panose="020B0604020202020204" pitchFamily="34" charset="0"/>
+                <a:cs typeface="Arial" panose="020B0604020202020204" pitchFamily="34" charset="0"/>
+              </a:rPr>
+              <a:t>(</a:t>
+            </a:r>
+            <a:r>
+              <a:rPr lang="es-ES" sz="1000" dirty="0" err="1">
+                <a:latin typeface="Arial" panose="020B0604020202020204" pitchFamily="34" charset="0"/>
+                <a:cs typeface="Arial" panose="020B0604020202020204" pitchFamily="34" charset="0"/>
+              </a:rPr>
+              <a:t>polyfit</a:t>
+            </a:r>
+            <a:r>
+              <a:rPr lang="es-ES" sz="1000" dirty="0">
+                <a:latin typeface="Arial" panose="020B0604020202020204" pitchFamily="34" charset="0"/>
+                <a:cs typeface="Arial" panose="020B0604020202020204" pitchFamily="34" charset="0"/>
+              </a:rPr>
+              <a:t>): 1.6240906297465494</a:t>
+            </a:r>
+          </a:p>
+          <a:p>
+            <a:r>
+              <a:rPr lang="es-ES" sz="1000" dirty="0">
+                <a:latin typeface="Arial" panose="020B0604020202020204" pitchFamily="34" charset="0"/>
+                <a:cs typeface="Arial" panose="020B0604020202020204" pitchFamily="34" charset="0"/>
+              </a:rPr>
+              <a:t>TE0 (</a:t>
+            </a:r>
+            <a:r>
+              <a:rPr lang="es-ES" sz="1000" dirty="0" err="1">
+                <a:latin typeface="Arial" panose="020B0604020202020204" pitchFamily="34" charset="0"/>
+                <a:cs typeface="Arial" panose="020B0604020202020204" pitchFamily="34" charset="0"/>
+              </a:rPr>
+              <a:t>wl</a:t>
+            </a:r>
+            <a:r>
+              <a:rPr lang="es-ES" sz="1000" dirty="0">
+                <a:latin typeface="Arial" panose="020B0604020202020204" pitchFamily="34" charset="0"/>
+                <a:cs typeface="Arial" panose="020B0604020202020204" pitchFamily="34" charset="0"/>
+              </a:rPr>
+              <a:t>=1550um) </a:t>
+            </a:r>
+            <a:r>
+              <a:rPr lang="es-ES" sz="1000" b="1" dirty="0" err="1">
+                <a:latin typeface="Arial" panose="020B0604020202020204" pitchFamily="34" charset="0"/>
+                <a:cs typeface="Arial" panose="020B0604020202020204" pitchFamily="34" charset="0"/>
+              </a:rPr>
+              <a:t>group</a:t>
+            </a:r>
+            <a:r>
+              <a:rPr lang="es-ES" sz="1000" b="1" dirty="0">
+                <a:latin typeface="Arial" panose="020B0604020202020204" pitchFamily="34" charset="0"/>
+                <a:cs typeface="Arial" panose="020B0604020202020204" pitchFamily="34" charset="0"/>
+              </a:rPr>
+              <a:t> </a:t>
+            </a:r>
+            <a:r>
+              <a:rPr lang="es-ES" sz="1000" b="1" dirty="0" err="1">
+                <a:latin typeface="Arial" panose="020B0604020202020204" pitchFamily="34" charset="0"/>
+                <a:cs typeface="Arial" panose="020B0604020202020204" pitchFamily="34" charset="0"/>
+              </a:rPr>
+              <a:t>index</a:t>
+            </a:r>
+            <a:r>
+              <a:rPr lang="es-ES" sz="1000" b="1" dirty="0">
+                <a:latin typeface="Arial" panose="020B0604020202020204" pitchFamily="34" charset="0"/>
+                <a:cs typeface="Arial" panose="020B0604020202020204" pitchFamily="34" charset="0"/>
+              </a:rPr>
+              <a:t> </a:t>
+            </a:r>
+            <a:r>
+              <a:rPr lang="es-ES" sz="1000" dirty="0">
+                <a:latin typeface="Arial" panose="020B0604020202020204" pitchFamily="34" charset="0"/>
+                <a:cs typeface="Arial" panose="020B0604020202020204" pitchFamily="34" charset="0"/>
+              </a:rPr>
+              <a:t>(</a:t>
+            </a:r>
+            <a:r>
+              <a:rPr lang="es-ES" sz="1000" dirty="0" err="1">
+                <a:latin typeface="Arial" panose="020B0604020202020204" pitchFamily="34" charset="0"/>
+                <a:cs typeface="Arial" panose="020B0604020202020204" pitchFamily="34" charset="0"/>
+              </a:rPr>
+              <a:t>polyfit</a:t>
+            </a:r>
+            <a:r>
+              <a:rPr lang="es-ES" sz="1000" dirty="0">
+                <a:latin typeface="Arial" panose="020B0604020202020204" pitchFamily="34" charset="0"/>
+                <a:cs typeface="Arial" panose="020B0604020202020204" pitchFamily="34" charset="0"/>
+              </a:rPr>
+              <a:t>): 1.9157617116967773</a:t>
+            </a:r>
+          </a:p>
+          <a:p>
+            <a:r>
+              <a:rPr lang="es-ES" sz="1000" dirty="0">
+                <a:latin typeface="Arial" panose="020B0604020202020204" pitchFamily="34" charset="0"/>
+                <a:cs typeface="Arial" panose="020B0604020202020204" pitchFamily="34" charset="0"/>
+              </a:rPr>
+              <a:t>TE0 (</a:t>
+            </a:r>
+            <a:r>
+              <a:rPr lang="es-ES" sz="1000" dirty="0" err="1">
+                <a:latin typeface="Arial" panose="020B0604020202020204" pitchFamily="34" charset="0"/>
+                <a:cs typeface="Arial" panose="020B0604020202020204" pitchFamily="34" charset="0"/>
+              </a:rPr>
+              <a:t>wl</a:t>
+            </a:r>
+            <a:r>
+              <a:rPr lang="es-ES" sz="1000" dirty="0">
+                <a:latin typeface="Arial" panose="020B0604020202020204" pitchFamily="34" charset="0"/>
+                <a:cs typeface="Arial" panose="020B0604020202020204" pitchFamily="34" charset="0"/>
+              </a:rPr>
+              <a:t>=1550um) </a:t>
+            </a:r>
+            <a:r>
+              <a:rPr lang="es-ES" sz="1000" b="1" dirty="0" err="1">
+                <a:latin typeface="Arial" panose="020B0604020202020204" pitchFamily="34" charset="0"/>
+                <a:cs typeface="Arial" panose="020B0604020202020204" pitchFamily="34" charset="0"/>
+              </a:rPr>
+              <a:t>dispersion</a:t>
+            </a:r>
+            <a:r>
+              <a:rPr lang="es-ES" sz="1000" dirty="0">
+                <a:latin typeface="Arial" panose="020B0604020202020204" pitchFamily="34" charset="0"/>
+                <a:cs typeface="Arial" panose="020B0604020202020204" pitchFamily="34" charset="0"/>
+              </a:rPr>
+              <a:t> (</a:t>
+            </a:r>
+            <a:r>
+              <a:rPr lang="es-ES" sz="1000" dirty="0" err="1">
+                <a:latin typeface="Arial" panose="020B0604020202020204" pitchFamily="34" charset="0"/>
+                <a:cs typeface="Arial" panose="020B0604020202020204" pitchFamily="34" charset="0"/>
+              </a:rPr>
+              <a:t>polyfit</a:t>
+            </a:r>
+            <a:r>
+              <a:rPr lang="es-ES" sz="1000" dirty="0">
+                <a:latin typeface="Arial" panose="020B0604020202020204" pitchFamily="34" charset="0"/>
+                <a:cs typeface="Arial" panose="020B0604020202020204" pitchFamily="34" charset="0"/>
+              </a:rPr>
+              <a:t>): -989.5411991927712 </a:t>
+            </a:r>
+            <a:r>
+              <a:rPr lang="es-ES" sz="1000" dirty="0" err="1">
+                <a:latin typeface="Arial" panose="020B0604020202020204" pitchFamily="34" charset="0"/>
+                <a:cs typeface="Arial" panose="020B0604020202020204" pitchFamily="34" charset="0"/>
+              </a:rPr>
+              <a:t>ps</a:t>
+            </a:r>
+            <a:r>
+              <a:rPr lang="es-ES" sz="1000" dirty="0">
+                <a:latin typeface="Arial" panose="020B0604020202020204" pitchFamily="34" charset="0"/>
+                <a:cs typeface="Arial" panose="020B0604020202020204" pitchFamily="34" charset="0"/>
+              </a:rPr>
+              <a:t>/(km*nm)</a:t>
+            </a:r>
+          </a:p>
+          <a:p>
+            <a:r>
+              <a:rPr lang="es-ES" sz="1000" dirty="0">
+                <a:latin typeface="Arial" panose="020B0604020202020204" pitchFamily="34" charset="0"/>
+                <a:cs typeface="Arial" panose="020B0604020202020204" pitchFamily="34" charset="0"/>
+              </a:rPr>
+              <a:t>TM0 (</a:t>
+            </a:r>
+            <a:r>
+              <a:rPr lang="es-ES" sz="1000" dirty="0" err="1">
+                <a:latin typeface="Arial" panose="020B0604020202020204" pitchFamily="34" charset="0"/>
+                <a:cs typeface="Arial" panose="020B0604020202020204" pitchFamily="34" charset="0"/>
+              </a:rPr>
+              <a:t>wl</a:t>
+            </a:r>
+            <a:r>
+              <a:rPr lang="es-ES" sz="1000" dirty="0">
+                <a:latin typeface="Arial" panose="020B0604020202020204" pitchFamily="34" charset="0"/>
+                <a:cs typeface="Arial" panose="020B0604020202020204" pitchFamily="34" charset="0"/>
+              </a:rPr>
+              <a:t>=1550um) </a:t>
+            </a:r>
+            <a:r>
+              <a:rPr lang="es-ES" sz="1000" b="1" dirty="0" err="1">
                 <a:latin typeface="Arial" panose="020B0604020202020204" pitchFamily="34" charset="0"/>
                 <a:cs typeface="Arial" panose="020B0604020202020204" pitchFamily="34" charset="0"/>
               </a:rPr>
               <a:t>effective</a:t>
             </a:r>
             <a:r>
-              <a:rPr lang="es-ES" sz="1200" dirty="0">
+              <a:rPr lang="es-ES" sz="1000" b="1" dirty="0">
                 <a:latin typeface="Arial" panose="020B0604020202020204" pitchFamily="34" charset="0"/>
                 <a:cs typeface="Arial" panose="020B0604020202020204" pitchFamily="34" charset="0"/>
               </a:rPr>
               <a:t> </a:t>
             </a:r>
             <a:r>
-              <a:rPr lang="es-ES" sz="1200" dirty="0" err="1">
+              <a:rPr lang="es-ES" sz="1000" b="1" dirty="0" err="1">
                 <a:latin typeface="Arial" panose="020B0604020202020204" pitchFamily="34" charset="0"/>
                 <a:cs typeface="Arial" panose="020B0604020202020204" pitchFamily="34" charset="0"/>
               </a:rPr>
               <a:t>index</a:t>
             </a:r>
             <a:r>
-              <a:rPr lang="es-ES" sz="1200" dirty="0">
+              <a:rPr lang="es-ES" sz="1000" b="1" dirty="0">
+                <a:latin typeface="Arial" panose="020B0604020202020204" pitchFamily="34" charset="0"/>
+                <a:cs typeface="Arial" panose="020B0604020202020204" pitchFamily="34" charset="0"/>
+              </a:rPr>
+              <a:t> </a:t>
+            </a:r>
+            <a:r>
+              <a:rPr lang="es-ES" sz="1000" dirty="0">
+                <a:latin typeface="Arial" panose="020B0604020202020204" pitchFamily="34" charset="0"/>
+                <a:cs typeface="Arial" panose="020B0604020202020204" pitchFamily="34" charset="0"/>
+              </a:rPr>
+              <a:t>(</a:t>
+            </a:r>
+            <a:r>
+              <a:rPr lang="es-ES" sz="1000" dirty="0" err="1">
+                <a:latin typeface="Arial" panose="020B0604020202020204" pitchFamily="34" charset="0"/>
+                <a:cs typeface="Arial" panose="020B0604020202020204" pitchFamily="34" charset="0"/>
+              </a:rPr>
+              <a:t>polyfit</a:t>
+            </a:r>
+            <a:r>
+              <a:rPr lang="es-ES" sz="1000" dirty="0">
+                <a:latin typeface="Arial" panose="020B0604020202020204" pitchFamily="34" charset="0"/>
+                <a:cs typeface="Arial" panose="020B0604020202020204" pitchFamily="34" charset="0"/>
+              </a:rPr>
+              <a:t>): 1.5361017569770001</a:t>
+            </a:r>
+          </a:p>
+          <a:p>
+            <a:r>
+              <a:rPr lang="es-ES" sz="1000" dirty="0">
+                <a:latin typeface="Arial" panose="020B0604020202020204" pitchFamily="34" charset="0"/>
+                <a:cs typeface="Arial" panose="020B0604020202020204" pitchFamily="34" charset="0"/>
+              </a:rPr>
+              <a:t>TM0 (</a:t>
+            </a:r>
+            <a:r>
+              <a:rPr lang="es-ES" sz="1000" dirty="0" err="1">
+                <a:latin typeface="Arial" panose="020B0604020202020204" pitchFamily="34" charset="0"/>
+                <a:cs typeface="Arial" panose="020B0604020202020204" pitchFamily="34" charset="0"/>
+              </a:rPr>
+              <a:t>wl</a:t>
+            </a:r>
+            <a:r>
+              <a:rPr lang="es-ES" sz="1000" dirty="0">
+                <a:latin typeface="Arial" panose="020B0604020202020204" pitchFamily="34" charset="0"/>
+                <a:cs typeface="Arial" panose="020B0604020202020204" pitchFamily="34" charset="0"/>
+              </a:rPr>
+              <a:t>=1550um) </a:t>
+            </a:r>
+            <a:r>
+              <a:rPr lang="es-ES" sz="1000" b="1" dirty="0" err="1">
+                <a:latin typeface="Arial" panose="020B0604020202020204" pitchFamily="34" charset="0"/>
+                <a:cs typeface="Arial" panose="020B0604020202020204" pitchFamily="34" charset="0"/>
+              </a:rPr>
+              <a:t>group</a:t>
+            </a:r>
+            <a:r>
+              <a:rPr lang="es-ES" sz="1000" b="1" dirty="0">
+                <a:latin typeface="Arial" panose="020B0604020202020204" pitchFamily="34" charset="0"/>
+                <a:cs typeface="Arial" panose="020B0604020202020204" pitchFamily="34" charset="0"/>
+              </a:rPr>
+              <a:t> </a:t>
+            </a:r>
+            <a:r>
+              <a:rPr lang="es-ES" sz="1000" b="1" dirty="0" err="1">
+                <a:latin typeface="Arial" panose="020B0604020202020204" pitchFamily="34" charset="0"/>
+                <a:cs typeface="Arial" panose="020B0604020202020204" pitchFamily="34" charset="0"/>
+              </a:rPr>
+              <a:t>index</a:t>
+            </a:r>
+            <a:r>
+              <a:rPr lang="es-ES" sz="1000" b="1" dirty="0">
+                <a:latin typeface="Arial" panose="020B0604020202020204" pitchFamily="34" charset="0"/>
+                <a:cs typeface="Arial" panose="020B0604020202020204" pitchFamily="34" charset="0"/>
+              </a:rPr>
+              <a:t> </a:t>
+            </a:r>
+            <a:r>
+              <a:rPr lang="es-ES" sz="1000" dirty="0">
+                <a:latin typeface="Arial" panose="020B0604020202020204" pitchFamily="34" charset="0"/>
+                <a:cs typeface="Arial" panose="020B0604020202020204" pitchFamily="34" charset="0"/>
+              </a:rPr>
+              <a:t>(</a:t>
+            </a:r>
+            <a:r>
+              <a:rPr lang="es-ES" sz="1000" dirty="0" err="1">
+                <a:latin typeface="Arial" panose="020B0604020202020204" pitchFamily="34" charset="0"/>
+                <a:cs typeface="Arial" panose="020B0604020202020204" pitchFamily="34" charset="0"/>
+              </a:rPr>
+              <a:t>polyfit</a:t>
+            </a:r>
+            <a:r>
+              <a:rPr lang="es-ES" sz="1000" dirty="0">
+                <a:latin typeface="Arial" panose="020B0604020202020204" pitchFamily="34" charset="0"/>
+                <a:cs typeface="Arial" panose="020B0604020202020204" pitchFamily="34" charset="0"/>
+              </a:rPr>
+              <a:t>): 1.751028636956494</a:t>
+            </a:r>
+          </a:p>
+          <a:p>
+            <a:r>
+              <a:rPr lang="es-ES" sz="1000" dirty="0">
+                <a:latin typeface="Arial" panose="020B0604020202020204" pitchFamily="34" charset="0"/>
+                <a:cs typeface="Arial" panose="020B0604020202020204" pitchFamily="34" charset="0"/>
+              </a:rPr>
+              <a:t>TM0 (</a:t>
+            </a:r>
+            <a:r>
+              <a:rPr lang="es-ES" sz="1000" dirty="0" err="1">
+                <a:latin typeface="Arial" panose="020B0604020202020204" pitchFamily="34" charset="0"/>
+                <a:cs typeface="Arial" panose="020B0604020202020204" pitchFamily="34" charset="0"/>
+              </a:rPr>
+              <a:t>wl</a:t>
+            </a:r>
+            <a:r>
+              <a:rPr lang="es-ES" sz="1000" dirty="0">
+                <a:latin typeface="Arial" panose="020B0604020202020204" pitchFamily="34" charset="0"/>
+                <a:cs typeface="Arial" panose="020B0604020202020204" pitchFamily="34" charset="0"/>
+              </a:rPr>
+              <a:t>=1550um) </a:t>
+            </a:r>
+            <a:r>
+              <a:rPr lang="es-ES" sz="1000" b="1" dirty="0" err="1">
+                <a:latin typeface="Arial" panose="020B0604020202020204" pitchFamily="34" charset="0"/>
+                <a:cs typeface="Arial" panose="020B0604020202020204" pitchFamily="34" charset="0"/>
+              </a:rPr>
+              <a:t>dispersion</a:t>
+            </a:r>
+            <a:r>
+              <a:rPr lang="es-ES" sz="1000" dirty="0">
                 <a:latin typeface="Arial" panose="020B0604020202020204" pitchFamily="34" charset="0"/>
                 <a:cs typeface="Arial" panose="020B0604020202020204" pitchFamily="34" charset="0"/>
               </a:rPr>
               <a:t> (</a:t>
             </a:r>
             <a:r>
-              <a:rPr lang="es-ES" sz="1200" dirty="0" err="1">
+              <a:rPr lang="es-ES" sz="1000" dirty="0" err="1">
                 <a:latin typeface="Arial" panose="020B0604020202020204" pitchFamily="34" charset="0"/>
                 <a:cs typeface="Arial" panose="020B0604020202020204" pitchFamily="34" charset="0"/>
               </a:rPr>
               <a:t>polyfit</a:t>
             </a:r>
             <a:r>
-              <a:rPr lang="es-ES" sz="1200" dirty="0">
-                <a:latin typeface="Arial" panose="020B0604020202020204" pitchFamily="34" charset="0"/>
-                <a:cs typeface="Arial" panose="020B0604020202020204" pitchFamily="34" charset="0"/>
-              </a:rPr>
-              <a:t>): 1.6240906297465494</a:t>
-            </a:r>
-          </a:p>
-          <a:p>
-            <a:r>
-              <a:rPr lang="es-ES" sz="1200" dirty="0">
-                <a:latin typeface="Arial" panose="020B0604020202020204" pitchFamily="34" charset="0"/>
-                <a:cs typeface="Arial" panose="020B0604020202020204" pitchFamily="34" charset="0"/>
-              </a:rPr>
-              <a:t>TE0 central </a:t>
-            </a:r>
-            <a:r>
-              <a:rPr lang="es-ES" sz="1200" dirty="0" err="1">
-                <a:latin typeface="Arial" panose="020B0604020202020204" pitchFamily="34" charset="0"/>
-                <a:cs typeface="Arial" panose="020B0604020202020204" pitchFamily="34" charset="0"/>
-              </a:rPr>
-              <a:t>wavelength</a:t>
-            </a:r>
-            <a:r>
-              <a:rPr lang="es-ES" sz="1200" dirty="0">
-                <a:latin typeface="Arial" panose="020B0604020202020204" pitchFamily="34" charset="0"/>
-                <a:cs typeface="Arial" panose="020B0604020202020204" pitchFamily="34" charset="0"/>
-              </a:rPr>
-              <a:t> </a:t>
-            </a:r>
-            <a:r>
-              <a:rPr lang="es-ES" sz="1200" dirty="0" err="1">
-                <a:latin typeface="Arial" panose="020B0604020202020204" pitchFamily="34" charset="0"/>
-                <a:cs typeface="Arial" panose="020B0604020202020204" pitchFamily="34" charset="0"/>
-              </a:rPr>
-              <a:t>group</a:t>
-            </a:r>
-            <a:r>
-              <a:rPr lang="es-ES" sz="1200" dirty="0">
-                <a:latin typeface="Arial" panose="020B0604020202020204" pitchFamily="34" charset="0"/>
-                <a:cs typeface="Arial" panose="020B0604020202020204" pitchFamily="34" charset="0"/>
-              </a:rPr>
-              <a:t> </a:t>
-            </a:r>
-            <a:r>
-              <a:rPr lang="es-ES" sz="1200" dirty="0" err="1">
-                <a:latin typeface="Arial" panose="020B0604020202020204" pitchFamily="34" charset="0"/>
-                <a:cs typeface="Arial" panose="020B0604020202020204" pitchFamily="34" charset="0"/>
-              </a:rPr>
-              <a:t>index</a:t>
-            </a:r>
-            <a:r>
-              <a:rPr lang="es-ES" sz="1200" dirty="0">
-                <a:latin typeface="Arial" panose="020B0604020202020204" pitchFamily="34" charset="0"/>
-                <a:cs typeface="Arial" panose="020B0604020202020204" pitchFamily="34" charset="0"/>
-              </a:rPr>
-              <a:t> (</a:t>
-            </a:r>
-            <a:r>
-              <a:rPr lang="es-ES" sz="1200" dirty="0" err="1">
-                <a:latin typeface="Arial" panose="020B0604020202020204" pitchFamily="34" charset="0"/>
-                <a:cs typeface="Arial" panose="020B0604020202020204" pitchFamily="34" charset="0"/>
-              </a:rPr>
-              <a:t>polyfit</a:t>
-            </a:r>
-            <a:r>
-              <a:rPr lang="es-ES" sz="1200" dirty="0">
-                <a:latin typeface="Arial" panose="020B0604020202020204" pitchFamily="34" charset="0"/>
-                <a:cs typeface="Arial" panose="020B0604020202020204" pitchFamily="34" charset="0"/>
-              </a:rPr>
-              <a:t>): 1.9157617116967773</a:t>
-            </a:r>
-          </a:p>
-          <a:p>
-            <a:r>
-              <a:rPr lang="es-ES" sz="1200" dirty="0">
-                <a:latin typeface="Arial" panose="020B0604020202020204" pitchFamily="34" charset="0"/>
-                <a:cs typeface="Arial" panose="020B0604020202020204" pitchFamily="34" charset="0"/>
-              </a:rPr>
-              <a:t>TE0 central </a:t>
-            </a:r>
-            <a:r>
-              <a:rPr lang="es-ES" sz="1200" dirty="0" err="1">
-                <a:latin typeface="Arial" panose="020B0604020202020204" pitchFamily="34" charset="0"/>
-                <a:cs typeface="Arial" panose="020B0604020202020204" pitchFamily="34" charset="0"/>
-              </a:rPr>
-              <a:t>wavelength</a:t>
-            </a:r>
-            <a:r>
-              <a:rPr lang="es-ES" sz="1200" dirty="0">
-                <a:latin typeface="Arial" panose="020B0604020202020204" pitchFamily="34" charset="0"/>
-                <a:cs typeface="Arial" panose="020B0604020202020204" pitchFamily="34" charset="0"/>
-              </a:rPr>
-              <a:t> </a:t>
-            </a:r>
-            <a:r>
-              <a:rPr lang="es-ES" sz="1200" dirty="0" err="1">
-                <a:latin typeface="Arial" panose="020B0604020202020204" pitchFamily="34" charset="0"/>
-                <a:cs typeface="Arial" panose="020B0604020202020204" pitchFamily="34" charset="0"/>
-              </a:rPr>
-              <a:t>dispersion</a:t>
-            </a:r>
-            <a:r>
-              <a:rPr lang="es-ES" sz="1200" dirty="0">
-                <a:latin typeface="Arial" panose="020B0604020202020204" pitchFamily="34" charset="0"/>
-                <a:cs typeface="Arial" panose="020B0604020202020204" pitchFamily="34" charset="0"/>
-              </a:rPr>
-              <a:t> (</a:t>
-            </a:r>
-            <a:r>
-              <a:rPr lang="es-ES" sz="1200" dirty="0" err="1">
-                <a:latin typeface="Arial" panose="020B0604020202020204" pitchFamily="34" charset="0"/>
-                <a:cs typeface="Arial" panose="020B0604020202020204" pitchFamily="34" charset="0"/>
-              </a:rPr>
-              <a:t>polyfit</a:t>
-            </a:r>
-            <a:r>
-              <a:rPr lang="es-ES" sz="1200" dirty="0">
-                <a:latin typeface="Arial" panose="020B0604020202020204" pitchFamily="34" charset="0"/>
-                <a:cs typeface="Arial" panose="020B0604020202020204" pitchFamily="34" charset="0"/>
-              </a:rPr>
-              <a:t>): -989.5411991927712 </a:t>
-            </a:r>
-            <a:r>
-              <a:rPr lang="es-ES" sz="1200" dirty="0" err="1">
+              <a:rPr lang="es-ES" sz="1000" dirty="0">
+                <a:latin typeface="Arial" panose="020B0604020202020204" pitchFamily="34" charset="0"/>
+                <a:cs typeface="Arial" panose="020B0604020202020204" pitchFamily="34" charset="0"/>
+              </a:rPr>
+              <a:t>): -1013.1548259425633 </a:t>
+            </a:r>
+            <a:r>
+              <a:rPr lang="es-ES" sz="1000" dirty="0" err="1">
                 <a:latin typeface="Arial" panose="020B0604020202020204" pitchFamily="34" charset="0"/>
                 <a:cs typeface="Arial" panose="020B0604020202020204" pitchFamily="34" charset="0"/>
               </a:rPr>
               <a:t>ps</a:t>
             </a:r>
             <a:r>
-              <a:rPr lang="es-ES" sz="1200" dirty="0">
+              <a:rPr lang="es-ES" sz="1000" dirty="0">
                 <a:latin typeface="Arial" panose="020B0604020202020204" pitchFamily="34" charset="0"/>
                 <a:cs typeface="Arial" panose="020B0604020202020204" pitchFamily="34" charset="0"/>
               </a:rPr>
               <a:t>/(km*nm)</a:t>
             </a:r>
-          </a:p>
-          <a:p>
-            <a:r>
-              <a:rPr lang="es-ES" sz="1200" dirty="0">
-                <a:latin typeface="Arial" panose="020B0604020202020204" pitchFamily="34" charset="0"/>
-                <a:cs typeface="Arial" panose="020B0604020202020204" pitchFamily="34" charset="0"/>
-              </a:rPr>
-              <a:t>TM0 central </a:t>
-            </a:r>
-            <a:r>
-              <a:rPr lang="es-ES" sz="1200" dirty="0" err="1">
-                <a:latin typeface="Arial" panose="020B0604020202020204" pitchFamily="34" charset="0"/>
-                <a:cs typeface="Arial" panose="020B0604020202020204" pitchFamily="34" charset="0"/>
-              </a:rPr>
-              <a:t>wavelength</a:t>
-            </a:r>
-            <a:r>
-              <a:rPr lang="es-ES" sz="1200" dirty="0">
-                <a:latin typeface="Arial" panose="020B0604020202020204" pitchFamily="34" charset="0"/>
-                <a:cs typeface="Arial" panose="020B0604020202020204" pitchFamily="34" charset="0"/>
-              </a:rPr>
-              <a:t> </a:t>
-            </a:r>
-            <a:r>
-              <a:rPr lang="es-ES" sz="1200" dirty="0" err="1">
-                <a:latin typeface="Arial" panose="020B0604020202020204" pitchFamily="34" charset="0"/>
-                <a:cs typeface="Arial" panose="020B0604020202020204" pitchFamily="34" charset="0"/>
-              </a:rPr>
-              <a:t>effective</a:t>
-            </a:r>
-            <a:r>
-              <a:rPr lang="es-ES" sz="1200" dirty="0">
-                <a:latin typeface="Arial" panose="020B0604020202020204" pitchFamily="34" charset="0"/>
-                <a:cs typeface="Arial" panose="020B0604020202020204" pitchFamily="34" charset="0"/>
-              </a:rPr>
-              <a:t> </a:t>
-            </a:r>
-            <a:r>
-              <a:rPr lang="es-ES" sz="1200" dirty="0" err="1">
-                <a:latin typeface="Arial" panose="020B0604020202020204" pitchFamily="34" charset="0"/>
-                <a:cs typeface="Arial" panose="020B0604020202020204" pitchFamily="34" charset="0"/>
-              </a:rPr>
-              <a:t>index</a:t>
-            </a:r>
-            <a:r>
-              <a:rPr lang="es-ES" sz="1200" dirty="0">
-                <a:latin typeface="Arial" panose="020B0604020202020204" pitchFamily="34" charset="0"/>
-                <a:cs typeface="Arial" panose="020B0604020202020204" pitchFamily="34" charset="0"/>
-              </a:rPr>
-              <a:t> (</a:t>
-            </a:r>
-            <a:r>
-              <a:rPr lang="es-ES" sz="1200" dirty="0" err="1">
-                <a:latin typeface="Arial" panose="020B0604020202020204" pitchFamily="34" charset="0"/>
-                <a:cs typeface="Arial" panose="020B0604020202020204" pitchFamily="34" charset="0"/>
-              </a:rPr>
-              <a:t>polyfit</a:t>
-            </a:r>
-            <a:r>
-              <a:rPr lang="es-ES" sz="1200" dirty="0">
-                <a:latin typeface="Arial" panose="020B0604020202020204" pitchFamily="34" charset="0"/>
-                <a:cs typeface="Arial" panose="020B0604020202020204" pitchFamily="34" charset="0"/>
-              </a:rPr>
-              <a:t>): 1.5361017569770001</a:t>
-            </a:r>
-          </a:p>
-          <a:p>
-            <a:r>
-              <a:rPr lang="es-ES" sz="1200" dirty="0">
-                <a:latin typeface="Arial" panose="020B0604020202020204" pitchFamily="34" charset="0"/>
-                <a:cs typeface="Arial" panose="020B0604020202020204" pitchFamily="34" charset="0"/>
-              </a:rPr>
-              <a:t>TM0 central </a:t>
-            </a:r>
-            <a:r>
-              <a:rPr lang="es-ES" sz="1200" dirty="0" err="1">
-                <a:latin typeface="Arial" panose="020B0604020202020204" pitchFamily="34" charset="0"/>
-                <a:cs typeface="Arial" panose="020B0604020202020204" pitchFamily="34" charset="0"/>
-              </a:rPr>
-              <a:t>wavelength</a:t>
-            </a:r>
-            <a:r>
-              <a:rPr lang="es-ES" sz="1200" dirty="0">
-                <a:latin typeface="Arial" panose="020B0604020202020204" pitchFamily="34" charset="0"/>
-                <a:cs typeface="Arial" panose="020B0604020202020204" pitchFamily="34" charset="0"/>
-              </a:rPr>
-              <a:t> </a:t>
-            </a:r>
-            <a:r>
-              <a:rPr lang="es-ES" sz="1200" dirty="0" err="1">
-                <a:latin typeface="Arial" panose="020B0604020202020204" pitchFamily="34" charset="0"/>
-                <a:cs typeface="Arial" panose="020B0604020202020204" pitchFamily="34" charset="0"/>
-              </a:rPr>
-              <a:t>group</a:t>
-            </a:r>
-            <a:r>
-              <a:rPr lang="es-ES" sz="1200" dirty="0">
-                <a:latin typeface="Arial" panose="020B0604020202020204" pitchFamily="34" charset="0"/>
-                <a:cs typeface="Arial" panose="020B0604020202020204" pitchFamily="34" charset="0"/>
-              </a:rPr>
-              <a:t> </a:t>
-            </a:r>
-            <a:r>
-              <a:rPr lang="es-ES" sz="1200" dirty="0" err="1">
-                <a:latin typeface="Arial" panose="020B0604020202020204" pitchFamily="34" charset="0"/>
-                <a:cs typeface="Arial" panose="020B0604020202020204" pitchFamily="34" charset="0"/>
-              </a:rPr>
-              <a:t>index</a:t>
-            </a:r>
-            <a:r>
-              <a:rPr lang="es-ES" sz="1200" dirty="0">
-                <a:latin typeface="Arial" panose="020B0604020202020204" pitchFamily="34" charset="0"/>
-                <a:cs typeface="Arial" panose="020B0604020202020204" pitchFamily="34" charset="0"/>
-              </a:rPr>
-              <a:t> (</a:t>
-            </a:r>
-            <a:r>
-              <a:rPr lang="es-ES" sz="1200" dirty="0" err="1">
-                <a:latin typeface="Arial" panose="020B0604020202020204" pitchFamily="34" charset="0"/>
-                <a:cs typeface="Arial" panose="020B0604020202020204" pitchFamily="34" charset="0"/>
-              </a:rPr>
-              <a:t>polyfit</a:t>
-            </a:r>
-            <a:r>
-              <a:rPr lang="es-ES" sz="1200" dirty="0">
-                <a:latin typeface="Arial" panose="020B0604020202020204" pitchFamily="34" charset="0"/>
-                <a:cs typeface="Arial" panose="020B0604020202020204" pitchFamily="34" charset="0"/>
-              </a:rPr>
-              <a:t>): 1.751028636956494</a:t>
-            </a:r>
-          </a:p>
-          <a:p>
-            <a:r>
-              <a:rPr lang="es-ES" sz="1200" dirty="0">
-                <a:latin typeface="Arial" panose="020B0604020202020204" pitchFamily="34" charset="0"/>
-                <a:cs typeface="Arial" panose="020B0604020202020204" pitchFamily="34" charset="0"/>
-              </a:rPr>
-              <a:t>TM0 central </a:t>
-            </a:r>
-            <a:r>
-              <a:rPr lang="es-ES" sz="1200" dirty="0" err="1">
-                <a:latin typeface="Arial" panose="020B0604020202020204" pitchFamily="34" charset="0"/>
-                <a:cs typeface="Arial" panose="020B0604020202020204" pitchFamily="34" charset="0"/>
-              </a:rPr>
-              <a:t>wavelength</a:t>
-            </a:r>
-            <a:r>
-              <a:rPr lang="es-ES" sz="1200" dirty="0">
-                <a:latin typeface="Arial" panose="020B0604020202020204" pitchFamily="34" charset="0"/>
-                <a:cs typeface="Arial" panose="020B0604020202020204" pitchFamily="34" charset="0"/>
-              </a:rPr>
-              <a:t> </a:t>
-            </a:r>
-            <a:r>
-              <a:rPr lang="es-ES" sz="1200" dirty="0" err="1">
-                <a:latin typeface="Arial" panose="020B0604020202020204" pitchFamily="34" charset="0"/>
-                <a:cs typeface="Arial" panose="020B0604020202020204" pitchFamily="34" charset="0"/>
-              </a:rPr>
-              <a:t>dispersion</a:t>
-            </a:r>
-            <a:r>
-              <a:rPr lang="es-ES" sz="1200" dirty="0">
-                <a:latin typeface="Arial" panose="020B0604020202020204" pitchFamily="34" charset="0"/>
-                <a:cs typeface="Arial" panose="020B0604020202020204" pitchFamily="34" charset="0"/>
-              </a:rPr>
-              <a:t> (</a:t>
-            </a:r>
-            <a:r>
-              <a:rPr lang="es-ES" sz="1200" dirty="0" err="1">
-                <a:latin typeface="Arial" panose="020B0604020202020204" pitchFamily="34" charset="0"/>
-                <a:cs typeface="Arial" panose="020B0604020202020204" pitchFamily="34" charset="0"/>
-              </a:rPr>
-              <a:t>polyfit</a:t>
-            </a:r>
-            <a:r>
-              <a:rPr lang="es-ES" sz="1200" dirty="0">
-                <a:latin typeface="Arial" panose="020B0604020202020204" pitchFamily="34" charset="0"/>
-                <a:cs typeface="Arial" panose="020B0604020202020204" pitchFamily="34" charset="0"/>
-              </a:rPr>
-              <a:t>): -1013.1548259425633 </a:t>
-            </a:r>
-            <a:r>
-              <a:rPr lang="es-ES" sz="1200" dirty="0" err="1">
-                <a:latin typeface="Arial" panose="020B0604020202020204" pitchFamily="34" charset="0"/>
-                <a:cs typeface="Arial" panose="020B0604020202020204" pitchFamily="34" charset="0"/>
-              </a:rPr>
-              <a:t>ps</a:t>
-            </a:r>
-            <a:r>
-              <a:rPr lang="es-ES" sz="1200" dirty="0">
-                <a:latin typeface="Arial" panose="020B0604020202020204" pitchFamily="34" charset="0"/>
-                <a:cs typeface="Arial" panose="020B0604020202020204" pitchFamily="34" charset="0"/>
-              </a:rPr>
-              <a:t>/(km*nm)</a:t>
-            </a:r>
-            <a:endParaRPr lang="en-US" sz="1200" dirty="0">
+            <a:endParaRPr lang="en-US" sz="1000" dirty="0">
               <a:latin typeface="Arial" panose="020B0604020202020204" pitchFamily="34" charset="0"/>
               <a:cs typeface="Arial" panose="020B0604020202020204" pitchFamily="34" charset="0"/>
             </a:endParaRPr>
@@ -12205,8 +12670,8 @@
         </p:nvSpPr>
         <p:spPr>
           <a:xfrm>
-            <a:off x="609440" y="5843132"/>
-            <a:ext cx="11198543" cy="369332"/>
+            <a:off x="609440" y="5588903"/>
+            <a:ext cx="10845141" cy="769441"/>
           </a:xfrm>
           <a:prstGeom prst="rect">
             <a:avLst/>
@@ -12230,14 +12695,354 @@
           <a:p>
             <a:pPr algn="just"/>
             <a:r>
-              <a:rPr lang="en-US" dirty="0">
+              <a:rPr lang="en-US" sz="1200" dirty="0">
                 <a:solidFill>
                   <a:srgbClr val="FF0000"/>
                 </a:solidFill>
               </a:rPr>
-              <a:t>Comment on the results found for the TE0 and TM0 for both deep and shallow waveguides. </a:t>
-            </a:r>
-            <a:endParaRPr lang="es-ES" sz="1200" dirty="0">
+              <a:t>Se ha </a:t>
+            </a:r>
+            <a:r>
+              <a:rPr lang="en-US" sz="1200" dirty="0" err="1">
+                <a:solidFill>
+                  <a:srgbClr val="FF0000"/>
+                </a:solidFill>
+              </a:rPr>
+              <a:t>conseguido</a:t>
+            </a:r>
+            <a:r>
+              <a:rPr lang="en-US" sz="1200" dirty="0">
+                <a:solidFill>
+                  <a:srgbClr val="FF0000"/>
+                </a:solidFill>
+              </a:rPr>
+              <a:t> </a:t>
+            </a:r>
+            <a:r>
+              <a:rPr lang="en-US" sz="1200" dirty="0" err="1">
+                <a:solidFill>
+                  <a:srgbClr val="FF0000"/>
+                </a:solidFill>
+              </a:rPr>
+              <a:t>ajustar</a:t>
+            </a:r>
+            <a:r>
+              <a:rPr lang="en-US" sz="1200" dirty="0">
+                <a:solidFill>
+                  <a:srgbClr val="FF0000"/>
+                </a:solidFill>
+              </a:rPr>
+              <a:t> un </a:t>
+            </a:r>
+            <a:r>
+              <a:rPr lang="en-US" sz="1200" dirty="0" err="1">
+                <a:solidFill>
+                  <a:srgbClr val="FF0000"/>
+                </a:solidFill>
+              </a:rPr>
+              <a:t>polinomio</a:t>
+            </a:r>
+            <a:r>
+              <a:rPr lang="en-US" sz="1200" dirty="0">
+                <a:solidFill>
+                  <a:srgbClr val="FF0000"/>
+                </a:solidFill>
+              </a:rPr>
+              <a:t> de </a:t>
+            </a:r>
+            <a:r>
+              <a:rPr lang="en-US" sz="1200" dirty="0" err="1">
+                <a:solidFill>
+                  <a:srgbClr val="FF0000"/>
+                </a:solidFill>
+              </a:rPr>
+              <a:t>segundo</a:t>
+            </a:r>
+            <a:r>
+              <a:rPr lang="en-US" sz="1200" dirty="0">
+                <a:solidFill>
+                  <a:srgbClr val="FF0000"/>
+                </a:solidFill>
+              </a:rPr>
+              <a:t> </a:t>
+            </a:r>
+            <a:r>
+              <a:rPr lang="en-US" sz="1200" dirty="0" err="1">
+                <a:solidFill>
+                  <a:srgbClr val="FF0000"/>
+                </a:solidFill>
+              </a:rPr>
+              <a:t>grado</a:t>
+            </a:r>
+            <a:r>
+              <a:rPr lang="en-US" sz="1200" dirty="0">
+                <a:solidFill>
+                  <a:srgbClr val="FF0000"/>
+                </a:solidFill>
+              </a:rPr>
+              <a:t> para </a:t>
+            </a:r>
+            <a:r>
+              <a:rPr lang="en-US" sz="1200" dirty="0" err="1">
+                <a:solidFill>
+                  <a:srgbClr val="FF0000"/>
+                </a:solidFill>
+              </a:rPr>
+              <a:t>modelar</a:t>
+            </a:r>
+            <a:r>
+              <a:rPr lang="en-US" sz="1200" dirty="0">
+                <a:solidFill>
+                  <a:srgbClr val="FF0000"/>
+                </a:solidFill>
+              </a:rPr>
+              <a:t> la </a:t>
+            </a:r>
+            <a:r>
+              <a:rPr lang="en-US" sz="1200" dirty="0" err="1">
+                <a:solidFill>
+                  <a:srgbClr val="FF0000"/>
+                </a:solidFill>
+              </a:rPr>
+              <a:t>respuesta</a:t>
+            </a:r>
+            <a:r>
+              <a:rPr lang="en-US" sz="1200" dirty="0">
+                <a:solidFill>
+                  <a:srgbClr val="FF0000"/>
+                </a:solidFill>
+              </a:rPr>
+              <a:t> del </a:t>
+            </a:r>
+            <a:r>
+              <a:rPr lang="en-US" sz="1200" dirty="0" err="1">
+                <a:solidFill>
+                  <a:srgbClr val="FF0000"/>
+                </a:solidFill>
+              </a:rPr>
+              <a:t>índice</a:t>
+            </a:r>
+            <a:r>
+              <a:rPr lang="en-US" sz="1200" dirty="0">
+                <a:solidFill>
+                  <a:srgbClr val="FF0000"/>
+                </a:solidFill>
+              </a:rPr>
+              <a:t> </a:t>
+            </a:r>
+            <a:r>
+              <a:rPr lang="en-US" sz="1200" dirty="0" err="1">
+                <a:solidFill>
+                  <a:srgbClr val="FF0000"/>
+                </a:solidFill>
+              </a:rPr>
+              <a:t>efectivo</a:t>
+            </a:r>
+            <a:r>
+              <a:rPr lang="en-US" sz="1200" dirty="0">
+                <a:solidFill>
+                  <a:srgbClr val="FF0000"/>
+                </a:solidFill>
+              </a:rPr>
+              <a:t> y </a:t>
+            </a:r>
+            <a:r>
+              <a:rPr lang="en-US" sz="1200" dirty="0" err="1">
+                <a:solidFill>
+                  <a:srgbClr val="FF0000"/>
+                </a:solidFill>
+              </a:rPr>
+              <a:t>así</a:t>
+            </a:r>
+            <a:r>
+              <a:rPr lang="en-US" sz="1200" dirty="0">
+                <a:solidFill>
+                  <a:srgbClr val="FF0000"/>
+                </a:solidFill>
+              </a:rPr>
+              <a:t> </a:t>
+            </a:r>
+            <a:r>
+              <a:rPr lang="en-US" sz="1200" dirty="0" err="1">
+                <a:solidFill>
+                  <a:srgbClr val="FF0000"/>
+                </a:solidFill>
+              </a:rPr>
+              <a:t>conseguir</a:t>
+            </a:r>
+            <a:r>
+              <a:rPr lang="en-US" sz="1200" dirty="0">
+                <a:solidFill>
+                  <a:srgbClr val="FF0000"/>
+                </a:solidFill>
+              </a:rPr>
+              <a:t> </a:t>
+            </a:r>
+            <a:r>
+              <a:rPr lang="en-US" sz="1200" dirty="0" err="1">
+                <a:solidFill>
+                  <a:srgbClr val="FF0000"/>
+                </a:solidFill>
+              </a:rPr>
+              <a:t>calcular</a:t>
+            </a:r>
+            <a:r>
+              <a:rPr lang="en-US" sz="1200" dirty="0">
+                <a:solidFill>
+                  <a:srgbClr val="FF0000"/>
+                </a:solidFill>
+              </a:rPr>
+              <a:t> </a:t>
+            </a:r>
+            <a:r>
+              <a:rPr lang="en-US" sz="1200" dirty="0" err="1">
+                <a:solidFill>
+                  <a:srgbClr val="FF0000"/>
+                </a:solidFill>
+              </a:rPr>
+              <a:t>los</a:t>
+            </a:r>
+            <a:r>
+              <a:rPr lang="en-US" sz="1200" dirty="0">
+                <a:solidFill>
+                  <a:srgbClr val="FF0000"/>
+                </a:solidFill>
+              </a:rPr>
+              <a:t> </a:t>
+            </a:r>
+            <a:r>
+              <a:rPr lang="en-US" sz="1200" dirty="0" err="1">
+                <a:solidFill>
+                  <a:srgbClr val="FF0000"/>
+                </a:solidFill>
+              </a:rPr>
+              <a:t>parámetros</a:t>
+            </a:r>
+            <a:r>
+              <a:rPr lang="en-US" sz="1200" dirty="0">
+                <a:solidFill>
+                  <a:srgbClr val="FF0000"/>
+                </a:solidFill>
+              </a:rPr>
+              <a:t> de dispersion e </a:t>
+            </a:r>
+            <a:r>
+              <a:rPr lang="en-US" sz="1200" dirty="0" err="1">
+                <a:solidFill>
+                  <a:srgbClr val="FF0000"/>
+                </a:solidFill>
+              </a:rPr>
+              <a:t>índice</a:t>
+            </a:r>
+            <a:r>
+              <a:rPr lang="en-US" sz="1200" dirty="0">
+                <a:solidFill>
+                  <a:srgbClr val="FF0000"/>
+                </a:solidFill>
+              </a:rPr>
+              <a:t> de </a:t>
+            </a:r>
+            <a:r>
+              <a:rPr lang="en-US" sz="1200" dirty="0" err="1">
+                <a:solidFill>
+                  <a:srgbClr val="FF0000"/>
+                </a:solidFill>
+              </a:rPr>
+              <a:t>grupo</a:t>
+            </a:r>
+            <a:r>
+              <a:rPr lang="en-US" sz="1200" dirty="0">
+                <a:solidFill>
+                  <a:srgbClr val="FF0000"/>
+                </a:solidFill>
+              </a:rPr>
+              <a:t> </a:t>
+            </a:r>
+            <a:r>
+              <a:rPr lang="en-US" sz="1200" dirty="0" err="1">
+                <a:solidFill>
+                  <a:srgbClr val="FF0000"/>
+                </a:solidFill>
+              </a:rPr>
+              <a:t>en</a:t>
+            </a:r>
+            <a:r>
+              <a:rPr lang="en-US" sz="1200" dirty="0">
+                <a:solidFill>
+                  <a:srgbClr val="FF0000"/>
+                </a:solidFill>
+              </a:rPr>
+              <a:t> </a:t>
+            </a:r>
+            <a:r>
+              <a:rPr lang="en-US" sz="1200" dirty="0" err="1">
+                <a:solidFill>
+                  <a:srgbClr val="FF0000"/>
+                </a:solidFill>
+              </a:rPr>
+              <a:t>cada</a:t>
+            </a:r>
+            <a:r>
+              <a:rPr lang="en-US" sz="1200" dirty="0">
+                <a:solidFill>
+                  <a:srgbClr val="FF0000"/>
+                </a:solidFill>
+              </a:rPr>
+              <a:t> </a:t>
+            </a:r>
+            <a:r>
+              <a:rPr lang="en-US" sz="1200" dirty="0" err="1">
+                <a:solidFill>
+                  <a:srgbClr val="FF0000"/>
+                </a:solidFill>
+              </a:rPr>
+              <a:t>guía</a:t>
+            </a:r>
+            <a:r>
+              <a:rPr lang="en-US" sz="1200" dirty="0">
+                <a:solidFill>
+                  <a:srgbClr val="FF0000"/>
+                </a:solidFill>
+              </a:rPr>
+              <a:t>.</a:t>
+            </a:r>
+          </a:p>
+          <a:p>
+            <a:pPr marL="171450" indent="-171450" algn="just">
+              <a:buFontTx/>
+              <a:buChar char="-"/>
+            </a:pPr>
+            <a:r>
+              <a:rPr lang="es-ES" sz="1000" dirty="0">
+                <a:solidFill>
+                  <a:srgbClr val="FF0000"/>
+                </a:solidFill>
+              </a:rPr>
+              <a:t>Verificar q </a:t>
+            </a:r>
+            <a:r>
+              <a:rPr lang="es-ES" sz="1000" dirty="0" err="1">
+                <a:solidFill>
+                  <a:srgbClr val="FF0000"/>
+                </a:solidFill>
+              </a:rPr>
+              <a:t>nef</a:t>
+            </a:r>
+            <a:r>
+              <a:rPr lang="es-ES" sz="1000" dirty="0">
+                <a:solidFill>
+                  <a:srgbClr val="FF0000"/>
+                </a:solidFill>
+              </a:rPr>
+              <a:t> coincide a lambda con el esperado.</a:t>
+            </a:r>
+          </a:p>
+          <a:p>
+            <a:pPr marL="171450" indent="-171450" algn="just">
+              <a:buFontTx/>
+              <a:buChar char="-"/>
+            </a:pPr>
+            <a:endParaRPr lang="es-ES" sz="1000" dirty="0">
               <a:solidFill>
                 <a:srgbClr val="FF0000"/>
               </a:solidFill>

--- a/LabBook_10.pptx
+++ b/LabBook_10.pptx
@@ -5,27 +5,26 @@
     <p:sldMasterId id="2147483648" r:id="rId1"/>
   </p:sldMasterIdLst>
   <p:notesMasterIdLst>
-    <p:notesMasterId r:id="rId17"/>
+    <p:notesMasterId r:id="rId16"/>
   </p:notesMasterIdLst>
   <p:handoutMasterIdLst>
-    <p:handoutMasterId r:id="rId18"/>
+    <p:handoutMasterId r:id="rId17"/>
   </p:handoutMasterIdLst>
   <p:sldIdLst>
     <p:sldId id="256" r:id="rId2"/>
     <p:sldId id="295" r:id="rId3"/>
-    <p:sldId id="290" r:id="rId4"/>
-    <p:sldId id="298" r:id="rId5"/>
-    <p:sldId id="299" r:id="rId6"/>
-    <p:sldId id="300" r:id="rId7"/>
-    <p:sldId id="291" r:id="rId8"/>
-    <p:sldId id="292" r:id="rId9"/>
-    <p:sldId id="297" r:id="rId10"/>
-    <p:sldId id="293" r:id="rId11"/>
-    <p:sldId id="301" r:id="rId12"/>
-    <p:sldId id="302" r:id="rId13"/>
-    <p:sldId id="303" r:id="rId14"/>
-    <p:sldId id="304" r:id="rId15"/>
-    <p:sldId id="288" r:id="rId16"/>
+    <p:sldId id="298" r:id="rId4"/>
+    <p:sldId id="299" r:id="rId5"/>
+    <p:sldId id="300" r:id="rId6"/>
+    <p:sldId id="291" r:id="rId7"/>
+    <p:sldId id="292" r:id="rId8"/>
+    <p:sldId id="297" r:id="rId9"/>
+    <p:sldId id="293" r:id="rId10"/>
+    <p:sldId id="301" r:id="rId11"/>
+    <p:sldId id="302" r:id="rId12"/>
+    <p:sldId id="303" r:id="rId13"/>
+    <p:sldId id="304" r:id="rId14"/>
+    <p:sldId id="288" r:id="rId15"/>
   </p:sldIdLst>
   <p:sldSz cx="12192000" cy="6858000"/>
   <p:notesSz cx="12192000" cy="6858000"/>
@@ -152,25 +151,25 @@
 </p188:authorLst>
 </file>
 
-<file path=ppt/comments/modernComment_123_DD460EA3.xml><?xml version="1.0" encoding="utf-8"?>
+<file path=ppt/comments/modernComment_12E_354CFDD7.xml><?xml version="1.0" encoding="utf-8"?>
 <p188:cmLst xmlns:a="http://schemas.openxmlformats.org/drawingml/2006/main" xmlns:r="http://schemas.openxmlformats.org/officeDocument/2006/relationships" xmlns:p188="http://schemas.microsoft.com/office/powerpoint/2018/8/main">
-  <p188:cm id="{94852C2D-86BB-4E1D-A8D0-A0DBC429D069}" authorId="{D74DEC91-EE70-822B-0F23-319E662BA817}" created="2026-03-02T17:57:21.107">
+  <p188:cm id="{11B7B04A-F874-4819-87F0-EEA57F61C162}" authorId="{D74DEC91-EE70-822B-0F23-319E662BA817}" created="2026-03-08T17:07:03.207">
     <ac:txMkLst xmlns:ac="http://schemas.microsoft.com/office/drawing/2013/main/command">
       <pc:docMk xmlns:pc="http://schemas.microsoft.com/office/powerpoint/2013/main/command"/>
-      <pc:sldMk xmlns:pc="http://schemas.microsoft.com/office/powerpoint/2013/main/command" cId="3712356003" sldId="291"/>
-      <ac:spMk id="2" creationId="{CA5F0FDF-2A95-453B-4ECA-AEB637FF2694}"/>
-      <ac:txMk cp="641">
-        <ac:context len="1042" hash="1794452772"/>
+      <pc:sldMk xmlns:pc="http://schemas.microsoft.com/office/powerpoint/2013/main/command" cId="894238167" sldId="302"/>
+      <ac:spMk id="2" creationId="{6A2291EA-A955-D9A9-3AA1-672467A8E219}"/>
+      <ac:txMk cp="331" len="9">
+        <ac:context len="341" hash="2103900974"/>
       </ac:txMk>
     </ac:txMkLst>
-    <p188:pos x="1541092" y="1159933"/>
+    <p188:pos x="8298889" y="635493"/>
     <p188:txBody>
       <a:bodyPr/>
       <a:lstStyle/>
       <a:p>
         <a:r>
           <a:rPr lang="es-ES"/>
-          <a:t>Creemos que está bien pero no lo tenemos claro.</a:t>
+          <a:t>Brujeria en 0.9um</a:t>
         </a:r>
       </a:p>
     </p188:txBody>
@@ -272,7 +271,7 @@
           <a:p>
             <a:fld id="{8438F8DC-35B0-48E6-A86E-42F1F08DD00F}" type="datetimeFigureOut">
               <a:rPr lang="es-ES" smtClean="0"/>
-              <a:t>07/03/2026</a:t>
+              <a:t>08/03/2026</a:t>
             </a:fld>
             <a:endParaRPr lang="es-ES"/>
           </a:p>
@@ -449,7 +448,7 @@
           <a:p>
             <a:fld id="{FACBDC12-F39B-4B97-8F4D-6734F9D366FF}" type="datetimeFigureOut">
               <a:rPr lang="es-ES" smtClean="0"/>
-              <a:t>07/03/2026</a:t>
+              <a:t>08/03/2026</a:t>
             </a:fld>
             <a:endParaRPr lang="es-ES"/>
           </a:p>
@@ -721,7 +720,13 @@
   <p:cSld>
     <p:spTree>
       <p:nvGrpSpPr>
-        <p:cNvPr id="1" name=""/>
+        <p:cNvPr id="1" name="">
+          <a:extLst>
+            <a:ext uri="{FF2B5EF4-FFF2-40B4-BE49-F238E27FC236}">
+              <a16:creationId xmlns:a16="http://schemas.microsoft.com/office/drawing/2014/main" id="{D0A9C5B3-0915-7A78-7FAC-C15D96CE1654}"/>
+            </a:ext>
+          </a:extLst>
+        </p:cNvPr>
         <p:cNvGrpSpPr/>
         <p:nvPr/>
       </p:nvGrpSpPr>
@@ -735,7 +740,13 @@
       </p:grpSpPr>
       <p:sp>
         <p:nvSpPr>
-          <p:cNvPr id="2" name="Marcador de imagen de diapositiva 1"/>
+          <p:cNvPr id="2" name="Marcador de imagen de diapositiva 1">
+            <a:extLst>
+              <a:ext uri="{FF2B5EF4-FFF2-40B4-BE49-F238E27FC236}">
+                <a16:creationId xmlns:a16="http://schemas.microsoft.com/office/drawing/2014/main" id="{CCDAD810-8C16-5834-5A90-698B9E87F8E4}"/>
+              </a:ext>
+            </a:extLst>
+          </p:cNvPr>
           <p:cNvSpPr>
             <a:spLocks noGrp="1" noRot="1" noChangeAspect="1"/>
           </p:cNvSpPr>
@@ -747,7 +758,13 @@
       </p:sp>
       <p:sp>
         <p:nvSpPr>
-          <p:cNvPr id="3" name="Marcador de notas 2"/>
+          <p:cNvPr id="3" name="Marcador de notas 2">
+            <a:extLst>
+              <a:ext uri="{FF2B5EF4-FFF2-40B4-BE49-F238E27FC236}">
+                <a16:creationId xmlns:a16="http://schemas.microsoft.com/office/drawing/2014/main" id="{861CC14A-BDC0-B607-9DF0-6DD39DE6952F}"/>
+              </a:ext>
+            </a:extLst>
+          </p:cNvPr>
           <p:cNvSpPr>
             <a:spLocks noGrp="1"/>
           </p:cNvSpPr>
@@ -766,7 +783,13 @@
       </p:sp>
       <p:sp>
         <p:nvSpPr>
-          <p:cNvPr id="4" name="Marcador de número de diapositiva 3"/>
+          <p:cNvPr id="4" name="Marcador de número de diapositiva 3">
+            <a:extLst>
+              <a:ext uri="{FF2B5EF4-FFF2-40B4-BE49-F238E27FC236}">
+                <a16:creationId xmlns:a16="http://schemas.microsoft.com/office/drawing/2014/main" id="{D972BBC2-8BCA-F6E7-CE66-D116438B1EFC}"/>
+              </a:ext>
+            </a:extLst>
+          </p:cNvPr>
           <p:cNvSpPr>
             <a:spLocks noGrp="1"/>
           </p:cNvSpPr>
@@ -790,7 +813,7 @@
     </p:spTree>
     <p:extLst>
       <p:ext uri="{BB962C8B-B14F-4D97-AF65-F5344CB8AC3E}">
-        <p14:creationId xmlns:p14="http://schemas.microsoft.com/office/powerpoint/2010/main" val="2092532372"/>
+        <p14:creationId xmlns:p14="http://schemas.microsoft.com/office/powerpoint/2010/main" val="3614240832"/>
       </p:ext>
     </p:extLst>
   </p:cSld>
@@ -801,6 +824,978 @@
 </file>
 
 <file path=ppt/notesSlides/notesSlide10.xml><?xml version="1.0" encoding="utf-8"?>
+<p:notes xmlns:a="http://schemas.openxmlformats.org/drawingml/2006/main" xmlns:r="http://schemas.openxmlformats.org/officeDocument/2006/relationships" xmlns:p="http://schemas.openxmlformats.org/presentationml/2006/main">
+  <p:cSld>
+    <p:spTree>
+      <p:nvGrpSpPr>
+        <p:cNvPr id="1" name="">
+          <a:extLst>
+            <a:ext uri="{FF2B5EF4-FFF2-40B4-BE49-F238E27FC236}">
+              <a16:creationId xmlns:a16="http://schemas.microsoft.com/office/drawing/2014/main" id="{4CFF2CC8-05DB-4691-975B-5CB4F6F72229}"/>
+            </a:ext>
+          </a:extLst>
+        </p:cNvPr>
+        <p:cNvGrpSpPr/>
+        <p:nvPr/>
+      </p:nvGrpSpPr>
+      <p:grpSpPr>
+        <a:xfrm>
+          <a:off x="0" y="0"/>
+          <a:ext cx="0" cy="0"/>
+          <a:chOff x="0" y="0"/>
+          <a:chExt cx="0" cy="0"/>
+        </a:xfrm>
+      </p:grpSpPr>
+      <p:sp>
+        <p:nvSpPr>
+          <p:cNvPr id="2" name="Marcador de imagen de diapositiva 1">
+            <a:extLst>
+              <a:ext uri="{FF2B5EF4-FFF2-40B4-BE49-F238E27FC236}">
+                <a16:creationId xmlns:a16="http://schemas.microsoft.com/office/drawing/2014/main" id="{4E0BA263-33B5-7053-6336-32E955917816}"/>
+              </a:ext>
+            </a:extLst>
+          </p:cNvPr>
+          <p:cNvSpPr>
+            <a:spLocks noGrp="1" noRot="1" noChangeAspect="1"/>
+          </p:cNvSpPr>
+          <p:nvPr>
+            <p:ph type="sldImg"/>
+          </p:nvPr>
+        </p:nvSpPr>
+        <p:spPr/>
+      </p:sp>
+      <p:sp>
+        <p:nvSpPr>
+          <p:cNvPr id="3" name="Marcador de notas 2">
+            <a:extLst>
+              <a:ext uri="{FF2B5EF4-FFF2-40B4-BE49-F238E27FC236}">
+                <a16:creationId xmlns:a16="http://schemas.microsoft.com/office/drawing/2014/main" id="{9C1ACDD5-0C09-CF66-497D-1725738EE0DF}"/>
+              </a:ext>
+            </a:extLst>
+          </p:cNvPr>
+          <p:cNvSpPr>
+            <a:spLocks noGrp="1"/>
+          </p:cNvSpPr>
+          <p:nvPr>
+            <p:ph type="body" idx="1"/>
+          </p:nvPr>
+        </p:nvSpPr>
+        <p:spPr/>
+        <p:txBody>
+          <a:bodyPr/>
+          <a:lstStyle/>
+          <a:p>
+            <a:endParaRPr lang="es-ES" dirty="0"/>
+          </a:p>
+        </p:txBody>
+      </p:sp>
+      <p:sp>
+        <p:nvSpPr>
+          <p:cNvPr id="4" name="Marcador de número de diapositiva 3">
+            <a:extLst>
+              <a:ext uri="{FF2B5EF4-FFF2-40B4-BE49-F238E27FC236}">
+                <a16:creationId xmlns:a16="http://schemas.microsoft.com/office/drawing/2014/main" id="{89F05E02-6563-E17B-67B8-CBA0BE8A22D0}"/>
+              </a:ext>
+            </a:extLst>
+          </p:cNvPr>
+          <p:cNvSpPr>
+            <a:spLocks noGrp="1"/>
+          </p:cNvSpPr>
+          <p:nvPr>
+            <p:ph type="sldNum" sz="quarter" idx="5"/>
+          </p:nvPr>
+        </p:nvSpPr>
+        <p:spPr/>
+        <p:txBody>
+          <a:bodyPr/>
+          <a:lstStyle/>
+          <a:p>
+            <a:fld id="{676223B9-C868-4436-87D9-1A3152E1157A}" type="slidenum">
+              <a:rPr lang="es-ES" smtClean="0"/>
+              <a:t>12</a:t>
+            </a:fld>
+            <a:endParaRPr lang="es-ES"/>
+          </a:p>
+        </p:txBody>
+      </p:sp>
+    </p:spTree>
+    <p:extLst>
+      <p:ext uri="{BB962C8B-B14F-4D97-AF65-F5344CB8AC3E}">
+        <p14:creationId xmlns:p14="http://schemas.microsoft.com/office/powerpoint/2010/main" val="3072001755"/>
+      </p:ext>
+    </p:extLst>
+  </p:cSld>
+  <p:clrMapOvr>
+    <a:masterClrMapping/>
+  </p:clrMapOvr>
+</p:notes>
+</file>
+
+<file path=ppt/notesSlides/notesSlide11.xml><?xml version="1.0" encoding="utf-8"?>
+<p:notes xmlns:a="http://schemas.openxmlformats.org/drawingml/2006/main" xmlns:r="http://schemas.openxmlformats.org/officeDocument/2006/relationships" xmlns:p="http://schemas.openxmlformats.org/presentationml/2006/main">
+  <p:cSld>
+    <p:spTree>
+      <p:nvGrpSpPr>
+        <p:cNvPr id="1" name="">
+          <a:extLst>
+            <a:ext uri="{FF2B5EF4-FFF2-40B4-BE49-F238E27FC236}">
+              <a16:creationId xmlns:a16="http://schemas.microsoft.com/office/drawing/2014/main" id="{868F883C-2214-83DE-A46F-0B4499EEAD7F}"/>
+            </a:ext>
+          </a:extLst>
+        </p:cNvPr>
+        <p:cNvGrpSpPr/>
+        <p:nvPr/>
+      </p:nvGrpSpPr>
+      <p:grpSpPr>
+        <a:xfrm>
+          <a:off x="0" y="0"/>
+          <a:ext cx="0" cy="0"/>
+          <a:chOff x="0" y="0"/>
+          <a:chExt cx="0" cy="0"/>
+        </a:xfrm>
+      </p:grpSpPr>
+      <p:sp>
+        <p:nvSpPr>
+          <p:cNvPr id="2" name="Marcador de imagen de diapositiva 1">
+            <a:extLst>
+              <a:ext uri="{FF2B5EF4-FFF2-40B4-BE49-F238E27FC236}">
+                <a16:creationId xmlns:a16="http://schemas.microsoft.com/office/drawing/2014/main" id="{3644840D-1C40-39C0-A29B-92A9DEDB14B5}"/>
+              </a:ext>
+            </a:extLst>
+          </p:cNvPr>
+          <p:cNvSpPr>
+            <a:spLocks noGrp="1" noRot="1" noChangeAspect="1"/>
+          </p:cNvSpPr>
+          <p:nvPr>
+            <p:ph type="sldImg"/>
+          </p:nvPr>
+        </p:nvSpPr>
+        <p:spPr/>
+      </p:sp>
+      <p:sp>
+        <p:nvSpPr>
+          <p:cNvPr id="3" name="Marcador de notas 2">
+            <a:extLst>
+              <a:ext uri="{FF2B5EF4-FFF2-40B4-BE49-F238E27FC236}">
+                <a16:creationId xmlns:a16="http://schemas.microsoft.com/office/drawing/2014/main" id="{1E00F841-88B5-28D2-B8AD-7572489A8563}"/>
+              </a:ext>
+            </a:extLst>
+          </p:cNvPr>
+          <p:cNvSpPr>
+            <a:spLocks noGrp="1"/>
+          </p:cNvSpPr>
+          <p:nvPr>
+            <p:ph type="body" idx="1"/>
+          </p:nvPr>
+        </p:nvSpPr>
+        <p:spPr/>
+        <p:txBody>
+          <a:bodyPr/>
+          <a:lstStyle/>
+          <a:p>
+            <a:endParaRPr lang="es-ES" dirty="0"/>
+          </a:p>
+        </p:txBody>
+      </p:sp>
+      <p:sp>
+        <p:nvSpPr>
+          <p:cNvPr id="4" name="Marcador de número de diapositiva 3">
+            <a:extLst>
+              <a:ext uri="{FF2B5EF4-FFF2-40B4-BE49-F238E27FC236}">
+                <a16:creationId xmlns:a16="http://schemas.microsoft.com/office/drawing/2014/main" id="{CD20CB20-0871-B81E-C209-7CB477169152}"/>
+              </a:ext>
+            </a:extLst>
+          </p:cNvPr>
+          <p:cNvSpPr>
+            <a:spLocks noGrp="1"/>
+          </p:cNvSpPr>
+          <p:nvPr>
+            <p:ph type="sldNum" sz="quarter" idx="5"/>
+          </p:nvPr>
+        </p:nvSpPr>
+        <p:spPr/>
+        <p:txBody>
+          <a:bodyPr/>
+          <a:lstStyle/>
+          <a:p>
+            <a:fld id="{676223B9-C868-4436-87D9-1A3152E1157A}" type="slidenum">
+              <a:rPr lang="es-ES" smtClean="0"/>
+              <a:t>13</a:t>
+            </a:fld>
+            <a:endParaRPr lang="es-ES"/>
+          </a:p>
+        </p:txBody>
+      </p:sp>
+    </p:spTree>
+    <p:extLst>
+      <p:ext uri="{BB962C8B-B14F-4D97-AF65-F5344CB8AC3E}">
+        <p14:creationId xmlns:p14="http://schemas.microsoft.com/office/powerpoint/2010/main" val="2941625907"/>
+      </p:ext>
+    </p:extLst>
+  </p:cSld>
+  <p:clrMapOvr>
+    <a:masterClrMapping/>
+  </p:clrMapOvr>
+</p:notes>
+</file>
+
+<file path=ppt/notesSlides/notesSlide2.xml><?xml version="1.0" encoding="utf-8"?>
+<p:notes xmlns:a="http://schemas.openxmlformats.org/drawingml/2006/main" xmlns:r="http://schemas.openxmlformats.org/officeDocument/2006/relationships" xmlns:p="http://schemas.openxmlformats.org/presentationml/2006/main">
+  <p:cSld>
+    <p:spTree>
+      <p:nvGrpSpPr>
+        <p:cNvPr id="1" name="">
+          <a:extLst>
+            <a:ext uri="{FF2B5EF4-FFF2-40B4-BE49-F238E27FC236}">
+              <a16:creationId xmlns:a16="http://schemas.microsoft.com/office/drawing/2014/main" id="{AD92D980-1208-E4A8-CCA6-A3A30DB95215}"/>
+            </a:ext>
+          </a:extLst>
+        </p:cNvPr>
+        <p:cNvGrpSpPr/>
+        <p:nvPr/>
+      </p:nvGrpSpPr>
+      <p:grpSpPr>
+        <a:xfrm>
+          <a:off x="0" y="0"/>
+          <a:ext cx="0" cy="0"/>
+          <a:chOff x="0" y="0"/>
+          <a:chExt cx="0" cy="0"/>
+        </a:xfrm>
+      </p:grpSpPr>
+      <p:sp>
+        <p:nvSpPr>
+          <p:cNvPr id="2" name="Marcador de imagen de diapositiva 1">
+            <a:extLst>
+              <a:ext uri="{FF2B5EF4-FFF2-40B4-BE49-F238E27FC236}">
+                <a16:creationId xmlns:a16="http://schemas.microsoft.com/office/drawing/2014/main" id="{99B70B63-DB26-3C65-D2DC-37832B149D5D}"/>
+              </a:ext>
+            </a:extLst>
+          </p:cNvPr>
+          <p:cNvSpPr>
+            <a:spLocks noGrp="1" noRot="1" noChangeAspect="1"/>
+          </p:cNvSpPr>
+          <p:nvPr>
+            <p:ph type="sldImg"/>
+          </p:nvPr>
+        </p:nvSpPr>
+        <p:spPr/>
+      </p:sp>
+      <p:sp>
+        <p:nvSpPr>
+          <p:cNvPr id="3" name="Marcador de notas 2">
+            <a:extLst>
+              <a:ext uri="{FF2B5EF4-FFF2-40B4-BE49-F238E27FC236}">
+                <a16:creationId xmlns:a16="http://schemas.microsoft.com/office/drawing/2014/main" id="{05344385-6CA9-AAE1-82C4-4CA008C44DAF}"/>
+              </a:ext>
+            </a:extLst>
+          </p:cNvPr>
+          <p:cNvSpPr>
+            <a:spLocks noGrp="1"/>
+          </p:cNvSpPr>
+          <p:nvPr>
+            <p:ph type="body" idx="1"/>
+          </p:nvPr>
+        </p:nvSpPr>
+        <p:spPr/>
+        <p:txBody>
+          <a:bodyPr/>
+          <a:lstStyle/>
+          <a:p>
+            <a:endParaRPr lang="es-ES" dirty="0"/>
+          </a:p>
+        </p:txBody>
+      </p:sp>
+      <p:sp>
+        <p:nvSpPr>
+          <p:cNvPr id="4" name="Marcador de número de diapositiva 3">
+            <a:extLst>
+              <a:ext uri="{FF2B5EF4-FFF2-40B4-BE49-F238E27FC236}">
+                <a16:creationId xmlns:a16="http://schemas.microsoft.com/office/drawing/2014/main" id="{BF4093E9-54CF-5F22-CAFB-3FA67D4846B4}"/>
+              </a:ext>
+            </a:extLst>
+          </p:cNvPr>
+          <p:cNvSpPr>
+            <a:spLocks noGrp="1"/>
+          </p:cNvSpPr>
+          <p:nvPr>
+            <p:ph type="sldNum" sz="quarter" idx="5"/>
+          </p:nvPr>
+        </p:nvSpPr>
+        <p:spPr/>
+        <p:txBody>
+          <a:bodyPr/>
+          <a:lstStyle/>
+          <a:p>
+            <a:fld id="{676223B9-C868-4436-87D9-1A3152E1157A}" type="slidenum">
+              <a:rPr lang="es-ES" smtClean="0"/>
+              <a:t>4</a:t>
+            </a:fld>
+            <a:endParaRPr lang="es-ES"/>
+          </a:p>
+        </p:txBody>
+      </p:sp>
+    </p:spTree>
+    <p:extLst>
+      <p:ext uri="{BB962C8B-B14F-4D97-AF65-F5344CB8AC3E}">
+        <p14:creationId xmlns:p14="http://schemas.microsoft.com/office/powerpoint/2010/main" val="2822486017"/>
+      </p:ext>
+    </p:extLst>
+  </p:cSld>
+  <p:clrMapOvr>
+    <a:masterClrMapping/>
+  </p:clrMapOvr>
+</p:notes>
+</file>
+
+<file path=ppt/notesSlides/notesSlide3.xml><?xml version="1.0" encoding="utf-8"?>
+<p:notes xmlns:a="http://schemas.openxmlformats.org/drawingml/2006/main" xmlns:r="http://schemas.openxmlformats.org/officeDocument/2006/relationships" xmlns:p="http://schemas.openxmlformats.org/presentationml/2006/main">
+  <p:cSld>
+    <p:spTree>
+      <p:nvGrpSpPr>
+        <p:cNvPr id="1" name="">
+          <a:extLst>
+            <a:ext uri="{FF2B5EF4-FFF2-40B4-BE49-F238E27FC236}">
+              <a16:creationId xmlns:a16="http://schemas.microsoft.com/office/drawing/2014/main" id="{5BF49BFC-AC4D-984C-19F8-635271A11CA6}"/>
+            </a:ext>
+          </a:extLst>
+        </p:cNvPr>
+        <p:cNvGrpSpPr/>
+        <p:nvPr/>
+      </p:nvGrpSpPr>
+      <p:grpSpPr>
+        <a:xfrm>
+          <a:off x="0" y="0"/>
+          <a:ext cx="0" cy="0"/>
+          <a:chOff x="0" y="0"/>
+          <a:chExt cx="0" cy="0"/>
+        </a:xfrm>
+      </p:grpSpPr>
+      <p:sp>
+        <p:nvSpPr>
+          <p:cNvPr id="2" name="Marcador de imagen de diapositiva 1">
+            <a:extLst>
+              <a:ext uri="{FF2B5EF4-FFF2-40B4-BE49-F238E27FC236}">
+                <a16:creationId xmlns:a16="http://schemas.microsoft.com/office/drawing/2014/main" id="{685DDD09-3D26-A60C-41C3-EEBC7F4CA846}"/>
+              </a:ext>
+            </a:extLst>
+          </p:cNvPr>
+          <p:cNvSpPr>
+            <a:spLocks noGrp="1" noRot="1" noChangeAspect="1"/>
+          </p:cNvSpPr>
+          <p:nvPr>
+            <p:ph type="sldImg"/>
+          </p:nvPr>
+        </p:nvSpPr>
+        <p:spPr/>
+      </p:sp>
+      <p:sp>
+        <p:nvSpPr>
+          <p:cNvPr id="3" name="Marcador de notas 2">
+            <a:extLst>
+              <a:ext uri="{FF2B5EF4-FFF2-40B4-BE49-F238E27FC236}">
+                <a16:creationId xmlns:a16="http://schemas.microsoft.com/office/drawing/2014/main" id="{1C956AC0-CE8C-CFA4-59D3-6C8108D90A3D}"/>
+              </a:ext>
+            </a:extLst>
+          </p:cNvPr>
+          <p:cNvSpPr>
+            <a:spLocks noGrp="1"/>
+          </p:cNvSpPr>
+          <p:nvPr>
+            <p:ph type="body" idx="1"/>
+          </p:nvPr>
+        </p:nvSpPr>
+        <p:spPr/>
+        <p:txBody>
+          <a:bodyPr/>
+          <a:lstStyle/>
+          <a:p>
+            <a:endParaRPr lang="es-ES" dirty="0"/>
+          </a:p>
+        </p:txBody>
+      </p:sp>
+      <p:sp>
+        <p:nvSpPr>
+          <p:cNvPr id="4" name="Marcador de número de diapositiva 3">
+            <a:extLst>
+              <a:ext uri="{FF2B5EF4-FFF2-40B4-BE49-F238E27FC236}">
+                <a16:creationId xmlns:a16="http://schemas.microsoft.com/office/drawing/2014/main" id="{F312FED4-2F26-2267-9C84-B1241D8F624F}"/>
+              </a:ext>
+            </a:extLst>
+          </p:cNvPr>
+          <p:cNvSpPr>
+            <a:spLocks noGrp="1"/>
+          </p:cNvSpPr>
+          <p:nvPr>
+            <p:ph type="sldNum" sz="quarter" idx="5"/>
+          </p:nvPr>
+        </p:nvSpPr>
+        <p:spPr/>
+        <p:txBody>
+          <a:bodyPr/>
+          <a:lstStyle/>
+          <a:p>
+            <a:fld id="{676223B9-C868-4436-87D9-1A3152E1157A}" type="slidenum">
+              <a:rPr lang="es-ES" smtClean="0"/>
+              <a:t>5</a:t>
+            </a:fld>
+            <a:endParaRPr lang="es-ES"/>
+          </a:p>
+        </p:txBody>
+      </p:sp>
+    </p:spTree>
+    <p:extLst>
+      <p:ext uri="{BB962C8B-B14F-4D97-AF65-F5344CB8AC3E}">
+        <p14:creationId xmlns:p14="http://schemas.microsoft.com/office/powerpoint/2010/main" val="2451377515"/>
+      </p:ext>
+    </p:extLst>
+  </p:cSld>
+  <p:clrMapOvr>
+    <a:masterClrMapping/>
+  </p:clrMapOvr>
+</p:notes>
+</file>
+
+<file path=ppt/notesSlides/notesSlide4.xml><?xml version="1.0" encoding="utf-8"?>
+<p:notes xmlns:a="http://schemas.openxmlformats.org/drawingml/2006/main" xmlns:r="http://schemas.openxmlformats.org/officeDocument/2006/relationships" xmlns:p="http://schemas.openxmlformats.org/presentationml/2006/main">
+  <p:cSld>
+    <p:spTree>
+      <p:nvGrpSpPr>
+        <p:cNvPr id="1" name="">
+          <a:extLst>
+            <a:ext uri="{FF2B5EF4-FFF2-40B4-BE49-F238E27FC236}">
+              <a16:creationId xmlns:a16="http://schemas.microsoft.com/office/drawing/2014/main" id="{4E3C5711-C157-AA5E-1EA1-9F4C3F40B90E}"/>
+            </a:ext>
+          </a:extLst>
+        </p:cNvPr>
+        <p:cNvGrpSpPr/>
+        <p:nvPr/>
+      </p:nvGrpSpPr>
+      <p:grpSpPr>
+        <a:xfrm>
+          <a:off x="0" y="0"/>
+          <a:ext cx="0" cy="0"/>
+          <a:chOff x="0" y="0"/>
+          <a:chExt cx="0" cy="0"/>
+        </a:xfrm>
+      </p:grpSpPr>
+      <p:sp>
+        <p:nvSpPr>
+          <p:cNvPr id="2" name="Marcador de imagen de diapositiva 1">
+            <a:extLst>
+              <a:ext uri="{FF2B5EF4-FFF2-40B4-BE49-F238E27FC236}">
+                <a16:creationId xmlns:a16="http://schemas.microsoft.com/office/drawing/2014/main" id="{FFA117F6-F66D-FFD4-422F-EBD94B31F3F1}"/>
+              </a:ext>
+            </a:extLst>
+          </p:cNvPr>
+          <p:cNvSpPr>
+            <a:spLocks noGrp="1" noRot="1" noChangeAspect="1"/>
+          </p:cNvSpPr>
+          <p:nvPr>
+            <p:ph type="sldImg"/>
+          </p:nvPr>
+        </p:nvSpPr>
+        <p:spPr/>
+      </p:sp>
+      <p:sp>
+        <p:nvSpPr>
+          <p:cNvPr id="3" name="Marcador de notas 2">
+            <a:extLst>
+              <a:ext uri="{FF2B5EF4-FFF2-40B4-BE49-F238E27FC236}">
+                <a16:creationId xmlns:a16="http://schemas.microsoft.com/office/drawing/2014/main" id="{02B512FE-9F6C-4ABD-23FA-CA518B458D1F}"/>
+              </a:ext>
+            </a:extLst>
+          </p:cNvPr>
+          <p:cNvSpPr>
+            <a:spLocks noGrp="1"/>
+          </p:cNvSpPr>
+          <p:nvPr>
+            <p:ph type="body" idx="1"/>
+          </p:nvPr>
+        </p:nvSpPr>
+        <p:spPr/>
+        <p:txBody>
+          <a:bodyPr/>
+          <a:lstStyle/>
+          <a:p>
+            <a:endParaRPr lang="es-ES" dirty="0"/>
+          </a:p>
+        </p:txBody>
+      </p:sp>
+      <p:sp>
+        <p:nvSpPr>
+          <p:cNvPr id="4" name="Marcador de número de diapositiva 3">
+            <a:extLst>
+              <a:ext uri="{FF2B5EF4-FFF2-40B4-BE49-F238E27FC236}">
+                <a16:creationId xmlns:a16="http://schemas.microsoft.com/office/drawing/2014/main" id="{9624E7A5-CBFC-658B-8E88-8AF8084D5BC4}"/>
+              </a:ext>
+            </a:extLst>
+          </p:cNvPr>
+          <p:cNvSpPr>
+            <a:spLocks noGrp="1"/>
+          </p:cNvSpPr>
+          <p:nvPr>
+            <p:ph type="sldNum" sz="quarter" idx="5"/>
+          </p:nvPr>
+        </p:nvSpPr>
+        <p:spPr/>
+        <p:txBody>
+          <a:bodyPr/>
+          <a:lstStyle/>
+          <a:p>
+            <a:fld id="{676223B9-C868-4436-87D9-1A3152E1157A}" type="slidenum">
+              <a:rPr lang="es-ES" smtClean="0"/>
+              <a:t>6</a:t>
+            </a:fld>
+            <a:endParaRPr lang="es-ES"/>
+          </a:p>
+        </p:txBody>
+      </p:sp>
+    </p:spTree>
+    <p:extLst>
+      <p:ext uri="{BB962C8B-B14F-4D97-AF65-F5344CB8AC3E}">
+        <p14:creationId xmlns:p14="http://schemas.microsoft.com/office/powerpoint/2010/main" val="1832961436"/>
+      </p:ext>
+    </p:extLst>
+  </p:cSld>
+  <p:clrMapOvr>
+    <a:masterClrMapping/>
+  </p:clrMapOvr>
+</p:notes>
+</file>
+
+<file path=ppt/notesSlides/notesSlide5.xml><?xml version="1.0" encoding="utf-8"?>
+<p:notes xmlns:a="http://schemas.openxmlformats.org/drawingml/2006/main" xmlns:r="http://schemas.openxmlformats.org/officeDocument/2006/relationships" xmlns:p="http://schemas.openxmlformats.org/presentationml/2006/main">
+  <p:cSld>
+    <p:spTree>
+      <p:nvGrpSpPr>
+        <p:cNvPr id="1" name="">
+          <a:extLst>
+            <a:ext uri="{FF2B5EF4-FFF2-40B4-BE49-F238E27FC236}">
+              <a16:creationId xmlns:a16="http://schemas.microsoft.com/office/drawing/2014/main" id="{95993BBE-3704-D894-1C10-5488EE611F08}"/>
+            </a:ext>
+          </a:extLst>
+        </p:cNvPr>
+        <p:cNvGrpSpPr/>
+        <p:nvPr/>
+      </p:nvGrpSpPr>
+      <p:grpSpPr>
+        <a:xfrm>
+          <a:off x="0" y="0"/>
+          <a:ext cx="0" cy="0"/>
+          <a:chOff x="0" y="0"/>
+          <a:chExt cx="0" cy="0"/>
+        </a:xfrm>
+      </p:grpSpPr>
+      <p:sp>
+        <p:nvSpPr>
+          <p:cNvPr id="2" name="Marcador de imagen de diapositiva 1">
+            <a:extLst>
+              <a:ext uri="{FF2B5EF4-FFF2-40B4-BE49-F238E27FC236}">
+                <a16:creationId xmlns:a16="http://schemas.microsoft.com/office/drawing/2014/main" id="{19BB04E2-F70F-42F7-9964-3D274C49FB9C}"/>
+              </a:ext>
+            </a:extLst>
+          </p:cNvPr>
+          <p:cNvSpPr>
+            <a:spLocks noGrp="1" noRot="1" noChangeAspect="1"/>
+          </p:cNvSpPr>
+          <p:nvPr>
+            <p:ph type="sldImg"/>
+          </p:nvPr>
+        </p:nvSpPr>
+        <p:spPr/>
+      </p:sp>
+      <p:sp>
+        <p:nvSpPr>
+          <p:cNvPr id="3" name="Marcador de notas 2">
+            <a:extLst>
+              <a:ext uri="{FF2B5EF4-FFF2-40B4-BE49-F238E27FC236}">
+                <a16:creationId xmlns:a16="http://schemas.microsoft.com/office/drawing/2014/main" id="{F6664AEC-7D1D-9DDC-3B94-3AE8450C7E5E}"/>
+              </a:ext>
+            </a:extLst>
+          </p:cNvPr>
+          <p:cNvSpPr>
+            <a:spLocks noGrp="1"/>
+          </p:cNvSpPr>
+          <p:nvPr>
+            <p:ph type="body" idx="1"/>
+          </p:nvPr>
+        </p:nvSpPr>
+        <p:spPr/>
+        <p:txBody>
+          <a:bodyPr/>
+          <a:lstStyle/>
+          <a:p>
+            <a:endParaRPr lang="es-ES" dirty="0"/>
+          </a:p>
+        </p:txBody>
+      </p:sp>
+      <p:sp>
+        <p:nvSpPr>
+          <p:cNvPr id="4" name="Marcador de número de diapositiva 3">
+            <a:extLst>
+              <a:ext uri="{FF2B5EF4-FFF2-40B4-BE49-F238E27FC236}">
+                <a16:creationId xmlns:a16="http://schemas.microsoft.com/office/drawing/2014/main" id="{E8F62EEB-2D30-2026-D252-4267AF688251}"/>
+              </a:ext>
+            </a:extLst>
+          </p:cNvPr>
+          <p:cNvSpPr>
+            <a:spLocks noGrp="1"/>
+          </p:cNvSpPr>
+          <p:nvPr>
+            <p:ph type="sldNum" sz="quarter" idx="5"/>
+          </p:nvPr>
+        </p:nvSpPr>
+        <p:spPr/>
+        <p:txBody>
+          <a:bodyPr/>
+          <a:lstStyle/>
+          <a:p>
+            <a:fld id="{676223B9-C868-4436-87D9-1A3152E1157A}" type="slidenum">
+              <a:rPr lang="es-ES" smtClean="0"/>
+              <a:t>7</a:t>
+            </a:fld>
+            <a:endParaRPr lang="es-ES"/>
+          </a:p>
+        </p:txBody>
+      </p:sp>
+    </p:spTree>
+    <p:extLst>
+      <p:ext uri="{BB962C8B-B14F-4D97-AF65-F5344CB8AC3E}">
+        <p14:creationId xmlns:p14="http://schemas.microsoft.com/office/powerpoint/2010/main" val="4116079046"/>
+      </p:ext>
+    </p:extLst>
+  </p:cSld>
+  <p:clrMapOvr>
+    <a:masterClrMapping/>
+  </p:clrMapOvr>
+</p:notes>
+</file>
+
+<file path=ppt/notesSlides/notesSlide6.xml><?xml version="1.0" encoding="utf-8"?>
+<p:notes xmlns:a="http://schemas.openxmlformats.org/drawingml/2006/main" xmlns:r="http://schemas.openxmlformats.org/officeDocument/2006/relationships" xmlns:p="http://schemas.openxmlformats.org/presentationml/2006/main">
+  <p:cSld>
+    <p:spTree>
+      <p:nvGrpSpPr>
+        <p:cNvPr id="1" name="">
+          <a:extLst>
+            <a:ext uri="{FF2B5EF4-FFF2-40B4-BE49-F238E27FC236}">
+              <a16:creationId xmlns:a16="http://schemas.microsoft.com/office/drawing/2014/main" id="{7A69AA65-166B-474B-A6C9-9858D86A9448}"/>
+            </a:ext>
+          </a:extLst>
+        </p:cNvPr>
+        <p:cNvGrpSpPr/>
+        <p:nvPr/>
+      </p:nvGrpSpPr>
+      <p:grpSpPr>
+        <a:xfrm>
+          <a:off x="0" y="0"/>
+          <a:ext cx="0" cy="0"/>
+          <a:chOff x="0" y="0"/>
+          <a:chExt cx="0" cy="0"/>
+        </a:xfrm>
+      </p:grpSpPr>
+      <p:sp>
+        <p:nvSpPr>
+          <p:cNvPr id="2" name="Marcador de imagen de diapositiva 1">
+            <a:extLst>
+              <a:ext uri="{FF2B5EF4-FFF2-40B4-BE49-F238E27FC236}">
+                <a16:creationId xmlns:a16="http://schemas.microsoft.com/office/drawing/2014/main" id="{38158223-A8BA-05F6-464C-EC03A9FB8C56}"/>
+              </a:ext>
+            </a:extLst>
+          </p:cNvPr>
+          <p:cNvSpPr>
+            <a:spLocks noGrp="1" noRot="1" noChangeAspect="1"/>
+          </p:cNvSpPr>
+          <p:nvPr>
+            <p:ph type="sldImg"/>
+          </p:nvPr>
+        </p:nvSpPr>
+        <p:spPr/>
+      </p:sp>
+      <p:sp>
+        <p:nvSpPr>
+          <p:cNvPr id="3" name="Marcador de notas 2">
+            <a:extLst>
+              <a:ext uri="{FF2B5EF4-FFF2-40B4-BE49-F238E27FC236}">
+                <a16:creationId xmlns:a16="http://schemas.microsoft.com/office/drawing/2014/main" id="{F6ECB4DF-C329-8F47-9ECE-661B5B2BF9AC}"/>
+              </a:ext>
+            </a:extLst>
+          </p:cNvPr>
+          <p:cNvSpPr>
+            <a:spLocks noGrp="1"/>
+          </p:cNvSpPr>
+          <p:nvPr>
+            <p:ph type="body" idx="1"/>
+          </p:nvPr>
+        </p:nvSpPr>
+        <p:spPr/>
+        <p:txBody>
+          <a:bodyPr/>
+          <a:lstStyle/>
+          <a:p>
+            <a:endParaRPr lang="es-ES" dirty="0"/>
+          </a:p>
+        </p:txBody>
+      </p:sp>
+      <p:sp>
+        <p:nvSpPr>
+          <p:cNvPr id="4" name="Marcador de número de diapositiva 3">
+            <a:extLst>
+              <a:ext uri="{FF2B5EF4-FFF2-40B4-BE49-F238E27FC236}">
+                <a16:creationId xmlns:a16="http://schemas.microsoft.com/office/drawing/2014/main" id="{041B2276-A4E2-DFBF-0088-6997E86C9FE1}"/>
+              </a:ext>
+            </a:extLst>
+          </p:cNvPr>
+          <p:cNvSpPr>
+            <a:spLocks noGrp="1"/>
+          </p:cNvSpPr>
+          <p:nvPr>
+            <p:ph type="sldNum" sz="quarter" idx="5"/>
+          </p:nvPr>
+        </p:nvSpPr>
+        <p:spPr/>
+        <p:txBody>
+          <a:bodyPr/>
+          <a:lstStyle/>
+          <a:p>
+            <a:fld id="{676223B9-C868-4436-87D9-1A3152E1157A}" type="slidenum">
+              <a:rPr lang="es-ES" smtClean="0"/>
+              <a:t>8</a:t>
+            </a:fld>
+            <a:endParaRPr lang="es-ES"/>
+          </a:p>
+        </p:txBody>
+      </p:sp>
+    </p:spTree>
+    <p:extLst>
+      <p:ext uri="{BB962C8B-B14F-4D97-AF65-F5344CB8AC3E}">
+        <p14:creationId xmlns:p14="http://schemas.microsoft.com/office/powerpoint/2010/main" val="2362315989"/>
+      </p:ext>
+    </p:extLst>
+  </p:cSld>
+  <p:clrMapOvr>
+    <a:masterClrMapping/>
+  </p:clrMapOvr>
+</p:notes>
+</file>
+
+<file path=ppt/notesSlides/notesSlide7.xml><?xml version="1.0" encoding="utf-8"?>
+<p:notes xmlns:a="http://schemas.openxmlformats.org/drawingml/2006/main" xmlns:r="http://schemas.openxmlformats.org/officeDocument/2006/relationships" xmlns:p="http://schemas.openxmlformats.org/presentationml/2006/main">
+  <p:cSld>
+    <p:spTree>
+      <p:nvGrpSpPr>
+        <p:cNvPr id="1" name="">
+          <a:extLst>
+            <a:ext uri="{FF2B5EF4-FFF2-40B4-BE49-F238E27FC236}">
+              <a16:creationId xmlns:a16="http://schemas.microsoft.com/office/drawing/2014/main" id="{7B023B86-D15F-9CD8-C5EA-3EAAD8BACCF7}"/>
+            </a:ext>
+          </a:extLst>
+        </p:cNvPr>
+        <p:cNvGrpSpPr/>
+        <p:nvPr/>
+      </p:nvGrpSpPr>
+      <p:grpSpPr>
+        <a:xfrm>
+          <a:off x="0" y="0"/>
+          <a:ext cx="0" cy="0"/>
+          <a:chOff x="0" y="0"/>
+          <a:chExt cx="0" cy="0"/>
+        </a:xfrm>
+      </p:grpSpPr>
+      <p:sp>
+        <p:nvSpPr>
+          <p:cNvPr id="2" name="Marcador de imagen de diapositiva 1">
+            <a:extLst>
+              <a:ext uri="{FF2B5EF4-FFF2-40B4-BE49-F238E27FC236}">
+                <a16:creationId xmlns:a16="http://schemas.microsoft.com/office/drawing/2014/main" id="{5C73881A-26A5-ECF9-C6F2-3DEFA77AEFCC}"/>
+              </a:ext>
+            </a:extLst>
+          </p:cNvPr>
+          <p:cNvSpPr>
+            <a:spLocks noGrp="1" noRot="1" noChangeAspect="1"/>
+          </p:cNvSpPr>
+          <p:nvPr>
+            <p:ph type="sldImg"/>
+          </p:nvPr>
+        </p:nvSpPr>
+        <p:spPr/>
+      </p:sp>
+      <p:sp>
+        <p:nvSpPr>
+          <p:cNvPr id="3" name="Marcador de notas 2">
+            <a:extLst>
+              <a:ext uri="{FF2B5EF4-FFF2-40B4-BE49-F238E27FC236}">
+                <a16:creationId xmlns:a16="http://schemas.microsoft.com/office/drawing/2014/main" id="{3B7AFC79-4973-3930-959B-AEF8810CFE6A}"/>
+              </a:ext>
+            </a:extLst>
+          </p:cNvPr>
+          <p:cNvSpPr>
+            <a:spLocks noGrp="1"/>
+          </p:cNvSpPr>
+          <p:nvPr>
+            <p:ph type="body" idx="1"/>
+          </p:nvPr>
+        </p:nvSpPr>
+        <p:spPr/>
+        <p:txBody>
+          <a:bodyPr/>
+          <a:lstStyle/>
+          <a:p>
+            <a:endParaRPr lang="es-ES" dirty="0"/>
+          </a:p>
+        </p:txBody>
+      </p:sp>
+      <p:sp>
+        <p:nvSpPr>
+          <p:cNvPr id="4" name="Marcador de número de diapositiva 3">
+            <a:extLst>
+              <a:ext uri="{FF2B5EF4-FFF2-40B4-BE49-F238E27FC236}">
+                <a16:creationId xmlns:a16="http://schemas.microsoft.com/office/drawing/2014/main" id="{8345D0F3-6273-0338-FCDA-175B73D7C9EB}"/>
+              </a:ext>
+            </a:extLst>
+          </p:cNvPr>
+          <p:cNvSpPr>
+            <a:spLocks noGrp="1"/>
+          </p:cNvSpPr>
+          <p:nvPr>
+            <p:ph type="sldNum" sz="quarter" idx="5"/>
+          </p:nvPr>
+        </p:nvSpPr>
+        <p:spPr/>
+        <p:txBody>
+          <a:bodyPr/>
+          <a:lstStyle/>
+          <a:p>
+            <a:fld id="{676223B9-C868-4436-87D9-1A3152E1157A}" type="slidenum">
+              <a:rPr lang="es-ES" smtClean="0"/>
+              <a:t>9</a:t>
+            </a:fld>
+            <a:endParaRPr lang="es-ES"/>
+          </a:p>
+        </p:txBody>
+      </p:sp>
+    </p:spTree>
+    <p:extLst>
+      <p:ext uri="{BB962C8B-B14F-4D97-AF65-F5344CB8AC3E}">
+        <p14:creationId xmlns:p14="http://schemas.microsoft.com/office/powerpoint/2010/main" val="2917382716"/>
+      </p:ext>
+    </p:extLst>
+  </p:cSld>
+  <p:clrMapOvr>
+    <a:masterClrMapping/>
+  </p:clrMapOvr>
+</p:notes>
+</file>
+
+<file path=ppt/notesSlides/notesSlide8.xml><?xml version="1.0" encoding="utf-8"?>
+<p:notes xmlns:a="http://schemas.openxmlformats.org/drawingml/2006/main" xmlns:r="http://schemas.openxmlformats.org/officeDocument/2006/relationships" xmlns:p="http://schemas.openxmlformats.org/presentationml/2006/main">
+  <p:cSld>
+    <p:spTree>
+      <p:nvGrpSpPr>
+        <p:cNvPr id="1" name="">
+          <a:extLst>
+            <a:ext uri="{FF2B5EF4-FFF2-40B4-BE49-F238E27FC236}">
+              <a16:creationId xmlns:a16="http://schemas.microsoft.com/office/drawing/2014/main" id="{23F372A6-6C95-E4D4-BF5C-B643A29942BD}"/>
+            </a:ext>
+          </a:extLst>
+        </p:cNvPr>
+        <p:cNvGrpSpPr/>
+        <p:nvPr/>
+      </p:nvGrpSpPr>
+      <p:grpSpPr>
+        <a:xfrm>
+          <a:off x="0" y="0"/>
+          <a:ext cx="0" cy="0"/>
+          <a:chOff x="0" y="0"/>
+          <a:chExt cx="0" cy="0"/>
+        </a:xfrm>
+      </p:grpSpPr>
+      <p:sp>
+        <p:nvSpPr>
+          <p:cNvPr id="2" name="Marcador de imagen de diapositiva 1">
+            <a:extLst>
+              <a:ext uri="{FF2B5EF4-FFF2-40B4-BE49-F238E27FC236}">
+                <a16:creationId xmlns:a16="http://schemas.microsoft.com/office/drawing/2014/main" id="{6CA5B3AE-FFEA-66C4-12E9-861082361B65}"/>
+              </a:ext>
+            </a:extLst>
+          </p:cNvPr>
+          <p:cNvSpPr>
+            <a:spLocks noGrp="1" noRot="1" noChangeAspect="1"/>
+          </p:cNvSpPr>
+          <p:nvPr>
+            <p:ph type="sldImg"/>
+          </p:nvPr>
+        </p:nvSpPr>
+        <p:spPr/>
+      </p:sp>
+      <p:sp>
+        <p:nvSpPr>
+          <p:cNvPr id="3" name="Marcador de notas 2">
+            <a:extLst>
+              <a:ext uri="{FF2B5EF4-FFF2-40B4-BE49-F238E27FC236}">
+                <a16:creationId xmlns:a16="http://schemas.microsoft.com/office/drawing/2014/main" id="{171FF9E9-532D-BE68-1E4F-4E86497D4B08}"/>
+              </a:ext>
+            </a:extLst>
+          </p:cNvPr>
+          <p:cNvSpPr>
+            <a:spLocks noGrp="1"/>
+          </p:cNvSpPr>
+          <p:nvPr>
+            <p:ph type="body" idx="1"/>
+          </p:nvPr>
+        </p:nvSpPr>
+        <p:spPr/>
+        <p:txBody>
+          <a:bodyPr/>
+          <a:lstStyle/>
+          <a:p>
+            <a:endParaRPr lang="es-ES" dirty="0"/>
+          </a:p>
+        </p:txBody>
+      </p:sp>
+      <p:sp>
+        <p:nvSpPr>
+          <p:cNvPr id="4" name="Marcador de número de diapositiva 3">
+            <a:extLst>
+              <a:ext uri="{FF2B5EF4-FFF2-40B4-BE49-F238E27FC236}">
+                <a16:creationId xmlns:a16="http://schemas.microsoft.com/office/drawing/2014/main" id="{D024E5AF-CFAF-AABF-8D97-2F2BE50E7C80}"/>
+              </a:ext>
+            </a:extLst>
+          </p:cNvPr>
+          <p:cNvSpPr>
+            <a:spLocks noGrp="1"/>
+          </p:cNvSpPr>
+          <p:nvPr>
+            <p:ph type="sldNum" sz="quarter" idx="5"/>
+          </p:nvPr>
+        </p:nvSpPr>
+        <p:spPr/>
+        <p:txBody>
+          <a:bodyPr/>
+          <a:lstStyle/>
+          <a:p>
+            <a:fld id="{676223B9-C868-4436-87D9-1A3152E1157A}" type="slidenum">
+              <a:rPr lang="es-ES" smtClean="0"/>
+              <a:t>10</a:t>
+            </a:fld>
+            <a:endParaRPr lang="es-ES"/>
+          </a:p>
+        </p:txBody>
+      </p:sp>
+    </p:spTree>
+    <p:extLst>
+      <p:ext uri="{BB962C8B-B14F-4D97-AF65-F5344CB8AC3E}">
+        <p14:creationId xmlns:p14="http://schemas.microsoft.com/office/powerpoint/2010/main" val="2006642282"/>
+      </p:ext>
+    </p:extLst>
+  </p:cSld>
+  <p:clrMapOvr>
+    <a:masterClrMapping/>
+  </p:clrMapOvr>
+</p:notes>
+</file>
+
+<file path=ppt/notesSlides/notesSlide9.xml><?xml version="1.0" encoding="utf-8"?>
 <p:notes xmlns:a="http://schemas.openxmlformats.org/drawingml/2006/main" xmlns:r="http://schemas.openxmlformats.org/officeDocument/2006/relationships" xmlns:p="http://schemas.openxmlformats.org/presentationml/2006/main">
   <p:cSld>
     <p:spTree>
@@ -889,7 +1884,7 @@
           <a:p>
             <a:fld id="{676223B9-C868-4436-87D9-1A3152E1157A}" type="slidenum">
               <a:rPr lang="es-ES" smtClean="0"/>
-              <a:t>12</a:t>
+              <a:t>11</a:t>
             </a:fld>
             <a:endParaRPr lang="es-ES"/>
           </a:p>
@@ -899,1086 +1894,6 @@
     <p:extLst>
       <p:ext uri="{BB962C8B-B14F-4D97-AF65-F5344CB8AC3E}">
         <p14:creationId xmlns:p14="http://schemas.microsoft.com/office/powerpoint/2010/main" val="737430653"/>
-      </p:ext>
-    </p:extLst>
-  </p:cSld>
-  <p:clrMapOvr>
-    <a:masterClrMapping/>
-  </p:clrMapOvr>
-</p:notes>
-</file>
-
-<file path=ppt/notesSlides/notesSlide11.xml><?xml version="1.0" encoding="utf-8"?>
-<p:notes xmlns:a="http://schemas.openxmlformats.org/drawingml/2006/main" xmlns:r="http://schemas.openxmlformats.org/officeDocument/2006/relationships" xmlns:p="http://schemas.openxmlformats.org/presentationml/2006/main">
-  <p:cSld>
-    <p:spTree>
-      <p:nvGrpSpPr>
-        <p:cNvPr id="1" name="">
-          <a:extLst>
-            <a:ext uri="{FF2B5EF4-FFF2-40B4-BE49-F238E27FC236}">
-              <a16:creationId xmlns:a16="http://schemas.microsoft.com/office/drawing/2014/main" id="{4CFF2CC8-05DB-4691-975B-5CB4F6F72229}"/>
-            </a:ext>
-          </a:extLst>
-        </p:cNvPr>
-        <p:cNvGrpSpPr/>
-        <p:nvPr/>
-      </p:nvGrpSpPr>
-      <p:grpSpPr>
-        <a:xfrm>
-          <a:off x="0" y="0"/>
-          <a:ext cx="0" cy="0"/>
-          <a:chOff x="0" y="0"/>
-          <a:chExt cx="0" cy="0"/>
-        </a:xfrm>
-      </p:grpSpPr>
-      <p:sp>
-        <p:nvSpPr>
-          <p:cNvPr id="2" name="Marcador de imagen de diapositiva 1">
-            <a:extLst>
-              <a:ext uri="{FF2B5EF4-FFF2-40B4-BE49-F238E27FC236}">
-                <a16:creationId xmlns:a16="http://schemas.microsoft.com/office/drawing/2014/main" id="{4E0BA263-33B5-7053-6336-32E955917816}"/>
-              </a:ext>
-            </a:extLst>
-          </p:cNvPr>
-          <p:cNvSpPr>
-            <a:spLocks noGrp="1" noRot="1" noChangeAspect="1"/>
-          </p:cNvSpPr>
-          <p:nvPr>
-            <p:ph type="sldImg"/>
-          </p:nvPr>
-        </p:nvSpPr>
-        <p:spPr/>
-      </p:sp>
-      <p:sp>
-        <p:nvSpPr>
-          <p:cNvPr id="3" name="Marcador de notas 2">
-            <a:extLst>
-              <a:ext uri="{FF2B5EF4-FFF2-40B4-BE49-F238E27FC236}">
-                <a16:creationId xmlns:a16="http://schemas.microsoft.com/office/drawing/2014/main" id="{9C1ACDD5-0C09-CF66-497D-1725738EE0DF}"/>
-              </a:ext>
-            </a:extLst>
-          </p:cNvPr>
-          <p:cNvSpPr>
-            <a:spLocks noGrp="1"/>
-          </p:cNvSpPr>
-          <p:nvPr>
-            <p:ph type="body" idx="1"/>
-          </p:nvPr>
-        </p:nvSpPr>
-        <p:spPr/>
-        <p:txBody>
-          <a:bodyPr/>
-          <a:lstStyle/>
-          <a:p>
-            <a:endParaRPr lang="es-ES" dirty="0"/>
-          </a:p>
-        </p:txBody>
-      </p:sp>
-      <p:sp>
-        <p:nvSpPr>
-          <p:cNvPr id="4" name="Marcador de número de diapositiva 3">
-            <a:extLst>
-              <a:ext uri="{FF2B5EF4-FFF2-40B4-BE49-F238E27FC236}">
-                <a16:creationId xmlns:a16="http://schemas.microsoft.com/office/drawing/2014/main" id="{89F05E02-6563-E17B-67B8-CBA0BE8A22D0}"/>
-              </a:ext>
-            </a:extLst>
-          </p:cNvPr>
-          <p:cNvSpPr>
-            <a:spLocks noGrp="1"/>
-          </p:cNvSpPr>
-          <p:nvPr>
-            <p:ph type="sldNum" sz="quarter" idx="5"/>
-          </p:nvPr>
-        </p:nvSpPr>
-        <p:spPr/>
-        <p:txBody>
-          <a:bodyPr/>
-          <a:lstStyle/>
-          <a:p>
-            <a:fld id="{676223B9-C868-4436-87D9-1A3152E1157A}" type="slidenum">
-              <a:rPr lang="es-ES" smtClean="0"/>
-              <a:t>13</a:t>
-            </a:fld>
-            <a:endParaRPr lang="es-ES"/>
-          </a:p>
-        </p:txBody>
-      </p:sp>
-    </p:spTree>
-    <p:extLst>
-      <p:ext uri="{BB962C8B-B14F-4D97-AF65-F5344CB8AC3E}">
-        <p14:creationId xmlns:p14="http://schemas.microsoft.com/office/powerpoint/2010/main" val="3072001755"/>
-      </p:ext>
-    </p:extLst>
-  </p:cSld>
-  <p:clrMapOvr>
-    <a:masterClrMapping/>
-  </p:clrMapOvr>
-</p:notes>
-</file>
-
-<file path=ppt/notesSlides/notesSlide12.xml><?xml version="1.0" encoding="utf-8"?>
-<p:notes xmlns:a="http://schemas.openxmlformats.org/drawingml/2006/main" xmlns:r="http://schemas.openxmlformats.org/officeDocument/2006/relationships" xmlns:p="http://schemas.openxmlformats.org/presentationml/2006/main">
-  <p:cSld>
-    <p:spTree>
-      <p:nvGrpSpPr>
-        <p:cNvPr id="1" name="">
-          <a:extLst>
-            <a:ext uri="{FF2B5EF4-FFF2-40B4-BE49-F238E27FC236}">
-              <a16:creationId xmlns:a16="http://schemas.microsoft.com/office/drawing/2014/main" id="{868F883C-2214-83DE-A46F-0B4499EEAD7F}"/>
-            </a:ext>
-          </a:extLst>
-        </p:cNvPr>
-        <p:cNvGrpSpPr/>
-        <p:nvPr/>
-      </p:nvGrpSpPr>
-      <p:grpSpPr>
-        <a:xfrm>
-          <a:off x="0" y="0"/>
-          <a:ext cx="0" cy="0"/>
-          <a:chOff x="0" y="0"/>
-          <a:chExt cx="0" cy="0"/>
-        </a:xfrm>
-      </p:grpSpPr>
-      <p:sp>
-        <p:nvSpPr>
-          <p:cNvPr id="2" name="Marcador de imagen de diapositiva 1">
-            <a:extLst>
-              <a:ext uri="{FF2B5EF4-FFF2-40B4-BE49-F238E27FC236}">
-                <a16:creationId xmlns:a16="http://schemas.microsoft.com/office/drawing/2014/main" id="{3644840D-1C40-39C0-A29B-92A9DEDB14B5}"/>
-              </a:ext>
-            </a:extLst>
-          </p:cNvPr>
-          <p:cNvSpPr>
-            <a:spLocks noGrp="1" noRot="1" noChangeAspect="1"/>
-          </p:cNvSpPr>
-          <p:nvPr>
-            <p:ph type="sldImg"/>
-          </p:nvPr>
-        </p:nvSpPr>
-        <p:spPr/>
-      </p:sp>
-      <p:sp>
-        <p:nvSpPr>
-          <p:cNvPr id="3" name="Marcador de notas 2">
-            <a:extLst>
-              <a:ext uri="{FF2B5EF4-FFF2-40B4-BE49-F238E27FC236}">
-                <a16:creationId xmlns:a16="http://schemas.microsoft.com/office/drawing/2014/main" id="{1E00F841-88B5-28D2-B8AD-7572489A8563}"/>
-              </a:ext>
-            </a:extLst>
-          </p:cNvPr>
-          <p:cNvSpPr>
-            <a:spLocks noGrp="1"/>
-          </p:cNvSpPr>
-          <p:nvPr>
-            <p:ph type="body" idx="1"/>
-          </p:nvPr>
-        </p:nvSpPr>
-        <p:spPr/>
-        <p:txBody>
-          <a:bodyPr/>
-          <a:lstStyle/>
-          <a:p>
-            <a:endParaRPr lang="es-ES" dirty="0"/>
-          </a:p>
-        </p:txBody>
-      </p:sp>
-      <p:sp>
-        <p:nvSpPr>
-          <p:cNvPr id="4" name="Marcador de número de diapositiva 3">
-            <a:extLst>
-              <a:ext uri="{FF2B5EF4-FFF2-40B4-BE49-F238E27FC236}">
-                <a16:creationId xmlns:a16="http://schemas.microsoft.com/office/drawing/2014/main" id="{CD20CB20-0871-B81E-C209-7CB477169152}"/>
-              </a:ext>
-            </a:extLst>
-          </p:cNvPr>
-          <p:cNvSpPr>
-            <a:spLocks noGrp="1"/>
-          </p:cNvSpPr>
-          <p:nvPr>
-            <p:ph type="sldNum" sz="quarter" idx="5"/>
-          </p:nvPr>
-        </p:nvSpPr>
-        <p:spPr/>
-        <p:txBody>
-          <a:bodyPr/>
-          <a:lstStyle/>
-          <a:p>
-            <a:fld id="{676223B9-C868-4436-87D9-1A3152E1157A}" type="slidenum">
-              <a:rPr lang="es-ES" smtClean="0"/>
-              <a:t>14</a:t>
-            </a:fld>
-            <a:endParaRPr lang="es-ES"/>
-          </a:p>
-        </p:txBody>
-      </p:sp>
-    </p:spTree>
-    <p:extLst>
-      <p:ext uri="{BB962C8B-B14F-4D97-AF65-F5344CB8AC3E}">
-        <p14:creationId xmlns:p14="http://schemas.microsoft.com/office/powerpoint/2010/main" val="2941625907"/>
-      </p:ext>
-    </p:extLst>
-  </p:cSld>
-  <p:clrMapOvr>
-    <a:masterClrMapping/>
-  </p:clrMapOvr>
-</p:notes>
-</file>
-
-<file path=ppt/notesSlides/notesSlide2.xml><?xml version="1.0" encoding="utf-8"?>
-<p:notes xmlns:a="http://schemas.openxmlformats.org/drawingml/2006/main" xmlns:r="http://schemas.openxmlformats.org/officeDocument/2006/relationships" xmlns:p="http://schemas.openxmlformats.org/presentationml/2006/main">
-  <p:cSld>
-    <p:spTree>
-      <p:nvGrpSpPr>
-        <p:cNvPr id="1" name="">
-          <a:extLst>
-            <a:ext uri="{FF2B5EF4-FFF2-40B4-BE49-F238E27FC236}">
-              <a16:creationId xmlns:a16="http://schemas.microsoft.com/office/drawing/2014/main" id="{D0A9C5B3-0915-7A78-7FAC-C15D96CE1654}"/>
-            </a:ext>
-          </a:extLst>
-        </p:cNvPr>
-        <p:cNvGrpSpPr/>
-        <p:nvPr/>
-      </p:nvGrpSpPr>
-      <p:grpSpPr>
-        <a:xfrm>
-          <a:off x="0" y="0"/>
-          <a:ext cx="0" cy="0"/>
-          <a:chOff x="0" y="0"/>
-          <a:chExt cx="0" cy="0"/>
-        </a:xfrm>
-      </p:grpSpPr>
-      <p:sp>
-        <p:nvSpPr>
-          <p:cNvPr id="2" name="Marcador de imagen de diapositiva 1">
-            <a:extLst>
-              <a:ext uri="{FF2B5EF4-FFF2-40B4-BE49-F238E27FC236}">
-                <a16:creationId xmlns:a16="http://schemas.microsoft.com/office/drawing/2014/main" id="{CCDAD810-8C16-5834-5A90-698B9E87F8E4}"/>
-              </a:ext>
-            </a:extLst>
-          </p:cNvPr>
-          <p:cNvSpPr>
-            <a:spLocks noGrp="1" noRot="1" noChangeAspect="1"/>
-          </p:cNvSpPr>
-          <p:nvPr>
-            <p:ph type="sldImg"/>
-          </p:nvPr>
-        </p:nvSpPr>
-        <p:spPr/>
-      </p:sp>
-      <p:sp>
-        <p:nvSpPr>
-          <p:cNvPr id="3" name="Marcador de notas 2">
-            <a:extLst>
-              <a:ext uri="{FF2B5EF4-FFF2-40B4-BE49-F238E27FC236}">
-                <a16:creationId xmlns:a16="http://schemas.microsoft.com/office/drawing/2014/main" id="{861CC14A-BDC0-B607-9DF0-6DD39DE6952F}"/>
-              </a:ext>
-            </a:extLst>
-          </p:cNvPr>
-          <p:cNvSpPr>
-            <a:spLocks noGrp="1"/>
-          </p:cNvSpPr>
-          <p:nvPr>
-            <p:ph type="body" idx="1"/>
-          </p:nvPr>
-        </p:nvSpPr>
-        <p:spPr/>
-        <p:txBody>
-          <a:bodyPr/>
-          <a:lstStyle/>
-          <a:p>
-            <a:endParaRPr lang="es-ES" dirty="0"/>
-          </a:p>
-        </p:txBody>
-      </p:sp>
-      <p:sp>
-        <p:nvSpPr>
-          <p:cNvPr id="4" name="Marcador de número de diapositiva 3">
-            <a:extLst>
-              <a:ext uri="{FF2B5EF4-FFF2-40B4-BE49-F238E27FC236}">
-                <a16:creationId xmlns:a16="http://schemas.microsoft.com/office/drawing/2014/main" id="{D972BBC2-8BCA-F6E7-CE66-D116438B1EFC}"/>
-              </a:ext>
-            </a:extLst>
-          </p:cNvPr>
-          <p:cNvSpPr>
-            <a:spLocks noGrp="1"/>
-          </p:cNvSpPr>
-          <p:nvPr>
-            <p:ph type="sldNum" sz="quarter" idx="5"/>
-          </p:nvPr>
-        </p:nvSpPr>
-        <p:spPr/>
-        <p:txBody>
-          <a:bodyPr/>
-          <a:lstStyle/>
-          <a:p>
-            <a:fld id="{676223B9-C868-4436-87D9-1A3152E1157A}" type="slidenum">
-              <a:rPr lang="es-ES" smtClean="0"/>
-              <a:t>4</a:t>
-            </a:fld>
-            <a:endParaRPr lang="es-ES"/>
-          </a:p>
-        </p:txBody>
-      </p:sp>
-    </p:spTree>
-    <p:extLst>
-      <p:ext uri="{BB962C8B-B14F-4D97-AF65-F5344CB8AC3E}">
-        <p14:creationId xmlns:p14="http://schemas.microsoft.com/office/powerpoint/2010/main" val="3614240832"/>
-      </p:ext>
-    </p:extLst>
-  </p:cSld>
-  <p:clrMapOvr>
-    <a:masterClrMapping/>
-  </p:clrMapOvr>
-</p:notes>
-</file>
-
-<file path=ppt/notesSlides/notesSlide3.xml><?xml version="1.0" encoding="utf-8"?>
-<p:notes xmlns:a="http://schemas.openxmlformats.org/drawingml/2006/main" xmlns:r="http://schemas.openxmlformats.org/officeDocument/2006/relationships" xmlns:p="http://schemas.openxmlformats.org/presentationml/2006/main">
-  <p:cSld>
-    <p:spTree>
-      <p:nvGrpSpPr>
-        <p:cNvPr id="1" name="">
-          <a:extLst>
-            <a:ext uri="{FF2B5EF4-FFF2-40B4-BE49-F238E27FC236}">
-              <a16:creationId xmlns:a16="http://schemas.microsoft.com/office/drawing/2014/main" id="{AD92D980-1208-E4A8-CCA6-A3A30DB95215}"/>
-            </a:ext>
-          </a:extLst>
-        </p:cNvPr>
-        <p:cNvGrpSpPr/>
-        <p:nvPr/>
-      </p:nvGrpSpPr>
-      <p:grpSpPr>
-        <a:xfrm>
-          <a:off x="0" y="0"/>
-          <a:ext cx="0" cy="0"/>
-          <a:chOff x="0" y="0"/>
-          <a:chExt cx="0" cy="0"/>
-        </a:xfrm>
-      </p:grpSpPr>
-      <p:sp>
-        <p:nvSpPr>
-          <p:cNvPr id="2" name="Marcador de imagen de diapositiva 1">
-            <a:extLst>
-              <a:ext uri="{FF2B5EF4-FFF2-40B4-BE49-F238E27FC236}">
-                <a16:creationId xmlns:a16="http://schemas.microsoft.com/office/drawing/2014/main" id="{99B70B63-DB26-3C65-D2DC-37832B149D5D}"/>
-              </a:ext>
-            </a:extLst>
-          </p:cNvPr>
-          <p:cNvSpPr>
-            <a:spLocks noGrp="1" noRot="1" noChangeAspect="1"/>
-          </p:cNvSpPr>
-          <p:nvPr>
-            <p:ph type="sldImg"/>
-          </p:nvPr>
-        </p:nvSpPr>
-        <p:spPr/>
-      </p:sp>
-      <p:sp>
-        <p:nvSpPr>
-          <p:cNvPr id="3" name="Marcador de notas 2">
-            <a:extLst>
-              <a:ext uri="{FF2B5EF4-FFF2-40B4-BE49-F238E27FC236}">
-                <a16:creationId xmlns:a16="http://schemas.microsoft.com/office/drawing/2014/main" id="{05344385-6CA9-AAE1-82C4-4CA008C44DAF}"/>
-              </a:ext>
-            </a:extLst>
-          </p:cNvPr>
-          <p:cNvSpPr>
-            <a:spLocks noGrp="1"/>
-          </p:cNvSpPr>
-          <p:nvPr>
-            <p:ph type="body" idx="1"/>
-          </p:nvPr>
-        </p:nvSpPr>
-        <p:spPr/>
-        <p:txBody>
-          <a:bodyPr/>
-          <a:lstStyle/>
-          <a:p>
-            <a:endParaRPr lang="es-ES" dirty="0"/>
-          </a:p>
-        </p:txBody>
-      </p:sp>
-      <p:sp>
-        <p:nvSpPr>
-          <p:cNvPr id="4" name="Marcador de número de diapositiva 3">
-            <a:extLst>
-              <a:ext uri="{FF2B5EF4-FFF2-40B4-BE49-F238E27FC236}">
-                <a16:creationId xmlns:a16="http://schemas.microsoft.com/office/drawing/2014/main" id="{BF4093E9-54CF-5F22-CAFB-3FA67D4846B4}"/>
-              </a:ext>
-            </a:extLst>
-          </p:cNvPr>
-          <p:cNvSpPr>
-            <a:spLocks noGrp="1"/>
-          </p:cNvSpPr>
-          <p:nvPr>
-            <p:ph type="sldNum" sz="quarter" idx="5"/>
-          </p:nvPr>
-        </p:nvSpPr>
-        <p:spPr/>
-        <p:txBody>
-          <a:bodyPr/>
-          <a:lstStyle/>
-          <a:p>
-            <a:fld id="{676223B9-C868-4436-87D9-1A3152E1157A}" type="slidenum">
-              <a:rPr lang="es-ES" smtClean="0"/>
-              <a:t>5</a:t>
-            </a:fld>
-            <a:endParaRPr lang="es-ES"/>
-          </a:p>
-        </p:txBody>
-      </p:sp>
-    </p:spTree>
-    <p:extLst>
-      <p:ext uri="{BB962C8B-B14F-4D97-AF65-F5344CB8AC3E}">
-        <p14:creationId xmlns:p14="http://schemas.microsoft.com/office/powerpoint/2010/main" val="2822486017"/>
-      </p:ext>
-    </p:extLst>
-  </p:cSld>
-  <p:clrMapOvr>
-    <a:masterClrMapping/>
-  </p:clrMapOvr>
-</p:notes>
-</file>
-
-<file path=ppt/notesSlides/notesSlide4.xml><?xml version="1.0" encoding="utf-8"?>
-<p:notes xmlns:a="http://schemas.openxmlformats.org/drawingml/2006/main" xmlns:r="http://schemas.openxmlformats.org/officeDocument/2006/relationships" xmlns:p="http://schemas.openxmlformats.org/presentationml/2006/main">
-  <p:cSld>
-    <p:spTree>
-      <p:nvGrpSpPr>
-        <p:cNvPr id="1" name="">
-          <a:extLst>
-            <a:ext uri="{FF2B5EF4-FFF2-40B4-BE49-F238E27FC236}">
-              <a16:creationId xmlns:a16="http://schemas.microsoft.com/office/drawing/2014/main" id="{5BF49BFC-AC4D-984C-19F8-635271A11CA6}"/>
-            </a:ext>
-          </a:extLst>
-        </p:cNvPr>
-        <p:cNvGrpSpPr/>
-        <p:nvPr/>
-      </p:nvGrpSpPr>
-      <p:grpSpPr>
-        <a:xfrm>
-          <a:off x="0" y="0"/>
-          <a:ext cx="0" cy="0"/>
-          <a:chOff x="0" y="0"/>
-          <a:chExt cx="0" cy="0"/>
-        </a:xfrm>
-      </p:grpSpPr>
-      <p:sp>
-        <p:nvSpPr>
-          <p:cNvPr id="2" name="Marcador de imagen de diapositiva 1">
-            <a:extLst>
-              <a:ext uri="{FF2B5EF4-FFF2-40B4-BE49-F238E27FC236}">
-                <a16:creationId xmlns:a16="http://schemas.microsoft.com/office/drawing/2014/main" id="{685DDD09-3D26-A60C-41C3-EEBC7F4CA846}"/>
-              </a:ext>
-            </a:extLst>
-          </p:cNvPr>
-          <p:cNvSpPr>
-            <a:spLocks noGrp="1" noRot="1" noChangeAspect="1"/>
-          </p:cNvSpPr>
-          <p:nvPr>
-            <p:ph type="sldImg"/>
-          </p:nvPr>
-        </p:nvSpPr>
-        <p:spPr/>
-      </p:sp>
-      <p:sp>
-        <p:nvSpPr>
-          <p:cNvPr id="3" name="Marcador de notas 2">
-            <a:extLst>
-              <a:ext uri="{FF2B5EF4-FFF2-40B4-BE49-F238E27FC236}">
-                <a16:creationId xmlns:a16="http://schemas.microsoft.com/office/drawing/2014/main" id="{1C956AC0-CE8C-CFA4-59D3-6C8108D90A3D}"/>
-              </a:ext>
-            </a:extLst>
-          </p:cNvPr>
-          <p:cNvSpPr>
-            <a:spLocks noGrp="1"/>
-          </p:cNvSpPr>
-          <p:nvPr>
-            <p:ph type="body" idx="1"/>
-          </p:nvPr>
-        </p:nvSpPr>
-        <p:spPr/>
-        <p:txBody>
-          <a:bodyPr/>
-          <a:lstStyle/>
-          <a:p>
-            <a:endParaRPr lang="es-ES" dirty="0"/>
-          </a:p>
-        </p:txBody>
-      </p:sp>
-      <p:sp>
-        <p:nvSpPr>
-          <p:cNvPr id="4" name="Marcador de número de diapositiva 3">
-            <a:extLst>
-              <a:ext uri="{FF2B5EF4-FFF2-40B4-BE49-F238E27FC236}">
-                <a16:creationId xmlns:a16="http://schemas.microsoft.com/office/drawing/2014/main" id="{F312FED4-2F26-2267-9C84-B1241D8F624F}"/>
-              </a:ext>
-            </a:extLst>
-          </p:cNvPr>
-          <p:cNvSpPr>
-            <a:spLocks noGrp="1"/>
-          </p:cNvSpPr>
-          <p:nvPr>
-            <p:ph type="sldNum" sz="quarter" idx="5"/>
-          </p:nvPr>
-        </p:nvSpPr>
-        <p:spPr/>
-        <p:txBody>
-          <a:bodyPr/>
-          <a:lstStyle/>
-          <a:p>
-            <a:fld id="{676223B9-C868-4436-87D9-1A3152E1157A}" type="slidenum">
-              <a:rPr lang="es-ES" smtClean="0"/>
-              <a:t>6</a:t>
-            </a:fld>
-            <a:endParaRPr lang="es-ES"/>
-          </a:p>
-        </p:txBody>
-      </p:sp>
-    </p:spTree>
-    <p:extLst>
-      <p:ext uri="{BB962C8B-B14F-4D97-AF65-F5344CB8AC3E}">
-        <p14:creationId xmlns:p14="http://schemas.microsoft.com/office/powerpoint/2010/main" val="2451377515"/>
-      </p:ext>
-    </p:extLst>
-  </p:cSld>
-  <p:clrMapOvr>
-    <a:masterClrMapping/>
-  </p:clrMapOvr>
-</p:notes>
-</file>
-
-<file path=ppt/notesSlides/notesSlide5.xml><?xml version="1.0" encoding="utf-8"?>
-<p:notes xmlns:a="http://schemas.openxmlformats.org/drawingml/2006/main" xmlns:r="http://schemas.openxmlformats.org/officeDocument/2006/relationships" xmlns:p="http://schemas.openxmlformats.org/presentationml/2006/main">
-  <p:cSld>
-    <p:spTree>
-      <p:nvGrpSpPr>
-        <p:cNvPr id="1" name="">
-          <a:extLst>
-            <a:ext uri="{FF2B5EF4-FFF2-40B4-BE49-F238E27FC236}">
-              <a16:creationId xmlns:a16="http://schemas.microsoft.com/office/drawing/2014/main" id="{4E3C5711-C157-AA5E-1EA1-9F4C3F40B90E}"/>
-            </a:ext>
-          </a:extLst>
-        </p:cNvPr>
-        <p:cNvGrpSpPr/>
-        <p:nvPr/>
-      </p:nvGrpSpPr>
-      <p:grpSpPr>
-        <a:xfrm>
-          <a:off x="0" y="0"/>
-          <a:ext cx="0" cy="0"/>
-          <a:chOff x="0" y="0"/>
-          <a:chExt cx="0" cy="0"/>
-        </a:xfrm>
-      </p:grpSpPr>
-      <p:sp>
-        <p:nvSpPr>
-          <p:cNvPr id="2" name="Marcador de imagen de diapositiva 1">
-            <a:extLst>
-              <a:ext uri="{FF2B5EF4-FFF2-40B4-BE49-F238E27FC236}">
-                <a16:creationId xmlns:a16="http://schemas.microsoft.com/office/drawing/2014/main" id="{FFA117F6-F66D-FFD4-422F-EBD94B31F3F1}"/>
-              </a:ext>
-            </a:extLst>
-          </p:cNvPr>
-          <p:cNvSpPr>
-            <a:spLocks noGrp="1" noRot="1" noChangeAspect="1"/>
-          </p:cNvSpPr>
-          <p:nvPr>
-            <p:ph type="sldImg"/>
-          </p:nvPr>
-        </p:nvSpPr>
-        <p:spPr/>
-      </p:sp>
-      <p:sp>
-        <p:nvSpPr>
-          <p:cNvPr id="3" name="Marcador de notas 2">
-            <a:extLst>
-              <a:ext uri="{FF2B5EF4-FFF2-40B4-BE49-F238E27FC236}">
-                <a16:creationId xmlns:a16="http://schemas.microsoft.com/office/drawing/2014/main" id="{02B512FE-9F6C-4ABD-23FA-CA518B458D1F}"/>
-              </a:ext>
-            </a:extLst>
-          </p:cNvPr>
-          <p:cNvSpPr>
-            <a:spLocks noGrp="1"/>
-          </p:cNvSpPr>
-          <p:nvPr>
-            <p:ph type="body" idx="1"/>
-          </p:nvPr>
-        </p:nvSpPr>
-        <p:spPr/>
-        <p:txBody>
-          <a:bodyPr/>
-          <a:lstStyle/>
-          <a:p>
-            <a:endParaRPr lang="es-ES" dirty="0"/>
-          </a:p>
-        </p:txBody>
-      </p:sp>
-      <p:sp>
-        <p:nvSpPr>
-          <p:cNvPr id="4" name="Marcador de número de diapositiva 3">
-            <a:extLst>
-              <a:ext uri="{FF2B5EF4-FFF2-40B4-BE49-F238E27FC236}">
-                <a16:creationId xmlns:a16="http://schemas.microsoft.com/office/drawing/2014/main" id="{9624E7A5-CBFC-658B-8E88-8AF8084D5BC4}"/>
-              </a:ext>
-            </a:extLst>
-          </p:cNvPr>
-          <p:cNvSpPr>
-            <a:spLocks noGrp="1"/>
-          </p:cNvSpPr>
-          <p:nvPr>
-            <p:ph type="sldNum" sz="quarter" idx="5"/>
-          </p:nvPr>
-        </p:nvSpPr>
-        <p:spPr/>
-        <p:txBody>
-          <a:bodyPr/>
-          <a:lstStyle/>
-          <a:p>
-            <a:fld id="{676223B9-C868-4436-87D9-1A3152E1157A}" type="slidenum">
-              <a:rPr lang="es-ES" smtClean="0"/>
-              <a:t>7</a:t>
-            </a:fld>
-            <a:endParaRPr lang="es-ES"/>
-          </a:p>
-        </p:txBody>
-      </p:sp>
-    </p:spTree>
-    <p:extLst>
-      <p:ext uri="{BB962C8B-B14F-4D97-AF65-F5344CB8AC3E}">
-        <p14:creationId xmlns:p14="http://schemas.microsoft.com/office/powerpoint/2010/main" val="1832961436"/>
-      </p:ext>
-    </p:extLst>
-  </p:cSld>
-  <p:clrMapOvr>
-    <a:masterClrMapping/>
-  </p:clrMapOvr>
-</p:notes>
-</file>
-
-<file path=ppt/notesSlides/notesSlide6.xml><?xml version="1.0" encoding="utf-8"?>
-<p:notes xmlns:a="http://schemas.openxmlformats.org/drawingml/2006/main" xmlns:r="http://schemas.openxmlformats.org/officeDocument/2006/relationships" xmlns:p="http://schemas.openxmlformats.org/presentationml/2006/main">
-  <p:cSld>
-    <p:spTree>
-      <p:nvGrpSpPr>
-        <p:cNvPr id="1" name="">
-          <a:extLst>
-            <a:ext uri="{FF2B5EF4-FFF2-40B4-BE49-F238E27FC236}">
-              <a16:creationId xmlns:a16="http://schemas.microsoft.com/office/drawing/2014/main" id="{95993BBE-3704-D894-1C10-5488EE611F08}"/>
-            </a:ext>
-          </a:extLst>
-        </p:cNvPr>
-        <p:cNvGrpSpPr/>
-        <p:nvPr/>
-      </p:nvGrpSpPr>
-      <p:grpSpPr>
-        <a:xfrm>
-          <a:off x="0" y="0"/>
-          <a:ext cx="0" cy="0"/>
-          <a:chOff x="0" y="0"/>
-          <a:chExt cx="0" cy="0"/>
-        </a:xfrm>
-      </p:grpSpPr>
-      <p:sp>
-        <p:nvSpPr>
-          <p:cNvPr id="2" name="Marcador de imagen de diapositiva 1">
-            <a:extLst>
-              <a:ext uri="{FF2B5EF4-FFF2-40B4-BE49-F238E27FC236}">
-                <a16:creationId xmlns:a16="http://schemas.microsoft.com/office/drawing/2014/main" id="{19BB04E2-F70F-42F7-9964-3D274C49FB9C}"/>
-              </a:ext>
-            </a:extLst>
-          </p:cNvPr>
-          <p:cNvSpPr>
-            <a:spLocks noGrp="1" noRot="1" noChangeAspect="1"/>
-          </p:cNvSpPr>
-          <p:nvPr>
-            <p:ph type="sldImg"/>
-          </p:nvPr>
-        </p:nvSpPr>
-        <p:spPr/>
-      </p:sp>
-      <p:sp>
-        <p:nvSpPr>
-          <p:cNvPr id="3" name="Marcador de notas 2">
-            <a:extLst>
-              <a:ext uri="{FF2B5EF4-FFF2-40B4-BE49-F238E27FC236}">
-                <a16:creationId xmlns:a16="http://schemas.microsoft.com/office/drawing/2014/main" id="{F6664AEC-7D1D-9DDC-3B94-3AE8450C7E5E}"/>
-              </a:ext>
-            </a:extLst>
-          </p:cNvPr>
-          <p:cNvSpPr>
-            <a:spLocks noGrp="1"/>
-          </p:cNvSpPr>
-          <p:nvPr>
-            <p:ph type="body" idx="1"/>
-          </p:nvPr>
-        </p:nvSpPr>
-        <p:spPr/>
-        <p:txBody>
-          <a:bodyPr/>
-          <a:lstStyle/>
-          <a:p>
-            <a:endParaRPr lang="es-ES" dirty="0"/>
-          </a:p>
-        </p:txBody>
-      </p:sp>
-      <p:sp>
-        <p:nvSpPr>
-          <p:cNvPr id="4" name="Marcador de número de diapositiva 3">
-            <a:extLst>
-              <a:ext uri="{FF2B5EF4-FFF2-40B4-BE49-F238E27FC236}">
-                <a16:creationId xmlns:a16="http://schemas.microsoft.com/office/drawing/2014/main" id="{E8F62EEB-2D30-2026-D252-4267AF688251}"/>
-              </a:ext>
-            </a:extLst>
-          </p:cNvPr>
-          <p:cNvSpPr>
-            <a:spLocks noGrp="1"/>
-          </p:cNvSpPr>
-          <p:nvPr>
-            <p:ph type="sldNum" sz="quarter" idx="5"/>
-          </p:nvPr>
-        </p:nvSpPr>
-        <p:spPr/>
-        <p:txBody>
-          <a:bodyPr/>
-          <a:lstStyle/>
-          <a:p>
-            <a:fld id="{676223B9-C868-4436-87D9-1A3152E1157A}" type="slidenum">
-              <a:rPr lang="es-ES" smtClean="0"/>
-              <a:t>8</a:t>
-            </a:fld>
-            <a:endParaRPr lang="es-ES"/>
-          </a:p>
-        </p:txBody>
-      </p:sp>
-    </p:spTree>
-    <p:extLst>
-      <p:ext uri="{BB962C8B-B14F-4D97-AF65-F5344CB8AC3E}">
-        <p14:creationId xmlns:p14="http://schemas.microsoft.com/office/powerpoint/2010/main" val="4116079046"/>
-      </p:ext>
-    </p:extLst>
-  </p:cSld>
-  <p:clrMapOvr>
-    <a:masterClrMapping/>
-  </p:clrMapOvr>
-</p:notes>
-</file>
-
-<file path=ppt/notesSlides/notesSlide7.xml><?xml version="1.0" encoding="utf-8"?>
-<p:notes xmlns:a="http://schemas.openxmlformats.org/drawingml/2006/main" xmlns:r="http://schemas.openxmlformats.org/officeDocument/2006/relationships" xmlns:p="http://schemas.openxmlformats.org/presentationml/2006/main">
-  <p:cSld>
-    <p:spTree>
-      <p:nvGrpSpPr>
-        <p:cNvPr id="1" name="">
-          <a:extLst>
-            <a:ext uri="{FF2B5EF4-FFF2-40B4-BE49-F238E27FC236}">
-              <a16:creationId xmlns:a16="http://schemas.microsoft.com/office/drawing/2014/main" id="{7A69AA65-166B-474B-A6C9-9858D86A9448}"/>
-            </a:ext>
-          </a:extLst>
-        </p:cNvPr>
-        <p:cNvGrpSpPr/>
-        <p:nvPr/>
-      </p:nvGrpSpPr>
-      <p:grpSpPr>
-        <a:xfrm>
-          <a:off x="0" y="0"/>
-          <a:ext cx="0" cy="0"/>
-          <a:chOff x="0" y="0"/>
-          <a:chExt cx="0" cy="0"/>
-        </a:xfrm>
-      </p:grpSpPr>
-      <p:sp>
-        <p:nvSpPr>
-          <p:cNvPr id="2" name="Marcador de imagen de diapositiva 1">
-            <a:extLst>
-              <a:ext uri="{FF2B5EF4-FFF2-40B4-BE49-F238E27FC236}">
-                <a16:creationId xmlns:a16="http://schemas.microsoft.com/office/drawing/2014/main" id="{38158223-A8BA-05F6-464C-EC03A9FB8C56}"/>
-              </a:ext>
-            </a:extLst>
-          </p:cNvPr>
-          <p:cNvSpPr>
-            <a:spLocks noGrp="1" noRot="1" noChangeAspect="1"/>
-          </p:cNvSpPr>
-          <p:nvPr>
-            <p:ph type="sldImg"/>
-          </p:nvPr>
-        </p:nvSpPr>
-        <p:spPr/>
-      </p:sp>
-      <p:sp>
-        <p:nvSpPr>
-          <p:cNvPr id="3" name="Marcador de notas 2">
-            <a:extLst>
-              <a:ext uri="{FF2B5EF4-FFF2-40B4-BE49-F238E27FC236}">
-                <a16:creationId xmlns:a16="http://schemas.microsoft.com/office/drawing/2014/main" id="{F6ECB4DF-C329-8F47-9ECE-661B5B2BF9AC}"/>
-              </a:ext>
-            </a:extLst>
-          </p:cNvPr>
-          <p:cNvSpPr>
-            <a:spLocks noGrp="1"/>
-          </p:cNvSpPr>
-          <p:nvPr>
-            <p:ph type="body" idx="1"/>
-          </p:nvPr>
-        </p:nvSpPr>
-        <p:spPr/>
-        <p:txBody>
-          <a:bodyPr/>
-          <a:lstStyle/>
-          <a:p>
-            <a:endParaRPr lang="es-ES" dirty="0"/>
-          </a:p>
-        </p:txBody>
-      </p:sp>
-      <p:sp>
-        <p:nvSpPr>
-          <p:cNvPr id="4" name="Marcador de número de diapositiva 3">
-            <a:extLst>
-              <a:ext uri="{FF2B5EF4-FFF2-40B4-BE49-F238E27FC236}">
-                <a16:creationId xmlns:a16="http://schemas.microsoft.com/office/drawing/2014/main" id="{041B2276-A4E2-DFBF-0088-6997E86C9FE1}"/>
-              </a:ext>
-            </a:extLst>
-          </p:cNvPr>
-          <p:cNvSpPr>
-            <a:spLocks noGrp="1"/>
-          </p:cNvSpPr>
-          <p:nvPr>
-            <p:ph type="sldNum" sz="quarter" idx="5"/>
-          </p:nvPr>
-        </p:nvSpPr>
-        <p:spPr/>
-        <p:txBody>
-          <a:bodyPr/>
-          <a:lstStyle/>
-          <a:p>
-            <a:fld id="{676223B9-C868-4436-87D9-1A3152E1157A}" type="slidenum">
-              <a:rPr lang="es-ES" smtClean="0"/>
-              <a:t>9</a:t>
-            </a:fld>
-            <a:endParaRPr lang="es-ES"/>
-          </a:p>
-        </p:txBody>
-      </p:sp>
-    </p:spTree>
-    <p:extLst>
-      <p:ext uri="{BB962C8B-B14F-4D97-AF65-F5344CB8AC3E}">
-        <p14:creationId xmlns:p14="http://schemas.microsoft.com/office/powerpoint/2010/main" val="2362315989"/>
-      </p:ext>
-    </p:extLst>
-  </p:cSld>
-  <p:clrMapOvr>
-    <a:masterClrMapping/>
-  </p:clrMapOvr>
-</p:notes>
-</file>
-
-<file path=ppt/notesSlides/notesSlide8.xml><?xml version="1.0" encoding="utf-8"?>
-<p:notes xmlns:a="http://schemas.openxmlformats.org/drawingml/2006/main" xmlns:r="http://schemas.openxmlformats.org/officeDocument/2006/relationships" xmlns:p="http://schemas.openxmlformats.org/presentationml/2006/main">
-  <p:cSld>
-    <p:spTree>
-      <p:nvGrpSpPr>
-        <p:cNvPr id="1" name="">
-          <a:extLst>
-            <a:ext uri="{FF2B5EF4-FFF2-40B4-BE49-F238E27FC236}">
-              <a16:creationId xmlns:a16="http://schemas.microsoft.com/office/drawing/2014/main" id="{7B023B86-D15F-9CD8-C5EA-3EAAD8BACCF7}"/>
-            </a:ext>
-          </a:extLst>
-        </p:cNvPr>
-        <p:cNvGrpSpPr/>
-        <p:nvPr/>
-      </p:nvGrpSpPr>
-      <p:grpSpPr>
-        <a:xfrm>
-          <a:off x="0" y="0"/>
-          <a:ext cx="0" cy="0"/>
-          <a:chOff x="0" y="0"/>
-          <a:chExt cx="0" cy="0"/>
-        </a:xfrm>
-      </p:grpSpPr>
-      <p:sp>
-        <p:nvSpPr>
-          <p:cNvPr id="2" name="Marcador de imagen de diapositiva 1">
-            <a:extLst>
-              <a:ext uri="{FF2B5EF4-FFF2-40B4-BE49-F238E27FC236}">
-                <a16:creationId xmlns:a16="http://schemas.microsoft.com/office/drawing/2014/main" id="{5C73881A-26A5-ECF9-C6F2-3DEFA77AEFCC}"/>
-              </a:ext>
-            </a:extLst>
-          </p:cNvPr>
-          <p:cNvSpPr>
-            <a:spLocks noGrp="1" noRot="1" noChangeAspect="1"/>
-          </p:cNvSpPr>
-          <p:nvPr>
-            <p:ph type="sldImg"/>
-          </p:nvPr>
-        </p:nvSpPr>
-        <p:spPr/>
-      </p:sp>
-      <p:sp>
-        <p:nvSpPr>
-          <p:cNvPr id="3" name="Marcador de notas 2">
-            <a:extLst>
-              <a:ext uri="{FF2B5EF4-FFF2-40B4-BE49-F238E27FC236}">
-                <a16:creationId xmlns:a16="http://schemas.microsoft.com/office/drawing/2014/main" id="{3B7AFC79-4973-3930-959B-AEF8810CFE6A}"/>
-              </a:ext>
-            </a:extLst>
-          </p:cNvPr>
-          <p:cNvSpPr>
-            <a:spLocks noGrp="1"/>
-          </p:cNvSpPr>
-          <p:nvPr>
-            <p:ph type="body" idx="1"/>
-          </p:nvPr>
-        </p:nvSpPr>
-        <p:spPr/>
-        <p:txBody>
-          <a:bodyPr/>
-          <a:lstStyle/>
-          <a:p>
-            <a:endParaRPr lang="es-ES" dirty="0"/>
-          </a:p>
-        </p:txBody>
-      </p:sp>
-      <p:sp>
-        <p:nvSpPr>
-          <p:cNvPr id="4" name="Marcador de número de diapositiva 3">
-            <a:extLst>
-              <a:ext uri="{FF2B5EF4-FFF2-40B4-BE49-F238E27FC236}">
-                <a16:creationId xmlns:a16="http://schemas.microsoft.com/office/drawing/2014/main" id="{8345D0F3-6273-0338-FCDA-175B73D7C9EB}"/>
-              </a:ext>
-            </a:extLst>
-          </p:cNvPr>
-          <p:cNvSpPr>
-            <a:spLocks noGrp="1"/>
-          </p:cNvSpPr>
-          <p:nvPr>
-            <p:ph type="sldNum" sz="quarter" idx="5"/>
-          </p:nvPr>
-        </p:nvSpPr>
-        <p:spPr/>
-        <p:txBody>
-          <a:bodyPr/>
-          <a:lstStyle/>
-          <a:p>
-            <a:fld id="{676223B9-C868-4436-87D9-1A3152E1157A}" type="slidenum">
-              <a:rPr lang="es-ES" smtClean="0"/>
-              <a:t>10</a:t>
-            </a:fld>
-            <a:endParaRPr lang="es-ES"/>
-          </a:p>
-        </p:txBody>
-      </p:sp>
-    </p:spTree>
-    <p:extLst>
-      <p:ext uri="{BB962C8B-B14F-4D97-AF65-F5344CB8AC3E}">
-        <p14:creationId xmlns:p14="http://schemas.microsoft.com/office/powerpoint/2010/main" val="2917382716"/>
-      </p:ext>
-    </p:extLst>
-  </p:cSld>
-  <p:clrMapOvr>
-    <a:masterClrMapping/>
-  </p:clrMapOvr>
-</p:notes>
-</file>
-
-<file path=ppt/notesSlides/notesSlide9.xml><?xml version="1.0" encoding="utf-8"?>
-<p:notes xmlns:a="http://schemas.openxmlformats.org/drawingml/2006/main" xmlns:r="http://schemas.openxmlformats.org/officeDocument/2006/relationships" xmlns:p="http://schemas.openxmlformats.org/presentationml/2006/main">
-  <p:cSld>
-    <p:spTree>
-      <p:nvGrpSpPr>
-        <p:cNvPr id="1" name="">
-          <a:extLst>
-            <a:ext uri="{FF2B5EF4-FFF2-40B4-BE49-F238E27FC236}">
-              <a16:creationId xmlns:a16="http://schemas.microsoft.com/office/drawing/2014/main" id="{23F372A6-6C95-E4D4-BF5C-B643A29942BD}"/>
-            </a:ext>
-          </a:extLst>
-        </p:cNvPr>
-        <p:cNvGrpSpPr/>
-        <p:nvPr/>
-      </p:nvGrpSpPr>
-      <p:grpSpPr>
-        <a:xfrm>
-          <a:off x="0" y="0"/>
-          <a:ext cx="0" cy="0"/>
-          <a:chOff x="0" y="0"/>
-          <a:chExt cx="0" cy="0"/>
-        </a:xfrm>
-      </p:grpSpPr>
-      <p:sp>
-        <p:nvSpPr>
-          <p:cNvPr id="2" name="Marcador de imagen de diapositiva 1">
-            <a:extLst>
-              <a:ext uri="{FF2B5EF4-FFF2-40B4-BE49-F238E27FC236}">
-                <a16:creationId xmlns:a16="http://schemas.microsoft.com/office/drawing/2014/main" id="{6CA5B3AE-FFEA-66C4-12E9-861082361B65}"/>
-              </a:ext>
-            </a:extLst>
-          </p:cNvPr>
-          <p:cNvSpPr>
-            <a:spLocks noGrp="1" noRot="1" noChangeAspect="1"/>
-          </p:cNvSpPr>
-          <p:nvPr>
-            <p:ph type="sldImg"/>
-          </p:nvPr>
-        </p:nvSpPr>
-        <p:spPr/>
-      </p:sp>
-      <p:sp>
-        <p:nvSpPr>
-          <p:cNvPr id="3" name="Marcador de notas 2">
-            <a:extLst>
-              <a:ext uri="{FF2B5EF4-FFF2-40B4-BE49-F238E27FC236}">
-                <a16:creationId xmlns:a16="http://schemas.microsoft.com/office/drawing/2014/main" id="{171FF9E9-532D-BE68-1E4F-4E86497D4B08}"/>
-              </a:ext>
-            </a:extLst>
-          </p:cNvPr>
-          <p:cNvSpPr>
-            <a:spLocks noGrp="1"/>
-          </p:cNvSpPr>
-          <p:nvPr>
-            <p:ph type="body" idx="1"/>
-          </p:nvPr>
-        </p:nvSpPr>
-        <p:spPr/>
-        <p:txBody>
-          <a:bodyPr/>
-          <a:lstStyle/>
-          <a:p>
-            <a:endParaRPr lang="es-ES" dirty="0"/>
-          </a:p>
-        </p:txBody>
-      </p:sp>
-      <p:sp>
-        <p:nvSpPr>
-          <p:cNvPr id="4" name="Marcador de número de diapositiva 3">
-            <a:extLst>
-              <a:ext uri="{FF2B5EF4-FFF2-40B4-BE49-F238E27FC236}">
-                <a16:creationId xmlns:a16="http://schemas.microsoft.com/office/drawing/2014/main" id="{D024E5AF-CFAF-AABF-8D97-2F2BE50E7C80}"/>
-              </a:ext>
-            </a:extLst>
-          </p:cNvPr>
-          <p:cNvSpPr>
-            <a:spLocks noGrp="1"/>
-          </p:cNvSpPr>
-          <p:nvPr>
-            <p:ph type="sldNum" sz="quarter" idx="5"/>
-          </p:nvPr>
-        </p:nvSpPr>
-        <p:spPr/>
-        <p:txBody>
-          <a:bodyPr/>
-          <a:lstStyle/>
-          <a:p>
-            <a:fld id="{676223B9-C868-4436-87D9-1A3152E1157A}" type="slidenum">
-              <a:rPr lang="es-ES" smtClean="0"/>
-              <a:t>11</a:t>
-            </a:fld>
-            <a:endParaRPr lang="es-ES"/>
-          </a:p>
-        </p:txBody>
-      </p:sp>
-    </p:spTree>
-    <p:extLst>
-      <p:ext uri="{BB962C8B-B14F-4D97-AF65-F5344CB8AC3E}">
-        <p14:creationId xmlns:p14="http://schemas.microsoft.com/office/powerpoint/2010/main" val="2006642282"/>
       </p:ext>
     </p:extLst>
   </p:cSld>
@@ -3619,7 +3534,7 @@
         <p:cNvPr id="1" name="">
           <a:extLst>
             <a:ext uri="{FF2B5EF4-FFF2-40B4-BE49-F238E27FC236}">
-              <a16:creationId xmlns:a16="http://schemas.microsoft.com/office/drawing/2014/main" id="{25434E70-43B1-3881-1771-20FB4358471D}"/>
+              <a16:creationId xmlns:a16="http://schemas.microsoft.com/office/drawing/2014/main" id="{78D6BBC3-5145-4705-5F65-216325E77B3E}"/>
             </a:ext>
           </a:extLst>
         </p:cNvPr>
@@ -3639,7 +3554,7 @@
           <p:cNvPr id="16" name="object 16">
             <a:extLst>
               <a:ext uri="{FF2B5EF4-FFF2-40B4-BE49-F238E27FC236}">
-                <a16:creationId xmlns:a16="http://schemas.microsoft.com/office/drawing/2014/main" id="{742C31CE-19F0-B995-0997-9A2D6A879BF7}"/>
+                <a16:creationId xmlns:a16="http://schemas.microsoft.com/office/drawing/2014/main" id="{BC15E1E5-7A56-2995-4D67-273F419F1269}"/>
               </a:ext>
             </a:extLst>
           </p:cNvPr>
@@ -3653,7 +3568,7 @@
         <p:spPr>
           <a:xfrm>
             <a:off x="685800" y="408883"/>
-            <a:ext cx="10994410" cy="1090042"/>
+            <a:ext cx="10994410" cy="2398092"/>
           </a:xfrm>
           <a:prstGeom prst="rect">
             <a:avLst/>
@@ -3666,32 +3581,46 @@
           <a:lstStyle/>
           <a:p>
             <a:pPr marL="12700">
-              <a:lnSpc>
-                <a:spcPct val="100000"/>
-              </a:lnSpc>
               <a:spcBef>
                 <a:spcPts val="100"/>
               </a:spcBef>
             </a:pPr>
             <a:r>
               <a:rPr lang="en-US" sz="2500" dirty="0"/>
-              <a:t>Learning outcome #5 – Bend waveguide radius vs. loss – deep</a:t>
+              <a:t># EXTRA.1 - Wavelength behavior</a:t>
             </a:r>
             <a:br>
               <a:rPr lang="en-US" sz="2500" dirty="0"/>
             </a:br>
             <a:r>
               <a:rPr lang="en-US" b="0" dirty="0"/>
-              <a:t>Find  neff_TE0 for </a:t>
+              <a:t>Now, Simulate the Silicon-On-Insulator technology changing the core material to Silicon (Si). In this case, the dimensions will be 220 nm </a:t>
             </a:r>
             <a:r>
               <a:rPr lang="en-US" b="0" dirty="0" err="1"/>
-              <a:t>wvl</a:t>
+              <a:t>heigth</a:t>
             </a:r>
             <a:r>
               <a:rPr lang="en-US" b="0" dirty="0"/>
-              <a:t> 1.55 µm, width 1.2 µm for R=25,50,75,100, 125,150 µm</a:t>
-            </a:r>
+              <a:t> and 500 nm width. </a:t>
+            </a:r>
+            <a:br>
+              <a:rPr lang="en-US" b="0" dirty="0"/>
+            </a:br>
+            <a:r>
+              <a:rPr lang="en-US" dirty="0"/>
+              <a:t>1. </a:t>
+            </a:r>
+            <a:r>
+              <a:rPr lang="en-US" b="0" dirty="0"/>
+              <a:t>Repeat the LO.2. wavelength behavior simulations, considering the updated materials and dimensions. </a:t>
+            </a:r>
+            <a:br>
+              <a:rPr lang="en-US" b="0" dirty="0"/>
+            </a:br>
+            <a:br>
+              <a:rPr lang="en-US" b="0" dirty="0"/>
+            </a:br>
             <a:br>
               <a:rPr lang="en-US" sz="2500" dirty="0"/>
             </a:br>
@@ -3707,7 +3636,7 @@
           <p:cNvPr id="83" name="Gráfico 82">
             <a:extLst>
               <a:ext uri="{FF2B5EF4-FFF2-40B4-BE49-F238E27FC236}">
-                <a16:creationId xmlns:a16="http://schemas.microsoft.com/office/drawing/2014/main" id="{D688A609-F3DC-EE34-C536-683E70F32EAE}"/>
+                <a16:creationId xmlns:a16="http://schemas.microsoft.com/office/drawing/2014/main" id="{3402F5B0-BE89-6EC8-DE18-8C9902A6259A}"/>
               </a:ext>
             </a:extLst>
           </p:cNvPr>
@@ -3743,7 +3672,7 @@
           <p:cNvPr id="84" name="Marcador de número de diapositiva 83">
             <a:extLst>
               <a:ext uri="{FF2B5EF4-FFF2-40B4-BE49-F238E27FC236}">
-                <a16:creationId xmlns:a16="http://schemas.microsoft.com/office/drawing/2014/main" id="{B6C672C6-89D4-7E67-2B94-811D081786A7}"/>
+                <a16:creationId xmlns:a16="http://schemas.microsoft.com/office/drawing/2014/main" id="{ABED5594-721A-740B-E9D0-284907D21043}"/>
               </a:ext>
             </a:extLst>
           </p:cNvPr>
@@ -3772,7 +3701,7 @@
           <p:cNvPr id="3" name="Marcador de pie de página 2">
             <a:extLst>
               <a:ext uri="{FF2B5EF4-FFF2-40B4-BE49-F238E27FC236}">
-                <a16:creationId xmlns:a16="http://schemas.microsoft.com/office/drawing/2014/main" id="{AA1F4313-D710-7A3E-7A8F-EB77DEE3C1A7}"/>
+                <a16:creationId xmlns:a16="http://schemas.microsoft.com/office/drawing/2014/main" id="{E2C3C16A-8F1C-075F-485A-4A291213F56E}"/>
               </a:ext>
             </a:extLst>
           </p:cNvPr>
@@ -3806,7 +3735,7 @@
           <p:cNvPr id="2" name="CuadroTexto 1">
             <a:extLst>
               <a:ext uri="{FF2B5EF4-FFF2-40B4-BE49-F238E27FC236}">
-                <a16:creationId xmlns:a16="http://schemas.microsoft.com/office/drawing/2014/main" id="{FDE3A197-9508-F9F1-1FEB-FF883D78C151}"/>
+                <a16:creationId xmlns:a16="http://schemas.microsoft.com/office/drawing/2014/main" id="{4F885DF2-D695-6C6F-F4F1-913A39EAE30C}"/>
               </a:ext>
             </a:extLst>
           </p:cNvPr>
@@ -3816,7 +3745,7 @@
         <p:spPr>
           <a:xfrm>
             <a:off x="609441" y="4860334"/>
-            <a:ext cx="11199971" cy="1200329"/>
+            <a:ext cx="11199971" cy="1015663"/>
           </a:xfrm>
           <a:prstGeom prst="rect">
             <a:avLst/>
@@ -3840,488 +3769,43 @@
           <a:p>
             <a:pPr algn="just"/>
             <a:r>
-              <a:rPr lang="en-US" sz="1200" dirty="0">
-                <a:latin typeface="Arial" panose="020B0604020202020204" pitchFamily="34" charset="0"/>
-                <a:cs typeface="Arial" panose="020B0604020202020204" pitchFamily="34" charset="0"/>
-              </a:rPr>
-              <a:t>Comment results, which is the safe radius?, consider safe means less than 0.1 dB/90º.</a:t>
+              <a:rPr lang="es-ES" sz="1200" dirty="0">
+                <a:latin typeface="Arial" panose="020B0604020202020204" pitchFamily="34" charset="0"/>
+                <a:cs typeface="Arial" panose="020B0604020202020204" pitchFamily="34" charset="0"/>
+              </a:rPr>
+              <a:t>Se observa un comportamiento similar al simulado en el apartado LO.2.</a:t>
             </a:r>
           </a:p>
           <a:p>
             <a:pPr algn="just"/>
-            <a:endParaRPr lang="en-US" sz="1200" u="sng" dirty="0">
+            <a:endParaRPr lang="es-ES" sz="1200" dirty="0">
               <a:latin typeface="Arial" panose="020B0604020202020204" pitchFamily="34" charset="0"/>
               <a:cs typeface="Arial" panose="020B0604020202020204" pitchFamily="34" charset="0"/>
             </a:endParaRPr>
           </a:p>
           <a:p>
             <a:pPr algn="just"/>
-            <a:endParaRPr lang="en-US" sz="1200" dirty="0">
-              <a:latin typeface="Arial" panose="020B0604020202020204" pitchFamily="34" charset="0"/>
-              <a:cs typeface="Arial" panose="020B0604020202020204" pitchFamily="34" charset="0"/>
-            </a:endParaRPr>
-          </a:p>
-          <a:p>
-            <a:pPr algn="just"/>
-            <a:endParaRPr lang="en-US" sz="1200" dirty="0">
-              <a:latin typeface="Arial" panose="020B0604020202020204" pitchFamily="34" charset="0"/>
-              <a:cs typeface="Arial" panose="020B0604020202020204" pitchFamily="34" charset="0"/>
-            </a:endParaRPr>
-          </a:p>
-          <a:p>
-            <a:pPr algn="just"/>
-            <a:endParaRPr lang="en-US" sz="1200" dirty="0">
-              <a:latin typeface="Arial" panose="020B0604020202020204" pitchFamily="34" charset="0"/>
-              <a:cs typeface="Arial" panose="020B0604020202020204" pitchFamily="34" charset="0"/>
-            </a:endParaRPr>
-          </a:p>
-          <a:p>
-            <a:pPr algn="just"/>
-            <a:endParaRPr lang="en-US" sz="1200" dirty="0">
-              <a:latin typeface="Arial" panose="020B0604020202020204" pitchFamily="34" charset="0"/>
-              <a:cs typeface="Arial" panose="020B0604020202020204" pitchFamily="34" charset="0"/>
-            </a:endParaRPr>
-          </a:p>
-        </p:txBody>
-      </p:sp>
-      <p:sp>
-        <p:nvSpPr>
-          <p:cNvPr id="7" name="Rectángulo 6">
-            <a:extLst>
-              <a:ext uri="{FF2B5EF4-FFF2-40B4-BE49-F238E27FC236}">
-                <a16:creationId xmlns:a16="http://schemas.microsoft.com/office/drawing/2014/main" id="{B5FE8755-B0BF-14B7-64E6-4BBB2560B9A6}"/>
-              </a:ext>
-            </a:extLst>
-          </p:cNvPr>
-          <p:cNvSpPr/>
-          <p:nvPr/>
-        </p:nvSpPr>
-        <p:spPr>
-          <a:xfrm>
-            <a:off x="609441" y="1418373"/>
-            <a:ext cx="5484812" cy="3306028"/>
-          </a:xfrm>
-          <a:prstGeom prst="rect">
-            <a:avLst/>
-          </a:prstGeom>
-          <a:noFill/>
-          <a:ln w="28575">
-            <a:solidFill>
-              <a:srgbClr val="E0700D"/>
-            </a:solidFill>
-          </a:ln>
-        </p:spPr>
-        <p:style>
-          <a:lnRef idx="2">
-            <a:schemeClr val="accent1">
-              <a:shade val="15000"/>
-            </a:schemeClr>
-          </a:lnRef>
-          <a:fillRef idx="1">
-            <a:schemeClr val="accent1"/>
-          </a:fillRef>
-          <a:effectRef idx="0">
-            <a:schemeClr val="accent1"/>
-          </a:effectRef>
-          <a:fontRef idx="minor">
-            <a:schemeClr val="lt1"/>
-          </a:fontRef>
-        </p:style>
-        <p:txBody>
-          <a:bodyPr rtlCol="0" anchor="ctr"/>
-          <a:lstStyle/>
-          <a:p>
-            <a:pPr algn="ctr"/>
-            <a:endParaRPr lang="en-US"/>
-          </a:p>
-        </p:txBody>
-      </p:sp>
-      <p:pic>
-        <p:nvPicPr>
-          <p:cNvPr id="9" name="Imagen 8">
-            <a:extLst>
-              <a:ext uri="{FF2B5EF4-FFF2-40B4-BE49-F238E27FC236}">
-                <a16:creationId xmlns:a16="http://schemas.microsoft.com/office/drawing/2014/main" id="{F8D6361A-60D6-D762-4EEC-7D641561139F}"/>
-              </a:ext>
-            </a:extLst>
-          </p:cNvPr>
-          <p:cNvPicPr>
-            <a:picLocks noChangeAspect="1"/>
-          </p:cNvPicPr>
-          <p:nvPr/>
-        </p:nvPicPr>
-        <p:blipFill>
-          <a:blip r:embed="rId5">
-            <a:extLst>
-              <a:ext uri="{28A0092B-C50C-407E-A947-70E740481C1C}">
-                <a14:useLocalDpi xmlns:a14="http://schemas.microsoft.com/office/drawing/2010/main" val="0"/>
-              </a:ext>
-            </a:extLst>
-          </a:blip>
-          <a:srcRect/>
-          <a:stretch/>
-        </p:blipFill>
-        <p:spPr>
-          <a:xfrm>
-            <a:off x="1370647" y="1538730"/>
-            <a:ext cx="3962400" cy="3130020"/>
-          </a:xfrm>
-          <a:prstGeom prst="rect">
-            <a:avLst/>
-          </a:prstGeom>
-        </p:spPr>
-      </p:pic>
-      <p:pic>
-        <p:nvPicPr>
-          <p:cNvPr id="11" name="Imagen 10">
-            <a:extLst>
-              <a:ext uri="{FF2B5EF4-FFF2-40B4-BE49-F238E27FC236}">
-                <a16:creationId xmlns:a16="http://schemas.microsoft.com/office/drawing/2014/main" id="{E06F18D7-4C12-4E46-4877-EE4E7B6B5983}"/>
-              </a:ext>
-            </a:extLst>
-          </p:cNvPr>
-          <p:cNvPicPr>
-            <a:picLocks noChangeAspect="1"/>
-          </p:cNvPicPr>
-          <p:nvPr/>
-        </p:nvPicPr>
-        <p:blipFill>
-          <a:blip r:embed="rId6"/>
-          <a:stretch>
-            <a:fillRect/>
-          </a:stretch>
-        </p:blipFill>
-        <p:spPr>
-          <a:xfrm>
-            <a:off x="7084512" y="1582601"/>
-            <a:ext cx="3964990" cy="3042277"/>
-          </a:xfrm>
-          <a:prstGeom prst="rect">
-            <a:avLst/>
-          </a:prstGeom>
-        </p:spPr>
-      </p:pic>
-      <p:sp>
-        <p:nvSpPr>
-          <p:cNvPr id="6" name="Rectángulo 5">
-            <a:extLst>
-              <a:ext uri="{FF2B5EF4-FFF2-40B4-BE49-F238E27FC236}">
-                <a16:creationId xmlns:a16="http://schemas.microsoft.com/office/drawing/2014/main" id="{3648DE4D-6003-93D7-5F17-295114C242BF}"/>
-              </a:ext>
-            </a:extLst>
-          </p:cNvPr>
-          <p:cNvSpPr/>
-          <p:nvPr/>
-        </p:nvSpPr>
-        <p:spPr>
-          <a:xfrm>
-            <a:off x="6324601" y="1418373"/>
-            <a:ext cx="5484812" cy="3306028"/>
-          </a:xfrm>
-          <a:prstGeom prst="rect">
-            <a:avLst/>
-          </a:prstGeom>
-          <a:noFill/>
-          <a:ln w="28575">
-            <a:solidFill>
-              <a:srgbClr val="E0700D"/>
-            </a:solidFill>
-          </a:ln>
-        </p:spPr>
-        <p:style>
-          <a:lnRef idx="2">
-            <a:schemeClr val="accent1">
-              <a:shade val="15000"/>
-            </a:schemeClr>
-          </a:lnRef>
-          <a:fillRef idx="1">
-            <a:schemeClr val="accent1"/>
-          </a:fillRef>
-          <a:effectRef idx="0">
-            <a:schemeClr val="accent1"/>
-          </a:effectRef>
-          <a:fontRef idx="minor">
-            <a:schemeClr val="lt1"/>
-          </a:fontRef>
-        </p:style>
-        <p:txBody>
-          <a:bodyPr rtlCol="0" anchor="ctr"/>
-          <a:lstStyle/>
-          <a:p>
-            <a:pPr algn="ctr"/>
-            <a:endParaRPr lang="en-US"/>
-          </a:p>
-        </p:txBody>
-      </p:sp>
-    </p:spTree>
-    <p:extLst>
-      <p:ext uri="{BB962C8B-B14F-4D97-AF65-F5344CB8AC3E}">
-        <p14:creationId xmlns:p14="http://schemas.microsoft.com/office/powerpoint/2010/main" val="3660438245"/>
-      </p:ext>
-    </p:extLst>
-  </p:cSld>
-  <p:clrMapOvr>
-    <a:masterClrMapping/>
-  </p:clrMapOvr>
-</p:sld>
-</file>
-
-<file path=ppt/slides/slide11.xml><?xml version="1.0" encoding="utf-8"?>
-<p:sld xmlns:a="http://schemas.openxmlformats.org/drawingml/2006/main" xmlns:r="http://schemas.openxmlformats.org/officeDocument/2006/relationships" xmlns:p="http://schemas.openxmlformats.org/presentationml/2006/main">
-  <p:cSld>
-    <p:spTree>
-      <p:nvGrpSpPr>
-        <p:cNvPr id="1" name="">
-          <a:extLst>
-            <a:ext uri="{FF2B5EF4-FFF2-40B4-BE49-F238E27FC236}">
-              <a16:creationId xmlns:a16="http://schemas.microsoft.com/office/drawing/2014/main" id="{78D6BBC3-5145-4705-5F65-216325E77B3E}"/>
-            </a:ext>
-          </a:extLst>
-        </p:cNvPr>
-        <p:cNvGrpSpPr/>
-        <p:nvPr/>
-      </p:nvGrpSpPr>
-      <p:grpSpPr>
-        <a:xfrm>
-          <a:off x="0" y="0"/>
-          <a:ext cx="0" cy="0"/>
-          <a:chOff x="0" y="0"/>
-          <a:chExt cx="0" cy="0"/>
-        </a:xfrm>
-      </p:grpSpPr>
-      <p:sp>
-        <p:nvSpPr>
-          <p:cNvPr id="16" name="object 16">
-            <a:extLst>
-              <a:ext uri="{FF2B5EF4-FFF2-40B4-BE49-F238E27FC236}">
-                <a16:creationId xmlns:a16="http://schemas.microsoft.com/office/drawing/2014/main" id="{BC15E1E5-7A56-2995-4D67-273F419F1269}"/>
-              </a:ext>
-            </a:extLst>
-          </p:cNvPr>
-          <p:cNvSpPr txBox="1">
-            <a:spLocks noGrp="1"/>
-          </p:cNvSpPr>
-          <p:nvPr>
-            <p:ph type="title"/>
-          </p:nvPr>
-        </p:nvSpPr>
-        <p:spPr>
-          <a:xfrm>
-            <a:off x="685800" y="408883"/>
-            <a:ext cx="10994410" cy="2398092"/>
-          </a:xfrm>
-          <a:prstGeom prst="rect">
-            <a:avLst/>
-          </a:prstGeom>
-        </p:spPr>
-        <p:txBody>
-          <a:bodyPr vert="horz" wrap="square" lIns="0" tIns="12700" rIns="0" bIns="0" rtlCol="0">
-            <a:spAutoFit/>
-          </a:bodyPr>
-          <a:lstStyle/>
-          <a:p>
-            <a:pPr marL="12700">
-              <a:spcBef>
-                <a:spcPts val="100"/>
-              </a:spcBef>
-            </a:pPr>
-            <a:r>
-              <a:rPr lang="en-US" sz="2500" dirty="0"/>
-              <a:t># EXTRA.1 - Wavelength behavior</a:t>
-            </a:r>
-            <a:br>
-              <a:rPr lang="en-US" sz="2500" dirty="0"/>
-            </a:br>
-            <a:r>
-              <a:rPr lang="en-US" b="0" dirty="0"/>
-              <a:t>Now, Simulate the Silicon-On-Insulator technology changing the core material to Silicon (Si). In this case, the dimensions will be 220 nm </a:t>
-            </a:r>
-            <a:r>
-              <a:rPr lang="en-US" b="0" dirty="0" err="1"/>
-              <a:t>heigth</a:t>
-            </a:r>
-            <a:r>
-              <a:rPr lang="en-US" b="0" dirty="0"/>
-              <a:t> and 500 nm width. </a:t>
-            </a:r>
-            <a:br>
-              <a:rPr lang="en-US" b="0" dirty="0"/>
-            </a:br>
-            <a:r>
-              <a:rPr lang="en-US" dirty="0"/>
-              <a:t>1. </a:t>
-            </a:r>
-            <a:r>
-              <a:rPr lang="en-US" b="0" dirty="0"/>
-              <a:t>Repeat the LO.2. wavelength behavior simulations, considering the updated materials and dimensions. </a:t>
-            </a:r>
-            <a:br>
-              <a:rPr lang="en-US" b="0" dirty="0"/>
-            </a:br>
-            <a:br>
-              <a:rPr lang="en-US" b="0" dirty="0"/>
-            </a:br>
-            <a:br>
-              <a:rPr lang="en-US" sz="2500" dirty="0"/>
-            </a:br>
-            <a:endParaRPr lang="en-US" sz="2500" b="0" dirty="0">
-              <a:latin typeface="+mj-lt"/>
-              <a:cs typeface="Lucida Sans"/>
-            </a:endParaRPr>
-          </a:p>
-        </p:txBody>
-      </p:sp>
-      <p:pic>
-        <p:nvPicPr>
-          <p:cNvPr id="83" name="Gráfico 82">
-            <a:extLst>
-              <a:ext uri="{FF2B5EF4-FFF2-40B4-BE49-F238E27FC236}">
-                <a16:creationId xmlns:a16="http://schemas.microsoft.com/office/drawing/2014/main" id="{3402F5B0-BE89-6EC8-DE18-8C9902A6259A}"/>
-              </a:ext>
-            </a:extLst>
-          </p:cNvPr>
-          <p:cNvPicPr>
-            <a:picLocks noChangeAspect="1"/>
-          </p:cNvPicPr>
-          <p:nvPr/>
-        </p:nvPicPr>
-        <p:blipFill>
-          <a:blip r:embed="rId3">
-            <a:extLst>
-              <a:ext uri="{96DAC541-7B7A-43D3-8B79-37D633B846F1}">
-                <asvg:svgBlip xmlns:asvg="http://schemas.microsoft.com/office/drawing/2016/SVG/main" r:embed="rId4"/>
-              </a:ext>
-            </a:extLst>
-          </a:blip>
-          <a:stretch>
-            <a:fillRect/>
-          </a:stretch>
-        </p:blipFill>
-        <p:spPr>
-          <a:xfrm>
-            <a:off x="5045006" y="6356057"/>
-            <a:ext cx="6409575" cy="363174"/>
-          </a:xfrm>
-          <a:prstGeom prst="rect">
-            <a:avLst/>
-          </a:prstGeom>
-        </p:spPr>
-      </p:pic>
-      <p:sp>
-        <p:nvSpPr>
-          <p:cNvPr id="84" name="Marcador de número de diapositiva 83">
-            <a:extLst>
-              <a:ext uri="{FF2B5EF4-FFF2-40B4-BE49-F238E27FC236}">
-                <a16:creationId xmlns:a16="http://schemas.microsoft.com/office/drawing/2014/main" id="{ABED5594-721A-740B-E9D0-284907D21043}"/>
-              </a:ext>
-            </a:extLst>
-          </p:cNvPr>
-          <p:cNvSpPr>
-            <a:spLocks noGrp="1"/>
-          </p:cNvSpPr>
-          <p:nvPr>
-            <p:ph type="sldNum" sz="quarter" idx="7"/>
-          </p:nvPr>
-        </p:nvSpPr>
-        <p:spPr/>
-        <p:txBody>
-          <a:bodyPr/>
-          <a:lstStyle/>
-          <a:p>
-            <a:fld id="{B6F15528-21DE-4FAA-801E-634DDDAF4B2B}" type="slidenum">
-              <a:rPr lang="es-ES" smtClean="0"/>
-              <a:t>11</a:t>
-            </a:fld>
-            <a:endParaRPr lang="es-ES"/>
-          </a:p>
-        </p:txBody>
-      </p:sp>
-      <p:sp>
-        <p:nvSpPr>
-          <p:cNvPr id="3" name="Marcador de pie de página 2">
-            <a:extLst>
-              <a:ext uri="{FF2B5EF4-FFF2-40B4-BE49-F238E27FC236}">
-                <a16:creationId xmlns:a16="http://schemas.microsoft.com/office/drawing/2014/main" id="{E2C3C16A-8F1C-075F-485A-4A291213F56E}"/>
-              </a:ext>
-            </a:extLst>
-          </p:cNvPr>
-          <p:cNvSpPr>
-            <a:spLocks noGrp="1"/>
-          </p:cNvSpPr>
-          <p:nvPr>
-            <p:ph type="ftr" sz="quarter" idx="5"/>
-          </p:nvPr>
-        </p:nvSpPr>
-        <p:spPr/>
-        <p:txBody>
-          <a:bodyPr/>
-          <a:lstStyle/>
-          <a:p>
-            <a:pPr marL="12700">
-              <a:spcBef>
-                <a:spcPts val="15"/>
-              </a:spcBef>
-            </a:pPr>
-            <a:r>
-              <a:rPr lang="es-ES" spc="-5"/>
-              <a:t>LAB 1.0 WAVEGUIDES</a:t>
-            </a:r>
-            <a:endParaRPr lang="es-ES" spc="-5" dirty="0"/>
-          </a:p>
-        </p:txBody>
-      </p:sp>
-      <p:sp>
-        <p:nvSpPr>
-          <p:cNvPr id="2" name="CuadroTexto 1">
-            <a:extLst>
-              <a:ext uri="{FF2B5EF4-FFF2-40B4-BE49-F238E27FC236}">
-                <a16:creationId xmlns:a16="http://schemas.microsoft.com/office/drawing/2014/main" id="{4F885DF2-D695-6C6F-F4F1-913A39EAE30C}"/>
-              </a:ext>
-            </a:extLst>
-          </p:cNvPr>
-          <p:cNvSpPr txBox="1"/>
-          <p:nvPr/>
-        </p:nvSpPr>
-        <p:spPr>
-          <a:xfrm>
-            <a:off x="609441" y="4860334"/>
-            <a:ext cx="11199971" cy="646331"/>
-          </a:xfrm>
-          <a:prstGeom prst="rect">
-            <a:avLst/>
-          </a:prstGeom>
-          <a:solidFill>
-            <a:schemeClr val="bg1">
-              <a:lumMod val="95000"/>
-            </a:schemeClr>
-          </a:solidFill>
-          <a:ln w="28575">
-            <a:solidFill>
-              <a:srgbClr val="E0700D"/>
-            </a:solidFill>
-          </a:ln>
-        </p:spPr>
-        <p:txBody>
-          <a:bodyPr wrap="square" rtlCol="0">
-            <a:spAutoFit/>
-          </a:bodyPr>
-          <a:lstStyle/>
-          <a:p>
-            <a:pPr algn="just"/>
-            <a:endParaRPr lang="en-US" sz="1200" dirty="0">
-              <a:latin typeface="Arial" panose="020B0604020202020204" pitchFamily="34" charset="0"/>
-              <a:cs typeface="Arial" panose="020B0604020202020204" pitchFamily="34" charset="0"/>
-            </a:endParaRPr>
-          </a:p>
-          <a:p>
-            <a:pPr algn="just"/>
-            <a:endParaRPr lang="en-US" sz="1200" dirty="0">
-              <a:latin typeface="Arial" panose="020B0604020202020204" pitchFamily="34" charset="0"/>
-              <a:cs typeface="Arial" panose="020B0604020202020204" pitchFamily="34" charset="0"/>
-            </a:endParaRPr>
-          </a:p>
-          <a:p>
-            <a:pPr algn="just"/>
+            <a:r>
+              <a:rPr lang="es-ES" sz="1200" dirty="0">
+                <a:latin typeface="Arial" panose="020B0604020202020204" pitchFamily="34" charset="0"/>
+                <a:cs typeface="Arial" panose="020B0604020202020204" pitchFamily="34" charset="0"/>
+              </a:rPr>
+              <a:t>Teniendo esto en cuenta, se observa como la guía </a:t>
+            </a:r>
+            <a:r>
+              <a:rPr lang="es-ES" sz="1200" dirty="0" err="1">
+                <a:latin typeface="Arial" panose="020B0604020202020204" pitchFamily="34" charset="0"/>
+                <a:cs typeface="Arial" panose="020B0604020202020204" pitchFamily="34" charset="0"/>
+              </a:rPr>
+              <a:t>Shallow</a:t>
+            </a:r>
+            <a:r>
+              <a:rPr lang="es-ES" sz="1200" dirty="0">
+                <a:latin typeface="Arial" panose="020B0604020202020204" pitchFamily="34" charset="0"/>
+                <a:cs typeface="Arial" panose="020B0604020202020204" pitchFamily="34" charset="0"/>
+              </a:rPr>
+              <a:t> presenta un comportamiento multimodo, ya que permite la propagación de los modos guiados 0, 1, 2 y 3, que corresponden a los TE0, TE1, TE2 y TE3, respectivamente. Mientras que la guía Deep, soporta la propagación de los modos guiados 0, 1 y 2, que corresponden a los TE0, TM0 y TE1, lo que indica que se comporta como multimodo, quedando el modo 3 como no guiado porque se propaga por la cubierta.</a:t>
+            </a:r>
             <a:endParaRPr lang="en-US" sz="1200" dirty="0">
               <a:latin typeface="Arial" panose="020B0604020202020204" pitchFamily="34" charset="0"/>
               <a:cs typeface="Arial" panose="020B0604020202020204" pitchFamily="34" charset="0"/>
@@ -4542,7 +4026,7 @@
 </p:sld>
 </file>
 
-<file path=ppt/slides/slide12.xml><?xml version="1.0" encoding="utf-8"?>
+<file path=ppt/slides/slide11.xml><?xml version="1.0" encoding="utf-8"?>
 <p:sld xmlns:a="http://schemas.openxmlformats.org/drawingml/2006/main" xmlns:r="http://schemas.openxmlformats.org/officeDocument/2006/relationships" xmlns:p="http://schemas.openxmlformats.org/presentationml/2006/main">
   <p:cSld>
     <p:spTree>
@@ -4647,10 +4131,10 @@
           <p:nvPr/>
         </p:nvPicPr>
         <p:blipFill>
-          <a:blip r:embed="rId3">
+          <a:blip r:embed="rId4">
             <a:extLst>
               <a:ext uri="{96DAC541-7B7A-43D3-8B79-37D633B846F1}">
-                <asvg:svgBlip xmlns:asvg="http://schemas.microsoft.com/office/drawing/2016/SVG/main" r:embed="rId4"/>
+                <asvg:svgBlip xmlns:asvg="http://schemas.microsoft.com/office/drawing/2016/SVG/main" r:embed="rId5"/>
               </a:ext>
             </a:extLst>
           </a:blip>
@@ -4691,7 +4175,7 @@
           <a:p>
             <a:fld id="{B6F15528-21DE-4FAA-801E-634DDDAF4B2B}" type="slidenum">
               <a:rPr lang="es-ES" smtClean="0"/>
-              <a:t>12</a:t>
+              <a:t>11</a:t>
             </a:fld>
             <a:endParaRPr lang="es-ES"/>
           </a:p>
@@ -4746,7 +4230,7 @@
         <p:spPr>
           <a:xfrm>
             <a:off x="609441" y="4860334"/>
-            <a:ext cx="11199971" cy="1015663"/>
+            <a:ext cx="11199971" cy="830997"/>
           </a:xfrm>
           <a:prstGeom prst="rect">
             <a:avLst/>
@@ -4768,46 +4252,56 @@
           </a:bodyPr>
           <a:lstStyle/>
           <a:p>
-            <a:pPr algn="just"/>
-            <a:r>
-              <a:rPr lang="en-US" sz="1200" dirty="0">
-                <a:latin typeface="Arial" panose="020B0604020202020204" pitchFamily="34" charset="0"/>
-                <a:cs typeface="Arial" panose="020B0604020202020204" pitchFamily="34" charset="0"/>
-              </a:rPr>
-              <a:t>a</a:t>
-            </a:r>
-            <a:endParaRPr lang="en-US" sz="1200" u="sng" dirty="0">
+            <a:r>
+              <a:rPr lang="es-ES" sz="1200" dirty="0">
+                <a:latin typeface="Arial" panose="020B0604020202020204" pitchFamily="34" charset="0"/>
+                <a:cs typeface="Arial" panose="020B0604020202020204" pitchFamily="34" charset="0"/>
+              </a:rPr>
+              <a:t>Se observa un comportamiento similar al simulado en el apartado LO.3.</a:t>
+            </a:r>
+          </a:p>
+          <a:p>
+            <a:endParaRPr lang="es-ES" sz="1200" dirty="0">
               <a:latin typeface="Arial" panose="020B0604020202020204" pitchFamily="34" charset="0"/>
               <a:cs typeface="Arial" panose="020B0604020202020204" pitchFamily="34" charset="0"/>
             </a:endParaRPr>
           </a:p>
           <a:p>
-            <a:pPr algn="just"/>
-            <a:endParaRPr lang="en-US" sz="1200" dirty="0">
-              <a:latin typeface="Arial" panose="020B0604020202020204" pitchFamily="34" charset="0"/>
-              <a:cs typeface="Arial" panose="020B0604020202020204" pitchFamily="34" charset="0"/>
-            </a:endParaRPr>
-          </a:p>
-          <a:p>
-            <a:pPr algn="just"/>
-            <a:endParaRPr lang="en-US" sz="1200" dirty="0">
-              <a:latin typeface="Arial" panose="020B0604020202020204" pitchFamily="34" charset="0"/>
-              <a:cs typeface="Arial" panose="020B0604020202020204" pitchFamily="34" charset="0"/>
-            </a:endParaRPr>
-          </a:p>
-          <a:p>
-            <a:pPr algn="just"/>
-            <a:endParaRPr lang="en-US" sz="1200" dirty="0">
-              <a:latin typeface="Arial" panose="020B0604020202020204" pitchFamily="34" charset="0"/>
-              <a:cs typeface="Arial" panose="020B0604020202020204" pitchFamily="34" charset="0"/>
-            </a:endParaRPr>
-          </a:p>
-          <a:p>
-            <a:pPr algn="just"/>
-            <a:endParaRPr lang="en-US" sz="1200" dirty="0">
-              <a:latin typeface="Arial" panose="020B0604020202020204" pitchFamily="34" charset="0"/>
-              <a:cs typeface="Arial" panose="020B0604020202020204" pitchFamily="34" charset="0"/>
-            </a:endParaRPr>
+            <a:r>
+              <a:rPr lang="es-ES" sz="1200" dirty="0">
+                <a:latin typeface="Arial" panose="020B0604020202020204" pitchFamily="34" charset="0"/>
+                <a:cs typeface="Arial" panose="020B0604020202020204" pitchFamily="34" charset="0"/>
+              </a:rPr>
+              <a:t>En este caso, para anchuras inferiores a 0.45 </a:t>
+            </a:r>
+            <a:r>
+              <a:rPr lang="es-ES" sz="1200" dirty="0" err="1">
+                <a:latin typeface="Arial" panose="020B0604020202020204" pitchFamily="34" charset="0"/>
+                <a:cs typeface="Arial" panose="020B0604020202020204" pitchFamily="34" charset="0"/>
+              </a:rPr>
+              <a:t>um</a:t>
+            </a:r>
+            <a:r>
+              <a:rPr lang="es-ES" sz="1200" dirty="0">
+                <a:latin typeface="Arial" panose="020B0604020202020204" pitchFamily="34" charset="0"/>
+                <a:cs typeface="Arial" panose="020B0604020202020204" pitchFamily="34" charset="0"/>
+              </a:rPr>
+              <a:t> la guía es monomodo, propagándose únicamente los modos TE0 y TM0. A partir de este valor la guía pasa a ser multimodo, comenzando a propagarse el modo TE1, y para anchuras superiores a 0.6 </a:t>
+            </a:r>
+            <a:r>
+              <a:rPr lang="es-ES" sz="1200" dirty="0" err="1">
+                <a:latin typeface="Arial" panose="020B0604020202020204" pitchFamily="34" charset="0"/>
+                <a:cs typeface="Arial" panose="020B0604020202020204" pitchFamily="34" charset="0"/>
+              </a:rPr>
+              <a:t>um</a:t>
+            </a:r>
+            <a:r>
+              <a:rPr lang="es-ES" sz="1200" dirty="0">
+                <a:latin typeface="Arial" panose="020B0604020202020204" pitchFamily="34" charset="0"/>
+                <a:cs typeface="Arial" panose="020B0604020202020204" pitchFamily="34" charset="0"/>
+              </a:rPr>
+              <a:t> aparece también el modo TE2.</a:t>
+            </a:r>
           </a:p>
         </p:txBody>
       </p:sp>
@@ -4878,15 +4372,15 @@
           <p:nvPr/>
         </p:nvPicPr>
         <p:blipFill>
-          <a:blip r:embed="rId5"/>
+          <a:blip r:embed="rId6"/>
           <a:stretch>
             <a:fillRect/>
           </a:stretch>
         </p:blipFill>
         <p:spPr>
           <a:xfrm>
-            <a:off x="3372871" y="1271374"/>
-            <a:ext cx="5667428" cy="3299252"/>
+            <a:off x="3442163" y="1309891"/>
+            <a:ext cx="5535099" cy="3222218"/>
           </a:xfrm>
           <a:prstGeom prst="rect">
             <a:avLst/>
@@ -4903,10 +4397,15 @@
   <p:clrMapOvr>
     <a:masterClrMapping/>
   </p:clrMapOvr>
+  <p:extLst>
+    <p:ext uri="{6950BFC3-D8DA-4A85-94F7-54DA5524770B}">
+      <p188:commentRel xmlns:p188="http://schemas.microsoft.com/office/powerpoint/2018/8/main" r:id="rId3"/>
+    </p:ext>
+  </p:extLst>
 </p:sld>
 </file>
 
-<file path=ppt/slides/slide13.xml><?xml version="1.0" encoding="utf-8"?>
+<file path=ppt/slides/slide12.xml><?xml version="1.0" encoding="utf-8"?>
 <p:sld xmlns:a="http://schemas.openxmlformats.org/drawingml/2006/main" xmlns:r="http://schemas.openxmlformats.org/officeDocument/2006/relationships" xmlns:p="http://schemas.openxmlformats.org/presentationml/2006/main">
   <p:cSld>
     <p:spTree>
@@ -5049,7 +4548,7 @@
           <a:p>
             <a:fld id="{B6F15528-21DE-4FAA-801E-634DDDAF4B2B}" type="slidenum">
               <a:rPr lang="es-ES" smtClean="0"/>
-              <a:t>13</a:t>
+              <a:t>12</a:t>
             </a:fld>
             <a:endParaRPr lang="es-ES"/>
           </a:p>
@@ -5104,7 +4603,7 @@
         <p:spPr>
           <a:xfrm>
             <a:off x="609441" y="4860334"/>
-            <a:ext cx="11199971" cy="1200329"/>
+            <a:ext cx="11199971" cy="1015663"/>
           </a:xfrm>
           <a:prstGeom prst="rect">
             <a:avLst/>
@@ -5126,45 +4625,70 @@
           </a:bodyPr>
           <a:lstStyle/>
           <a:p>
-            <a:pPr algn="just"/>
-            <a:r>
-              <a:rPr lang="en-US" sz="1200" dirty="0">
-                <a:latin typeface="Arial" panose="020B0604020202020204" pitchFamily="34" charset="0"/>
-                <a:cs typeface="Arial" panose="020B0604020202020204" pitchFamily="34" charset="0"/>
-              </a:rPr>
-              <a:t>a</a:t>
-            </a:r>
-          </a:p>
-          <a:p>
-            <a:pPr algn="just"/>
-            <a:endParaRPr lang="en-US" sz="1200" u="sng" dirty="0">
+            <a:r>
+              <a:rPr lang="es-ES" sz="1200" dirty="0">
+                <a:latin typeface="Arial" panose="020B0604020202020204" pitchFamily="34" charset="0"/>
+                <a:cs typeface="Arial" panose="020B0604020202020204" pitchFamily="34" charset="0"/>
+              </a:rPr>
+              <a:t>En este caso, al realizar un barrido del radio de curvatura (R) entre 5 </a:t>
+            </a:r>
+            <a:r>
+              <a:rPr lang="es-ES" sz="1200" dirty="0" err="1">
+                <a:latin typeface="Arial" panose="020B0604020202020204" pitchFamily="34" charset="0"/>
+                <a:cs typeface="Arial" panose="020B0604020202020204" pitchFamily="34" charset="0"/>
+              </a:rPr>
+              <a:t>um</a:t>
+            </a:r>
+            <a:r>
+              <a:rPr lang="es-ES" sz="1200" dirty="0">
+                <a:latin typeface="Arial" panose="020B0604020202020204" pitchFamily="34" charset="0"/>
+                <a:cs typeface="Arial" panose="020B0604020202020204" pitchFamily="34" charset="0"/>
+              </a:rPr>
+              <a:t> y 30 </a:t>
+            </a:r>
+            <a:r>
+              <a:rPr lang="es-ES" sz="1200" dirty="0" err="1">
+                <a:latin typeface="Arial" panose="020B0604020202020204" pitchFamily="34" charset="0"/>
+                <a:cs typeface="Arial" panose="020B0604020202020204" pitchFamily="34" charset="0"/>
+              </a:rPr>
+              <a:t>um</a:t>
+            </a:r>
+            <a:r>
+              <a:rPr lang="es-ES" sz="1200" dirty="0">
+                <a:latin typeface="Arial" panose="020B0604020202020204" pitchFamily="34" charset="0"/>
+                <a:cs typeface="Arial" panose="020B0604020202020204" pitchFamily="34" charset="0"/>
+              </a:rPr>
+              <a:t>, no se observan pérdidas totales superiores a 0.1 dB/90°, por lo que se puede considerar un radio seguro a partir de 5 </a:t>
+            </a:r>
+            <a:r>
+              <a:rPr lang="es-ES" sz="1200" dirty="0" err="1">
+                <a:latin typeface="Arial" panose="020B0604020202020204" pitchFamily="34" charset="0"/>
+                <a:cs typeface="Arial" panose="020B0604020202020204" pitchFamily="34" charset="0"/>
+              </a:rPr>
+              <a:t>um</a:t>
+            </a:r>
+            <a:r>
+              <a:rPr lang="es-ES" sz="1200" dirty="0">
+                <a:latin typeface="Arial" panose="020B0604020202020204" pitchFamily="34" charset="0"/>
+                <a:cs typeface="Arial" panose="020B0604020202020204" pitchFamily="34" charset="0"/>
+              </a:rPr>
+              <a:t>.</a:t>
+            </a:r>
+          </a:p>
+          <a:p>
+            <a:endParaRPr lang="es-ES" sz="1200" dirty="0">
               <a:latin typeface="Arial" panose="020B0604020202020204" pitchFamily="34" charset="0"/>
               <a:cs typeface="Arial" panose="020B0604020202020204" pitchFamily="34" charset="0"/>
             </a:endParaRPr>
           </a:p>
           <a:p>
-            <a:pPr algn="just"/>
-            <a:endParaRPr lang="en-US" sz="1200" dirty="0">
-              <a:latin typeface="Arial" panose="020B0604020202020204" pitchFamily="34" charset="0"/>
-              <a:cs typeface="Arial" panose="020B0604020202020204" pitchFamily="34" charset="0"/>
-            </a:endParaRPr>
-          </a:p>
-          <a:p>
-            <a:pPr algn="just"/>
-            <a:endParaRPr lang="en-US" sz="1200" dirty="0">
-              <a:latin typeface="Arial" panose="020B0604020202020204" pitchFamily="34" charset="0"/>
-              <a:cs typeface="Arial" panose="020B0604020202020204" pitchFamily="34" charset="0"/>
-            </a:endParaRPr>
-          </a:p>
-          <a:p>
-            <a:pPr algn="just"/>
-            <a:endParaRPr lang="en-US" sz="1200" dirty="0">
-              <a:latin typeface="Arial" panose="020B0604020202020204" pitchFamily="34" charset="0"/>
-              <a:cs typeface="Arial" panose="020B0604020202020204" pitchFamily="34" charset="0"/>
-            </a:endParaRPr>
-          </a:p>
-          <a:p>
-            <a:pPr algn="just"/>
+            <a:r>
+              <a:rPr lang="es-ES" sz="1200" dirty="0">
+                <a:latin typeface="Arial" panose="020B0604020202020204" pitchFamily="34" charset="0"/>
+                <a:cs typeface="Arial" panose="020B0604020202020204" pitchFamily="34" charset="0"/>
+              </a:rPr>
+              <a:t>En cuanto al índice efectivo, este tiende a 2.511 a medida que aumenta R, valor correspondiente al de la guía recta, ya que la guía a medida que se aumenta R se aproxima progresivamente a esta.</a:t>
+            </a:r>
             <a:endParaRPr lang="en-US" sz="1200" dirty="0">
               <a:latin typeface="Arial" panose="020B0604020202020204" pitchFamily="34" charset="0"/>
               <a:cs typeface="Arial" panose="020B0604020202020204" pitchFamily="34" charset="0"/>
@@ -5349,7 +4873,7 @@
 </p:sld>
 </file>
 
-<file path=ppt/slides/slide14.xml><?xml version="1.0" encoding="utf-8"?>
+<file path=ppt/slides/slide13.xml><?xml version="1.0" encoding="utf-8"?>
 <p:sld xmlns:a="http://schemas.openxmlformats.org/drawingml/2006/main" xmlns:r="http://schemas.openxmlformats.org/officeDocument/2006/relationships" xmlns:p="http://schemas.openxmlformats.org/presentationml/2006/main">
   <p:cSld>
     <p:spTree>
@@ -5512,7 +5036,7 @@
           <a:p>
             <a:fld id="{B6F15528-21DE-4FAA-801E-634DDDAF4B2B}" type="slidenum">
               <a:rPr lang="es-ES" smtClean="0"/>
-              <a:t>14</a:t>
+              <a:t>13</a:t>
             </a:fld>
             <a:endParaRPr lang="es-ES"/>
           </a:p>
@@ -5566,8 +5090,8 @@
         </p:nvSpPr>
         <p:spPr>
           <a:xfrm>
-            <a:off x="609441" y="4860334"/>
-            <a:ext cx="11199971" cy="1015663"/>
+            <a:off x="583019" y="3763089"/>
+            <a:ext cx="11199971" cy="1938992"/>
           </a:xfrm>
           <a:prstGeom prst="rect">
             <a:avLst/>
@@ -5591,95 +5115,648 @@
           <a:p>
             <a:pPr algn="just"/>
             <a:r>
-              <a:rPr lang="en-US" sz="1200" u="sng" dirty="0">
-                <a:latin typeface="Arial" panose="020B0604020202020204" pitchFamily="34" charset="0"/>
-                <a:cs typeface="Arial" panose="020B0604020202020204" pitchFamily="34" charset="0"/>
-              </a:rPr>
-              <a:t>aa</a:t>
+              <a:rPr lang="es-ES" sz="1200" dirty="0">
+                <a:latin typeface="Arial" panose="020B0604020202020204" pitchFamily="34" charset="0"/>
+                <a:cs typeface="Arial" panose="020B0604020202020204" pitchFamily="34" charset="0"/>
+              </a:rPr>
+              <a:t>Se ha observado que para el silicio (Si) el índice efectivo es mayor que para el nitruro de silicio (</a:t>
+            </a:r>
+            <a:r>
+              <a:rPr lang="es-ES" sz="1200" dirty="0" err="1">
+                <a:latin typeface="Arial" panose="020B0604020202020204" pitchFamily="34" charset="0"/>
+                <a:cs typeface="Arial" panose="020B0604020202020204" pitchFamily="34" charset="0"/>
+              </a:rPr>
+              <a:t>SiNx</a:t>
+            </a:r>
+            <a:r>
+              <a:rPr lang="es-ES" sz="1200" dirty="0">
+                <a:latin typeface="Arial" panose="020B0604020202020204" pitchFamily="34" charset="0"/>
+                <a:cs typeface="Arial" panose="020B0604020202020204" pitchFamily="34" charset="0"/>
+              </a:rPr>
+              <a:t>), debido a que el índice de refracción del material también es más alto. Esto provoca un mayor confinamiento del modo en el núcleo de la guía, lo que favorece que aparezcan más modos guiados. Como se ha visto en los apartados correspondientes, esto hace que las guías en Si tiendan a comportarse como multimodo con mayor facilidad, tanto al aumentar la anchura como la longitud de onda, en comparación con las guías de </a:t>
+            </a:r>
+            <a:r>
+              <a:rPr lang="es-ES" sz="1200" dirty="0" err="1">
+                <a:latin typeface="Arial" panose="020B0604020202020204" pitchFamily="34" charset="0"/>
+                <a:cs typeface="Arial" panose="020B0604020202020204" pitchFamily="34" charset="0"/>
+              </a:rPr>
+              <a:t>SiNx</a:t>
+            </a:r>
+            <a:r>
+              <a:rPr lang="es-ES" sz="1200" dirty="0">
+                <a:latin typeface="Arial" panose="020B0604020202020204" pitchFamily="34" charset="0"/>
+                <a:cs typeface="Arial" panose="020B0604020202020204" pitchFamily="34" charset="0"/>
+              </a:rPr>
+              <a:t>.</a:t>
             </a:r>
           </a:p>
           <a:p>
             <a:pPr algn="just"/>
+            <a:endParaRPr lang="es-ES" sz="1200" dirty="0">
+              <a:latin typeface="Arial" panose="020B0604020202020204" pitchFamily="34" charset="0"/>
+              <a:cs typeface="Arial" panose="020B0604020202020204" pitchFamily="34" charset="0"/>
+            </a:endParaRPr>
+          </a:p>
+          <a:p>
+            <a:pPr algn="just"/>
+            <a:r>
+              <a:rPr lang="es-ES" sz="1200" dirty="0">
+                <a:latin typeface="Arial" panose="020B0604020202020204" pitchFamily="34" charset="0"/>
+                <a:cs typeface="Arial" panose="020B0604020202020204" pitchFamily="34" charset="0"/>
+              </a:rPr>
+              <a:t>Por otro lado, en el análisis del radio de curvatura se observa que las guías de Si presentan menores pérdidas por curvatura que las de </a:t>
+            </a:r>
+            <a:r>
+              <a:rPr lang="es-ES" sz="1200" dirty="0" err="1">
+                <a:latin typeface="Arial" panose="020B0604020202020204" pitchFamily="34" charset="0"/>
+                <a:cs typeface="Arial" panose="020B0604020202020204" pitchFamily="34" charset="0"/>
+              </a:rPr>
+              <a:t>SiNx</a:t>
+            </a:r>
+            <a:r>
+              <a:rPr lang="es-ES" sz="1200" dirty="0">
+                <a:latin typeface="Arial" panose="020B0604020202020204" pitchFamily="34" charset="0"/>
+                <a:cs typeface="Arial" panose="020B0604020202020204" pitchFamily="34" charset="0"/>
+              </a:rPr>
+              <a:t>. En concreto, el radio mínimo seguro es aproximadamente 5 µm para Si y 35 </a:t>
+            </a:r>
+            <a:r>
+              <a:rPr lang="es-ES" sz="1200" dirty="0" err="1">
+                <a:latin typeface="Arial" panose="020B0604020202020204" pitchFamily="34" charset="0"/>
+                <a:cs typeface="Arial" panose="020B0604020202020204" pitchFamily="34" charset="0"/>
+              </a:rPr>
+              <a:t>um</a:t>
+            </a:r>
+            <a:r>
+              <a:rPr lang="es-ES" sz="1200" dirty="0">
+                <a:latin typeface="Arial" panose="020B0604020202020204" pitchFamily="34" charset="0"/>
+                <a:cs typeface="Arial" panose="020B0604020202020204" pitchFamily="34" charset="0"/>
+              </a:rPr>
+              <a:t> para </a:t>
+            </a:r>
+            <a:r>
+              <a:rPr lang="es-ES" sz="1200" dirty="0" err="1">
+                <a:latin typeface="Arial" panose="020B0604020202020204" pitchFamily="34" charset="0"/>
+                <a:cs typeface="Arial" panose="020B0604020202020204" pitchFamily="34" charset="0"/>
+              </a:rPr>
+              <a:t>SiNx</a:t>
+            </a:r>
+            <a:r>
+              <a:rPr lang="es-ES" sz="1200" dirty="0">
+                <a:latin typeface="Arial" panose="020B0604020202020204" pitchFamily="34" charset="0"/>
+                <a:cs typeface="Arial" panose="020B0604020202020204" pitchFamily="34" charset="0"/>
+              </a:rPr>
+              <a:t> para mantener pérdidas inferiores a 0.1 dB/90°.</a:t>
+            </a:r>
+          </a:p>
+          <a:p>
+            <a:pPr algn="just"/>
+            <a:endParaRPr lang="es-ES" sz="1200" dirty="0">
+              <a:latin typeface="Arial" panose="020B0604020202020204" pitchFamily="34" charset="0"/>
+              <a:cs typeface="Arial" panose="020B0604020202020204" pitchFamily="34" charset="0"/>
+            </a:endParaRPr>
+          </a:p>
+          <a:p>
+            <a:r>
+              <a:rPr lang="es-ES" sz="1200" dirty="0">
+                <a:latin typeface="Arial" panose="020B0604020202020204" pitchFamily="34" charset="0"/>
+                <a:cs typeface="Arial" panose="020B0604020202020204" pitchFamily="34" charset="0"/>
+              </a:rPr>
+              <a:t>Finalmente, se puede concluir que la tecnología Si permite circuitos más compactos y con mayor confinamiento modal, mientras que </a:t>
+            </a:r>
+            <a:r>
+              <a:rPr lang="es-ES" sz="1200" dirty="0" err="1">
+                <a:latin typeface="Arial" panose="020B0604020202020204" pitchFamily="34" charset="0"/>
+                <a:cs typeface="Arial" panose="020B0604020202020204" pitchFamily="34" charset="0"/>
+              </a:rPr>
+              <a:t>SiNx</a:t>
+            </a:r>
+            <a:r>
+              <a:rPr lang="es-ES" sz="1200" dirty="0">
+                <a:latin typeface="Arial" panose="020B0604020202020204" pitchFamily="34" charset="0"/>
+                <a:cs typeface="Arial" panose="020B0604020202020204" pitchFamily="34" charset="0"/>
+              </a:rPr>
+              <a:t> presenta un confinamiento menor, pero permite el diseño de guías monomodo más anchas.</a:t>
+            </a:r>
             <a:endParaRPr lang="en-US" sz="1200" dirty="0">
               <a:latin typeface="Arial" panose="020B0604020202020204" pitchFamily="34" charset="0"/>
               <a:cs typeface="Arial" panose="020B0604020202020204" pitchFamily="34" charset="0"/>
             </a:endParaRPr>
           </a:p>
-          <a:p>
-            <a:pPr algn="just"/>
-            <a:endParaRPr lang="en-US" sz="1200" dirty="0">
-              <a:latin typeface="Arial" panose="020B0604020202020204" pitchFamily="34" charset="0"/>
-              <a:cs typeface="Arial" panose="020B0604020202020204" pitchFamily="34" charset="0"/>
-            </a:endParaRPr>
-          </a:p>
-          <a:p>
-            <a:pPr algn="just"/>
-            <a:endParaRPr lang="en-US" sz="1200" dirty="0">
-              <a:latin typeface="Arial" panose="020B0604020202020204" pitchFamily="34" charset="0"/>
-              <a:cs typeface="Arial" panose="020B0604020202020204" pitchFamily="34" charset="0"/>
-            </a:endParaRPr>
-          </a:p>
-          <a:p>
-            <a:pPr algn="just"/>
-            <a:endParaRPr lang="en-US" sz="1200" dirty="0">
-              <a:latin typeface="Arial" panose="020B0604020202020204" pitchFamily="34" charset="0"/>
-              <a:cs typeface="Arial" panose="020B0604020202020204" pitchFamily="34" charset="0"/>
-            </a:endParaRPr>
-          </a:p>
-        </p:txBody>
-      </p:sp>
-      <p:sp>
-        <p:nvSpPr>
-          <p:cNvPr id="7" name="Rectángulo 6">
-            <a:extLst>
-              <a:ext uri="{FF2B5EF4-FFF2-40B4-BE49-F238E27FC236}">
-                <a16:creationId xmlns:a16="http://schemas.microsoft.com/office/drawing/2014/main" id="{2E31592D-03C8-77E9-9305-A5B7EBAC2856}"/>
-              </a:ext>
-            </a:extLst>
-          </p:cNvPr>
-          <p:cNvSpPr/>
-          <p:nvPr/>
-        </p:nvSpPr>
-        <p:spPr>
-          <a:xfrm>
-            <a:off x="609441" y="1418373"/>
-            <a:ext cx="11199971" cy="3306028"/>
-          </a:xfrm>
-          <a:prstGeom prst="rect">
-            <a:avLst/>
-          </a:prstGeom>
-          <a:noFill/>
-          <a:ln w="28575">
-            <a:solidFill>
-              <a:srgbClr val="E0700D"/>
-            </a:solidFill>
-          </a:ln>
-        </p:spPr>
-        <p:style>
-          <a:lnRef idx="2">
-            <a:schemeClr val="accent1">
-              <a:shade val="15000"/>
-            </a:schemeClr>
-          </a:lnRef>
-          <a:fillRef idx="1">
-            <a:schemeClr val="accent1"/>
-          </a:fillRef>
-          <a:effectRef idx="0">
-            <a:schemeClr val="accent1"/>
-          </a:effectRef>
-          <a:fontRef idx="minor">
-            <a:schemeClr val="lt1"/>
-          </a:fontRef>
-        </p:style>
-        <p:txBody>
-          <a:bodyPr rtlCol="0" anchor="ctr"/>
-          <a:lstStyle/>
-          <a:p>
-            <a:pPr algn="ctr"/>
-            <a:endParaRPr lang="en-US"/>
-          </a:p>
-        </p:txBody>
-      </p:sp>
+        </p:txBody>
+      </p:sp>
+      <p:graphicFrame>
+        <p:nvGraphicFramePr>
+          <p:cNvPr id="4" name="Tabla 3">
+            <a:extLst>
+              <a:ext uri="{FF2B5EF4-FFF2-40B4-BE49-F238E27FC236}">
+                <a16:creationId xmlns:a16="http://schemas.microsoft.com/office/drawing/2014/main" id="{2E1D3247-5AC5-EAF7-01C0-DF30A28971F0}"/>
+              </a:ext>
+            </a:extLst>
+          </p:cNvPr>
+          <p:cNvGraphicFramePr>
+            <a:graphicFrameLocks noGrp="1"/>
+          </p:cNvGraphicFramePr>
+          <p:nvPr>
+            <p:extLst>
+              <p:ext uri="{D42A27DB-BD31-4B8C-83A1-F6EECF244321}">
+                <p14:modId xmlns:p14="http://schemas.microsoft.com/office/powerpoint/2010/main" val="492976935"/>
+              </p:ext>
+            </p:extLst>
+          </p:nvPr>
+        </p:nvGraphicFramePr>
+        <p:xfrm>
+          <a:off x="1066801" y="1398032"/>
+          <a:ext cx="9790905" cy="2164080"/>
+        </p:xfrm>
+        <a:graphic>
+          <a:graphicData uri="http://schemas.openxmlformats.org/drawingml/2006/table">
+            <a:tbl>
+              <a:tblPr>
+                <a:tableStyleId>{5940675A-B579-460E-94D1-54222C63F5DA}</a:tableStyleId>
+              </a:tblPr>
+              <a:tblGrid>
+                <a:gridCol w="3263635">
+                  <a:extLst>
+                    <a:ext uri="{9D8B030D-6E8A-4147-A177-3AD203B41FA5}">
+                      <a16:colId xmlns:a16="http://schemas.microsoft.com/office/drawing/2014/main" val="677883450"/>
+                    </a:ext>
+                  </a:extLst>
+                </a:gridCol>
+                <a:gridCol w="3263635">
+                  <a:extLst>
+                    <a:ext uri="{9D8B030D-6E8A-4147-A177-3AD203B41FA5}">
+                      <a16:colId xmlns:a16="http://schemas.microsoft.com/office/drawing/2014/main" val="1732767699"/>
+                    </a:ext>
+                  </a:extLst>
+                </a:gridCol>
+                <a:gridCol w="3263635">
+                  <a:extLst>
+                    <a:ext uri="{9D8B030D-6E8A-4147-A177-3AD203B41FA5}">
+                      <a16:colId xmlns:a16="http://schemas.microsoft.com/office/drawing/2014/main" val="1168453895"/>
+                    </a:ext>
+                  </a:extLst>
+                </a:gridCol>
+              </a:tblGrid>
+              <a:tr h="290276">
+                <a:tc>
+                  <a:txBody>
+                    <a:bodyPr/>
+                    <a:lstStyle/>
+                    <a:p>
+                      <a:pPr algn="ctr">
+                        <a:buNone/>
+                      </a:pPr>
+                      <a:r>
+                        <a:rPr lang="es-ES" sz="1600" b="1" dirty="0"/>
+                        <a:t>Característica</a:t>
+                      </a:r>
+                    </a:p>
+                  </a:txBody>
+                  <a:tcPr anchor="ctr">
+                    <a:solidFill>
+                      <a:schemeClr val="accent6"/>
+                    </a:solidFill>
+                  </a:tcPr>
+                </a:tc>
+                <a:tc>
+                  <a:txBody>
+                    <a:bodyPr/>
+                    <a:lstStyle/>
+                    <a:p>
+                      <a:pPr algn="ctr">
+                        <a:buNone/>
+                      </a:pPr>
+                      <a:r>
+                        <a:rPr lang="es-ES" sz="1600" b="1" dirty="0" err="1"/>
+                        <a:t>SiNx</a:t>
+                      </a:r>
+                      <a:endParaRPr lang="es-ES" sz="1600" b="1" dirty="0"/>
+                    </a:p>
+                  </a:txBody>
+                  <a:tcPr anchor="ctr">
+                    <a:solidFill>
+                      <a:schemeClr val="accent6"/>
+                    </a:solidFill>
+                  </a:tcPr>
+                </a:tc>
+                <a:tc>
+                  <a:txBody>
+                    <a:bodyPr/>
+                    <a:lstStyle/>
+                    <a:p>
+                      <a:pPr algn="ctr">
+                        <a:buNone/>
+                      </a:pPr>
+                      <a:r>
+                        <a:rPr lang="es-ES" sz="1600" b="1" dirty="0"/>
+                        <a:t>Si</a:t>
+                      </a:r>
+                    </a:p>
+                  </a:txBody>
+                  <a:tcPr anchor="ctr">
+                    <a:solidFill>
+                      <a:schemeClr val="accent6"/>
+                    </a:solidFill>
+                  </a:tcPr>
+                </a:tc>
+                <a:extLst>
+                  <a:ext uri="{0D108BD9-81ED-4DB2-BD59-A6C34878D82A}">
+                    <a16:rowId xmlns:a16="http://schemas.microsoft.com/office/drawing/2014/main" val="2849035508"/>
+                  </a:ext>
+                </a:extLst>
+              </a:tr>
+              <a:tr h="280245">
+                <a:tc>
+                  <a:txBody>
+                    <a:bodyPr/>
+                    <a:lstStyle/>
+                    <a:p>
+                      <a:pPr>
+                        <a:buNone/>
+                      </a:pPr>
+                      <a:r>
+                        <a:rPr lang="es-ES" sz="1400" b="1" dirty="0"/>
+                        <a:t>Comportamiento </a:t>
+                      </a:r>
+                      <a:r>
+                        <a:rPr lang="es-ES" sz="1400" b="1" dirty="0" err="1"/>
+                        <a:t>Shallow</a:t>
+                      </a:r>
+                      <a:endParaRPr lang="es-ES" sz="1400" dirty="0"/>
+                    </a:p>
+                  </a:txBody>
+                  <a:tcPr anchor="ctr"/>
+                </a:tc>
+                <a:tc>
+                  <a:txBody>
+                    <a:bodyPr/>
+                    <a:lstStyle/>
+                    <a:p>
+                      <a:pPr>
+                        <a:buNone/>
+                      </a:pPr>
+                      <a:r>
+                        <a:rPr lang="es-ES" sz="1400" dirty="0"/>
+                        <a:t>Multimodo (TE0, TE1, TM0, TE2)</a:t>
+                      </a:r>
+                    </a:p>
+                  </a:txBody>
+                  <a:tcPr anchor="ctr"/>
+                </a:tc>
+                <a:tc>
+                  <a:txBody>
+                    <a:bodyPr/>
+                    <a:lstStyle/>
+                    <a:p>
+                      <a:pPr>
+                        <a:buNone/>
+                      </a:pPr>
+                      <a:r>
+                        <a:rPr lang="nl-NL" sz="1400" dirty="0"/>
+                        <a:t>Multimodo (TE0, TE1, TE2, TE3)</a:t>
+                      </a:r>
+                    </a:p>
+                  </a:txBody>
+                  <a:tcPr anchor="ctr"/>
+                </a:tc>
+                <a:extLst>
+                  <a:ext uri="{0D108BD9-81ED-4DB2-BD59-A6C34878D82A}">
+                    <a16:rowId xmlns:a16="http://schemas.microsoft.com/office/drawing/2014/main" val="711482399"/>
+                  </a:ext>
+                </a:extLst>
+              </a:tr>
+              <a:tr h="280245">
+                <a:tc>
+                  <a:txBody>
+                    <a:bodyPr/>
+                    <a:lstStyle/>
+                    <a:p>
+                      <a:pPr>
+                        <a:buNone/>
+                      </a:pPr>
+                      <a:r>
+                        <a:rPr lang="es-ES" sz="1400" b="1" dirty="0"/>
+                        <a:t>Comportamiento Deep</a:t>
+                      </a:r>
+                      <a:endParaRPr lang="es-ES" sz="1400" dirty="0"/>
+                    </a:p>
+                  </a:txBody>
+                  <a:tcPr anchor="ctr"/>
+                </a:tc>
+                <a:tc>
+                  <a:txBody>
+                    <a:bodyPr/>
+                    <a:lstStyle/>
+                    <a:p>
+                      <a:pPr>
+                        <a:buNone/>
+                      </a:pPr>
+                      <a:r>
+                        <a:rPr lang="es-ES" sz="1400" dirty="0"/>
+                        <a:t>Monomodo (TE0, TM0)</a:t>
+                      </a:r>
+                    </a:p>
+                  </a:txBody>
+                  <a:tcPr anchor="ctr"/>
+                </a:tc>
+                <a:tc>
+                  <a:txBody>
+                    <a:bodyPr/>
+                    <a:lstStyle/>
+                    <a:p>
+                      <a:pPr>
+                        <a:buNone/>
+                      </a:pPr>
+                      <a:r>
+                        <a:rPr lang="es-ES" sz="1400" dirty="0"/>
+                        <a:t>Multimodo (TE0, TM0, TE1)</a:t>
+                      </a:r>
+                    </a:p>
+                  </a:txBody>
+                  <a:tcPr anchor="ctr"/>
+                </a:tc>
+                <a:extLst>
+                  <a:ext uri="{0D108BD9-81ED-4DB2-BD59-A6C34878D82A}">
+                    <a16:rowId xmlns:a16="http://schemas.microsoft.com/office/drawing/2014/main" val="2796370370"/>
+                  </a:ext>
+                </a:extLst>
+              </a:tr>
+              <a:tr h="280245">
+                <a:tc>
+                  <a:txBody>
+                    <a:bodyPr/>
+                    <a:lstStyle/>
+                    <a:p>
+                      <a:pPr>
+                        <a:buNone/>
+                      </a:pPr>
+                      <a:r>
+                        <a:rPr lang="es-ES" sz="1400" b="1" dirty="0"/>
+                        <a:t>Anchura límite monomodo (</a:t>
+                      </a:r>
+                      <a:r>
+                        <a:rPr lang="el-GR" sz="1400" b="1" dirty="0"/>
+                        <a:t>λ</a:t>
+                      </a:r>
+                      <a:r>
+                        <a:rPr lang="es-ES" sz="1400" b="1" dirty="0"/>
+                        <a:t> = 1550 nm)</a:t>
+                      </a:r>
+                      <a:endParaRPr lang="es-ES" sz="1400" dirty="0"/>
+                    </a:p>
+                  </a:txBody>
+                  <a:tcPr anchor="ctr"/>
+                </a:tc>
+                <a:tc>
+                  <a:txBody>
+                    <a:bodyPr/>
+                    <a:lstStyle/>
+                    <a:p>
+                      <a:pPr>
+                        <a:buNone/>
+                      </a:pPr>
+                      <a:r>
+                        <a:rPr lang="es-ES" sz="1400" dirty="0"/>
+                        <a:t>≈ 1.27 </a:t>
+                      </a:r>
+                      <a:r>
+                        <a:rPr lang="es-ES" sz="1400" dirty="0" err="1"/>
+                        <a:t>um</a:t>
+                      </a:r>
+                      <a:endParaRPr lang="es-ES" sz="1400" dirty="0"/>
+                    </a:p>
+                  </a:txBody>
+                  <a:tcPr anchor="ctr"/>
+                </a:tc>
+                <a:tc>
+                  <a:txBody>
+                    <a:bodyPr/>
+                    <a:lstStyle/>
+                    <a:p>
+                      <a:pPr>
+                        <a:buNone/>
+                      </a:pPr>
+                      <a:r>
+                        <a:rPr lang="es-ES" sz="1400" dirty="0"/>
+                        <a:t>≈ 0.45 </a:t>
+                      </a:r>
+                      <a:r>
+                        <a:rPr lang="es-ES" sz="1400" dirty="0" err="1"/>
+                        <a:t>um</a:t>
+                      </a:r>
+                      <a:r>
+                        <a:rPr lang="es-ES" sz="1400" dirty="0"/>
+                        <a:t> </a:t>
+                      </a:r>
+                    </a:p>
+                  </a:txBody>
+                  <a:tcPr anchor="ctr"/>
+                </a:tc>
+                <a:extLst>
+                  <a:ext uri="{0D108BD9-81ED-4DB2-BD59-A6C34878D82A}">
+                    <a16:rowId xmlns:a16="http://schemas.microsoft.com/office/drawing/2014/main" val="3035251470"/>
+                  </a:ext>
+                </a:extLst>
+              </a:tr>
+              <a:tr h="280245">
+                <a:tc>
+                  <a:txBody>
+                    <a:bodyPr/>
+                    <a:lstStyle/>
+                    <a:p>
+                      <a:pPr>
+                        <a:buNone/>
+                      </a:pPr>
+                      <a:r>
+                        <a:rPr lang="es-ES" sz="1400" b="1" dirty="0"/>
+                        <a:t>Radio mínimo seguro (</a:t>
+                      </a:r>
+                      <a:r>
+                        <a:rPr lang="el-GR" sz="1400" b="1" dirty="0"/>
+                        <a:t>λ</a:t>
+                      </a:r>
+                      <a:r>
+                        <a:rPr lang="es-ES" sz="1400" b="1" dirty="0"/>
+                        <a:t> = 1550 nm)</a:t>
+                      </a:r>
+                      <a:endParaRPr lang="es-ES" sz="1400" dirty="0"/>
+                    </a:p>
+                  </a:txBody>
+                  <a:tcPr anchor="ctr"/>
+                </a:tc>
+                <a:tc>
+                  <a:txBody>
+                    <a:bodyPr/>
+                    <a:lstStyle/>
+                    <a:p>
+                      <a:pPr>
+                        <a:buNone/>
+                      </a:pPr>
+                      <a:r>
+                        <a:rPr lang="es-ES" sz="1400" dirty="0"/>
+                        <a:t>≈ 35 </a:t>
+                      </a:r>
+                      <a:r>
+                        <a:rPr lang="es-ES" sz="1400" dirty="0" err="1"/>
+                        <a:t>um</a:t>
+                      </a:r>
+                      <a:endParaRPr lang="es-ES" sz="1400" dirty="0"/>
+                    </a:p>
+                  </a:txBody>
+                  <a:tcPr anchor="ctr"/>
+                </a:tc>
+                <a:tc>
+                  <a:txBody>
+                    <a:bodyPr/>
+                    <a:lstStyle/>
+                    <a:p>
+                      <a:pPr>
+                        <a:buNone/>
+                      </a:pPr>
+                      <a:r>
+                        <a:rPr lang="es-ES" sz="1400" dirty="0"/>
+                        <a:t>≈ 5 </a:t>
+                      </a:r>
+                      <a:r>
+                        <a:rPr lang="es-ES" sz="1400" dirty="0" err="1"/>
+                        <a:t>um</a:t>
+                      </a:r>
+                      <a:endParaRPr lang="es-ES" sz="1400" dirty="0"/>
+                    </a:p>
+                  </a:txBody>
+                  <a:tcPr anchor="ctr"/>
+                </a:tc>
+                <a:extLst>
+                  <a:ext uri="{0D108BD9-81ED-4DB2-BD59-A6C34878D82A}">
+                    <a16:rowId xmlns:a16="http://schemas.microsoft.com/office/drawing/2014/main" val="1792469843"/>
+                  </a:ext>
+                </a:extLst>
+              </a:tr>
+              <a:tr h="280245">
+                <a:tc>
+                  <a:txBody>
+                    <a:bodyPr/>
+                    <a:lstStyle/>
+                    <a:p>
+                      <a:pPr>
+                        <a:buNone/>
+                      </a:pPr>
+                      <a:r>
+                        <a:rPr lang="es-ES" sz="1400" b="1" dirty="0"/>
+                        <a:t>Índice efectivo (guía recta, </a:t>
+                      </a:r>
+                      <a:r>
+                        <a:rPr lang="el-GR" sz="1400" b="1" dirty="0"/>
+                        <a:t>λ</a:t>
+                      </a:r>
+                      <a:r>
+                        <a:rPr lang="es-ES" sz="1400" b="1" dirty="0"/>
+                        <a:t> = 1550 nm)</a:t>
+                      </a:r>
+                      <a:endParaRPr lang="es-ES" sz="1400" dirty="0"/>
+                    </a:p>
+                  </a:txBody>
+                  <a:tcPr anchor="ctr"/>
+                </a:tc>
+                <a:tc>
+                  <a:txBody>
+                    <a:bodyPr/>
+                    <a:lstStyle/>
+                    <a:p>
+                      <a:pPr>
+                        <a:buNone/>
+                      </a:pPr>
+                      <a:r>
+                        <a:rPr lang="es-ES" sz="1400"/>
+                        <a:t>≈ 1.605</a:t>
+                      </a:r>
+                    </a:p>
+                  </a:txBody>
+                  <a:tcPr anchor="ctr"/>
+                </a:tc>
+                <a:tc>
+                  <a:txBody>
+                    <a:bodyPr/>
+                    <a:lstStyle/>
+                    <a:p>
+                      <a:pPr>
+                        <a:buNone/>
+                      </a:pPr>
+                      <a:r>
+                        <a:rPr lang="es-ES" sz="1400" dirty="0"/>
+                        <a:t>≈ 2.511</a:t>
+                      </a:r>
+                    </a:p>
+                  </a:txBody>
+                  <a:tcPr anchor="ctr"/>
+                </a:tc>
+                <a:extLst>
+                  <a:ext uri="{0D108BD9-81ED-4DB2-BD59-A6C34878D82A}">
+                    <a16:rowId xmlns:a16="http://schemas.microsoft.com/office/drawing/2014/main" val="876476467"/>
+                  </a:ext>
+                </a:extLst>
+              </a:tr>
+              <a:tr h="280245">
+                <a:tc>
+                  <a:txBody>
+                    <a:bodyPr/>
+                    <a:lstStyle/>
+                    <a:p>
+                      <a:pPr>
+                        <a:buNone/>
+                      </a:pPr>
+                      <a:r>
+                        <a:rPr lang="es-ES" sz="1400" b="1" dirty="0"/>
+                        <a:t>Confinamiento del modo</a:t>
+                      </a:r>
+                      <a:endParaRPr lang="es-ES" sz="1400" dirty="0"/>
+                    </a:p>
+                  </a:txBody>
+                  <a:tcPr anchor="ctr"/>
+                </a:tc>
+                <a:tc>
+                  <a:txBody>
+                    <a:bodyPr/>
+                    <a:lstStyle/>
+                    <a:p>
+                      <a:pPr>
+                        <a:buNone/>
+                      </a:pPr>
+                      <a:r>
+                        <a:rPr lang="es-ES" sz="1400"/>
+                        <a:t>Menor</a:t>
+                      </a:r>
+                    </a:p>
+                  </a:txBody>
+                  <a:tcPr anchor="ctr"/>
+                </a:tc>
+                <a:tc>
+                  <a:txBody>
+                    <a:bodyPr/>
+                    <a:lstStyle/>
+                    <a:p>
+                      <a:pPr>
+                        <a:buNone/>
+                      </a:pPr>
+                      <a:r>
+                        <a:rPr lang="es-ES" sz="1400" dirty="0"/>
+                        <a:t>Mayor</a:t>
+                      </a:r>
+                    </a:p>
+                  </a:txBody>
+                  <a:tcPr anchor="ctr"/>
+                </a:tc>
+                <a:extLst>
+                  <a:ext uri="{0D108BD9-81ED-4DB2-BD59-A6C34878D82A}">
+                    <a16:rowId xmlns:a16="http://schemas.microsoft.com/office/drawing/2014/main" val="1705402037"/>
+                  </a:ext>
+                </a:extLst>
+              </a:tr>
+            </a:tbl>
+          </a:graphicData>
+        </a:graphic>
+      </p:graphicFrame>
     </p:spTree>
     <p:extLst>
       <p:ext uri="{BB962C8B-B14F-4D97-AF65-F5344CB8AC3E}">
@@ -5693,7 +5770,7 @@
 </p:sld>
 </file>
 
-<file path=ppt/slides/slide15.xml><?xml version="1.0" encoding="utf-8"?>
+<file path=ppt/slides/slide14.xml><?xml version="1.0" encoding="utf-8"?>
 <p:sld xmlns:a="http://schemas.openxmlformats.org/drawingml/2006/main" xmlns:r="http://schemas.openxmlformats.org/officeDocument/2006/relationships" xmlns:p="http://schemas.openxmlformats.org/presentationml/2006/main">
   <p:cSld>
     <p:spTree>
@@ -5832,7 +5909,7 @@
           <a:p>
             <a:fld id="{B6F15528-21DE-4FAA-801E-634DDDAF4B2B}" type="slidenum">
               <a:rPr lang="es-ES" smtClean="0"/>
-              <a:t>15</a:t>
+              <a:t>14</a:t>
             </a:fld>
             <a:endParaRPr lang="es-ES"/>
           </a:p>
@@ -7787,7 +7864,7 @@
         <p:cNvPr id="1" name="">
           <a:extLst>
             <a:ext uri="{FF2B5EF4-FFF2-40B4-BE49-F238E27FC236}">
-              <a16:creationId xmlns:a16="http://schemas.microsoft.com/office/drawing/2014/main" id="{AE80DA9C-35AF-A1D7-01E5-BFD9DEF1550F}"/>
+              <a16:creationId xmlns:a16="http://schemas.microsoft.com/office/drawing/2014/main" id="{5995554B-67EA-B6F8-D48B-E89C530E7D1C}"/>
             </a:ext>
           </a:extLst>
         </p:cNvPr>
@@ -7807,7 +7884,7 @@
           <p:cNvPr id="16" name="object 16">
             <a:extLst>
               <a:ext uri="{FF2B5EF4-FFF2-40B4-BE49-F238E27FC236}">
-                <a16:creationId xmlns:a16="http://schemas.microsoft.com/office/drawing/2014/main" id="{471E1424-6C4B-2D9A-1352-30AFB987AD41}"/>
+                <a16:creationId xmlns:a16="http://schemas.microsoft.com/office/drawing/2014/main" id="{895021D6-1F41-2F3A-9513-979856223ED9}"/>
               </a:ext>
             </a:extLst>
           </p:cNvPr>
@@ -7843,7 +7920,7 @@
             </a:pPr>
             <a:r>
               <a:rPr lang="en-US" sz="2500" dirty="0"/>
-              <a:t>Learning outcome #1 – Effective index of a waveguide</a:t>
+              <a:t>Learning outcome #1.1 – Materials</a:t>
             </a:r>
             <a:br>
               <a:rPr lang="es-ES" sz="2500" spc="-5" dirty="0">
@@ -7863,7 +7940,7 @@
           <p:cNvPr id="83" name="Gráfico 82">
             <a:extLst>
               <a:ext uri="{FF2B5EF4-FFF2-40B4-BE49-F238E27FC236}">
-                <a16:creationId xmlns:a16="http://schemas.microsoft.com/office/drawing/2014/main" id="{9DCFD462-4416-65F8-5696-B0135B632765}"/>
+                <a16:creationId xmlns:a16="http://schemas.microsoft.com/office/drawing/2014/main" id="{0689FD67-3625-76E0-B7F7-D6256B846938}"/>
               </a:ext>
             </a:extLst>
           </p:cNvPr>
@@ -7899,7 +7976,7 @@
           <p:cNvPr id="84" name="Marcador de número de diapositiva 83">
             <a:extLst>
               <a:ext uri="{FF2B5EF4-FFF2-40B4-BE49-F238E27FC236}">
-                <a16:creationId xmlns:a16="http://schemas.microsoft.com/office/drawing/2014/main" id="{293F5C1D-AFFF-4EA6-CA59-6503F34EBF5F}"/>
+                <a16:creationId xmlns:a16="http://schemas.microsoft.com/office/drawing/2014/main" id="{DF85D4F2-EF90-6BC0-8E40-FBA6EE764B3B}"/>
               </a:ext>
             </a:extLst>
           </p:cNvPr>
@@ -7928,7 +8005,7 @@
           <p:cNvPr id="3" name="Marcador de pie de página 2">
             <a:extLst>
               <a:ext uri="{FF2B5EF4-FFF2-40B4-BE49-F238E27FC236}">
-                <a16:creationId xmlns:a16="http://schemas.microsoft.com/office/drawing/2014/main" id="{34F13AC1-9668-7266-DF5B-D7CE084AB044}"/>
+                <a16:creationId xmlns:a16="http://schemas.microsoft.com/office/drawing/2014/main" id="{3C1B55A1-A9A5-C391-4071-7EA86EAF64C0}"/>
               </a:ext>
             </a:extLst>
           </p:cNvPr>
@@ -7959,242 +8036,20 @@
       </p:sp>
       <p:sp>
         <p:nvSpPr>
-          <p:cNvPr id="4" name="Marcador de texto 2">
-            <a:extLst>
-              <a:ext uri="{FF2B5EF4-FFF2-40B4-BE49-F238E27FC236}">
-                <a16:creationId xmlns:a16="http://schemas.microsoft.com/office/drawing/2014/main" id="{AA9E72FF-B948-6B7A-8909-97C6BE95D6FB}"/>
-              </a:ext>
-            </a:extLst>
-          </p:cNvPr>
-          <p:cNvSpPr txBox="1">
-            <a:spLocks/>
-          </p:cNvSpPr>
+          <p:cNvPr id="5" name="CuadroTexto 4">
+            <a:extLst>
+              <a:ext uri="{FF2B5EF4-FFF2-40B4-BE49-F238E27FC236}">
+                <a16:creationId xmlns:a16="http://schemas.microsoft.com/office/drawing/2014/main" id="{9BEDD745-C961-8871-5B7A-53C72BAFDA1D}"/>
+              </a:ext>
+            </a:extLst>
+          </p:cNvPr>
+          <p:cNvSpPr txBox="1"/>
           <p:nvPr/>
         </p:nvSpPr>
         <p:spPr>
           <a:xfrm>
-            <a:off x="608012" y="1295400"/>
-            <a:ext cx="11048999" cy="4958137"/>
-          </a:xfrm>
-          <a:prstGeom prst="rect">
-            <a:avLst/>
-          </a:prstGeom>
-        </p:spPr>
-        <p:txBody>
-          <a:bodyPr>
-            <a:normAutofit/>
-          </a:bodyPr>
-          <a:lstStyle>
-            <a:lvl1pPr marL="0">
-              <a:defRPr>
-                <a:latin typeface="+mn-lt"/>
-                <a:ea typeface="+mn-ea"/>
-                <a:cs typeface="+mn-cs"/>
-              </a:defRPr>
-            </a:lvl1pPr>
-            <a:lvl2pPr marL="457200">
-              <a:defRPr>
-                <a:latin typeface="+mn-lt"/>
-                <a:ea typeface="+mn-ea"/>
-                <a:cs typeface="+mn-cs"/>
-              </a:defRPr>
-            </a:lvl2pPr>
-            <a:lvl3pPr marL="914400">
-              <a:defRPr>
-                <a:latin typeface="+mn-lt"/>
-                <a:ea typeface="+mn-ea"/>
-                <a:cs typeface="+mn-cs"/>
-              </a:defRPr>
-            </a:lvl3pPr>
-            <a:lvl4pPr marL="1371600">
-              <a:defRPr>
-                <a:latin typeface="+mn-lt"/>
-                <a:ea typeface="+mn-ea"/>
-                <a:cs typeface="+mn-cs"/>
-              </a:defRPr>
-            </a:lvl4pPr>
-            <a:lvl5pPr marL="1828800">
-              <a:defRPr>
-                <a:latin typeface="+mn-lt"/>
-                <a:ea typeface="+mn-ea"/>
-                <a:cs typeface="+mn-cs"/>
-              </a:defRPr>
-            </a:lvl5pPr>
-            <a:lvl6pPr marL="2286000">
-              <a:defRPr>
-                <a:latin typeface="+mn-lt"/>
-                <a:ea typeface="+mn-ea"/>
-                <a:cs typeface="+mn-cs"/>
-              </a:defRPr>
-            </a:lvl6pPr>
-            <a:lvl7pPr marL="2743200">
-              <a:defRPr>
-                <a:latin typeface="+mn-lt"/>
-                <a:ea typeface="+mn-ea"/>
-                <a:cs typeface="+mn-cs"/>
-              </a:defRPr>
-            </a:lvl7pPr>
-            <a:lvl8pPr marL="3200400">
-              <a:defRPr>
-                <a:latin typeface="+mn-lt"/>
-                <a:ea typeface="+mn-ea"/>
-                <a:cs typeface="+mn-cs"/>
-              </a:defRPr>
-            </a:lvl8pPr>
-            <a:lvl9pPr marL="3657600">
-              <a:defRPr>
-                <a:latin typeface="+mn-lt"/>
-                <a:ea typeface="+mn-ea"/>
-                <a:cs typeface="+mn-cs"/>
-              </a:defRPr>
-            </a:lvl9pPr>
-          </a:lstStyle>
-          <a:p>
-            <a:pPr marL="0" indent="0">
-              <a:buNone/>
-            </a:pPr>
-            <a:r>
-              <a:rPr lang="en-US" sz="2000" b="1" dirty="0"/>
-              <a:t>INSTRUCTOR:</a:t>
-            </a:r>
-          </a:p>
-          <a:p>
-            <a:pPr marL="342900" indent="-342900" algn="just">
-              <a:buFont typeface="Arial" panose="020B0604020202020204" pitchFamily="34" charset="0"/>
-              <a:buChar char="•"/>
-            </a:pPr>
-            <a:r>
-              <a:rPr lang="en-US" sz="2000" dirty="0"/>
-              <a:t>Present Python and </a:t>
-            </a:r>
-            <a:r>
-              <a:rPr lang="en-US" sz="2000" dirty="0" err="1"/>
-              <a:t>GDSFactory</a:t>
-            </a:r>
-            <a:r>
-              <a:rPr lang="en-US" sz="2000" dirty="0"/>
-              <a:t>: materials, output, results.</a:t>
-            </a:r>
-          </a:p>
-          <a:p>
-            <a:pPr marL="342900" indent="-342900" algn="just">
-              <a:buFont typeface="Arial" panose="020B0604020202020204" pitchFamily="34" charset="0"/>
-              <a:buChar char="•"/>
-            </a:pPr>
-            <a:r>
-              <a:rPr lang="en-US" sz="2000" dirty="0"/>
-              <a:t>Explain how to run a simulation for a particular cross-section. </a:t>
-            </a:r>
-          </a:p>
-          <a:p>
-            <a:pPr marL="342900" indent="-342900" algn="just">
-              <a:buFont typeface="Arial" panose="020B0604020202020204" pitchFamily="34" charset="0"/>
-              <a:buChar char="•"/>
-            </a:pPr>
-            <a:r>
-              <a:rPr lang="en-US" sz="2000" dirty="0"/>
-              <a:t>Showcase how to change between shallow and deep waveguide.</a:t>
-            </a:r>
-          </a:p>
-          <a:p>
-            <a:pPr marL="342900" indent="-342900" algn="just">
-              <a:buFont typeface="Arial" panose="020B0604020202020204" pitchFamily="34" charset="0"/>
-              <a:buChar char="•"/>
-            </a:pPr>
-            <a:r>
-              <a:rPr lang="en-US" sz="2000" dirty="0"/>
-              <a:t>Describe how to change the wavelength and width for the waveguide analysis.</a:t>
-            </a:r>
-          </a:p>
-          <a:p>
-            <a:pPr marL="342900" indent="-342900" algn="just">
-              <a:buFont typeface="Arial" panose="020B0604020202020204" pitchFamily="34" charset="0"/>
-              <a:buChar char="•"/>
-            </a:pPr>
-            <a:r>
-              <a:rPr lang="en-US" sz="2000" dirty="0"/>
-              <a:t>Describe the outputs.</a:t>
-            </a:r>
-          </a:p>
-          <a:p>
-            <a:pPr marL="0" indent="0" algn="just">
-              <a:buNone/>
-            </a:pPr>
-            <a:r>
-              <a:rPr lang="en-US" sz="2000" b="1" dirty="0"/>
-              <a:t>ALL EXAMPLE #1: </a:t>
-            </a:r>
-            <a:r>
-              <a:rPr lang="en-US" sz="2000" dirty="0"/>
-              <a:t>waveguide width 1.2 µm, deep </a:t>
-            </a:r>
-            <a:r>
-              <a:rPr lang="en-US" sz="2000" dirty="0" err="1"/>
-              <a:t>wvg</a:t>
-            </a:r>
-            <a:r>
-              <a:rPr lang="en-US" sz="2000" dirty="0"/>
-              <a:t>, wavelength start and end same 1.55 µm </a:t>
-            </a:r>
-            <a:r>
-              <a:rPr lang="en-US" sz="2000" dirty="0">
-                <a:sym typeface="Wingdings" pitchFamily="2" charset="2"/>
-              </a:rPr>
-              <a:t> all ”Run”</a:t>
-            </a:r>
-            <a:endParaRPr lang="en-US" sz="2000" dirty="0"/>
-          </a:p>
-          <a:p>
-            <a:pPr marL="0" indent="0" algn="just">
-              <a:buNone/>
-            </a:pPr>
-            <a:r>
-              <a:rPr lang="en-US" sz="2000" b="1" dirty="0"/>
-              <a:t>ALL: </a:t>
-            </a:r>
-            <a:r>
-              <a:rPr lang="en-US" sz="2000" dirty="0"/>
-              <a:t>Follow</a:t>
-            </a:r>
-            <a:r>
-              <a:rPr lang="en-US" sz="2000" b="1" dirty="0"/>
-              <a:t> </a:t>
-            </a:r>
-            <a:r>
-              <a:rPr lang="en-US" sz="2000" dirty="0"/>
-              <a:t>instructor, that will show how to 1) plot mode, 2) explore the results (neff …)</a:t>
-            </a:r>
-          </a:p>
-          <a:p>
-            <a:pPr algn="just"/>
-            <a:endParaRPr lang="en-US" sz="2000" b="1" i="1" dirty="0"/>
-          </a:p>
-          <a:p>
-            <a:pPr algn="just"/>
-            <a:endParaRPr lang="en-US" sz="2000" kern="0" dirty="0">
-              <a:solidFill>
-                <a:sysClr val="windowText" lastClr="000000"/>
-              </a:solidFill>
-            </a:endParaRPr>
-          </a:p>
-        </p:txBody>
-      </p:sp>
-      <p:sp>
-        <p:nvSpPr>
-          <p:cNvPr id="2" name="CuadroTexto 1">
-            <a:extLst>
-              <a:ext uri="{FF2B5EF4-FFF2-40B4-BE49-F238E27FC236}">
-                <a16:creationId xmlns:a16="http://schemas.microsoft.com/office/drawing/2014/main" id="{D0F8CF3B-B920-DBFC-F825-0C87B51EADA7}"/>
-              </a:ext>
-            </a:extLst>
-          </p:cNvPr>
-          <p:cNvSpPr txBox="1"/>
-          <p:nvPr/>
-        </p:nvSpPr>
-        <p:spPr>
-          <a:xfrm>
-            <a:off x="609441" y="4860334"/>
-            <a:ext cx="11199971" cy="1200329"/>
+            <a:off x="381000" y="3746858"/>
+            <a:ext cx="11199971" cy="1015663"/>
           </a:xfrm>
           <a:prstGeom prst="rect">
             <a:avLst/>
@@ -8218,304 +8073,6 @@
           <a:p>
             <a:pPr algn="just"/>
             <a:r>
-              <a:rPr lang="en-US" sz="1200" dirty="0">
-                <a:latin typeface="Arial" panose="020B0604020202020204" pitchFamily="34" charset="0"/>
-                <a:cs typeface="Arial" panose="020B0604020202020204" pitchFamily="34" charset="0"/>
-              </a:rPr>
-              <a:t>Document all your results (neff, plot fields of different modes, comparison between different polarizations…)</a:t>
-            </a:r>
-          </a:p>
-          <a:p>
-            <a:pPr algn="just"/>
-            <a:r>
-              <a:rPr lang="en-US" sz="1200" dirty="0" err="1">
-                <a:latin typeface="Arial" panose="020B0604020202020204" pitchFamily="34" charset="0"/>
-                <a:cs typeface="Arial" panose="020B0604020202020204" pitchFamily="34" charset="0"/>
-              </a:rPr>
-              <a:t>Páginas</a:t>
-            </a:r>
-            <a:r>
-              <a:rPr lang="en-US" sz="1200" dirty="0">
-                <a:latin typeface="Arial" panose="020B0604020202020204" pitchFamily="34" charset="0"/>
-                <a:cs typeface="Arial" panose="020B0604020202020204" pitchFamily="34" charset="0"/>
-              </a:rPr>
-              <a:t> </a:t>
-            </a:r>
-            <a:r>
-              <a:rPr lang="en-US" sz="1200" dirty="0" err="1">
-                <a:latin typeface="Arial" panose="020B0604020202020204" pitchFamily="34" charset="0"/>
-                <a:cs typeface="Arial" panose="020B0604020202020204" pitchFamily="34" charset="0"/>
-              </a:rPr>
-              <a:t>siguientes</a:t>
-            </a:r>
-            <a:r>
-              <a:rPr lang="en-US" sz="1200" dirty="0">
-                <a:latin typeface="Arial" panose="020B0604020202020204" pitchFamily="34" charset="0"/>
-                <a:cs typeface="Arial" panose="020B0604020202020204" pitchFamily="34" charset="0"/>
-              </a:rPr>
-              <a:t>*</a:t>
-            </a:r>
-          </a:p>
-          <a:p>
-            <a:pPr algn="just"/>
-            <a:endParaRPr lang="en-US" sz="1200" dirty="0">
-              <a:latin typeface="Arial" panose="020B0604020202020204" pitchFamily="34" charset="0"/>
-              <a:cs typeface="Arial" panose="020B0604020202020204" pitchFamily="34" charset="0"/>
-            </a:endParaRPr>
-          </a:p>
-          <a:p>
-            <a:pPr algn="just"/>
-            <a:endParaRPr lang="en-US" sz="1200" dirty="0">
-              <a:latin typeface="Arial" panose="020B0604020202020204" pitchFamily="34" charset="0"/>
-              <a:cs typeface="Arial" panose="020B0604020202020204" pitchFamily="34" charset="0"/>
-            </a:endParaRPr>
-          </a:p>
-          <a:p>
-            <a:pPr algn="just"/>
-            <a:endParaRPr lang="en-US" sz="1200" dirty="0">
-              <a:latin typeface="Arial" panose="020B0604020202020204" pitchFamily="34" charset="0"/>
-              <a:cs typeface="Arial" panose="020B0604020202020204" pitchFamily="34" charset="0"/>
-            </a:endParaRPr>
-          </a:p>
-          <a:p>
-            <a:pPr algn="just"/>
-            <a:endParaRPr lang="en-US" sz="1200" dirty="0">
-              <a:latin typeface="Arial" panose="020B0604020202020204" pitchFamily="34" charset="0"/>
-              <a:cs typeface="Arial" panose="020B0604020202020204" pitchFamily="34" charset="0"/>
-            </a:endParaRPr>
-          </a:p>
-        </p:txBody>
-      </p:sp>
-    </p:spTree>
-    <p:extLst>
-      <p:ext uri="{BB962C8B-B14F-4D97-AF65-F5344CB8AC3E}">
-        <p14:creationId xmlns:p14="http://schemas.microsoft.com/office/powerpoint/2010/main" val="730501311"/>
-      </p:ext>
-    </p:extLst>
-  </p:cSld>
-  <p:clrMapOvr>
-    <a:masterClrMapping/>
-  </p:clrMapOvr>
-</p:sld>
-</file>
-
-<file path=ppt/slides/slide4.xml><?xml version="1.0" encoding="utf-8"?>
-<p:sld xmlns:a="http://schemas.openxmlformats.org/drawingml/2006/main" xmlns:r="http://schemas.openxmlformats.org/officeDocument/2006/relationships" xmlns:p="http://schemas.openxmlformats.org/presentationml/2006/main">
-  <p:cSld>
-    <p:spTree>
-      <p:nvGrpSpPr>
-        <p:cNvPr id="1" name="">
-          <a:extLst>
-            <a:ext uri="{FF2B5EF4-FFF2-40B4-BE49-F238E27FC236}">
-              <a16:creationId xmlns:a16="http://schemas.microsoft.com/office/drawing/2014/main" id="{5995554B-67EA-B6F8-D48B-E89C530E7D1C}"/>
-            </a:ext>
-          </a:extLst>
-        </p:cNvPr>
-        <p:cNvGrpSpPr/>
-        <p:nvPr/>
-      </p:nvGrpSpPr>
-      <p:grpSpPr>
-        <a:xfrm>
-          <a:off x="0" y="0"/>
-          <a:ext cx="0" cy="0"/>
-          <a:chOff x="0" y="0"/>
-          <a:chExt cx="0" cy="0"/>
-        </a:xfrm>
-      </p:grpSpPr>
-      <p:sp>
-        <p:nvSpPr>
-          <p:cNvPr id="16" name="object 16">
-            <a:extLst>
-              <a:ext uri="{FF2B5EF4-FFF2-40B4-BE49-F238E27FC236}">
-                <a16:creationId xmlns:a16="http://schemas.microsoft.com/office/drawing/2014/main" id="{895021D6-1F41-2F3A-9513-979856223ED9}"/>
-              </a:ext>
-            </a:extLst>
-          </p:cNvPr>
-          <p:cNvSpPr txBox="1">
-            <a:spLocks noGrp="1"/>
-          </p:cNvSpPr>
-          <p:nvPr>
-            <p:ph type="title"/>
-          </p:nvPr>
-        </p:nvSpPr>
-        <p:spPr>
-          <a:xfrm>
-            <a:off x="685800" y="408883"/>
-            <a:ext cx="10994410" cy="782265"/>
-          </a:xfrm>
-          <a:prstGeom prst="rect">
-            <a:avLst/>
-          </a:prstGeom>
-        </p:spPr>
-        <p:txBody>
-          <a:bodyPr vert="horz" wrap="square" lIns="0" tIns="12700" rIns="0" bIns="0" rtlCol="0">
-            <a:spAutoFit/>
-          </a:bodyPr>
-          <a:lstStyle/>
-          <a:p>
-            <a:pPr marL="12700">
-              <a:lnSpc>
-                <a:spcPct val="100000"/>
-              </a:lnSpc>
-              <a:spcBef>
-                <a:spcPts val="100"/>
-              </a:spcBef>
-            </a:pPr>
-            <a:r>
-              <a:rPr lang="en-US" sz="2500" dirty="0"/>
-              <a:t>Learning outcome #1.1 – Materials</a:t>
-            </a:r>
-            <a:br>
-              <a:rPr lang="es-ES" sz="2500" spc="-5" dirty="0">
-                <a:latin typeface="+mj-lt"/>
-                <a:cs typeface="Lucida Sans"/>
-              </a:rPr>
-            </a:br>
-            <a:endParaRPr sz="2500" b="0" dirty="0">
-              <a:latin typeface="+mj-lt"/>
-              <a:cs typeface="Lucida Sans"/>
-            </a:endParaRPr>
-          </a:p>
-        </p:txBody>
-      </p:sp>
-      <p:pic>
-        <p:nvPicPr>
-          <p:cNvPr id="83" name="Gráfico 82">
-            <a:extLst>
-              <a:ext uri="{FF2B5EF4-FFF2-40B4-BE49-F238E27FC236}">
-                <a16:creationId xmlns:a16="http://schemas.microsoft.com/office/drawing/2014/main" id="{0689FD67-3625-76E0-B7F7-D6256B846938}"/>
-              </a:ext>
-            </a:extLst>
-          </p:cNvPr>
-          <p:cNvPicPr>
-            <a:picLocks noChangeAspect="1"/>
-          </p:cNvPicPr>
-          <p:nvPr/>
-        </p:nvPicPr>
-        <p:blipFill>
-          <a:blip r:embed="rId3">
-            <a:extLst>
-              <a:ext uri="{96DAC541-7B7A-43D3-8B79-37D633B846F1}">
-                <asvg:svgBlip xmlns:asvg="http://schemas.microsoft.com/office/drawing/2016/SVG/main" r:embed="rId4"/>
-              </a:ext>
-            </a:extLst>
-          </a:blip>
-          <a:stretch>
-            <a:fillRect/>
-          </a:stretch>
-        </p:blipFill>
-        <p:spPr>
-          <a:xfrm>
-            <a:off x="5045006" y="6356057"/>
-            <a:ext cx="6409575" cy="363174"/>
-          </a:xfrm>
-          <a:prstGeom prst="rect">
-            <a:avLst/>
-          </a:prstGeom>
-        </p:spPr>
-      </p:pic>
-      <p:sp>
-        <p:nvSpPr>
-          <p:cNvPr id="84" name="Marcador de número de diapositiva 83">
-            <a:extLst>
-              <a:ext uri="{FF2B5EF4-FFF2-40B4-BE49-F238E27FC236}">
-                <a16:creationId xmlns:a16="http://schemas.microsoft.com/office/drawing/2014/main" id="{DF85D4F2-EF90-6BC0-8E40-FBA6EE764B3B}"/>
-              </a:ext>
-            </a:extLst>
-          </p:cNvPr>
-          <p:cNvSpPr>
-            <a:spLocks noGrp="1"/>
-          </p:cNvSpPr>
-          <p:nvPr>
-            <p:ph type="sldNum" sz="quarter" idx="7"/>
-          </p:nvPr>
-        </p:nvSpPr>
-        <p:spPr/>
-        <p:txBody>
-          <a:bodyPr/>
-          <a:lstStyle/>
-          <a:p>
-            <a:fld id="{B6F15528-21DE-4FAA-801E-634DDDAF4B2B}" type="slidenum">
-              <a:rPr lang="es-ES" smtClean="0"/>
-              <a:t>4</a:t>
-            </a:fld>
-            <a:endParaRPr lang="es-ES"/>
-          </a:p>
-        </p:txBody>
-      </p:sp>
-      <p:sp>
-        <p:nvSpPr>
-          <p:cNvPr id="3" name="Marcador de pie de página 2">
-            <a:extLst>
-              <a:ext uri="{FF2B5EF4-FFF2-40B4-BE49-F238E27FC236}">
-                <a16:creationId xmlns:a16="http://schemas.microsoft.com/office/drawing/2014/main" id="{3C1B55A1-A9A5-C391-4071-7EA86EAF64C0}"/>
-              </a:ext>
-            </a:extLst>
-          </p:cNvPr>
-          <p:cNvSpPr>
-            <a:spLocks noGrp="1"/>
-          </p:cNvSpPr>
-          <p:nvPr>
-            <p:ph type="ftr" sz="quarter" idx="5"/>
-          </p:nvPr>
-        </p:nvSpPr>
-        <p:spPr/>
-        <p:txBody>
-          <a:bodyPr/>
-          <a:lstStyle/>
-          <a:p>
-            <a:pPr marL="12700">
-              <a:spcBef>
-                <a:spcPts val="15"/>
-              </a:spcBef>
-            </a:pPr>
-            <a:r>
-              <a:rPr lang="es-ES" spc="-5"/>
-              <a:t>LAB 1.0 WAVEGUIDES</a:t>
-            </a:r>
-            <a:endParaRPr lang="es-ES" spc="-5" dirty="0"/>
-          </a:p>
-        </p:txBody>
-      </p:sp>
-      <p:sp>
-        <p:nvSpPr>
-          <p:cNvPr id="5" name="CuadroTexto 4">
-            <a:extLst>
-              <a:ext uri="{FF2B5EF4-FFF2-40B4-BE49-F238E27FC236}">
-                <a16:creationId xmlns:a16="http://schemas.microsoft.com/office/drawing/2014/main" id="{9BEDD745-C961-8871-5B7A-53C72BAFDA1D}"/>
-              </a:ext>
-            </a:extLst>
-          </p:cNvPr>
-          <p:cNvSpPr txBox="1"/>
-          <p:nvPr/>
-        </p:nvSpPr>
-        <p:spPr>
-          <a:xfrm>
-            <a:off x="381000" y="3746858"/>
-            <a:ext cx="11199971" cy="1200329"/>
-          </a:xfrm>
-          <a:prstGeom prst="rect">
-            <a:avLst/>
-          </a:prstGeom>
-          <a:solidFill>
-            <a:schemeClr val="bg1">
-              <a:lumMod val="95000"/>
-            </a:schemeClr>
-          </a:solidFill>
-          <a:ln w="28575">
-            <a:solidFill>
-              <a:srgbClr val="E0700D"/>
-            </a:solidFill>
-          </a:ln>
-        </p:spPr>
-        <p:txBody>
-          <a:bodyPr wrap="square" rtlCol="0">
-            <a:spAutoFit/>
-          </a:bodyPr>
-          <a:lstStyle/>
-          <a:p>
-            <a:pPr algn="just"/>
-            <a:r>
               <a:rPr lang="es-ES" sz="1200" dirty="0">
                 <a:latin typeface="Arial" panose="020B0604020202020204" pitchFamily="34" charset="0"/>
                 <a:cs typeface="Arial" panose="020B0604020202020204" pitchFamily="34" charset="0"/>
@@ -8548,9 +8105,6 @@
             <a:pPr algn="just"/>
             <a:r>
               <a:rPr lang="es-ES" sz="1200" dirty="0">
-                <a:highlight>
-                  <a:srgbClr val="FFFF00"/>
-                </a:highlight>
                 <a:latin typeface="Arial" panose="020B0604020202020204" pitchFamily="34" charset="0"/>
                 <a:cs typeface="Arial" panose="020B0604020202020204" pitchFamily="34" charset="0"/>
               </a:rPr>
@@ -8558,9 +8112,6 @@
             </a:r>
             <a:r>
               <a:rPr lang="es-ES" sz="1200" dirty="0" err="1">
-                <a:highlight>
-                  <a:srgbClr val="FFFF00"/>
-                </a:highlight>
                 <a:latin typeface="Arial" panose="020B0604020202020204" pitchFamily="34" charset="0"/>
                 <a:cs typeface="Arial" panose="020B0604020202020204" pitchFamily="34" charset="0"/>
               </a:rPr>
@@ -8568,21 +8119,11 @@
             </a:r>
             <a:r>
               <a:rPr lang="es-ES" sz="1200" dirty="0">
-                <a:highlight>
-                  <a:srgbClr val="FFFF00"/>
-                </a:highlight>
                 <a:latin typeface="Arial" panose="020B0604020202020204" pitchFamily="34" charset="0"/>
                 <a:cs typeface="Arial" panose="020B0604020202020204" pitchFamily="34" charset="0"/>
               </a:rPr>
               <a:t> se van a usar como núcleo y el SiO2 como cubierta en esta práctica.</a:t>
             </a:r>
-          </a:p>
-          <a:p>
-            <a:pPr algn="just"/>
-            <a:endParaRPr lang="es-ES" sz="1200" dirty="0">
-              <a:latin typeface="Arial" panose="020B0604020202020204" pitchFamily="34" charset="0"/>
-              <a:cs typeface="Arial" panose="020B0604020202020204" pitchFamily="34" charset="0"/>
-            </a:endParaRPr>
           </a:p>
         </p:txBody>
       </p:sp>
@@ -8689,7 +8230,7 @@
 </p:sld>
 </file>
 
-<file path=ppt/slides/slide5.xml><?xml version="1.0" encoding="utf-8"?>
+<file path=ppt/slides/slide4.xml><?xml version="1.0" encoding="utf-8"?>
 <p:sld xmlns:a="http://schemas.openxmlformats.org/drawingml/2006/main" xmlns:r="http://schemas.openxmlformats.org/officeDocument/2006/relationships" xmlns:p="http://schemas.openxmlformats.org/presentationml/2006/main">
   <p:cSld>
     <p:spTree>
@@ -8827,7 +8368,7 @@
           <a:p>
             <a:fld id="{B6F15528-21DE-4FAA-801E-634DDDAF4B2B}" type="slidenum">
               <a:rPr lang="es-ES" smtClean="0"/>
-              <a:t>5</a:t>
+              <a:t>4</a:t>
             </a:fld>
             <a:endParaRPr lang="es-ES"/>
           </a:p>
@@ -8882,7 +8423,7 @@
         <p:spPr>
           <a:xfrm>
             <a:off x="381000" y="3746858"/>
-            <a:ext cx="11199971" cy="1015663"/>
+            <a:ext cx="11199971" cy="830997"/>
           </a:xfrm>
           <a:prstGeom prst="rect">
             <a:avLst/>
@@ -9113,13 +8654,6 @@
               </a:rPr>
               <a:t>. </a:t>
             </a:r>
-          </a:p>
-          <a:p>
-            <a:pPr algn="just"/>
-            <a:endParaRPr lang="es-ES" sz="1200" dirty="0">
-              <a:latin typeface="Arial" panose="020B0604020202020204" pitchFamily="34" charset="0"/>
-              <a:cs typeface="Arial" panose="020B0604020202020204" pitchFamily="34" charset="0"/>
-            </a:endParaRPr>
           </a:p>
         </p:txBody>
       </p:sp>
@@ -9196,7 +8730,7 @@
 </p:sld>
 </file>
 
-<file path=ppt/slides/slide6.xml><?xml version="1.0" encoding="utf-8"?>
+<file path=ppt/slides/slide5.xml><?xml version="1.0" encoding="utf-8"?>
 <p:sld xmlns:a="http://schemas.openxmlformats.org/drawingml/2006/main" xmlns:r="http://schemas.openxmlformats.org/officeDocument/2006/relationships" xmlns:p="http://schemas.openxmlformats.org/presentationml/2006/main">
   <p:cSld>
     <p:spTree>
@@ -9328,7 +8862,7 @@
           <a:p>
             <a:fld id="{B6F15528-21DE-4FAA-801E-634DDDAF4B2B}" type="slidenum">
               <a:rPr lang="es-ES" smtClean="0"/>
-              <a:t>6</a:t>
+              <a:t>5</a:t>
             </a:fld>
             <a:endParaRPr lang="es-ES"/>
           </a:p>
@@ -9383,7 +8917,7 @@
         <p:spPr>
           <a:xfrm>
             <a:off x="583019" y="3256134"/>
-            <a:ext cx="11199971" cy="1384995"/>
+            <a:ext cx="11199971" cy="1015663"/>
           </a:xfrm>
           <a:prstGeom prst="rect">
             <a:avLst/>
@@ -9425,43 +8959,10 @@
             <a:pPr algn="just"/>
             <a:r>
               <a:rPr lang="es-ES" sz="1200" dirty="0">
-                <a:highlight>
-                  <a:srgbClr val="FFFF00"/>
-                </a:highlight>
-                <a:latin typeface="Arial" panose="020B0604020202020204" pitchFamily="34" charset="0"/>
-                <a:cs typeface="Arial" panose="020B0604020202020204" pitchFamily="34" charset="0"/>
-              </a:rPr>
-              <a:t>Se observa como, en general, los modos TE se distribuyen en horizontal y los TM en vertical.</a:t>
-            </a:r>
-            <a:r>
-              <a:rPr lang="es-ES" sz="1200" dirty="0">
-                <a:latin typeface="Arial" panose="020B0604020202020204" pitchFamily="34" charset="0"/>
-                <a:cs typeface="Arial" panose="020B0604020202020204" pitchFamily="34" charset="0"/>
-              </a:rPr>
-              <a:t> De esta forma, el modo TE0 está confinado mayoritariamente en el núcleo, al igual que el modo TM0, aunque este está menos confinado. Además, los modos TE1 y TM1 apenas se propagan por el núcleo.</a:t>
-            </a:r>
-          </a:p>
-          <a:p>
-            <a:pPr algn="just"/>
-            <a:endParaRPr lang="es-ES" sz="1200" dirty="0">
-              <a:latin typeface="Arial" panose="020B0604020202020204" pitchFamily="34" charset="0"/>
-              <a:cs typeface="Arial" panose="020B0604020202020204" pitchFamily="34" charset="0"/>
-            </a:endParaRPr>
-          </a:p>
-          <a:p>
-            <a:pPr algn="just"/>
-            <a:r>
-              <a:rPr lang="es-ES" sz="1200" dirty="0">
-                <a:solidFill>
-                  <a:srgbClr val="FF0000"/>
-                </a:solidFill>
-                <a:highlight>
-                  <a:srgbClr val="FFFF00"/>
-                </a:highlight>
-                <a:latin typeface="Arial" panose="020B0604020202020204" pitchFamily="34" charset="0"/>
-                <a:cs typeface="Arial" panose="020B0604020202020204" pitchFamily="34" charset="0"/>
-              </a:rPr>
-              <a:t>COMENTAR QUE EL MODO SE TE DISTRIBUYE EN HORIZONTAL Y EL TM EN VERTICAL</a:t>
+                <a:latin typeface="Arial" panose="020B0604020202020204" pitchFamily="34" charset="0"/>
+                <a:cs typeface="Arial" panose="020B0604020202020204" pitchFamily="34" charset="0"/>
+              </a:rPr>
+              <a:t>Se observa como los modos TE se distribuyen en horizontal y los TM en vertical. De esta forma, el modo TE0 está confinado mayoritariamente en el núcleo, al igual que el modo TM0, aunque este está menos confinado. Además, los modos TE1 y TM1 apenas se propagan por el núcleo.</a:t>
             </a:r>
           </a:p>
         </p:txBody>
@@ -9619,7 +9120,7 @@
 </p:sld>
 </file>
 
-<file path=ppt/slides/slide7.xml><?xml version="1.0" encoding="utf-8"?>
+<file path=ppt/slides/slide6.xml><?xml version="1.0" encoding="utf-8"?>
 <p:sld xmlns:a="http://schemas.openxmlformats.org/drawingml/2006/main" xmlns:r="http://schemas.openxmlformats.org/officeDocument/2006/relationships" xmlns:p="http://schemas.openxmlformats.org/presentationml/2006/main">
   <p:cSld>
     <p:spTree>
@@ -9717,10 +9218,10 @@
           <p:nvPr/>
         </p:nvPicPr>
         <p:blipFill>
-          <a:blip r:embed="rId4">
+          <a:blip r:embed="rId3">
             <a:extLst>
               <a:ext uri="{96DAC541-7B7A-43D3-8B79-37D633B846F1}">
-                <asvg:svgBlip xmlns:asvg="http://schemas.microsoft.com/office/drawing/2016/SVG/main" r:embed="rId5"/>
+                <asvg:svgBlip xmlns:asvg="http://schemas.microsoft.com/office/drawing/2016/SVG/main" r:embed="rId4"/>
               </a:ext>
             </a:extLst>
           </a:blip>
@@ -9761,7 +9262,7 @@
           <a:p>
             <a:fld id="{B6F15528-21DE-4FAA-801E-634DDDAF4B2B}" type="slidenum">
               <a:rPr lang="es-ES" smtClean="0"/>
-              <a:t>7</a:t>
+              <a:t>6</a:t>
             </a:fld>
             <a:endParaRPr lang="es-ES"/>
           </a:p>
@@ -9816,7 +9317,7 @@
         <p:spPr>
           <a:xfrm>
             <a:off x="609441" y="4800600"/>
-            <a:ext cx="11199971" cy="1938992"/>
+            <a:ext cx="11199971" cy="1384995"/>
           </a:xfrm>
           <a:prstGeom prst="rect">
             <a:avLst/>
@@ -9858,9 +9359,6 @@
             <a:pPr algn="just"/>
             <a:r>
               <a:rPr lang="es-ES" sz="1200" dirty="0">
-                <a:highlight>
-                  <a:srgbClr val="FFFF00"/>
-                </a:highlight>
                 <a:latin typeface="Arial" panose="020B0604020202020204" pitchFamily="34" charset="0"/>
                 <a:cs typeface="Arial" panose="020B0604020202020204" pitchFamily="34" charset="0"/>
               </a:rPr>
@@ -9868,9 +9366,6 @@
             </a:r>
             <a:r>
               <a:rPr lang="es-ES" sz="1200" dirty="0" err="1">
-                <a:highlight>
-                  <a:srgbClr val="FFFF00"/>
-                </a:highlight>
                 <a:latin typeface="Arial" panose="020B0604020202020204" pitchFamily="34" charset="0"/>
                 <a:cs typeface="Arial" panose="020B0604020202020204" pitchFamily="34" charset="0"/>
               </a:rPr>
@@ -9878,63 +9373,11 @@
             </a:r>
             <a:r>
               <a:rPr lang="es-ES" sz="1200" dirty="0">
-                <a:highlight>
-                  <a:srgbClr val="FFFF00"/>
-                </a:highlight>
                 <a:latin typeface="Arial" panose="020B0604020202020204" pitchFamily="34" charset="0"/>
                 <a:cs typeface="Arial" panose="020B0604020202020204" pitchFamily="34" charset="0"/>
               </a:rPr>
               <a:t> presenta un comportamiento multimodo, ya que permite la propagación de los modos guiados 0, 1, 2 y 3, que corresponden a los TE0, TE1, TM0 y TE2, respectivamente. Mientras que la guía Deep, soporta la propagación de los modos guiados 0 y 1, que corresponden a los TE0 y TM0, lo que indica que se comporta como monomodo, ya que los modos 2 y 3 son no guiados porque se propagan por la cubierta.</a:t>
             </a:r>
-          </a:p>
-          <a:p>
-            <a:pPr algn="just"/>
-            <a:endParaRPr lang="es-ES" sz="1200" dirty="0">
-              <a:latin typeface="Arial" panose="020B0604020202020204" pitchFamily="34" charset="0"/>
-              <a:cs typeface="Arial" panose="020B0604020202020204" pitchFamily="34" charset="0"/>
-            </a:endParaRPr>
-          </a:p>
-          <a:p>
-            <a:pPr algn="just"/>
-            <a:r>
-              <a:rPr lang="es-ES" sz="1200" dirty="0">
-                <a:solidFill>
-                  <a:srgbClr val="FF0000"/>
-                </a:solidFill>
-                <a:highlight>
-                  <a:srgbClr val="FFFF00"/>
-                </a:highlight>
-                <a:latin typeface="Arial" panose="020B0604020202020204" pitchFamily="34" charset="0"/>
-                <a:cs typeface="Arial" panose="020B0604020202020204" pitchFamily="34" charset="0"/>
-              </a:rPr>
-              <a:t>COMENTAR QUE LA DEEP ES MONOMODO PQ SOLO SE PROPAGAN EL TE0 Y TM0, LA SHALLOW ES MULTIMODO.</a:t>
-            </a:r>
-          </a:p>
-          <a:p>
-            <a:pPr algn="just"/>
-            <a:r>
-              <a:rPr lang="es-ES" sz="1200" dirty="0">
-                <a:solidFill>
-                  <a:srgbClr val="FF0000"/>
-                </a:solidFill>
-                <a:highlight>
-                  <a:srgbClr val="FFFF00"/>
-                </a:highlight>
-                <a:latin typeface="Arial" panose="020B0604020202020204" pitchFamily="34" charset="0"/>
-                <a:cs typeface="Arial" panose="020B0604020202020204" pitchFamily="34" charset="0"/>
-              </a:rPr>
-              <a:t>ENCIMA DEL INDICE DE LA CUBIERTA ES UN MODO GUIADO, POR DEBAJO NO GUIADO PQ SE PROPAGA POR LA CUBIERTA.</a:t>
-            </a:r>
-            <a:endParaRPr lang="en-US" sz="1200" dirty="0">
-              <a:solidFill>
-                <a:srgbClr val="FF0000"/>
-              </a:solidFill>
-              <a:highlight>
-                <a:srgbClr val="FFFF00"/>
-              </a:highlight>
-              <a:latin typeface="Arial" panose="020B0604020202020204" pitchFamily="34" charset="0"/>
-              <a:cs typeface="Arial" panose="020B0604020202020204" pitchFamily="34" charset="0"/>
-            </a:endParaRPr>
           </a:p>
         </p:txBody>
       </p:sp>
@@ -10057,7 +9500,7 @@
           <p:nvPr/>
         </p:nvPicPr>
         <p:blipFill>
-          <a:blip r:embed="rId6"/>
+          <a:blip r:embed="rId5"/>
           <a:stretch>
             <a:fillRect/>
           </a:stretch>
@@ -10087,7 +9530,7 @@
           <p:nvPr/>
         </p:nvPicPr>
         <p:blipFill>
-          <a:blip r:embed="rId7">
+          <a:blip r:embed="rId6">
             <a:extLst>
               <a:ext uri="{28A0092B-C50C-407E-A947-70E740481C1C}">
                 <a14:useLocalDpi xmlns:a14="http://schemas.microsoft.com/office/drawing/2010/main" val="0"/>
@@ -10153,15 +9596,10 @@
   <p:clrMapOvr>
     <a:masterClrMapping/>
   </p:clrMapOvr>
-  <p:extLst>
-    <p:ext uri="{6950BFC3-D8DA-4A85-94F7-54DA5524770B}">
-      <p188:commentRel xmlns:p188="http://schemas.microsoft.com/office/powerpoint/2018/8/main" r:id="rId3"/>
-    </p:ext>
-  </p:extLst>
 </p:sld>
 </file>
 
-<file path=ppt/slides/slide8.xml><?xml version="1.0" encoding="utf-8"?>
+<file path=ppt/slides/slide7.xml><?xml version="1.0" encoding="utf-8"?>
 <p:sld xmlns:a="http://schemas.openxmlformats.org/drawingml/2006/main" xmlns:r="http://schemas.openxmlformats.org/officeDocument/2006/relationships" xmlns:p="http://schemas.openxmlformats.org/presentationml/2006/main">
   <p:cSld>
     <p:spTree>
@@ -10303,7 +9741,7 @@
           <a:p>
             <a:fld id="{B6F15528-21DE-4FAA-801E-634DDDAF4B2B}" type="slidenum">
               <a:rPr lang="es-ES" smtClean="0"/>
-              <a:t>8</a:t>
+              <a:t>7</a:t>
             </a:fld>
             <a:endParaRPr lang="es-ES"/>
           </a:p>
@@ -10357,7 +9795,7 @@
         <p:spPr>
           <a:xfrm>
             <a:off x="609441" y="4860334"/>
-            <a:ext cx="11199971" cy="1754326"/>
+            <a:ext cx="11199971" cy="1015663"/>
           </a:xfrm>
           <a:prstGeom prst="rect">
             <a:avLst/>
@@ -10791,9 +10229,6 @@
             <a:pPr algn="just"/>
             <a:r>
               <a:rPr lang="en-US" sz="1200" dirty="0" err="1">
-                <a:highlight>
-                  <a:srgbClr val="FFFF00"/>
-                </a:highlight>
                 <a:latin typeface="Arial" panose="020B0604020202020204" pitchFamily="34" charset="0"/>
                 <a:cs typeface="Arial" panose="020B0604020202020204" pitchFamily="34" charset="0"/>
               </a:rPr>
@@ -10801,9 +10236,6 @@
             </a:r>
             <a:r>
               <a:rPr lang="en-US" sz="1200" dirty="0">
-                <a:highlight>
-                  <a:srgbClr val="FFFF00"/>
-                </a:highlight>
                 <a:latin typeface="Arial" panose="020B0604020202020204" pitchFamily="34" charset="0"/>
                 <a:cs typeface="Arial" panose="020B0604020202020204" pitchFamily="34" charset="0"/>
               </a:rPr>
@@ -10811,9 +10243,6 @@
             </a:r>
             <a:r>
               <a:rPr lang="en-US" sz="1200" dirty="0" err="1">
-                <a:highlight>
-                  <a:srgbClr val="FFFF00"/>
-                </a:highlight>
                 <a:latin typeface="Arial" panose="020B0604020202020204" pitchFamily="34" charset="0"/>
                 <a:cs typeface="Arial" panose="020B0604020202020204" pitchFamily="34" charset="0"/>
               </a:rPr>
@@ -10821,9 +10250,6 @@
             </a:r>
             <a:r>
               <a:rPr lang="en-US" sz="1200" dirty="0">
-                <a:highlight>
-                  <a:srgbClr val="FFFF00"/>
-                </a:highlight>
                 <a:latin typeface="Arial" panose="020B0604020202020204" pitchFamily="34" charset="0"/>
                 <a:cs typeface="Arial" panose="020B0604020202020204" pitchFamily="34" charset="0"/>
               </a:rPr>
@@ -10831,9 +10257,6 @@
             </a:r>
             <a:r>
               <a:rPr lang="en-US" sz="1200" dirty="0" err="1">
-                <a:highlight>
-                  <a:srgbClr val="FFFF00"/>
-                </a:highlight>
                 <a:latin typeface="Arial" panose="020B0604020202020204" pitchFamily="34" charset="0"/>
                 <a:cs typeface="Arial" panose="020B0604020202020204" pitchFamily="34" charset="0"/>
               </a:rPr>
@@ -10841,9 +10264,6 @@
             </a:r>
             <a:r>
               <a:rPr lang="en-US" sz="1200" dirty="0">
-                <a:highlight>
-                  <a:srgbClr val="FFFF00"/>
-                </a:highlight>
                 <a:latin typeface="Arial" panose="020B0604020202020204" pitchFamily="34" charset="0"/>
                 <a:cs typeface="Arial" panose="020B0604020202020204" pitchFamily="34" charset="0"/>
               </a:rPr>
@@ -10851,9 +10271,6 @@
             </a:r>
             <a:r>
               <a:rPr lang="en-US" sz="1200" dirty="0" err="1">
-                <a:highlight>
-                  <a:srgbClr val="FFFF00"/>
-                </a:highlight>
                 <a:latin typeface="Arial" panose="020B0604020202020204" pitchFamily="34" charset="0"/>
                 <a:cs typeface="Arial" panose="020B0604020202020204" pitchFamily="34" charset="0"/>
               </a:rPr>
@@ -10861,9 +10278,6 @@
             </a:r>
             <a:r>
               <a:rPr lang="en-US" sz="1200" dirty="0">
-                <a:highlight>
-                  <a:srgbClr val="FFFF00"/>
-                </a:highlight>
                 <a:latin typeface="Arial" panose="020B0604020202020204" pitchFamily="34" charset="0"/>
                 <a:cs typeface="Arial" panose="020B0604020202020204" pitchFamily="34" charset="0"/>
               </a:rPr>
@@ -10871,9 +10285,6 @@
             </a:r>
             <a:r>
               <a:rPr lang="en-US" sz="1200" dirty="0" err="1">
-                <a:highlight>
-                  <a:srgbClr val="FFFF00"/>
-                </a:highlight>
                 <a:latin typeface="Arial" panose="020B0604020202020204" pitchFamily="34" charset="0"/>
                 <a:cs typeface="Arial" panose="020B0604020202020204" pitchFamily="34" charset="0"/>
               </a:rPr>
@@ -10881,9 +10292,6 @@
             </a:r>
             <a:r>
               <a:rPr lang="en-US" sz="1200" dirty="0">
-                <a:highlight>
-                  <a:srgbClr val="FFFF00"/>
-                </a:highlight>
                 <a:latin typeface="Arial" panose="020B0604020202020204" pitchFamily="34" charset="0"/>
                 <a:cs typeface="Arial" panose="020B0604020202020204" pitchFamily="34" charset="0"/>
               </a:rPr>
@@ -10891,9 +10299,6 @@
             </a:r>
             <a:r>
               <a:rPr lang="en-US" sz="1200" dirty="0" err="1">
-                <a:highlight>
-                  <a:srgbClr val="FFFF00"/>
-                </a:highlight>
                 <a:latin typeface="Arial" panose="020B0604020202020204" pitchFamily="34" charset="0"/>
                 <a:cs typeface="Arial" panose="020B0604020202020204" pitchFamily="34" charset="0"/>
               </a:rPr>
@@ -10901,9 +10306,6 @@
             </a:r>
             <a:r>
               <a:rPr lang="en-US" sz="1200" dirty="0">
-                <a:highlight>
-                  <a:srgbClr val="FFFF00"/>
-                </a:highlight>
                 <a:latin typeface="Arial" panose="020B0604020202020204" pitchFamily="34" charset="0"/>
                 <a:cs typeface="Arial" panose="020B0604020202020204" pitchFamily="34" charset="0"/>
               </a:rPr>
@@ -10911,9 +10313,6 @@
             </a:r>
             <a:r>
               <a:rPr lang="en-US" sz="1200" dirty="0" err="1">
-                <a:highlight>
-                  <a:srgbClr val="FFFF00"/>
-                </a:highlight>
                 <a:latin typeface="Arial" panose="020B0604020202020204" pitchFamily="34" charset="0"/>
                 <a:cs typeface="Arial" panose="020B0604020202020204" pitchFamily="34" charset="0"/>
               </a:rPr>
@@ -10921,9 +10320,6 @@
             </a:r>
             <a:r>
               <a:rPr lang="en-US" sz="1200" dirty="0">
-                <a:highlight>
-                  <a:srgbClr val="FFFF00"/>
-                </a:highlight>
                 <a:latin typeface="Arial" panose="020B0604020202020204" pitchFamily="34" charset="0"/>
                 <a:cs typeface="Arial" panose="020B0604020202020204" pitchFamily="34" charset="0"/>
               </a:rPr>
@@ -10931,9 +10327,6 @@
             </a:r>
             <a:r>
               <a:rPr lang="en-US" sz="1200" dirty="0" err="1">
-                <a:highlight>
-                  <a:srgbClr val="FFFF00"/>
-                </a:highlight>
                 <a:latin typeface="Arial" panose="020B0604020202020204" pitchFamily="34" charset="0"/>
                 <a:cs typeface="Arial" panose="020B0604020202020204" pitchFamily="34" charset="0"/>
               </a:rPr>
@@ -10941,9 +10334,6 @@
             </a:r>
             <a:r>
               <a:rPr lang="en-US" sz="1200" dirty="0">
-                <a:highlight>
-                  <a:srgbClr val="FFFF00"/>
-                </a:highlight>
                 <a:latin typeface="Arial" panose="020B0604020202020204" pitchFamily="34" charset="0"/>
                 <a:cs typeface="Arial" panose="020B0604020202020204" pitchFamily="34" charset="0"/>
               </a:rPr>
@@ -10951,9 +10341,6 @@
             </a:r>
             <a:r>
               <a:rPr lang="en-US" sz="1200" dirty="0" err="1">
-                <a:highlight>
-                  <a:srgbClr val="FFFF00"/>
-                </a:highlight>
                 <a:latin typeface="Arial" panose="020B0604020202020204" pitchFamily="34" charset="0"/>
                 <a:cs typeface="Arial" panose="020B0604020202020204" pitchFamily="34" charset="0"/>
               </a:rPr>
@@ -10961,9 +10348,6 @@
             </a:r>
             <a:r>
               <a:rPr lang="en-US" sz="1200" dirty="0">
-                <a:highlight>
-                  <a:srgbClr val="FFFF00"/>
-                </a:highlight>
                 <a:latin typeface="Arial" panose="020B0604020202020204" pitchFamily="34" charset="0"/>
                 <a:cs typeface="Arial" panose="020B0604020202020204" pitchFamily="34" charset="0"/>
               </a:rPr>
@@ -10971,9 +10355,6 @@
             </a:r>
             <a:r>
               <a:rPr lang="en-US" sz="1200" dirty="0" err="1">
-                <a:highlight>
-                  <a:srgbClr val="FFFF00"/>
-                </a:highlight>
                 <a:latin typeface="Arial" panose="020B0604020202020204" pitchFamily="34" charset="0"/>
                 <a:cs typeface="Arial" panose="020B0604020202020204" pitchFamily="34" charset="0"/>
               </a:rPr>
@@ -10981,19 +10362,13 @@
             </a:r>
             <a:r>
               <a:rPr lang="en-US" sz="1200" dirty="0">
-                <a:highlight>
-                  <a:srgbClr val="FFFF00"/>
-                </a:highlight>
-                <a:latin typeface="Arial" panose="020B0604020202020204" pitchFamily="34" charset="0"/>
-                <a:cs typeface="Arial" panose="020B0604020202020204" pitchFamily="34" charset="0"/>
-              </a:rPr>
-              <a:t> un ancho de 1,27 um, a </a:t>
+                <a:latin typeface="Arial" panose="020B0604020202020204" pitchFamily="34" charset="0"/>
+                <a:cs typeface="Arial" panose="020B0604020202020204" pitchFamily="34" charset="0"/>
+              </a:rPr>
+              <a:t> un ancho de 1.27 um, a </a:t>
             </a:r>
             <a:r>
               <a:rPr lang="en-US" sz="1200" dirty="0" err="1">
-                <a:highlight>
-                  <a:srgbClr val="FFFF00"/>
-                </a:highlight>
                 <a:latin typeface="Arial" panose="020B0604020202020204" pitchFamily="34" charset="0"/>
                 <a:cs typeface="Arial" panose="020B0604020202020204" pitchFamily="34" charset="0"/>
               </a:rPr>
@@ -11001,9 +10376,6 @@
             </a:r>
             <a:r>
               <a:rPr lang="en-US" sz="1200" dirty="0">
-                <a:highlight>
-                  <a:srgbClr val="FFFF00"/>
-                </a:highlight>
                 <a:latin typeface="Arial" panose="020B0604020202020204" pitchFamily="34" charset="0"/>
                 <a:cs typeface="Arial" panose="020B0604020202020204" pitchFamily="34" charset="0"/>
               </a:rPr>
@@ -11011,9 +10383,6 @@
             </a:r>
             <a:r>
               <a:rPr lang="en-US" sz="1200" dirty="0" err="1">
-                <a:highlight>
-                  <a:srgbClr val="FFFF00"/>
-                </a:highlight>
                 <a:latin typeface="Arial" panose="020B0604020202020204" pitchFamily="34" charset="0"/>
                 <a:cs typeface="Arial" panose="020B0604020202020204" pitchFamily="34" charset="0"/>
               </a:rPr>
@@ -11021,9 +10390,6 @@
             </a:r>
             <a:r>
               <a:rPr lang="en-US" sz="1200" dirty="0">
-                <a:highlight>
-                  <a:srgbClr val="FFFF00"/>
-                </a:highlight>
                 <a:latin typeface="Arial" panose="020B0604020202020204" pitchFamily="34" charset="0"/>
                 <a:cs typeface="Arial" panose="020B0604020202020204" pitchFamily="34" charset="0"/>
               </a:rPr>
@@ -11031,9 +10397,6 @@
             </a:r>
             <a:r>
               <a:rPr lang="en-US" sz="1200" dirty="0" err="1">
-                <a:highlight>
-                  <a:srgbClr val="FFFF00"/>
-                </a:highlight>
                 <a:latin typeface="Arial" panose="020B0604020202020204" pitchFamily="34" charset="0"/>
                 <a:cs typeface="Arial" panose="020B0604020202020204" pitchFamily="34" charset="0"/>
               </a:rPr>
@@ -11041,9 +10404,6 @@
             </a:r>
             <a:r>
               <a:rPr lang="en-US" sz="1200" dirty="0">
-                <a:highlight>
-                  <a:srgbClr val="FFFF00"/>
-                </a:highlight>
                 <a:latin typeface="Arial" panose="020B0604020202020204" pitchFamily="34" charset="0"/>
                 <a:cs typeface="Arial" panose="020B0604020202020204" pitchFamily="34" charset="0"/>
               </a:rPr>
@@ -11051,9 +10411,6 @@
             </a:r>
             <a:r>
               <a:rPr lang="en-US" sz="1200" dirty="0" err="1">
-                <a:highlight>
-                  <a:srgbClr val="FFFF00"/>
-                </a:highlight>
                 <a:latin typeface="Arial" panose="020B0604020202020204" pitchFamily="34" charset="0"/>
                 <a:cs typeface="Arial" panose="020B0604020202020204" pitchFamily="34" charset="0"/>
               </a:rPr>
@@ -11061,9 +10418,6 @@
             </a:r>
             <a:r>
               <a:rPr lang="en-US" sz="1200" dirty="0">
-                <a:highlight>
-                  <a:srgbClr val="FFFF00"/>
-                </a:highlight>
                 <a:latin typeface="Arial" panose="020B0604020202020204" pitchFamily="34" charset="0"/>
                 <a:cs typeface="Arial" panose="020B0604020202020204" pitchFamily="34" charset="0"/>
               </a:rPr>
@@ -11071,9 +10425,6 @@
             </a:r>
             <a:r>
               <a:rPr lang="en-US" sz="1200" dirty="0" err="1">
-                <a:highlight>
-                  <a:srgbClr val="FFFF00"/>
-                </a:highlight>
                 <a:latin typeface="Arial" panose="020B0604020202020204" pitchFamily="34" charset="0"/>
                 <a:cs typeface="Arial" panose="020B0604020202020204" pitchFamily="34" charset="0"/>
               </a:rPr>
@@ -11081,9 +10432,6 @@
             </a:r>
             <a:r>
               <a:rPr lang="en-US" sz="1200" dirty="0">
-                <a:highlight>
-                  <a:srgbClr val="FFFF00"/>
-                </a:highlight>
                 <a:latin typeface="Arial" panose="020B0604020202020204" pitchFamily="34" charset="0"/>
                 <a:cs typeface="Arial" panose="020B0604020202020204" pitchFamily="34" charset="0"/>
               </a:rPr>
@@ -11091,9 +10439,6 @@
             </a:r>
             <a:r>
               <a:rPr lang="en-US" sz="1200" dirty="0" err="1">
-                <a:highlight>
-                  <a:srgbClr val="FFFF00"/>
-                </a:highlight>
                 <a:latin typeface="Arial" panose="020B0604020202020204" pitchFamily="34" charset="0"/>
                 <a:cs typeface="Arial" panose="020B0604020202020204" pitchFamily="34" charset="0"/>
               </a:rPr>
@@ -11101,19 +10446,13 @@
             </a:r>
             <a:r>
               <a:rPr lang="en-US" sz="1200" dirty="0">
-                <a:highlight>
-                  <a:srgbClr val="FFFF00"/>
-                </a:highlight>
-                <a:latin typeface="Arial" panose="020B0604020202020204" pitchFamily="34" charset="0"/>
-                <a:cs typeface="Arial" panose="020B0604020202020204" pitchFamily="34" charset="0"/>
-              </a:rPr>
-              <a:t> TE0 y TM0) y para </a:t>
+                <a:latin typeface="Arial" panose="020B0604020202020204" pitchFamily="34" charset="0"/>
+                <a:cs typeface="Arial" panose="020B0604020202020204" pitchFamily="34" charset="0"/>
+              </a:rPr>
+              <a:t> TE0, TM0 y TE1) y para </a:t>
             </a:r>
             <a:r>
               <a:rPr lang="en-US" sz="1200" dirty="0" err="1">
-                <a:highlight>
-                  <a:srgbClr val="FFFF00"/>
-                </a:highlight>
                 <a:latin typeface="Arial" panose="020B0604020202020204" pitchFamily="34" charset="0"/>
                 <a:cs typeface="Arial" panose="020B0604020202020204" pitchFamily="34" charset="0"/>
               </a:rPr>
@@ -11121,9 +10460,6 @@
             </a:r>
             <a:r>
               <a:rPr lang="en-US" sz="1200" dirty="0">
-                <a:highlight>
-                  <a:srgbClr val="FFFF00"/>
-                </a:highlight>
                 <a:latin typeface="Arial" panose="020B0604020202020204" pitchFamily="34" charset="0"/>
                 <a:cs typeface="Arial" panose="020B0604020202020204" pitchFamily="34" charset="0"/>
               </a:rPr>
@@ -11131,9 +10467,6 @@
             </a:r>
             <a:r>
               <a:rPr lang="en-US" sz="1200" dirty="0" err="1">
-                <a:highlight>
-                  <a:srgbClr val="FFFF00"/>
-                </a:highlight>
                 <a:latin typeface="Arial" panose="020B0604020202020204" pitchFamily="34" charset="0"/>
                 <a:cs typeface="Arial" panose="020B0604020202020204" pitchFamily="34" charset="0"/>
               </a:rPr>
@@ -11141,9 +10474,6 @@
             </a:r>
             <a:r>
               <a:rPr lang="en-US" sz="1200" dirty="0">
-                <a:highlight>
-                  <a:srgbClr val="FFFF00"/>
-                </a:highlight>
                 <a:latin typeface="Arial" panose="020B0604020202020204" pitchFamily="34" charset="0"/>
                 <a:cs typeface="Arial" panose="020B0604020202020204" pitchFamily="34" charset="0"/>
               </a:rPr>
@@ -11151,9 +10481,6 @@
             </a:r>
             <a:r>
               <a:rPr lang="en-US" sz="1200" dirty="0" err="1">
-                <a:highlight>
-                  <a:srgbClr val="FFFF00"/>
-                </a:highlight>
                 <a:latin typeface="Arial" panose="020B0604020202020204" pitchFamily="34" charset="0"/>
                 <a:cs typeface="Arial" panose="020B0604020202020204" pitchFamily="34" charset="0"/>
               </a:rPr>
@@ -11161,51 +10488,11 @@
             </a:r>
             <a:r>
               <a:rPr lang="en-US" sz="1200" dirty="0">
-                <a:highlight>
-                  <a:srgbClr val="FFFF00"/>
-                </a:highlight>
-                <a:latin typeface="Arial" panose="020B0604020202020204" pitchFamily="34" charset="0"/>
-                <a:cs typeface="Arial" panose="020B0604020202020204" pitchFamily="34" charset="0"/>
-              </a:rPr>
-              <a:t> TE0, TM0 y TE1).</a:t>
-            </a:r>
-          </a:p>
-          <a:p>
-            <a:pPr algn="just"/>
-            <a:endParaRPr lang="en-US" sz="1200" dirty="0">
-              <a:latin typeface="Arial" panose="020B0604020202020204" pitchFamily="34" charset="0"/>
-              <a:cs typeface="Arial" panose="020B0604020202020204" pitchFamily="34" charset="0"/>
-            </a:endParaRPr>
-          </a:p>
-          <a:p>
-            <a:pPr algn="just"/>
-            <a:r>
-              <a:rPr lang="en-US" sz="1200" dirty="0">
-                <a:solidFill>
-                  <a:srgbClr val="FF0000"/>
-                </a:solidFill>
-                <a:highlight>
-                  <a:srgbClr val="FFFF00"/>
-                </a:highlight>
-                <a:latin typeface="Arial" panose="020B0604020202020204" pitchFamily="34" charset="0"/>
-                <a:cs typeface="Arial" panose="020B0604020202020204" pitchFamily="34" charset="0"/>
-              </a:rPr>
-              <a:t>COMENTAR: MONOMODO HASTA UN VALOR DE W Y LUEGO MULTIMODO.</a:t>
-            </a:r>
-          </a:p>
-          <a:p>
-            <a:pPr algn="just"/>
-            <a:endParaRPr lang="en-US" sz="1200" dirty="0">
-              <a:latin typeface="Arial" panose="020B0604020202020204" pitchFamily="34" charset="0"/>
-              <a:cs typeface="Arial" panose="020B0604020202020204" pitchFamily="34" charset="0"/>
-            </a:endParaRPr>
-          </a:p>
-          <a:p>
-            <a:pPr algn="just"/>
-            <a:endParaRPr lang="en-US" sz="1200" dirty="0">
-              <a:latin typeface="Arial" panose="020B0604020202020204" pitchFamily="34" charset="0"/>
-              <a:cs typeface="Arial" panose="020B0604020202020204" pitchFamily="34" charset="0"/>
-            </a:endParaRPr>
+                <a:latin typeface="Arial" panose="020B0604020202020204" pitchFamily="34" charset="0"/>
+                <a:cs typeface="Arial" panose="020B0604020202020204" pitchFamily="34" charset="0"/>
+              </a:rPr>
+              <a:t> TE0 y TM0).</a:t>
+            </a:r>
           </a:p>
         </p:txBody>
       </p:sp>
@@ -11304,7 +10591,7 @@
 </p:sld>
 </file>
 
-<file path=ppt/slides/slide9.xml><?xml version="1.0" encoding="utf-8"?>
+<file path=ppt/slides/slide8.xml><?xml version="1.0" encoding="utf-8"?>
 <p:sld xmlns:a="http://schemas.openxmlformats.org/drawingml/2006/main" xmlns:r="http://schemas.openxmlformats.org/officeDocument/2006/relationships" xmlns:p="http://schemas.openxmlformats.org/presentationml/2006/main">
   <p:cSld>
     <p:spTree>
@@ -11468,7 +10755,7 @@
           <a:p>
             <a:fld id="{B6F15528-21DE-4FAA-801E-634DDDAF4B2B}" type="slidenum">
               <a:rPr lang="es-ES" smtClean="0"/>
-              <a:t>9</a:t>
+              <a:t>8</a:t>
             </a:fld>
             <a:endParaRPr lang="es-ES"/>
           </a:p>
@@ -11522,7 +10809,7 @@
         </p:nvSpPr>
         <p:spPr>
           <a:xfrm>
-            <a:off x="609441" y="4419600"/>
+            <a:off x="609441" y="3928489"/>
             <a:ext cx="5261137" cy="1169551"/>
           </a:xfrm>
           <a:prstGeom prst="rect">
@@ -11589,7 +10876,7 @@
                 <a:latin typeface="Arial" panose="020B0604020202020204" pitchFamily="34" charset="0"/>
                 <a:cs typeface="Arial" panose="020B0604020202020204" pitchFamily="34" charset="0"/>
               </a:rPr>
-              <a:t>=1550um) </a:t>
+              <a:t>=1550nm) </a:t>
             </a:r>
             <a:r>
               <a:rPr lang="es-ES" sz="1000" b="1" dirty="0" err="1">
@@ -11662,7 +10949,7 @@
                 <a:latin typeface="Arial" panose="020B0604020202020204" pitchFamily="34" charset="0"/>
                 <a:cs typeface="Arial" panose="020B0604020202020204" pitchFamily="34" charset="0"/>
               </a:rPr>
-              <a:t>=1550um) </a:t>
+              <a:t>=1550nm) </a:t>
             </a:r>
             <a:r>
               <a:rPr lang="es-ES" sz="1000" b="1" dirty="0" err="1">
@@ -11735,7 +11022,7 @@
                 <a:latin typeface="Arial" panose="020B0604020202020204" pitchFamily="34" charset="0"/>
                 <a:cs typeface="Arial" panose="020B0604020202020204" pitchFamily="34" charset="0"/>
               </a:rPr>
-              <a:t>=1550um) </a:t>
+              <a:t>=1550nm) </a:t>
             </a:r>
             <a:r>
               <a:rPr lang="es-ES" sz="1000" b="1" dirty="0" err="1">
@@ -11801,7 +11088,7 @@
                 <a:latin typeface="Arial" panose="020B0604020202020204" pitchFamily="34" charset="0"/>
                 <a:cs typeface="Arial" panose="020B0604020202020204" pitchFamily="34" charset="0"/>
               </a:rPr>
-              <a:t>=1550um) </a:t>
+              <a:t>=1550nm) </a:t>
             </a:r>
             <a:r>
               <a:rPr lang="es-ES" sz="1000" b="1" dirty="0" err="1">
@@ -11874,7 +11161,7 @@
                 <a:latin typeface="Arial" panose="020B0604020202020204" pitchFamily="34" charset="0"/>
                 <a:cs typeface="Arial" panose="020B0604020202020204" pitchFamily="34" charset="0"/>
               </a:rPr>
-              <a:t>=1550um) </a:t>
+              <a:t>=1550nm) </a:t>
             </a:r>
             <a:r>
               <a:rPr lang="es-ES" sz="1000" b="1" dirty="0" err="1">
@@ -11947,7 +11234,7 @@
                 <a:latin typeface="Arial" panose="020B0604020202020204" pitchFamily="34" charset="0"/>
                 <a:cs typeface="Arial" panose="020B0604020202020204" pitchFamily="34" charset="0"/>
               </a:rPr>
-              <a:t>=1550um) </a:t>
+              <a:t>=1550nm) </a:t>
             </a:r>
             <a:r>
               <a:rPr lang="es-ES" sz="1000" b="1" dirty="0" err="1">
@@ -12013,7 +11300,7 @@
         <p:spPr>
           <a:xfrm>
             <a:off x="609442" y="1447800"/>
-            <a:ext cx="5261136" cy="2971800"/>
+            <a:ext cx="5261136" cy="2479079"/>
           </a:xfrm>
           <a:prstGeom prst="rect">
             <a:avLst/>
@@ -12065,7 +11352,7 @@
         <p:spPr>
           <a:xfrm>
             <a:off x="6245224" y="1447800"/>
-            <a:ext cx="5209357" cy="2966289"/>
+            <a:ext cx="5209357" cy="2479079"/>
           </a:xfrm>
           <a:prstGeom prst="rect">
             <a:avLst/>
@@ -12118,14 +11405,15 @@
         </p:nvPicPr>
         <p:blipFill>
           <a:blip r:embed="rId5"/>
+          <a:srcRect/>
           <a:stretch>
             <a:fillRect/>
           </a:stretch>
         </p:blipFill>
         <p:spPr>
           <a:xfrm>
-            <a:off x="1354082" y="1476375"/>
-            <a:ext cx="3690924" cy="2915574"/>
+            <a:off x="1703264" y="1507145"/>
+            <a:ext cx="3050679" cy="2409826"/>
           </a:xfrm>
           <a:prstGeom prst="rect">
             <a:avLst/>
@@ -12154,8 +11442,8 @@
         </p:blipFill>
         <p:spPr>
           <a:xfrm>
-            <a:off x="7002011" y="1489249"/>
-            <a:ext cx="3695781" cy="2919410"/>
+            <a:off x="7493554" y="1507144"/>
+            <a:ext cx="3050679" cy="2409825"/>
           </a:xfrm>
           <a:prstGeom prst="rect">
             <a:avLst/>
@@ -12176,7 +11464,7 @@
         </p:nvSpPr>
         <p:spPr>
           <a:xfrm>
-            <a:off x="6248400" y="4419600"/>
+            <a:off x="6245224" y="3928488"/>
             <a:ext cx="5206181" cy="1169551"/>
           </a:xfrm>
           <a:prstGeom prst="rect">
@@ -12252,7 +11540,7 @@
                 <a:latin typeface="Arial" panose="020B0604020202020204" pitchFamily="34" charset="0"/>
                 <a:cs typeface="Arial" panose="020B0604020202020204" pitchFamily="34" charset="0"/>
               </a:rPr>
-              <a:t>=1550um) </a:t>
+              <a:t>=1550nm) </a:t>
             </a:r>
             <a:r>
               <a:rPr lang="es-ES" sz="1000" b="1" dirty="0" err="1">
@@ -12324,7 +11612,7 @@
                 <a:latin typeface="Arial" panose="020B0604020202020204" pitchFamily="34" charset="0"/>
                 <a:cs typeface="Arial" panose="020B0604020202020204" pitchFamily="34" charset="0"/>
               </a:rPr>
-              <a:t>=1550um) </a:t>
+              <a:t>=1550nm) </a:t>
             </a:r>
             <a:r>
               <a:rPr lang="es-ES" sz="1000" b="1" dirty="0" err="1">
@@ -12396,7 +11684,7 @@
                 <a:latin typeface="Arial" panose="020B0604020202020204" pitchFamily="34" charset="0"/>
                 <a:cs typeface="Arial" panose="020B0604020202020204" pitchFamily="34" charset="0"/>
               </a:rPr>
-              <a:t>=1550um) </a:t>
+              <a:t>=1550nm) </a:t>
             </a:r>
             <a:r>
               <a:rPr lang="es-ES" sz="1000" b="1" dirty="0" err="1">
@@ -12461,7 +11749,7 @@
                 <a:latin typeface="Arial" panose="020B0604020202020204" pitchFamily="34" charset="0"/>
                 <a:cs typeface="Arial" panose="020B0604020202020204" pitchFamily="34" charset="0"/>
               </a:rPr>
-              <a:t>=1550um) </a:t>
+              <a:t>=1550nm) </a:t>
             </a:r>
             <a:r>
               <a:rPr lang="es-ES" sz="1000" b="1" dirty="0" err="1">
@@ -12533,7 +11821,7 @@
                 <a:latin typeface="Arial" panose="020B0604020202020204" pitchFamily="34" charset="0"/>
                 <a:cs typeface="Arial" panose="020B0604020202020204" pitchFamily="34" charset="0"/>
               </a:rPr>
-              <a:t>=1550um) </a:t>
+              <a:t>=1550nm) </a:t>
             </a:r>
             <a:r>
               <a:rPr lang="es-ES" sz="1000" b="1" dirty="0" err="1">
@@ -12605,7 +11893,7 @@
                 <a:latin typeface="Arial" panose="020B0604020202020204" pitchFamily="34" charset="0"/>
                 <a:cs typeface="Arial" panose="020B0604020202020204" pitchFamily="34" charset="0"/>
               </a:rPr>
-              <a:t>=1550um) </a:t>
+              <a:t>=1550nm) </a:t>
             </a:r>
             <a:r>
               <a:rPr lang="es-ES" sz="1000" b="1" dirty="0" err="1">
@@ -12670,8 +11958,8 @@
         </p:nvSpPr>
         <p:spPr>
           <a:xfrm>
-            <a:off x="609440" y="5588903"/>
-            <a:ext cx="10845141" cy="769441"/>
+            <a:off x="609441" y="5098039"/>
+            <a:ext cx="10845141" cy="1200329"/>
           </a:xfrm>
           <a:prstGeom prst="rect">
             <a:avLst/>
@@ -12695,358 +11983,21 @@
           <a:p>
             <a:pPr algn="just"/>
             <a:r>
-              <a:rPr lang="en-US" sz="1200" dirty="0">
-                <a:solidFill>
-                  <a:srgbClr val="FF0000"/>
-                </a:solidFill>
-              </a:rPr>
-              <a:t>Se ha </a:t>
-            </a:r>
-            <a:r>
-              <a:rPr lang="en-US" sz="1200" dirty="0" err="1">
-                <a:solidFill>
-                  <a:srgbClr val="FF0000"/>
-                </a:solidFill>
-              </a:rPr>
-              <a:t>conseguido</a:t>
-            </a:r>
-            <a:r>
-              <a:rPr lang="en-US" sz="1200" dirty="0">
-                <a:solidFill>
-                  <a:srgbClr val="FF0000"/>
-                </a:solidFill>
-              </a:rPr>
-              <a:t> </a:t>
-            </a:r>
-            <a:r>
-              <a:rPr lang="en-US" sz="1200" dirty="0" err="1">
-                <a:solidFill>
-                  <a:srgbClr val="FF0000"/>
-                </a:solidFill>
-              </a:rPr>
-              <a:t>ajustar</a:t>
-            </a:r>
-            <a:r>
-              <a:rPr lang="en-US" sz="1200" dirty="0">
-                <a:solidFill>
-                  <a:srgbClr val="FF0000"/>
-                </a:solidFill>
-              </a:rPr>
-              <a:t> un </a:t>
-            </a:r>
-            <a:r>
-              <a:rPr lang="en-US" sz="1200" dirty="0" err="1">
-                <a:solidFill>
-                  <a:srgbClr val="FF0000"/>
-                </a:solidFill>
-              </a:rPr>
-              <a:t>polinomio</a:t>
-            </a:r>
-            <a:r>
-              <a:rPr lang="en-US" sz="1200" dirty="0">
-                <a:solidFill>
-                  <a:srgbClr val="FF0000"/>
-                </a:solidFill>
-              </a:rPr>
-              <a:t> de </a:t>
-            </a:r>
-            <a:r>
-              <a:rPr lang="en-US" sz="1200" dirty="0" err="1">
-                <a:solidFill>
-                  <a:srgbClr val="FF0000"/>
-                </a:solidFill>
-              </a:rPr>
-              <a:t>segundo</a:t>
-            </a:r>
-            <a:r>
-              <a:rPr lang="en-US" sz="1200" dirty="0">
-                <a:solidFill>
-                  <a:srgbClr val="FF0000"/>
-                </a:solidFill>
-              </a:rPr>
-              <a:t> </a:t>
-            </a:r>
-            <a:r>
-              <a:rPr lang="en-US" sz="1200" dirty="0" err="1">
-                <a:solidFill>
-                  <a:srgbClr val="FF0000"/>
-                </a:solidFill>
-              </a:rPr>
-              <a:t>grado</a:t>
-            </a:r>
-            <a:r>
-              <a:rPr lang="en-US" sz="1200" dirty="0">
-                <a:solidFill>
-                  <a:srgbClr val="FF0000"/>
-                </a:solidFill>
-              </a:rPr>
-              <a:t> para </a:t>
-            </a:r>
-            <a:r>
-              <a:rPr lang="en-US" sz="1200" dirty="0" err="1">
-                <a:solidFill>
-                  <a:srgbClr val="FF0000"/>
-                </a:solidFill>
-              </a:rPr>
-              <a:t>modelar</a:t>
-            </a:r>
-            <a:r>
-              <a:rPr lang="en-US" sz="1200" dirty="0">
-                <a:solidFill>
-                  <a:srgbClr val="FF0000"/>
-                </a:solidFill>
-              </a:rPr>
-              <a:t> la </a:t>
-            </a:r>
-            <a:r>
-              <a:rPr lang="en-US" sz="1200" dirty="0" err="1">
-                <a:solidFill>
-                  <a:srgbClr val="FF0000"/>
-                </a:solidFill>
-              </a:rPr>
-              <a:t>respuesta</a:t>
-            </a:r>
-            <a:r>
-              <a:rPr lang="en-US" sz="1200" dirty="0">
-                <a:solidFill>
-                  <a:srgbClr val="FF0000"/>
-                </a:solidFill>
-              </a:rPr>
-              <a:t> del </a:t>
-            </a:r>
-            <a:r>
-              <a:rPr lang="en-US" sz="1200" dirty="0" err="1">
-                <a:solidFill>
-                  <a:srgbClr val="FF0000"/>
-                </a:solidFill>
-              </a:rPr>
-              <a:t>índice</a:t>
-            </a:r>
-            <a:r>
-              <a:rPr lang="en-US" sz="1200" dirty="0">
-                <a:solidFill>
-                  <a:srgbClr val="FF0000"/>
-                </a:solidFill>
-              </a:rPr>
-              <a:t> </a:t>
-            </a:r>
-            <a:r>
-              <a:rPr lang="en-US" sz="1200" dirty="0" err="1">
-                <a:solidFill>
-                  <a:srgbClr val="FF0000"/>
-                </a:solidFill>
-              </a:rPr>
-              <a:t>efectivo</a:t>
-            </a:r>
-            <a:r>
-              <a:rPr lang="en-US" sz="1200" dirty="0">
-                <a:solidFill>
-                  <a:srgbClr val="FF0000"/>
-                </a:solidFill>
-              </a:rPr>
-              <a:t> y </a:t>
-            </a:r>
-            <a:r>
-              <a:rPr lang="en-US" sz="1200" dirty="0" err="1">
-                <a:solidFill>
-                  <a:srgbClr val="FF0000"/>
-                </a:solidFill>
-              </a:rPr>
-              <a:t>así</a:t>
-            </a:r>
-            <a:r>
-              <a:rPr lang="en-US" sz="1200" dirty="0">
-                <a:solidFill>
-                  <a:srgbClr val="FF0000"/>
-                </a:solidFill>
-              </a:rPr>
-              <a:t> </a:t>
-            </a:r>
-            <a:r>
-              <a:rPr lang="en-US" sz="1200" dirty="0" err="1">
-                <a:solidFill>
-                  <a:srgbClr val="FF0000"/>
-                </a:solidFill>
-              </a:rPr>
-              <a:t>conseguir</a:t>
-            </a:r>
-            <a:r>
-              <a:rPr lang="en-US" sz="1200" dirty="0">
-                <a:solidFill>
-                  <a:srgbClr val="FF0000"/>
-                </a:solidFill>
-              </a:rPr>
-              <a:t> </a:t>
-            </a:r>
-            <a:r>
-              <a:rPr lang="en-US" sz="1200" dirty="0" err="1">
-                <a:solidFill>
-                  <a:srgbClr val="FF0000"/>
-                </a:solidFill>
-              </a:rPr>
-              <a:t>calcular</a:t>
-            </a:r>
-            <a:r>
-              <a:rPr lang="en-US" sz="1200" dirty="0">
-                <a:solidFill>
-                  <a:srgbClr val="FF0000"/>
-                </a:solidFill>
-              </a:rPr>
-              <a:t> </a:t>
-            </a:r>
-            <a:r>
-              <a:rPr lang="en-US" sz="1200" dirty="0" err="1">
-                <a:solidFill>
-                  <a:srgbClr val="FF0000"/>
-                </a:solidFill>
-              </a:rPr>
-              <a:t>los</a:t>
-            </a:r>
-            <a:r>
-              <a:rPr lang="en-US" sz="1200" dirty="0">
-                <a:solidFill>
-                  <a:srgbClr val="FF0000"/>
-                </a:solidFill>
-              </a:rPr>
-              <a:t> </a:t>
-            </a:r>
-            <a:r>
-              <a:rPr lang="en-US" sz="1200" dirty="0" err="1">
-                <a:solidFill>
-                  <a:srgbClr val="FF0000"/>
-                </a:solidFill>
-              </a:rPr>
-              <a:t>parámetros</a:t>
-            </a:r>
-            <a:r>
-              <a:rPr lang="en-US" sz="1200" dirty="0">
-                <a:solidFill>
-                  <a:srgbClr val="FF0000"/>
-                </a:solidFill>
-              </a:rPr>
-              <a:t> de dispersion e </a:t>
-            </a:r>
-            <a:r>
-              <a:rPr lang="en-US" sz="1200" dirty="0" err="1">
-                <a:solidFill>
-                  <a:srgbClr val="FF0000"/>
-                </a:solidFill>
-              </a:rPr>
-              <a:t>índice</a:t>
-            </a:r>
-            <a:r>
-              <a:rPr lang="en-US" sz="1200" dirty="0">
-                <a:solidFill>
-                  <a:srgbClr val="FF0000"/>
-                </a:solidFill>
-              </a:rPr>
-              <a:t> de </a:t>
-            </a:r>
-            <a:r>
-              <a:rPr lang="en-US" sz="1200" dirty="0" err="1">
-                <a:solidFill>
-                  <a:srgbClr val="FF0000"/>
-                </a:solidFill>
-              </a:rPr>
-              <a:t>grupo</a:t>
-            </a:r>
-            <a:r>
-              <a:rPr lang="en-US" sz="1200" dirty="0">
-                <a:solidFill>
-                  <a:srgbClr val="FF0000"/>
-                </a:solidFill>
-              </a:rPr>
-              <a:t> </a:t>
-            </a:r>
-            <a:r>
-              <a:rPr lang="en-US" sz="1200" dirty="0" err="1">
-                <a:solidFill>
-                  <a:srgbClr val="FF0000"/>
-                </a:solidFill>
-              </a:rPr>
-              <a:t>en</a:t>
-            </a:r>
-            <a:r>
-              <a:rPr lang="en-US" sz="1200" dirty="0">
-                <a:solidFill>
-                  <a:srgbClr val="FF0000"/>
-                </a:solidFill>
-              </a:rPr>
-              <a:t> </a:t>
-            </a:r>
-            <a:r>
-              <a:rPr lang="en-US" sz="1200" dirty="0" err="1">
-                <a:solidFill>
-                  <a:srgbClr val="FF0000"/>
-                </a:solidFill>
-              </a:rPr>
-              <a:t>cada</a:t>
-            </a:r>
-            <a:r>
-              <a:rPr lang="en-US" sz="1200" dirty="0">
-                <a:solidFill>
-                  <a:srgbClr val="FF0000"/>
-                </a:solidFill>
-              </a:rPr>
-              <a:t> </a:t>
-            </a:r>
-            <a:r>
-              <a:rPr lang="en-US" sz="1200" dirty="0" err="1">
-                <a:solidFill>
-                  <a:srgbClr val="FF0000"/>
-                </a:solidFill>
-              </a:rPr>
-              <a:t>guía</a:t>
-            </a:r>
-            <a:r>
-              <a:rPr lang="en-US" sz="1200" dirty="0">
-                <a:solidFill>
-                  <a:srgbClr val="FF0000"/>
-                </a:solidFill>
-              </a:rPr>
-              <a:t>.</a:t>
-            </a:r>
-          </a:p>
-          <a:p>
-            <a:pPr marL="171450" indent="-171450" algn="just">
-              <a:buFontTx/>
-              <a:buChar char="-"/>
-            </a:pPr>
-            <a:r>
-              <a:rPr lang="es-ES" sz="1000" dirty="0">
-                <a:solidFill>
-                  <a:srgbClr val="FF0000"/>
-                </a:solidFill>
-              </a:rPr>
-              <a:t>Verificar q </a:t>
-            </a:r>
-            <a:r>
-              <a:rPr lang="es-ES" sz="1000" dirty="0" err="1">
-                <a:solidFill>
-                  <a:srgbClr val="FF0000"/>
-                </a:solidFill>
-              </a:rPr>
-              <a:t>nef</a:t>
-            </a:r>
-            <a:r>
-              <a:rPr lang="es-ES" sz="1000" dirty="0">
-                <a:solidFill>
-                  <a:srgbClr val="FF0000"/>
-                </a:solidFill>
-              </a:rPr>
-              <a:t> coincide a lambda con el esperado.</a:t>
-            </a:r>
-          </a:p>
-          <a:p>
-            <a:pPr marL="171450" indent="-171450" algn="just">
-              <a:buFontTx/>
-              <a:buChar char="-"/>
-            </a:pPr>
-            <a:endParaRPr lang="es-ES" sz="1000" dirty="0">
-              <a:solidFill>
-                <a:srgbClr val="FF0000"/>
-              </a:solidFill>
-            </a:endParaRPr>
+              <a:rPr lang="es-ES" sz="1200" dirty="0">
+                <a:latin typeface="Arial" panose="020B0604020202020204" pitchFamily="34" charset="0"/>
+                <a:cs typeface="Arial" panose="020B0604020202020204" pitchFamily="34" charset="0"/>
+              </a:rPr>
+              <a:t>Se ha ajustado un polinomio de segundo grado para modelar la respuesta del índice efectivo con la longitud de onda. Como se observa, este polinomio reproduce prácticamente los mismos valores que la simulación y permite calcular el índice efectivo para cualquier longitud de onda, así como obtener el índice de grupo y la dispersión.</a:t>
+            </a:r>
+          </a:p>
+          <a:p>
+            <a:r>
+              <a:rPr lang="es-ES" sz="1200" dirty="0">
+                <a:latin typeface="Arial" panose="020B0604020202020204" pitchFamily="34" charset="0"/>
+                <a:cs typeface="Arial" panose="020B0604020202020204" pitchFamily="34" charset="0"/>
+              </a:rPr>
+              <a:t>Para ambas guías, el índice efectivo a 1550 nm coincide con el valor obtenido en la simulación. En cuanto al índice de grupo, este es mayor que el índice efectivo, lo que implica que la velocidad de grupo es menor que la velocidad de fase. Además, la dispersión es negativa, lo que indica que las longitudes de onda más cortas se propagan más lentamente que las más largas.</a:t>
+            </a:r>
           </a:p>
         </p:txBody>
       </p:sp>
@@ -13054,6 +12005,468 @@
     <p:extLst>
       <p:ext uri="{BB962C8B-B14F-4D97-AF65-F5344CB8AC3E}">
         <p14:creationId xmlns:p14="http://schemas.microsoft.com/office/powerpoint/2010/main" val="236054401"/>
+      </p:ext>
+    </p:extLst>
+  </p:cSld>
+  <p:clrMapOvr>
+    <a:masterClrMapping/>
+  </p:clrMapOvr>
+</p:sld>
+</file>
+
+<file path=ppt/slides/slide9.xml><?xml version="1.0" encoding="utf-8"?>
+<p:sld xmlns:a="http://schemas.openxmlformats.org/drawingml/2006/main" xmlns:r="http://schemas.openxmlformats.org/officeDocument/2006/relationships" xmlns:p="http://schemas.openxmlformats.org/presentationml/2006/main">
+  <p:cSld>
+    <p:spTree>
+      <p:nvGrpSpPr>
+        <p:cNvPr id="1" name="">
+          <a:extLst>
+            <a:ext uri="{FF2B5EF4-FFF2-40B4-BE49-F238E27FC236}">
+              <a16:creationId xmlns:a16="http://schemas.microsoft.com/office/drawing/2014/main" id="{25434E70-43B1-3881-1771-20FB4358471D}"/>
+            </a:ext>
+          </a:extLst>
+        </p:cNvPr>
+        <p:cNvGrpSpPr/>
+        <p:nvPr/>
+      </p:nvGrpSpPr>
+      <p:grpSpPr>
+        <a:xfrm>
+          <a:off x="0" y="0"/>
+          <a:ext cx="0" cy="0"/>
+          <a:chOff x="0" y="0"/>
+          <a:chExt cx="0" cy="0"/>
+        </a:xfrm>
+      </p:grpSpPr>
+      <p:sp>
+        <p:nvSpPr>
+          <p:cNvPr id="16" name="object 16">
+            <a:extLst>
+              <a:ext uri="{FF2B5EF4-FFF2-40B4-BE49-F238E27FC236}">
+                <a16:creationId xmlns:a16="http://schemas.microsoft.com/office/drawing/2014/main" id="{742C31CE-19F0-B995-0997-9A2D6A879BF7}"/>
+              </a:ext>
+            </a:extLst>
+          </p:cNvPr>
+          <p:cNvSpPr txBox="1">
+            <a:spLocks noGrp="1"/>
+          </p:cNvSpPr>
+          <p:nvPr>
+            <p:ph type="title"/>
+          </p:nvPr>
+        </p:nvSpPr>
+        <p:spPr>
+          <a:xfrm>
+            <a:off x="685800" y="408883"/>
+            <a:ext cx="10994410" cy="1090042"/>
+          </a:xfrm>
+          <a:prstGeom prst="rect">
+            <a:avLst/>
+          </a:prstGeom>
+        </p:spPr>
+        <p:txBody>
+          <a:bodyPr vert="horz" wrap="square" lIns="0" tIns="12700" rIns="0" bIns="0" rtlCol="0">
+            <a:spAutoFit/>
+          </a:bodyPr>
+          <a:lstStyle/>
+          <a:p>
+            <a:pPr marL="12700">
+              <a:lnSpc>
+                <a:spcPct val="100000"/>
+              </a:lnSpc>
+              <a:spcBef>
+                <a:spcPts val="100"/>
+              </a:spcBef>
+            </a:pPr>
+            <a:r>
+              <a:rPr lang="en-US" sz="2500" dirty="0"/>
+              <a:t>Learning outcome #5 – Bend waveguide radius vs. loss – deep</a:t>
+            </a:r>
+            <a:br>
+              <a:rPr lang="en-US" sz="2500" dirty="0"/>
+            </a:br>
+            <a:r>
+              <a:rPr lang="en-US" b="0" dirty="0"/>
+              <a:t>Find  neff_TE0 for </a:t>
+            </a:r>
+            <a:r>
+              <a:rPr lang="en-US" b="0" dirty="0" err="1"/>
+              <a:t>wvl</a:t>
+            </a:r>
+            <a:r>
+              <a:rPr lang="en-US" b="0" dirty="0"/>
+              <a:t> 1.55 µm, width 1.2 µm for R=25,50,75,100, 125,150 µm</a:t>
+            </a:r>
+            <a:br>
+              <a:rPr lang="en-US" sz="2500" dirty="0"/>
+            </a:br>
+            <a:endParaRPr lang="en-US" sz="2500" b="0" dirty="0">
+              <a:latin typeface="+mj-lt"/>
+              <a:cs typeface="Lucida Sans"/>
+            </a:endParaRPr>
+          </a:p>
+        </p:txBody>
+      </p:sp>
+      <p:pic>
+        <p:nvPicPr>
+          <p:cNvPr id="83" name="Gráfico 82">
+            <a:extLst>
+              <a:ext uri="{FF2B5EF4-FFF2-40B4-BE49-F238E27FC236}">
+                <a16:creationId xmlns:a16="http://schemas.microsoft.com/office/drawing/2014/main" id="{D688A609-F3DC-EE34-C536-683E70F32EAE}"/>
+              </a:ext>
+            </a:extLst>
+          </p:cNvPr>
+          <p:cNvPicPr>
+            <a:picLocks noChangeAspect="1"/>
+          </p:cNvPicPr>
+          <p:nvPr/>
+        </p:nvPicPr>
+        <p:blipFill>
+          <a:blip r:embed="rId3">
+            <a:extLst>
+              <a:ext uri="{96DAC541-7B7A-43D3-8B79-37D633B846F1}">
+                <asvg:svgBlip xmlns:asvg="http://schemas.microsoft.com/office/drawing/2016/SVG/main" r:embed="rId4"/>
+              </a:ext>
+            </a:extLst>
+          </a:blip>
+          <a:stretch>
+            <a:fillRect/>
+          </a:stretch>
+        </p:blipFill>
+        <p:spPr>
+          <a:xfrm>
+            <a:off x="5045006" y="6356057"/>
+            <a:ext cx="6409575" cy="363174"/>
+          </a:xfrm>
+          <a:prstGeom prst="rect">
+            <a:avLst/>
+          </a:prstGeom>
+        </p:spPr>
+      </p:pic>
+      <p:sp>
+        <p:nvSpPr>
+          <p:cNvPr id="84" name="Marcador de número de diapositiva 83">
+            <a:extLst>
+              <a:ext uri="{FF2B5EF4-FFF2-40B4-BE49-F238E27FC236}">
+                <a16:creationId xmlns:a16="http://schemas.microsoft.com/office/drawing/2014/main" id="{B6C672C6-89D4-7E67-2B94-811D081786A7}"/>
+              </a:ext>
+            </a:extLst>
+          </p:cNvPr>
+          <p:cNvSpPr>
+            <a:spLocks noGrp="1"/>
+          </p:cNvSpPr>
+          <p:nvPr>
+            <p:ph type="sldNum" sz="quarter" idx="7"/>
+          </p:nvPr>
+        </p:nvSpPr>
+        <p:spPr/>
+        <p:txBody>
+          <a:bodyPr/>
+          <a:lstStyle/>
+          <a:p>
+            <a:fld id="{B6F15528-21DE-4FAA-801E-634DDDAF4B2B}" type="slidenum">
+              <a:rPr lang="es-ES" smtClean="0"/>
+              <a:t>9</a:t>
+            </a:fld>
+            <a:endParaRPr lang="es-ES"/>
+          </a:p>
+        </p:txBody>
+      </p:sp>
+      <p:sp>
+        <p:nvSpPr>
+          <p:cNvPr id="3" name="Marcador de pie de página 2">
+            <a:extLst>
+              <a:ext uri="{FF2B5EF4-FFF2-40B4-BE49-F238E27FC236}">
+                <a16:creationId xmlns:a16="http://schemas.microsoft.com/office/drawing/2014/main" id="{AA1F4313-D710-7A3E-7A8F-EB77DEE3C1A7}"/>
+              </a:ext>
+            </a:extLst>
+          </p:cNvPr>
+          <p:cNvSpPr>
+            <a:spLocks noGrp="1"/>
+          </p:cNvSpPr>
+          <p:nvPr>
+            <p:ph type="ftr" sz="quarter" idx="5"/>
+          </p:nvPr>
+        </p:nvSpPr>
+        <p:spPr/>
+        <p:txBody>
+          <a:bodyPr/>
+          <a:lstStyle/>
+          <a:p>
+            <a:pPr marL="12700">
+              <a:spcBef>
+                <a:spcPts val="15"/>
+              </a:spcBef>
+            </a:pPr>
+            <a:r>
+              <a:rPr lang="es-ES" spc="-5"/>
+              <a:t>LAB 1.0 WAVEGUIDES</a:t>
+            </a:r>
+            <a:endParaRPr lang="es-ES" spc="-5" dirty="0"/>
+          </a:p>
+        </p:txBody>
+      </p:sp>
+      <p:sp>
+        <p:nvSpPr>
+          <p:cNvPr id="2" name="CuadroTexto 1">
+            <a:extLst>
+              <a:ext uri="{FF2B5EF4-FFF2-40B4-BE49-F238E27FC236}">
+                <a16:creationId xmlns:a16="http://schemas.microsoft.com/office/drawing/2014/main" id="{FDE3A197-9508-F9F1-1FEB-FF883D78C151}"/>
+              </a:ext>
+            </a:extLst>
+          </p:cNvPr>
+          <p:cNvSpPr txBox="1"/>
+          <p:nvPr/>
+        </p:nvSpPr>
+        <p:spPr>
+          <a:xfrm>
+            <a:off x="609441" y="4860334"/>
+            <a:ext cx="11199971" cy="1200329"/>
+          </a:xfrm>
+          <a:prstGeom prst="rect">
+            <a:avLst/>
+          </a:prstGeom>
+          <a:solidFill>
+            <a:schemeClr val="bg1">
+              <a:lumMod val="95000"/>
+            </a:schemeClr>
+          </a:solidFill>
+          <a:ln w="28575">
+            <a:solidFill>
+              <a:srgbClr val="E0700D"/>
+            </a:solidFill>
+          </a:ln>
+        </p:spPr>
+        <p:txBody>
+          <a:bodyPr wrap="square" rtlCol="0">
+            <a:spAutoFit/>
+          </a:bodyPr>
+          <a:lstStyle/>
+          <a:p>
+            <a:r>
+              <a:rPr lang="es-ES" sz="1200" dirty="0">
+                <a:latin typeface="Arial" panose="020B0604020202020204" pitchFamily="34" charset="0"/>
+                <a:cs typeface="Arial" panose="020B0604020202020204" pitchFamily="34" charset="0"/>
+              </a:rPr>
+              <a:t>Como se muestra en la gráfica de pérdidas en función del radio de curvatura (R), se obtiene un radio mínimo seguro de aproximadamente 35 </a:t>
+            </a:r>
+            <a:r>
+              <a:rPr lang="es-ES" sz="1200" dirty="0" err="1">
+                <a:latin typeface="Arial" panose="020B0604020202020204" pitchFamily="34" charset="0"/>
+                <a:cs typeface="Arial" panose="020B0604020202020204" pitchFamily="34" charset="0"/>
+              </a:rPr>
+              <a:t>um</a:t>
+            </a:r>
+            <a:r>
+              <a:rPr lang="es-ES" sz="1200" dirty="0">
+                <a:latin typeface="Arial" panose="020B0604020202020204" pitchFamily="34" charset="0"/>
+                <a:cs typeface="Arial" panose="020B0604020202020204" pitchFamily="34" charset="0"/>
+              </a:rPr>
+              <a:t> al considerar seguras unas pérdidas de 0.1 dB/90°. A partir de este valor, las pérdidas por </a:t>
+            </a:r>
+            <a:r>
+              <a:rPr lang="es-ES" sz="1200" dirty="0" err="1">
+                <a:latin typeface="Arial" panose="020B0604020202020204" pitchFamily="34" charset="0"/>
+                <a:cs typeface="Arial" panose="020B0604020202020204" pitchFamily="34" charset="0"/>
+              </a:rPr>
+              <a:t>mismatch</a:t>
+            </a:r>
+            <a:r>
+              <a:rPr lang="es-ES" sz="1200" dirty="0">
+                <a:latin typeface="Arial" panose="020B0604020202020204" pitchFamily="34" charset="0"/>
+                <a:cs typeface="Arial" panose="020B0604020202020204" pitchFamily="34" charset="0"/>
+              </a:rPr>
+              <a:t> disminuyen a medida que aumenta R, mientras que las pérdidas de propagación aumentan, aunque las pérdidas totales se mantienen dentro del rango considerado seguro. Este comportamiento se debe a que, al incrementarse R, la guía se aproxima progresivamente a una guía recta.</a:t>
+            </a:r>
+          </a:p>
+          <a:p>
+            <a:endParaRPr lang="es-ES" sz="1200" dirty="0">
+              <a:latin typeface="Arial" panose="020B0604020202020204" pitchFamily="34" charset="0"/>
+              <a:cs typeface="Arial" panose="020B0604020202020204" pitchFamily="34" charset="0"/>
+            </a:endParaRPr>
+          </a:p>
+          <a:p>
+            <a:r>
+              <a:rPr lang="es-ES" sz="1200" dirty="0">
+                <a:latin typeface="Arial" panose="020B0604020202020204" pitchFamily="34" charset="0"/>
+                <a:cs typeface="Arial" panose="020B0604020202020204" pitchFamily="34" charset="0"/>
+              </a:rPr>
+              <a:t>Por esta misma razón, al aumentar R, el índice efectivo tiende a 1.605, que es el valor correspondiente al de la guía recta.</a:t>
+            </a:r>
+          </a:p>
+        </p:txBody>
+      </p:sp>
+      <p:sp>
+        <p:nvSpPr>
+          <p:cNvPr id="7" name="Rectángulo 6">
+            <a:extLst>
+              <a:ext uri="{FF2B5EF4-FFF2-40B4-BE49-F238E27FC236}">
+                <a16:creationId xmlns:a16="http://schemas.microsoft.com/office/drawing/2014/main" id="{B5FE8755-B0BF-14B7-64E6-4BBB2560B9A6}"/>
+              </a:ext>
+            </a:extLst>
+          </p:cNvPr>
+          <p:cNvSpPr/>
+          <p:nvPr/>
+        </p:nvSpPr>
+        <p:spPr>
+          <a:xfrm>
+            <a:off x="609441" y="1418373"/>
+            <a:ext cx="5484812" cy="3306028"/>
+          </a:xfrm>
+          <a:prstGeom prst="rect">
+            <a:avLst/>
+          </a:prstGeom>
+          <a:noFill/>
+          <a:ln w="28575">
+            <a:solidFill>
+              <a:srgbClr val="E0700D"/>
+            </a:solidFill>
+          </a:ln>
+        </p:spPr>
+        <p:style>
+          <a:lnRef idx="2">
+            <a:schemeClr val="accent1">
+              <a:shade val="15000"/>
+            </a:schemeClr>
+          </a:lnRef>
+          <a:fillRef idx="1">
+            <a:schemeClr val="accent1"/>
+          </a:fillRef>
+          <a:effectRef idx="0">
+            <a:schemeClr val="accent1"/>
+          </a:effectRef>
+          <a:fontRef idx="minor">
+            <a:schemeClr val="lt1"/>
+          </a:fontRef>
+        </p:style>
+        <p:txBody>
+          <a:bodyPr rtlCol="0" anchor="ctr"/>
+          <a:lstStyle/>
+          <a:p>
+            <a:pPr algn="ctr"/>
+            <a:endParaRPr lang="en-US"/>
+          </a:p>
+        </p:txBody>
+      </p:sp>
+      <p:pic>
+        <p:nvPicPr>
+          <p:cNvPr id="9" name="Imagen 8">
+            <a:extLst>
+              <a:ext uri="{FF2B5EF4-FFF2-40B4-BE49-F238E27FC236}">
+                <a16:creationId xmlns:a16="http://schemas.microsoft.com/office/drawing/2014/main" id="{F8D6361A-60D6-D762-4EEC-7D641561139F}"/>
+              </a:ext>
+            </a:extLst>
+          </p:cNvPr>
+          <p:cNvPicPr>
+            <a:picLocks noChangeAspect="1"/>
+          </p:cNvPicPr>
+          <p:nvPr/>
+        </p:nvPicPr>
+        <p:blipFill>
+          <a:blip r:embed="rId5">
+            <a:extLst>
+              <a:ext uri="{28A0092B-C50C-407E-A947-70E740481C1C}">
+                <a14:useLocalDpi xmlns:a14="http://schemas.microsoft.com/office/drawing/2010/main" val="0"/>
+              </a:ext>
+            </a:extLst>
+          </a:blip>
+          <a:srcRect/>
+          <a:stretch/>
+        </p:blipFill>
+        <p:spPr>
+          <a:xfrm>
+            <a:off x="1370647" y="1538730"/>
+            <a:ext cx="3962400" cy="3130020"/>
+          </a:xfrm>
+          <a:prstGeom prst="rect">
+            <a:avLst/>
+          </a:prstGeom>
+        </p:spPr>
+      </p:pic>
+      <p:pic>
+        <p:nvPicPr>
+          <p:cNvPr id="11" name="Imagen 10">
+            <a:extLst>
+              <a:ext uri="{FF2B5EF4-FFF2-40B4-BE49-F238E27FC236}">
+                <a16:creationId xmlns:a16="http://schemas.microsoft.com/office/drawing/2014/main" id="{E06F18D7-4C12-4E46-4877-EE4E7B6B5983}"/>
+              </a:ext>
+            </a:extLst>
+          </p:cNvPr>
+          <p:cNvPicPr>
+            <a:picLocks noChangeAspect="1"/>
+          </p:cNvPicPr>
+          <p:nvPr/>
+        </p:nvPicPr>
+        <p:blipFill>
+          <a:blip r:embed="rId6"/>
+          <a:stretch>
+            <a:fillRect/>
+          </a:stretch>
+        </p:blipFill>
+        <p:spPr>
+          <a:xfrm>
+            <a:off x="7084512" y="1582601"/>
+            <a:ext cx="3964990" cy="3042277"/>
+          </a:xfrm>
+          <a:prstGeom prst="rect">
+            <a:avLst/>
+          </a:prstGeom>
+        </p:spPr>
+      </p:pic>
+      <p:sp>
+        <p:nvSpPr>
+          <p:cNvPr id="6" name="Rectángulo 5">
+            <a:extLst>
+              <a:ext uri="{FF2B5EF4-FFF2-40B4-BE49-F238E27FC236}">
+                <a16:creationId xmlns:a16="http://schemas.microsoft.com/office/drawing/2014/main" id="{3648DE4D-6003-93D7-5F17-295114C242BF}"/>
+              </a:ext>
+            </a:extLst>
+          </p:cNvPr>
+          <p:cNvSpPr/>
+          <p:nvPr/>
+        </p:nvSpPr>
+        <p:spPr>
+          <a:xfrm>
+            <a:off x="6324601" y="1418373"/>
+            <a:ext cx="5484812" cy="3306028"/>
+          </a:xfrm>
+          <a:prstGeom prst="rect">
+            <a:avLst/>
+          </a:prstGeom>
+          <a:noFill/>
+          <a:ln w="28575">
+            <a:solidFill>
+              <a:srgbClr val="E0700D"/>
+            </a:solidFill>
+          </a:ln>
+        </p:spPr>
+        <p:style>
+          <a:lnRef idx="2">
+            <a:schemeClr val="accent1">
+              <a:shade val="15000"/>
+            </a:schemeClr>
+          </a:lnRef>
+          <a:fillRef idx="1">
+            <a:schemeClr val="accent1"/>
+          </a:fillRef>
+          <a:effectRef idx="0">
+            <a:schemeClr val="accent1"/>
+          </a:effectRef>
+          <a:fontRef idx="minor">
+            <a:schemeClr val="lt1"/>
+          </a:fontRef>
+        </p:style>
+        <p:txBody>
+          <a:bodyPr rtlCol="0" anchor="ctr"/>
+          <a:lstStyle/>
+          <a:p>
+            <a:pPr algn="ctr"/>
+            <a:endParaRPr lang="en-US"/>
+          </a:p>
+        </p:txBody>
+      </p:sp>
+    </p:spTree>
+    <p:extLst>
+      <p:ext uri="{BB962C8B-B14F-4D97-AF65-F5344CB8AC3E}">
+        <p14:creationId xmlns:p14="http://schemas.microsoft.com/office/powerpoint/2010/main" val="3660438245"/>
       </p:ext>
     </p:extLst>
   </p:cSld>

--- a/LabBook_10.pptx
+++ b/LabBook_10.pptx
@@ -151,32 +151,6 @@
 </p188:authorLst>
 </file>
 
-<file path=ppt/comments/modernComment_12E_354CFDD7.xml><?xml version="1.0" encoding="utf-8"?>
-<p188:cmLst xmlns:a="http://schemas.openxmlformats.org/drawingml/2006/main" xmlns:r="http://schemas.openxmlformats.org/officeDocument/2006/relationships" xmlns:p188="http://schemas.microsoft.com/office/powerpoint/2018/8/main">
-  <p188:cm id="{11B7B04A-F874-4819-87F0-EEA57F61C162}" authorId="{D74DEC91-EE70-822B-0F23-319E662BA817}" created="2026-03-08T17:07:03.207">
-    <ac:txMkLst xmlns:ac="http://schemas.microsoft.com/office/drawing/2013/main/command">
-      <pc:docMk xmlns:pc="http://schemas.microsoft.com/office/powerpoint/2013/main/command"/>
-      <pc:sldMk xmlns:pc="http://schemas.microsoft.com/office/powerpoint/2013/main/command" cId="894238167" sldId="302"/>
-      <ac:spMk id="2" creationId="{6A2291EA-A955-D9A9-3AA1-672467A8E219}"/>
-      <ac:txMk cp="331" len="9">
-        <ac:context len="341" hash="2103900974"/>
-      </ac:txMk>
-    </ac:txMkLst>
-    <p188:pos x="8298889" y="635493"/>
-    <p188:txBody>
-      <a:bodyPr/>
-      <a:lstStyle/>
-      <a:p>
-        <a:r>
-          <a:rPr lang="es-ES"/>
-          <a:t>Brujeria en 0.9um</a:t>
-        </a:r>
-      </a:p>
-    </p188:txBody>
-  </p188:cm>
-</p188:cmLst>
-</file>
-
 <file path=ppt/handoutMasters/handoutMaster1.xml><?xml version="1.0" encoding="utf-8"?>
 <p:handoutMaster xmlns:a="http://schemas.openxmlformats.org/drawingml/2006/main" xmlns:r="http://schemas.openxmlformats.org/officeDocument/2006/relationships" xmlns:p="http://schemas.openxmlformats.org/presentationml/2006/main">
   <p:cSld>
@@ -271,7 +245,7 @@
           <a:p>
             <a:fld id="{8438F8DC-35B0-48E6-A86E-42F1F08DD00F}" type="datetimeFigureOut">
               <a:rPr lang="es-ES" smtClean="0"/>
-              <a:t>08/03/2026</a:t>
+              <a:t>12/03/2026</a:t>
             </a:fld>
             <a:endParaRPr lang="es-ES"/>
           </a:p>
@@ -448,7 +422,7 @@
           <a:p>
             <a:fld id="{FACBDC12-F39B-4B97-8F4D-6734F9D366FF}" type="datetimeFigureOut">
               <a:rPr lang="es-ES" smtClean="0"/>
-              <a:t>08/03/2026</a:t>
+              <a:t>12/03/2026</a:t>
             </a:fld>
             <a:endParaRPr lang="es-ES"/>
           </a:p>
@@ -4131,10 +4105,10 @@
           <p:nvPr/>
         </p:nvPicPr>
         <p:blipFill>
-          <a:blip r:embed="rId4">
+          <a:blip r:embed="rId3">
             <a:extLst>
               <a:ext uri="{96DAC541-7B7A-43D3-8B79-37D633B846F1}">
-                <asvg:svgBlip xmlns:asvg="http://schemas.microsoft.com/office/drawing/2016/SVG/main" r:embed="rId5"/>
+                <asvg:svgBlip xmlns:asvg="http://schemas.microsoft.com/office/drawing/2016/SVG/main" r:embed="rId4"/>
               </a:ext>
             </a:extLst>
           </a:blip>
@@ -4229,8 +4203,8 @@
         </p:nvSpPr>
         <p:spPr>
           <a:xfrm>
-            <a:off x="609441" y="4860334"/>
-            <a:ext cx="11199971" cy="830997"/>
+            <a:off x="615192" y="4733532"/>
+            <a:ext cx="11199971" cy="1569660"/>
           </a:xfrm>
           <a:prstGeom prst="rect">
             <a:avLst/>
@@ -4286,7 +4260,22 @@
                 <a:latin typeface="Arial" panose="020B0604020202020204" pitchFamily="34" charset="0"/>
                 <a:cs typeface="Arial" panose="020B0604020202020204" pitchFamily="34" charset="0"/>
               </a:rPr>
-              <a:t> la guía es monomodo, propagándose únicamente los modos TE0 y TM0. A partir de este valor la guía pasa a ser multimodo, comenzando a propagarse el modo TE1, y para anchuras superiores a 0.6 </a:t>
+              <a:t> la guía es monomodo, ya que únicamente se propagan los modos TE0 y TM0. A partir de este valor, la guía pasa a ser multimodo, comenzando a propagarse el modo TE1.</a:t>
+            </a:r>
+          </a:p>
+          <a:p>
+            <a:endParaRPr lang="es-ES" sz="1200" dirty="0">
+              <a:latin typeface="Arial" panose="020B0604020202020204" pitchFamily="34" charset="0"/>
+              <a:cs typeface="Arial" panose="020B0604020202020204" pitchFamily="34" charset="0"/>
+            </a:endParaRPr>
+          </a:p>
+          <a:p>
+            <a:r>
+              <a:rPr lang="es-ES" sz="1200" dirty="0">
+                <a:latin typeface="Arial" panose="020B0604020202020204" pitchFamily="34" charset="0"/>
+                <a:cs typeface="Arial" panose="020B0604020202020204" pitchFamily="34" charset="0"/>
+              </a:rPr>
+              <a:t>Cuando la anchura supera 0.6 </a:t>
             </a:r>
             <a:r>
               <a:rPr lang="es-ES" sz="1200" dirty="0" err="1">
@@ -4300,7 +4289,21 @@
                 <a:latin typeface="Arial" panose="020B0604020202020204" pitchFamily="34" charset="0"/>
                 <a:cs typeface="Arial" panose="020B0604020202020204" pitchFamily="34" charset="0"/>
               </a:rPr>
-              <a:t> aparece también el modo TE2.</a:t>
+              <a:t>, aparece también el modo TM1. Además, a partir de 0.9 </a:t>
+            </a:r>
+            <a:r>
+              <a:rPr lang="es-ES" sz="1200" dirty="0" err="1">
+                <a:latin typeface="Arial" panose="020B0604020202020204" pitchFamily="34" charset="0"/>
+                <a:cs typeface="Arial" panose="020B0604020202020204" pitchFamily="34" charset="0"/>
+              </a:rPr>
+              <a:t>um</a:t>
+            </a:r>
+            <a:r>
+              <a:rPr lang="es-ES" sz="1200" dirty="0">
+                <a:latin typeface="Arial" panose="020B0604020202020204" pitchFamily="34" charset="0"/>
+                <a:cs typeface="Arial" panose="020B0604020202020204" pitchFamily="34" charset="0"/>
+              </a:rPr>
+              <a:t> se observa el modo TE2. Esto ocurre porque el índice efectivo del modo TE2 empieza a tener un valor mayor que TM1 y debido a que el número de modos que se muestran está limitado a cuatro, el TM1 deja de visualizarse y en su lugar aparece el TE2.</a:t>
             </a:r>
           </a:p>
         </p:txBody>
@@ -4372,7 +4375,7 @@
           <p:nvPr/>
         </p:nvPicPr>
         <p:blipFill>
-          <a:blip r:embed="rId6"/>
+          <a:blip r:embed="rId5"/>
           <a:stretch>
             <a:fillRect/>
           </a:stretch>
@@ -4397,11 +4400,6 @@
   <p:clrMapOvr>
     <a:masterClrMapping/>
   </p:clrMapOvr>
-  <p:extLst>
-    <p:ext uri="{6950BFC3-D8DA-4A85-94F7-54DA5524770B}">
-      <p188:commentRel xmlns:p188="http://schemas.microsoft.com/office/powerpoint/2018/8/main" r:id="rId3"/>
-    </p:ext>
-  </p:extLst>
 </p:sld>
 </file>
 
